--- a/slides/C24_Métricas_de_Classificação.pptx
+++ b/slides/C24_Métricas_de_Classificação.pptx
@@ -5,10 +5,10 @@
     <p:sldMasterId id="2147483648" r:id="rId1"/>
   </p:sldMasterIdLst>
   <p:notesMasterIdLst>
-    <p:notesMasterId r:id="rId30"/>
+    <p:notesMasterId r:id="rId26"/>
   </p:notesMasterIdLst>
   <p:handoutMasterIdLst>
-    <p:handoutMasterId r:id="rId31"/>
+    <p:handoutMasterId r:id="rId27"/>
   </p:handoutMasterIdLst>
   <p:sldIdLst>
     <p:sldId id="256" r:id="rId2"/>
@@ -32,13 +32,9 @@
     <p:sldId id="332" r:id="rId20"/>
     <p:sldId id="333" r:id="rId21"/>
     <p:sldId id="334" r:id="rId22"/>
-    <p:sldId id="336" r:id="rId23"/>
-    <p:sldId id="337" r:id="rId24"/>
-    <p:sldId id="338" r:id="rId25"/>
-    <p:sldId id="339" r:id="rId26"/>
-    <p:sldId id="340" r:id="rId27"/>
-    <p:sldId id="341" r:id="rId28"/>
-    <p:sldId id="342" r:id="rId29"/>
+    <p:sldId id="457" r:id="rId23"/>
+    <p:sldId id="336" r:id="rId24"/>
+    <p:sldId id="337" r:id="rId25"/>
   </p:sldIdLst>
   <p:sldSz cx="12192000" cy="6858000"/>
   <p:notesSz cx="7315200" cy="9601200"/>
@@ -302,7 +298,7 @@
           <a:p>
             <a:fld id="{144F1436-6906-4D93-B7A2-786C327BFA14}" type="datetimeFigureOut">
               <a:rPr lang="nl-BE" smtClean="0"/>
-              <a:t>22/02/2026</a:t>
+              <a:t>27/02/2026</a:t>
             </a:fld>
             <a:endParaRPr lang="nl-BE"/>
           </a:p>
@@ -368,7 +364,7 @@
           <a:p>
             <a:fld id="{F7E56D9B-79AD-444A-AFED-DEC23408F8B4}" type="slidenum">
               <a:rPr lang="nl-BE" smtClean="0"/>
-              <a:t>‹nº›</a:t>
+              <a:t>‹#›</a:t>
             </a:fld>
             <a:endParaRPr lang="nl-BE"/>
           </a:p>
@@ -467,7 +463,7 @@
           <a:p>
             <a:fld id="{AA8CD09E-2914-4F47-B6C1-51B2C31814C9}" type="datetimeFigureOut">
               <a:rPr lang="pt-BR" smtClean="0"/>
-              <a:t>22/02/2026</a:t>
+              <a:t>27/02/2026</a:t>
             </a:fld>
             <a:endParaRPr lang="pt-BR"/>
           </a:p>
@@ -625,7 +621,7 @@
           <a:p>
             <a:fld id="{6FC8D850-966F-45A6-8DE7-15B891E7D40D}" type="slidenum">
               <a:rPr lang="pt-BR" smtClean="0"/>
-              <a:t>‹nº›</a:t>
+              <a:t>‹#›</a:t>
             </a:fld>
             <a:endParaRPr lang="pt-BR"/>
           </a:p>
@@ -1973,130 +1969,12 @@
             </a:pPr>
             <a:r>
               <a:rPr lang="pt-BR" dirty="0"/>
-              <a:t>https://colab.research.google.com/github/zz4fap/tp557-iot-ml/blob/master/examples/Classification_report.ipynb</a:t>
+              <a:t>https://colab.research.google.com/github/zz4fap/c24_inteligencia_artificial/blob/master/</a:t>
             </a:r>
-          </a:p>
-          <a:p>
-            <a:pPr marL="0" marR="0" lvl="0" indent="0" algn="l" defTabSz="914400" rtl="0" eaLnBrk="1" fontAlgn="auto" latinLnBrk="0" hangingPunct="1">
-              <a:lnSpc>
-                <a:spcPct val="100000"/>
-              </a:lnSpc>
-              <a:spcBef>
-                <a:spcPts val="0"/>
-              </a:spcBef>
-              <a:spcAft>
-                <a:spcPts val="0"/>
-              </a:spcAft>
-              <a:buClrTx/>
-              <a:buSzTx/>
-              <a:buFontTx/>
-              <a:buNone/>
-              <a:tabLst/>
-              <a:defRPr/>
-            </a:pPr>
-            <a:endParaRPr lang="pt-BR" dirty="0"/>
-          </a:p>
-          <a:p>
-            <a:pPr marL="0" marR="0" lvl="0" indent="0" algn="l" defTabSz="914400" rtl="0" eaLnBrk="1" fontAlgn="auto" latinLnBrk="0" hangingPunct="1">
-              <a:lnSpc>
-                <a:spcPct val="100000"/>
-              </a:lnSpc>
-              <a:spcBef>
-                <a:spcPts val="0"/>
-              </a:spcBef>
-              <a:spcAft>
-                <a:spcPts val="0"/>
-              </a:spcAft>
-              <a:buClrTx/>
-              <a:buSzTx/>
-              <a:buFontTx/>
-              <a:buNone/>
-              <a:tabLst/>
-              <a:defRPr/>
-            </a:pPr>
-            <a:endParaRPr lang="pt-BR" dirty="0"/>
-          </a:p>
-          <a:p>
-            <a:pPr marL="0" marR="0" lvl="0" indent="0" algn="l" defTabSz="914400" rtl="0" eaLnBrk="1" fontAlgn="auto" latinLnBrk="0" hangingPunct="1">
-              <a:lnSpc>
-                <a:spcPct val="100000"/>
-              </a:lnSpc>
-              <a:spcBef>
-                <a:spcPts val="0"/>
-              </a:spcBef>
-              <a:spcAft>
-                <a:spcPts val="0"/>
-              </a:spcAft>
-              <a:buClrTx/>
-              <a:buSzTx/>
-              <a:buFontTx/>
-              <a:buNone/>
-              <a:tabLst/>
-              <a:defRPr/>
-            </a:pPr>
             <a:r>
-              <a:rPr lang="pt-BR" dirty="0"/>
-              <a:t>https://github.com/zz4fap/tp557-iot-ml/blob/main/examples/Classification_report.ipynb</a:t>
+              <a:rPr lang="pt-BR"/>
+              <a:t>notebooks/</a:t>
             </a:r>
-          </a:p>
-          <a:p>
-            <a:pPr marL="0" marR="0" lvl="0" indent="0" algn="l" defTabSz="914400" rtl="0" eaLnBrk="1" fontAlgn="auto" latinLnBrk="0" hangingPunct="1">
-              <a:lnSpc>
-                <a:spcPct val="100000"/>
-              </a:lnSpc>
-              <a:spcBef>
-                <a:spcPts val="0"/>
-              </a:spcBef>
-              <a:spcAft>
-                <a:spcPts val="0"/>
-              </a:spcAft>
-              <a:buClrTx/>
-              <a:buSzTx/>
-              <a:buFontTx/>
-              <a:buNone/>
-              <a:tabLst/>
-              <a:defRPr/>
-            </a:pPr>
-            <a:endParaRPr lang="pt-BR" dirty="0"/>
-          </a:p>
-          <a:p>
-            <a:pPr marL="0" marR="0" lvl="0" indent="0" algn="l" defTabSz="914400" rtl="0" eaLnBrk="1" fontAlgn="auto" latinLnBrk="0" hangingPunct="1">
-              <a:lnSpc>
-                <a:spcPct val="100000"/>
-              </a:lnSpc>
-              <a:spcBef>
-                <a:spcPts val="0"/>
-              </a:spcBef>
-              <a:spcAft>
-                <a:spcPts val="0"/>
-              </a:spcAft>
-              <a:buClrTx/>
-              <a:buSzTx/>
-              <a:buFontTx/>
-              <a:buNone/>
-              <a:tabLst/>
-              <a:defRPr/>
-            </a:pPr>
-            <a:endParaRPr lang="pt-BR" dirty="0"/>
-          </a:p>
-          <a:p>
-            <a:pPr marL="0" marR="0" lvl="0" indent="0" algn="l" defTabSz="914400" rtl="0" eaLnBrk="1" fontAlgn="auto" latinLnBrk="0" hangingPunct="1">
-              <a:lnSpc>
-                <a:spcPct val="100000"/>
-              </a:lnSpc>
-              <a:spcBef>
-                <a:spcPts val="0"/>
-              </a:spcBef>
-              <a:spcAft>
-                <a:spcPts val="0"/>
-              </a:spcAft>
-              <a:buClrTx/>
-              <a:buSzTx/>
-              <a:buFontTx/>
-              <a:buNone/>
-              <a:tabLst/>
-              <a:defRPr/>
-            </a:pPr>
             <a:endParaRPr lang="pt-BR" dirty="0"/>
           </a:p>
         </p:txBody>
@@ -2159,7 +2037,7 @@
           <p:cNvPr id="2" name="Título 1">
             <a:extLst>
               <a:ext uri="{FF2B5EF4-FFF2-40B4-BE49-F238E27FC236}">
-                <a16:creationId xmlns="" xmlns:a16="http://schemas.microsoft.com/office/drawing/2014/main" id="{1DB9B4FF-B06E-403C-A326-BDC64D8FF94E}"/>
+                <a16:creationId xmlns:a16="http://schemas.microsoft.com/office/drawing/2014/main" id="{1DB9B4FF-B06E-403C-A326-BDC64D8FF94E}"/>
               </a:ext>
             </a:extLst>
           </p:cNvPr>
@@ -2196,7 +2074,7 @@
           <p:cNvPr id="3" name="Subtítulo 2">
             <a:extLst>
               <a:ext uri="{FF2B5EF4-FFF2-40B4-BE49-F238E27FC236}">
-                <a16:creationId xmlns="" xmlns:a16="http://schemas.microsoft.com/office/drawing/2014/main" id="{247BDFCE-746E-45BF-A319-4733D58D1632}"/>
+                <a16:creationId xmlns:a16="http://schemas.microsoft.com/office/drawing/2014/main" id="{247BDFCE-746E-45BF-A319-4733D58D1632}"/>
               </a:ext>
             </a:extLst>
           </p:cNvPr>
@@ -2266,7 +2144,7 @@
           <p:cNvPr id="4" name="Espaço Reservado para Data 3">
             <a:extLst>
               <a:ext uri="{FF2B5EF4-FFF2-40B4-BE49-F238E27FC236}">
-                <a16:creationId xmlns="" xmlns:a16="http://schemas.microsoft.com/office/drawing/2014/main" id="{9EDE2778-5372-4104-B96D-968184DA8288}"/>
+                <a16:creationId xmlns:a16="http://schemas.microsoft.com/office/drawing/2014/main" id="{9EDE2778-5372-4104-B96D-968184DA8288}"/>
               </a:ext>
             </a:extLst>
           </p:cNvPr>
@@ -2284,7 +2162,7 @@
           <a:p>
             <a:fld id="{63289F7E-B80B-496E-81B4-D396C37C9454}" type="datetimeFigureOut">
               <a:rPr lang="pt-BR" smtClean="0"/>
-              <a:t>22/02/2026</a:t>
+              <a:t>27/02/2026</a:t>
             </a:fld>
             <a:endParaRPr lang="pt-BR"/>
           </a:p>
@@ -2295,7 +2173,7 @@
           <p:cNvPr id="5" name="Espaço Reservado para Rodapé 4">
             <a:extLst>
               <a:ext uri="{FF2B5EF4-FFF2-40B4-BE49-F238E27FC236}">
-                <a16:creationId xmlns="" xmlns:a16="http://schemas.microsoft.com/office/drawing/2014/main" id="{C1DD0F41-C861-4051-988D-3024A37A4B93}"/>
+                <a16:creationId xmlns:a16="http://schemas.microsoft.com/office/drawing/2014/main" id="{C1DD0F41-C861-4051-988D-3024A37A4B93}"/>
               </a:ext>
             </a:extLst>
           </p:cNvPr>
@@ -2320,7 +2198,7 @@
           <p:cNvPr id="6" name="Espaço Reservado para Número de Slide 5">
             <a:extLst>
               <a:ext uri="{FF2B5EF4-FFF2-40B4-BE49-F238E27FC236}">
-                <a16:creationId xmlns="" xmlns:a16="http://schemas.microsoft.com/office/drawing/2014/main" id="{07E5967E-D980-431A-A5DB-3F0C5030A81E}"/>
+                <a16:creationId xmlns:a16="http://schemas.microsoft.com/office/drawing/2014/main" id="{07E5967E-D980-431A-A5DB-3F0C5030A81E}"/>
               </a:ext>
             </a:extLst>
           </p:cNvPr>
@@ -2338,7 +2216,7 @@
           <a:p>
             <a:fld id="{1A7E88B7-70CE-4035-AE73-13FA6FB985D4}" type="slidenum">
               <a:rPr lang="pt-BR" smtClean="0"/>
-              <a:t>‹nº›</a:t>
+              <a:t>‹#›</a:t>
             </a:fld>
             <a:endParaRPr lang="pt-BR"/>
           </a:p>
@@ -2379,7 +2257,7 @@
           <p:cNvPr id="2" name="Título 1">
             <a:extLst>
               <a:ext uri="{FF2B5EF4-FFF2-40B4-BE49-F238E27FC236}">
-                <a16:creationId xmlns="" xmlns:a16="http://schemas.microsoft.com/office/drawing/2014/main" id="{9036C49F-3E68-4175-81BA-3C3FEE44308A}"/>
+                <a16:creationId xmlns:a16="http://schemas.microsoft.com/office/drawing/2014/main" id="{9036C49F-3E68-4175-81BA-3C3FEE44308A}"/>
               </a:ext>
             </a:extLst>
           </p:cNvPr>
@@ -2407,7 +2285,7 @@
           <p:cNvPr id="3" name="Espaço Reservado para Texto Vertical 2">
             <a:extLst>
               <a:ext uri="{FF2B5EF4-FFF2-40B4-BE49-F238E27FC236}">
-                <a16:creationId xmlns="" xmlns:a16="http://schemas.microsoft.com/office/drawing/2014/main" id="{426FA736-3DD3-4D4E-B57B-BBE1D8F7D424}"/>
+                <a16:creationId xmlns:a16="http://schemas.microsoft.com/office/drawing/2014/main" id="{426FA736-3DD3-4D4E-B57B-BBE1D8F7D424}"/>
               </a:ext>
             </a:extLst>
           </p:cNvPr>
@@ -2464,7 +2342,7 @@
           <p:cNvPr id="4" name="Espaço Reservado para Data 3">
             <a:extLst>
               <a:ext uri="{FF2B5EF4-FFF2-40B4-BE49-F238E27FC236}">
-                <a16:creationId xmlns="" xmlns:a16="http://schemas.microsoft.com/office/drawing/2014/main" id="{99E8855C-D8FD-48F6-B14E-861E0DE4D915}"/>
+                <a16:creationId xmlns:a16="http://schemas.microsoft.com/office/drawing/2014/main" id="{99E8855C-D8FD-48F6-B14E-861E0DE4D915}"/>
               </a:ext>
             </a:extLst>
           </p:cNvPr>
@@ -2482,7 +2360,7 @@
           <a:p>
             <a:fld id="{63289F7E-B80B-496E-81B4-D396C37C9454}" type="datetimeFigureOut">
               <a:rPr lang="pt-BR" smtClean="0"/>
-              <a:t>22/02/2026</a:t>
+              <a:t>27/02/2026</a:t>
             </a:fld>
             <a:endParaRPr lang="pt-BR"/>
           </a:p>
@@ -2493,7 +2371,7 @@
           <p:cNvPr id="5" name="Espaço Reservado para Rodapé 4">
             <a:extLst>
               <a:ext uri="{FF2B5EF4-FFF2-40B4-BE49-F238E27FC236}">
-                <a16:creationId xmlns="" xmlns:a16="http://schemas.microsoft.com/office/drawing/2014/main" id="{97C0BB88-2F21-42A5-ACFF-83DA47F2D340}"/>
+                <a16:creationId xmlns:a16="http://schemas.microsoft.com/office/drawing/2014/main" id="{97C0BB88-2F21-42A5-ACFF-83DA47F2D340}"/>
               </a:ext>
             </a:extLst>
           </p:cNvPr>
@@ -2518,7 +2396,7 @@
           <p:cNvPr id="6" name="Espaço Reservado para Número de Slide 5">
             <a:extLst>
               <a:ext uri="{FF2B5EF4-FFF2-40B4-BE49-F238E27FC236}">
-                <a16:creationId xmlns="" xmlns:a16="http://schemas.microsoft.com/office/drawing/2014/main" id="{6CB462B3-1F22-4C05-B4B8-7A279FB7D5E9}"/>
+                <a16:creationId xmlns:a16="http://schemas.microsoft.com/office/drawing/2014/main" id="{6CB462B3-1F22-4C05-B4B8-7A279FB7D5E9}"/>
               </a:ext>
             </a:extLst>
           </p:cNvPr>
@@ -2536,7 +2414,7 @@
           <a:p>
             <a:fld id="{1A7E88B7-70CE-4035-AE73-13FA6FB985D4}" type="slidenum">
               <a:rPr lang="pt-BR" smtClean="0"/>
-              <a:t>‹nº›</a:t>
+              <a:t>‹#›</a:t>
             </a:fld>
             <a:endParaRPr lang="pt-BR"/>
           </a:p>
@@ -2577,7 +2455,7 @@
           <p:cNvPr id="2" name="Título Vertical 1">
             <a:extLst>
               <a:ext uri="{FF2B5EF4-FFF2-40B4-BE49-F238E27FC236}">
-                <a16:creationId xmlns="" xmlns:a16="http://schemas.microsoft.com/office/drawing/2014/main" id="{EAEAB728-701C-4207-A9D5-23FF45C60502}"/>
+                <a16:creationId xmlns:a16="http://schemas.microsoft.com/office/drawing/2014/main" id="{EAEAB728-701C-4207-A9D5-23FF45C60502}"/>
               </a:ext>
             </a:extLst>
           </p:cNvPr>
@@ -2610,7 +2488,7 @@
           <p:cNvPr id="3" name="Espaço Reservado para Texto Vertical 2">
             <a:extLst>
               <a:ext uri="{FF2B5EF4-FFF2-40B4-BE49-F238E27FC236}">
-                <a16:creationId xmlns="" xmlns:a16="http://schemas.microsoft.com/office/drawing/2014/main" id="{BA8C8CCF-7823-480A-9A19-0F664DD17E3B}"/>
+                <a16:creationId xmlns:a16="http://schemas.microsoft.com/office/drawing/2014/main" id="{BA8C8CCF-7823-480A-9A19-0F664DD17E3B}"/>
               </a:ext>
             </a:extLst>
           </p:cNvPr>
@@ -2672,7 +2550,7 @@
           <p:cNvPr id="4" name="Espaço Reservado para Data 3">
             <a:extLst>
               <a:ext uri="{FF2B5EF4-FFF2-40B4-BE49-F238E27FC236}">
-                <a16:creationId xmlns="" xmlns:a16="http://schemas.microsoft.com/office/drawing/2014/main" id="{721D5734-7B1F-425D-942F-6EB73344027C}"/>
+                <a16:creationId xmlns:a16="http://schemas.microsoft.com/office/drawing/2014/main" id="{721D5734-7B1F-425D-942F-6EB73344027C}"/>
               </a:ext>
             </a:extLst>
           </p:cNvPr>
@@ -2690,7 +2568,7 @@
           <a:p>
             <a:fld id="{63289F7E-B80B-496E-81B4-D396C37C9454}" type="datetimeFigureOut">
               <a:rPr lang="pt-BR" smtClean="0"/>
-              <a:t>22/02/2026</a:t>
+              <a:t>27/02/2026</a:t>
             </a:fld>
             <a:endParaRPr lang="pt-BR"/>
           </a:p>
@@ -2701,7 +2579,7 @@
           <p:cNvPr id="5" name="Espaço Reservado para Rodapé 4">
             <a:extLst>
               <a:ext uri="{FF2B5EF4-FFF2-40B4-BE49-F238E27FC236}">
-                <a16:creationId xmlns="" xmlns:a16="http://schemas.microsoft.com/office/drawing/2014/main" id="{1E1AAEAC-F08D-45FE-89EC-B1B349A868C9}"/>
+                <a16:creationId xmlns:a16="http://schemas.microsoft.com/office/drawing/2014/main" id="{1E1AAEAC-F08D-45FE-89EC-B1B349A868C9}"/>
               </a:ext>
             </a:extLst>
           </p:cNvPr>
@@ -2726,7 +2604,7 @@
           <p:cNvPr id="6" name="Espaço Reservado para Número de Slide 5">
             <a:extLst>
               <a:ext uri="{FF2B5EF4-FFF2-40B4-BE49-F238E27FC236}">
-                <a16:creationId xmlns="" xmlns:a16="http://schemas.microsoft.com/office/drawing/2014/main" id="{BAA44493-9911-47B2-87A6-C2141A972BC8}"/>
+                <a16:creationId xmlns:a16="http://schemas.microsoft.com/office/drawing/2014/main" id="{BAA44493-9911-47B2-87A6-C2141A972BC8}"/>
               </a:ext>
             </a:extLst>
           </p:cNvPr>
@@ -2744,7 +2622,7 @@
           <a:p>
             <a:fld id="{1A7E88B7-70CE-4035-AE73-13FA6FB985D4}" type="slidenum">
               <a:rPr lang="pt-BR" smtClean="0"/>
-              <a:t>‹nº›</a:t>
+              <a:t>‹#›</a:t>
             </a:fld>
             <a:endParaRPr lang="pt-BR"/>
           </a:p>
@@ -2785,7 +2663,7 @@
           <p:cNvPr id="2" name="Título 1">
             <a:extLst>
               <a:ext uri="{FF2B5EF4-FFF2-40B4-BE49-F238E27FC236}">
-                <a16:creationId xmlns="" xmlns:a16="http://schemas.microsoft.com/office/drawing/2014/main" id="{71BD44A5-8F21-4626-A01D-48A1C874B1D5}"/>
+                <a16:creationId xmlns:a16="http://schemas.microsoft.com/office/drawing/2014/main" id="{71BD44A5-8F21-4626-A01D-48A1C874B1D5}"/>
               </a:ext>
             </a:extLst>
           </p:cNvPr>
@@ -2813,7 +2691,7 @@
           <p:cNvPr id="3" name="Espaço Reservado para Conteúdo 2">
             <a:extLst>
               <a:ext uri="{FF2B5EF4-FFF2-40B4-BE49-F238E27FC236}">
-                <a16:creationId xmlns="" xmlns:a16="http://schemas.microsoft.com/office/drawing/2014/main" id="{B79E8085-65A9-48AA-951D-71D978BFF4ED}"/>
+                <a16:creationId xmlns:a16="http://schemas.microsoft.com/office/drawing/2014/main" id="{B79E8085-65A9-48AA-951D-71D978BFF4ED}"/>
               </a:ext>
             </a:extLst>
           </p:cNvPr>
@@ -2870,7 +2748,7 @@
           <p:cNvPr id="4" name="Espaço Reservado para Data 3">
             <a:extLst>
               <a:ext uri="{FF2B5EF4-FFF2-40B4-BE49-F238E27FC236}">
-                <a16:creationId xmlns="" xmlns:a16="http://schemas.microsoft.com/office/drawing/2014/main" id="{F05BE1AF-51EA-425D-B188-DE7BD675009F}"/>
+                <a16:creationId xmlns:a16="http://schemas.microsoft.com/office/drawing/2014/main" id="{F05BE1AF-51EA-425D-B188-DE7BD675009F}"/>
               </a:ext>
             </a:extLst>
           </p:cNvPr>
@@ -2888,7 +2766,7 @@
           <a:p>
             <a:fld id="{63289F7E-B80B-496E-81B4-D396C37C9454}" type="datetimeFigureOut">
               <a:rPr lang="pt-BR" smtClean="0"/>
-              <a:t>22/02/2026</a:t>
+              <a:t>27/02/2026</a:t>
             </a:fld>
             <a:endParaRPr lang="pt-BR"/>
           </a:p>
@@ -2899,7 +2777,7 @@
           <p:cNvPr id="5" name="Espaço Reservado para Rodapé 4">
             <a:extLst>
               <a:ext uri="{FF2B5EF4-FFF2-40B4-BE49-F238E27FC236}">
-                <a16:creationId xmlns="" xmlns:a16="http://schemas.microsoft.com/office/drawing/2014/main" id="{121BE632-29CF-4CB9-B365-C9EF38F89BE6}"/>
+                <a16:creationId xmlns:a16="http://schemas.microsoft.com/office/drawing/2014/main" id="{121BE632-29CF-4CB9-B365-C9EF38F89BE6}"/>
               </a:ext>
             </a:extLst>
           </p:cNvPr>
@@ -2924,7 +2802,7 @@
           <p:cNvPr id="6" name="Espaço Reservado para Número de Slide 5">
             <a:extLst>
               <a:ext uri="{FF2B5EF4-FFF2-40B4-BE49-F238E27FC236}">
-                <a16:creationId xmlns="" xmlns:a16="http://schemas.microsoft.com/office/drawing/2014/main" id="{60CF3DD1-9AEC-4A57-B461-4E4DD86FAC18}"/>
+                <a16:creationId xmlns:a16="http://schemas.microsoft.com/office/drawing/2014/main" id="{60CF3DD1-9AEC-4A57-B461-4E4DD86FAC18}"/>
               </a:ext>
             </a:extLst>
           </p:cNvPr>
@@ -2942,7 +2820,7 @@
           <a:p>
             <a:fld id="{1A7E88B7-70CE-4035-AE73-13FA6FB985D4}" type="slidenum">
               <a:rPr lang="pt-BR" smtClean="0"/>
-              <a:t>‹nº›</a:t>
+              <a:t>‹#›</a:t>
             </a:fld>
             <a:endParaRPr lang="pt-BR"/>
           </a:p>
@@ -2983,7 +2861,7 @@
           <p:cNvPr id="2" name="Título 1">
             <a:extLst>
               <a:ext uri="{FF2B5EF4-FFF2-40B4-BE49-F238E27FC236}">
-                <a16:creationId xmlns="" xmlns:a16="http://schemas.microsoft.com/office/drawing/2014/main" id="{34AB2FF0-A4D7-4E28-991D-FF26140D5988}"/>
+                <a16:creationId xmlns:a16="http://schemas.microsoft.com/office/drawing/2014/main" id="{34AB2FF0-A4D7-4E28-991D-FF26140D5988}"/>
               </a:ext>
             </a:extLst>
           </p:cNvPr>
@@ -3020,7 +2898,7 @@
           <p:cNvPr id="3" name="Espaço Reservado para Texto 2">
             <a:extLst>
               <a:ext uri="{FF2B5EF4-FFF2-40B4-BE49-F238E27FC236}">
-                <a16:creationId xmlns="" xmlns:a16="http://schemas.microsoft.com/office/drawing/2014/main" id="{E2AC45B0-4145-40DB-8E61-105461170604}"/>
+                <a16:creationId xmlns:a16="http://schemas.microsoft.com/office/drawing/2014/main" id="{E2AC45B0-4145-40DB-8E61-105461170604}"/>
               </a:ext>
             </a:extLst>
           </p:cNvPr>
@@ -3145,7 +3023,7 @@
           <p:cNvPr id="4" name="Espaço Reservado para Data 3">
             <a:extLst>
               <a:ext uri="{FF2B5EF4-FFF2-40B4-BE49-F238E27FC236}">
-                <a16:creationId xmlns="" xmlns:a16="http://schemas.microsoft.com/office/drawing/2014/main" id="{50F1D3FB-740A-4EBA-A309-2CE71D12ECFB}"/>
+                <a16:creationId xmlns:a16="http://schemas.microsoft.com/office/drawing/2014/main" id="{50F1D3FB-740A-4EBA-A309-2CE71D12ECFB}"/>
               </a:ext>
             </a:extLst>
           </p:cNvPr>
@@ -3163,7 +3041,7 @@
           <a:p>
             <a:fld id="{63289F7E-B80B-496E-81B4-D396C37C9454}" type="datetimeFigureOut">
               <a:rPr lang="pt-BR" smtClean="0"/>
-              <a:t>22/02/2026</a:t>
+              <a:t>27/02/2026</a:t>
             </a:fld>
             <a:endParaRPr lang="pt-BR"/>
           </a:p>
@@ -3174,7 +3052,7 @@
           <p:cNvPr id="5" name="Espaço Reservado para Rodapé 4">
             <a:extLst>
               <a:ext uri="{FF2B5EF4-FFF2-40B4-BE49-F238E27FC236}">
-                <a16:creationId xmlns="" xmlns:a16="http://schemas.microsoft.com/office/drawing/2014/main" id="{BDCAB18F-8715-4465-A940-F9C193A2ACE9}"/>
+                <a16:creationId xmlns:a16="http://schemas.microsoft.com/office/drawing/2014/main" id="{BDCAB18F-8715-4465-A940-F9C193A2ACE9}"/>
               </a:ext>
             </a:extLst>
           </p:cNvPr>
@@ -3199,7 +3077,7 @@
           <p:cNvPr id="6" name="Espaço Reservado para Número de Slide 5">
             <a:extLst>
               <a:ext uri="{FF2B5EF4-FFF2-40B4-BE49-F238E27FC236}">
-                <a16:creationId xmlns="" xmlns:a16="http://schemas.microsoft.com/office/drawing/2014/main" id="{353466C6-8248-429F-8056-FF040BF509EB}"/>
+                <a16:creationId xmlns:a16="http://schemas.microsoft.com/office/drawing/2014/main" id="{353466C6-8248-429F-8056-FF040BF509EB}"/>
               </a:ext>
             </a:extLst>
           </p:cNvPr>
@@ -3217,7 +3095,7 @@
           <a:p>
             <a:fld id="{1A7E88B7-70CE-4035-AE73-13FA6FB985D4}" type="slidenum">
               <a:rPr lang="pt-BR" smtClean="0"/>
-              <a:t>‹nº›</a:t>
+              <a:t>‹#›</a:t>
             </a:fld>
             <a:endParaRPr lang="pt-BR"/>
           </a:p>
@@ -3258,7 +3136,7 @@
           <p:cNvPr id="2" name="Título 1">
             <a:extLst>
               <a:ext uri="{FF2B5EF4-FFF2-40B4-BE49-F238E27FC236}">
-                <a16:creationId xmlns="" xmlns:a16="http://schemas.microsoft.com/office/drawing/2014/main" id="{BC7BB9F0-F14B-4A91-B2B7-35BC47FE4DE7}"/>
+                <a16:creationId xmlns:a16="http://schemas.microsoft.com/office/drawing/2014/main" id="{BC7BB9F0-F14B-4A91-B2B7-35BC47FE4DE7}"/>
               </a:ext>
             </a:extLst>
           </p:cNvPr>
@@ -3286,7 +3164,7 @@
           <p:cNvPr id="3" name="Espaço Reservado para Conteúdo 2">
             <a:extLst>
               <a:ext uri="{FF2B5EF4-FFF2-40B4-BE49-F238E27FC236}">
-                <a16:creationId xmlns="" xmlns:a16="http://schemas.microsoft.com/office/drawing/2014/main" id="{EC1FC1C4-73DA-47A6-8496-B0B457F7D39A}"/>
+                <a16:creationId xmlns:a16="http://schemas.microsoft.com/office/drawing/2014/main" id="{EC1FC1C4-73DA-47A6-8496-B0B457F7D39A}"/>
               </a:ext>
             </a:extLst>
           </p:cNvPr>
@@ -3348,7 +3226,7 @@
           <p:cNvPr id="4" name="Espaço Reservado para Conteúdo 3">
             <a:extLst>
               <a:ext uri="{FF2B5EF4-FFF2-40B4-BE49-F238E27FC236}">
-                <a16:creationId xmlns="" xmlns:a16="http://schemas.microsoft.com/office/drawing/2014/main" id="{E92F06A8-A449-4D92-9912-76873E529B38}"/>
+                <a16:creationId xmlns:a16="http://schemas.microsoft.com/office/drawing/2014/main" id="{E92F06A8-A449-4D92-9912-76873E529B38}"/>
               </a:ext>
             </a:extLst>
           </p:cNvPr>
@@ -3410,7 +3288,7 @@
           <p:cNvPr id="5" name="Espaço Reservado para Data 4">
             <a:extLst>
               <a:ext uri="{FF2B5EF4-FFF2-40B4-BE49-F238E27FC236}">
-                <a16:creationId xmlns="" xmlns:a16="http://schemas.microsoft.com/office/drawing/2014/main" id="{938070A4-BC2F-4D55-BD8D-DEAF11BB9EE9}"/>
+                <a16:creationId xmlns:a16="http://schemas.microsoft.com/office/drawing/2014/main" id="{938070A4-BC2F-4D55-BD8D-DEAF11BB9EE9}"/>
               </a:ext>
             </a:extLst>
           </p:cNvPr>
@@ -3428,7 +3306,7 @@
           <a:p>
             <a:fld id="{63289F7E-B80B-496E-81B4-D396C37C9454}" type="datetimeFigureOut">
               <a:rPr lang="pt-BR" smtClean="0"/>
-              <a:t>22/02/2026</a:t>
+              <a:t>27/02/2026</a:t>
             </a:fld>
             <a:endParaRPr lang="pt-BR"/>
           </a:p>
@@ -3439,7 +3317,7 @@
           <p:cNvPr id="6" name="Espaço Reservado para Rodapé 5">
             <a:extLst>
               <a:ext uri="{FF2B5EF4-FFF2-40B4-BE49-F238E27FC236}">
-                <a16:creationId xmlns="" xmlns:a16="http://schemas.microsoft.com/office/drawing/2014/main" id="{45CC2DB8-844A-465F-BA9A-7734C80C7F43}"/>
+                <a16:creationId xmlns:a16="http://schemas.microsoft.com/office/drawing/2014/main" id="{45CC2DB8-844A-465F-BA9A-7734C80C7F43}"/>
               </a:ext>
             </a:extLst>
           </p:cNvPr>
@@ -3464,7 +3342,7 @@
           <p:cNvPr id="7" name="Espaço Reservado para Número de Slide 6">
             <a:extLst>
               <a:ext uri="{FF2B5EF4-FFF2-40B4-BE49-F238E27FC236}">
-                <a16:creationId xmlns="" xmlns:a16="http://schemas.microsoft.com/office/drawing/2014/main" id="{4CC606A8-097B-4040-94E0-CD8C88280D8F}"/>
+                <a16:creationId xmlns:a16="http://schemas.microsoft.com/office/drawing/2014/main" id="{4CC606A8-097B-4040-94E0-CD8C88280D8F}"/>
               </a:ext>
             </a:extLst>
           </p:cNvPr>
@@ -3482,7 +3360,7 @@
           <a:p>
             <a:fld id="{1A7E88B7-70CE-4035-AE73-13FA6FB985D4}" type="slidenum">
               <a:rPr lang="pt-BR" smtClean="0"/>
-              <a:t>‹nº›</a:t>
+              <a:t>‹#›</a:t>
             </a:fld>
             <a:endParaRPr lang="pt-BR"/>
           </a:p>
@@ -3523,7 +3401,7 @@
           <p:cNvPr id="2" name="Título 1">
             <a:extLst>
               <a:ext uri="{FF2B5EF4-FFF2-40B4-BE49-F238E27FC236}">
-                <a16:creationId xmlns="" xmlns:a16="http://schemas.microsoft.com/office/drawing/2014/main" id="{76D66686-0143-4CB6-8C09-BA326F1E7ACA}"/>
+                <a16:creationId xmlns:a16="http://schemas.microsoft.com/office/drawing/2014/main" id="{76D66686-0143-4CB6-8C09-BA326F1E7ACA}"/>
               </a:ext>
             </a:extLst>
           </p:cNvPr>
@@ -3556,7 +3434,7 @@
           <p:cNvPr id="3" name="Espaço Reservado para Texto 2">
             <a:extLst>
               <a:ext uri="{FF2B5EF4-FFF2-40B4-BE49-F238E27FC236}">
-                <a16:creationId xmlns="" xmlns:a16="http://schemas.microsoft.com/office/drawing/2014/main" id="{0227AB85-F59E-4BCE-B846-4FA0992C2F23}"/>
+                <a16:creationId xmlns:a16="http://schemas.microsoft.com/office/drawing/2014/main" id="{0227AB85-F59E-4BCE-B846-4FA0992C2F23}"/>
               </a:ext>
             </a:extLst>
           </p:cNvPr>
@@ -3627,7 +3505,7 @@
           <p:cNvPr id="4" name="Espaço Reservado para Conteúdo 3">
             <a:extLst>
               <a:ext uri="{FF2B5EF4-FFF2-40B4-BE49-F238E27FC236}">
-                <a16:creationId xmlns="" xmlns:a16="http://schemas.microsoft.com/office/drawing/2014/main" id="{3373456C-7319-4D0A-827D-D29F6B083F5D}"/>
+                <a16:creationId xmlns:a16="http://schemas.microsoft.com/office/drawing/2014/main" id="{3373456C-7319-4D0A-827D-D29F6B083F5D}"/>
               </a:ext>
             </a:extLst>
           </p:cNvPr>
@@ -3689,7 +3567,7 @@
           <p:cNvPr id="5" name="Espaço Reservado para Texto 4">
             <a:extLst>
               <a:ext uri="{FF2B5EF4-FFF2-40B4-BE49-F238E27FC236}">
-                <a16:creationId xmlns="" xmlns:a16="http://schemas.microsoft.com/office/drawing/2014/main" id="{4CD109D0-2E83-4262-8029-A871CEC47406}"/>
+                <a16:creationId xmlns:a16="http://schemas.microsoft.com/office/drawing/2014/main" id="{4CD109D0-2E83-4262-8029-A871CEC47406}"/>
               </a:ext>
             </a:extLst>
           </p:cNvPr>
@@ -3760,7 +3638,7 @@
           <p:cNvPr id="6" name="Espaço Reservado para Conteúdo 5">
             <a:extLst>
               <a:ext uri="{FF2B5EF4-FFF2-40B4-BE49-F238E27FC236}">
-                <a16:creationId xmlns="" xmlns:a16="http://schemas.microsoft.com/office/drawing/2014/main" id="{AD706E3A-CFBB-4A6C-A65F-D0360A9E74FE}"/>
+                <a16:creationId xmlns:a16="http://schemas.microsoft.com/office/drawing/2014/main" id="{AD706E3A-CFBB-4A6C-A65F-D0360A9E74FE}"/>
               </a:ext>
             </a:extLst>
           </p:cNvPr>
@@ -3822,7 +3700,7 @@
           <p:cNvPr id="7" name="Espaço Reservado para Data 6">
             <a:extLst>
               <a:ext uri="{FF2B5EF4-FFF2-40B4-BE49-F238E27FC236}">
-                <a16:creationId xmlns="" xmlns:a16="http://schemas.microsoft.com/office/drawing/2014/main" id="{4172C0E5-5AF0-4805-BB51-443733CD2BD5}"/>
+                <a16:creationId xmlns:a16="http://schemas.microsoft.com/office/drawing/2014/main" id="{4172C0E5-5AF0-4805-BB51-443733CD2BD5}"/>
               </a:ext>
             </a:extLst>
           </p:cNvPr>
@@ -3840,7 +3718,7 @@
           <a:p>
             <a:fld id="{63289F7E-B80B-496E-81B4-D396C37C9454}" type="datetimeFigureOut">
               <a:rPr lang="pt-BR" smtClean="0"/>
-              <a:t>22/02/2026</a:t>
+              <a:t>27/02/2026</a:t>
             </a:fld>
             <a:endParaRPr lang="pt-BR"/>
           </a:p>
@@ -3851,7 +3729,7 @@
           <p:cNvPr id="8" name="Espaço Reservado para Rodapé 7">
             <a:extLst>
               <a:ext uri="{FF2B5EF4-FFF2-40B4-BE49-F238E27FC236}">
-                <a16:creationId xmlns="" xmlns:a16="http://schemas.microsoft.com/office/drawing/2014/main" id="{0E801648-156F-497E-99CF-797DF48051E1}"/>
+                <a16:creationId xmlns:a16="http://schemas.microsoft.com/office/drawing/2014/main" id="{0E801648-156F-497E-99CF-797DF48051E1}"/>
               </a:ext>
             </a:extLst>
           </p:cNvPr>
@@ -3876,7 +3754,7 @@
           <p:cNvPr id="9" name="Espaço Reservado para Número de Slide 8">
             <a:extLst>
               <a:ext uri="{FF2B5EF4-FFF2-40B4-BE49-F238E27FC236}">
-                <a16:creationId xmlns="" xmlns:a16="http://schemas.microsoft.com/office/drawing/2014/main" id="{EEE23D32-80E7-4796-A137-66BF842E4B53}"/>
+                <a16:creationId xmlns:a16="http://schemas.microsoft.com/office/drawing/2014/main" id="{EEE23D32-80E7-4796-A137-66BF842E4B53}"/>
               </a:ext>
             </a:extLst>
           </p:cNvPr>
@@ -3894,7 +3772,7 @@
           <a:p>
             <a:fld id="{1A7E88B7-70CE-4035-AE73-13FA6FB985D4}" type="slidenum">
               <a:rPr lang="pt-BR" smtClean="0"/>
-              <a:t>‹nº›</a:t>
+              <a:t>‹#›</a:t>
             </a:fld>
             <a:endParaRPr lang="pt-BR"/>
           </a:p>
@@ -3935,7 +3813,7 @@
           <p:cNvPr id="2" name="Título 1">
             <a:extLst>
               <a:ext uri="{FF2B5EF4-FFF2-40B4-BE49-F238E27FC236}">
-                <a16:creationId xmlns="" xmlns:a16="http://schemas.microsoft.com/office/drawing/2014/main" id="{2BCE2379-C78F-47E1-8CFC-B846E7AF148D}"/>
+                <a16:creationId xmlns:a16="http://schemas.microsoft.com/office/drawing/2014/main" id="{2BCE2379-C78F-47E1-8CFC-B846E7AF148D}"/>
               </a:ext>
             </a:extLst>
           </p:cNvPr>
@@ -3963,7 +3841,7 @@
           <p:cNvPr id="3" name="Espaço Reservado para Data 2">
             <a:extLst>
               <a:ext uri="{FF2B5EF4-FFF2-40B4-BE49-F238E27FC236}">
-                <a16:creationId xmlns="" xmlns:a16="http://schemas.microsoft.com/office/drawing/2014/main" id="{342600A9-7F92-4E22-9D94-E4717252A817}"/>
+                <a16:creationId xmlns:a16="http://schemas.microsoft.com/office/drawing/2014/main" id="{342600A9-7F92-4E22-9D94-E4717252A817}"/>
               </a:ext>
             </a:extLst>
           </p:cNvPr>
@@ -3981,7 +3859,7 @@
           <a:p>
             <a:fld id="{63289F7E-B80B-496E-81B4-D396C37C9454}" type="datetimeFigureOut">
               <a:rPr lang="pt-BR" smtClean="0"/>
-              <a:t>22/02/2026</a:t>
+              <a:t>27/02/2026</a:t>
             </a:fld>
             <a:endParaRPr lang="pt-BR"/>
           </a:p>
@@ -3992,7 +3870,7 @@
           <p:cNvPr id="4" name="Espaço Reservado para Rodapé 3">
             <a:extLst>
               <a:ext uri="{FF2B5EF4-FFF2-40B4-BE49-F238E27FC236}">
-                <a16:creationId xmlns="" xmlns:a16="http://schemas.microsoft.com/office/drawing/2014/main" id="{192E6BED-F546-40CC-A2DF-99CBA853654E}"/>
+                <a16:creationId xmlns:a16="http://schemas.microsoft.com/office/drawing/2014/main" id="{192E6BED-F546-40CC-A2DF-99CBA853654E}"/>
               </a:ext>
             </a:extLst>
           </p:cNvPr>
@@ -4017,7 +3895,7 @@
           <p:cNvPr id="5" name="Espaço Reservado para Número de Slide 4">
             <a:extLst>
               <a:ext uri="{FF2B5EF4-FFF2-40B4-BE49-F238E27FC236}">
-                <a16:creationId xmlns="" xmlns:a16="http://schemas.microsoft.com/office/drawing/2014/main" id="{6091CC40-A8C4-4063-80EB-CC5099621678}"/>
+                <a16:creationId xmlns:a16="http://schemas.microsoft.com/office/drawing/2014/main" id="{6091CC40-A8C4-4063-80EB-CC5099621678}"/>
               </a:ext>
             </a:extLst>
           </p:cNvPr>
@@ -4035,7 +3913,7 @@
           <a:p>
             <a:fld id="{1A7E88B7-70CE-4035-AE73-13FA6FB985D4}" type="slidenum">
               <a:rPr lang="pt-BR" smtClean="0"/>
-              <a:t>‹nº›</a:t>
+              <a:t>‹#›</a:t>
             </a:fld>
             <a:endParaRPr lang="pt-BR"/>
           </a:p>
@@ -4076,7 +3954,7 @@
           <p:cNvPr id="2" name="Espaço Reservado para Data 1">
             <a:extLst>
               <a:ext uri="{FF2B5EF4-FFF2-40B4-BE49-F238E27FC236}">
-                <a16:creationId xmlns="" xmlns:a16="http://schemas.microsoft.com/office/drawing/2014/main" id="{DD19515C-212C-4EAE-84A3-8FF4BC844F1B}"/>
+                <a16:creationId xmlns:a16="http://schemas.microsoft.com/office/drawing/2014/main" id="{DD19515C-212C-4EAE-84A3-8FF4BC844F1B}"/>
               </a:ext>
             </a:extLst>
           </p:cNvPr>
@@ -4094,7 +3972,7 @@
           <a:p>
             <a:fld id="{63289F7E-B80B-496E-81B4-D396C37C9454}" type="datetimeFigureOut">
               <a:rPr lang="pt-BR" smtClean="0"/>
-              <a:t>22/02/2026</a:t>
+              <a:t>27/02/2026</a:t>
             </a:fld>
             <a:endParaRPr lang="pt-BR"/>
           </a:p>
@@ -4105,7 +3983,7 @@
           <p:cNvPr id="3" name="Espaço Reservado para Rodapé 2">
             <a:extLst>
               <a:ext uri="{FF2B5EF4-FFF2-40B4-BE49-F238E27FC236}">
-                <a16:creationId xmlns="" xmlns:a16="http://schemas.microsoft.com/office/drawing/2014/main" id="{94D3D120-B3E8-4C96-861D-7A4F12F49B3A}"/>
+                <a16:creationId xmlns:a16="http://schemas.microsoft.com/office/drawing/2014/main" id="{94D3D120-B3E8-4C96-861D-7A4F12F49B3A}"/>
               </a:ext>
             </a:extLst>
           </p:cNvPr>
@@ -4130,7 +4008,7 @@
           <p:cNvPr id="4" name="Espaço Reservado para Número de Slide 3">
             <a:extLst>
               <a:ext uri="{FF2B5EF4-FFF2-40B4-BE49-F238E27FC236}">
-                <a16:creationId xmlns="" xmlns:a16="http://schemas.microsoft.com/office/drawing/2014/main" id="{42E49B68-FA1B-468B-9F17-D5C09243D454}"/>
+                <a16:creationId xmlns:a16="http://schemas.microsoft.com/office/drawing/2014/main" id="{42E49B68-FA1B-468B-9F17-D5C09243D454}"/>
               </a:ext>
             </a:extLst>
           </p:cNvPr>
@@ -4148,7 +4026,7 @@
           <a:p>
             <a:fld id="{1A7E88B7-70CE-4035-AE73-13FA6FB985D4}" type="slidenum">
               <a:rPr lang="pt-BR" smtClean="0"/>
-              <a:t>‹nº›</a:t>
+              <a:t>‹#›</a:t>
             </a:fld>
             <a:endParaRPr lang="pt-BR"/>
           </a:p>
@@ -4189,7 +4067,7 @@
           <p:cNvPr id="2" name="Título 1">
             <a:extLst>
               <a:ext uri="{FF2B5EF4-FFF2-40B4-BE49-F238E27FC236}">
-                <a16:creationId xmlns="" xmlns:a16="http://schemas.microsoft.com/office/drawing/2014/main" id="{1C17BCBE-A897-4319-85EC-D87909C24980}"/>
+                <a16:creationId xmlns:a16="http://schemas.microsoft.com/office/drawing/2014/main" id="{1C17BCBE-A897-4319-85EC-D87909C24980}"/>
               </a:ext>
             </a:extLst>
           </p:cNvPr>
@@ -4226,7 +4104,7 @@
           <p:cNvPr id="3" name="Espaço Reservado para Conteúdo 2">
             <a:extLst>
               <a:ext uri="{FF2B5EF4-FFF2-40B4-BE49-F238E27FC236}">
-                <a16:creationId xmlns="" xmlns:a16="http://schemas.microsoft.com/office/drawing/2014/main" id="{4226F885-0204-4913-868B-4B8B82576F17}"/>
+                <a16:creationId xmlns:a16="http://schemas.microsoft.com/office/drawing/2014/main" id="{4226F885-0204-4913-868B-4B8B82576F17}"/>
               </a:ext>
             </a:extLst>
           </p:cNvPr>
@@ -4316,7 +4194,7 @@
           <p:cNvPr id="4" name="Espaço Reservado para Texto 3">
             <a:extLst>
               <a:ext uri="{FF2B5EF4-FFF2-40B4-BE49-F238E27FC236}">
-                <a16:creationId xmlns="" xmlns:a16="http://schemas.microsoft.com/office/drawing/2014/main" id="{00F9F784-A858-441B-8AB5-697098141751}"/>
+                <a16:creationId xmlns:a16="http://schemas.microsoft.com/office/drawing/2014/main" id="{00F9F784-A858-441B-8AB5-697098141751}"/>
               </a:ext>
             </a:extLst>
           </p:cNvPr>
@@ -4387,7 +4265,7 @@
           <p:cNvPr id="5" name="Espaço Reservado para Data 4">
             <a:extLst>
               <a:ext uri="{FF2B5EF4-FFF2-40B4-BE49-F238E27FC236}">
-                <a16:creationId xmlns="" xmlns:a16="http://schemas.microsoft.com/office/drawing/2014/main" id="{A4DC363A-5000-472E-8B17-02E7DCB8840A}"/>
+                <a16:creationId xmlns:a16="http://schemas.microsoft.com/office/drawing/2014/main" id="{A4DC363A-5000-472E-8B17-02E7DCB8840A}"/>
               </a:ext>
             </a:extLst>
           </p:cNvPr>
@@ -4405,7 +4283,7 @@
           <a:p>
             <a:fld id="{63289F7E-B80B-496E-81B4-D396C37C9454}" type="datetimeFigureOut">
               <a:rPr lang="pt-BR" smtClean="0"/>
-              <a:t>22/02/2026</a:t>
+              <a:t>27/02/2026</a:t>
             </a:fld>
             <a:endParaRPr lang="pt-BR"/>
           </a:p>
@@ -4416,7 +4294,7 @@
           <p:cNvPr id="6" name="Espaço Reservado para Rodapé 5">
             <a:extLst>
               <a:ext uri="{FF2B5EF4-FFF2-40B4-BE49-F238E27FC236}">
-                <a16:creationId xmlns="" xmlns:a16="http://schemas.microsoft.com/office/drawing/2014/main" id="{5548425D-2C21-4C56-BAD4-662978775C28}"/>
+                <a16:creationId xmlns:a16="http://schemas.microsoft.com/office/drawing/2014/main" id="{5548425D-2C21-4C56-BAD4-662978775C28}"/>
               </a:ext>
             </a:extLst>
           </p:cNvPr>
@@ -4441,7 +4319,7 @@
           <p:cNvPr id="7" name="Espaço Reservado para Número de Slide 6">
             <a:extLst>
               <a:ext uri="{FF2B5EF4-FFF2-40B4-BE49-F238E27FC236}">
-                <a16:creationId xmlns="" xmlns:a16="http://schemas.microsoft.com/office/drawing/2014/main" id="{C63E9726-E64C-42B2-AE8A-8C235A956B48}"/>
+                <a16:creationId xmlns:a16="http://schemas.microsoft.com/office/drawing/2014/main" id="{C63E9726-E64C-42B2-AE8A-8C235A956B48}"/>
               </a:ext>
             </a:extLst>
           </p:cNvPr>
@@ -4459,7 +4337,7 @@
           <a:p>
             <a:fld id="{1A7E88B7-70CE-4035-AE73-13FA6FB985D4}" type="slidenum">
               <a:rPr lang="pt-BR" smtClean="0"/>
-              <a:t>‹nº›</a:t>
+              <a:t>‹#›</a:t>
             </a:fld>
             <a:endParaRPr lang="pt-BR"/>
           </a:p>
@@ -4500,7 +4378,7 @@
           <p:cNvPr id="2" name="Título 1">
             <a:extLst>
               <a:ext uri="{FF2B5EF4-FFF2-40B4-BE49-F238E27FC236}">
-                <a16:creationId xmlns="" xmlns:a16="http://schemas.microsoft.com/office/drawing/2014/main" id="{11086A78-3E74-450C-96A6-CA8AC37AF772}"/>
+                <a16:creationId xmlns:a16="http://schemas.microsoft.com/office/drawing/2014/main" id="{11086A78-3E74-450C-96A6-CA8AC37AF772}"/>
               </a:ext>
             </a:extLst>
           </p:cNvPr>
@@ -4537,7 +4415,7 @@
           <p:cNvPr id="3" name="Espaço Reservado para Imagem 2">
             <a:extLst>
               <a:ext uri="{FF2B5EF4-FFF2-40B4-BE49-F238E27FC236}">
-                <a16:creationId xmlns="" xmlns:a16="http://schemas.microsoft.com/office/drawing/2014/main" id="{5F5B7312-975A-4DBC-9B2F-3652ADA006FD}"/>
+                <a16:creationId xmlns:a16="http://schemas.microsoft.com/office/drawing/2014/main" id="{5F5B7312-975A-4DBC-9B2F-3652ADA006FD}"/>
               </a:ext>
             </a:extLst>
           </p:cNvPr>
@@ -4604,7 +4482,7 @@
           <p:cNvPr id="4" name="Espaço Reservado para Texto 3">
             <a:extLst>
               <a:ext uri="{FF2B5EF4-FFF2-40B4-BE49-F238E27FC236}">
-                <a16:creationId xmlns="" xmlns:a16="http://schemas.microsoft.com/office/drawing/2014/main" id="{AAF805F5-1DFF-41C6-944C-7D79FE0D0963}"/>
+                <a16:creationId xmlns:a16="http://schemas.microsoft.com/office/drawing/2014/main" id="{AAF805F5-1DFF-41C6-944C-7D79FE0D0963}"/>
               </a:ext>
             </a:extLst>
           </p:cNvPr>
@@ -4675,7 +4553,7 @@
           <p:cNvPr id="5" name="Espaço Reservado para Data 4">
             <a:extLst>
               <a:ext uri="{FF2B5EF4-FFF2-40B4-BE49-F238E27FC236}">
-                <a16:creationId xmlns="" xmlns:a16="http://schemas.microsoft.com/office/drawing/2014/main" id="{02113D81-8665-4516-BD81-C6A1F254EECD}"/>
+                <a16:creationId xmlns:a16="http://schemas.microsoft.com/office/drawing/2014/main" id="{02113D81-8665-4516-BD81-C6A1F254EECD}"/>
               </a:ext>
             </a:extLst>
           </p:cNvPr>
@@ -4693,7 +4571,7 @@
           <a:p>
             <a:fld id="{63289F7E-B80B-496E-81B4-D396C37C9454}" type="datetimeFigureOut">
               <a:rPr lang="pt-BR" smtClean="0"/>
-              <a:t>22/02/2026</a:t>
+              <a:t>27/02/2026</a:t>
             </a:fld>
             <a:endParaRPr lang="pt-BR"/>
           </a:p>
@@ -4704,7 +4582,7 @@
           <p:cNvPr id="6" name="Espaço Reservado para Rodapé 5">
             <a:extLst>
               <a:ext uri="{FF2B5EF4-FFF2-40B4-BE49-F238E27FC236}">
-                <a16:creationId xmlns="" xmlns:a16="http://schemas.microsoft.com/office/drawing/2014/main" id="{2B00C88B-FF32-40AA-A187-727D96FD7862}"/>
+                <a16:creationId xmlns:a16="http://schemas.microsoft.com/office/drawing/2014/main" id="{2B00C88B-FF32-40AA-A187-727D96FD7862}"/>
               </a:ext>
             </a:extLst>
           </p:cNvPr>
@@ -4729,7 +4607,7 @@
           <p:cNvPr id="7" name="Espaço Reservado para Número de Slide 6">
             <a:extLst>
               <a:ext uri="{FF2B5EF4-FFF2-40B4-BE49-F238E27FC236}">
-                <a16:creationId xmlns="" xmlns:a16="http://schemas.microsoft.com/office/drawing/2014/main" id="{A04D1A2D-69F7-4B8F-A730-BC26DC340BA6}"/>
+                <a16:creationId xmlns:a16="http://schemas.microsoft.com/office/drawing/2014/main" id="{A04D1A2D-69F7-4B8F-A730-BC26DC340BA6}"/>
               </a:ext>
             </a:extLst>
           </p:cNvPr>
@@ -4747,7 +4625,7 @@
           <a:p>
             <a:fld id="{1A7E88B7-70CE-4035-AE73-13FA6FB985D4}" type="slidenum">
               <a:rPr lang="pt-BR" smtClean="0"/>
-              <a:t>‹nº›</a:t>
+              <a:t>‹#›</a:t>
             </a:fld>
             <a:endParaRPr lang="pt-BR"/>
           </a:p>
@@ -4793,7 +4671,7 @@
           <p:cNvPr id="2" name="Espaço Reservado para Título 1">
             <a:extLst>
               <a:ext uri="{FF2B5EF4-FFF2-40B4-BE49-F238E27FC236}">
-                <a16:creationId xmlns="" xmlns:a16="http://schemas.microsoft.com/office/drawing/2014/main" id="{E69A0273-1966-4A1B-9370-4C1CE5036371}"/>
+                <a16:creationId xmlns:a16="http://schemas.microsoft.com/office/drawing/2014/main" id="{E69A0273-1966-4A1B-9370-4C1CE5036371}"/>
               </a:ext>
             </a:extLst>
           </p:cNvPr>
@@ -4831,7 +4709,7 @@
           <p:cNvPr id="3" name="Espaço Reservado para Texto 2">
             <a:extLst>
               <a:ext uri="{FF2B5EF4-FFF2-40B4-BE49-F238E27FC236}">
-                <a16:creationId xmlns="" xmlns:a16="http://schemas.microsoft.com/office/drawing/2014/main" id="{3B9CF87A-0448-49A7-AB25-EBC1D56A40EF}"/>
+                <a16:creationId xmlns:a16="http://schemas.microsoft.com/office/drawing/2014/main" id="{3B9CF87A-0448-49A7-AB25-EBC1D56A40EF}"/>
               </a:ext>
             </a:extLst>
           </p:cNvPr>
@@ -4898,7 +4776,7 @@
           <p:cNvPr id="4" name="Espaço Reservado para Data 3">
             <a:extLst>
               <a:ext uri="{FF2B5EF4-FFF2-40B4-BE49-F238E27FC236}">
-                <a16:creationId xmlns="" xmlns:a16="http://schemas.microsoft.com/office/drawing/2014/main" id="{2EF7B1F2-BB5A-44D0-816D-16AD2C71430E}"/>
+                <a16:creationId xmlns:a16="http://schemas.microsoft.com/office/drawing/2014/main" id="{2EF7B1F2-BB5A-44D0-816D-16AD2C71430E}"/>
               </a:ext>
             </a:extLst>
           </p:cNvPr>
@@ -4934,7 +4812,7 @@
           <a:p>
             <a:fld id="{63289F7E-B80B-496E-81B4-D396C37C9454}" type="datetimeFigureOut">
               <a:rPr lang="pt-BR" smtClean="0"/>
-              <a:t>22/02/2026</a:t>
+              <a:t>27/02/2026</a:t>
             </a:fld>
             <a:endParaRPr lang="pt-BR"/>
           </a:p>
@@ -4945,7 +4823,7 @@
           <p:cNvPr id="5" name="Espaço Reservado para Rodapé 4">
             <a:extLst>
               <a:ext uri="{FF2B5EF4-FFF2-40B4-BE49-F238E27FC236}">
-                <a16:creationId xmlns="" xmlns:a16="http://schemas.microsoft.com/office/drawing/2014/main" id="{C703F94C-2CC8-4DAA-BC35-14FC3E841DCD}"/>
+                <a16:creationId xmlns:a16="http://schemas.microsoft.com/office/drawing/2014/main" id="{C703F94C-2CC8-4DAA-BC35-14FC3E841DCD}"/>
               </a:ext>
             </a:extLst>
           </p:cNvPr>
@@ -4988,7 +4866,7 @@
           <p:cNvPr id="6" name="Espaço Reservado para Número de Slide 5">
             <a:extLst>
               <a:ext uri="{FF2B5EF4-FFF2-40B4-BE49-F238E27FC236}">
-                <a16:creationId xmlns="" xmlns:a16="http://schemas.microsoft.com/office/drawing/2014/main" id="{64051336-7048-457A-8B61-D94291D71648}"/>
+                <a16:creationId xmlns:a16="http://schemas.microsoft.com/office/drawing/2014/main" id="{64051336-7048-457A-8B61-D94291D71648}"/>
               </a:ext>
             </a:extLst>
           </p:cNvPr>
@@ -5024,7 +4902,7 @@
           <a:p>
             <a:fld id="{1A7E88B7-70CE-4035-AE73-13FA6FB985D4}" type="slidenum">
               <a:rPr lang="pt-BR" smtClean="0"/>
-              <a:t>‹nº›</a:t>
+              <a:t>‹#›</a:t>
             </a:fld>
             <a:endParaRPr lang="pt-BR"/>
           </a:p>
@@ -5356,7 +5234,7 @@
           <p:cNvPr id="4" name="CaixaDeTexto 3">
             <a:extLst>
               <a:ext uri="{FF2B5EF4-FFF2-40B4-BE49-F238E27FC236}">
-                <a16:creationId xmlns="" xmlns:a16="http://schemas.microsoft.com/office/drawing/2014/main" id="{430EB894-B7D4-434C-9D1A-A14094D9BEEC}"/>
+                <a16:creationId xmlns:a16="http://schemas.microsoft.com/office/drawing/2014/main" id="{430EB894-B7D4-434C-9D1A-A14094D9BEEC}"/>
               </a:ext>
             </a:extLst>
           </p:cNvPr>
@@ -5380,23 +5258,16 @@
           <a:lstStyle/>
           <a:p>
             <a:r>
-              <a:rPr lang="pt-BR" sz="2000" dirty="0" smtClean="0"/>
+              <a:rPr lang="pt-BR" sz="2000" dirty="0"/>
               <a:t>Felipe A. P. de Figueiredo</a:t>
             </a:r>
-            <a:endParaRPr lang="pt-BR" sz="2000" dirty="0"/>
           </a:p>
           <a:p>
             <a:r>
               <a:rPr lang="pt-BR" dirty="0">
                 <a:hlinkClick r:id="rId3"/>
               </a:rPr>
-              <a:t>f</a:t>
-            </a:r>
-            <a:r>
-              <a:rPr lang="pt-BR" dirty="0" smtClean="0">
-                <a:hlinkClick r:id="rId3"/>
-              </a:rPr>
-              <a:t>elipe.figueiredo@Inatel.br</a:t>
+              <a:t>felipe.figueiredo@Inatel.br</a:t>
             </a:r>
             <a:endParaRPr lang="pt-BR" dirty="0"/>
           </a:p>
@@ -5407,7 +5278,7 @@
           <p:cNvPr id="1026" name="Picture 2" descr="Logo">
             <a:extLst>
               <a:ext uri="{FF2B5EF4-FFF2-40B4-BE49-F238E27FC236}">
-                <a16:creationId xmlns="" xmlns:a16="http://schemas.microsoft.com/office/drawing/2014/main" id="{3F2642E0-4F6A-4196-8F58-E77D36E9A33F}"/>
+                <a16:creationId xmlns:a16="http://schemas.microsoft.com/office/drawing/2014/main" id="{3F2642E0-4F6A-4196-8F58-E77D36E9A33F}"/>
               </a:ext>
             </a:extLst>
           </p:cNvPr>
@@ -5452,7 +5323,7 @@
           <p:cNvPr id="5122" name="Picture 2" descr="Image result for machine learning">
             <a:extLst>
               <a:ext uri="{FF2B5EF4-FFF2-40B4-BE49-F238E27FC236}">
-                <a16:creationId xmlns="" xmlns:a16="http://schemas.microsoft.com/office/drawing/2014/main" id="{810CE0A2-4102-44A6-A370-175E7896CDCB}"/>
+                <a16:creationId xmlns:a16="http://schemas.microsoft.com/office/drawing/2014/main" id="{810CE0A2-4102-44A6-A370-175E7896CDCB}"/>
               </a:ext>
             </a:extLst>
           </p:cNvPr>
@@ -5497,7 +5368,7 @@
           <p:cNvPr id="7" name="Título 1">
             <a:extLst>
               <a:ext uri="{FF2B5EF4-FFF2-40B4-BE49-F238E27FC236}">
-                <a16:creationId xmlns:a16="http://schemas.microsoft.com/office/drawing/2014/main" xmlns="" id="{32666AC8-2E17-4DB4-B0F5-60C640CCFD2E}"/>
+                <a16:creationId xmlns:a16="http://schemas.microsoft.com/office/drawing/2014/main" id="{32666AC8-2E17-4DB4-B0F5-60C640CCFD2E}"/>
               </a:ext>
             </a:extLst>
           </p:cNvPr>
@@ -5521,21 +5392,16 @@
           <a:lstStyle/>
           <a:p>
             <a:r>
-              <a:rPr lang="pt-BR" sz="6600" dirty="0" smtClean="0"/>
+              <a:rPr lang="pt-BR" sz="6600" dirty="0"/>
               <a:t>C24 – Inteligência Artificial:</a:t>
-            </a:r>
-            <a:r>
-              <a:rPr lang="pt-BR" sz="7200" dirty="0"/>
-              <a:t/>
             </a:r>
             <a:br>
               <a:rPr lang="pt-BR" sz="7200" dirty="0"/>
             </a:br>
             <a:r>
-              <a:rPr lang="pt-BR" sz="7200" b="1" i="1" dirty="0" smtClean="0"/>
+              <a:rPr lang="pt-BR" sz="7200" b="1" i="1" dirty="0"/>
               <a:t>Métricas de classificação</a:t>
             </a:r>
-            <a:endParaRPr lang="pt-BR" sz="7200" b="1" i="1" dirty="0"/>
           </a:p>
         </p:txBody>
       </p:sp>
@@ -5574,7 +5440,7 @@
           <p:cNvPr id="3" name="Espaço Reservado para Conteúdo 2">
             <a:extLst>
               <a:ext uri="{FF2B5EF4-FFF2-40B4-BE49-F238E27FC236}">
-                <a16:creationId xmlns:a16="http://schemas.microsoft.com/office/drawing/2014/main" xmlns="" id="{0F418656-538C-BBD9-47FA-40A924A669E5}"/>
+                <a16:creationId xmlns:a16="http://schemas.microsoft.com/office/drawing/2014/main" id="{0F418656-538C-BBD9-47FA-40A924A669E5}"/>
               </a:ext>
             </a:extLst>
           </p:cNvPr>
@@ -5642,7 +5508,7 @@
           <p:cNvPr id="2" name="Título 1">
             <a:extLst>
               <a:ext uri="{FF2B5EF4-FFF2-40B4-BE49-F238E27FC236}">
-                <a16:creationId xmlns:a16="http://schemas.microsoft.com/office/drawing/2014/main" xmlns="" id="{88C76DB9-C5DB-DAD2-5D1D-F064916FE36F}"/>
+                <a16:creationId xmlns:a16="http://schemas.microsoft.com/office/drawing/2014/main" id="{88C76DB9-C5DB-DAD2-5D1D-F064916FE36F}"/>
               </a:ext>
             </a:extLst>
           </p:cNvPr>
@@ -5670,7 +5536,7 @@
           <p:cNvPr id="3" name="Espaço Reservado para Conteúdo 2">
             <a:extLst>
               <a:ext uri="{FF2B5EF4-FFF2-40B4-BE49-F238E27FC236}">
-                <a16:creationId xmlns:a16="http://schemas.microsoft.com/office/drawing/2014/main" xmlns="" id="{0243F063-09F2-F192-E084-325BC503299F}"/>
+                <a16:creationId xmlns:a16="http://schemas.microsoft.com/office/drawing/2014/main" id="{0243F063-09F2-F192-E084-325BC503299F}"/>
               </a:ext>
             </a:extLst>
           </p:cNvPr>
@@ -5782,7 +5648,7 @@
               <p:cNvPr id="5" name="CaixaDeTexto 4">
                 <a:extLst>
                   <a:ext uri="{FF2B5EF4-FFF2-40B4-BE49-F238E27FC236}">
-                    <a16:creationId xmlns:a16="http://schemas.microsoft.com/office/drawing/2014/main" xmlns="" id="{A1A8E5FE-3F01-AAA0-2326-F47AA1AC18B9}"/>
+                    <a16:creationId xmlns:a16="http://schemas.microsoft.com/office/drawing/2014/main" id="{A1A8E5FE-3F01-AAA0-2326-F47AA1AC18B9}"/>
                   </a:ext>
                 </a:extLst>
               </p:cNvPr>
@@ -6025,7 +5891,7 @@
           <p:cNvPr id="2" name="Título 1">
             <a:extLst>
               <a:ext uri="{FF2B5EF4-FFF2-40B4-BE49-F238E27FC236}">
-                <a16:creationId xmlns:a16="http://schemas.microsoft.com/office/drawing/2014/main" xmlns="" id="{C364D5D3-A9ED-9B8B-0474-AF3EF62241C0}"/>
+                <a16:creationId xmlns:a16="http://schemas.microsoft.com/office/drawing/2014/main" id="{C364D5D3-A9ED-9B8B-0474-AF3EF62241C0}"/>
               </a:ext>
             </a:extLst>
           </p:cNvPr>
@@ -6053,7 +5919,7 @@
           <p:cNvPr id="3" name="Espaço Reservado para Conteúdo 2">
             <a:extLst>
               <a:ext uri="{FF2B5EF4-FFF2-40B4-BE49-F238E27FC236}">
-                <a16:creationId xmlns:a16="http://schemas.microsoft.com/office/drawing/2014/main" xmlns="" id="{729D007B-9E18-00C3-2CF2-47D7955EBACC}"/>
+                <a16:creationId xmlns:a16="http://schemas.microsoft.com/office/drawing/2014/main" id="{729D007B-9E18-00C3-2CF2-47D7955EBACC}"/>
               </a:ext>
             </a:extLst>
           </p:cNvPr>
@@ -6198,7 +6064,7 @@
               <p:cNvPr id="4" name="CaixaDeTexto 3">
                 <a:extLst>
                   <a:ext uri="{FF2B5EF4-FFF2-40B4-BE49-F238E27FC236}">
-                    <a16:creationId xmlns:a16="http://schemas.microsoft.com/office/drawing/2014/main" xmlns="" id="{3B70A8A1-B016-521E-B475-1827A59F773A}"/>
+                    <a16:creationId xmlns:a16="http://schemas.microsoft.com/office/drawing/2014/main" id="{3B70A8A1-B016-521E-B475-1827A59F773A}"/>
                   </a:ext>
                 </a:extLst>
               </p:cNvPr>
@@ -6441,7 +6307,7 @@
           <p:cNvPr id="2" name="Título 1">
             <a:extLst>
               <a:ext uri="{FF2B5EF4-FFF2-40B4-BE49-F238E27FC236}">
-                <a16:creationId xmlns:a16="http://schemas.microsoft.com/office/drawing/2014/main" xmlns="" id="{C364D5D3-A9ED-9B8B-0474-AF3EF62241C0}"/>
+                <a16:creationId xmlns:a16="http://schemas.microsoft.com/office/drawing/2014/main" id="{C364D5D3-A9ED-9B8B-0474-AF3EF62241C0}"/>
               </a:ext>
             </a:extLst>
           </p:cNvPr>
@@ -6471,7 +6337,7 @@
               <p:cNvPr id="3" name="Espaço Reservado para Conteúdo 2">
                 <a:extLst>
                   <a:ext uri="{FF2B5EF4-FFF2-40B4-BE49-F238E27FC236}">
-                    <a16:creationId xmlns:a16="http://schemas.microsoft.com/office/drawing/2014/main" xmlns="" id="{729D007B-9E18-00C3-2CF2-47D7955EBACC}"/>
+                    <a16:creationId xmlns:a16="http://schemas.microsoft.com/office/drawing/2014/main" id="{729D007B-9E18-00C3-2CF2-47D7955EBACC}"/>
                   </a:ext>
                 </a:extLst>
               </p:cNvPr>
@@ -7048,7 +6914,7 @@
           <p:cNvPr id="2" name="Título 1">
             <a:extLst>
               <a:ext uri="{FF2B5EF4-FFF2-40B4-BE49-F238E27FC236}">
-                <a16:creationId xmlns:a16="http://schemas.microsoft.com/office/drawing/2014/main" xmlns="" id="{6759409E-2F7C-F9FB-1D90-828F558DAD79}"/>
+                <a16:creationId xmlns:a16="http://schemas.microsoft.com/office/drawing/2014/main" id="{6759409E-2F7C-F9FB-1D90-828F558DAD79}"/>
               </a:ext>
             </a:extLst>
           </p:cNvPr>
@@ -7076,7 +6942,7 @@
           <p:cNvPr id="3" name="Espaço Reservado para Conteúdo 2">
             <a:extLst>
               <a:ext uri="{FF2B5EF4-FFF2-40B4-BE49-F238E27FC236}">
-                <a16:creationId xmlns:a16="http://schemas.microsoft.com/office/drawing/2014/main" xmlns="" id="{047B3338-3C79-280E-33CD-E184CC752916}"/>
+                <a16:creationId xmlns:a16="http://schemas.microsoft.com/office/drawing/2014/main" id="{047B3338-3C79-280E-33CD-E184CC752916}"/>
               </a:ext>
             </a:extLst>
           </p:cNvPr>
@@ -7245,7 +7111,7 @@
               <p:cNvPr id="5" name="CaixaDeTexto 4">
                 <a:extLst>
                   <a:ext uri="{FF2B5EF4-FFF2-40B4-BE49-F238E27FC236}">
-                    <a16:creationId xmlns:a16="http://schemas.microsoft.com/office/drawing/2014/main" xmlns="" id="{A3376B35-7B47-DF75-A545-B75926FB5BB2}"/>
+                    <a16:creationId xmlns:a16="http://schemas.microsoft.com/office/drawing/2014/main" id="{A3376B35-7B47-DF75-A545-B75926FB5BB2}"/>
                   </a:ext>
                 </a:extLst>
               </p:cNvPr>
@@ -7409,7 +7275,7 @@
           <p:cNvPr id="4" name="Tabela 5">
             <a:extLst>
               <a:ext uri="{FF2B5EF4-FFF2-40B4-BE49-F238E27FC236}">
-                <a16:creationId xmlns:a16="http://schemas.microsoft.com/office/drawing/2014/main" xmlns="" id="{0D5ABCB4-5EB5-F832-F110-AD1F2FD3532A}"/>
+                <a16:creationId xmlns:a16="http://schemas.microsoft.com/office/drawing/2014/main" id="{0D5ABCB4-5EB5-F832-F110-AD1F2FD3532A}"/>
               </a:ext>
             </a:extLst>
           </p:cNvPr>
@@ -7432,14 +7298,14 @@
                 <a:gridCol w="897466">
                   <a:extLst>
                     <a:ext uri="{9D8B030D-6E8A-4147-A177-3AD203B41FA5}">
-                      <a16:colId xmlns:a16="http://schemas.microsoft.com/office/drawing/2014/main" xmlns="" val="2780398905"/>
+                      <a16:colId xmlns:a16="http://schemas.microsoft.com/office/drawing/2014/main" val="2780398905"/>
                     </a:ext>
                   </a:extLst>
                 </a:gridCol>
                 <a:gridCol w="897466">
                   <a:extLst>
                     <a:ext uri="{9D8B030D-6E8A-4147-A177-3AD203B41FA5}">
-                      <a16:colId xmlns:a16="http://schemas.microsoft.com/office/drawing/2014/main" xmlns="" val="1752542230"/>
+                      <a16:colId xmlns:a16="http://schemas.microsoft.com/office/drawing/2014/main" val="1752542230"/>
                     </a:ext>
                   </a:extLst>
                 </a:gridCol>
@@ -7596,7 +7462,7 @@
                 </a:tc>
                 <a:extLst>
                   <a:ext uri="{0D108BD9-81ED-4DB2-BD59-A6C34878D82A}">
-                    <a16:rowId xmlns:a16="http://schemas.microsoft.com/office/drawing/2014/main" xmlns="" val="3952155157"/>
+                    <a16:rowId xmlns:a16="http://schemas.microsoft.com/office/drawing/2014/main" val="3952155157"/>
                   </a:ext>
                 </a:extLst>
               </a:tr>
@@ -7764,7 +7630,7 @@
                 </a:tc>
                 <a:extLst>
                   <a:ext uri="{0D108BD9-81ED-4DB2-BD59-A6C34878D82A}">
-                    <a16:rowId xmlns:a16="http://schemas.microsoft.com/office/drawing/2014/main" xmlns="" val="2169341992"/>
+                    <a16:rowId xmlns:a16="http://schemas.microsoft.com/office/drawing/2014/main" val="2169341992"/>
                   </a:ext>
                 </a:extLst>
               </a:tr>
@@ -7777,7 +7643,7 @@
           <p:cNvPr id="6" name="Retângulo 5">
             <a:extLst>
               <a:ext uri="{FF2B5EF4-FFF2-40B4-BE49-F238E27FC236}">
-                <a16:creationId xmlns:a16="http://schemas.microsoft.com/office/drawing/2014/main" xmlns="" id="{685BDF4E-E4CF-5896-0326-96A536D9643C}"/>
+                <a16:creationId xmlns:a16="http://schemas.microsoft.com/office/drawing/2014/main" id="{685BDF4E-E4CF-5896-0326-96A536D9643C}"/>
               </a:ext>
             </a:extLst>
           </p:cNvPr>
@@ -7859,7 +7725,7 @@
           <p:cNvPr id="2" name="Título 1">
             <a:extLst>
               <a:ext uri="{FF2B5EF4-FFF2-40B4-BE49-F238E27FC236}">
-                <a16:creationId xmlns:a16="http://schemas.microsoft.com/office/drawing/2014/main" xmlns="" id="{B287A758-CC86-49D1-9698-4D8C118C40E1}"/>
+                <a16:creationId xmlns:a16="http://schemas.microsoft.com/office/drawing/2014/main" id="{B287A758-CC86-49D1-9698-4D8C118C40E1}"/>
               </a:ext>
             </a:extLst>
           </p:cNvPr>
@@ -7887,7 +7753,7 @@
           <p:cNvPr id="3" name="Espaço Reservado para Conteúdo 2">
             <a:extLst>
               <a:ext uri="{FF2B5EF4-FFF2-40B4-BE49-F238E27FC236}">
-                <a16:creationId xmlns:a16="http://schemas.microsoft.com/office/drawing/2014/main" xmlns="" id="{50E4F4E1-BE8B-2CDE-011D-F70A3522A287}"/>
+                <a16:creationId xmlns:a16="http://schemas.microsoft.com/office/drawing/2014/main" id="{50E4F4E1-BE8B-2CDE-011D-F70A3522A287}"/>
               </a:ext>
             </a:extLst>
           </p:cNvPr>
@@ -8024,7 +7890,7 @@
               <p:cNvPr id="5" name="CaixaDeTexto 4">
                 <a:extLst>
                   <a:ext uri="{FF2B5EF4-FFF2-40B4-BE49-F238E27FC236}">
-                    <a16:creationId xmlns:a16="http://schemas.microsoft.com/office/drawing/2014/main" xmlns="" id="{E92F9593-43C2-2FC6-D7DF-B4A04BE65B06}"/>
+                    <a16:creationId xmlns:a16="http://schemas.microsoft.com/office/drawing/2014/main" id="{E92F9593-43C2-2FC6-D7DF-B4A04BE65B06}"/>
                   </a:ext>
                 </a:extLst>
               </p:cNvPr>
@@ -8170,7 +8036,7 @@
           <p:cNvPr id="4" name="Tabela 5">
             <a:extLst>
               <a:ext uri="{FF2B5EF4-FFF2-40B4-BE49-F238E27FC236}">
-                <a16:creationId xmlns:a16="http://schemas.microsoft.com/office/drawing/2014/main" xmlns="" id="{AB28634A-9E6D-BA06-E08B-AF1826CF6578}"/>
+                <a16:creationId xmlns:a16="http://schemas.microsoft.com/office/drawing/2014/main" id="{AB28634A-9E6D-BA06-E08B-AF1826CF6578}"/>
               </a:ext>
             </a:extLst>
           </p:cNvPr>
@@ -8193,14 +8059,14 @@
                 <a:gridCol w="897466">
                   <a:extLst>
                     <a:ext uri="{9D8B030D-6E8A-4147-A177-3AD203B41FA5}">
-                      <a16:colId xmlns:a16="http://schemas.microsoft.com/office/drawing/2014/main" xmlns="" val="2780398905"/>
+                      <a16:colId xmlns:a16="http://schemas.microsoft.com/office/drawing/2014/main" val="2780398905"/>
                     </a:ext>
                   </a:extLst>
                 </a:gridCol>
                 <a:gridCol w="897466">
                   <a:extLst>
                     <a:ext uri="{9D8B030D-6E8A-4147-A177-3AD203B41FA5}">
-                      <a16:colId xmlns:a16="http://schemas.microsoft.com/office/drawing/2014/main" xmlns="" val="1752542230"/>
+                      <a16:colId xmlns:a16="http://schemas.microsoft.com/office/drawing/2014/main" val="1752542230"/>
                     </a:ext>
                   </a:extLst>
                 </a:gridCol>
@@ -8357,7 +8223,7 @@
                 </a:tc>
                 <a:extLst>
                   <a:ext uri="{0D108BD9-81ED-4DB2-BD59-A6C34878D82A}">
-                    <a16:rowId xmlns:a16="http://schemas.microsoft.com/office/drawing/2014/main" xmlns="" val="3952155157"/>
+                    <a16:rowId xmlns:a16="http://schemas.microsoft.com/office/drawing/2014/main" val="3952155157"/>
                   </a:ext>
                 </a:extLst>
               </a:tr>
@@ -8525,7 +8391,7 @@
                 </a:tc>
                 <a:extLst>
                   <a:ext uri="{0D108BD9-81ED-4DB2-BD59-A6C34878D82A}">
-                    <a16:rowId xmlns:a16="http://schemas.microsoft.com/office/drawing/2014/main" xmlns="" val="2169341992"/>
+                    <a16:rowId xmlns:a16="http://schemas.microsoft.com/office/drawing/2014/main" val="2169341992"/>
                   </a:ext>
                 </a:extLst>
               </a:tr>
@@ -8538,7 +8404,7 @@
           <p:cNvPr id="6" name="Retângulo 5">
             <a:extLst>
               <a:ext uri="{FF2B5EF4-FFF2-40B4-BE49-F238E27FC236}">
-                <a16:creationId xmlns:a16="http://schemas.microsoft.com/office/drawing/2014/main" xmlns="" id="{894B2598-B989-4F1A-AB5A-34B5BD2133A9}"/>
+                <a16:creationId xmlns:a16="http://schemas.microsoft.com/office/drawing/2014/main" id="{894B2598-B989-4F1A-AB5A-34B5BD2133A9}"/>
               </a:ext>
             </a:extLst>
           </p:cNvPr>
@@ -8622,7 +8488,7 @@
               <p:cNvPr id="3" name="Espaço Reservado para Conteúdo 2">
                 <a:extLst>
                   <a:ext uri="{FF2B5EF4-FFF2-40B4-BE49-F238E27FC236}">
-                    <a16:creationId xmlns:a16="http://schemas.microsoft.com/office/drawing/2014/main" xmlns="" id="{0F418656-538C-BBD9-47FA-40A924A669E5}"/>
+                    <a16:creationId xmlns:a16="http://schemas.microsoft.com/office/drawing/2014/main" id="{0F418656-538C-BBD9-47FA-40A924A669E5}"/>
                   </a:ext>
                 </a:extLst>
               </p:cNvPr>
@@ -8751,7 +8617,7 @@
               <p:cNvPr id="2" name="Título 1">
                 <a:extLst>
                   <a:ext uri="{FF2B5EF4-FFF2-40B4-BE49-F238E27FC236}">
-                    <a16:creationId xmlns:a16="http://schemas.microsoft.com/office/drawing/2014/main" xmlns="" id="{44F6D18B-0399-55B9-FD83-C7EDF77FF08A}"/>
+                    <a16:creationId xmlns:a16="http://schemas.microsoft.com/office/drawing/2014/main" id="{44F6D18B-0399-55B9-FD83-C7EDF77FF08A}"/>
                   </a:ext>
                 </a:extLst>
               </p:cNvPr>
@@ -8851,7 +8717,7 @@
               <p:cNvPr id="3" name="Espaço Reservado para Conteúdo 2">
                 <a:extLst>
                   <a:ext uri="{FF2B5EF4-FFF2-40B4-BE49-F238E27FC236}">
-                    <a16:creationId xmlns:a16="http://schemas.microsoft.com/office/drawing/2014/main" xmlns="" id="{06AE9087-3D2E-DF8E-D6D3-12EDE543712C}"/>
+                    <a16:creationId xmlns:a16="http://schemas.microsoft.com/office/drawing/2014/main" id="{06AE9087-3D2E-DF8E-D6D3-12EDE543712C}"/>
                   </a:ext>
                 </a:extLst>
               </p:cNvPr>
@@ -9126,7 +8992,7 @@
               <p:cNvPr id="4" name="Table 3">
                 <a:extLst>
                   <a:ext uri="{FF2B5EF4-FFF2-40B4-BE49-F238E27FC236}">
-                    <a16:creationId xmlns:a16="http://schemas.microsoft.com/office/drawing/2014/main" xmlns="" id="{08325068-7110-8CDE-99D3-4E05F625B769}"/>
+                    <a16:creationId xmlns:a16="http://schemas.microsoft.com/office/drawing/2014/main" id="{08325068-7110-8CDE-99D3-4E05F625B769}"/>
                   </a:ext>
                 </a:extLst>
               </p:cNvPr>
@@ -9147,35 +9013,35 @@
                     <a:gridCol w="1073505">
                       <a:extLst>
                         <a:ext uri="{9D8B030D-6E8A-4147-A177-3AD203B41FA5}">
-                          <a16:colId xmlns:a16="http://schemas.microsoft.com/office/drawing/2014/main" xmlns="" val="20000"/>
+                          <a16:colId xmlns:a16="http://schemas.microsoft.com/office/drawing/2014/main" val="20000"/>
                         </a:ext>
                       </a:extLst>
                     </a:gridCol>
                     <a:gridCol w="967120">
                       <a:extLst>
                         <a:ext uri="{9D8B030D-6E8A-4147-A177-3AD203B41FA5}">
-                          <a16:colId xmlns:a16="http://schemas.microsoft.com/office/drawing/2014/main" xmlns="" val="20001"/>
+                          <a16:colId xmlns:a16="http://schemas.microsoft.com/office/drawing/2014/main" val="20001"/>
                         </a:ext>
                       </a:extLst>
                     </a:gridCol>
                     <a:gridCol w="1411999">
                       <a:extLst>
                         <a:ext uri="{9D8B030D-6E8A-4147-A177-3AD203B41FA5}">
-                          <a16:colId xmlns:a16="http://schemas.microsoft.com/office/drawing/2014/main" xmlns="" val="20002"/>
+                          <a16:colId xmlns:a16="http://schemas.microsoft.com/office/drawing/2014/main" val="20002"/>
                         </a:ext>
                       </a:extLst>
                     </a:gridCol>
                     <a:gridCol w="1411999">
                       <a:extLst>
                         <a:ext uri="{9D8B030D-6E8A-4147-A177-3AD203B41FA5}">
-                          <a16:colId xmlns:a16="http://schemas.microsoft.com/office/drawing/2014/main" xmlns="" val="20003"/>
+                          <a16:colId xmlns:a16="http://schemas.microsoft.com/office/drawing/2014/main" val="20003"/>
                         </a:ext>
                       </a:extLst>
                     </a:gridCol>
                     <a:gridCol w="1411999">
                       <a:extLst>
                         <a:ext uri="{9D8B030D-6E8A-4147-A177-3AD203B41FA5}">
-                          <a16:colId xmlns:a16="http://schemas.microsoft.com/office/drawing/2014/main" xmlns="" val="20004"/>
+                          <a16:colId xmlns:a16="http://schemas.microsoft.com/office/drawing/2014/main" val="20004"/>
                         </a:ext>
                       </a:extLst>
                     </a:gridCol>
@@ -9572,7 +9438,7 @@
                     </a:tc>
                     <a:extLst>
                       <a:ext uri="{0D108BD9-81ED-4DB2-BD59-A6C34878D82A}">
-                        <a16:rowId xmlns:a16="http://schemas.microsoft.com/office/drawing/2014/main" xmlns="" val="10000"/>
+                        <a16:rowId xmlns:a16="http://schemas.microsoft.com/office/drawing/2014/main" val="10000"/>
                       </a:ext>
                     </a:extLst>
                   </a:tr>
@@ -9914,7 +9780,7 @@
                     </a:tc>
                     <a:extLst>
                       <a:ext uri="{0D108BD9-81ED-4DB2-BD59-A6C34878D82A}">
-                        <a16:rowId xmlns:a16="http://schemas.microsoft.com/office/drawing/2014/main" xmlns="" val="10001"/>
+                        <a16:rowId xmlns:a16="http://schemas.microsoft.com/office/drawing/2014/main" val="10001"/>
                       </a:ext>
                     </a:extLst>
                   </a:tr>
@@ -10256,7 +10122,7 @@
                     </a:tc>
                     <a:extLst>
                       <a:ext uri="{0D108BD9-81ED-4DB2-BD59-A6C34878D82A}">
-                        <a16:rowId xmlns:a16="http://schemas.microsoft.com/office/drawing/2014/main" xmlns="" val="10002"/>
+                        <a16:rowId xmlns:a16="http://schemas.microsoft.com/office/drawing/2014/main" val="10002"/>
                       </a:ext>
                     </a:extLst>
                   </a:tr>
@@ -10611,7 +10477,7 @@
                     </a:tc>
                     <a:extLst>
                       <a:ext uri="{0D108BD9-81ED-4DB2-BD59-A6C34878D82A}">
-                        <a16:rowId xmlns:a16="http://schemas.microsoft.com/office/drawing/2014/main" xmlns="" val="10003"/>
+                        <a16:rowId xmlns:a16="http://schemas.microsoft.com/office/drawing/2014/main" val="10003"/>
                       </a:ext>
                     </a:extLst>
                   </a:tr>
@@ -10711,7 +10577,7 @@
                     </a:tc>
                     <a:extLst>
                       <a:ext uri="{0D108BD9-81ED-4DB2-BD59-A6C34878D82A}">
-                        <a16:rowId xmlns:a16="http://schemas.microsoft.com/office/drawing/2014/main" xmlns="" val="10004"/>
+                        <a16:rowId xmlns:a16="http://schemas.microsoft.com/office/drawing/2014/main" val="10004"/>
                       </a:ext>
                     </a:extLst>
                   </a:tr>
@@ -12073,7 +11939,7 @@
               <p:cNvPr id="5" name="CaixaDeTexto 4">
                 <a:extLst>
                   <a:ext uri="{FF2B5EF4-FFF2-40B4-BE49-F238E27FC236}">
-                    <a16:creationId xmlns:a16="http://schemas.microsoft.com/office/drawing/2014/main" xmlns="" id="{C5882695-5DE1-C1D3-36F2-0FBA637ABB6A}"/>
+                    <a16:creationId xmlns:a16="http://schemas.microsoft.com/office/drawing/2014/main" id="{C5882695-5DE1-C1D3-36F2-0FBA637ABB6A}"/>
                   </a:ext>
                 </a:extLst>
               </p:cNvPr>
@@ -12220,7 +12086,7 @@
               <p:cNvPr id="2" name="Título 1">
                 <a:extLst>
                   <a:ext uri="{FF2B5EF4-FFF2-40B4-BE49-F238E27FC236}">
-                    <a16:creationId xmlns:a16="http://schemas.microsoft.com/office/drawing/2014/main" xmlns="" id="{6F3810FD-8C1E-E235-CDF3-A845D40ED979}"/>
+                    <a16:creationId xmlns:a16="http://schemas.microsoft.com/office/drawing/2014/main" id="{6F3810FD-8C1E-E235-CDF3-A845D40ED979}"/>
                   </a:ext>
                 </a:extLst>
               </p:cNvPr>
@@ -12252,7 +12118,13 @@
                       <a:rPr lang="pt-BR" b="0" i="1" smtClean="0">
                         <a:latin typeface="Cambria Math" panose="02040503050406030204" pitchFamily="18" charset="0"/>
                       </a:rPr>
-                      <m:t>&gt;2</m:t>
+                      <m:t>&gt;</m:t>
+                    </m:r>
+                    <m:r>
+                      <a:rPr lang="pt-BR" b="0" i="1" smtClean="0">
+                        <a:latin typeface="Cambria Math" panose="02040503050406030204" pitchFamily="18" charset="0"/>
+                      </a:rPr>
+                      <m:t>2</m:t>
                     </m:r>
                   </m:oMath>
                 </a14:m>
@@ -12311,7 +12183,7 @@
               <p:cNvPr id="4" name="Table 4">
                 <a:extLst>
                   <a:ext uri="{FF2B5EF4-FFF2-40B4-BE49-F238E27FC236}">
-                    <a16:creationId xmlns:a16="http://schemas.microsoft.com/office/drawing/2014/main" xmlns="" id="{F549053F-BDE4-C8D3-A996-B46C550898B5}"/>
+                    <a16:creationId xmlns:a16="http://schemas.microsoft.com/office/drawing/2014/main" id="{F549053F-BDE4-C8D3-A996-B46C550898B5}"/>
                   </a:ext>
                 </a:extLst>
               </p:cNvPr>
@@ -12332,35 +12204,35 @@
                     <a:gridCol w="1083731">
                       <a:extLst>
                         <a:ext uri="{9D8B030D-6E8A-4147-A177-3AD203B41FA5}">
-                          <a16:colId xmlns:a16="http://schemas.microsoft.com/office/drawing/2014/main" xmlns="" val="20000"/>
+                          <a16:colId xmlns:a16="http://schemas.microsoft.com/office/drawing/2014/main" val="20000"/>
                         </a:ext>
                       </a:extLst>
                     </a:gridCol>
                     <a:gridCol w="740353">
                       <a:extLst>
                         <a:ext uri="{9D8B030D-6E8A-4147-A177-3AD203B41FA5}">
-                          <a16:colId xmlns:a16="http://schemas.microsoft.com/office/drawing/2014/main" xmlns="" val="20001"/>
+                          <a16:colId xmlns:a16="http://schemas.microsoft.com/office/drawing/2014/main" val="20001"/>
                         </a:ext>
                       </a:extLst>
                     </a:gridCol>
                     <a:gridCol w="1262164">
                       <a:extLst>
                         <a:ext uri="{9D8B030D-6E8A-4147-A177-3AD203B41FA5}">
-                          <a16:colId xmlns:a16="http://schemas.microsoft.com/office/drawing/2014/main" xmlns="" val="20002"/>
+                          <a16:colId xmlns:a16="http://schemas.microsoft.com/office/drawing/2014/main" val="20002"/>
                         </a:ext>
                       </a:extLst>
                     </a:gridCol>
                     <a:gridCol w="1262164">
                       <a:extLst>
                         <a:ext uri="{9D8B030D-6E8A-4147-A177-3AD203B41FA5}">
-                          <a16:colId xmlns:a16="http://schemas.microsoft.com/office/drawing/2014/main" xmlns="" val="20003"/>
+                          <a16:colId xmlns:a16="http://schemas.microsoft.com/office/drawing/2014/main" val="20003"/>
                         </a:ext>
                       </a:extLst>
                     </a:gridCol>
                     <a:gridCol w="1262164">
                       <a:extLst>
                         <a:ext uri="{9D8B030D-6E8A-4147-A177-3AD203B41FA5}">
-                          <a16:colId xmlns:a16="http://schemas.microsoft.com/office/drawing/2014/main" xmlns="" val="20004"/>
+                          <a16:colId xmlns:a16="http://schemas.microsoft.com/office/drawing/2014/main" val="20004"/>
                         </a:ext>
                       </a:extLst>
                     </a:gridCol>
@@ -12805,7 +12677,7 @@
                     </a:tc>
                     <a:extLst>
                       <a:ext uri="{0D108BD9-81ED-4DB2-BD59-A6C34878D82A}">
-                        <a16:rowId xmlns:a16="http://schemas.microsoft.com/office/drawing/2014/main" xmlns="" val="10000"/>
+                        <a16:rowId xmlns:a16="http://schemas.microsoft.com/office/drawing/2014/main" val="10000"/>
                       </a:ext>
                     </a:extLst>
                   </a:tr>
@@ -13195,7 +13067,7 @@
                     </a:tc>
                     <a:extLst>
                       <a:ext uri="{0D108BD9-81ED-4DB2-BD59-A6C34878D82A}">
-                        <a16:rowId xmlns:a16="http://schemas.microsoft.com/office/drawing/2014/main" xmlns="" val="10001"/>
+                        <a16:rowId xmlns:a16="http://schemas.microsoft.com/office/drawing/2014/main" val="10001"/>
                       </a:ext>
                     </a:extLst>
                   </a:tr>
@@ -13585,7 +13457,7 @@
                     </a:tc>
                     <a:extLst>
                       <a:ext uri="{0D108BD9-81ED-4DB2-BD59-A6C34878D82A}">
-                        <a16:rowId xmlns:a16="http://schemas.microsoft.com/office/drawing/2014/main" xmlns="" val="10002"/>
+                        <a16:rowId xmlns:a16="http://schemas.microsoft.com/office/drawing/2014/main" val="10002"/>
                       </a:ext>
                     </a:extLst>
                   </a:tr>
@@ -13943,7 +13815,7 @@
                     </a:tc>
                     <a:extLst>
                       <a:ext uri="{0D108BD9-81ED-4DB2-BD59-A6C34878D82A}">
-                        <a16:rowId xmlns:a16="http://schemas.microsoft.com/office/drawing/2014/main" xmlns="" val="10003"/>
+                        <a16:rowId xmlns:a16="http://schemas.microsoft.com/office/drawing/2014/main" val="10003"/>
                       </a:ext>
                     </a:extLst>
                   </a:tr>
@@ -14043,7 +13915,7 @@
                     </a:tc>
                     <a:extLst>
                       <a:ext uri="{0D108BD9-81ED-4DB2-BD59-A6C34878D82A}">
-                        <a16:rowId xmlns:a16="http://schemas.microsoft.com/office/drawing/2014/main" xmlns="" val="10004"/>
+                        <a16:rowId xmlns:a16="http://schemas.microsoft.com/office/drawing/2014/main" val="10004"/>
                       </a:ext>
                     </a:extLst>
                   </a:tr>
@@ -15501,7 +15373,7 @@
               <p:cNvPr id="5" name="Table 5">
                 <a:extLst>
                   <a:ext uri="{FF2B5EF4-FFF2-40B4-BE49-F238E27FC236}">
-                    <a16:creationId xmlns:a16="http://schemas.microsoft.com/office/drawing/2014/main" xmlns="" id="{A4FF6500-B127-E5EB-2288-D345D9AB581B}"/>
+                    <a16:creationId xmlns:a16="http://schemas.microsoft.com/office/drawing/2014/main" id="{A4FF6500-B127-E5EB-2288-D345D9AB581B}"/>
                   </a:ext>
                 </a:extLst>
               </p:cNvPr>
@@ -15522,35 +15394,35 @@
                     <a:gridCol w="1128888">
                       <a:extLst>
                         <a:ext uri="{9D8B030D-6E8A-4147-A177-3AD203B41FA5}">
-                          <a16:colId xmlns:a16="http://schemas.microsoft.com/office/drawing/2014/main" xmlns="" val="20000"/>
+                          <a16:colId xmlns:a16="http://schemas.microsoft.com/office/drawing/2014/main" val="20000"/>
                         </a:ext>
                       </a:extLst>
                     </a:gridCol>
                     <a:gridCol w="695197">
                       <a:extLst>
                         <a:ext uri="{9D8B030D-6E8A-4147-A177-3AD203B41FA5}">
-                          <a16:colId xmlns:a16="http://schemas.microsoft.com/office/drawing/2014/main" xmlns="" val="20001"/>
+                          <a16:colId xmlns:a16="http://schemas.microsoft.com/office/drawing/2014/main" val="20001"/>
                         </a:ext>
                       </a:extLst>
                     </a:gridCol>
                     <a:gridCol w="1262164">
                       <a:extLst>
                         <a:ext uri="{9D8B030D-6E8A-4147-A177-3AD203B41FA5}">
-                          <a16:colId xmlns:a16="http://schemas.microsoft.com/office/drawing/2014/main" xmlns="" val="20002"/>
+                          <a16:colId xmlns:a16="http://schemas.microsoft.com/office/drawing/2014/main" val="20002"/>
                         </a:ext>
                       </a:extLst>
                     </a:gridCol>
                     <a:gridCol w="1262164">
                       <a:extLst>
                         <a:ext uri="{9D8B030D-6E8A-4147-A177-3AD203B41FA5}">
-                          <a16:colId xmlns:a16="http://schemas.microsoft.com/office/drawing/2014/main" xmlns="" val="20003"/>
+                          <a16:colId xmlns:a16="http://schemas.microsoft.com/office/drawing/2014/main" val="20003"/>
                         </a:ext>
                       </a:extLst>
                     </a:gridCol>
                     <a:gridCol w="1262164">
                       <a:extLst>
                         <a:ext uri="{9D8B030D-6E8A-4147-A177-3AD203B41FA5}">
-                          <a16:colId xmlns:a16="http://schemas.microsoft.com/office/drawing/2014/main" xmlns="" val="20004"/>
+                          <a16:colId xmlns:a16="http://schemas.microsoft.com/office/drawing/2014/main" val="20004"/>
                         </a:ext>
                       </a:extLst>
                     </a:gridCol>
@@ -16011,7 +15883,7 @@
                     </a:tc>
                     <a:extLst>
                       <a:ext uri="{0D108BD9-81ED-4DB2-BD59-A6C34878D82A}">
-                        <a16:rowId xmlns:a16="http://schemas.microsoft.com/office/drawing/2014/main" xmlns="" val="10000"/>
+                        <a16:rowId xmlns:a16="http://schemas.microsoft.com/office/drawing/2014/main" val="10000"/>
                       </a:ext>
                     </a:extLst>
                   </a:tr>
@@ -16417,7 +16289,7 @@
                     </a:tc>
                     <a:extLst>
                       <a:ext uri="{0D108BD9-81ED-4DB2-BD59-A6C34878D82A}">
-                        <a16:rowId xmlns:a16="http://schemas.microsoft.com/office/drawing/2014/main" xmlns="" val="10001"/>
+                        <a16:rowId xmlns:a16="http://schemas.microsoft.com/office/drawing/2014/main" val="10001"/>
                       </a:ext>
                     </a:extLst>
                   </a:tr>
@@ -16823,7 +16695,7 @@
                     </a:tc>
                     <a:extLst>
                       <a:ext uri="{0D108BD9-81ED-4DB2-BD59-A6C34878D82A}">
-                        <a16:rowId xmlns:a16="http://schemas.microsoft.com/office/drawing/2014/main" xmlns="" val="10002"/>
+                        <a16:rowId xmlns:a16="http://schemas.microsoft.com/office/drawing/2014/main" val="10002"/>
                       </a:ext>
                     </a:extLst>
                   </a:tr>
@@ -17197,7 +17069,7 @@
                     </a:tc>
                     <a:extLst>
                       <a:ext uri="{0D108BD9-81ED-4DB2-BD59-A6C34878D82A}">
-                        <a16:rowId xmlns:a16="http://schemas.microsoft.com/office/drawing/2014/main" xmlns="" val="10003"/>
+                        <a16:rowId xmlns:a16="http://schemas.microsoft.com/office/drawing/2014/main" val="10003"/>
                       </a:ext>
                     </a:extLst>
                   </a:tr>
@@ -17297,7 +17169,7 @@
                     </a:tc>
                     <a:extLst>
                       <a:ext uri="{0D108BD9-81ED-4DB2-BD59-A6C34878D82A}">
-                        <a16:rowId xmlns:a16="http://schemas.microsoft.com/office/drawing/2014/main" xmlns="" val="10004"/>
+                        <a16:rowId xmlns:a16="http://schemas.microsoft.com/office/drawing/2014/main" val="10004"/>
                       </a:ext>
                     </a:extLst>
                   </a:tr>
@@ -18803,7 +18675,7 @@
               <p:cNvPr id="6" name="CaixaDeTexto 5">
                 <a:extLst>
                   <a:ext uri="{FF2B5EF4-FFF2-40B4-BE49-F238E27FC236}">
-                    <a16:creationId xmlns:a16="http://schemas.microsoft.com/office/drawing/2014/main" xmlns="" id="{B7DCAE37-0B68-31FE-C4B4-15B3A38CF8F2}"/>
+                    <a16:creationId xmlns:a16="http://schemas.microsoft.com/office/drawing/2014/main" id="{B7DCAE37-0B68-31FE-C4B4-15B3A38CF8F2}"/>
                   </a:ext>
                 </a:extLst>
               </p:cNvPr>
@@ -18920,7 +18792,7 @@
               <p:cNvPr id="7" name="CaixaDeTexto 6">
                 <a:extLst>
                   <a:ext uri="{FF2B5EF4-FFF2-40B4-BE49-F238E27FC236}">
-                    <a16:creationId xmlns:a16="http://schemas.microsoft.com/office/drawing/2014/main" xmlns="" id="{FA95A716-2329-11F1-7CC2-2B3C42F20DCF}"/>
+                    <a16:creationId xmlns:a16="http://schemas.microsoft.com/office/drawing/2014/main" id="{FA95A716-2329-11F1-7CC2-2B3C42F20DCF}"/>
                   </a:ext>
                 </a:extLst>
               </p:cNvPr>
@@ -19071,7 +18943,7 @@
           <p:cNvPr id="2" name="Título 1">
             <a:extLst>
               <a:ext uri="{FF2B5EF4-FFF2-40B4-BE49-F238E27FC236}">
-                <a16:creationId xmlns:a16="http://schemas.microsoft.com/office/drawing/2014/main" xmlns="" id="{0BF87474-9D5C-0B3D-63E8-AD1CF986CDF4}"/>
+                <a16:creationId xmlns:a16="http://schemas.microsoft.com/office/drawing/2014/main" id="{0BF87474-9D5C-0B3D-63E8-AD1CF986CDF4}"/>
               </a:ext>
             </a:extLst>
           </p:cNvPr>
@@ -19103,7 +18975,7 @@
           <p:cNvPr id="3" name="Espaço Reservado para Conteúdo 2">
             <a:extLst>
               <a:ext uri="{FF2B5EF4-FFF2-40B4-BE49-F238E27FC236}">
-                <a16:creationId xmlns:a16="http://schemas.microsoft.com/office/drawing/2014/main" xmlns="" id="{82DAA94B-AA8F-AF15-EE11-8B107DF8C311}"/>
+                <a16:creationId xmlns:a16="http://schemas.microsoft.com/office/drawing/2014/main" id="{82DAA94B-AA8F-AF15-EE11-8B107DF8C311}"/>
               </a:ext>
             </a:extLst>
           </p:cNvPr>
@@ -19233,7 +19105,7 @@
               <p:cNvPr id="4" name="CaixaDeTexto 3">
                 <a:extLst>
                   <a:ext uri="{FF2B5EF4-FFF2-40B4-BE49-F238E27FC236}">
-                    <a16:creationId xmlns:a16="http://schemas.microsoft.com/office/drawing/2014/main" xmlns="" id="{B66DD82C-2C7C-932B-0676-6777E743E2CA}"/>
+                    <a16:creationId xmlns:a16="http://schemas.microsoft.com/office/drawing/2014/main" id="{B66DD82C-2C7C-932B-0676-6777E743E2CA}"/>
                   </a:ext>
                 </a:extLst>
               </p:cNvPr>
@@ -19381,7 +19253,7 @@
               <p:cNvPr id="5" name="CaixaDeTexto 4">
                 <a:extLst>
                   <a:ext uri="{FF2B5EF4-FFF2-40B4-BE49-F238E27FC236}">
-                    <a16:creationId xmlns:a16="http://schemas.microsoft.com/office/drawing/2014/main" xmlns="" id="{1C33F56B-917E-EDAE-B038-52C2901A324E}"/>
+                    <a16:creationId xmlns:a16="http://schemas.microsoft.com/office/drawing/2014/main" id="{1C33F56B-917E-EDAE-B038-52C2901A324E}"/>
                   </a:ext>
                 </a:extLst>
               </p:cNvPr>
@@ -19575,7 +19447,7 @@
           <p:cNvPr id="2" name="Título 1">
             <a:extLst>
               <a:ext uri="{FF2B5EF4-FFF2-40B4-BE49-F238E27FC236}">
-                <a16:creationId xmlns:a16="http://schemas.microsoft.com/office/drawing/2014/main" xmlns="" id="{EECB3FED-5D1A-7084-5333-A3B2FA75F608}"/>
+                <a16:creationId xmlns:a16="http://schemas.microsoft.com/office/drawing/2014/main" id="{EECB3FED-5D1A-7084-5333-A3B2FA75F608}"/>
               </a:ext>
             </a:extLst>
           </p:cNvPr>
@@ -19603,7 +19475,7 @@
           <p:cNvPr id="3" name="Espaço Reservado para Conteúdo 2">
             <a:extLst>
               <a:ext uri="{FF2B5EF4-FFF2-40B4-BE49-F238E27FC236}">
-                <a16:creationId xmlns:a16="http://schemas.microsoft.com/office/drawing/2014/main" xmlns="" id="{25FE7774-7186-A846-D8DE-518B2CBF4EBD}"/>
+                <a16:creationId xmlns:a16="http://schemas.microsoft.com/office/drawing/2014/main" id="{25FE7774-7186-A846-D8DE-518B2CBF4EBD}"/>
               </a:ext>
             </a:extLst>
           </p:cNvPr>
@@ -19628,15 +19500,7 @@
           <a:p>
             <a:r>
               <a:rPr lang="pt-BR" dirty="0"/>
-              <a:t>Anteriormente, </a:t>
-            </a:r>
-            <a:r>
-              <a:rPr lang="pt-BR" dirty="0" smtClean="0"/>
-              <a:t>para realizar a </a:t>
-            </a:r>
-            <a:r>
-              <a:rPr lang="pt-BR" dirty="0"/>
-              <a:t>análise do desempenho de um classificador, usamos apenas a acurácia. </a:t>
+              <a:t>Anteriormente, para realizar a análise do desempenho de um classificador, usamos apenas a acurácia. </a:t>
             </a:r>
           </a:p>
           <a:p>
@@ -19647,16 +19511,8 @@
           </a:p>
           <a:p>
             <a:r>
-              <a:rPr lang="pt-BR" dirty="0" smtClean="0"/>
-              <a:t>Portanto, n</a:t>
-            </a:r>
-            <a:r>
-              <a:rPr lang="pt-BR" dirty="0" smtClean="0"/>
-              <a:t>este </a:t>
-            </a:r>
-            <a:r>
               <a:rPr lang="pt-BR" dirty="0"/>
-              <a:t>tópico, veremos algumas outras métricas.</a:t>
+              <a:t>Portanto, neste tópico, veremos algumas outras métricas.</a:t>
             </a:r>
           </a:p>
         </p:txBody>
@@ -19696,7 +19552,7 @@
           <p:cNvPr id="2" name="Título 1">
             <a:extLst>
               <a:ext uri="{FF2B5EF4-FFF2-40B4-BE49-F238E27FC236}">
-                <a16:creationId xmlns:a16="http://schemas.microsoft.com/office/drawing/2014/main" xmlns="" id="{B64DCA44-CC6E-8998-A693-998426B94AA3}"/>
+                <a16:creationId xmlns:a16="http://schemas.microsoft.com/office/drawing/2014/main" id="{B64DCA44-CC6E-8998-A693-998426B94AA3}"/>
               </a:ext>
             </a:extLst>
           </p:cNvPr>
@@ -19730,7 +19586,7 @@
               <p:cNvPr id="3" name="Espaço Reservado para Conteúdo 2">
                 <a:extLst>
                   <a:ext uri="{FF2B5EF4-FFF2-40B4-BE49-F238E27FC236}">
-                    <a16:creationId xmlns:a16="http://schemas.microsoft.com/office/drawing/2014/main" xmlns="" id="{C261D671-8D7F-BF6D-3C19-CFC15A190C23}"/>
+                    <a16:creationId xmlns:a16="http://schemas.microsoft.com/office/drawing/2014/main" id="{C261D671-8D7F-BF6D-3C19-CFC15A190C23}"/>
                   </a:ext>
                 </a:extLst>
               </p:cNvPr>
@@ -20018,7 +19874,7 @@
               <p:cNvPr id="5" name="CaixaDeTexto 4">
                 <a:extLst>
                   <a:ext uri="{FF2B5EF4-FFF2-40B4-BE49-F238E27FC236}">
-                    <a16:creationId xmlns:a16="http://schemas.microsoft.com/office/drawing/2014/main" xmlns="" id="{C0A929A7-E33F-6D02-D301-38706DE0743C}"/>
+                    <a16:creationId xmlns:a16="http://schemas.microsoft.com/office/drawing/2014/main" id="{C0A929A7-E33F-6D02-D301-38706DE0743C}"/>
                   </a:ext>
                 </a:extLst>
               </p:cNvPr>
@@ -20324,13 +20180,6 @@
   <p:clrMapOvr>
     <a:masterClrMapping/>
   </p:clrMapOvr>
-  <p:timing>
-    <p:tnLst>
-      <p:par>
-        <p:cTn id="1" dur="indefinite" restart="never" nodeType="tmRoot"/>
-      </p:par>
-    </p:tnLst>
-  </p:timing>
 </p:sld>
 </file>
 
@@ -20356,7 +20205,7 @@
           <p:cNvPr id="2" name="Título 1">
             <a:extLst>
               <a:ext uri="{FF2B5EF4-FFF2-40B4-BE49-F238E27FC236}">
-                <a16:creationId xmlns:a16="http://schemas.microsoft.com/office/drawing/2014/main" xmlns="" id="{9CD00B3E-85D7-8B25-6629-4A85FF36133A}"/>
+                <a16:creationId xmlns:a16="http://schemas.microsoft.com/office/drawing/2014/main" id="{9CD00B3E-85D7-8B25-6629-4A85FF36133A}"/>
               </a:ext>
             </a:extLst>
           </p:cNvPr>
@@ -20384,7 +20233,7 @@
           <p:cNvPr id="3" name="Espaço Reservado para Conteúdo 2">
             <a:extLst>
               <a:ext uri="{FF2B5EF4-FFF2-40B4-BE49-F238E27FC236}">
-                <a16:creationId xmlns:a16="http://schemas.microsoft.com/office/drawing/2014/main" xmlns="" id="{9730104F-E6BA-B308-644A-11A7E4939EBD}"/>
+                <a16:creationId xmlns:a16="http://schemas.microsoft.com/office/drawing/2014/main" id="{9730104F-E6BA-B308-644A-11A7E4939EBD}"/>
               </a:ext>
             </a:extLst>
           </p:cNvPr>
@@ -20417,7 +20266,7 @@
           <p:cNvPr id="2052" name="Picture 4" descr="Project Jupyter | Try Jupyter">
             <a:extLst>
               <a:ext uri="{FF2B5EF4-FFF2-40B4-BE49-F238E27FC236}">
-                <a16:creationId xmlns:a16="http://schemas.microsoft.com/office/drawing/2014/main" xmlns="" id="{FC70A9A5-A2C7-C005-C6C5-A9FF775654D9}"/>
+                <a16:creationId xmlns:a16="http://schemas.microsoft.com/office/drawing/2014/main" id="{FC70A9A5-A2C7-C005-C6C5-A9FF775654D9}"/>
               </a:ext>
             </a:extLst>
           </p:cNvPr>
@@ -20464,7 +20313,7 @@
           <p:cNvPr id="2056" name="Picture 8" descr="Google Colaboratory Colab - Guía Completa Español - Marketing Branding">
             <a:extLst>
               <a:ext uri="{FF2B5EF4-FFF2-40B4-BE49-F238E27FC236}">
-                <a16:creationId xmlns:a16="http://schemas.microsoft.com/office/drawing/2014/main" xmlns="" id="{8A007768-2032-FE11-22C9-9394A0EF02EF}"/>
+                <a16:creationId xmlns:a16="http://schemas.microsoft.com/office/drawing/2014/main" id="{8A007768-2032-FE11-22C9-9394A0EF02EF}"/>
               </a:ext>
             </a:extLst>
           </p:cNvPr>
@@ -20509,7 +20358,7 @@
           <p:cNvPr id="2058" name="Picture 10" descr="IT12A01: FUNDAMENTALS OF PYTHON PROGRAMMING (SF) (SYNCHRONOUS E-LEARNING) -  NTUC LearningHub">
             <a:extLst>
               <a:ext uri="{FF2B5EF4-FFF2-40B4-BE49-F238E27FC236}">
-                <a16:creationId xmlns:a16="http://schemas.microsoft.com/office/drawing/2014/main" xmlns="" id="{80EDF8DB-E749-8471-3ACA-2FFE3006FC46}"/>
+                <a16:creationId xmlns:a16="http://schemas.microsoft.com/office/drawing/2014/main" id="{80EDF8DB-E749-8471-3ACA-2FFE3006FC46}"/>
               </a:ext>
             </a:extLst>
           </p:cNvPr>
@@ -20554,7 +20403,7 @@
           <p:cNvPr id="10" name="Sinal de Adição 9">
             <a:extLst>
               <a:ext uri="{FF2B5EF4-FFF2-40B4-BE49-F238E27FC236}">
-                <a16:creationId xmlns:a16="http://schemas.microsoft.com/office/drawing/2014/main" xmlns="" id="{C6DC4B29-EABA-20F7-BB46-C33BEC93E2DD}"/>
+                <a16:creationId xmlns:a16="http://schemas.microsoft.com/office/drawing/2014/main" id="{C6DC4B29-EABA-20F7-BB46-C33BEC93E2DD}"/>
               </a:ext>
             </a:extLst>
           </p:cNvPr>
@@ -20602,7 +20451,7 @@
           <p:cNvPr id="11" name="Sinal de Adição 10">
             <a:extLst>
               <a:ext uri="{FF2B5EF4-FFF2-40B4-BE49-F238E27FC236}">
-                <a16:creationId xmlns:a16="http://schemas.microsoft.com/office/drawing/2014/main" xmlns="" id="{FF65B64B-136B-DCC4-8A01-509D3D5CD19F}"/>
+                <a16:creationId xmlns:a16="http://schemas.microsoft.com/office/drawing/2014/main" id="{FF65B64B-136B-DCC4-8A01-509D3D5CD19F}"/>
               </a:ext>
             </a:extLst>
           </p:cNvPr>
@@ -20655,13 +20504,6 @@
   <p:clrMapOvr>
     <a:masterClrMapping/>
   </p:clrMapOvr>
-  <p:timing>
-    <p:tnLst>
-      <p:par>
-        <p:cTn id="1" dur="indefinite" restart="never" nodeType="tmRoot"/>
-      </p:par>
-    </p:tnLst>
-  </p:timing>
 </p:sld>
 </file>
 
@@ -20684,10 +20526,113 @@
       </p:grpSpPr>
       <p:sp>
         <p:nvSpPr>
+          <p:cNvPr id="2" name="Title 1">
+            <a:extLst>
+              <a:ext uri="{FF2B5EF4-FFF2-40B4-BE49-F238E27FC236}">
+                <a16:creationId xmlns:a16="http://schemas.microsoft.com/office/drawing/2014/main" id="{CF49AE95-3E0A-F9BB-A3FD-4C328EF25334}"/>
+              </a:ext>
+            </a:extLst>
+          </p:cNvPr>
+          <p:cNvSpPr>
+            <a:spLocks noGrp="1"/>
+          </p:cNvSpPr>
+          <p:nvPr>
+            <p:ph type="title"/>
+          </p:nvPr>
+        </p:nvSpPr>
+        <p:spPr/>
+        <p:txBody>
+          <a:bodyPr/>
+          <a:lstStyle/>
+          <a:p>
+            <a:r>
+              <a:rPr lang="pt-BR" dirty="0"/>
+              <a:t>Lista de exercícios</a:t>
+            </a:r>
+            <a:endParaRPr lang="en-US" dirty="0"/>
+          </a:p>
+        </p:txBody>
+      </p:sp>
+      <p:sp>
+        <p:nvSpPr>
+          <p:cNvPr id="3" name="Content Placeholder 2">
+            <a:extLst>
+              <a:ext uri="{FF2B5EF4-FFF2-40B4-BE49-F238E27FC236}">
+                <a16:creationId xmlns:a16="http://schemas.microsoft.com/office/drawing/2014/main" id="{A431927B-FE56-CB25-3ECF-AB5E92A7DC71}"/>
+              </a:ext>
+            </a:extLst>
+          </p:cNvPr>
+          <p:cNvSpPr>
+            <a:spLocks noGrp="1"/>
+          </p:cNvSpPr>
+          <p:nvPr>
+            <p:ph idx="1"/>
+          </p:nvPr>
+        </p:nvSpPr>
+        <p:spPr/>
+        <p:txBody>
+          <a:bodyPr/>
+          <a:lstStyle/>
+          <a:p>
+            <a:pPr marL="0" indent="0">
+              <a:buNone/>
+            </a:pPr>
+            <a:r>
+              <a:rPr lang="en-US" dirty="0"/>
+              <a:t>Lista #8 – </a:t>
+            </a:r>
+            <a:r>
+              <a:rPr lang="en-US" dirty="0" err="1"/>
+              <a:t>Métricas</a:t>
+            </a:r>
+            <a:r>
+              <a:rPr lang="en-US" dirty="0"/>
+              <a:t> de </a:t>
+            </a:r>
+            <a:r>
+              <a:rPr lang="en-US" dirty="0" err="1"/>
+              <a:t>classificação</a:t>
+            </a:r>
+            <a:endParaRPr lang="en-US" dirty="0"/>
+          </a:p>
+        </p:txBody>
+      </p:sp>
+    </p:spTree>
+    <p:extLst>
+      <p:ext uri="{BB962C8B-B14F-4D97-AF65-F5344CB8AC3E}">
+        <p14:creationId xmlns:p14="http://schemas.microsoft.com/office/powerpoint/2010/main" val="2392053112"/>
+      </p:ext>
+    </p:extLst>
+  </p:cSld>
+  <p:clrMapOvr>
+    <a:masterClrMapping/>
+  </p:clrMapOvr>
+</p:sld>
+</file>
+
+<file path=ppt/slides/slide23.xml><?xml version="1.0" encoding="utf-8"?>
+<p:sld xmlns:a="http://schemas.openxmlformats.org/drawingml/2006/main" xmlns:r="http://schemas.openxmlformats.org/officeDocument/2006/relationships" xmlns:p="http://schemas.openxmlformats.org/presentationml/2006/main">
+  <p:cSld>
+    <p:spTree>
+      <p:nvGrpSpPr>
+        <p:cNvPr id="1" name=""/>
+        <p:cNvGrpSpPr/>
+        <p:nvPr/>
+      </p:nvGrpSpPr>
+      <p:grpSpPr>
+        <a:xfrm>
+          <a:off x="0" y="0"/>
+          <a:ext cx="0" cy="0"/>
+          <a:chOff x="0" y="0"/>
+          <a:chExt cx="0" cy="0"/>
+        </a:xfrm>
+      </p:grpSpPr>
+      <p:sp>
+        <p:nvSpPr>
           <p:cNvPr id="4" name="Título 1">
             <a:extLst>
               <a:ext uri="{FF2B5EF4-FFF2-40B4-BE49-F238E27FC236}">
-                <a16:creationId xmlns:a16="http://schemas.microsoft.com/office/drawing/2014/main" xmlns="" id="{32666AC8-2E17-4DB4-B0F5-60C640CCFD2E}"/>
+                <a16:creationId xmlns:a16="http://schemas.microsoft.com/office/drawing/2014/main" id="{32666AC8-2E17-4DB4-B0F5-60C640CCFD2E}"/>
               </a:ext>
             </a:extLst>
           </p:cNvPr>
@@ -20748,17 +20693,10 @@
   <p:clrMapOvr>
     <a:masterClrMapping/>
   </p:clrMapOvr>
-  <p:timing>
-    <p:tnLst>
-      <p:par>
-        <p:cTn id="1" dur="indefinite" restart="never" nodeType="tmRoot"/>
-      </p:par>
-    </p:tnLst>
-  </p:timing>
 </p:sld>
 </file>
 
-<file path=ppt/slides/slide23.xml><?xml version="1.0" encoding="utf-8"?>
+<file path=ppt/slides/slide24.xml><?xml version="1.0" encoding="utf-8"?>
 <p:sld xmlns:a="http://schemas.openxmlformats.org/drawingml/2006/main" xmlns:r="http://schemas.openxmlformats.org/officeDocument/2006/relationships" xmlns:p="http://schemas.openxmlformats.org/presentationml/2006/main">
   <p:cSld>
     <p:spTree>
@@ -20780,7 +20718,7 @@
           <p:cNvPr id="4" name="Título 1">
             <a:extLst>
               <a:ext uri="{FF2B5EF4-FFF2-40B4-BE49-F238E27FC236}">
-                <a16:creationId xmlns:a16="http://schemas.microsoft.com/office/drawing/2014/main" xmlns="" id="{32666AC8-2E17-4DB4-B0F5-60C640CCFD2E}"/>
+                <a16:creationId xmlns:a16="http://schemas.microsoft.com/office/drawing/2014/main" id="{32666AC8-2E17-4DB4-B0F5-60C640CCFD2E}"/>
               </a:ext>
             </a:extLst>
           </p:cNvPr>
@@ -20844,6494 +20782,6 @@
 </p:sld>
 </file>
 
-<file path=ppt/slides/slide24.xml><?xml version="1.0" encoding="utf-8"?>
-<p:sld xmlns:a="http://schemas.openxmlformats.org/drawingml/2006/main" xmlns:r="http://schemas.openxmlformats.org/officeDocument/2006/relationships" xmlns:p="http://schemas.openxmlformats.org/presentationml/2006/main">
-  <p:cSld>
-    <p:spTree>
-      <p:nvGrpSpPr>
-        <p:cNvPr id="1" name=""/>
-        <p:cNvGrpSpPr/>
-        <p:nvPr/>
-      </p:nvGrpSpPr>
-      <p:grpSpPr>
-        <a:xfrm>
-          <a:off x="0" y="0"/>
-          <a:ext cx="0" cy="0"/>
-          <a:chOff x="0" y="0"/>
-          <a:chExt cx="0" cy="0"/>
-        </a:xfrm>
-      </p:grpSpPr>
-      <p:sp>
-        <p:nvSpPr>
-          <p:cNvPr id="3" name="Espaço Reservado para Conteúdo 2">
-            <a:extLst>
-              <a:ext uri="{FF2B5EF4-FFF2-40B4-BE49-F238E27FC236}">
-                <a16:creationId xmlns:a16="http://schemas.microsoft.com/office/drawing/2014/main" xmlns="" id="{92EB0AB5-A38B-16DC-1635-6A42E1956FE2}"/>
-              </a:ext>
-            </a:extLst>
-          </p:cNvPr>
-          <p:cNvSpPr>
-            <a:spLocks noGrp="1"/>
-          </p:cNvSpPr>
-          <p:nvPr>
-            <p:ph idx="1"/>
-          </p:nvPr>
-        </p:nvSpPr>
-        <p:spPr>
-          <a:xfrm>
-            <a:off x="838200" y="2859854"/>
-            <a:ext cx="10515600" cy="1138292"/>
-          </a:xfrm>
-        </p:spPr>
-        <p:txBody>
-          <a:bodyPr>
-            <a:normAutofit/>
-          </a:bodyPr>
-          <a:lstStyle/>
-          <a:p>
-            <a:pPr marL="0" indent="0" algn="ctr">
-              <a:buNone/>
-            </a:pPr>
-            <a:r>
-              <a:rPr lang="pt-BR" sz="6000" dirty="0"/>
-              <a:t>Anexo I: Acurácia versus precisão</a:t>
-            </a:r>
-          </a:p>
-        </p:txBody>
-      </p:sp>
-    </p:spTree>
-    <p:extLst>
-      <p:ext uri="{BB962C8B-B14F-4D97-AF65-F5344CB8AC3E}">
-        <p14:creationId xmlns:p14="http://schemas.microsoft.com/office/powerpoint/2010/main" val="505914446"/>
-      </p:ext>
-    </p:extLst>
-  </p:cSld>
-  <p:clrMapOvr>
-    <a:masterClrMapping/>
-  </p:clrMapOvr>
-</p:sld>
-</file>
-
-<file path=ppt/slides/slide25.xml><?xml version="1.0" encoding="utf-8"?>
-<p:sld xmlns:a="http://schemas.openxmlformats.org/drawingml/2006/main" xmlns:r="http://schemas.openxmlformats.org/officeDocument/2006/relationships" xmlns:p="http://schemas.openxmlformats.org/presentationml/2006/main">
-  <p:cSld>
-    <p:spTree>
-      <p:nvGrpSpPr>
-        <p:cNvPr id="1" name=""/>
-        <p:cNvGrpSpPr/>
-        <p:nvPr/>
-      </p:nvGrpSpPr>
-      <p:grpSpPr>
-        <a:xfrm>
-          <a:off x="0" y="0"/>
-          <a:ext cx="0" cy="0"/>
-          <a:chOff x="0" y="0"/>
-          <a:chExt cx="0" cy="0"/>
-        </a:xfrm>
-      </p:grpSpPr>
-      <p:sp>
-        <p:nvSpPr>
-          <p:cNvPr id="2" name="Título 1">
-            <a:extLst>
-              <a:ext uri="{FF2B5EF4-FFF2-40B4-BE49-F238E27FC236}">
-                <a16:creationId xmlns:a16="http://schemas.microsoft.com/office/drawing/2014/main" xmlns="" id="{99E58330-6491-8928-0519-F252D4F94A5E}"/>
-              </a:ext>
-            </a:extLst>
-          </p:cNvPr>
-          <p:cNvSpPr>
-            <a:spLocks noGrp="1"/>
-          </p:cNvSpPr>
-          <p:nvPr>
-            <p:ph type="title"/>
-          </p:nvPr>
-        </p:nvSpPr>
-        <p:spPr/>
-        <p:txBody>
-          <a:bodyPr/>
-          <a:lstStyle/>
-          <a:p>
-            <a:r>
-              <a:rPr lang="pt-BR" dirty="0"/>
-              <a:t>Acurácia versus precisão</a:t>
-            </a:r>
-          </a:p>
-        </p:txBody>
-      </p:sp>
-      <p:sp>
-        <p:nvSpPr>
-          <p:cNvPr id="3" name="Espaço Reservado para Conteúdo 2">
-            <a:extLst>
-              <a:ext uri="{FF2B5EF4-FFF2-40B4-BE49-F238E27FC236}">
-                <a16:creationId xmlns:a16="http://schemas.microsoft.com/office/drawing/2014/main" xmlns="" id="{8C2EDB56-C25A-3B0E-965B-3CFF388108BC}"/>
-              </a:ext>
-            </a:extLst>
-          </p:cNvPr>
-          <p:cNvSpPr>
-            <a:spLocks noGrp="1"/>
-          </p:cNvSpPr>
-          <p:nvPr>
-            <p:ph idx="1"/>
-          </p:nvPr>
-        </p:nvSpPr>
-        <p:spPr>
-          <a:xfrm>
-            <a:off x="6457244" y="1825624"/>
-            <a:ext cx="5621867" cy="5032375"/>
-          </a:xfrm>
-        </p:spPr>
-        <p:txBody>
-          <a:bodyPr>
-            <a:normAutofit/>
-          </a:bodyPr>
-          <a:lstStyle/>
-          <a:p>
-            <a:r>
-              <a:rPr lang="pt-BR" dirty="0"/>
-              <a:t>Em um conjunto de predições:</a:t>
-            </a:r>
-          </a:p>
-          <a:p>
-            <a:pPr lvl="1">
-              <a:buFont typeface="Wingdings" panose="05000000000000000000" pitchFamily="2" charset="2"/>
-              <a:buChar char="§"/>
-            </a:pPr>
-            <a:r>
-              <a:rPr lang="pt-BR" dirty="0"/>
-              <a:t>Acurácia é a proximidade das predições em relação aos rótulos, ou seja, o quão perto estão do alvo.</a:t>
-            </a:r>
-          </a:p>
-          <a:p>
-            <a:pPr lvl="1">
-              <a:buFont typeface="Wingdings" panose="05000000000000000000" pitchFamily="2" charset="2"/>
-              <a:buChar char="§"/>
-            </a:pPr>
-            <a:r>
-              <a:rPr lang="pt-BR" dirty="0"/>
-              <a:t>Precisão é a proximidade das medidas entre si.</a:t>
-            </a:r>
-          </a:p>
-          <a:p>
-            <a:r>
-              <a:rPr lang="pt-BR" dirty="0"/>
-              <a:t>A precisão é independente da acurácia. </a:t>
-            </a:r>
-          </a:p>
-          <a:p>
-            <a:r>
-              <a:rPr lang="pt-BR" dirty="0"/>
-              <a:t>Isso significa que é possível ter um modelo muito preciso, mas não muito exato, e também é possível ser exato sem ser preciso.</a:t>
-            </a:r>
-          </a:p>
-        </p:txBody>
-      </p:sp>
-      <p:pic>
-        <p:nvPicPr>
-          <p:cNvPr id="1026" name="Picture 2">
-            <a:extLst>
-              <a:ext uri="{FF2B5EF4-FFF2-40B4-BE49-F238E27FC236}">
-                <a16:creationId xmlns:a16="http://schemas.microsoft.com/office/drawing/2014/main" xmlns="" id="{A785A443-FAE1-D81B-CF1E-2866E830AF53}"/>
-              </a:ext>
-            </a:extLst>
-          </p:cNvPr>
-          <p:cNvPicPr>
-            <a:picLocks noChangeAspect="1" noChangeArrowheads="1"/>
-          </p:cNvPicPr>
-          <p:nvPr/>
-        </p:nvPicPr>
-        <p:blipFill>
-          <a:blip r:embed="rId2">
-            <a:extLst>
-              <a:ext uri="{28A0092B-C50C-407E-A947-70E740481C1C}">
-                <a14:useLocalDpi xmlns:a14="http://schemas.microsoft.com/office/drawing/2010/main" val="0"/>
-              </a:ext>
-            </a:extLst>
-          </a:blip>
-          <a:srcRect/>
-          <a:stretch>
-            <a:fillRect/>
-          </a:stretch>
-        </p:blipFill>
-        <p:spPr bwMode="auto">
-          <a:xfrm>
-            <a:off x="933038" y="1941688"/>
-            <a:ext cx="4654962" cy="4823795"/>
-          </a:xfrm>
-          <a:prstGeom prst="rect">
-            <a:avLst/>
-          </a:prstGeom>
-          <a:noFill/>
-          <a:extLst>
-            <a:ext uri="{909E8E84-426E-40DD-AFC4-6F175D3DCCD1}">
-              <a14:hiddenFill xmlns:a14="http://schemas.microsoft.com/office/drawing/2010/main">
-                <a:solidFill>
-                  <a:srgbClr val="FFFFFF"/>
-                </a:solidFill>
-              </a14:hiddenFill>
-            </a:ext>
-          </a:extLst>
-        </p:spPr>
-      </p:pic>
-    </p:spTree>
-    <p:extLst>
-      <p:ext uri="{BB962C8B-B14F-4D97-AF65-F5344CB8AC3E}">
-        <p14:creationId xmlns:p14="http://schemas.microsoft.com/office/powerpoint/2010/main" val="889580656"/>
-      </p:ext>
-    </p:extLst>
-  </p:cSld>
-  <p:clrMapOvr>
-    <a:masterClrMapping/>
-  </p:clrMapOvr>
-</p:sld>
-</file>
-
-<file path=ppt/slides/slide26.xml><?xml version="1.0" encoding="utf-8"?>
-<p:sld xmlns:a="http://schemas.openxmlformats.org/drawingml/2006/main" xmlns:r="http://schemas.openxmlformats.org/officeDocument/2006/relationships" xmlns:p="http://schemas.openxmlformats.org/presentationml/2006/main">
-  <p:cSld>
-    <p:spTree>
-      <p:nvGrpSpPr>
-        <p:cNvPr id="1" name=""/>
-        <p:cNvGrpSpPr/>
-        <p:nvPr/>
-      </p:nvGrpSpPr>
-      <p:grpSpPr>
-        <a:xfrm>
-          <a:off x="0" y="0"/>
-          <a:ext cx="0" cy="0"/>
-          <a:chOff x="0" y="0"/>
-          <a:chExt cx="0" cy="0"/>
-        </a:xfrm>
-      </p:grpSpPr>
-      <p:sp>
-        <p:nvSpPr>
-          <p:cNvPr id="4" name="Título 1">
-            <a:extLst>
-              <a:ext uri="{FF2B5EF4-FFF2-40B4-BE49-F238E27FC236}">
-                <a16:creationId xmlns:a16="http://schemas.microsoft.com/office/drawing/2014/main" xmlns="" id="{32666AC8-2E17-4DB4-B0F5-60C640CCFD2E}"/>
-              </a:ext>
-            </a:extLst>
-          </p:cNvPr>
-          <p:cNvSpPr txBox="1">
-            <a:spLocks/>
-          </p:cNvSpPr>
-          <p:nvPr/>
-        </p:nvSpPr>
-        <p:spPr>
-          <a:xfrm>
-            <a:off x="1431533" y="2720526"/>
-            <a:ext cx="9144000" cy="1029541"/>
-          </a:xfrm>
-          <a:prstGeom prst="rect">
-            <a:avLst/>
-          </a:prstGeom>
-        </p:spPr>
-        <p:txBody>
-          <a:bodyPr vert="horz" lIns="91440" tIns="45720" rIns="91440" bIns="45720" rtlCol="0" anchor="ctr">
-            <a:normAutofit/>
-          </a:bodyPr>
-          <a:lstStyle>
-            <a:lvl1pPr algn="l" defTabSz="914400" rtl="0" eaLnBrk="1" latinLnBrk="0" hangingPunct="1">
-              <a:lnSpc>
-                <a:spcPct val="90000"/>
-              </a:lnSpc>
-              <a:spcBef>
-                <a:spcPct val="0"/>
-              </a:spcBef>
-              <a:buNone/>
-              <a:defRPr sz="4400" kern="1200">
-                <a:solidFill>
-                  <a:schemeClr val="tx1"/>
-                </a:solidFill>
-                <a:latin typeface="+mj-lt"/>
-                <a:ea typeface="+mj-ea"/>
-                <a:cs typeface="+mj-cs"/>
-              </a:defRPr>
-            </a:lvl1pPr>
-          </a:lstStyle>
-          <a:p>
-            <a:pPr algn="ctr"/>
-            <a:r>
-              <a:rPr lang="pt-BR" sz="6600" dirty="0"/>
-              <a:t>Figuras</a:t>
-            </a:r>
-            <a:endParaRPr lang="pt-BR" sz="6600" b="1" i="1" dirty="0"/>
-          </a:p>
-        </p:txBody>
-      </p:sp>
-    </p:spTree>
-    <p:extLst>
-      <p:ext uri="{BB962C8B-B14F-4D97-AF65-F5344CB8AC3E}">
-        <p14:creationId xmlns:p14="http://schemas.microsoft.com/office/powerpoint/2010/main" val="3857817364"/>
-      </p:ext>
-    </p:extLst>
-  </p:cSld>
-  <p:clrMapOvr>
-    <a:masterClrMapping/>
-  </p:clrMapOvr>
-</p:sld>
-</file>
-
-<file path=ppt/slides/slide27.xml><?xml version="1.0" encoding="utf-8"?>
-<p:sld xmlns:a="http://schemas.openxmlformats.org/drawingml/2006/main" xmlns:r="http://schemas.openxmlformats.org/officeDocument/2006/relationships" xmlns:p="http://schemas.openxmlformats.org/presentationml/2006/main">
-  <p:cSld>
-    <p:spTree>
-      <p:nvGrpSpPr>
-        <p:cNvPr id="1" name=""/>
-        <p:cNvGrpSpPr/>
-        <p:nvPr/>
-      </p:nvGrpSpPr>
-      <p:grpSpPr>
-        <a:xfrm>
-          <a:off x="0" y="0"/>
-          <a:ext cx="0" cy="0"/>
-          <a:chOff x="0" y="0"/>
-          <a:chExt cx="0" cy="0"/>
-        </a:xfrm>
-      </p:grpSpPr>
-      <p:grpSp>
-        <p:nvGrpSpPr>
-          <p:cNvPr id="4" name="Agrupar 3">
-            <a:extLst>
-              <a:ext uri="{FF2B5EF4-FFF2-40B4-BE49-F238E27FC236}">
-                <a16:creationId xmlns:a16="http://schemas.microsoft.com/office/drawing/2014/main" xmlns="" id="{FB07C42F-A992-2717-DDF1-083ADA9C3645}"/>
-              </a:ext>
-            </a:extLst>
-          </p:cNvPr>
-          <p:cNvGrpSpPr/>
-          <p:nvPr/>
-        </p:nvGrpSpPr>
-        <p:grpSpPr>
-          <a:xfrm>
-            <a:off x="1050515" y="1517918"/>
-            <a:ext cx="4577263" cy="3036592"/>
-            <a:chOff x="983980" y="3614532"/>
-            <a:chExt cx="4577263" cy="3036592"/>
-          </a:xfrm>
-        </p:grpSpPr>
-        <p:sp>
-          <p:nvSpPr>
-            <p:cNvPr id="5" name="Elipse 4">
-              <a:extLst>
-                <a:ext uri="{FF2B5EF4-FFF2-40B4-BE49-F238E27FC236}">
-                  <a16:creationId xmlns:a16="http://schemas.microsoft.com/office/drawing/2014/main" xmlns="" id="{21354678-1459-EC6A-BFFF-068903DA2C08}"/>
-                </a:ext>
-              </a:extLst>
-            </p:cNvPr>
-            <p:cNvSpPr/>
-            <p:nvPr/>
-          </p:nvSpPr>
-          <p:spPr>
-            <a:xfrm>
-              <a:off x="3328962" y="3756976"/>
-              <a:ext cx="566057" cy="566057"/>
-            </a:xfrm>
-            <a:prstGeom prst="ellipse">
-              <a:avLst/>
-            </a:prstGeom>
-            <a:solidFill>
-              <a:schemeClr val="accent1"/>
-            </a:solidFill>
-            <a:ln>
-              <a:noFill/>
-            </a:ln>
-          </p:spPr>
-          <p:style>
-            <a:lnRef idx="2">
-              <a:schemeClr val="accent1">
-                <a:shade val="15000"/>
-              </a:schemeClr>
-            </a:lnRef>
-            <a:fillRef idx="1">
-              <a:schemeClr val="accent1"/>
-            </a:fillRef>
-            <a:effectRef idx="0">
-              <a:schemeClr val="accent1"/>
-            </a:effectRef>
-            <a:fontRef idx="minor">
-              <a:schemeClr val="lt1"/>
-            </a:fontRef>
-          </p:style>
-          <p:txBody>
-            <a:bodyPr rtlCol="0" anchor="ctr"/>
-            <a:lstStyle/>
-            <a:p>
-              <a:pPr algn="ctr"/>
-              <a:endParaRPr lang="pt-BR" dirty="0"/>
-            </a:p>
-          </p:txBody>
-        </p:sp>
-        <p:sp>
-          <p:nvSpPr>
-            <p:cNvPr id="6" name="Elipse 5">
-              <a:extLst>
-                <a:ext uri="{FF2B5EF4-FFF2-40B4-BE49-F238E27FC236}">
-                  <a16:creationId xmlns:a16="http://schemas.microsoft.com/office/drawing/2014/main" xmlns="" id="{9202167C-234D-8420-55FA-B0C12B1A5BB1}"/>
-                </a:ext>
-              </a:extLst>
-            </p:cNvPr>
-            <p:cNvSpPr/>
-            <p:nvPr/>
-          </p:nvSpPr>
-          <p:spPr>
-            <a:xfrm>
-              <a:off x="3328961" y="4526233"/>
-              <a:ext cx="566057" cy="566057"/>
-            </a:xfrm>
-            <a:prstGeom prst="ellipse">
-              <a:avLst/>
-            </a:prstGeom>
-            <a:solidFill>
-              <a:schemeClr val="accent1"/>
-            </a:solidFill>
-            <a:ln>
-              <a:noFill/>
-            </a:ln>
-          </p:spPr>
-          <p:style>
-            <a:lnRef idx="2">
-              <a:schemeClr val="accent1">
-                <a:shade val="15000"/>
-              </a:schemeClr>
-            </a:lnRef>
-            <a:fillRef idx="1">
-              <a:schemeClr val="accent1"/>
-            </a:fillRef>
-            <a:effectRef idx="0">
-              <a:schemeClr val="accent1"/>
-            </a:effectRef>
-            <a:fontRef idx="minor">
-              <a:schemeClr val="lt1"/>
-            </a:fontRef>
-          </p:style>
-          <p:txBody>
-            <a:bodyPr rtlCol="0" anchor="ctr"/>
-            <a:lstStyle/>
-            <a:p>
-              <a:pPr algn="ctr"/>
-              <a:endParaRPr lang="pt-BR" dirty="0"/>
-            </a:p>
-          </p:txBody>
-        </p:sp>
-        <p:sp>
-          <p:nvSpPr>
-            <p:cNvPr id="7" name="Elipse 6">
-              <a:extLst>
-                <a:ext uri="{FF2B5EF4-FFF2-40B4-BE49-F238E27FC236}">
-                  <a16:creationId xmlns:a16="http://schemas.microsoft.com/office/drawing/2014/main" xmlns="" id="{C2445B85-6587-1F9D-632C-CA40610EC62E}"/>
-                </a:ext>
-              </a:extLst>
-            </p:cNvPr>
-            <p:cNvSpPr/>
-            <p:nvPr/>
-          </p:nvSpPr>
-          <p:spPr>
-            <a:xfrm>
-              <a:off x="3328961" y="5305650"/>
-              <a:ext cx="566057" cy="566057"/>
-            </a:xfrm>
-            <a:prstGeom prst="ellipse">
-              <a:avLst/>
-            </a:prstGeom>
-            <a:solidFill>
-              <a:schemeClr val="accent1"/>
-            </a:solidFill>
-            <a:ln>
-              <a:noFill/>
-            </a:ln>
-          </p:spPr>
-          <p:style>
-            <a:lnRef idx="2">
-              <a:schemeClr val="accent1">
-                <a:shade val="15000"/>
-              </a:schemeClr>
-            </a:lnRef>
-            <a:fillRef idx="1">
-              <a:schemeClr val="accent1"/>
-            </a:fillRef>
-            <a:effectRef idx="0">
-              <a:schemeClr val="accent1"/>
-            </a:effectRef>
-            <a:fontRef idx="minor">
-              <a:schemeClr val="lt1"/>
-            </a:fontRef>
-          </p:style>
-          <p:txBody>
-            <a:bodyPr rtlCol="0" anchor="ctr"/>
-            <a:lstStyle/>
-            <a:p>
-              <a:pPr algn="ctr"/>
-              <a:endParaRPr lang="pt-BR" dirty="0"/>
-            </a:p>
-          </p:txBody>
-        </p:sp>
-        <p:sp>
-          <p:nvSpPr>
-            <p:cNvPr id="8" name="Elipse 7">
-              <a:extLst>
-                <a:ext uri="{FF2B5EF4-FFF2-40B4-BE49-F238E27FC236}">
-                  <a16:creationId xmlns:a16="http://schemas.microsoft.com/office/drawing/2014/main" xmlns="" id="{151E4E5F-4430-EBD6-8B9B-10BA312FFCF4}"/>
-                </a:ext>
-              </a:extLst>
-            </p:cNvPr>
-            <p:cNvSpPr/>
-            <p:nvPr/>
-          </p:nvSpPr>
-          <p:spPr>
-            <a:xfrm>
-              <a:off x="3328961" y="6085067"/>
-              <a:ext cx="566057" cy="566057"/>
-            </a:xfrm>
-            <a:prstGeom prst="ellipse">
-              <a:avLst/>
-            </a:prstGeom>
-            <a:solidFill>
-              <a:schemeClr val="accent1"/>
-            </a:solidFill>
-            <a:ln>
-              <a:noFill/>
-            </a:ln>
-          </p:spPr>
-          <p:style>
-            <a:lnRef idx="2">
-              <a:schemeClr val="accent1">
-                <a:shade val="15000"/>
-              </a:schemeClr>
-            </a:lnRef>
-            <a:fillRef idx="1">
-              <a:schemeClr val="accent1"/>
-            </a:fillRef>
-            <a:effectRef idx="0">
-              <a:schemeClr val="accent1"/>
-            </a:effectRef>
-            <a:fontRef idx="minor">
-              <a:schemeClr val="lt1"/>
-            </a:fontRef>
-          </p:style>
-          <p:txBody>
-            <a:bodyPr rtlCol="0" anchor="ctr"/>
-            <a:lstStyle/>
-            <a:p>
-              <a:pPr algn="ctr"/>
-              <a:endParaRPr lang="pt-BR" dirty="0"/>
-            </a:p>
-          </p:txBody>
-        </p:sp>
-        <p:sp>
-          <p:nvSpPr>
-            <p:cNvPr id="9" name="Elipse 8">
-              <a:extLst>
-                <a:ext uri="{FF2B5EF4-FFF2-40B4-BE49-F238E27FC236}">
-                  <a16:creationId xmlns:a16="http://schemas.microsoft.com/office/drawing/2014/main" xmlns="" id="{B9F28606-2CD9-EA49-6D4F-B417EF5BAEE3}"/>
-                </a:ext>
-              </a:extLst>
-            </p:cNvPr>
-            <p:cNvSpPr/>
-            <p:nvPr/>
-          </p:nvSpPr>
-          <p:spPr>
-            <a:xfrm>
-              <a:off x="4389392" y="4524905"/>
-              <a:ext cx="566057" cy="566057"/>
-            </a:xfrm>
-            <a:prstGeom prst="ellipse">
-              <a:avLst/>
-            </a:prstGeom>
-            <a:solidFill>
-              <a:schemeClr val="bg1">
-                <a:lumMod val="85000"/>
-              </a:schemeClr>
-            </a:solidFill>
-            <a:ln>
-              <a:noFill/>
-            </a:ln>
-          </p:spPr>
-          <p:style>
-            <a:lnRef idx="2">
-              <a:schemeClr val="accent1">
-                <a:shade val="15000"/>
-              </a:schemeClr>
-            </a:lnRef>
-            <a:fillRef idx="1">
-              <a:schemeClr val="accent1"/>
-            </a:fillRef>
-            <a:effectRef idx="0">
-              <a:schemeClr val="accent1"/>
-            </a:effectRef>
-            <a:fontRef idx="minor">
-              <a:schemeClr val="lt1"/>
-            </a:fontRef>
-          </p:style>
-          <p:txBody>
-            <a:bodyPr rtlCol="0" anchor="ctr"/>
-            <a:lstStyle/>
-            <a:p>
-              <a:pPr algn="ctr"/>
-              <a:endParaRPr lang="pt-BR" dirty="0"/>
-            </a:p>
-          </p:txBody>
-        </p:sp>
-        <p:sp>
-          <p:nvSpPr>
-            <p:cNvPr id="10" name="Elipse 9">
-              <a:extLst>
-                <a:ext uri="{FF2B5EF4-FFF2-40B4-BE49-F238E27FC236}">
-                  <a16:creationId xmlns:a16="http://schemas.microsoft.com/office/drawing/2014/main" xmlns="" id="{60889C38-9906-3431-F3B0-48A0569494C7}"/>
-                </a:ext>
-              </a:extLst>
-            </p:cNvPr>
-            <p:cNvSpPr/>
-            <p:nvPr/>
-          </p:nvSpPr>
-          <p:spPr>
-            <a:xfrm>
-              <a:off x="2123189" y="3756976"/>
-              <a:ext cx="566057" cy="566057"/>
-            </a:xfrm>
-            <a:prstGeom prst="ellipse">
-              <a:avLst/>
-            </a:prstGeom>
-            <a:solidFill>
-              <a:schemeClr val="accent2"/>
-            </a:solidFill>
-            <a:ln>
-              <a:noFill/>
-            </a:ln>
-          </p:spPr>
-          <p:style>
-            <a:lnRef idx="2">
-              <a:schemeClr val="accent1">
-                <a:shade val="15000"/>
-              </a:schemeClr>
-            </a:lnRef>
-            <a:fillRef idx="1">
-              <a:schemeClr val="accent1"/>
-            </a:fillRef>
-            <a:effectRef idx="0">
-              <a:schemeClr val="accent1"/>
-            </a:effectRef>
-            <a:fontRef idx="minor">
-              <a:schemeClr val="lt1"/>
-            </a:fontRef>
-          </p:style>
-          <p:txBody>
-            <a:bodyPr rtlCol="0" anchor="ctr"/>
-            <a:lstStyle/>
-            <a:p>
-              <a:pPr algn="ctr"/>
-              <a:endParaRPr lang="pt-BR" dirty="0"/>
-            </a:p>
-          </p:txBody>
-        </p:sp>
-        <p:sp>
-          <p:nvSpPr>
-            <p:cNvPr id="11" name="Elipse 10">
-              <a:extLst>
-                <a:ext uri="{FF2B5EF4-FFF2-40B4-BE49-F238E27FC236}">
-                  <a16:creationId xmlns:a16="http://schemas.microsoft.com/office/drawing/2014/main" xmlns="" id="{DF780B85-FE8C-06AC-A428-D3E801D0CAFA}"/>
-                </a:ext>
-              </a:extLst>
-            </p:cNvPr>
-            <p:cNvSpPr/>
-            <p:nvPr/>
-          </p:nvSpPr>
-          <p:spPr>
-            <a:xfrm>
-              <a:off x="2127901" y="4526230"/>
-              <a:ext cx="566057" cy="566057"/>
-            </a:xfrm>
-            <a:prstGeom prst="ellipse">
-              <a:avLst/>
-            </a:prstGeom>
-            <a:solidFill>
-              <a:schemeClr val="accent2"/>
-            </a:solidFill>
-            <a:ln>
-              <a:noFill/>
-            </a:ln>
-          </p:spPr>
-          <p:style>
-            <a:lnRef idx="2">
-              <a:schemeClr val="accent1">
-                <a:shade val="15000"/>
-              </a:schemeClr>
-            </a:lnRef>
-            <a:fillRef idx="1">
-              <a:schemeClr val="accent1"/>
-            </a:fillRef>
-            <a:effectRef idx="0">
-              <a:schemeClr val="accent1"/>
-            </a:effectRef>
-            <a:fontRef idx="minor">
-              <a:schemeClr val="lt1"/>
-            </a:fontRef>
-          </p:style>
-          <p:txBody>
-            <a:bodyPr rtlCol="0" anchor="ctr"/>
-            <a:lstStyle/>
-            <a:p>
-              <a:pPr algn="ctr"/>
-              <a:endParaRPr lang="pt-BR" dirty="0"/>
-            </a:p>
-          </p:txBody>
-        </p:sp>
-        <p:sp>
-          <p:nvSpPr>
-            <p:cNvPr id="12" name="Elipse 11">
-              <a:extLst>
-                <a:ext uri="{FF2B5EF4-FFF2-40B4-BE49-F238E27FC236}">
-                  <a16:creationId xmlns:a16="http://schemas.microsoft.com/office/drawing/2014/main" xmlns="" id="{7A187CCF-3FCB-A01B-5454-D4817F3CC33F}"/>
-                </a:ext>
-              </a:extLst>
-            </p:cNvPr>
-            <p:cNvSpPr/>
-            <p:nvPr/>
-          </p:nvSpPr>
-          <p:spPr>
-            <a:xfrm>
-              <a:off x="2123189" y="5303324"/>
-              <a:ext cx="566057" cy="566057"/>
-            </a:xfrm>
-            <a:prstGeom prst="ellipse">
-              <a:avLst/>
-            </a:prstGeom>
-            <a:solidFill>
-              <a:schemeClr val="accent2"/>
-            </a:solidFill>
-            <a:ln>
-              <a:noFill/>
-            </a:ln>
-          </p:spPr>
-          <p:style>
-            <a:lnRef idx="2">
-              <a:schemeClr val="accent1">
-                <a:shade val="15000"/>
-              </a:schemeClr>
-            </a:lnRef>
-            <a:fillRef idx="1">
-              <a:schemeClr val="accent1"/>
-            </a:fillRef>
-            <a:effectRef idx="0">
-              <a:schemeClr val="accent1"/>
-            </a:effectRef>
-            <a:fontRef idx="minor">
-              <a:schemeClr val="lt1"/>
-            </a:fontRef>
-          </p:style>
-          <p:txBody>
-            <a:bodyPr rtlCol="0" anchor="ctr"/>
-            <a:lstStyle/>
-            <a:p>
-              <a:pPr algn="ctr"/>
-              <a:endParaRPr lang="pt-BR" dirty="0"/>
-            </a:p>
-          </p:txBody>
-        </p:sp>
-        <p:cxnSp>
-          <p:nvCxnSpPr>
-            <p:cNvPr id="13" name="Conector de Seta Reta 12">
-              <a:extLst>
-                <a:ext uri="{FF2B5EF4-FFF2-40B4-BE49-F238E27FC236}">
-                  <a16:creationId xmlns:a16="http://schemas.microsoft.com/office/drawing/2014/main" xmlns="" id="{D71AF5E7-4BDC-4DF5-B4A7-BD601D539EA3}"/>
-                </a:ext>
-              </a:extLst>
-            </p:cNvPr>
-            <p:cNvCxnSpPr>
-              <a:stCxn id="10" idx="6"/>
-              <a:endCxn id="5" idx="2"/>
-            </p:cNvCxnSpPr>
-            <p:nvPr/>
-          </p:nvCxnSpPr>
-          <p:spPr>
-            <a:xfrm>
-              <a:off x="2689246" y="4040005"/>
-              <a:ext cx="639716" cy="0"/>
-            </a:xfrm>
-            <a:prstGeom prst="straightConnector1">
-              <a:avLst/>
-            </a:prstGeom>
-            <a:ln>
-              <a:tailEnd type="triangle"/>
-            </a:ln>
-          </p:spPr>
-          <p:style>
-            <a:lnRef idx="1">
-              <a:schemeClr val="accent1"/>
-            </a:lnRef>
-            <a:fillRef idx="0">
-              <a:schemeClr val="accent1"/>
-            </a:fillRef>
-            <a:effectRef idx="0">
-              <a:schemeClr val="accent1"/>
-            </a:effectRef>
-            <a:fontRef idx="minor">
-              <a:schemeClr val="tx1"/>
-            </a:fontRef>
-          </p:style>
-        </p:cxnSp>
-        <p:cxnSp>
-          <p:nvCxnSpPr>
-            <p:cNvPr id="14" name="Conector de Seta Reta 13">
-              <a:extLst>
-                <a:ext uri="{FF2B5EF4-FFF2-40B4-BE49-F238E27FC236}">
-                  <a16:creationId xmlns:a16="http://schemas.microsoft.com/office/drawing/2014/main" xmlns="" id="{33D87AF2-6594-D2C7-CFE2-62391F186390}"/>
-                </a:ext>
-              </a:extLst>
-            </p:cNvPr>
-            <p:cNvCxnSpPr>
-              <a:stCxn id="10" idx="6"/>
-              <a:endCxn id="6" idx="2"/>
-            </p:cNvCxnSpPr>
-            <p:nvPr/>
-          </p:nvCxnSpPr>
-          <p:spPr>
-            <a:xfrm>
-              <a:off x="2689246" y="4040005"/>
-              <a:ext cx="639715" cy="769257"/>
-            </a:xfrm>
-            <a:prstGeom prst="straightConnector1">
-              <a:avLst/>
-            </a:prstGeom>
-            <a:ln>
-              <a:tailEnd type="triangle"/>
-            </a:ln>
-          </p:spPr>
-          <p:style>
-            <a:lnRef idx="1">
-              <a:schemeClr val="accent1"/>
-            </a:lnRef>
-            <a:fillRef idx="0">
-              <a:schemeClr val="accent1"/>
-            </a:fillRef>
-            <a:effectRef idx="0">
-              <a:schemeClr val="accent1"/>
-            </a:effectRef>
-            <a:fontRef idx="minor">
-              <a:schemeClr val="tx1"/>
-            </a:fontRef>
-          </p:style>
-        </p:cxnSp>
-        <p:cxnSp>
-          <p:nvCxnSpPr>
-            <p:cNvPr id="15" name="Conector de Seta Reta 14">
-              <a:extLst>
-                <a:ext uri="{FF2B5EF4-FFF2-40B4-BE49-F238E27FC236}">
-                  <a16:creationId xmlns:a16="http://schemas.microsoft.com/office/drawing/2014/main" xmlns="" id="{880FBCFF-63A2-EDE9-8EFA-6FFF9479EF42}"/>
-                </a:ext>
-              </a:extLst>
-            </p:cNvPr>
-            <p:cNvCxnSpPr>
-              <a:stCxn id="10" idx="6"/>
-              <a:endCxn id="7" idx="2"/>
-            </p:cNvCxnSpPr>
-            <p:nvPr/>
-          </p:nvCxnSpPr>
-          <p:spPr>
-            <a:xfrm>
-              <a:off x="2689246" y="4040005"/>
-              <a:ext cx="639715" cy="1548674"/>
-            </a:xfrm>
-            <a:prstGeom prst="straightConnector1">
-              <a:avLst/>
-            </a:prstGeom>
-            <a:ln>
-              <a:tailEnd type="triangle"/>
-            </a:ln>
-          </p:spPr>
-          <p:style>
-            <a:lnRef idx="1">
-              <a:schemeClr val="accent1"/>
-            </a:lnRef>
-            <a:fillRef idx="0">
-              <a:schemeClr val="accent1"/>
-            </a:fillRef>
-            <a:effectRef idx="0">
-              <a:schemeClr val="accent1"/>
-            </a:effectRef>
-            <a:fontRef idx="minor">
-              <a:schemeClr val="tx1"/>
-            </a:fontRef>
-          </p:style>
-        </p:cxnSp>
-        <p:cxnSp>
-          <p:nvCxnSpPr>
-            <p:cNvPr id="16" name="Conector de Seta Reta 15">
-              <a:extLst>
-                <a:ext uri="{FF2B5EF4-FFF2-40B4-BE49-F238E27FC236}">
-                  <a16:creationId xmlns:a16="http://schemas.microsoft.com/office/drawing/2014/main" xmlns="" id="{47651E34-D429-DC72-2972-060D81836DBB}"/>
-                </a:ext>
-              </a:extLst>
-            </p:cNvPr>
-            <p:cNvCxnSpPr>
-              <a:stCxn id="10" idx="6"/>
-              <a:endCxn id="8" idx="2"/>
-            </p:cNvCxnSpPr>
-            <p:nvPr/>
-          </p:nvCxnSpPr>
-          <p:spPr>
-            <a:xfrm>
-              <a:off x="2689246" y="4040005"/>
-              <a:ext cx="639715" cy="2328091"/>
-            </a:xfrm>
-            <a:prstGeom prst="straightConnector1">
-              <a:avLst/>
-            </a:prstGeom>
-            <a:ln>
-              <a:tailEnd type="triangle"/>
-            </a:ln>
-          </p:spPr>
-          <p:style>
-            <a:lnRef idx="1">
-              <a:schemeClr val="accent1"/>
-            </a:lnRef>
-            <a:fillRef idx="0">
-              <a:schemeClr val="accent1"/>
-            </a:fillRef>
-            <a:effectRef idx="0">
-              <a:schemeClr val="accent1"/>
-            </a:effectRef>
-            <a:fontRef idx="minor">
-              <a:schemeClr val="tx1"/>
-            </a:fontRef>
-          </p:style>
-        </p:cxnSp>
-        <p:cxnSp>
-          <p:nvCxnSpPr>
-            <p:cNvPr id="17" name="Conector de Seta Reta 16">
-              <a:extLst>
-                <a:ext uri="{FF2B5EF4-FFF2-40B4-BE49-F238E27FC236}">
-                  <a16:creationId xmlns:a16="http://schemas.microsoft.com/office/drawing/2014/main" xmlns="" id="{CC55591E-7244-297B-6A7C-2B054EE6C283}"/>
-                </a:ext>
-              </a:extLst>
-            </p:cNvPr>
-            <p:cNvCxnSpPr>
-              <a:stCxn id="11" idx="6"/>
-              <a:endCxn id="5" idx="2"/>
-            </p:cNvCxnSpPr>
-            <p:nvPr/>
-          </p:nvCxnSpPr>
-          <p:spPr>
-            <a:xfrm flipV="1">
-              <a:off x="2693958" y="4040005"/>
-              <a:ext cx="635004" cy="769254"/>
-            </a:xfrm>
-            <a:prstGeom prst="straightConnector1">
-              <a:avLst/>
-            </a:prstGeom>
-            <a:ln>
-              <a:tailEnd type="triangle"/>
-            </a:ln>
-          </p:spPr>
-          <p:style>
-            <a:lnRef idx="1">
-              <a:schemeClr val="accent1"/>
-            </a:lnRef>
-            <a:fillRef idx="0">
-              <a:schemeClr val="accent1"/>
-            </a:fillRef>
-            <a:effectRef idx="0">
-              <a:schemeClr val="accent1"/>
-            </a:effectRef>
-            <a:fontRef idx="minor">
-              <a:schemeClr val="tx1"/>
-            </a:fontRef>
-          </p:style>
-        </p:cxnSp>
-        <p:cxnSp>
-          <p:nvCxnSpPr>
-            <p:cNvPr id="18" name="Conector de Seta Reta 17">
-              <a:extLst>
-                <a:ext uri="{FF2B5EF4-FFF2-40B4-BE49-F238E27FC236}">
-                  <a16:creationId xmlns:a16="http://schemas.microsoft.com/office/drawing/2014/main" xmlns="" id="{5C063DBD-7854-101C-3A82-FA18DE8ED5AA}"/>
-                </a:ext>
-              </a:extLst>
-            </p:cNvPr>
-            <p:cNvCxnSpPr>
-              <a:stCxn id="12" idx="6"/>
-              <a:endCxn id="6" idx="2"/>
-            </p:cNvCxnSpPr>
-            <p:nvPr/>
-          </p:nvCxnSpPr>
-          <p:spPr>
-            <a:xfrm flipV="1">
-              <a:off x="2689246" y="4809262"/>
-              <a:ext cx="639715" cy="777091"/>
-            </a:xfrm>
-            <a:prstGeom prst="straightConnector1">
-              <a:avLst/>
-            </a:prstGeom>
-            <a:ln>
-              <a:tailEnd type="triangle"/>
-            </a:ln>
-          </p:spPr>
-          <p:style>
-            <a:lnRef idx="1">
-              <a:schemeClr val="accent1"/>
-            </a:lnRef>
-            <a:fillRef idx="0">
-              <a:schemeClr val="accent1"/>
-            </a:fillRef>
-            <a:effectRef idx="0">
-              <a:schemeClr val="accent1"/>
-            </a:effectRef>
-            <a:fontRef idx="minor">
-              <a:schemeClr val="tx1"/>
-            </a:fontRef>
-          </p:style>
-        </p:cxnSp>
-        <p:cxnSp>
-          <p:nvCxnSpPr>
-            <p:cNvPr id="19" name="Conector de Seta Reta 18">
-              <a:extLst>
-                <a:ext uri="{FF2B5EF4-FFF2-40B4-BE49-F238E27FC236}">
-                  <a16:creationId xmlns:a16="http://schemas.microsoft.com/office/drawing/2014/main" xmlns="" id="{BA1CDC5A-BE46-A95A-DBF4-28D015FE056D}"/>
-                </a:ext>
-              </a:extLst>
-            </p:cNvPr>
-            <p:cNvCxnSpPr>
-              <a:stCxn id="11" idx="6"/>
-              <a:endCxn id="6" idx="2"/>
-            </p:cNvCxnSpPr>
-            <p:nvPr/>
-          </p:nvCxnSpPr>
-          <p:spPr>
-            <a:xfrm>
-              <a:off x="2693958" y="4809259"/>
-              <a:ext cx="635003" cy="3"/>
-            </a:xfrm>
-            <a:prstGeom prst="straightConnector1">
-              <a:avLst/>
-            </a:prstGeom>
-            <a:ln>
-              <a:tailEnd type="triangle"/>
-            </a:ln>
-          </p:spPr>
-          <p:style>
-            <a:lnRef idx="1">
-              <a:schemeClr val="accent1"/>
-            </a:lnRef>
-            <a:fillRef idx="0">
-              <a:schemeClr val="accent1"/>
-            </a:fillRef>
-            <a:effectRef idx="0">
-              <a:schemeClr val="accent1"/>
-            </a:effectRef>
-            <a:fontRef idx="minor">
-              <a:schemeClr val="tx1"/>
-            </a:fontRef>
-          </p:style>
-        </p:cxnSp>
-        <p:cxnSp>
-          <p:nvCxnSpPr>
-            <p:cNvPr id="20" name="Conector de Seta Reta 19">
-              <a:extLst>
-                <a:ext uri="{FF2B5EF4-FFF2-40B4-BE49-F238E27FC236}">
-                  <a16:creationId xmlns:a16="http://schemas.microsoft.com/office/drawing/2014/main" xmlns="" id="{D00D0734-5865-7C7F-24B0-626AC0C3D0F5}"/>
-                </a:ext>
-              </a:extLst>
-            </p:cNvPr>
-            <p:cNvCxnSpPr>
-              <a:stCxn id="11" idx="6"/>
-              <a:endCxn id="7" idx="2"/>
-            </p:cNvCxnSpPr>
-            <p:nvPr/>
-          </p:nvCxnSpPr>
-          <p:spPr>
-            <a:xfrm>
-              <a:off x="2693958" y="4809259"/>
-              <a:ext cx="635003" cy="779420"/>
-            </a:xfrm>
-            <a:prstGeom prst="straightConnector1">
-              <a:avLst/>
-            </a:prstGeom>
-            <a:ln>
-              <a:tailEnd type="triangle"/>
-            </a:ln>
-          </p:spPr>
-          <p:style>
-            <a:lnRef idx="1">
-              <a:schemeClr val="accent1"/>
-            </a:lnRef>
-            <a:fillRef idx="0">
-              <a:schemeClr val="accent1"/>
-            </a:fillRef>
-            <a:effectRef idx="0">
-              <a:schemeClr val="accent1"/>
-            </a:effectRef>
-            <a:fontRef idx="minor">
-              <a:schemeClr val="tx1"/>
-            </a:fontRef>
-          </p:style>
-        </p:cxnSp>
-        <p:cxnSp>
-          <p:nvCxnSpPr>
-            <p:cNvPr id="21" name="Conector de Seta Reta 20">
-              <a:extLst>
-                <a:ext uri="{FF2B5EF4-FFF2-40B4-BE49-F238E27FC236}">
-                  <a16:creationId xmlns:a16="http://schemas.microsoft.com/office/drawing/2014/main" xmlns="" id="{5343B509-BF11-2338-E37D-0E23DA2C6D23}"/>
-                </a:ext>
-              </a:extLst>
-            </p:cNvPr>
-            <p:cNvCxnSpPr>
-              <a:stCxn id="11" idx="6"/>
-              <a:endCxn id="8" idx="2"/>
-            </p:cNvCxnSpPr>
-            <p:nvPr/>
-          </p:nvCxnSpPr>
-          <p:spPr>
-            <a:xfrm>
-              <a:off x="2693958" y="4809259"/>
-              <a:ext cx="635003" cy="1558837"/>
-            </a:xfrm>
-            <a:prstGeom prst="straightConnector1">
-              <a:avLst/>
-            </a:prstGeom>
-            <a:ln>
-              <a:tailEnd type="triangle"/>
-            </a:ln>
-          </p:spPr>
-          <p:style>
-            <a:lnRef idx="1">
-              <a:schemeClr val="accent1"/>
-            </a:lnRef>
-            <a:fillRef idx="0">
-              <a:schemeClr val="accent1"/>
-            </a:fillRef>
-            <a:effectRef idx="0">
-              <a:schemeClr val="accent1"/>
-            </a:effectRef>
-            <a:fontRef idx="minor">
-              <a:schemeClr val="tx1"/>
-            </a:fontRef>
-          </p:style>
-        </p:cxnSp>
-        <p:cxnSp>
-          <p:nvCxnSpPr>
-            <p:cNvPr id="22" name="Conector de Seta Reta 21">
-              <a:extLst>
-                <a:ext uri="{FF2B5EF4-FFF2-40B4-BE49-F238E27FC236}">
-                  <a16:creationId xmlns:a16="http://schemas.microsoft.com/office/drawing/2014/main" xmlns="" id="{471B67E1-F2D1-7CA7-710A-4D8FE34D7CD0}"/>
-                </a:ext>
-              </a:extLst>
-            </p:cNvPr>
-            <p:cNvCxnSpPr>
-              <a:stCxn id="12" idx="6"/>
-              <a:endCxn id="5" idx="2"/>
-            </p:cNvCxnSpPr>
-            <p:nvPr/>
-          </p:nvCxnSpPr>
-          <p:spPr>
-            <a:xfrm flipV="1">
-              <a:off x="2689246" y="4040005"/>
-              <a:ext cx="639716" cy="1546348"/>
-            </a:xfrm>
-            <a:prstGeom prst="straightConnector1">
-              <a:avLst/>
-            </a:prstGeom>
-            <a:ln>
-              <a:tailEnd type="triangle"/>
-            </a:ln>
-          </p:spPr>
-          <p:style>
-            <a:lnRef idx="1">
-              <a:schemeClr val="accent1"/>
-            </a:lnRef>
-            <a:fillRef idx="0">
-              <a:schemeClr val="accent1"/>
-            </a:fillRef>
-            <a:effectRef idx="0">
-              <a:schemeClr val="accent1"/>
-            </a:effectRef>
-            <a:fontRef idx="minor">
-              <a:schemeClr val="tx1"/>
-            </a:fontRef>
-          </p:style>
-        </p:cxnSp>
-        <p:cxnSp>
-          <p:nvCxnSpPr>
-            <p:cNvPr id="23" name="Conector de Seta Reta 22">
-              <a:extLst>
-                <a:ext uri="{FF2B5EF4-FFF2-40B4-BE49-F238E27FC236}">
-                  <a16:creationId xmlns:a16="http://schemas.microsoft.com/office/drawing/2014/main" xmlns="" id="{27E5B778-94A3-E90C-F5D7-B0BC6160C0BB}"/>
-                </a:ext>
-              </a:extLst>
-            </p:cNvPr>
-            <p:cNvCxnSpPr>
-              <a:stCxn id="12" idx="6"/>
-              <a:endCxn id="7" idx="2"/>
-            </p:cNvCxnSpPr>
-            <p:nvPr/>
-          </p:nvCxnSpPr>
-          <p:spPr>
-            <a:xfrm>
-              <a:off x="2689246" y="5586353"/>
-              <a:ext cx="639715" cy="2326"/>
-            </a:xfrm>
-            <a:prstGeom prst="straightConnector1">
-              <a:avLst/>
-            </a:prstGeom>
-            <a:ln>
-              <a:tailEnd type="triangle"/>
-            </a:ln>
-          </p:spPr>
-          <p:style>
-            <a:lnRef idx="1">
-              <a:schemeClr val="accent1"/>
-            </a:lnRef>
-            <a:fillRef idx="0">
-              <a:schemeClr val="accent1"/>
-            </a:fillRef>
-            <a:effectRef idx="0">
-              <a:schemeClr val="accent1"/>
-            </a:effectRef>
-            <a:fontRef idx="minor">
-              <a:schemeClr val="tx1"/>
-            </a:fontRef>
-          </p:style>
-        </p:cxnSp>
-        <p:cxnSp>
-          <p:nvCxnSpPr>
-            <p:cNvPr id="24" name="Conector de Seta Reta 23">
-              <a:extLst>
-                <a:ext uri="{FF2B5EF4-FFF2-40B4-BE49-F238E27FC236}">
-                  <a16:creationId xmlns:a16="http://schemas.microsoft.com/office/drawing/2014/main" xmlns="" id="{85119F7A-FF89-CA88-72F8-076932F8E1CE}"/>
-                </a:ext>
-              </a:extLst>
-            </p:cNvPr>
-            <p:cNvCxnSpPr>
-              <a:stCxn id="12" idx="6"/>
-              <a:endCxn id="8" idx="2"/>
-            </p:cNvCxnSpPr>
-            <p:nvPr/>
-          </p:nvCxnSpPr>
-          <p:spPr>
-            <a:xfrm>
-              <a:off x="2689246" y="5586353"/>
-              <a:ext cx="639715" cy="781743"/>
-            </a:xfrm>
-            <a:prstGeom prst="straightConnector1">
-              <a:avLst/>
-            </a:prstGeom>
-            <a:ln>
-              <a:tailEnd type="triangle"/>
-            </a:ln>
-          </p:spPr>
-          <p:style>
-            <a:lnRef idx="1">
-              <a:schemeClr val="accent1"/>
-            </a:lnRef>
-            <a:fillRef idx="0">
-              <a:schemeClr val="accent1"/>
-            </a:fillRef>
-            <a:effectRef idx="0">
-              <a:schemeClr val="accent1"/>
-            </a:effectRef>
-            <a:fontRef idx="minor">
-              <a:schemeClr val="tx1"/>
-            </a:fontRef>
-          </p:style>
-        </p:cxnSp>
-        <p:cxnSp>
-          <p:nvCxnSpPr>
-            <p:cNvPr id="25" name="Conector de Seta Reta 24">
-              <a:extLst>
-                <a:ext uri="{FF2B5EF4-FFF2-40B4-BE49-F238E27FC236}">
-                  <a16:creationId xmlns:a16="http://schemas.microsoft.com/office/drawing/2014/main" xmlns="" id="{AD37D85D-9834-D427-C065-DB9FD7B2DCC6}"/>
-                </a:ext>
-              </a:extLst>
-            </p:cNvPr>
-            <p:cNvCxnSpPr>
-              <a:cxnSpLocks/>
-              <a:stCxn id="28" idx="3"/>
-              <a:endCxn id="10" idx="2"/>
-            </p:cNvCxnSpPr>
-            <p:nvPr/>
-          </p:nvCxnSpPr>
-          <p:spPr>
-            <a:xfrm flipV="1">
-              <a:off x="1547919" y="4040005"/>
-              <a:ext cx="575270" cy="397955"/>
-            </a:xfrm>
-            <a:prstGeom prst="straightConnector1">
-              <a:avLst/>
-            </a:prstGeom>
-            <a:ln>
-              <a:tailEnd type="triangle"/>
-            </a:ln>
-          </p:spPr>
-          <p:style>
-            <a:lnRef idx="1">
-              <a:schemeClr val="accent1"/>
-            </a:lnRef>
-            <a:fillRef idx="0">
-              <a:schemeClr val="accent1"/>
-            </a:fillRef>
-            <a:effectRef idx="0">
-              <a:schemeClr val="accent1"/>
-            </a:effectRef>
-            <a:fontRef idx="minor">
-              <a:schemeClr val="tx1"/>
-            </a:fontRef>
-          </p:style>
-        </p:cxnSp>
-        <p:cxnSp>
-          <p:nvCxnSpPr>
-            <p:cNvPr id="26" name="Conector reto 25">
-              <a:extLst>
-                <a:ext uri="{FF2B5EF4-FFF2-40B4-BE49-F238E27FC236}">
-                  <a16:creationId xmlns:a16="http://schemas.microsoft.com/office/drawing/2014/main" xmlns="" id="{EC3A2865-40E1-458C-CEF1-F1F5DA811CCC}"/>
-                </a:ext>
-              </a:extLst>
-            </p:cNvPr>
-            <p:cNvCxnSpPr>
-              <a:cxnSpLocks/>
-              <a:stCxn id="35" idx="3"/>
-              <a:endCxn id="11" idx="2"/>
-            </p:cNvCxnSpPr>
-            <p:nvPr/>
-          </p:nvCxnSpPr>
-          <p:spPr>
-            <a:xfrm flipV="1">
-              <a:off x="1504691" y="4809259"/>
-              <a:ext cx="623210" cy="1133997"/>
-            </a:xfrm>
-            <a:prstGeom prst="line">
-              <a:avLst/>
-            </a:prstGeom>
-            <a:ln>
-              <a:headEnd type="none" w="med" len="med"/>
-              <a:tailEnd type="triangle" w="med" len="med"/>
-            </a:ln>
-          </p:spPr>
-          <p:style>
-            <a:lnRef idx="1">
-              <a:schemeClr val="accent1"/>
-            </a:lnRef>
-            <a:fillRef idx="0">
-              <a:schemeClr val="accent1"/>
-            </a:fillRef>
-            <a:effectRef idx="0">
-              <a:schemeClr val="accent1"/>
-            </a:effectRef>
-            <a:fontRef idx="minor">
-              <a:schemeClr val="tx1"/>
-            </a:fontRef>
-          </p:style>
-        </p:cxnSp>
-        <p:cxnSp>
-          <p:nvCxnSpPr>
-            <p:cNvPr id="27" name="Conector de Seta Reta 26">
-              <a:extLst>
-                <a:ext uri="{FF2B5EF4-FFF2-40B4-BE49-F238E27FC236}">
-                  <a16:creationId xmlns:a16="http://schemas.microsoft.com/office/drawing/2014/main" xmlns="" id="{4E716FD0-CB64-2EDE-2037-F2295115AC49}"/>
-                </a:ext>
-              </a:extLst>
-            </p:cNvPr>
-            <p:cNvCxnSpPr>
-              <a:cxnSpLocks/>
-              <a:stCxn id="9" idx="6"/>
-            </p:cNvCxnSpPr>
-            <p:nvPr/>
-          </p:nvCxnSpPr>
-          <p:spPr>
-            <a:xfrm flipV="1">
-              <a:off x="4955449" y="4806772"/>
-              <a:ext cx="257585" cy="1162"/>
-            </a:xfrm>
-            <a:prstGeom prst="straightConnector1">
-              <a:avLst/>
-            </a:prstGeom>
-            <a:ln>
-              <a:tailEnd type="triangle"/>
-            </a:ln>
-          </p:spPr>
-          <p:style>
-            <a:lnRef idx="1">
-              <a:schemeClr val="accent1"/>
-            </a:lnRef>
-            <a:fillRef idx="0">
-              <a:schemeClr val="accent1"/>
-            </a:fillRef>
-            <a:effectRef idx="0">
-              <a:schemeClr val="accent1"/>
-            </a:effectRef>
-            <a:fontRef idx="minor">
-              <a:schemeClr val="tx1"/>
-            </a:fontRef>
-          </p:style>
-        </p:cxnSp>
-        <mc:AlternateContent xmlns:mc="http://schemas.openxmlformats.org/markup-compatibility/2006" xmlns:a14="http://schemas.microsoft.com/office/drawing/2010/main">
-          <mc:Choice Requires="a14">
-            <p:sp>
-              <p:nvSpPr>
-                <p:cNvPr id="28" name="CaixaDeTexto 27">
-                  <a:extLst>
-                    <a:ext uri="{FF2B5EF4-FFF2-40B4-BE49-F238E27FC236}">
-                      <a16:creationId xmlns:a16="http://schemas.microsoft.com/office/drawing/2014/main" xmlns="" id="{AFFA34F2-9D6C-4CB8-0690-996E4B904A68}"/>
-                    </a:ext>
-                  </a:extLst>
-                </p:cNvPr>
-                <p:cNvSpPr txBox="1"/>
-                <p:nvPr/>
-              </p:nvSpPr>
-              <p:spPr>
-                <a:xfrm>
-                  <a:off x="1165380" y="4253294"/>
-                  <a:ext cx="382539" cy="369332"/>
-                </a:xfrm>
-                <a:prstGeom prst="rect">
-                  <a:avLst/>
-                </a:prstGeom>
-                <a:noFill/>
-              </p:spPr>
-              <p:txBody>
-                <a:bodyPr wrap="square" rtlCol="0">
-                  <a:spAutoFit/>
-                </a:bodyPr>
-                <a:lstStyle/>
-                <a:p>
-                  <a:pPr/>
-                  <a14:m>
-                    <m:oMathPara xmlns:m="http://schemas.openxmlformats.org/officeDocument/2006/math">
-                      <m:oMathParaPr>
-                        <m:jc m:val="centerGroup"/>
-                      </m:oMathParaPr>
-                      <m:oMath xmlns:m="http://schemas.openxmlformats.org/officeDocument/2006/math">
-                        <m:sSub>
-                          <m:sSubPr>
-                            <m:ctrlPr>
-                              <a:rPr lang="pt-BR" i="1" smtClean="0">
-                                <a:latin typeface="Cambria Math" panose="02040503050406030204" pitchFamily="18" charset="0"/>
-                              </a:rPr>
-                            </m:ctrlPr>
-                          </m:sSubPr>
-                          <m:e>
-                            <m:r>
-                              <a:rPr lang="pt-BR" b="0" i="1" smtClean="0">
-                                <a:latin typeface="Cambria Math" panose="02040503050406030204" pitchFamily="18" charset="0"/>
-                              </a:rPr>
-                              <m:t>𝑥</m:t>
-                            </m:r>
-                          </m:e>
-                          <m:sub>
-                            <m:r>
-                              <a:rPr lang="pt-BR" b="0" i="1" smtClean="0">
-                                <a:latin typeface="Cambria Math" panose="02040503050406030204" pitchFamily="18" charset="0"/>
-                              </a:rPr>
-                              <m:t>1</m:t>
-                            </m:r>
-                          </m:sub>
-                        </m:sSub>
-                      </m:oMath>
-                    </m:oMathPara>
-                  </a14:m>
-                  <a:endParaRPr lang="pt-BR" dirty="0"/>
-                </a:p>
-              </p:txBody>
-            </p:sp>
-          </mc:Choice>
-          <mc:Fallback xmlns="">
-            <p:sp>
-              <p:nvSpPr>
-                <p:cNvPr id="28" name="CaixaDeTexto 27">
-                  <a:extLst>
-                    <a:ext uri="{FF2B5EF4-FFF2-40B4-BE49-F238E27FC236}">
-                      <a16:creationId xmlns:a16="http://schemas.microsoft.com/office/drawing/2014/main" id="{3F5AE126-0FCE-B221-5292-CB4564BB399D}"/>
-                    </a:ext>
-                  </a:extLst>
-                </p:cNvPr>
-                <p:cNvSpPr txBox="1">
-                  <a:spLocks noRot="1" noChangeAspect="1" noMove="1" noResize="1" noEditPoints="1" noAdjustHandles="1" noChangeArrowheads="1" noChangeShapeType="1" noTextEdit="1"/>
-                </p:cNvSpPr>
-                <p:nvPr/>
-              </p:nvSpPr>
-              <p:spPr>
-                <a:xfrm>
-                  <a:off x="1165380" y="4253294"/>
-                  <a:ext cx="382539" cy="369332"/>
-                </a:xfrm>
-                <a:prstGeom prst="rect">
-                  <a:avLst/>
-                </a:prstGeom>
-                <a:blipFill>
-                  <a:blip r:embed="rId2"/>
-                  <a:stretch>
-                    <a:fillRect/>
-                  </a:stretch>
-                </a:blipFill>
-              </p:spPr>
-              <p:txBody>
-                <a:bodyPr/>
-                <a:lstStyle/>
-                <a:p>
-                  <a:r>
-                    <a:rPr lang="pt-BR">
-                      <a:noFill/>
-                    </a:rPr>
-                    <a:t> </a:t>
-                  </a:r>
-                </a:p>
-              </p:txBody>
-            </p:sp>
-          </mc:Fallback>
-        </mc:AlternateContent>
-        <mc:AlternateContent xmlns:mc="http://schemas.openxmlformats.org/markup-compatibility/2006" xmlns:a14="http://schemas.microsoft.com/office/drawing/2010/main">
-          <mc:Choice Requires="a14">
-            <p:sp>
-              <p:nvSpPr>
-                <p:cNvPr id="29" name="CaixaDeTexto 28">
-                  <a:extLst>
-                    <a:ext uri="{FF2B5EF4-FFF2-40B4-BE49-F238E27FC236}">
-                      <a16:creationId xmlns:a16="http://schemas.microsoft.com/office/drawing/2014/main" xmlns="" id="{9852FD77-BF58-459E-954E-198502ED4F4A}"/>
-                    </a:ext>
-                  </a:extLst>
-                </p:cNvPr>
-                <p:cNvSpPr txBox="1"/>
-                <p:nvPr/>
-              </p:nvSpPr>
-              <p:spPr>
-                <a:xfrm>
-                  <a:off x="1128276" y="5001341"/>
-                  <a:ext cx="370290" cy="369332"/>
-                </a:xfrm>
-                <a:prstGeom prst="rect">
-                  <a:avLst/>
-                </a:prstGeom>
-                <a:noFill/>
-              </p:spPr>
-              <p:txBody>
-                <a:bodyPr wrap="square" rtlCol="0">
-                  <a:spAutoFit/>
-                </a:bodyPr>
-                <a:lstStyle/>
-                <a:p>
-                  <a:pPr/>
-                  <a14:m>
-                    <m:oMathPara xmlns:m="http://schemas.openxmlformats.org/officeDocument/2006/math">
-                      <m:oMathParaPr>
-                        <m:jc m:val="centerGroup"/>
-                      </m:oMathParaPr>
-                      <m:oMath xmlns:m="http://schemas.openxmlformats.org/officeDocument/2006/math">
-                        <m:sSub>
-                          <m:sSubPr>
-                            <m:ctrlPr>
-                              <a:rPr lang="pt-BR" i="1" smtClean="0">
-                                <a:latin typeface="Cambria Math" panose="02040503050406030204" pitchFamily="18" charset="0"/>
-                              </a:rPr>
-                            </m:ctrlPr>
-                          </m:sSubPr>
-                          <m:e>
-                            <m:r>
-                              <a:rPr lang="pt-BR" b="0" i="1" smtClean="0">
-                                <a:latin typeface="Cambria Math" panose="02040503050406030204" pitchFamily="18" charset="0"/>
-                              </a:rPr>
-                              <m:t>𝑥</m:t>
-                            </m:r>
-                          </m:e>
-                          <m:sub>
-                            <m:r>
-                              <a:rPr lang="pt-BR" b="0" i="1" smtClean="0">
-                                <a:latin typeface="Cambria Math" panose="02040503050406030204" pitchFamily="18" charset="0"/>
-                              </a:rPr>
-                              <m:t>2</m:t>
-                            </m:r>
-                          </m:sub>
-                        </m:sSub>
-                      </m:oMath>
-                    </m:oMathPara>
-                  </a14:m>
-                  <a:endParaRPr lang="pt-BR" dirty="0"/>
-                </a:p>
-              </p:txBody>
-            </p:sp>
-          </mc:Choice>
-          <mc:Fallback xmlns="">
-            <p:sp>
-              <p:nvSpPr>
-                <p:cNvPr id="29" name="CaixaDeTexto 28">
-                  <a:extLst>
-                    <a:ext uri="{FF2B5EF4-FFF2-40B4-BE49-F238E27FC236}">
-                      <a16:creationId xmlns:a16="http://schemas.microsoft.com/office/drawing/2014/main" id="{FE6D6893-7176-5CDD-98DC-6B7D0F0143EB}"/>
-                    </a:ext>
-                  </a:extLst>
-                </p:cNvPr>
-                <p:cNvSpPr txBox="1">
-                  <a:spLocks noRot="1" noChangeAspect="1" noMove="1" noResize="1" noEditPoints="1" noAdjustHandles="1" noChangeArrowheads="1" noChangeShapeType="1" noTextEdit="1"/>
-                </p:cNvSpPr>
-                <p:nvPr/>
-              </p:nvSpPr>
-              <p:spPr>
-                <a:xfrm>
-                  <a:off x="1128276" y="5001341"/>
-                  <a:ext cx="370290" cy="369332"/>
-                </a:xfrm>
-                <a:prstGeom prst="rect">
-                  <a:avLst/>
-                </a:prstGeom>
-                <a:blipFill>
-                  <a:blip r:embed="rId3"/>
-                  <a:stretch>
-                    <a:fillRect/>
-                  </a:stretch>
-                </a:blipFill>
-              </p:spPr>
-              <p:txBody>
-                <a:bodyPr/>
-                <a:lstStyle/>
-                <a:p>
-                  <a:r>
-                    <a:rPr lang="pt-BR">
-                      <a:noFill/>
-                    </a:rPr>
-                    <a:t> </a:t>
-                  </a:r>
-                </a:p>
-              </p:txBody>
-            </p:sp>
-          </mc:Fallback>
-        </mc:AlternateContent>
-        <p:sp>
-          <p:nvSpPr>
-            <p:cNvPr id="30" name="Elipse 29">
-              <a:extLst>
-                <a:ext uri="{FF2B5EF4-FFF2-40B4-BE49-F238E27FC236}">
-                  <a16:creationId xmlns:a16="http://schemas.microsoft.com/office/drawing/2014/main" xmlns="" id="{D879E81D-3BDF-070E-962C-853F3EC24E04}"/>
-                </a:ext>
-              </a:extLst>
-            </p:cNvPr>
-            <p:cNvSpPr/>
-            <p:nvPr/>
-          </p:nvSpPr>
-          <p:spPr>
-            <a:xfrm>
-              <a:off x="2130257" y="6080416"/>
-              <a:ext cx="566057" cy="566057"/>
-            </a:xfrm>
-            <a:prstGeom prst="ellipse">
-              <a:avLst/>
-            </a:prstGeom>
-            <a:solidFill>
-              <a:schemeClr val="accent2"/>
-            </a:solidFill>
-            <a:ln>
-              <a:noFill/>
-            </a:ln>
-          </p:spPr>
-          <p:style>
-            <a:lnRef idx="2">
-              <a:schemeClr val="accent1">
-                <a:shade val="15000"/>
-              </a:schemeClr>
-            </a:lnRef>
-            <a:fillRef idx="1">
-              <a:schemeClr val="accent1"/>
-            </a:fillRef>
-            <a:effectRef idx="0">
-              <a:schemeClr val="accent1"/>
-            </a:effectRef>
-            <a:fontRef idx="minor">
-              <a:schemeClr val="lt1"/>
-            </a:fontRef>
-          </p:style>
-          <p:txBody>
-            <a:bodyPr rtlCol="0" anchor="ctr"/>
-            <a:lstStyle/>
-            <a:p>
-              <a:pPr algn="ctr"/>
-              <a:endParaRPr lang="pt-BR" dirty="0"/>
-            </a:p>
-          </p:txBody>
-        </p:sp>
-        <p:cxnSp>
-          <p:nvCxnSpPr>
-            <p:cNvPr id="31" name="Conector de Seta Reta 30">
-              <a:extLst>
-                <a:ext uri="{FF2B5EF4-FFF2-40B4-BE49-F238E27FC236}">
-                  <a16:creationId xmlns:a16="http://schemas.microsoft.com/office/drawing/2014/main" xmlns="" id="{322E9BED-3F9B-7EE1-FAF4-2FC31B8F3EF6}"/>
-                </a:ext>
-              </a:extLst>
-            </p:cNvPr>
-            <p:cNvCxnSpPr>
-              <a:stCxn id="30" idx="6"/>
-              <a:endCxn id="8" idx="2"/>
-            </p:cNvCxnSpPr>
-            <p:nvPr/>
-          </p:nvCxnSpPr>
-          <p:spPr>
-            <a:xfrm>
-              <a:off x="2696314" y="6363445"/>
-              <a:ext cx="632647" cy="4651"/>
-            </a:xfrm>
-            <a:prstGeom prst="straightConnector1">
-              <a:avLst/>
-            </a:prstGeom>
-            <a:ln>
-              <a:tailEnd type="triangle"/>
-            </a:ln>
-          </p:spPr>
-          <p:style>
-            <a:lnRef idx="1">
-              <a:schemeClr val="accent1"/>
-            </a:lnRef>
-            <a:fillRef idx="0">
-              <a:schemeClr val="accent1"/>
-            </a:fillRef>
-            <a:effectRef idx="0">
-              <a:schemeClr val="accent1"/>
-            </a:effectRef>
-            <a:fontRef idx="minor">
-              <a:schemeClr val="tx1"/>
-            </a:fontRef>
-          </p:style>
-        </p:cxnSp>
-        <p:cxnSp>
-          <p:nvCxnSpPr>
-            <p:cNvPr id="32" name="Conector de Seta Reta 31">
-              <a:extLst>
-                <a:ext uri="{FF2B5EF4-FFF2-40B4-BE49-F238E27FC236}">
-                  <a16:creationId xmlns:a16="http://schemas.microsoft.com/office/drawing/2014/main" xmlns="" id="{6B8EE68F-D54C-3BE4-481F-2B20C66A2460}"/>
-                </a:ext>
-              </a:extLst>
-            </p:cNvPr>
-            <p:cNvCxnSpPr>
-              <a:stCxn id="30" idx="6"/>
-              <a:endCxn id="7" idx="2"/>
-            </p:cNvCxnSpPr>
-            <p:nvPr/>
-          </p:nvCxnSpPr>
-          <p:spPr>
-            <a:xfrm flipV="1">
-              <a:off x="2696314" y="5588679"/>
-              <a:ext cx="632647" cy="774766"/>
-            </a:xfrm>
-            <a:prstGeom prst="straightConnector1">
-              <a:avLst/>
-            </a:prstGeom>
-            <a:ln>
-              <a:tailEnd type="triangle"/>
-            </a:ln>
-          </p:spPr>
-          <p:style>
-            <a:lnRef idx="1">
-              <a:schemeClr val="accent1"/>
-            </a:lnRef>
-            <a:fillRef idx="0">
-              <a:schemeClr val="accent1"/>
-            </a:fillRef>
-            <a:effectRef idx="0">
-              <a:schemeClr val="accent1"/>
-            </a:effectRef>
-            <a:fontRef idx="minor">
-              <a:schemeClr val="tx1"/>
-            </a:fontRef>
-          </p:style>
-        </p:cxnSp>
-        <p:cxnSp>
-          <p:nvCxnSpPr>
-            <p:cNvPr id="33" name="Conector de Seta Reta 32">
-              <a:extLst>
-                <a:ext uri="{FF2B5EF4-FFF2-40B4-BE49-F238E27FC236}">
-                  <a16:creationId xmlns:a16="http://schemas.microsoft.com/office/drawing/2014/main" xmlns="" id="{20669ED9-1347-1100-33ED-B86CECBC9101}"/>
-                </a:ext>
-              </a:extLst>
-            </p:cNvPr>
-            <p:cNvCxnSpPr>
-              <a:stCxn id="30" idx="6"/>
-              <a:endCxn id="6" idx="2"/>
-            </p:cNvCxnSpPr>
-            <p:nvPr/>
-          </p:nvCxnSpPr>
-          <p:spPr>
-            <a:xfrm flipV="1">
-              <a:off x="2696314" y="4809262"/>
-              <a:ext cx="632647" cy="1554183"/>
-            </a:xfrm>
-            <a:prstGeom prst="straightConnector1">
-              <a:avLst/>
-            </a:prstGeom>
-            <a:ln>
-              <a:tailEnd type="triangle"/>
-            </a:ln>
-          </p:spPr>
-          <p:style>
-            <a:lnRef idx="1">
-              <a:schemeClr val="accent1"/>
-            </a:lnRef>
-            <a:fillRef idx="0">
-              <a:schemeClr val="accent1"/>
-            </a:fillRef>
-            <a:effectRef idx="0">
-              <a:schemeClr val="accent1"/>
-            </a:effectRef>
-            <a:fontRef idx="minor">
-              <a:schemeClr val="tx1"/>
-            </a:fontRef>
-          </p:style>
-        </p:cxnSp>
-        <p:cxnSp>
-          <p:nvCxnSpPr>
-            <p:cNvPr id="34" name="Conector de Seta Reta 33">
-              <a:extLst>
-                <a:ext uri="{FF2B5EF4-FFF2-40B4-BE49-F238E27FC236}">
-                  <a16:creationId xmlns:a16="http://schemas.microsoft.com/office/drawing/2014/main" xmlns="" id="{AE0BCBBC-DEF5-A15C-33A6-44AD92C1DCF2}"/>
-                </a:ext>
-              </a:extLst>
-            </p:cNvPr>
-            <p:cNvCxnSpPr>
-              <a:stCxn id="30" idx="6"/>
-              <a:endCxn id="5" idx="2"/>
-            </p:cNvCxnSpPr>
-            <p:nvPr/>
-          </p:nvCxnSpPr>
-          <p:spPr>
-            <a:xfrm flipV="1">
-              <a:off x="2696314" y="4040005"/>
-              <a:ext cx="632648" cy="2323440"/>
-            </a:xfrm>
-            <a:prstGeom prst="straightConnector1">
-              <a:avLst/>
-            </a:prstGeom>
-            <a:ln>
-              <a:tailEnd type="triangle"/>
-            </a:ln>
-          </p:spPr>
-          <p:style>
-            <a:lnRef idx="1">
-              <a:schemeClr val="accent1"/>
-            </a:lnRef>
-            <a:fillRef idx="0">
-              <a:schemeClr val="accent1"/>
-            </a:fillRef>
-            <a:effectRef idx="0">
-              <a:schemeClr val="accent1"/>
-            </a:effectRef>
-            <a:fontRef idx="minor">
-              <a:schemeClr val="tx1"/>
-            </a:fontRef>
-          </p:style>
-        </p:cxnSp>
-        <mc:AlternateContent xmlns:mc="http://schemas.openxmlformats.org/markup-compatibility/2006" xmlns:a14="http://schemas.microsoft.com/office/drawing/2010/main">
-          <mc:Choice Requires="a14">
-            <p:sp>
-              <p:nvSpPr>
-                <p:cNvPr id="35" name="CaixaDeTexto 34">
-                  <a:extLst>
-                    <a:ext uri="{FF2B5EF4-FFF2-40B4-BE49-F238E27FC236}">
-                      <a16:creationId xmlns:a16="http://schemas.microsoft.com/office/drawing/2014/main" xmlns="" id="{2A56C37C-1F92-72E7-C43E-3B6833DD4820}"/>
-                    </a:ext>
-                  </a:extLst>
-                </p:cNvPr>
-                <p:cNvSpPr txBox="1"/>
-                <p:nvPr/>
-              </p:nvSpPr>
-              <p:spPr>
-                <a:xfrm>
-                  <a:off x="1122151" y="5758590"/>
-                  <a:ext cx="382540" cy="369332"/>
-                </a:xfrm>
-                <a:prstGeom prst="rect">
-                  <a:avLst/>
-                </a:prstGeom>
-                <a:noFill/>
-              </p:spPr>
-              <p:txBody>
-                <a:bodyPr wrap="square" rtlCol="0">
-                  <a:spAutoFit/>
-                </a:bodyPr>
-                <a:lstStyle/>
-                <a:p>
-                  <a:pPr/>
-                  <a14:m>
-                    <m:oMathPara xmlns:m="http://schemas.openxmlformats.org/officeDocument/2006/math">
-                      <m:oMathParaPr>
-                        <m:jc m:val="centerGroup"/>
-                      </m:oMathParaPr>
-                      <m:oMath xmlns:m="http://schemas.openxmlformats.org/officeDocument/2006/math">
-                        <m:sSub>
-                          <m:sSubPr>
-                            <m:ctrlPr>
-                              <a:rPr lang="pt-BR" i="1" smtClean="0">
-                                <a:latin typeface="Cambria Math" panose="02040503050406030204" pitchFamily="18" charset="0"/>
-                              </a:rPr>
-                            </m:ctrlPr>
-                          </m:sSubPr>
-                          <m:e>
-                            <m:r>
-                              <a:rPr lang="pt-BR" b="0" i="1" smtClean="0">
-                                <a:latin typeface="Cambria Math" panose="02040503050406030204" pitchFamily="18" charset="0"/>
-                              </a:rPr>
-                              <m:t>𝑥</m:t>
-                            </m:r>
-                          </m:e>
-                          <m:sub>
-                            <m:r>
-                              <a:rPr lang="pt-BR" b="0" i="1" smtClean="0">
-                                <a:latin typeface="Cambria Math" panose="02040503050406030204" pitchFamily="18" charset="0"/>
-                              </a:rPr>
-                              <m:t>𝐾</m:t>
-                            </m:r>
-                          </m:sub>
-                        </m:sSub>
-                      </m:oMath>
-                    </m:oMathPara>
-                  </a14:m>
-                  <a:endParaRPr lang="pt-BR" dirty="0"/>
-                </a:p>
-              </p:txBody>
-            </p:sp>
-          </mc:Choice>
-          <mc:Fallback xmlns="">
-            <p:sp>
-              <p:nvSpPr>
-                <p:cNvPr id="35" name="CaixaDeTexto 34">
-                  <a:extLst>
-                    <a:ext uri="{FF2B5EF4-FFF2-40B4-BE49-F238E27FC236}">
-                      <a16:creationId xmlns:a16="http://schemas.microsoft.com/office/drawing/2014/main" id="{FF647779-0E16-8E2A-4D70-B1ED8994C819}"/>
-                    </a:ext>
-                  </a:extLst>
-                </p:cNvPr>
-                <p:cNvSpPr txBox="1">
-                  <a:spLocks noRot="1" noChangeAspect="1" noMove="1" noResize="1" noEditPoints="1" noAdjustHandles="1" noChangeArrowheads="1" noChangeShapeType="1" noTextEdit="1"/>
-                </p:cNvSpPr>
-                <p:nvPr/>
-              </p:nvSpPr>
-              <p:spPr>
-                <a:xfrm>
-                  <a:off x="1122151" y="5758590"/>
-                  <a:ext cx="382540" cy="369332"/>
-                </a:xfrm>
-                <a:prstGeom prst="rect">
-                  <a:avLst/>
-                </a:prstGeom>
-                <a:blipFill>
-                  <a:blip r:embed="rId4"/>
-                  <a:stretch>
-                    <a:fillRect r="-3175"/>
-                  </a:stretch>
-                </a:blipFill>
-              </p:spPr>
-              <p:txBody>
-                <a:bodyPr/>
-                <a:lstStyle/>
-                <a:p>
-                  <a:r>
-                    <a:rPr lang="pt-BR">
-                      <a:noFill/>
-                    </a:rPr>
-                    <a:t> </a:t>
-                  </a:r>
-                </a:p>
-              </p:txBody>
-            </p:sp>
-          </mc:Fallback>
-        </mc:AlternateContent>
-        <p:cxnSp>
-          <p:nvCxnSpPr>
-            <p:cNvPr id="36" name="Conector de Seta Reta 35">
-              <a:extLst>
-                <a:ext uri="{FF2B5EF4-FFF2-40B4-BE49-F238E27FC236}">
-                  <a16:creationId xmlns:a16="http://schemas.microsoft.com/office/drawing/2014/main" xmlns="" id="{A8772863-65BD-3569-FE59-9C967815475F}"/>
-                </a:ext>
-              </a:extLst>
-            </p:cNvPr>
-            <p:cNvCxnSpPr>
-              <a:cxnSpLocks/>
-              <a:stCxn id="29" idx="3"/>
-              <a:endCxn id="10" idx="2"/>
-            </p:cNvCxnSpPr>
-            <p:nvPr/>
-          </p:nvCxnSpPr>
-          <p:spPr>
-            <a:xfrm flipV="1">
-              <a:off x="1498566" y="4040005"/>
-              <a:ext cx="624623" cy="1146002"/>
-            </a:xfrm>
-            <a:prstGeom prst="straightConnector1">
-              <a:avLst/>
-            </a:prstGeom>
-            <a:ln>
-              <a:tailEnd type="triangle"/>
-            </a:ln>
-          </p:spPr>
-          <p:style>
-            <a:lnRef idx="1">
-              <a:schemeClr val="accent1"/>
-            </a:lnRef>
-            <a:fillRef idx="0">
-              <a:schemeClr val="accent1"/>
-            </a:fillRef>
-            <a:effectRef idx="0">
-              <a:schemeClr val="accent1"/>
-            </a:effectRef>
-            <a:fontRef idx="minor">
-              <a:schemeClr val="tx1"/>
-            </a:fontRef>
-          </p:style>
-        </p:cxnSp>
-        <p:cxnSp>
-          <p:nvCxnSpPr>
-            <p:cNvPr id="37" name="Conector de Seta Reta 36">
-              <a:extLst>
-                <a:ext uri="{FF2B5EF4-FFF2-40B4-BE49-F238E27FC236}">
-                  <a16:creationId xmlns:a16="http://schemas.microsoft.com/office/drawing/2014/main" xmlns="" id="{1C1E42F5-78AF-0A96-6251-66FA6901D344}"/>
-                </a:ext>
-              </a:extLst>
-            </p:cNvPr>
-            <p:cNvCxnSpPr>
-              <a:cxnSpLocks/>
-              <a:stCxn id="29" idx="3"/>
-              <a:endCxn id="11" idx="2"/>
-            </p:cNvCxnSpPr>
-            <p:nvPr/>
-          </p:nvCxnSpPr>
-          <p:spPr>
-            <a:xfrm flipV="1">
-              <a:off x="1498566" y="4809259"/>
-              <a:ext cx="629335" cy="376748"/>
-            </a:xfrm>
-            <a:prstGeom prst="straightConnector1">
-              <a:avLst/>
-            </a:prstGeom>
-            <a:ln>
-              <a:tailEnd type="triangle"/>
-            </a:ln>
-          </p:spPr>
-          <p:style>
-            <a:lnRef idx="1">
-              <a:schemeClr val="accent1"/>
-            </a:lnRef>
-            <a:fillRef idx="0">
-              <a:schemeClr val="accent1"/>
-            </a:fillRef>
-            <a:effectRef idx="0">
-              <a:schemeClr val="accent1"/>
-            </a:effectRef>
-            <a:fontRef idx="minor">
-              <a:schemeClr val="tx1"/>
-            </a:fontRef>
-          </p:style>
-        </p:cxnSp>
-        <p:cxnSp>
-          <p:nvCxnSpPr>
-            <p:cNvPr id="38" name="Conector de Seta Reta 37">
-              <a:extLst>
-                <a:ext uri="{FF2B5EF4-FFF2-40B4-BE49-F238E27FC236}">
-                  <a16:creationId xmlns:a16="http://schemas.microsoft.com/office/drawing/2014/main" xmlns="" id="{4248EAFB-F79B-CFE7-4455-746E6D81FB98}"/>
-                </a:ext>
-              </a:extLst>
-            </p:cNvPr>
-            <p:cNvCxnSpPr>
-              <a:stCxn id="35" idx="3"/>
-              <a:endCxn id="12" idx="2"/>
-            </p:cNvCxnSpPr>
-            <p:nvPr/>
-          </p:nvCxnSpPr>
-          <p:spPr>
-            <a:xfrm flipV="1">
-              <a:off x="1504691" y="5586353"/>
-              <a:ext cx="618498" cy="356903"/>
-            </a:xfrm>
-            <a:prstGeom prst="straightConnector1">
-              <a:avLst/>
-            </a:prstGeom>
-            <a:ln>
-              <a:tailEnd type="triangle"/>
-            </a:ln>
-          </p:spPr>
-          <p:style>
-            <a:lnRef idx="1">
-              <a:schemeClr val="accent1"/>
-            </a:lnRef>
-            <a:fillRef idx="0">
-              <a:schemeClr val="accent1"/>
-            </a:fillRef>
-            <a:effectRef idx="0">
-              <a:schemeClr val="accent1"/>
-            </a:effectRef>
-            <a:fontRef idx="minor">
-              <a:schemeClr val="tx1"/>
-            </a:fontRef>
-          </p:style>
-        </p:cxnSp>
-        <p:cxnSp>
-          <p:nvCxnSpPr>
-            <p:cNvPr id="39" name="Conector de Seta Reta 38">
-              <a:extLst>
-                <a:ext uri="{FF2B5EF4-FFF2-40B4-BE49-F238E27FC236}">
-                  <a16:creationId xmlns:a16="http://schemas.microsoft.com/office/drawing/2014/main" xmlns="" id="{39C11FF6-9528-C739-2885-730680D799C7}"/>
-                </a:ext>
-              </a:extLst>
-            </p:cNvPr>
-            <p:cNvCxnSpPr>
-              <a:cxnSpLocks/>
-              <a:stCxn id="35" idx="3"/>
-              <a:endCxn id="10" idx="2"/>
-            </p:cNvCxnSpPr>
-            <p:nvPr/>
-          </p:nvCxnSpPr>
-          <p:spPr>
-            <a:xfrm flipV="1">
-              <a:off x="1504691" y="4040005"/>
-              <a:ext cx="618498" cy="1903251"/>
-            </a:xfrm>
-            <a:prstGeom prst="straightConnector1">
-              <a:avLst/>
-            </a:prstGeom>
-            <a:ln>
-              <a:tailEnd type="triangle"/>
-            </a:ln>
-          </p:spPr>
-          <p:style>
-            <a:lnRef idx="1">
-              <a:schemeClr val="accent1"/>
-            </a:lnRef>
-            <a:fillRef idx="0">
-              <a:schemeClr val="accent1"/>
-            </a:fillRef>
-            <a:effectRef idx="0">
-              <a:schemeClr val="accent1"/>
-            </a:effectRef>
-            <a:fontRef idx="minor">
-              <a:schemeClr val="tx1"/>
-            </a:fontRef>
-          </p:style>
-        </p:cxnSp>
-        <p:cxnSp>
-          <p:nvCxnSpPr>
-            <p:cNvPr id="40" name="Conector de Seta Reta 39">
-              <a:extLst>
-                <a:ext uri="{FF2B5EF4-FFF2-40B4-BE49-F238E27FC236}">
-                  <a16:creationId xmlns:a16="http://schemas.microsoft.com/office/drawing/2014/main" xmlns="" id="{01988E91-9E26-55CD-05A2-3EE2493A7375}"/>
-                </a:ext>
-              </a:extLst>
-            </p:cNvPr>
-            <p:cNvCxnSpPr>
-              <a:cxnSpLocks/>
-              <a:stCxn id="29" idx="3"/>
-              <a:endCxn id="12" idx="2"/>
-            </p:cNvCxnSpPr>
-            <p:nvPr/>
-          </p:nvCxnSpPr>
-          <p:spPr>
-            <a:xfrm>
-              <a:off x="1498566" y="5186007"/>
-              <a:ext cx="624623" cy="400346"/>
-            </a:xfrm>
-            <a:prstGeom prst="straightConnector1">
-              <a:avLst/>
-            </a:prstGeom>
-            <a:ln>
-              <a:tailEnd type="triangle"/>
-            </a:ln>
-          </p:spPr>
-          <p:style>
-            <a:lnRef idx="1">
-              <a:schemeClr val="accent1"/>
-            </a:lnRef>
-            <a:fillRef idx="0">
-              <a:schemeClr val="accent1"/>
-            </a:fillRef>
-            <a:effectRef idx="0">
-              <a:schemeClr val="accent1"/>
-            </a:effectRef>
-            <a:fontRef idx="minor">
-              <a:schemeClr val="tx1"/>
-            </a:fontRef>
-          </p:style>
-        </p:cxnSp>
-        <p:cxnSp>
-          <p:nvCxnSpPr>
-            <p:cNvPr id="41" name="Conector de Seta Reta 40">
-              <a:extLst>
-                <a:ext uri="{FF2B5EF4-FFF2-40B4-BE49-F238E27FC236}">
-                  <a16:creationId xmlns:a16="http://schemas.microsoft.com/office/drawing/2014/main" xmlns="" id="{4DBBAF9E-5581-163A-3DAD-2DC962B6894E}"/>
-                </a:ext>
-              </a:extLst>
-            </p:cNvPr>
-            <p:cNvCxnSpPr>
-              <a:cxnSpLocks/>
-              <a:stCxn id="29" idx="3"/>
-              <a:endCxn id="30" idx="2"/>
-            </p:cNvCxnSpPr>
-            <p:nvPr/>
-          </p:nvCxnSpPr>
-          <p:spPr>
-            <a:xfrm>
-              <a:off x="1498566" y="5186007"/>
-              <a:ext cx="631691" cy="1177438"/>
-            </a:xfrm>
-            <a:prstGeom prst="straightConnector1">
-              <a:avLst/>
-            </a:prstGeom>
-            <a:ln>
-              <a:tailEnd type="triangle"/>
-            </a:ln>
-          </p:spPr>
-          <p:style>
-            <a:lnRef idx="1">
-              <a:schemeClr val="accent1"/>
-            </a:lnRef>
-            <a:fillRef idx="0">
-              <a:schemeClr val="accent1"/>
-            </a:fillRef>
-            <a:effectRef idx="0">
-              <a:schemeClr val="accent1"/>
-            </a:effectRef>
-            <a:fontRef idx="minor">
-              <a:schemeClr val="tx1"/>
-            </a:fontRef>
-          </p:style>
-        </p:cxnSp>
-        <p:cxnSp>
-          <p:nvCxnSpPr>
-            <p:cNvPr id="42" name="Conector de Seta Reta 41">
-              <a:extLst>
-                <a:ext uri="{FF2B5EF4-FFF2-40B4-BE49-F238E27FC236}">
-                  <a16:creationId xmlns:a16="http://schemas.microsoft.com/office/drawing/2014/main" xmlns="" id="{D53113B5-77E7-0E50-4D72-F7100ED11C4F}"/>
-                </a:ext>
-              </a:extLst>
-            </p:cNvPr>
-            <p:cNvCxnSpPr>
-              <a:stCxn id="28" idx="3"/>
-              <a:endCxn id="11" idx="2"/>
-            </p:cNvCxnSpPr>
-            <p:nvPr/>
-          </p:nvCxnSpPr>
-          <p:spPr>
-            <a:xfrm>
-              <a:off x="1547919" y="4437960"/>
-              <a:ext cx="579982" cy="371299"/>
-            </a:xfrm>
-            <a:prstGeom prst="straightConnector1">
-              <a:avLst/>
-            </a:prstGeom>
-            <a:ln>
-              <a:tailEnd type="triangle"/>
-            </a:ln>
-          </p:spPr>
-          <p:style>
-            <a:lnRef idx="1">
-              <a:schemeClr val="accent1"/>
-            </a:lnRef>
-            <a:fillRef idx="0">
-              <a:schemeClr val="accent1"/>
-            </a:fillRef>
-            <a:effectRef idx="0">
-              <a:schemeClr val="accent1"/>
-            </a:effectRef>
-            <a:fontRef idx="minor">
-              <a:schemeClr val="tx1"/>
-            </a:fontRef>
-          </p:style>
-        </p:cxnSp>
-        <p:cxnSp>
-          <p:nvCxnSpPr>
-            <p:cNvPr id="43" name="Conector de Seta Reta 42">
-              <a:extLst>
-                <a:ext uri="{FF2B5EF4-FFF2-40B4-BE49-F238E27FC236}">
-                  <a16:creationId xmlns:a16="http://schemas.microsoft.com/office/drawing/2014/main" xmlns="" id="{6F00F43D-F065-B9F4-E3CC-0CCF6914FA0D}"/>
-                </a:ext>
-              </a:extLst>
-            </p:cNvPr>
-            <p:cNvCxnSpPr>
-              <a:stCxn id="28" idx="3"/>
-              <a:endCxn id="12" idx="2"/>
-            </p:cNvCxnSpPr>
-            <p:nvPr/>
-          </p:nvCxnSpPr>
-          <p:spPr>
-            <a:xfrm>
-              <a:off x="1547919" y="4437960"/>
-              <a:ext cx="575270" cy="1148393"/>
-            </a:xfrm>
-            <a:prstGeom prst="straightConnector1">
-              <a:avLst/>
-            </a:prstGeom>
-            <a:ln>
-              <a:tailEnd type="triangle"/>
-            </a:ln>
-          </p:spPr>
-          <p:style>
-            <a:lnRef idx="1">
-              <a:schemeClr val="accent1"/>
-            </a:lnRef>
-            <a:fillRef idx="0">
-              <a:schemeClr val="accent1"/>
-            </a:fillRef>
-            <a:effectRef idx="0">
-              <a:schemeClr val="accent1"/>
-            </a:effectRef>
-            <a:fontRef idx="minor">
-              <a:schemeClr val="tx1"/>
-            </a:fontRef>
-          </p:style>
-        </p:cxnSp>
-        <p:cxnSp>
-          <p:nvCxnSpPr>
-            <p:cNvPr id="44" name="Conector de Seta Reta 43">
-              <a:extLst>
-                <a:ext uri="{FF2B5EF4-FFF2-40B4-BE49-F238E27FC236}">
-                  <a16:creationId xmlns:a16="http://schemas.microsoft.com/office/drawing/2014/main" xmlns="" id="{2805DD6C-D548-3E47-826A-2F2C74B2AA99}"/>
-                </a:ext>
-              </a:extLst>
-            </p:cNvPr>
-            <p:cNvCxnSpPr>
-              <a:stCxn id="28" idx="3"/>
-              <a:endCxn id="30" idx="2"/>
-            </p:cNvCxnSpPr>
-            <p:nvPr/>
-          </p:nvCxnSpPr>
-          <p:spPr>
-            <a:xfrm>
-              <a:off x="1547919" y="4437960"/>
-              <a:ext cx="582338" cy="1925485"/>
-            </a:xfrm>
-            <a:prstGeom prst="straightConnector1">
-              <a:avLst/>
-            </a:prstGeom>
-            <a:ln>
-              <a:tailEnd type="triangle"/>
-            </a:ln>
-          </p:spPr>
-          <p:style>
-            <a:lnRef idx="1">
-              <a:schemeClr val="accent1"/>
-            </a:lnRef>
-            <a:fillRef idx="0">
-              <a:schemeClr val="accent1"/>
-            </a:fillRef>
-            <a:effectRef idx="0">
-              <a:schemeClr val="accent1"/>
-            </a:effectRef>
-            <a:fontRef idx="minor">
-              <a:schemeClr val="tx1"/>
-            </a:fontRef>
-          </p:style>
-        </p:cxnSp>
-        <p:cxnSp>
-          <p:nvCxnSpPr>
-            <p:cNvPr id="45" name="Conector de Seta Reta 44">
-              <a:extLst>
-                <a:ext uri="{FF2B5EF4-FFF2-40B4-BE49-F238E27FC236}">
-                  <a16:creationId xmlns:a16="http://schemas.microsoft.com/office/drawing/2014/main" xmlns="" id="{A55E8A02-F4EA-CBD9-B395-DB9EAC81BA29}"/>
-                </a:ext>
-              </a:extLst>
-            </p:cNvPr>
-            <p:cNvCxnSpPr>
-              <a:stCxn id="35" idx="3"/>
-              <a:endCxn id="30" idx="2"/>
-            </p:cNvCxnSpPr>
-            <p:nvPr/>
-          </p:nvCxnSpPr>
-          <p:spPr>
-            <a:xfrm>
-              <a:off x="1504691" y="5943256"/>
-              <a:ext cx="625566" cy="420189"/>
-            </a:xfrm>
-            <a:prstGeom prst="straightConnector1">
-              <a:avLst/>
-            </a:prstGeom>
-            <a:ln>
-              <a:tailEnd type="triangle"/>
-            </a:ln>
-          </p:spPr>
-          <p:style>
-            <a:lnRef idx="1">
-              <a:schemeClr val="accent1"/>
-            </a:lnRef>
-            <a:fillRef idx="0">
-              <a:schemeClr val="accent1"/>
-            </a:fillRef>
-            <a:effectRef idx="0">
-              <a:schemeClr val="accent1"/>
-            </a:effectRef>
-            <a:fontRef idx="minor">
-              <a:schemeClr val="tx1"/>
-            </a:fontRef>
-          </p:style>
-        </p:cxnSp>
-        <p:cxnSp>
-          <p:nvCxnSpPr>
-            <p:cNvPr id="46" name="Conector de Seta Reta 45">
-              <a:extLst>
-                <a:ext uri="{FF2B5EF4-FFF2-40B4-BE49-F238E27FC236}">
-                  <a16:creationId xmlns:a16="http://schemas.microsoft.com/office/drawing/2014/main" xmlns="" id="{35D96836-300D-1A8A-6BCE-F57886CEB90F}"/>
-                </a:ext>
-              </a:extLst>
-            </p:cNvPr>
-            <p:cNvCxnSpPr>
-              <a:cxnSpLocks/>
-              <a:stCxn id="5" idx="6"/>
-              <a:endCxn id="9" idx="2"/>
-            </p:cNvCxnSpPr>
-            <p:nvPr/>
-          </p:nvCxnSpPr>
-          <p:spPr>
-            <a:xfrm>
-              <a:off x="3895019" y="4040005"/>
-              <a:ext cx="494373" cy="767929"/>
-            </a:xfrm>
-            <a:prstGeom prst="straightConnector1">
-              <a:avLst/>
-            </a:prstGeom>
-            <a:ln>
-              <a:tailEnd type="triangle"/>
-            </a:ln>
-          </p:spPr>
-          <p:style>
-            <a:lnRef idx="1">
-              <a:schemeClr val="accent1"/>
-            </a:lnRef>
-            <a:fillRef idx="0">
-              <a:schemeClr val="accent1"/>
-            </a:fillRef>
-            <a:effectRef idx="0">
-              <a:schemeClr val="accent1"/>
-            </a:effectRef>
-            <a:fontRef idx="minor">
-              <a:schemeClr val="tx1"/>
-            </a:fontRef>
-          </p:style>
-        </p:cxnSp>
-        <p:cxnSp>
-          <p:nvCxnSpPr>
-            <p:cNvPr id="47" name="Conector de Seta Reta 46">
-              <a:extLst>
-                <a:ext uri="{FF2B5EF4-FFF2-40B4-BE49-F238E27FC236}">
-                  <a16:creationId xmlns:a16="http://schemas.microsoft.com/office/drawing/2014/main" xmlns="" id="{8BDBA190-5DD5-8004-7086-A384BF11F5D2}"/>
-                </a:ext>
-              </a:extLst>
-            </p:cNvPr>
-            <p:cNvCxnSpPr>
-              <a:stCxn id="6" idx="6"/>
-              <a:endCxn id="9" idx="2"/>
-            </p:cNvCxnSpPr>
-            <p:nvPr/>
-          </p:nvCxnSpPr>
-          <p:spPr>
-            <a:xfrm flipV="1">
-              <a:off x="3895018" y="4807934"/>
-              <a:ext cx="494374" cy="1328"/>
-            </a:xfrm>
-            <a:prstGeom prst="straightConnector1">
-              <a:avLst/>
-            </a:prstGeom>
-            <a:ln>
-              <a:tailEnd type="triangle"/>
-            </a:ln>
-          </p:spPr>
-          <p:style>
-            <a:lnRef idx="1">
-              <a:schemeClr val="accent1"/>
-            </a:lnRef>
-            <a:fillRef idx="0">
-              <a:schemeClr val="accent1"/>
-            </a:fillRef>
-            <a:effectRef idx="0">
-              <a:schemeClr val="accent1"/>
-            </a:effectRef>
-            <a:fontRef idx="minor">
-              <a:schemeClr val="tx1"/>
-            </a:fontRef>
-          </p:style>
-        </p:cxnSp>
-        <p:cxnSp>
-          <p:nvCxnSpPr>
-            <p:cNvPr id="48" name="Conector de Seta Reta 47">
-              <a:extLst>
-                <a:ext uri="{FF2B5EF4-FFF2-40B4-BE49-F238E27FC236}">
-                  <a16:creationId xmlns:a16="http://schemas.microsoft.com/office/drawing/2014/main" xmlns="" id="{9A1458B6-3262-8B2F-9F1F-E6542BBBAFDD}"/>
-                </a:ext>
-              </a:extLst>
-            </p:cNvPr>
-            <p:cNvCxnSpPr>
-              <a:stCxn id="7" idx="6"/>
-              <a:endCxn id="9" idx="2"/>
-            </p:cNvCxnSpPr>
-            <p:nvPr/>
-          </p:nvCxnSpPr>
-          <p:spPr>
-            <a:xfrm flipV="1">
-              <a:off x="3895018" y="4807934"/>
-              <a:ext cx="494374" cy="780745"/>
-            </a:xfrm>
-            <a:prstGeom prst="straightConnector1">
-              <a:avLst/>
-            </a:prstGeom>
-            <a:ln>
-              <a:tailEnd type="triangle"/>
-            </a:ln>
-          </p:spPr>
-          <p:style>
-            <a:lnRef idx="1">
-              <a:schemeClr val="accent1"/>
-            </a:lnRef>
-            <a:fillRef idx="0">
-              <a:schemeClr val="accent1"/>
-            </a:fillRef>
-            <a:effectRef idx="0">
-              <a:schemeClr val="accent1"/>
-            </a:effectRef>
-            <a:fontRef idx="minor">
-              <a:schemeClr val="tx1"/>
-            </a:fontRef>
-          </p:style>
-        </p:cxnSp>
-        <p:cxnSp>
-          <p:nvCxnSpPr>
-            <p:cNvPr id="49" name="Conector de Seta Reta 48">
-              <a:extLst>
-                <a:ext uri="{FF2B5EF4-FFF2-40B4-BE49-F238E27FC236}">
-                  <a16:creationId xmlns:a16="http://schemas.microsoft.com/office/drawing/2014/main" xmlns="" id="{BB56128A-36BB-DE73-3541-6D47617028E5}"/>
-                </a:ext>
-              </a:extLst>
-            </p:cNvPr>
-            <p:cNvCxnSpPr>
-              <a:stCxn id="8" idx="6"/>
-              <a:endCxn id="9" idx="2"/>
-            </p:cNvCxnSpPr>
-            <p:nvPr/>
-          </p:nvCxnSpPr>
-          <p:spPr>
-            <a:xfrm flipV="1">
-              <a:off x="3895018" y="4807934"/>
-              <a:ext cx="494374" cy="1560162"/>
-            </a:xfrm>
-            <a:prstGeom prst="straightConnector1">
-              <a:avLst/>
-            </a:prstGeom>
-            <a:ln>
-              <a:tailEnd type="triangle"/>
-            </a:ln>
-          </p:spPr>
-          <p:style>
-            <a:lnRef idx="1">
-              <a:schemeClr val="accent1"/>
-            </a:lnRef>
-            <a:fillRef idx="0">
-              <a:schemeClr val="accent1"/>
-            </a:fillRef>
-            <a:effectRef idx="0">
-              <a:schemeClr val="accent1"/>
-            </a:effectRef>
-            <a:fontRef idx="minor">
-              <a:schemeClr val="tx1"/>
-            </a:fontRef>
-          </p:style>
-        </p:cxnSp>
-        <mc:AlternateContent xmlns:mc="http://schemas.openxmlformats.org/markup-compatibility/2006" xmlns:a14="http://schemas.microsoft.com/office/drawing/2010/main">
-          <mc:Choice Requires="a14">
-            <p:sp>
-              <p:nvSpPr>
-                <p:cNvPr id="50" name="CaixaDeTexto 49">
-                  <a:extLst>
-                    <a:ext uri="{FF2B5EF4-FFF2-40B4-BE49-F238E27FC236}">
-                      <a16:creationId xmlns:a16="http://schemas.microsoft.com/office/drawing/2014/main" xmlns="" id="{99CB017E-9A70-E8A6-9C43-58BFDB9953AB}"/>
-                    </a:ext>
-                  </a:extLst>
-                </p:cNvPr>
-                <p:cNvSpPr txBox="1"/>
-                <p:nvPr/>
-              </p:nvSpPr>
-              <p:spPr>
-                <a:xfrm>
-                  <a:off x="5135329" y="4613494"/>
-                  <a:ext cx="415834" cy="369332"/>
-                </a:xfrm>
-                <a:prstGeom prst="rect">
-                  <a:avLst/>
-                </a:prstGeom>
-                <a:noFill/>
-              </p:spPr>
-              <p:txBody>
-                <a:bodyPr wrap="square" rtlCol="0">
-                  <a:spAutoFit/>
-                </a:bodyPr>
-                <a:lstStyle/>
-                <a:p>
-                  <a:pPr/>
-                  <a14:m>
-                    <m:oMathPara xmlns:m="http://schemas.openxmlformats.org/officeDocument/2006/math">
-                      <m:oMathParaPr>
-                        <m:jc m:val="centerGroup"/>
-                      </m:oMathParaPr>
-                      <m:oMath xmlns:m="http://schemas.openxmlformats.org/officeDocument/2006/math">
-                        <m:sSub>
-                          <m:sSubPr>
-                            <m:ctrlPr>
-                              <a:rPr lang="pt-BR" i="1" smtClean="0">
-                                <a:latin typeface="Cambria Math" panose="02040503050406030204" pitchFamily="18" charset="0"/>
-                              </a:rPr>
-                            </m:ctrlPr>
-                          </m:sSubPr>
-                          <m:e>
-                            <m:acc>
-                              <m:accPr>
-                                <m:chr m:val="̂"/>
-                                <m:ctrlPr>
-                                  <a:rPr lang="pt-BR" i="1" smtClean="0">
-                                    <a:latin typeface="Cambria Math" panose="02040503050406030204" pitchFamily="18" charset="0"/>
-                                  </a:rPr>
-                                </m:ctrlPr>
-                              </m:accPr>
-                              <m:e>
-                                <m:r>
-                                  <a:rPr lang="pt-BR" b="0" i="1" smtClean="0">
-                                    <a:latin typeface="Cambria Math" panose="02040503050406030204" pitchFamily="18" charset="0"/>
-                                  </a:rPr>
-                                  <m:t>𝑦</m:t>
-                                </m:r>
-                              </m:e>
-                            </m:acc>
-                          </m:e>
-                          <m:sub>
-                            <m:r>
-                              <a:rPr lang="pt-BR" b="0" i="1" smtClean="0">
-                                <a:latin typeface="Cambria Math" panose="02040503050406030204" pitchFamily="18" charset="0"/>
-                              </a:rPr>
-                              <m:t>1</m:t>
-                            </m:r>
-                          </m:sub>
-                        </m:sSub>
-                      </m:oMath>
-                    </m:oMathPara>
-                  </a14:m>
-                  <a:endParaRPr lang="pt-BR" dirty="0"/>
-                </a:p>
-              </p:txBody>
-            </p:sp>
-          </mc:Choice>
-          <mc:Fallback xmlns="">
-            <p:sp>
-              <p:nvSpPr>
-                <p:cNvPr id="50" name="CaixaDeTexto 49">
-                  <a:extLst>
-                    <a:ext uri="{FF2B5EF4-FFF2-40B4-BE49-F238E27FC236}">
-                      <a16:creationId xmlns:a16="http://schemas.microsoft.com/office/drawing/2014/main" id="{C298979C-FEEC-44B1-1EEB-CE843AEBE556}"/>
-                    </a:ext>
-                  </a:extLst>
-                </p:cNvPr>
-                <p:cNvSpPr txBox="1">
-                  <a:spLocks noRot="1" noChangeAspect="1" noMove="1" noResize="1" noEditPoints="1" noAdjustHandles="1" noChangeArrowheads="1" noChangeShapeType="1" noTextEdit="1"/>
-                </p:cNvSpPr>
-                <p:nvPr/>
-              </p:nvSpPr>
-              <p:spPr>
-                <a:xfrm>
-                  <a:off x="5135329" y="4613494"/>
-                  <a:ext cx="415834" cy="369332"/>
-                </a:xfrm>
-                <a:prstGeom prst="rect">
-                  <a:avLst/>
-                </a:prstGeom>
-                <a:blipFill>
-                  <a:blip r:embed="rId5"/>
-                  <a:stretch>
-                    <a:fillRect t="-6667" r="-8824" b="-6667"/>
-                  </a:stretch>
-                </a:blipFill>
-              </p:spPr>
-              <p:txBody>
-                <a:bodyPr/>
-                <a:lstStyle/>
-                <a:p>
-                  <a:r>
-                    <a:rPr lang="pt-BR">
-                      <a:noFill/>
-                    </a:rPr>
-                    <a:t> </a:t>
-                  </a:r>
-                </a:p>
-              </p:txBody>
-            </p:sp>
-          </mc:Fallback>
-        </mc:AlternateContent>
-        <mc:AlternateContent xmlns:mc="http://schemas.openxmlformats.org/markup-compatibility/2006" xmlns:a14="http://schemas.microsoft.com/office/drawing/2010/main">
-          <mc:Choice Requires="a14">
-            <p:sp>
-              <p:nvSpPr>
-                <p:cNvPr id="51" name="CaixaDeTexto 50">
-                  <a:extLst>
-                    <a:ext uri="{FF2B5EF4-FFF2-40B4-BE49-F238E27FC236}">
-                      <a16:creationId xmlns:a16="http://schemas.microsoft.com/office/drawing/2014/main" xmlns="" id="{5DD99152-A9EA-C518-AD2D-CBF76A3F5033}"/>
-                    </a:ext>
-                  </a:extLst>
-                </p:cNvPr>
-                <p:cNvSpPr txBox="1"/>
-                <p:nvPr/>
-              </p:nvSpPr>
-              <p:spPr>
-                <a:xfrm flipH="1">
-                  <a:off x="983980" y="5467885"/>
-                  <a:ext cx="653654" cy="276999"/>
-                </a:xfrm>
-                <a:prstGeom prst="rect">
-                  <a:avLst/>
-                </a:prstGeom>
-                <a:noFill/>
-              </p:spPr>
-              <p:txBody>
-                <a:bodyPr wrap="square" lIns="0" tIns="0" rIns="0" bIns="0" rtlCol="0">
-                  <a:spAutoFit/>
-                </a:bodyPr>
-                <a:lstStyle/>
-                <a:p>
-                  <a:pPr/>
-                  <a14:m>
-                    <m:oMathPara xmlns:m="http://schemas.openxmlformats.org/officeDocument/2006/math">
-                      <m:oMathParaPr>
-                        <m:jc m:val="centerGroup"/>
-                      </m:oMathParaPr>
-                      <m:oMath xmlns:m="http://schemas.openxmlformats.org/officeDocument/2006/math">
-                        <m:r>
-                          <a:rPr lang="pt-BR" i="1" smtClean="0">
-                            <a:latin typeface="Cambria Math" panose="02040503050406030204" pitchFamily="18" charset="0"/>
-                            <a:ea typeface="Cambria Math" panose="02040503050406030204" pitchFamily="18" charset="0"/>
-                          </a:rPr>
-                          <m:t>⋮</m:t>
-                        </m:r>
-                      </m:oMath>
-                    </m:oMathPara>
-                  </a14:m>
-                  <a:endParaRPr lang="pt-BR" dirty="0"/>
-                </a:p>
-              </p:txBody>
-            </p:sp>
-          </mc:Choice>
-          <mc:Fallback xmlns="">
-            <p:sp>
-              <p:nvSpPr>
-                <p:cNvPr id="51" name="CaixaDeTexto 50">
-                  <a:extLst>
-                    <a:ext uri="{FF2B5EF4-FFF2-40B4-BE49-F238E27FC236}">
-                      <a16:creationId xmlns:a16="http://schemas.microsoft.com/office/drawing/2014/main" id="{02613DEB-985F-3400-22BF-F5CF5E3DA06E}"/>
-                    </a:ext>
-                  </a:extLst>
-                </p:cNvPr>
-                <p:cNvSpPr txBox="1">
-                  <a:spLocks noRot="1" noChangeAspect="1" noMove="1" noResize="1" noEditPoints="1" noAdjustHandles="1" noChangeArrowheads="1" noChangeShapeType="1" noTextEdit="1"/>
-                </p:cNvSpPr>
-                <p:nvPr/>
-              </p:nvSpPr>
-              <p:spPr>
-                <a:xfrm flipH="1">
-                  <a:off x="983980" y="5467885"/>
-                  <a:ext cx="653654" cy="276999"/>
-                </a:xfrm>
-                <a:prstGeom prst="rect">
-                  <a:avLst/>
-                </a:prstGeom>
-                <a:blipFill>
-                  <a:blip r:embed="rId6"/>
-                  <a:stretch>
-                    <a:fillRect b="-6667"/>
-                  </a:stretch>
-                </a:blipFill>
-              </p:spPr>
-              <p:txBody>
-                <a:bodyPr/>
-                <a:lstStyle/>
-                <a:p>
-                  <a:r>
-                    <a:rPr lang="pt-BR">
-                      <a:noFill/>
-                    </a:rPr>
-                    <a:t> </a:t>
-                  </a:r>
-                </a:p>
-              </p:txBody>
-            </p:sp>
-          </mc:Fallback>
-        </mc:AlternateContent>
-        <p:cxnSp>
-          <p:nvCxnSpPr>
-            <p:cNvPr id="52" name="Conector de Seta Reta 51">
-              <a:extLst>
-                <a:ext uri="{FF2B5EF4-FFF2-40B4-BE49-F238E27FC236}">
-                  <a16:creationId xmlns:a16="http://schemas.microsoft.com/office/drawing/2014/main" xmlns="" id="{CE935B14-3BD1-1812-EF67-A77EA0B1128A}"/>
-                </a:ext>
-              </a:extLst>
-            </p:cNvPr>
-            <p:cNvCxnSpPr>
-              <a:cxnSpLocks/>
-              <a:endCxn id="5" idx="0"/>
-            </p:cNvCxnSpPr>
-            <p:nvPr/>
-          </p:nvCxnSpPr>
-          <p:spPr>
-            <a:xfrm>
-              <a:off x="3611991" y="3614532"/>
-              <a:ext cx="0" cy="142444"/>
-            </a:xfrm>
-            <a:prstGeom prst="straightConnector1">
-              <a:avLst/>
-            </a:prstGeom>
-            <a:ln>
-              <a:tailEnd type="triangle"/>
-            </a:ln>
-          </p:spPr>
-          <p:style>
-            <a:lnRef idx="1">
-              <a:schemeClr val="accent1"/>
-            </a:lnRef>
-            <a:fillRef idx="0">
-              <a:schemeClr val="accent1"/>
-            </a:fillRef>
-            <a:effectRef idx="0">
-              <a:schemeClr val="accent1"/>
-            </a:effectRef>
-            <a:fontRef idx="minor">
-              <a:schemeClr val="tx1"/>
-            </a:fontRef>
-          </p:style>
-        </p:cxnSp>
-        <p:cxnSp>
-          <p:nvCxnSpPr>
-            <p:cNvPr id="53" name="Conector de Seta Reta 52">
-              <a:extLst>
-                <a:ext uri="{FF2B5EF4-FFF2-40B4-BE49-F238E27FC236}">
-                  <a16:creationId xmlns:a16="http://schemas.microsoft.com/office/drawing/2014/main" xmlns="" id="{E8F98CC6-C2E6-9F66-7AE2-7A32B56A18CD}"/>
-                </a:ext>
-              </a:extLst>
-            </p:cNvPr>
-            <p:cNvCxnSpPr>
-              <a:cxnSpLocks/>
-            </p:cNvCxnSpPr>
-            <p:nvPr/>
-          </p:nvCxnSpPr>
-          <p:spPr>
-            <a:xfrm>
-              <a:off x="3611991" y="4383786"/>
-              <a:ext cx="0" cy="142444"/>
-            </a:xfrm>
-            <a:prstGeom prst="straightConnector1">
-              <a:avLst/>
-            </a:prstGeom>
-            <a:ln>
-              <a:tailEnd type="triangle"/>
-            </a:ln>
-          </p:spPr>
-          <p:style>
-            <a:lnRef idx="1">
-              <a:schemeClr val="accent1"/>
-            </a:lnRef>
-            <a:fillRef idx="0">
-              <a:schemeClr val="accent1"/>
-            </a:fillRef>
-            <a:effectRef idx="0">
-              <a:schemeClr val="accent1"/>
-            </a:effectRef>
-            <a:fontRef idx="minor">
-              <a:schemeClr val="tx1"/>
-            </a:fontRef>
-          </p:style>
-        </p:cxnSp>
-        <p:cxnSp>
-          <p:nvCxnSpPr>
-            <p:cNvPr id="54" name="Conector de Seta Reta 53">
-              <a:extLst>
-                <a:ext uri="{FF2B5EF4-FFF2-40B4-BE49-F238E27FC236}">
-                  <a16:creationId xmlns:a16="http://schemas.microsoft.com/office/drawing/2014/main" xmlns="" id="{7F5E5662-7035-61B6-F331-A3C054AF7A75}"/>
-                </a:ext>
-              </a:extLst>
-            </p:cNvPr>
-            <p:cNvCxnSpPr>
-              <a:cxnSpLocks/>
-            </p:cNvCxnSpPr>
-            <p:nvPr/>
-          </p:nvCxnSpPr>
-          <p:spPr>
-            <a:xfrm>
-              <a:off x="3611991" y="5160880"/>
-              <a:ext cx="0" cy="142444"/>
-            </a:xfrm>
-            <a:prstGeom prst="straightConnector1">
-              <a:avLst/>
-            </a:prstGeom>
-            <a:ln>
-              <a:tailEnd type="triangle"/>
-            </a:ln>
-          </p:spPr>
-          <p:style>
-            <a:lnRef idx="1">
-              <a:schemeClr val="accent1"/>
-            </a:lnRef>
-            <a:fillRef idx="0">
-              <a:schemeClr val="accent1"/>
-            </a:fillRef>
-            <a:effectRef idx="0">
-              <a:schemeClr val="accent1"/>
-            </a:effectRef>
-            <a:fontRef idx="minor">
-              <a:schemeClr val="tx1"/>
-            </a:fontRef>
-          </p:style>
-        </p:cxnSp>
-        <p:cxnSp>
-          <p:nvCxnSpPr>
-            <p:cNvPr id="55" name="Conector de Seta Reta 54">
-              <a:extLst>
-                <a:ext uri="{FF2B5EF4-FFF2-40B4-BE49-F238E27FC236}">
-                  <a16:creationId xmlns:a16="http://schemas.microsoft.com/office/drawing/2014/main" xmlns="" id="{AD3C4A8F-E4DE-EC76-C133-5256EF60D3FF}"/>
-                </a:ext>
-              </a:extLst>
-            </p:cNvPr>
-            <p:cNvCxnSpPr>
-              <a:cxnSpLocks/>
-            </p:cNvCxnSpPr>
-            <p:nvPr/>
-          </p:nvCxnSpPr>
-          <p:spPr>
-            <a:xfrm>
-              <a:off x="3611991" y="5937972"/>
-              <a:ext cx="0" cy="142444"/>
-            </a:xfrm>
-            <a:prstGeom prst="straightConnector1">
-              <a:avLst/>
-            </a:prstGeom>
-            <a:ln>
-              <a:tailEnd type="triangle"/>
-            </a:ln>
-          </p:spPr>
-          <p:style>
-            <a:lnRef idx="1">
-              <a:schemeClr val="accent1"/>
-            </a:lnRef>
-            <a:fillRef idx="0">
-              <a:schemeClr val="accent1"/>
-            </a:fillRef>
-            <a:effectRef idx="0">
-              <a:schemeClr val="accent1"/>
-            </a:effectRef>
-            <a:fontRef idx="minor">
-              <a:schemeClr val="tx1"/>
-            </a:fontRef>
-          </p:style>
-        </p:cxnSp>
-        <p:cxnSp>
-          <p:nvCxnSpPr>
-            <p:cNvPr id="56" name="Conector de Seta Reta 55">
-              <a:extLst>
-                <a:ext uri="{FF2B5EF4-FFF2-40B4-BE49-F238E27FC236}">
-                  <a16:creationId xmlns:a16="http://schemas.microsoft.com/office/drawing/2014/main" xmlns="" id="{4B1B32D6-CB6B-E648-186C-90D5E7C17141}"/>
-                </a:ext>
-              </a:extLst>
-            </p:cNvPr>
-            <p:cNvCxnSpPr>
-              <a:cxnSpLocks/>
-            </p:cNvCxnSpPr>
-            <p:nvPr/>
-          </p:nvCxnSpPr>
-          <p:spPr>
-            <a:xfrm>
-              <a:off x="2402316" y="3614532"/>
-              <a:ext cx="0" cy="142444"/>
-            </a:xfrm>
-            <a:prstGeom prst="straightConnector1">
-              <a:avLst/>
-            </a:prstGeom>
-            <a:ln>
-              <a:tailEnd type="triangle"/>
-            </a:ln>
-          </p:spPr>
-          <p:style>
-            <a:lnRef idx="1">
-              <a:schemeClr val="accent1"/>
-            </a:lnRef>
-            <a:fillRef idx="0">
-              <a:schemeClr val="accent1"/>
-            </a:fillRef>
-            <a:effectRef idx="0">
-              <a:schemeClr val="accent1"/>
-            </a:effectRef>
-            <a:fontRef idx="minor">
-              <a:schemeClr val="tx1"/>
-            </a:fontRef>
-          </p:style>
-        </p:cxnSp>
-        <p:cxnSp>
-          <p:nvCxnSpPr>
-            <p:cNvPr id="57" name="Conector de Seta Reta 56">
-              <a:extLst>
-                <a:ext uri="{FF2B5EF4-FFF2-40B4-BE49-F238E27FC236}">
-                  <a16:creationId xmlns:a16="http://schemas.microsoft.com/office/drawing/2014/main" xmlns="" id="{6909FFED-5E78-7F62-5202-414EF66B8820}"/>
-                </a:ext>
-              </a:extLst>
-            </p:cNvPr>
-            <p:cNvCxnSpPr>
-              <a:cxnSpLocks/>
-            </p:cNvCxnSpPr>
-            <p:nvPr/>
-          </p:nvCxnSpPr>
-          <p:spPr>
-            <a:xfrm>
-              <a:off x="2408666" y="4375037"/>
-              <a:ext cx="0" cy="142444"/>
-            </a:xfrm>
-            <a:prstGeom prst="straightConnector1">
-              <a:avLst/>
-            </a:prstGeom>
-            <a:ln>
-              <a:tailEnd type="triangle"/>
-            </a:ln>
-          </p:spPr>
-          <p:style>
-            <a:lnRef idx="1">
-              <a:schemeClr val="accent1"/>
-            </a:lnRef>
-            <a:fillRef idx="0">
-              <a:schemeClr val="accent1"/>
-            </a:fillRef>
-            <a:effectRef idx="0">
-              <a:schemeClr val="accent1"/>
-            </a:effectRef>
-            <a:fontRef idx="minor">
-              <a:schemeClr val="tx1"/>
-            </a:fontRef>
-          </p:style>
-        </p:cxnSp>
-        <p:cxnSp>
-          <p:nvCxnSpPr>
-            <p:cNvPr id="58" name="Conector de Seta Reta 57">
-              <a:extLst>
-                <a:ext uri="{FF2B5EF4-FFF2-40B4-BE49-F238E27FC236}">
-                  <a16:creationId xmlns:a16="http://schemas.microsoft.com/office/drawing/2014/main" xmlns="" id="{CB323DCE-9043-2C11-ED83-7F73F24EDD36}"/>
-                </a:ext>
-              </a:extLst>
-            </p:cNvPr>
-            <p:cNvCxnSpPr>
-              <a:cxnSpLocks/>
-            </p:cNvCxnSpPr>
-            <p:nvPr/>
-          </p:nvCxnSpPr>
-          <p:spPr>
-            <a:xfrm>
-              <a:off x="2402316" y="5160880"/>
-              <a:ext cx="0" cy="142444"/>
-            </a:xfrm>
-            <a:prstGeom prst="straightConnector1">
-              <a:avLst/>
-            </a:prstGeom>
-            <a:ln>
-              <a:tailEnd type="triangle"/>
-            </a:ln>
-          </p:spPr>
-          <p:style>
-            <a:lnRef idx="1">
-              <a:schemeClr val="accent1"/>
-            </a:lnRef>
-            <a:fillRef idx="0">
-              <a:schemeClr val="accent1"/>
-            </a:fillRef>
-            <a:effectRef idx="0">
-              <a:schemeClr val="accent1"/>
-            </a:effectRef>
-            <a:fontRef idx="minor">
-              <a:schemeClr val="tx1"/>
-            </a:fontRef>
-          </p:style>
-        </p:cxnSp>
-        <p:cxnSp>
-          <p:nvCxnSpPr>
-            <p:cNvPr id="59" name="Conector de Seta Reta 58">
-              <a:extLst>
-                <a:ext uri="{FF2B5EF4-FFF2-40B4-BE49-F238E27FC236}">
-                  <a16:creationId xmlns:a16="http://schemas.microsoft.com/office/drawing/2014/main" xmlns="" id="{9E6AD66B-7932-A6AD-DBA8-43BC5062CE0F}"/>
-                </a:ext>
-              </a:extLst>
-            </p:cNvPr>
-            <p:cNvCxnSpPr>
-              <a:cxnSpLocks/>
-            </p:cNvCxnSpPr>
-            <p:nvPr/>
-          </p:nvCxnSpPr>
-          <p:spPr>
-            <a:xfrm>
-              <a:off x="2402316" y="5935320"/>
-              <a:ext cx="0" cy="142444"/>
-            </a:xfrm>
-            <a:prstGeom prst="straightConnector1">
-              <a:avLst/>
-            </a:prstGeom>
-            <a:ln>
-              <a:tailEnd type="triangle"/>
-            </a:ln>
-          </p:spPr>
-          <p:style>
-            <a:lnRef idx="1">
-              <a:schemeClr val="accent1"/>
-            </a:lnRef>
-            <a:fillRef idx="0">
-              <a:schemeClr val="accent1"/>
-            </a:fillRef>
-            <a:effectRef idx="0">
-              <a:schemeClr val="accent1"/>
-            </a:effectRef>
-            <a:fontRef idx="minor">
-              <a:schemeClr val="tx1"/>
-            </a:fontRef>
-          </p:style>
-        </p:cxnSp>
-        <p:cxnSp>
-          <p:nvCxnSpPr>
-            <p:cNvPr id="60" name="Conector de Seta Reta 59">
-              <a:extLst>
-                <a:ext uri="{FF2B5EF4-FFF2-40B4-BE49-F238E27FC236}">
-                  <a16:creationId xmlns:a16="http://schemas.microsoft.com/office/drawing/2014/main" xmlns="" id="{A1651898-69FD-504A-3925-1DBFEE64C77D}"/>
-                </a:ext>
-              </a:extLst>
-            </p:cNvPr>
-            <p:cNvCxnSpPr>
-              <a:cxnSpLocks/>
-            </p:cNvCxnSpPr>
-            <p:nvPr/>
-          </p:nvCxnSpPr>
-          <p:spPr>
-            <a:xfrm>
-              <a:off x="4680061" y="4383786"/>
-              <a:ext cx="0" cy="142444"/>
-            </a:xfrm>
-            <a:prstGeom prst="straightConnector1">
-              <a:avLst/>
-            </a:prstGeom>
-            <a:ln>
-              <a:tailEnd type="triangle"/>
-            </a:ln>
-          </p:spPr>
-          <p:style>
-            <a:lnRef idx="1">
-              <a:schemeClr val="accent1"/>
-            </a:lnRef>
-            <a:fillRef idx="0">
-              <a:schemeClr val="accent1"/>
-            </a:fillRef>
-            <a:effectRef idx="0">
-              <a:schemeClr val="accent1"/>
-            </a:effectRef>
-            <a:fontRef idx="minor">
-              <a:schemeClr val="tx1"/>
-            </a:fontRef>
-          </p:style>
-        </p:cxnSp>
-        <p:sp>
-          <p:nvSpPr>
-            <p:cNvPr id="61" name="Elipse 60">
-              <a:extLst>
-                <a:ext uri="{FF2B5EF4-FFF2-40B4-BE49-F238E27FC236}">
-                  <a16:creationId xmlns:a16="http://schemas.microsoft.com/office/drawing/2014/main" xmlns="" id="{C3618AA4-1940-C194-59BA-86C628FAAEC5}"/>
-                </a:ext>
-              </a:extLst>
-            </p:cNvPr>
-            <p:cNvSpPr/>
-            <p:nvPr/>
-          </p:nvSpPr>
-          <p:spPr>
-            <a:xfrm>
-              <a:off x="4389389" y="5303324"/>
-              <a:ext cx="566057" cy="566057"/>
-            </a:xfrm>
-            <a:prstGeom prst="ellipse">
-              <a:avLst/>
-            </a:prstGeom>
-            <a:solidFill>
-              <a:schemeClr val="bg1">
-                <a:lumMod val="85000"/>
-              </a:schemeClr>
-            </a:solidFill>
-            <a:ln>
-              <a:noFill/>
-            </a:ln>
-          </p:spPr>
-          <p:style>
-            <a:lnRef idx="2">
-              <a:schemeClr val="accent1">
-                <a:shade val="15000"/>
-              </a:schemeClr>
-            </a:lnRef>
-            <a:fillRef idx="1">
-              <a:schemeClr val="accent1"/>
-            </a:fillRef>
-            <a:effectRef idx="0">
-              <a:schemeClr val="accent1"/>
-            </a:effectRef>
-            <a:fontRef idx="minor">
-              <a:schemeClr val="lt1"/>
-            </a:fontRef>
-          </p:style>
-          <p:txBody>
-            <a:bodyPr rtlCol="0" anchor="ctr"/>
-            <a:lstStyle/>
-            <a:p>
-              <a:pPr algn="ctr"/>
-              <a:endParaRPr lang="pt-BR" dirty="0"/>
-            </a:p>
-          </p:txBody>
-        </p:sp>
-        <p:cxnSp>
-          <p:nvCxnSpPr>
-            <p:cNvPr id="62" name="Conector de Seta Reta 61">
-              <a:extLst>
-                <a:ext uri="{FF2B5EF4-FFF2-40B4-BE49-F238E27FC236}">
-                  <a16:creationId xmlns:a16="http://schemas.microsoft.com/office/drawing/2014/main" xmlns="" id="{93E7787E-3F23-D554-0015-C6587AA5A1BE}"/>
-                </a:ext>
-              </a:extLst>
-            </p:cNvPr>
-            <p:cNvCxnSpPr>
-              <a:cxnSpLocks/>
-            </p:cNvCxnSpPr>
-            <p:nvPr/>
-          </p:nvCxnSpPr>
-          <p:spPr>
-            <a:xfrm>
-              <a:off x="4672417" y="5160880"/>
-              <a:ext cx="0" cy="142444"/>
-            </a:xfrm>
-            <a:prstGeom prst="straightConnector1">
-              <a:avLst/>
-            </a:prstGeom>
-            <a:ln>
-              <a:tailEnd type="triangle"/>
-            </a:ln>
-          </p:spPr>
-          <p:style>
-            <a:lnRef idx="1">
-              <a:schemeClr val="accent1"/>
-            </a:lnRef>
-            <a:fillRef idx="0">
-              <a:schemeClr val="accent1"/>
-            </a:fillRef>
-            <a:effectRef idx="0">
-              <a:schemeClr val="accent1"/>
-            </a:effectRef>
-            <a:fontRef idx="minor">
-              <a:schemeClr val="tx1"/>
-            </a:fontRef>
-          </p:style>
-        </p:cxnSp>
-        <p:cxnSp>
-          <p:nvCxnSpPr>
-            <p:cNvPr id="63" name="Conector de Seta Reta 62">
-              <a:extLst>
-                <a:ext uri="{FF2B5EF4-FFF2-40B4-BE49-F238E27FC236}">
-                  <a16:creationId xmlns:a16="http://schemas.microsoft.com/office/drawing/2014/main" xmlns="" id="{44DF4508-52D1-EF13-5988-EB5A553172BB}"/>
-                </a:ext>
-              </a:extLst>
-            </p:cNvPr>
-            <p:cNvCxnSpPr>
-              <a:stCxn id="5" idx="6"/>
-              <a:endCxn id="61" idx="2"/>
-            </p:cNvCxnSpPr>
-            <p:nvPr/>
-          </p:nvCxnSpPr>
-          <p:spPr>
-            <a:xfrm>
-              <a:off x="3895019" y="4040005"/>
-              <a:ext cx="494370" cy="1546348"/>
-            </a:xfrm>
-            <a:prstGeom prst="straightConnector1">
-              <a:avLst/>
-            </a:prstGeom>
-            <a:ln>
-              <a:tailEnd type="triangle"/>
-            </a:ln>
-          </p:spPr>
-          <p:style>
-            <a:lnRef idx="1">
-              <a:schemeClr val="accent1"/>
-            </a:lnRef>
-            <a:fillRef idx="0">
-              <a:schemeClr val="accent1"/>
-            </a:fillRef>
-            <a:effectRef idx="0">
-              <a:schemeClr val="accent1"/>
-            </a:effectRef>
-            <a:fontRef idx="minor">
-              <a:schemeClr val="tx1"/>
-            </a:fontRef>
-          </p:style>
-        </p:cxnSp>
-        <p:cxnSp>
-          <p:nvCxnSpPr>
-            <p:cNvPr id="64" name="Conector de Seta Reta 63">
-              <a:extLst>
-                <a:ext uri="{FF2B5EF4-FFF2-40B4-BE49-F238E27FC236}">
-                  <a16:creationId xmlns:a16="http://schemas.microsoft.com/office/drawing/2014/main" xmlns="" id="{150D464E-AEC1-287D-10D4-2216F0B3BB14}"/>
-                </a:ext>
-              </a:extLst>
-            </p:cNvPr>
-            <p:cNvCxnSpPr>
-              <a:stCxn id="6" idx="6"/>
-              <a:endCxn id="61" idx="2"/>
-            </p:cNvCxnSpPr>
-            <p:nvPr/>
-          </p:nvCxnSpPr>
-          <p:spPr>
-            <a:xfrm>
-              <a:off x="3895018" y="4809262"/>
-              <a:ext cx="494371" cy="777091"/>
-            </a:xfrm>
-            <a:prstGeom prst="straightConnector1">
-              <a:avLst/>
-            </a:prstGeom>
-            <a:ln>
-              <a:tailEnd type="triangle"/>
-            </a:ln>
-          </p:spPr>
-          <p:style>
-            <a:lnRef idx="1">
-              <a:schemeClr val="accent1"/>
-            </a:lnRef>
-            <a:fillRef idx="0">
-              <a:schemeClr val="accent1"/>
-            </a:fillRef>
-            <a:effectRef idx="0">
-              <a:schemeClr val="accent1"/>
-            </a:effectRef>
-            <a:fontRef idx="minor">
-              <a:schemeClr val="tx1"/>
-            </a:fontRef>
-          </p:style>
-        </p:cxnSp>
-        <p:cxnSp>
-          <p:nvCxnSpPr>
-            <p:cNvPr id="65" name="Conector de Seta Reta 64">
-              <a:extLst>
-                <a:ext uri="{FF2B5EF4-FFF2-40B4-BE49-F238E27FC236}">
-                  <a16:creationId xmlns:a16="http://schemas.microsoft.com/office/drawing/2014/main" xmlns="" id="{5CA2E182-69E2-D029-76B3-458379AFD558}"/>
-                </a:ext>
-              </a:extLst>
-            </p:cNvPr>
-            <p:cNvCxnSpPr>
-              <a:stCxn id="7" idx="6"/>
-              <a:endCxn id="61" idx="2"/>
-            </p:cNvCxnSpPr>
-            <p:nvPr/>
-          </p:nvCxnSpPr>
-          <p:spPr>
-            <a:xfrm flipV="1">
-              <a:off x="3895018" y="5586353"/>
-              <a:ext cx="494371" cy="2326"/>
-            </a:xfrm>
-            <a:prstGeom prst="straightConnector1">
-              <a:avLst/>
-            </a:prstGeom>
-            <a:ln>
-              <a:tailEnd type="triangle"/>
-            </a:ln>
-          </p:spPr>
-          <p:style>
-            <a:lnRef idx="1">
-              <a:schemeClr val="accent1"/>
-            </a:lnRef>
-            <a:fillRef idx="0">
-              <a:schemeClr val="accent1"/>
-            </a:fillRef>
-            <a:effectRef idx="0">
-              <a:schemeClr val="accent1"/>
-            </a:effectRef>
-            <a:fontRef idx="minor">
-              <a:schemeClr val="tx1"/>
-            </a:fontRef>
-          </p:style>
-        </p:cxnSp>
-        <p:cxnSp>
-          <p:nvCxnSpPr>
-            <p:cNvPr id="66" name="Conector de Seta Reta 65">
-              <a:extLst>
-                <a:ext uri="{FF2B5EF4-FFF2-40B4-BE49-F238E27FC236}">
-                  <a16:creationId xmlns:a16="http://schemas.microsoft.com/office/drawing/2014/main" xmlns="" id="{5D189B98-F5BB-B00F-B8E2-C9A5C22D8D5A}"/>
-                </a:ext>
-              </a:extLst>
-            </p:cNvPr>
-            <p:cNvCxnSpPr>
-              <a:stCxn id="8" idx="6"/>
-              <a:endCxn id="61" idx="2"/>
-            </p:cNvCxnSpPr>
-            <p:nvPr/>
-          </p:nvCxnSpPr>
-          <p:spPr>
-            <a:xfrm flipV="1">
-              <a:off x="3895018" y="5586353"/>
-              <a:ext cx="494371" cy="781743"/>
-            </a:xfrm>
-            <a:prstGeom prst="straightConnector1">
-              <a:avLst/>
-            </a:prstGeom>
-            <a:ln>
-              <a:tailEnd type="triangle"/>
-            </a:ln>
-          </p:spPr>
-          <p:style>
-            <a:lnRef idx="1">
-              <a:schemeClr val="accent1"/>
-            </a:lnRef>
-            <a:fillRef idx="0">
-              <a:schemeClr val="accent1"/>
-            </a:fillRef>
-            <a:effectRef idx="0">
-              <a:schemeClr val="accent1"/>
-            </a:effectRef>
-            <a:fontRef idx="minor">
-              <a:schemeClr val="tx1"/>
-            </a:fontRef>
-          </p:style>
-        </p:cxnSp>
-        <p:cxnSp>
-          <p:nvCxnSpPr>
-            <p:cNvPr id="67" name="Conector de Seta Reta 66">
-              <a:extLst>
-                <a:ext uri="{FF2B5EF4-FFF2-40B4-BE49-F238E27FC236}">
-                  <a16:creationId xmlns:a16="http://schemas.microsoft.com/office/drawing/2014/main" xmlns="" id="{11B06758-0920-8AA8-5F59-D8A66289A6BD}"/>
-                </a:ext>
-              </a:extLst>
-            </p:cNvPr>
-            <p:cNvCxnSpPr>
-              <a:cxnSpLocks/>
-            </p:cNvCxnSpPr>
-            <p:nvPr/>
-          </p:nvCxnSpPr>
-          <p:spPr>
-            <a:xfrm flipV="1">
-              <a:off x="4955449" y="5581057"/>
-              <a:ext cx="257585" cy="1162"/>
-            </a:xfrm>
-            <a:prstGeom prst="straightConnector1">
-              <a:avLst/>
-            </a:prstGeom>
-            <a:ln>
-              <a:tailEnd type="triangle"/>
-            </a:ln>
-          </p:spPr>
-          <p:style>
-            <a:lnRef idx="1">
-              <a:schemeClr val="accent1"/>
-            </a:lnRef>
-            <a:fillRef idx="0">
-              <a:schemeClr val="accent1"/>
-            </a:fillRef>
-            <a:effectRef idx="0">
-              <a:schemeClr val="accent1"/>
-            </a:effectRef>
-            <a:fontRef idx="minor">
-              <a:schemeClr val="tx1"/>
-            </a:fontRef>
-          </p:style>
-        </p:cxnSp>
-        <mc:AlternateContent xmlns:mc="http://schemas.openxmlformats.org/markup-compatibility/2006" xmlns:a14="http://schemas.microsoft.com/office/drawing/2010/main">
-          <mc:Choice Requires="a14">
-            <p:sp>
-              <p:nvSpPr>
-                <p:cNvPr id="68" name="CaixaDeTexto 67">
-                  <a:extLst>
-                    <a:ext uri="{FF2B5EF4-FFF2-40B4-BE49-F238E27FC236}">
-                      <a16:creationId xmlns:a16="http://schemas.microsoft.com/office/drawing/2014/main" xmlns="" id="{71E9EBB1-B4EA-38B2-215B-3CEDA2D21878}"/>
-                    </a:ext>
-                  </a:extLst>
-                </p:cNvPr>
-                <p:cNvSpPr txBox="1"/>
-                <p:nvPr/>
-              </p:nvSpPr>
-              <p:spPr>
-                <a:xfrm>
-                  <a:off x="5145409" y="5375552"/>
-                  <a:ext cx="415834" cy="369332"/>
-                </a:xfrm>
-                <a:prstGeom prst="rect">
-                  <a:avLst/>
-                </a:prstGeom>
-                <a:noFill/>
-              </p:spPr>
-              <p:txBody>
-                <a:bodyPr wrap="square" rtlCol="0">
-                  <a:spAutoFit/>
-                </a:bodyPr>
-                <a:lstStyle/>
-                <a:p>
-                  <a:pPr/>
-                  <a14:m>
-                    <m:oMathPara xmlns:m="http://schemas.openxmlformats.org/officeDocument/2006/math">
-                      <m:oMathParaPr>
-                        <m:jc m:val="centerGroup"/>
-                      </m:oMathParaPr>
-                      <m:oMath xmlns:m="http://schemas.openxmlformats.org/officeDocument/2006/math">
-                        <m:sSub>
-                          <m:sSubPr>
-                            <m:ctrlPr>
-                              <a:rPr lang="pt-BR" i="1" smtClean="0">
-                                <a:latin typeface="Cambria Math" panose="02040503050406030204" pitchFamily="18" charset="0"/>
-                              </a:rPr>
-                            </m:ctrlPr>
-                          </m:sSubPr>
-                          <m:e>
-                            <m:acc>
-                              <m:accPr>
-                                <m:chr m:val="̂"/>
-                                <m:ctrlPr>
-                                  <a:rPr lang="pt-BR" i="1" smtClean="0">
-                                    <a:latin typeface="Cambria Math" panose="02040503050406030204" pitchFamily="18" charset="0"/>
-                                  </a:rPr>
-                                </m:ctrlPr>
-                              </m:accPr>
-                              <m:e>
-                                <m:r>
-                                  <a:rPr lang="pt-BR" b="0" i="1" smtClean="0">
-                                    <a:latin typeface="Cambria Math" panose="02040503050406030204" pitchFamily="18" charset="0"/>
-                                  </a:rPr>
-                                  <m:t>𝑦</m:t>
-                                </m:r>
-                              </m:e>
-                            </m:acc>
-                          </m:e>
-                          <m:sub>
-                            <m:r>
-                              <a:rPr lang="pt-BR" b="0" i="1" smtClean="0">
-                                <a:latin typeface="Cambria Math" panose="02040503050406030204" pitchFamily="18" charset="0"/>
-                              </a:rPr>
-                              <m:t>2</m:t>
-                            </m:r>
-                          </m:sub>
-                        </m:sSub>
-                      </m:oMath>
-                    </m:oMathPara>
-                  </a14:m>
-                  <a:endParaRPr lang="pt-BR" dirty="0"/>
-                </a:p>
-              </p:txBody>
-            </p:sp>
-          </mc:Choice>
-          <mc:Fallback xmlns="">
-            <p:sp>
-              <p:nvSpPr>
-                <p:cNvPr id="68" name="CaixaDeTexto 67">
-                  <a:extLst>
-                    <a:ext uri="{FF2B5EF4-FFF2-40B4-BE49-F238E27FC236}">
-                      <a16:creationId xmlns:a16="http://schemas.microsoft.com/office/drawing/2014/main" id="{6CD06DD8-9472-1D2D-3014-F1071386D57A}"/>
-                    </a:ext>
-                  </a:extLst>
-                </p:cNvPr>
-                <p:cNvSpPr txBox="1">
-                  <a:spLocks noRot="1" noChangeAspect="1" noMove="1" noResize="1" noEditPoints="1" noAdjustHandles="1" noChangeArrowheads="1" noChangeShapeType="1" noTextEdit="1"/>
-                </p:cNvSpPr>
-                <p:nvPr/>
-              </p:nvSpPr>
-              <p:spPr>
-                <a:xfrm>
-                  <a:off x="5145409" y="5375552"/>
-                  <a:ext cx="415834" cy="369332"/>
-                </a:xfrm>
-                <a:prstGeom prst="rect">
-                  <a:avLst/>
-                </a:prstGeom>
-                <a:blipFill>
-                  <a:blip r:embed="rId7"/>
-                  <a:stretch>
-                    <a:fillRect t="-6667" r="-7246" b="-6667"/>
-                  </a:stretch>
-                </a:blipFill>
-              </p:spPr>
-              <p:txBody>
-                <a:bodyPr/>
-                <a:lstStyle/>
-                <a:p>
-                  <a:r>
-                    <a:rPr lang="pt-BR">
-                      <a:noFill/>
-                    </a:rPr>
-                    <a:t> </a:t>
-                  </a:r>
-                </a:p>
-              </p:txBody>
-            </p:sp>
-          </mc:Fallback>
-        </mc:AlternateContent>
-      </p:grpSp>
-      <p:grpSp>
-        <p:nvGrpSpPr>
-          <p:cNvPr id="165" name="Agrupar 164">
-            <a:extLst>
-              <a:ext uri="{FF2B5EF4-FFF2-40B4-BE49-F238E27FC236}">
-                <a16:creationId xmlns:a16="http://schemas.microsoft.com/office/drawing/2014/main" xmlns="" id="{0618C993-0BF6-102C-DD68-4AC2AA1211A2}"/>
-              </a:ext>
-            </a:extLst>
-          </p:cNvPr>
-          <p:cNvGrpSpPr/>
-          <p:nvPr/>
-        </p:nvGrpSpPr>
-        <p:grpSpPr>
-          <a:xfrm>
-            <a:off x="6218374" y="1660362"/>
-            <a:ext cx="4548514" cy="2254849"/>
-            <a:chOff x="6218374" y="1660362"/>
-            <a:chExt cx="4548514" cy="2254849"/>
-          </a:xfrm>
-        </p:grpSpPr>
-        <p:sp>
-          <p:nvSpPr>
-            <p:cNvPr id="70" name="Elipse 69">
-              <a:extLst>
-                <a:ext uri="{FF2B5EF4-FFF2-40B4-BE49-F238E27FC236}">
-                  <a16:creationId xmlns:a16="http://schemas.microsoft.com/office/drawing/2014/main" xmlns="" id="{E39F3A4B-64FB-2235-50E9-685D30F3AF9A}"/>
-                </a:ext>
-              </a:extLst>
-            </p:cNvPr>
-            <p:cNvSpPr/>
-            <p:nvPr/>
-          </p:nvSpPr>
-          <p:spPr>
-            <a:xfrm>
-              <a:off x="8537971" y="2137838"/>
-              <a:ext cx="566057" cy="566057"/>
-            </a:xfrm>
-            <a:prstGeom prst="ellipse">
-              <a:avLst/>
-            </a:prstGeom>
-            <a:solidFill>
-              <a:schemeClr val="accent1"/>
-            </a:solidFill>
-            <a:ln>
-              <a:noFill/>
-            </a:ln>
-          </p:spPr>
-          <p:style>
-            <a:lnRef idx="2">
-              <a:schemeClr val="accent1">
-                <a:shade val="15000"/>
-              </a:schemeClr>
-            </a:lnRef>
-            <a:fillRef idx="1">
-              <a:schemeClr val="accent1"/>
-            </a:fillRef>
-            <a:effectRef idx="0">
-              <a:schemeClr val="accent1"/>
-            </a:effectRef>
-            <a:fontRef idx="minor">
-              <a:schemeClr val="lt1"/>
-            </a:fontRef>
-          </p:style>
-          <p:txBody>
-            <a:bodyPr rtlCol="0" anchor="ctr"/>
-            <a:lstStyle/>
-            <a:p>
-              <a:pPr algn="ctr"/>
-              <a:endParaRPr lang="pt-BR" dirty="0"/>
-            </a:p>
-          </p:txBody>
-        </p:sp>
-        <p:sp>
-          <p:nvSpPr>
-            <p:cNvPr id="71" name="Elipse 70">
-              <a:extLst>
-                <a:ext uri="{FF2B5EF4-FFF2-40B4-BE49-F238E27FC236}">
-                  <a16:creationId xmlns:a16="http://schemas.microsoft.com/office/drawing/2014/main" xmlns="" id="{DF98F044-6EC7-649C-5F00-E8E185E1D7C9}"/>
-                </a:ext>
-              </a:extLst>
-            </p:cNvPr>
-            <p:cNvSpPr/>
-            <p:nvPr/>
-          </p:nvSpPr>
-          <p:spPr>
-            <a:xfrm>
-              <a:off x="8542683" y="3006537"/>
-              <a:ext cx="566057" cy="566057"/>
-            </a:xfrm>
-            <a:prstGeom prst="ellipse">
-              <a:avLst/>
-            </a:prstGeom>
-            <a:solidFill>
-              <a:schemeClr val="accent1"/>
-            </a:solidFill>
-            <a:ln>
-              <a:noFill/>
-            </a:ln>
-          </p:spPr>
-          <p:style>
-            <a:lnRef idx="2">
-              <a:schemeClr val="accent1">
-                <a:shade val="15000"/>
-              </a:schemeClr>
-            </a:lnRef>
-            <a:fillRef idx="1">
-              <a:schemeClr val="accent1"/>
-            </a:fillRef>
-            <a:effectRef idx="0">
-              <a:schemeClr val="accent1"/>
-            </a:effectRef>
-            <a:fontRef idx="minor">
-              <a:schemeClr val="lt1"/>
-            </a:fontRef>
-          </p:style>
-          <p:txBody>
-            <a:bodyPr rtlCol="0" anchor="ctr"/>
-            <a:lstStyle/>
-            <a:p>
-              <a:pPr algn="ctr"/>
-              <a:endParaRPr lang="pt-BR" dirty="0"/>
-            </a:p>
-          </p:txBody>
-        </p:sp>
-        <p:sp>
-          <p:nvSpPr>
-            <p:cNvPr id="74" name="Elipse 73">
-              <a:extLst>
-                <a:ext uri="{FF2B5EF4-FFF2-40B4-BE49-F238E27FC236}">
-                  <a16:creationId xmlns:a16="http://schemas.microsoft.com/office/drawing/2014/main" xmlns="" id="{BEBB560D-575B-4DBD-0B2E-E34BE81E94AA}"/>
-                </a:ext>
-              </a:extLst>
-            </p:cNvPr>
-            <p:cNvSpPr/>
-            <p:nvPr/>
-          </p:nvSpPr>
-          <p:spPr>
-            <a:xfrm>
-              <a:off x="9598398" y="2145263"/>
-              <a:ext cx="566057" cy="566057"/>
-            </a:xfrm>
-            <a:prstGeom prst="ellipse">
-              <a:avLst/>
-            </a:prstGeom>
-            <a:solidFill>
-              <a:schemeClr val="bg1">
-                <a:lumMod val="85000"/>
-              </a:schemeClr>
-            </a:solidFill>
-            <a:ln>
-              <a:noFill/>
-            </a:ln>
-          </p:spPr>
-          <p:style>
-            <a:lnRef idx="2">
-              <a:schemeClr val="accent1">
-                <a:shade val="15000"/>
-              </a:schemeClr>
-            </a:lnRef>
-            <a:fillRef idx="1">
-              <a:schemeClr val="accent1"/>
-            </a:fillRef>
-            <a:effectRef idx="0">
-              <a:schemeClr val="accent1"/>
-            </a:effectRef>
-            <a:fontRef idx="minor">
-              <a:schemeClr val="lt1"/>
-            </a:fontRef>
-          </p:style>
-          <p:txBody>
-            <a:bodyPr rtlCol="0" anchor="ctr"/>
-            <a:lstStyle/>
-            <a:p>
-              <a:pPr algn="ctr"/>
-              <a:endParaRPr lang="pt-BR" dirty="0"/>
-            </a:p>
-          </p:txBody>
-        </p:sp>
-        <p:sp>
-          <p:nvSpPr>
-            <p:cNvPr id="75" name="Elipse 74">
-              <a:extLst>
-                <a:ext uri="{FF2B5EF4-FFF2-40B4-BE49-F238E27FC236}">
-                  <a16:creationId xmlns:a16="http://schemas.microsoft.com/office/drawing/2014/main" xmlns="" id="{BF05E553-A4B6-2700-1A50-86263F929DB4}"/>
-                </a:ext>
-              </a:extLst>
-            </p:cNvPr>
-            <p:cNvSpPr/>
-            <p:nvPr/>
-          </p:nvSpPr>
-          <p:spPr>
-            <a:xfrm>
-              <a:off x="7336911" y="1802806"/>
-              <a:ext cx="566057" cy="566057"/>
-            </a:xfrm>
-            <a:prstGeom prst="ellipse">
-              <a:avLst/>
-            </a:prstGeom>
-            <a:solidFill>
-              <a:schemeClr val="accent2"/>
-            </a:solidFill>
-            <a:ln>
-              <a:noFill/>
-            </a:ln>
-          </p:spPr>
-          <p:style>
-            <a:lnRef idx="2">
-              <a:schemeClr val="accent1">
-                <a:shade val="15000"/>
-              </a:schemeClr>
-            </a:lnRef>
-            <a:fillRef idx="1">
-              <a:schemeClr val="accent1"/>
-            </a:fillRef>
-            <a:effectRef idx="0">
-              <a:schemeClr val="accent1"/>
-            </a:effectRef>
-            <a:fontRef idx="minor">
-              <a:schemeClr val="lt1"/>
-            </a:fontRef>
-          </p:style>
-          <p:txBody>
-            <a:bodyPr rtlCol="0" anchor="ctr"/>
-            <a:lstStyle/>
-            <a:p>
-              <a:pPr algn="ctr"/>
-              <a:endParaRPr lang="pt-BR" dirty="0"/>
-            </a:p>
-          </p:txBody>
-        </p:sp>
-        <p:sp>
-          <p:nvSpPr>
-            <p:cNvPr id="76" name="Elipse 75">
-              <a:extLst>
-                <a:ext uri="{FF2B5EF4-FFF2-40B4-BE49-F238E27FC236}">
-                  <a16:creationId xmlns:a16="http://schemas.microsoft.com/office/drawing/2014/main" xmlns="" id="{27CFCEF1-AEFB-C082-434A-97CB57A09EC5}"/>
-                </a:ext>
-              </a:extLst>
-            </p:cNvPr>
-            <p:cNvSpPr/>
-            <p:nvPr/>
-          </p:nvSpPr>
-          <p:spPr>
-            <a:xfrm>
-              <a:off x="7341623" y="2572060"/>
-              <a:ext cx="566057" cy="566057"/>
-            </a:xfrm>
-            <a:prstGeom prst="ellipse">
-              <a:avLst/>
-            </a:prstGeom>
-            <a:solidFill>
-              <a:schemeClr val="accent2"/>
-            </a:solidFill>
-            <a:ln>
-              <a:noFill/>
-            </a:ln>
-          </p:spPr>
-          <p:style>
-            <a:lnRef idx="2">
-              <a:schemeClr val="accent1">
-                <a:shade val="15000"/>
-              </a:schemeClr>
-            </a:lnRef>
-            <a:fillRef idx="1">
-              <a:schemeClr val="accent1"/>
-            </a:fillRef>
-            <a:effectRef idx="0">
-              <a:schemeClr val="accent1"/>
-            </a:effectRef>
-            <a:fontRef idx="minor">
-              <a:schemeClr val="lt1"/>
-            </a:fontRef>
-          </p:style>
-          <p:txBody>
-            <a:bodyPr rtlCol="0" anchor="ctr"/>
-            <a:lstStyle/>
-            <a:p>
-              <a:pPr algn="ctr"/>
-              <a:endParaRPr lang="pt-BR" dirty="0"/>
-            </a:p>
-          </p:txBody>
-        </p:sp>
-        <p:sp>
-          <p:nvSpPr>
-            <p:cNvPr id="77" name="Elipse 76">
-              <a:extLst>
-                <a:ext uri="{FF2B5EF4-FFF2-40B4-BE49-F238E27FC236}">
-                  <a16:creationId xmlns:a16="http://schemas.microsoft.com/office/drawing/2014/main" xmlns="" id="{E3D2A773-2748-DC35-14AF-C5BE6612412B}"/>
-                </a:ext>
-              </a:extLst>
-            </p:cNvPr>
-            <p:cNvSpPr/>
-            <p:nvPr/>
-          </p:nvSpPr>
-          <p:spPr>
-            <a:xfrm>
-              <a:off x="7336911" y="3349154"/>
-              <a:ext cx="566057" cy="566057"/>
-            </a:xfrm>
-            <a:prstGeom prst="ellipse">
-              <a:avLst/>
-            </a:prstGeom>
-            <a:solidFill>
-              <a:schemeClr val="accent2"/>
-            </a:solidFill>
-            <a:ln>
-              <a:noFill/>
-            </a:ln>
-          </p:spPr>
-          <p:style>
-            <a:lnRef idx="2">
-              <a:schemeClr val="accent1">
-                <a:shade val="15000"/>
-              </a:schemeClr>
-            </a:lnRef>
-            <a:fillRef idx="1">
-              <a:schemeClr val="accent1"/>
-            </a:fillRef>
-            <a:effectRef idx="0">
-              <a:schemeClr val="accent1"/>
-            </a:effectRef>
-            <a:fontRef idx="minor">
-              <a:schemeClr val="lt1"/>
-            </a:fontRef>
-          </p:style>
-          <p:txBody>
-            <a:bodyPr rtlCol="0" anchor="ctr"/>
-            <a:lstStyle/>
-            <a:p>
-              <a:pPr algn="ctr"/>
-              <a:endParaRPr lang="pt-BR" dirty="0"/>
-            </a:p>
-          </p:txBody>
-        </p:sp>
-        <p:cxnSp>
-          <p:nvCxnSpPr>
-            <p:cNvPr id="78" name="Conector de Seta Reta 77">
-              <a:extLst>
-                <a:ext uri="{FF2B5EF4-FFF2-40B4-BE49-F238E27FC236}">
-                  <a16:creationId xmlns:a16="http://schemas.microsoft.com/office/drawing/2014/main" xmlns="" id="{B2BAB490-DFBB-4466-36D6-521D097CA343}"/>
-                </a:ext>
-              </a:extLst>
-            </p:cNvPr>
-            <p:cNvCxnSpPr>
-              <a:stCxn id="75" idx="6"/>
-              <a:endCxn id="70" idx="2"/>
-            </p:cNvCxnSpPr>
-            <p:nvPr/>
-          </p:nvCxnSpPr>
-          <p:spPr>
-            <a:xfrm>
-              <a:off x="7902968" y="2085835"/>
-              <a:ext cx="635003" cy="335032"/>
-            </a:xfrm>
-            <a:prstGeom prst="straightConnector1">
-              <a:avLst/>
-            </a:prstGeom>
-            <a:ln>
-              <a:tailEnd type="triangle"/>
-            </a:ln>
-          </p:spPr>
-          <p:style>
-            <a:lnRef idx="1">
-              <a:schemeClr val="accent1"/>
-            </a:lnRef>
-            <a:fillRef idx="0">
-              <a:schemeClr val="accent1"/>
-            </a:fillRef>
-            <a:effectRef idx="0">
-              <a:schemeClr val="accent1"/>
-            </a:effectRef>
-            <a:fontRef idx="minor">
-              <a:schemeClr val="tx1"/>
-            </a:fontRef>
-          </p:style>
-        </p:cxnSp>
-        <p:cxnSp>
-          <p:nvCxnSpPr>
-            <p:cNvPr id="79" name="Conector de Seta Reta 78">
-              <a:extLst>
-                <a:ext uri="{FF2B5EF4-FFF2-40B4-BE49-F238E27FC236}">
-                  <a16:creationId xmlns:a16="http://schemas.microsoft.com/office/drawing/2014/main" xmlns="" id="{D7D4B9E9-842B-6C79-0A0A-3BEFD76F9058}"/>
-                </a:ext>
-              </a:extLst>
-            </p:cNvPr>
-            <p:cNvCxnSpPr>
-              <a:stCxn id="75" idx="6"/>
-              <a:endCxn id="71" idx="2"/>
-            </p:cNvCxnSpPr>
-            <p:nvPr/>
-          </p:nvCxnSpPr>
-          <p:spPr>
-            <a:xfrm>
-              <a:off x="7902968" y="2085835"/>
-              <a:ext cx="639715" cy="1203731"/>
-            </a:xfrm>
-            <a:prstGeom prst="straightConnector1">
-              <a:avLst/>
-            </a:prstGeom>
-            <a:ln>
-              <a:tailEnd type="triangle"/>
-            </a:ln>
-          </p:spPr>
-          <p:style>
-            <a:lnRef idx="1">
-              <a:schemeClr val="accent1"/>
-            </a:lnRef>
-            <a:fillRef idx="0">
-              <a:schemeClr val="accent1"/>
-            </a:fillRef>
-            <a:effectRef idx="0">
-              <a:schemeClr val="accent1"/>
-            </a:effectRef>
-            <a:fontRef idx="minor">
-              <a:schemeClr val="tx1"/>
-            </a:fontRef>
-          </p:style>
-        </p:cxnSp>
-        <p:cxnSp>
-          <p:nvCxnSpPr>
-            <p:cNvPr id="82" name="Conector de Seta Reta 81">
-              <a:extLst>
-                <a:ext uri="{FF2B5EF4-FFF2-40B4-BE49-F238E27FC236}">
-                  <a16:creationId xmlns:a16="http://schemas.microsoft.com/office/drawing/2014/main" xmlns="" id="{EBDF0578-04AC-7B56-6BAB-F9BB4FA83FFF}"/>
-                </a:ext>
-              </a:extLst>
-            </p:cNvPr>
-            <p:cNvCxnSpPr>
-              <a:stCxn id="76" idx="6"/>
-              <a:endCxn id="70" idx="2"/>
-            </p:cNvCxnSpPr>
-            <p:nvPr/>
-          </p:nvCxnSpPr>
-          <p:spPr>
-            <a:xfrm flipV="1">
-              <a:off x="7907680" y="2420867"/>
-              <a:ext cx="630291" cy="434222"/>
-            </a:xfrm>
-            <a:prstGeom prst="straightConnector1">
-              <a:avLst/>
-            </a:prstGeom>
-            <a:ln>
-              <a:tailEnd type="triangle"/>
-            </a:ln>
-          </p:spPr>
-          <p:style>
-            <a:lnRef idx="1">
-              <a:schemeClr val="accent1"/>
-            </a:lnRef>
-            <a:fillRef idx="0">
-              <a:schemeClr val="accent1"/>
-            </a:fillRef>
-            <a:effectRef idx="0">
-              <a:schemeClr val="accent1"/>
-            </a:effectRef>
-            <a:fontRef idx="minor">
-              <a:schemeClr val="tx1"/>
-            </a:fontRef>
-          </p:style>
-        </p:cxnSp>
-        <p:cxnSp>
-          <p:nvCxnSpPr>
-            <p:cNvPr id="83" name="Conector de Seta Reta 82">
-              <a:extLst>
-                <a:ext uri="{FF2B5EF4-FFF2-40B4-BE49-F238E27FC236}">
-                  <a16:creationId xmlns:a16="http://schemas.microsoft.com/office/drawing/2014/main" xmlns="" id="{83A54A11-C9A8-C310-A9B2-5062C99ADFA0}"/>
-                </a:ext>
-              </a:extLst>
-            </p:cNvPr>
-            <p:cNvCxnSpPr>
-              <a:stCxn id="77" idx="6"/>
-              <a:endCxn id="71" idx="2"/>
-            </p:cNvCxnSpPr>
-            <p:nvPr/>
-          </p:nvCxnSpPr>
-          <p:spPr>
-            <a:xfrm flipV="1">
-              <a:off x="7902968" y="3289566"/>
-              <a:ext cx="639715" cy="342617"/>
-            </a:xfrm>
-            <a:prstGeom prst="straightConnector1">
-              <a:avLst/>
-            </a:prstGeom>
-            <a:ln>
-              <a:tailEnd type="triangle"/>
-            </a:ln>
-          </p:spPr>
-          <p:style>
-            <a:lnRef idx="1">
-              <a:schemeClr val="accent1"/>
-            </a:lnRef>
-            <a:fillRef idx="0">
-              <a:schemeClr val="accent1"/>
-            </a:fillRef>
-            <a:effectRef idx="0">
-              <a:schemeClr val="accent1"/>
-            </a:effectRef>
-            <a:fontRef idx="minor">
-              <a:schemeClr val="tx1"/>
-            </a:fontRef>
-          </p:style>
-        </p:cxnSp>
-        <p:cxnSp>
-          <p:nvCxnSpPr>
-            <p:cNvPr id="84" name="Conector de Seta Reta 83">
-              <a:extLst>
-                <a:ext uri="{FF2B5EF4-FFF2-40B4-BE49-F238E27FC236}">
-                  <a16:creationId xmlns:a16="http://schemas.microsoft.com/office/drawing/2014/main" xmlns="" id="{291A467E-1B89-5035-78D7-8924D0BF68AD}"/>
-                </a:ext>
-              </a:extLst>
-            </p:cNvPr>
-            <p:cNvCxnSpPr>
-              <a:stCxn id="76" idx="6"/>
-              <a:endCxn id="71" idx="2"/>
-            </p:cNvCxnSpPr>
-            <p:nvPr/>
-          </p:nvCxnSpPr>
-          <p:spPr>
-            <a:xfrm>
-              <a:off x="7907680" y="2855089"/>
-              <a:ext cx="635003" cy="434477"/>
-            </a:xfrm>
-            <a:prstGeom prst="straightConnector1">
-              <a:avLst/>
-            </a:prstGeom>
-            <a:ln>
-              <a:tailEnd type="triangle"/>
-            </a:ln>
-          </p:spPr>
-          <p:style>
-            <a:lnRef idx="1">
-              <a:schemeClr val="accent1"/>
-            </a:lnRef>
-            <a:fillRef idx="0">
-              <a:schemeClr val="accent1"/>
-            </a:fillRef>
-            <a:effectRef idx="0">
-              <a:schemeClr val="accent1"/>
-            </a:effectRef>
-            <a:fontRef idx="minor">
-              <a:schemeClr val="tx1"/>
-            </a:fontRef>
-          </p:style>
-        </p:cxnSp>
-        <p:cxnSp>
-          <p:nvCxnSpPr>
-            <p:cNvPr id="87" name="Conector de Seta Reta 86">
-              <a:extLst>
-                <a:ext uri="{FF2B5EF4-FFF2-40B4-BE49-F238E27FC236}">
-                  <a16:creationId xmlns:a16="http://schemas.microsoft.com/office/drawing/2014/main" xmlns="" id="{2621631A-F5A0-ECF4-2A62-1B4379F6F00A}"/>
-                </a:ext>
-              </a:extLst>
-            </p:cNvPr>
-            <p:cNvCxnSpPr>
-              <a:stCxn id="77" idx="6"/>
-              <a:endCxn id="70" idx="2"/>
-            </p:cNvCxnSpPr>
-            <p:nvPr/>
-          </p:nvCxnSpPr>
-          <p:spPr>
-            <a:xfrm flipV="1">
-              <a:off x="7902968" y="2420867"/>
-              <a:ext cx="635003" cy="1211316"/>
-            </a:xfrm>
-            <a:prstGeom prst="straightConnector1">
-              <a:avLst/>
-            </a:prstGeom>
-            <a:ln>
-              <a:tailEnd type="triangle"/>
-            </a:ln>
-          </p:spPr>
-          <p:style>
-            <a:lnRef idx="1">
-              <a:schemeClr val="accent1"/>
-            </a:lnRef>
-            <a:fillRef idx="0">
-              <a:schemeClr val="accent1"/>
-            </a:fillRef>
-            <a:effectRef idx="0">
-              <a:schemeClr val="accent1"/>
-            </a:effectRef>
-            <a:fontRef idx="minor">
-              <a:schemeClr val="tx1"/>
-            </a:fontRef>
-          </p:style>
-        </p:cxnSp>
-        <p:cxnSp>
-          <p:nvCxnSpPr>
-            <p:cNvPr id="90" name="Conector de Seta Reta 89">
-              <a:extLst>
-                <a:ext uri="{FF2B5EF4-FFF2-40B4-BE49-F238E27FC236}">
-                  <a16:creationId xmlns:a16="http://schemas.microsoft.com/office/drawing/2014/main" xmlns="" id="{2597FE04-EA07-B79C-6CE5-7D86C99CC3DF}"/>
-                </a:ext>
-              </a:extLst>
-            </p:cNvPr>
-            <p:cNvCxnSpPr>
-              <a:cxnSpLocks/>
-              <a:stCxn id="93" idx="3"/>
-              <a:endCxn id="75" idx="2"/>
-            </p:cNvCxnSpPr>
-            <p:nvPr/>
-          </p:nvCxnSpPr>
-          <p:spPr>
-            <a:xfrm>
-              <a:off x="6731944" y="2081731"/>
-              <a:ext cx="604967" cy="4104"/>
-            </a:xfrm>
-            <a:prstGeom prst="straightConnector1">
-              <a:avLst/>
-            </a:prstGeom>
-            <a:ln>
-              <a:tailEnd type="triangle"/>
-            </a:ln>
-          </p:spPr>
-          <p:style>
-            <a:lnRef idx="1">
-              <a:schemeClr val="accent1"/>
-            </a:lnRef>
-            <a:fillRef idx="0">
-              <a:schemeClr val="accent1"/>
-            </a:fillRef>
-            <a:effectRef idx="0">
-              <a:schemeClr val="accent1"/>
-            </a:effectRef>
-            <a:fontRef idx="minor">
-              <a:schemeClr val="tx1"/>
-            </a:fontRef>
-          </p:style>
-        </p:cxnSp>
-        <p:cxnSp>
-          <p:nvCxnSpPr>
-            <p:cNvPr id="91" name="Conector reto 90">
-              <a:extLst>
-                <a:ext uri="{FF2B5EF4-FFF2-40B4-BE49-F238E27FC236}">
-                  <a16:creationId xmlns:a16="http://schemas.microsoft.com/office/drawing/2014/main" xmlns="" id="{9C927A19-D05F-033A-8092-7F8E7F2634FB}"/>
-                </a:ext>
-              </a:extLst>
-            </p:cNvPr>
-            <p:cNvCxnSpPr>
-              <a:cxnSpLocks/>
-              <a:stCxn id="100" idx="3"/>
-              <a:endCxn id="76" idx="2"/>
-            </p:cNvCxnSpPr>
-            <p:nvPr/>
-          </p:nvCxnSpPr>
-          <p:spPr>
-            <a:xfrm flipV="1">
-              <a:off x="6742024" y="2855089"/>
-              <a:ext cx="599599" cy="775074"/>
-            </a:xfrm>
-            <a:prstGeom prst="line">
-              <a:avLst/>
-            </a:prstGeom>
-            <a:ln>
-              <a:headEnd type="none" w="med" len="med"/>
-              <a:tailEnd type="triangle" w="med" len="med"/>
-            </a:ln>
-          </p:spPr>
-          <p:style>
-            <a:lnRef idx="1">
-              <a:schemeClr val="accent1"/>
-            </a:lnRef>
-            <a:fillRef idx="0">
-              <a:schemeClr val="accent1"/>
-            </a:fillRef>
-            <a:effectRef idx="0">
-              <a:schemeClr val="accent1"/>
-            </a:effectRef>
-            <a:fontRef idx="minor">
-              <a:schemeClr val="tx1"/>
-            </a:fontRef>
-          </p:style>
-        </p:cxnSp>
-        <p:cxnSp>
-          <p:nvCxnSpPr>
-            <p:cNvPr id="92" name="Conector de Seta Reta 91">
-              <a:extLst>
-                <a:ext uri="{FF2B5EF4-FFF2-40B4-BE49-F238E27FC236}">
-                  <a16:creationId xmlns:a16="http://schemas.microsoft.com/office/drawing/2014/main" xmlns="" id="{3340A5B3-AC11-0395-547D-9CC723CDBB43}"/>
-                </a:ext>
-              </a:extLst>
-            </p:cNvPr>
-            <p:cNvCxnSpPr>
-              <a:cxnSpLocks/>
-              <a:stCxn id="74" idx="6"/>
-            </p:cNvCxnSpPr>
-            <p:nvPr/>
-          </p:nvCxnSpPr>
-          <p:spPr>
-            <a:xfrm flipV="1">
-              <a:off x="10164455" y="2427130"/>
-              <a:ext cx="257585" cy="1162"/>
-            </a:xfrm>
-            <a:prstGeom prst="straightConnector1">
-              <a:avLst/>
-            </a:prstGeom>
-            <a:ln>
-              <a:tailEnd type="triangle"/>
-            </a:ln>
-          </p:spPr>
-          <p:style>
-            <a:lnRef idx="1">
-              <a:schemeClr val="accent1"/>
-            </a:lnRef>
-            <a:fillRef idx="0">
-              <a:schemeClr val="accent1"/>
-            </a:fillRef>
-            <a:effectRef idx="0">
-              <a:schemeClr val="accent1"/>
-            </a:effectRef>
-            <a:fontRef idx="minor">
-              <a:schemeClr val="tx1"/>
-            </a:fontRef>
-          </p:style>
-        </p:cxnSp>
-        <mc:AlternateContent xmlns:mc="http://schemas.openxmlformats.org/markup-compatibility/2006" xmlns:a14="http://schemas.microsoft.com/office/drawing/2010/main">
-          <mc:Choice Requires="a14">
-            <p:sp>
-              <p:nvSpPr>
-                <p:cNvPr id="93" name="CaixaDeTexto 92">
-                  <a:extLst>
-                    <a:ext uri="{FF2B5EF4-FFF2-40B4-BE49-F238E27FC236}">
-                      <a16:creationId xmlns:a16="http://schemas.microsoft.com/office/drawing/2014/main" xmlns="" id="{544DA558-5359-4C3E-4014-16F3FE77B6BF}"/>
-                    </a:ext>
-                  </a:extLst>
-                </p:cNvPr>
-                <p:cNvSpPr txBox="1"/>
-                <p:nvPr/>
-              </p:nvSpPr>
-              <p:spPr>
-                <a:xfrm>
-                  <a:off x="6386920" y="1897065"/>
-                  <a:ext cx="345024" cy="369332"/>
-                </a:xfrm>
-                <a:prstGeom prst="rect">
-                  <a:avLst/>
-                </a:prstGeom>
-                <a:noFill/>
-              </p:spPr>
-              <p:txBody>
-                <a:bodyPr wrap="square" rtlCol="0">
-                  <a:spAutoFit/>
-                </a:bodyPr>
-                <a:lstStyle/>
-                <a:p>
-                  <a:pPr/>
-                  <a14:m>
-                    <m:oMathPara xmlns:m="http://schemas.openxmlformats.org/officeDocument/2006/math">
-                      <m:oMathParaPr>
-                        <m:jc m:val="centerGroup"/>
-                      </m:oMathParaPr>
-                      <m:oMath xmlns:m="http://schemas.openxmlformats.org/officeDocument/2006/math">
-                        <m:sSub>
-                          <m:sSubPr>
-                            <m:ctrlPr>
-                              <a:rPr lang="pt-BR" i="1" smtClean="0">
-                                <a:latin typeface="Cambria Math" panose="02040503050406030204" pitchFamily="18" charset="0"/>
-                              </a:rPr>
-                            </m:ctrlPr>
-                          </m:sSubPr>
-                          <m:e>
-                            <m:r>
-                              <a:rPr lang="pt-BR" b="0" i="1" smtClean="0">
-                                <a:latin typeface="Cambria Math" panose="02040503050406030204" pitchFamily="18" charset="0"/>
-                              </a:rPr>
-                              <m:t>𝑥</m:t>
-                            </m:r>
-                          </m:e>
-                          <m:sub>
-                            <m:r>
-                              <a:rPr lang="pt-BR" b="0" i="1" smtClean="0">
-                                <a:latin typeface="Cambria Math" panose="02040503050406030204" pitchFamily="18" charset="0"/>
-                              </a:rPr>
-                              <m:t>1</m:t>
-                            </m:r>
-                          </m:sub>
-                        </m:sSub>
-                      </m:oMath>
-                    </m:oMathPara>
-                  </a14:m>
-                  <a:endParaRPr lang="pt-BR" dirty="0"/>
-                </a:p>
-              </p:txBody>
-            </p:sp>
-          </mc:Choice>
-          <mc:Fallback xmlns="">
-            <p:sp>
-              <p:nvSpPr>
-                <p:cNvPr id="93" name="CaixaDeTexto 92">
-                  <a:extLst>
-                    <a:ext uri="{FF2B5EF4-FFF2-40B4-BE49-F238E27FC236}">
-                      <a16:creationId xmlns:a16="http://schemas.microsoft.com/office/drawing/2014/main" id="{544DA558-5359-4C3E-4014-16F3FE77B6BF}"/>
-                    </a:ext>
-                  </a:extLst>
-                </p:cNvPr>
-                <p:cNvSpPr txBox="1">
-                  <a:spLocks noRot="1" noChangeAspect="1" noMove="1" noResize="1" noEditPoints="1" noAdjustHandles="1" noChangeArrowheads="1" noChangeShapeType="1" noTextEdit="1"/>
-                </p:cNvSpPr>
-                <p:nvPr/>
-              </p:nvSpPr>
-              <p:spPr>
-                <a:xfrm>
-                  <a:off x="6386920" y="1897065"/>
-                  <a:ext cx="345024" cy="369332"/>
-                </a:xfrm>
-                <a:prstGeom prst="rect">
-                  <a:avLst/>
-                </a:prstGeom>
-                <a:blipFill>
-                  <a:blip r:embed="rId8"/>
-                  <a:stretch>
-                    <a:fillRect r="-5357"/>
-                  </a:stretch>
-                </a:blipFill>
-              </p:spPr>
-              <p:txBody>
-                <a:bodyPr/>
-                <a:lstStyle/>
-                <a:p>
-                  <a:r>
-                    <a:rPr lang="pt-BR">
-                      <a:noFill/>
-                    </a:rPr>
-                    <a:t> </a:t>
-                  </a:r>
-                </a:p>
-              </p:txBody>
-            </p:sp>
-          </mc:Fallback>
-        </mc:AlternateContent>
-        <mc:AlternateContent xmlns:mc="http://schemas.openxmlformats.org/markup-compatibility/2006" xmlns:a14="http://schemas.microsoft.com/office/drawing/2010/main">
-          <mc:Choice Requires="a14">
-            <p:sp>
-              <p:nvSpPr>
-                <p:cNvPr id="94" name="CaixaDeTexto 93">
-                  <a:extLst>
-                    <a:ext uri="{FF2B5EF4-FFF2-40B4-BE49-F238E27FC236}">
-                      <a16:creationId xmlns:a16="http://schemas.microsoft.com/office/drawing/2014/main" xmlns="" id="{241B9106-00CD-B044-0971-533326B85243}"/>
-                    </a:ext>
-                  </a:extLst>
-                </p:cNvPr>
-                <p:cNvSpPr txBox="1"/>
-                <p:nvPr/>
-              </p:nvSpPr>
-              <p:spPr>
-                <a:xfrm>
-                  <a:off x="6363161" y="2666319"/>
-                  <a:ext cx="370290" cy="369332"/>
-                </a:xfrm>
-                <a:prstGeom prst="rect">
-                  <a:avLst/>
-                </a:prstGeom>
-                <a:noFill/>
-              </p:spPr>
-              <p:txBody>
-                <a:bodyPr wrap="square" rtlCol="0">
-                  <a:spAutoFit/>
-                </a:bodyPr>
-                <a:lstStyle/>
-                <a:p>
-                  <a:pPr/>
-                  <a14:m>
-                    <m:oMathPara xmlns:m="http://schemas.openxmlformats.org/officeDocument/2006/math">
-                      <m:oMathParaPr>
-                        <m:jc m:val="centerGroup"/>
-                      </m:oMathParaPr>
-                      <m:oMath xmlns:m="http://schemas.openxmlformats.org/officeDocument/2006/math">
-                        <m:sSub>
-                          <m:sSubPr>
-                            <m:ctrlPr>
-                              <a:rPr lang="pt-BR" i="1" smtClean="0">
-                                <a:latin typeface="Cambria Math" panose="02040503050406030204" pitchFamily="18" charset="0"/>
-                              </a:rPr>
-                            </m:ctrlPr>
-                          </m:sSubPr>
-                          <m:e>
-                            <m:r>
-                              <a:rPr lang="pt-BR" b="0" i="1" smtClean="0">
-                                <a:latin typeface="Cambria Math" panose="02040503050406030204" pitchFamily="18" charset="0"/>
-                              </a:rPr>
-                              <m:t>𝑥</m:t>
-                            </m:r>
-                          </m:e>
-                          <m:sub>
-                            <m:r>
-                              <a:rPr lang="pt-BR" b="0" i="1" smtClean="0">
-                                <a:latin typeface="Cambria Math" panose="02040503050406030204" pitchFamily="18" charset="0"/>
-                              </a:rPr>
-                              <m:t>2</m:t>
-                            </m:r>
-                          </m:sub>
-                        </m:sSub>
-                      </m:oMath>
-                    </m:oMathPara>
-                  </a14:m>
-                  <a:endParaRPr lang="pt-BR" dirty="0"/>
-                </a:p>
-              </p:txBody>
-            </p:sp>
-          </mc:Choice>
-          <mc:Fallback xmlns="">
-            <p:sp>
-              <p:nvSpPr>
-                <p:cNvPr id="94" name="CaixaDeTexto 93">
-                  <a:extLst>
-                    <a:ext uri="{FF2B5EF4-FFF2-40B4-BE49-F238E27FC236}">
-                      <a16:creationId xmlns:a16="http://schemas.microsoft.com/office/drawing/2014/main" id="{241B9106-00CD-B044-0971-533326B85243}"/>
-                    </a:ext>
-                  </a:extLst>
-                </p:cNvPr>
-                <p:cNvSpPr txBox="1">
-                  <a:spLocks noRot="1" noChangeAspect="1" noMove="1" noResize="1" noEditPoints="1" noAdjustHandles="1" noChangeArrowheads="1" noChangeShapeType="1" noTextEdit="1"/>
-                </p:cNvSpPr>
-                <p:nvPr/>
-              </p:nvSpPr>
-              <p:spPr>
-                <a:xfrm>
-                  <a:off x="6363161" y="2666319"/>
-                  <a:ext cx="370290" cy="369332"/>
-                </a:xfrm>
-                <a:prstGeom prst="rect">
-                  <a:avLst/>
-                </a:prstGeom>
-                <a:blipFill>
-                  <a:blip r:embed="rId9"/>
-                  <a:stretch>
-                    <a:fillRect/>
-                  </a:stretch>
-                </a:blipFill>
-              </p:spPr>
-              <p:txBody>
-                <a:bodyPr/>
-                <a:lstStyle/>
-                <a:p>
-                  <a:r>
-                    <a:rPr lang="pt-BR">
-                      <a:noFill/>
-                    </a:rPr>
-                    <a:t> </a:t>
-                  </a:r>
-                </a:p>
-              </p:txBody>
-            </p:sp>
-          </mc:Fallback>
-        </mc:AlternateContent>
-        <mc:AlternateContent xmlns:mc="http://schemas.openxmlformats.org/markup-compatibility/2006" xmlns:a14="http://schemas.microsoft.com/office/drawing/2010/main">
-          <mc:Choice Requires="a14">
-            <p:sp>
-              <p:nvSpPr>
-                <p:cNvPr id="100" name="CaixaDeTexto 99">
-                  <a:extLst>
-                    <a:ext uri="{FF2B5EF4-FFF2-40B4-BE49-F238E27FC236}">
-                      <a16:creationId xmlns:a16="http://schemas.microsoft.com/office/drawing/2014/main" xmlns="" id="{1053A238-3190-88FD-D41E-ED5A191CE7C8}"/>
-                    </a:ext>
-                  </a:extLst>
-                </p:cNvPr>
-                <p:cNvSpPr txBox="1"/>
-                <p:nvPr/>
-              </p:nvSpPr>
-              <p:spPr>
-                <a:xfrm>
-                  <a:off x="6359484" y="3445497"/>
-                  <a:ext cx="382540" cy="369332"/>
-                </a:xfrm>
-                <a:prstGeom prst="rect">
-                  <a:avLst/>
-                </a:prstGeom>
-                <a:noFill/>
-              </p:spPr>
-              <p:txBody>
-                <a:bodyPr wrap="square" rtlCol="0">
-                  <a:spAutoFit/>
-                </a:bodyPr>
-                <a:lstStyle/>
-                <a:p>
-                  <a:pPr/>
-                  <a14:m>
-                    <m:oMathPara xmlns:m="http://schemas.openxmlformats.org/officeDocument/2006/math">
-                      <m:oMathParaPr>
-                        <m:jc m:val="centerGroup"/>
-                      </m:oMathParaPr>
-                      <m:oMath xmlns:m="http://schemas.openxmlformats.org/officeDocument/2006/math">
-                        <m:sSub>
-                          <m:sSubPr>
-                            <m:ctrlPr>
-                              <a:rPr lang="pt-BR" i="1" smtClean="0">
-                                <a:latin typeface="Cambria Math" panose="02040503050406030204" pitchFamily="18" charset="0"/>
-                              </a:rPr>
-                            </m:ctrlPr>
-                          </m:sSubPr>
-                          <m:e>
-                            <m:r>
-                              <a:rPr lang="pt-BR" b="0" i="1" smtClean="0">
-                                <a:latin typeface="Cambria Math" panose="02040503050406030204" pitchFamily="18" charset="0"/>
-                              </a:rPr>
-                              <m:t>𝑥</m:t>
-                            </m:r>
-                          </m:e>
-                          <m:sub>
-                            <m:r>
-                              <a:rPr lang="pt-BR" b="0" i="1" smtClean="0">
-                                <a:latin typeface="Cambria Math" panose="02040503050406030204" pitchFamily="18" charset="0"/>
-                              </a:rPr>
-                              <m:t>𝐾</m:t>
-                            </m:r>
-                          </m:sub>
-                        </m:sSub>
-                      </m:oMath>
-                    </m:oMathPara>
-                  </a14:m>
-                  <a:endParaRPr lang="pt-BR" dirty="0"/>
-                </a:p>
-              </p:txBody>
-            </p:sp>
-          </mc:Choice>
-          <mc:Fallback xmlns="">
-            <p:sp>
-              <p:nvSpPr>
-                <p:cNvPr id="100" name="CaixaDeTexto 99">
-                  <a:extLst>
-                    <a:ext uri="{FF2B5EF4-FFF2-40B4-BE49-F238E27FC236}">
-                      <a16:creationId xmlns:a16="http://schemas.microsoft.com/office/drawing/2014/main" id="{1053A238-3190-88FD-D41E-ED5A191CE7C8}"/>
-                    </a:ext>
-                  </a:extLst>
-                </p:cNvPr>
-                <p:cNvSpPr txBox="1">
-                  <a:spLocks noRot="1" noChangeAspect="1" noMove="1" noResize="1" noEditPoints="1" noAdjustHandles="1" noChangeArrowheads="1" noChangeShapeType="1" noTextEdit="1"/>
-                </p:cNvSpPr>
-                <p:nvPr/>
-              </p:nvSpPr>
-              <p:spPr>
-                <a:xfrm>
-                  <a:off x="6359484" y="3445497"/>
-                  <a:ext cx="382540" cy="369332"/>
-                </a:xfrm>
-                <a:prstGeom prst="rect">
-                  <a:avLst/>
-                </a:prstGeom>
-                <a:blipFill>
-                  <a:blip r:embed="rId10"/>
-                  <a:stretch>
-                    <a:fillRect r="-3175"/>
-                  </a:stretch>
-                </a:blipFill>
-              </p:spPr>
-              <p:txBody>
-                <a:bodyPr/>
-                <a:lstStyle/>
-                <a:p>
-                  <a:r>
-                    <a:rPr lang="pt-BR">
-                      <a:noFill/>
-                    </a:rPr>
-                    <a:t> </a:t>
-                  </a:r>
-                </a:p>
-              </p:txBody>
-            </p:sp>
-          </mc:Fallback>
-        </mc:AlternateContent>
-        <p:cxnSp>
-          <p:nvCxnSpPr>
-            <p:cNvPr id="101" name="Conector de Seta Reta 100">
-              <a:extLst>
-                <a:ext uri="{FF2B5EF4-FFF2-40B4-BE49-F238E27FC236}">
-                  <a16:creationId xmlns:a16="http://schemas.microsoft.com/office/drawing/2014/main" xmlns="" id="{7F7F27CD-B664-8E4C-D2A1-2BDFD7CF9347}"/>
-                </a:ext>
-              </a:extLst>
-            </p:cNvPr>
-            <p:cNvCxnSpPr>
-              <a:cxnSpLocks/>
-              <a:stCxn id="94" idx="3"/>
-              <a:endCxn id="75" idx="2"/>
-            </p:cNvCxnSpPr>
-            <p:nvPr/>
-          </p:nvCxnSpPr>
-          <p:spPr>
-            <a:xfrm flipV="1">
-              <a:off x="6733451" y="2085835"/>
-              <a:ext cx="603460" cy="765150"/>
-            </a:xfrm>
-            <a:prstGeom prst="straightConnector1">
-              <a:avLst/>
-            </a:prstGeom>
-            <a:ln>
-              <a:tailEnd type="triangle"/>
-            </a:ln>
-          </p:spPr>
-          <p:style>
-            <a:lnRef idx="1">
-              <a:schemeClr val="accent1"/>
-            </a:lnRef>
-            <a:fillRef idx="0">
-              <a:schemeClr val="accent1"/>
-            </a:fillRef>
-            <a:effectRef idx="0">
-              <a:schemeClr val="accent1"/>
-            </a:effectRef>
-            <a:fontRef idx="minor">
-              <a:schemeClr val="tx1"/>
-            </a:fontRef>
-          </p:style>
-        </p:cxnSp>
-        <p:cxnSp>
-          <p:nvCxnSpPr>
-            <p:cNvPr id="102" name="Conector de Seta Reta 101">
-              <a:extLst>
-                <a:ext uri="{FF2B5EF4-FFF2-40B4-BE49-F238E27FC236}">
-                  <a16:creationId xmlns:a16="http://schemas.microsoft.com/office/drawing/2014/main" xmlns="" id="{72D17B04-532C-DDB0-7DCE-C3577177E665}"/>
-                </a:ext>
-              </a:extLst>
-            </p:cNvPr>
-            <p:cNvCxnSpPr>
-              <a:cxnSpLocks/>
-              <a:stCxn id="94" idx="3"/>
-              <a:endCxn id="76" idx="2"/>
-            </p:cNvCxnSpPr>
-            <p:nvPr/>
-          </p:nvCxnSpPr>
-          <p:spPr>
-            <a:xfrm>
-              <a:off x="6733451" y="2850985"/>
-              <a:ext cx="608172" cy="4104"/>
-            </a:xfrm>
-            <a:prstGeom prst="straightConnector1">
-              <a:avLst/>
-            </a:prstGeom>
-            <a:ln>
-              <a:tailEnd type="triangle"/>
-            </a:ln>
-          </p:spPr>
-          <p:style>
-            <a:lnRef idx="1">
-              <a:schemeClr val="accent1"/>
-            </a:lnRef>
-            <a:fillRef idx="0">
-              <a:schemeClr val="accent1"/>
-            </a:fillRef>
-            <a:effectRef idx="0">
-              <a:schemeClr val="accent1"/>
-            </a:effectRef>
-            <a:fontRef idx="minor">
-              <a:schemeClr val="tx1"/>
-            </a:fontRef>
-          </p:style>
-        </p:cxnSp>
-        <p:cxnSp>
-          <p:nvCxnSpPr>
-            <p:cNvPr id="103" name="Conector de Seta Reta 102">
-              <a:extLst>
-                <a:ext uri="{FF2B5EF4-FFF2-40B4-BE49-F238E27FC236}">
-                  <a16:creationId xmlns:a16="http://schemas.microsoft.com/office/drawing/2014/main" xmlns="" id="{97F07E0E-91B1-F4AF-0F11-EDC6787E0700}"/>
-                </a:ext>
-              </a:extLst>
-            </p:cNvPr>
-            <p:cNvCxnSpPr>
-              <a:stCxn id="100" idx="3"/>
-              <a:endCxn id="77" idx="2"/>
-            </p:cNvCxnSpPr>
-            <p:nvPr/>
-          </p:nvCxnSpPr>
-          <p:spPr>
-            <a:xfrm>
-              <a:off x="6742024" y="3630163"/>
-              <a:ext cx="594887" cy="2020"/>
-            </a:xfrm>
-            <a:prstGeom prst="straightConnector1">
-              <a:avLst/>
-            </a:prstGeom>
-            <a:ln>
-              <a:tailEnd type="triangle"/>
-            </a:ln>
-          </p:spPr>
-          <p:style>
-            <a:lnRef idx="1">
-              <a:schemeClr val="accent1"/>
-            </a:lnRef>
-            <a:fillRef idx="0">
-              <a:schemeClr val="accent1"/>
-            </a:fillRef>
-            <a:effectRef idx="0">
-              <a:schemeClr val="accent1"/>
-            </a:effectRef>
-            <a:fontRef idx="minor">
-              <a:schemeClr val="tx1"/>
-            </a:fontRef>
-          </p:style>
-        </p:cxnSp>
-        <p:cxnSp>
-          <p:nvCxnSpPr>
-            <p:cNvPr id="104" name="Conector de Seta Reta 103">
-              <a:extLst>
-                <a:ext uri="{FF2B5EF4-FFF2-40B4-BE49-F238E27FC236}">
-                  <a16:creationId xmlns:a16="http://schemas.microsoft.com/office/drawing/2014/main" xmlns="" id="{E9316988-5211-EAE2-BF8F-E48D69233380}"/>
-                </a:ext>
-              </a:extLst>
-            </p:cNvPr>
-            <p:cNvCxnSpPr>
-              <a:cxnSpLocks/>
-              <a:stCxn id="100" idx="3"/>
-              <a:endCxn id="75" idx="2"/>
-            </p:cNvCxnSpPr>
-            <p:nvPr/>
-          </p:nvCxnSpPr>
-          <p:spPr>
-            <a:xfrm flipV="1">
-              <a:off x="6742024" y="2085835"/>
-              <a:ext cx="594887" cy="1544328"/>
-            </a:xfrm>
-            <a:prstGeom prst="straightConnector1">
-              <a:avLst/>
-            </a:prstGeom>
-            <a:ln>
-              <a:tailEnd type="triangle"/>
-            </a:ln>
-          </p:spPr>
-          <p:style>
-            <a:lnRef idx="1">
-              <a:schemeClr val="accent1"/>
-            </a:lnRef>
-            <a:fillRef idx="0">
-              <a:schemeClr val="accent1"/>
-            </a:fillRef>
-            <a:effectRef idx="0">
-              <a:schemeClr val="accent1"/>
-            </a:effectRef>
-            <a:fontRef idx="minor">
-              <a:schemeClr val="tx1"/>
-            </a:fontRef>
-          </p:style>
-        </p:cxnSp>
-        <p:cxnSp>
-          <p:nvCxnSpPr>
-            <p:cNvPr id="105" name="Conector de Seta Reta 104">
-              <a:extLst>
-                <a:ext uri="{FF2B5EF4-FFF2-40B4-BE49-F238E27FC236}">
-                  <a16:creationId xmlns:a16="http://schemas.microsoft.com/office/drawing/2014/main" xmlns="" id="{B80C4875-EF8E-BA1D-E0C8-A62FE6B485AD}"/>
-                </a:ext>
-              </a:extLst>
-            </p:cNvPr>
-            <p:cNvCxnSpPr>
-              <a:cxnSpLocks/>
-              <a:stCxn id="94" idx="3"/>
-              <a:endCxn id="77" idx="2"/>
-            </p:cNvCxnSpPr>
-            <p:nvPr/>
-          </p:nvCxnSpPr>
-          <p:spPr>
-            <a:xfrm>
-              <a:off x="6733451" y="2850985"/>
-              <a:ext cx="603460" cy="781198"/>
-            </a:xfrm>
-            <a:prstGeom prst="straightConnector1">
-              <a:avLst/>
-            </a:prstGeom>
-            <a:ln>
-              <a:tailEnd type="triangle"/>
-            </a:ln>
-          </p:spPr>
-          <p:style>
-            <a:lnRef idx="1">
-              <a:schemeClr val="accent1"/>
-            </a:lnRef>
-            <a:fillRef idx="0">
-              <a:schemeClr val="accent1"/>
-            </a:fillRef>
-            <a:effectRef idx="0">
-              <a:schemeClr val="accent1"/>
-            </a:effectRef>
-            <a:fontRef idx="minor">
-              <a:schemeClr val="tx1"/>
-            </a:fontRef>
-          </p:style>
-        </p:cxnSp>
-        <p:cxnSp>
-          <p:nvCxnSpPr>
-            <p:cNvPr id="107" name="Conector de Seta Reta 106">
-              <a:extLst>
-                <a:ext uri="{FF2B5EF4-FFF2-40B4-BE49-F238E27FC236}">
-                  <a16:creationId xmlns:a16="http://schemas.microsoft.com/office/drawing/2014/main" xmlns="" id="{F7F1680B-CC31-23AE-2548-4D1D8C56075F}"/>
-                </a:ext>
-              </a:extLst>
-            </p:cNvPr>
-            <p:cNvCxnSpPr>
-              <a:cxnSpLocks/>
-              <a:stCxn id="93" idx="3"/>
-              <a:endCxn id="76" idx="2"/>
-            </p:cNvCxnSpPr>
-            <p:nvPr/>
-          </p:nvCxnSpPr>
-          <p:spPr>
-            <a:xfrm>
-              <a:off x="6731944" y="2081731"/>
-              <a:ext cx="609679" cy="773358"/>
-            </a:xfrm>
-            <a:prstGeom prst="straightConnector1">
-              <a:avLst/>
-            </a:prstGeom>
-            <a:ln>
-              <a:tailEnd type="triangle"/>
-            </a:ln>
-          </p:spPr>
-          <p:style>
-            <a:lnRef idx="1">
-              <a:schemeClr val="accent1"/>
-            </a:lnRef>
-            <a:fillRef idx="0">
-              <a:schemeClr val="accent1"/>
-            </a:fillRef>
-            <a:effectRef idx="0">
-              <a:schemeClr val="accent1"/>
-            </a:effectRef>
-            <a:fontRef idx="minor">
-              <a:schemeClr val="tx1"/>
-            </a:fontRef>
-          </p:style>
-        </p:cxnSp>
-        <p:cxnSp>
-          <p:nvCxnSpPr>
-            <p:cNvPr id="108" name="Conector de Seta Reta 107">
-              <a:extLst>
-                <a:ext uri="{FF2B5EF4-FFF2-40B4-BE49-F238E27FC236}">
-                  <a16:creationId xmlns:a16="http://schemas.microsoft.com/office/drawing/2014/main" xmlns="" id="{C9236142-9603-ACD3-CDB2-89FD439FD192}"/>
-                </a:ext>
-              </a:extLst>
-            </p:cNvPr>
-            <p:cNvCxnSpPr>
-              <a:cxnSpLocks/>
-              <a:stCxn id="93" idx="3"/>
-              <a:endCxn id="77" idx="2"/>
-            </p:cNvCxnSpPr>
-            <p:nvPr/>
-          </p:nvCxnSpPr>
-          <p:spPr>
-            <a:xfrm>
-              <a:off x="6731944" y="2081731"/>
-              <a:ext cx="604967" cy="1550452"/>
-            </a:xfrm>
-            <a:prstGeom prst="straightConnector1">
-              <a:avLst/>
-            </a:prstGeom>
-            <a:ln>
-              <a:tailEnd type="triangle"/>
-            </a:ln>
-          </p:spPr>
-          <p:style>
-            <a:lnRef idx="1">
-              <a:schemeClr val="accent1"/>
-            </a:lnRef>
-            <a:fillRef idx="0">
-              <a:schemeClr val="accent1"/>
-            </a:fillRef>
-            <a:effectRef idx="0">
-              <a:schemeClr val="accent1"/>
-            </a:effectRef>
-            <a:fontRef idx="minor">
-              <a:schemeClr val="tx1"/>
-            </a:fontRef>
-          </p:style>
-        </p:cxnSp>
-        <p:cxnSp>
-          <p:nvCxnSpPr>
-            <p:cNvPr id="111" name="Conector de Seta Reta 110">
-              <a:extLst>
-                <a:ext uri="{FF2B5EF4-FFF2-40B4-BE49-F238E27FC236}">
-                  <a16:creationId xmlns:a16="http://schemas.microsoft.com/office/drawing/2014/main" xmlns="" id="{8A27B6E8-4D88-C02C-E72A-82E55AE2E958}"/>
-                </a:ext>
-              </a:extLst>
-            </p:cNvPr>
-            <p:cNvCxnSpPr>
-              <a:cxnSpLocks/>
-              <a:stCxn id="70" idx="6"/>
-              <a:endCxn id="74" idx="2"/>
-            </p:cNvCxnSpPr>
-            <p:nvPr/>
-          </p:nvCxnSpPr>
-          <p:spPr>
-            <a:xfrm>
-              <a:off x="9104028" y="2420867"/>
-              <a:ext cx="494370" cy="7425"/>
-            </a:xfrm>
-            <a:prstGeom prst="straightConnector1">
-              <a:avLst/>
-            </a:prstGeom>
-            <a:ln>
-              <a:tailEnd type="triangle"/>
-            </a:ln>
-          </p:spPr>
-          <p:style>
-            <a:lnRef idx="1">
-              <a:schemeClr val="accent1"/>
-            </a:lnRef>
-            <a:fillRef idx="0">
-              <a:schemeClr val="accent1"/>
-            </a:fillRef>
-            <a:effectRef idx="0">
-              <a:schemeClr val="accent1"/>
-            </a:effectRef>
-            <a:fontRef idx="minor">
-              <a:schemeClr val="tx1"/>
-            </a:fontRef>
-          </p:style>
-        </p:cxnSp>
-        <p:cxnSp>
-          <p:nvCxnSpPr>
-            <p:cNvPr id="112" name="Conector de Seta Reta 111">
-              <a:extLst>
-                <a:ext uri="{FF2B5EF4-FFF2-40B4-BE49-F238E27FC236}">
-                  <a16:creationId xmlns:a16="http://schemas.microsoft.com/office/drawing/2014/main" xmlns="" id="{31E8B782-B242-223E-A7ED-547B7A9A9273}"/>
-                </a:ext>
-              </a:extLst>
-            </p:cNvPr>
-            <p:cNvCxnSpPr>
-              <a:stCxn id="71" idx="6"/>
-              <a:endCxn id="74" idx="2"/>
-            </p:cNvCxnSpPr>
-            <p:nvPr/>
-          </p:nvCxnSpPr>
-          <p:spPr>
-            <a:xfrm flipV="1">
-              <a:off x="9108740" y="2428292"/>
-              <a:ext cx="489658" cy="861274"/>
-            </a:xfrm>
-            <a:prstGeom prst="straightConnector1">
-              <a:avLst/>
-            </a:prstGeom>
-            <a:ln>
-              <a:tailEnd type="triangle"/>
-            </a:ln>
-          </p:spPr>
-          <p:style>
-            <a:lnRef idx="1">
-              <a:schemeClr val="accent1"/>
-            </a:lnRef>
-            <a:fillRef idx="0">
-              <a:schemeClr val="accent1"/>
-            </a:fillRef>
-            <a:effectRef idx="0">
-              <a:schemeClr val="accent1"/>
-            </a:effectRef>
-            <a:fontRef idx="minor">
-              <a:schemeClr val="tx1"/>
-            </a:fontRef>
-          </p:style>
-        </p:cxnSp>
-        <mc:AlternateContent xmlns:mc="http://schemas.openxmlformats.org/markup-compatibility/2006" xmlns:a14="http://schemas.microsoft.com/office/drawing/2010/main">
-          <mc:Choice Requires="a14">
-            <p:sp>
-              <p:nvSpPr>
-                <p:cNvPr id="115" name="CaixaDeTexto 114">
-                  <a:extLst>
-                    <a:ext uri="{FF2B5EF4-FFF2-40B4-BE49-F238E27FC236}">
-                      <a16:creationId xmlns:a16="http://schemas.microsoft.com/office/drawing/2014/main" xmlns="" id="{8EB4E742-DDB4-1C8D-EDF1-F9E9148B24AE}"/>
-                    </a:ext>
-                  </a:extLst>
-                </p:cNvPr>
-                <p:cNvSpPr txBox="1"/>
-                <p:nvPr/>
-              </p:nvSpPr>
-              <p:spPr>
-                <a:xfrm>
-                  <a:off x="10351054" y="2206213"/>
-                  <a:ext cx="415834" cy="369332"/>
-                </a:xfrm>
-                <a:prstGeom prst="rect">
-                  <a:avLst/>
-                </a:prstGeom>
-                <a:noFill/>
-              </p:spPr>
-              <p:txBody>
-                <a:bodyPr wrap="square" rtlCol="0">
-                  <a:spAutoFit/>
-                </a:bodyPr>
-                <a:lstStyle/>
-                <a:p>
-                  <a:pPr/>
-                  <a14:m>
-                    <m:oMathPara xmlns:m="http://schemas.openxmlformats.org/officeDocument/2006/math">
-                      <m:oMathParaPr>
-                        <m:jc m:val="centerGroup"/>
-                      </m:oMathParaPr>
-                      <m:oMath xmlns:m="http://schemas.openxmlformats.org/officeDocument/2006/math">
-                        <m:sSub>
-                          <m:sSubPr>
-                            <m:ctrlPr>
-                              <a:rPr lang="pt-BR" i="1" smtClean="0">
-                                <a:latin typeface="Cambria Math" panose="02040503050406030204" pitchFamily="18" charset="0"/>
-                              </a:rPr>
-                            </m:ctrlPr>
-                          </m:sSubPr>
-                          <m:e>
-                            <m:acc>
-                              <m:accPr>
-                                <m:chr m:val="̂"/>
-                                <m:ctrlPr>
-                                  <a:rPr lang="pt-BR" i="1" smtClean="0">
-                                    <a:latin typeface="Cambria Math" panose="02040503050406030204" pitchFamily="18" charset="0"/>
-                                  </a:rPr>
-                                </m:ctrlPr>
-                              </m:accPr>
-                              <m:e>
-                                <m:r>
-                                  <a:rPr lang="pt-BR" b="0" i="1" smtClean="0">
-                                    <a:latin typeface="Cambria Math" panose="02040503050406030204" pitchFamily="18" charset="0"/>
-                                  </a:rPr>
-                                  <m:t>𝑦</m:t>
-                                </m:r>
-                              </m:e>
-                            </m:acc>
-                          </m:e>
-                          <m:sub>
-                            <m:r>
-                              <a:rPr lang="pt-BR" b="0" i="1" smtClean="0">
-                                <a:latin typeface="Cambria Math" panose="02040503050406030204" pitchFamily="18" charset="0"/>
-                              </a:rPr>
-                              <m:t>1</m:t>
-                            </m:r>
-                          </m:sub>
-                        </m:sSub>
-                      </m:oMath>
-                    </m:oMathPara>
-                  </a14:m>
-                  <a:endParaRPr lang="pt-BR" dirty="0"/>
-                </a:p>
-              </p:txBody>
-            </p:sp>
-          </mc:Choice>
-          <mc:Fallback xmlns="">
-            <p:sp>
-              <p:nvSpPr>
-                <p:cNvPr id="115" name="CaixaDeTexto 114">
-                  <a:extLst>
-                    <a:ext uri="{FF2B5EF4-FFF2-40B4-BE49-F238E27FC236}">
-                      <a16:creationId xmlns:a16="http://schemas.microsoft.com/office/drawing/2014/main" id="{8EB4E742-DDB4-1C8D-EDF1-F9E9148B24AE}"/>
-                    </a:ext>
-                  </a:extLst>
-                </p:cNvPr>
-                <p:cNvSpPr txBox="1">
-                  <a:spLocks noRot="1" noChangeAspect="1" noMove="1" noResize="1" noEditPoints="1" noAdjustHandles="1" noChangeArrowheads="1" noChangeShapeType="1" noTextEdit="1"/>
-                </p:cNvSpPr>
-                <p:nvPr/>
-              </p:nvSpPr>
-              <p:spPr>
-                <a:xfrm>
-                  <a:off x="10351054" y="2206213"/>
-                  <a:ext cx="415834" cy="369332"/>
-                </a:xfrm>
-                <a:prstGeom prst="rect">
-                  <a:avLst/>
-                </a:prstGeom>
-                <a:blipFill>
-                  <a:blip r:embed="rId11"/>
-                  <a:stretch>
-                    <a:fillRect t="-6667" r="-10294" b="-6667"/>
-                  </a:stretch>
-                </a:blipFill>
-              </p:spPr>
-              <p:txBody>
-                <a:bodyPr/>
-                <a:lstStyle/>
-                <a:p>
-                  <a:r>
-                    <a:rPr lang="pt-BR">
-                      <a:noFill/>
-                    </a:rPr>
-                    <a:t> </a:t>
-                  </a:r>
-                </a:p>
-              </p:txBody>
-            </p:sp>
-          </mc:Fallback>
-        </mc:AlternateContent>
-        <mc:AlternateContent xmlns:mc="http://schemas.openxmlformats.org/markup-compatibility/2006" xmlns:a14="http://schemas.microsoft.com/office/drawing/2010/main">
-          <mc:Choice Requires="a14">
-            <p:sp>
-              <p:nvSpPr>
-                <p:cNvPr id="116" name="CaixaDeTexto 115">
-                  <a:extLst>
-                    <a:ext uri="{FF2B5EF4-FFF2-40B4-BE49-F238E27FC236}">
-                      <a16:creationId xmlns:a16="http://schemas.microsoft.com/office/drawing/2014/main" xmlns="" id="{FE572705-88AC-7FB1-D34B-0B9CE62A8FF4}"/>
-                    </a:ext>
-                  </a:extLst>
-                </p:cNvPr>
-                <p:cNvSpPr txBox="1"/>
-                <p:nvPr/>
-              </p:nvSpPr>
-              <p:spPr>
-                <a:xfrm flipH="1">
-                  <a:off x="6218374" y="3130788"/>
-                  <a:ext cx="653654" cy="276999"/>
-                </a:xfrm>
-                <a:prstGeom prst="rect">
-                  <a:avLst/>
-                </a:prstGeom>
-                <a:noFill/>
-              </p:spPr>
-              <p:txBody>
-                <a:bodyPr wrap="square" lIns="0" tIns="0" rIns="0" bIns="0" rtlCol="0">
-                  <a:spAutoFit/>
-                </a:bodyPr>
-                <a:lstStyle/>
-                <a:p>
-                  <a:pPr/>
-                  <a14:m>
-                    <m:oMathPara xmlns:m="http://schemas.openxmlformats.org/officeDocument/2006/math">
-                      <m:oMathParaPr>
-                        <m:jc m:val="centerGroup"/>
-                      </m:oMathParaPr>
-                      <m:oMath xmlns:m="http://schemas.openxmlformats.org/officeDocument/2006/math">
-                        <m:r>
-                          <a:rPr lang="pt-BR" i="1" smtClean="0">
-                            <a:latin typeface="Cambria Math" panose="02040503050406030204" pitchFamily="18" charset="0"/>
-                            <a:ea typeface="Cambria Math" panose="02040503050406030204" pitchFamily="18" charset="0"/>
-                          </a:rPr>
-                          <m:t>⋮</m:t>
-                        </m:r>
-                      </m:oMath>
-                    </m:oMathPara>
-                  </a14:m>
-                  <a:endParaRPr lang="pt-BR" dirty="0"/>
-                </a:p>
-              </p:txBody>
-            </p:sp>
-          </mc:Choice>
-          <mc:Fallback xmlns="">
-            <p:sp>
-              <p:nvSpPr>
-                <p:cNvPr id="116" name="CaixaDeTexto 115">
-                  <a:extLst>
-                    <a:ext uri="{FF2B5EF4-FFF2-40B4-BE49-F238E27FC236}">
-                      <a16:creationId xmlns:a16="http://schemas.microsoft.com/office/drawing/2014/main" id="{FE572705-88AC-7FB1-D34B-0B9CE62A8FF4}"/>
-                    </a:ext>
-                  </a:extLst>
-                </p:cNvPr>
-                <p:cNvSpPr txBox="1">
-                  <a:spLocks noRot="1" noChangeAspect="1" noMove="1" noResize="1" noEditPoints="1" noAdjustHandles="1" noChangeArrowheads="1" noChangeShapeType="1" noTextEdit="1"/>
-                </p:cNvSpPr>
-                <p:nvPr/>
-              </p:nvSpPr>
-              <p:spPr>
-                <a:xfrm flipH="1">
-                  <a:off x="6218374" y="3130788"/>
-                  <a:ext cx="653654" cy="276999"/>
-                </a:xfrm>
-                <a:prstGeom prst="rect">
-                  <a:avLst/>
-                </a:prstGeom>
-                <a:blipFill>
-                  <a:blip r:embed="rId12"/>
-                  <a:stretch>
-                    <a:fillRect b="-6667"/>
-                  </a:stretch>
-                </a:blipFill>
-              </p:spPr>
-              <p:txBody>
-                <a:bodyPr/>
-                <a:lstStyle/>
-                <a:p>
-                  <a:r>
-                    <a:rPr lang="pt-BR">
-                      <a:noFill/>
-                    </a:rPr>
-                    <a:t> </a:t>
-                  </a:r>
-                </a:p>
-              </p:txBody>
-            </p:sp>
-          </mc:Fallback>
-        </mc:AlternateContent>
-        <p:cxnSp>
-          <p:nvCxnSpPr>
-            <p:cNvPr id="117" name="Conector de Seta Reta 116">
-              <a:extLst>
-                <a:ext uri="{FF2B5EF4-FFF2-40B4-BE49-F238E27FC236}">
-                  <a16:creationId xmlns:a16="http://schemas.microsoft.com/office/drawing/2014/main" xmlns="" id="{D9AFE3DA-ADA3-1224-2A12-9B2FE6B8F2B3}"/>
-                </a:ext>
-              </a:extLst>
-            </p:cNvPr>
-            <p:cNvCxnSpPr>
-              <a:cxnSpLocks/>
-              <a:endCxn id="70" idx="0"/>
-            </p:cNvCxnSpPr>
-            <p:nvPr/>
-          </p:nvCxnSpPr>
-          <p:spPr>
-            <a:xfrm>
-              <a:off x="8821000" y="1995394"/>
-              <a:ext cx="0" cy="142444"/>
-            </a:xfrm>
-            <a:prstGeom prst="straightConnector1">
-              <a:avLst/>
-            </a:prstGeom>
-            <a:ln>
-              <a:tailEnd type="triangle"/>
-            </a:ln>
-          </p:spPr>
-          <p:style>
-            <a:lnRef idx="1">
-              <a:schemeClr val="accent1"/>
-            </a:lnRef>
-            <a:fillRef idx="0">
-              <a:schemeClr val="accent1"/>
-            </a:fillRef>
-            <a:effectRef idx="0">
-              <a:schemeClr val="accent1"/>
-            </a:effectRef>
-            <a:fontRef idx="minor">
-              <a:schemeClr val="tx1"/>
-            </a:fontRef>
-          </p:style>
-        </p:cxnSp>
-        <p:cxnSp>
-          <p:nvCxnSpPr>
-            <p:cNvPr id="118" name="Conector de Seta Reta 117">
-              <a:extLst>
-                <a:ext uri="{FF2B5EF4-FFF2-40B4-BE49-F238E27FC236}">
-                  <a16:creationId xmlns:a16="http://schemas.microsoft.com/office/drawing/2014/main" xmlns="" id="{14046F89-B1EC-4C7D-73B5-BB360D26991E}"/>
-                </a:ext>
-              </a:extLst>
-            </p:cNvPr>
-            <p:cNvCxnSpPr>
-              <a:cxnSpLocks/>
-            </p:cNvCxnSpPr>
-            <p:nvPr/>
-          </p:nvCxnSpPr>
-          <p:spPr>
-            <a:xfrm>
-              <a:off x="8825711" y="2886212"/>
-              <a:ext cx="0" cy="142444"/>
-            </a:xfrm>
-            <a:prstGeom prst="straightConnector1">
-              <a:avLst/>
-            </a:prstGeom>
-            <a:ln>
-              <a:tailEnd type="triangle"/>
-            </a:ln>
-          </p:spPr>
-          <p:style>
-            <a:lnRef idx="1">
-              <a:schemeClr val="accent1"/>
-            </a:lnRef>
-            <a:fillRef idx="0">
-              <a:schemeClr val="accent1"/>
-            </a:fillRef>
-            <a:effectRef idx="0">
-              <a:schemeClr val="accent1"/>
-            </a:effectRef>
-            <a:fontRef idx="minor">
-              <a:schemeClr val="tx1"/>
-            </a:fontRef>
-          </p:style>
-        </p:cxnSp>
-        <p:cxnSp>
-          <p:nvCxnSpPr>
-            <p:cNvPr id="121" name="Conector de Seta Reta 120">
-              <a:extLst>
-                <a:ext uri="{FF2B5EF4-FFF2-40B4-BE49-F238E27FC236}">
-                  <a16:creationId xmlns:a16="http://schemas.microsoft.com/office/drawing/2014/main" xmlns="" id="{D705BDCB-087E-A436-DB26-F55A5F8B6D28}"/>
-                </a:ext>
-              </a:extLst>
-            </p:cNvPr>
-            <p:cNvCxnSpPr>
-              <a:cxnSpLocks/>
-            </p:cNvCxnSpPr>
-            <p:nvPr/>
-          </p:nvCxnSpPr>
-          <p:spPr>
-            <a:xfrm>
-              <a:off x="7616038" y="1660362"/>
-              <a:ext cx="0" cy="142444"/>
-            </a:xfrm>
-            <a:prstGeom prst="straightConnector1">
-              <a:avLst/>
-            </a:prstGeom>
-            <a:ln>
-              <a:tailEnd type="triangle"/>
-            </a:ln>
-          </p:spPr>
-          <p:style>
-            <a:lnRef idx="1">
-              <a:schemeClr val="accent1"/>
-            </a:lnRef>
-            <a:fillRef idx="0">
-              <a:schemeClr val="accent1"/>
-            </a:fillRef>
-            <a:effectRef idx="0">
-              <a:schemeClr val="accent1"/>
-            </a:effectRef>
-            <a:fontRef idx="minor">
-              <a:schemeClr val="tx1"/>
-            </a:fontRef>
-          </p:style>
-        </p:cxnSp>
-        <p:cxnSp>
-          <p:nvCxnSpPr>
-            <p:cNvPr id="122" name="Conector de Seta Reta 121">
-              <a:extLst>
-                <a:ext uri="{FF2B5EF4-FFF2-40B4-BE49-F238E27FC236}">
-                  <a16:creationId xmlns:a16="http://schemas.microsoft.com/office/drawing/2014/main" xmlns="" id="{7A4CB641-FA56-89FC-C592-0F98EA9EDA97}"/>
-                </a:ext>
-              </a:extLst>
-            </p:cNvPr>
-            <p:cNvCxnSpPr>
-              <a:cxnSpLocks/>
-            </p:cNvCxnSpPr>
-            <p:nvPr/>
-          </p:nvCxnSpPr>
-          <p:spPr>
-            <a:xfrm>
-              <a:off x="7622388" y="2420867"/>
-              <a:ext cx="0" cy="142444"/>
-            </a:xfrm>
-            <a:prstGeom prst="straightConnector1">
-              <a:avLst/>
-            </a:prstGeom>
-            <a:ln>
-              <a:tailEnd type="triangle"/>
-            </a:ln>
-          </p:spPr>
-          <p:style>
-            <a:lnRef idx="1">
-              <a:schemeClr val="accent1"/>
-            </a:lnRef>
-            <a:fillRef idx="0">
-              <a:schemeClr val="accent1"/>
-            </a:fillRef>
-            <a:effectRef idx="0">
-              <a:schemeClr val="accent1"/>
-            </a:effectRef>
-            <a:fontRef idx="minor">
-              <a:schemeClr val="tx1"/>
-            </a:fontRef>
-          </p:style>
-        </p:cxnSp>
-        <p:cxnSp>
-          <p:nvCxnSpPr>
-            <p:cNvPr id="123" name="Conector de Seta Reta 122">
-              <a:extLst>
-                <a:ext uri="{FF2B5EF4-FFF2-40B4-BE49-F238E27FC236}">
-                  <a16:creationId xmlns:a16="http://schemas.microsoft.com/office/drawing/2014/main" xmlns="" id="{FE5DFC41-0476-5BEB-7A0F-E8A00E426DF0}"/>
-                </a:ext>
-              </a:extLst>
-            </p:cNvPr>
-            <p:cNvCxnSpPr>
-              <a:cxnSpLocks/>
-            </p:cNvCxnSpPr>
-            <p:nvPr/>
-          </p:nvCxnSpPr>
-          <p:spPr>
-            <a:xfrm>
-              <a:off x="7616038" y="3206710"/>
-              <a:ext cx="0" cy="142444"/>
-            </a:xfrm>
-            <a:prstGeom prst="straightConnector1">
-              <a:avLst/>
-            </a:prstGeom>
-            <a:ln>
-              <a:tailEnd type="triangle"/>
-            </a:ln>
-          </p:spPr>
-          <p:style>
-            <a:lnRef idx="1">
-              <a:schemeClr val="accent1"/>
-            </a:lnRef>
-            <a:fillRef idx="0">
-              <a:schemeClr val="accent1"/>
-            </a:fillRef>
-            <a:effectRef idx="0">
-              <a:schemeClr val="accent1"/>
-            </a:effectRef>
-            <a:fontRef idx="minor">
-              <a:schemeClr val="tx1"/>
-            </a:fontRef>
-          </p:style>
-        </p:cxnSp>
-        <p:cxnSp>
-          <p:nvCxnSpPr>
-            <p:cNvPr id="125" name="Conector de Seta Reta 124">
-              <a:extLst>
-                <a:ext uri="{FF2B5EF4-FFF2-40B4-BE49-F238E27FC236}">
-                  <a16:creationId xmlns:a16="http://schemas.microsoft.com/office/drawing/2014/main" xmlns="" id="{4D7EA5BC-D33F-29B5-CC10-4743D30E5FF7}"/>
-                </a:ext>
-              </a:extLst>
-            </p:cNvPr>
-            <p:cNvCxnSpPr>
-              <a:cxnSpLocks/>
-            </p:cNvCxnSpPr>
-            <p:nvPr/>
-          </p:nvCxnSpPr>
-          <p:spPr>
-            <a:xfrm>
-              <a:off x="9886139" y="2014236"/>
-              <a:ext cx="0" cy="142444"/>
-            </a:xfrm>
-            <a:prstGeom prst="straightConnector1">
-              <a:avLst/>
-            </a:prstGeom>
-            <a:ln>
-              <a:tailEnd type="triangle"/>
-            </a:ln>
-          </p:spPr>
-          <p:style>
-            <a:lnRef idx="1">
-              <a:schemeClr val="accent1"/>
-            </a:lnRef>
-            <a:fillRef idx="0">
-              <a:schemeClr val="accent1"/>
-            </a:fillRef>
-            <a:effectRef idx="0">
-              <a:schemeClr val="accent1"/>
-            </a:effectRef>
-            <a:fontRef idx="minor">
-              <a:schemeClr val="tx1"/>
-            </a:fontRef>
-          </p:style>
-        </p:cxnSp>
-        <p:sp>
-          <p:nvSpPr>
-            <p:cNvPr id="126" name="Elipse 125">
-              <a:extLst>
-                <a:ext uri="{FF2B5EF4-FFF2-40B4-BE49-F238E27FC236}">
-                  <a16:creationId xmlns:a16="http://schemas.microsoft.com/office/drawing/2014/main" xmlns="" id="{439307EE-E4A5-3FF6-C3AF-D309DD95872F}"/>
-                </a:ext>
-              </a:extLst>
-            </p:cNvPr>
-            <p:cNvSpPr/>
-            <p:nvPr/>
-          </p:nvSpPr>
-          <p:spPr>
-            <a:xfrm>
-              <a:off x="9598397" y="2998684"/>
-              <a:ext cx="566057" cy="566057"/>
-            </a:xfrm>
-            <a:prstGeom prst="ellipse">
-              <a:avLst/>
-            </a:prstGeom>
-            <a:solidFill>
-              <a:schemeClr val="bg1">
-                <a:lumMod val="85000"/>
-              </a:schemeClr>
-            </a:solidFill>
-            <a:ln>
-              <a:noFill/>
-            </a:ln>
-          </p:spPr>
-          <p:style>
-            <a:lnRef idx="2">
-              <a:schemeClr val="accent1">
-                <a:shade val="15000"/>
-              </a:schemeClr>
-            </a:lnRef>
-            <a:fillRef idx="1">
-              <a:schemeClr val="accent1"/>
-            </a:fillRef>
-            <a:effectRef idx="0">
-              <a:schemeClr val="accent1"/>
-            </a:effectRef>
-            <a:fontRef idx="minor">
-              <a:schemeClr val="lt1"/>
-            </a:fontRef>
-          </p:style>
-          <p:txBody>
-            <a:bodyPr rtlCol="0" anchor="ctr"/>
-            <a:lstStyle/>
-            <a:p>
-              <a:pPr algn="ctr"/>
-              <a:endParaRPr lang="pt-BR" dirty="0"/>
-            </a:p>
-          </p:txBody>
-        </p:sp>
-        <p:cxnSp>
-          <p:nvCxnSpPr>
-            <p:cNvPr id="127" name="Conector de Seta Reta 126">
-              <a:extLst>
-                <a:ext uri="{FF2B5EF4-FFF2-40B4-BE49-F238E27FC236}">
-                  <a16:creationId xmlns:a16="http://schemas.microsoft.com/office/drawing/2014/main" xmlns="" id="{DFE32563-DACC-E8C1-9A14-D1ADC3F11D5B}"/>
-                </a:ext>
-              </a:extLst>
-            </p:cNvPr>
-            <p:cNvCxnSpPr>
-              <a:cxnSpLocks/>
-            </p:cNvCxnSpPr>
-            <p:nvPr/>
-          </p:nvCxnSpPr>
-          <p:spPr>
-            <a:xfrm>
-              <a:off x="9884424" y="2872304"/>
-              <a:ext cx="0" cy="142444"/>
-            </a:xfrm>
-            <a:prstGeom prst="straightConnector1">
-              <a:avLst/>
-            </a:prstGeom>
-            <a:ln>
-              <a:tailEnd type="triangle"/>
-            </a:ln>
-          </p:spPr>
-          <p:style>
-            <a:lnRef idx="1">
-              <a:schemeClr val="accent1"/>
-            </a:lnRef>
-            <a:fillRef idx="0">
-              <a:schemeClr val="accent1"/>
-            </a:fillRef>
-            <a:effectRef idx="0">
-              <a:schemeClr val="accent1"/>
-            </a:effectRef>
-            <a:fontRef idx="minor">
-              <a:schemeClr val="tx1"/>
-            </a:fontRef>
-          </p:style>
-        </p:cxnSp>
-        <p:cxnSp>
-          <p:nvCxnSpPr>
-            <p:cNvPr id="128" name="Conector de Seta Reta 127">
-              <a:extLst>
-                <a:ext uri="{FF2B5EF4-FFF2-40B4-BE49-F238E27FC236}">
-                  <a16:creationId xmlns:a16="http://schemas.microsoft.com/office/drawing/2014/main" xmlns="" id="{C4FC1BA4-9A33-57A1-8218-2AB89F231DEC}"/>
-                </a:ext>
-              </a:extLst>
-            </p:cNvPr>
-            <p:cNvCxnSpPr>
-              <a:stCxn id="70" idx="6"/>
-              <a:endCxn id="126" idx="2"/>
-            </p:cNvCxnSpPr>
-            <p:nvPr/>
-          </p:nvCxnSpPr>
-          <p:spPr>
-            <a:xfrm>
-              <a:off x="9104028" y="2420867"/>
-              <a:ext cx="494369" cy="860846"/>
-            </a:xfrm>
-            <a:prstGeom prst="straightConnector1">
-              <a:avLst/>
-            </a:prstGeom>
-            <a:ln>
-              <a:tailEnd type="triangle"/>
-            </a:ln>
-          </p:spPr>
-          <p:style>
-            <a:lnRef idx="1">
-              <a:schemeClr val="accent1"/>
-            </a:lnRef>
-            <a:fillRef idx="0">
-              <a:schemeClr val="accent1"/>
-            </a:fillRef>
-            <a:effectRef idx="0">
-              <a:schemeClr val="accent1"/>
-            </a:effectRef>
-            <a:fontRef idx="minor">
-              <a:schemeClr val="tx1"/>
-            </a:fontRef>
-          </p:style>
-        </p:cxnSp>
-        <p:cxnSp>
-          <p:nvCxnSpPr>
-            <p:cNvPr id="129" name="Conector de Seta Reta 128">
-              <a:extLst>
-                <a:ext uri="{FF2B5EF4-FFF2-40B4-BE49-F238E27FC236}">
-                  <a16:creationId xmlns:a16="http://schemas.microsoft.com/office/drawing/2014/main" xmlns="" id="{868BA459-31B9-BFDD-3C82-E0AC2383F362}"/>
-                </a:ext>
-              </a:extLst>
-            </p:cNvPr>
-            <p:cNvCxnSpPr>
-              <a:stCxn id="71" idx="6"/>
-              <a:endCxn id="126" idx="2"/>
-            </p:cNvCxnSpPr>
-            <p:nvPr/>
-          </p:nvCxnSpPr>
-          <p:spPr>
-            <a:xfrm flipV="1">
-              <a:off x="9108740" y="3281713"/>
-              <a:ext cx="489657" cy="7853"/>
-            </a:xfrm>
-            <a:prstGeom prst="straightConnector1">
-              <a:avLst/>
-            </a:prstGeom>
-            <a:ln>
-              <a:tailEnd type="triangle"/>
-            </a:ln>
-          </p:spPr>
-          <p:style>
-            <a:lnRef idx="1">
-              <a:schemeClr val="accent1"/>
-            </a:lnRef>
-            <a:fillRef idx="0">
-              <a:schemeClr val="accent1"/>
-            </a:fillRef>
-            <a:effectRef idx="0">
-              <a:schemeClr val="accent1"/>
-            </a:effectRef>
-            <a:fontRef idx="minor">
-              <a:schemeClr val="tx1"/>
-            </a:fontRef>
-          </p:style>
-        </p:cxnSp>
-        <p:cxnSp>
-          <p:nvCxnSpPr>
-            <p:cNvPr id="132" name="Conector de Seta Reta 131">
-              <a:extLst>
-                <a:ext uri="{FF2B5EF4-FFF2-40B4-BE49-F238E27FC236}">
-                  <a16:creationId xmlns:a16="http://schemas.microsoft.com/office/drawing/2014/main" xmlns="" id="{C355A1EF-B99F-DFB7-0631-7F74672E65CE}"/>
-                </a:ext>
-              </a:extLst>
-            </p:cNvPr>
-            <p:cNvCxnSpPr>
-              <a:cxnSpLocks/>
-            </p:cNvCxnSpPr>
-            <p:nvPr/>
-          </p:nvCxnSpPr>
-          <p:spPr>
-            <a:xfrm flipV="1">
-              <a:off x="10161094" y="3279117"/>
-              <a:ext cx="257585" cy="1162"/>
-            </a:xfrm>
-            <a:prstGeom prst="straightConnector1">
-              <a:avLst/>
-            </a:prstGeom>
-            <a:ln>
-              <a:tailEnd type="triangle"/>
-            </a:ln>
-          </p:spPr>
-          <p:style>
-            <a:lnRef idx="1">
-              <a:schemeClr val="accent1"/>
-            </a:lnRef>
-            <a:fillRef idx="0">
-              <a:schemeClr val="accent1"/>
-            </a:fillRef>
-            <a:effectRef idx="0">
-              <a:schemeClr val="accent1"/>
-            </a:effectRef>
-            <a:fontRef idx="minor">
-              <a:schemeClr val="tx1"/>
-            </a:fontRef>
-          </p:style>
-        </p:cxnSp>
-        <mc:AlternateContent xmlns:mc="http://schemas.openxmlformats.org/markup-compatibility/2006" xmlns:a14="http://schemas.microsoft.com/office/drawing/2010/main">
-          <mc:Choice Requires="a14">
-            <p:sp>
-              <p:nvSpPr>
-                <p:cNvPr id="133" name="CaixaDeTexto 132">
-                  <a:extLst>
-                    <a:ext uri="{FF2B5EF4-FFF2-40B4-BE49-F238E27FC236}">
-                      <a16:creationId xmlns:a16="http://schemas.microsoft.com/office/drawing/2014/main" xmlns="" id="{2BC8051F-3FF7-FF62-6DD8-24309383E3F5}"/>
-                    </a:ext>
-                  </a:extLst>
-                </p:cNvPr>
-                <p:cNvSpPr txBox="1"/>
-                <p:nvPr/>
-              </p:nvSpPr>
-              <p:spPr>
-                <a:xfrm>
-                  <a:off x="10351054" y="3073612"/>
-                  <a:ext cx="415834" cy="369332"/>
-                </a:xfrm>
-                <a:prstGeom prst="rect">
-                  <a:avLst/>
-                </a:prstGeom>
-                <a:noFill/>
-              </p:spPr>
-              <p:txBody>
-                <a:bodyPr wrap="square" rtlCol="0">
-                  <a:spAutoFit/>
-                </a:bodyPr>
-                <a:lstStyle/>
-                <a:p>
-                  <a:pPr/>
-                  <a14:m>
-                    <m:oMathPara xmlns:m="http://schemas.openxmlformats.org/officeDocument/2006/math">
-                      <m:oMathParaPr>
-                        <m:jc m:val="centerGroup"/>
-                      </m:oMathParaPr>
-                      <m:oMath xmlns:m="http://schemas.openxmlformats.org/officeDocument/2006/math">
-                        <m:sSub>
-                          <m:sSubPr>
-                            <m:ctrlPr>
-                              <a:rPr lang="pt-BR" i="1" smtClean="0">
-                                <a:latin typeface="Cambria Math" panose="02040503050406030204" pitchFamily="18" charset="0"/>
-                              </a:rPr>
-                            </m:ctrlPr>
-                          </m:sSubPr>
-                          <m:e>
-                            <m:acc>
-                              <m:accPr>
-                                <m:chr m:val="̂"/>
-                                <m:ctrlPr>
-                                  <a:rPr lang="pt-BR" i="1" smtClean="0">
-                                    <a:latin typeface="Cambria Math" panose="02040503050406030204" pitchFamily="18" charset="0"/>
-                                  </a:rPr>
-                                </m:ctrlPr>
-                              </m:accPr>
-                              <m:e>
-                                <m:r>
-                                  <a:rPr lang="pt-BR" b="0" i="1" smtClean="0">
-                                    <a:latin typeface="Cambria Math" panose="02040503050406030204" pitchFamily="18" charset="0"/>
-                                  </a:rPr>
-                                  <m:t>𝑦</m:t>
-                                </m:r>
-                              </m:e>
-                            </m:acc>
-                          </m:e>
-                          <m:sub>
-                            <m:r>
-                              <a:rPr lang="pt-BR" b="0" i="1" smtClean="0">
-                                <a:latin typeface="Cambria Math" panose="02040503050406030204" pitchFamily="18" charset="0"/>
-                              </a:rPr>
-                              <m:t>2</m:t>
-                            </m:r>
-                          </m:sub>
-                        </m:sSub>
-                      </m:oMath>
-                    </m:oMathPara>
-                  </a14:m>
-                  <a:endParaRPr lang="pt-BR" dirty="0"/>
-                </a:p>
-              </p:txBody>
-            </p:sp>
-          </mc:Choice>
-          <mc:Fallback xmlns="">
-            <p:sp>
-              <p:nvSpPr>
-                <p:cNvPr id="133" name="CaixaDeTexto 132">
-                  <a:extLst>
-                    <a:ext uri="{FF2B5EF4-FFF2-40B4-BE49-F238E27FC236}">
-                      <a16:creationId xmlns:a16="http://schemas.microsoft.com/office/drawing/2014/main" id="{2BC8051F-3FF7-FF62-6DD8-24309383E3F5}"/>
-                    </a:ext>
-                  </a:extLst>
-                </p:cNvPr>
-                <p:cNvSpPr txBox="1">
-                  <a:spLocks noRot="1" noChangeAspect="1" noMove="1" noResize="1" noEditPoints="1" noAdjustHandles="1" noChangeArrowheads="1" noChangeShapeType="1" noTextEdit="1"/>
-                </p:cNvSpPr>
-                <p:nvPr/>
-              </p:nvSpPr>
-              <p:spPr>
-                <a:xfrm>
-                  <a:off x="10351054" y="3073612"/>
-                  <a:ext cx="415834" cy="369332"/>
-                </a:xfrm>
-                <a:prstGeom prst="rect">
-                  <a:avLst/>
-                </a:prstGeom>
-                <a:blipFill>
-                  <a:blip r:embed="rId13"/>
-                  <a:stretch>
-                    <a:fillRect t="-6557" r="-8824" b="-6557"/>
-                  </a:stretch>
-                </a:blipFill>
-              </p:spPr>
-              <p:txBody>
-                <a:bodyPr/>
-                <a:lstStyle/>
-                <a:p>
-                  <a:r>
-                    <a:rPr lang="pt-BR">
-                      <a:noFill/>
-                    </a:rPr>
-                    <a:t> </a:t>
-                  </a:r>
-                </a:p>
-              </p:txBody>
-            </p:sp>
-          </mc:Fallback>
-        </mc:AlternateContent>
-      </p:grpSp>
-    </p:spTree>
-    <p:extLst>
-      <p:ext uri="{BB962C8B-B14F-4D97-AF65-F5344CB8AC3E}">
-        <p14:creationId xmlns:p14="http://schemas.microsoft.com/office/powerpoint/2010/main" val="98275912"/>
-      </p:ext>
-    </p:extLst>
-  </p:cSld>
-  <p:clrMapOvr>
-    <a:masterClrMapping/>
-  </p:clrMapOvr>
-</p:sld>
-</file>
-
-<file path=ppt/slides/slide28.xml><?xml version="1.0" encoding="utf-8"?>
-<p:sld xmlns:a="http://schemas.openxmlformats.org/drawingml/2006/main" xmlns:r="http://schemas.openxmlformats.org/officeDocument/2006/relationships" xmlns:p="http://schemas.openxmlformats.org/presentationml/2006/main">
-  <p:cSld>
-    <p:spTree>
-      <p:nvGrpSpPr>
-        <p:cNvPr id="1" name=""/>
-        <p:cNvGrpSpPr/>
-        <p:nvPr/>
-      </p:nvGrpSpPr>
-      <p:grpSpPr>
-        <a:xfrm>
-          <a:off x="0" y="0"/>
-          <a:ext cx="0" cy="0"/>
-          <a:chOff x="0" y="0"/>
-          <a:chExt cx="0" cy="0"/>
-        </a:xfrm>
-      </p:grpSpPr>
-      <p:grpSp>
-        <p:nvGrpSpPr>
-          <p:cNvPr id="20" name="Agrupar 19">
-            <a:extLst>
-              <a:ext uri="{FF2B5EF4-FFF2-40B4-BE49-F238E27FC236}">
-                <a16:creationId xmlns:a16="http://schemas.microsoft.com/office/drawing/2014/main" xmlns="" id="{CEC56A2A-D320-AD98-DAE4-189FA39F71B8}"/>
-              </a:ext>
-            </a:extLst>
-          </p:cNvPr>
-          <p:cNvGrpSpPr/>
-          <p:nvPr/>
-        </p:nvGrpSpPr>
-        <p:grpSpPr>
-          <a:xfrm>
-            <a:off x="2647985" y="744952"/>
-            <a:ext cx="7097418" cy="5603692"/>
-            <a:chOff x="2523807" y="1207797"/>
-            <a:chExt cx="7097418" cy="5603692"/>
-          </a:xfrm>
-        </p:grpSpPr>
-        <p:grpSp>
-          <p:nvGrpSpPr>
-            <p:cNvPr id="21" name="Agrupar 20">
-              <a:extLst>
-                <a:ext uri="{FF2B5EF4-FFF2-40B4-BE49-F238E27FC236}">
-                  <a16:creationId xmlns:a16="http://schemas.microsoft.com/office/drawing/2014/main" xmlns="" id="{1885B363-D186-E56A-3E9D-06387065F50B}"/>
-                </a:ext>
-              </a:extLst>
-            </p:cNvPr>
-            <p:cNvGrpSpPr/>
-            <p:nvPr/>
-          </p:nvGrpSpPr>
-          <p:grpSpPr>
-            <a:xfrm>
-              <a:off x="2570774" y="1665107"/>
-              <a:ext cx="7050451" cy="4696541"/>
-              <a:chOff x="1873948" y="1574796"/>
-              <a:chExt cx="7050451" cy="4696541"/>
-            </a:xfrm>
-          </p:grpSpPr>
-          <p:pic>
-            <p:nvPicPr>
-              <p:cNvPr id="26" name="Picture 2" descr="The Doctor-Patient Relationship | Patient Satisfacton | National">
-                <a:extLst>
-                  <a:ext uri="{FF2B5EF4-FFF2-40B4-BE49-F238E27FC236}">
-                    <a16:creationId xmlns:a16="http://schemas.microsoft.com/office/drawing/2014/main" xmlns="" id="{B64CB687-1630-B706-65E3-6998A4ED38A6}"/>
-                  </a:ext>
-                </a:extLst>
-              </p:cNvPr>
-              <p:cNvPicPr>
-                <a:picLocks noChangeAspect="1" noChangeArrowheads="1"/>
-              </p:cNvPicPr>
-              <p:nvPr/>
-            </p:nvPicPr>
-            <p:blipFill>
-              <a:blip r:embed="rId2" cstate="print">
-                <a:extLst>
-                  <a:ext uri="{28A0092B-C50C-407E-A947-70E740481C1C}">
-                    <a14:useLocalDpi xmlns:a14="http://schemas.microsoft.com/office/drawing/2010/main" val="0"/>
-                  </a:ext>
-                </a:extLst>
-              </a:blip>
-              <a:srcRect/>
-              <a:stretch>
-                <a:fillRect/>
-              </a:stretch>
-            </p:blipFill>
-            <p:spPr bwMode="auto">
-              <a:xfrm>
-                <a:off x="5398803" y="1574796"/>
-                <a:ext cx="3522138" cy="2348092"/>
-              </a:xfrm>
-              <a:prstGeom prst="rect">
-                <a:avLst/>
-              </a:prstGeom>
-              <a:noFill/>
-              <a:extLst>
-                <a:ext uri="{909E8E84-426E-40DD-AFC4-6F175D3DCCD1}">
-                  <a14:hiddenFill xmlns:a14="http://schemas.microsoft.com/office/drawing/2010/main">
-                    <a:solidFill>
-                      <a:srgbClr val="FFFFFF"/>
-                    </a:solidFill>
-                  </a14:hiddenFill>
-                </a:ext>
-              </a:extLst>
-            </p:spPr>
-          </p:pic>
-          <p:sp>
-            <p:nvSpPr>
-              <p:cNvPr id="27" name="Balão de Fala: Oval 26">
-                <a:extLst>
-                  <a:ext uri="{FF2B5EF4-FFF2-40B4-BE49-F238E27FC236}">
-                    <a16:creationId xmlns:a16="http://schemas.microsoft.com/office/drawing/2014/main" xmlns="" id="{D0AE0D42-9B9F-2D49-6D87-E2748A52C03D}"/>
-                  </a:ext>
-                </a:extLst>
-              </p:cNvPr>
-              <p:cNvSpPr/>
-              <p:nvPr/>
-            </p:nvSpPr>
-            <p:spPr>
-              <a:xfrm>
-                <a:off x="6276622" y="1574796"/>
-                <a:ext cx="1313610" cy="619864"/>
-              </a:xfrm>
-              <a:prstGeom prst="wedgeEllipseCallout">
-                <a:avLst>
-                  <a:gd name="adj1" fmla="val 42881"/>
-                  <a:gd name="adj2" fmla="val 64404"/>
-                </a:avLst>
-              </a:prstGeom>
-            </p:spPr>
-            <p:style>
-              <a:lnRef idx="2">
-                <a:schemeClr val="accent1">
-                  <a:shade val="15000"/>
-                </a:schemeClr>
-              </a:lnRef>
-              <a:fillRef idx="1">
-                <a:schemeClr val="accent1"/>
-              </a:fillRef>
-              <a:effectRef idx="0">
-                <a:schemeClr val="accent1"/>
-              </a:effectRef>
-              <a:fontRef idx="minor">
-                <a:schemeClr val="lt1"/>
-              </a:fontRef>
-            </p:style>
-            <p:txBody>
-              <a:bodyPr rtlCol="0" anchor="ctr"/>
-              <a:lstStyle/>
-              <a:p>
-                <a:pPr algn="ctr"/>
-                <a:r>
-                  <a:rPr lang="pt-BR" sz="1400" dirty="0"/>
-                  <a:t>Você está grávido.</a:t>
-                </a:r>
-              </a:p>
-            </p:txBody>
-          </p:sp>
-          <p:pic>
-            <p:nvPicPr>
-              <p:cNvPr id="28" name="Picture 4" descr="Pregnant Women Are To The Doctor. Stock Photo, Picture And Royalty Free  Image. Image 20465296.">
-                <a:extLst>
-                  <a:ext uri="{FF2B5EF4-FFF2-40B4-BE49-F238E27FC236}">
-                    <a16:creationId xmlns:a16="http://schemas.microsoft.com/office/drawing/2014/main" xmlns="" id="{3A05F2BE-5E77-C8FF-FF0A-0E3F98A7D443}"/>
-                  </a:ext>
-                </a:extLst>
-              </p:cNvPr>
-              <p:cNvPicPr>
-                <a:picLocks noChangeAspect="1" noChangeArrowheads="1"/>
-              </p:cNvPicPr>
-              <p:nvPr/>
-            </p:nvPicPr>
-            <p:blipFill>
-              <a:blip r:embed="rId3" cstate="print">
-                <a:extLst>
-                  <a:ext uri="{28A0092B-C50C-407E-A947-70E740481C1C}">
-                    <a14:useLocalDpi xmlns:a14="http://schemas.microsoft.com/office/drawing/2010/main" val="0"/>
-                  </a:ext>
-                </a:extLst>
-              </a:blip>
-              <a:srcRect/>
-              <a:stretch>
-                <a:fillRect/>
-              </a:stretch>
-            </p:blipFill>
-            <p:spPr bwMode="auto">
-              <a:xfrm>
-                <a:off x="1873948" y="3922888"/>
-                <a:ext cx="3524855" cy="2348092"/>
-              </a:xfrm>
-              <a:prstGeom prst="rect">
-                <a:avLst/>
-              </a:prstGeom>
-              <a:noFill/>
-              <a:extLst>
-                <a:ext uri="{909E8E84-426E-40DD-AFC4-6F175D3DCCD1}">
-                  <a14:hiddenFill xmlns:a14="http://schemas.microsoft.com/office/drawing/2010/main">
-                    <a:solidFill>
-                      <a:srgbClr val="FFFFFF"/>
-                    </a:solidFill>
-                  </a14:hiddenFill>
-                </a:ext>
-              </a:extLst>
-            </p:spPr>
-          </p:pic>
-          <p:pic>
-            <p:nvPicPr>
-              <p:cNvPr id="29" name="Picture 4" descr="Pregnant Women Are To The Doctor. Stock Photo, Picture And Royalty Free  Image. Image 20465296.">
-                <a:extLst>
-                  <a:ext uri="{FF2B5EF4-FFF2-40B4-BE49-F238E27FC236}">
-                    <a16:creationId xmlns:a16="http://schemas.microsoft.com/office/drawing/2014/main" xmlns="" id="{605F38A8-6749-7DAF-FD65-995ADD916D93}"/>
-                  </a:ext>
-                </a:extLst>
-              </p:cNvPr>
-              <p:cNvPicPr>
-                <a:picLocks noChangeAspect="1" noChangeArrowheads="1"/>
-              </p:cNvPicPr>
-              <p:nvPr/>
-            </p:nvPicPr>
-            <p:blipFill>
-              <a:blip r:embed="rId3" cstate="print">
-                <a:extLst>
-                  <a:ext uri="{28A0092B-C50C-407E-A947-70E740481C1C}">
-                    <a14:useLocalDpi xmlns:a14="http://schemas.microsoft.com/office/drawing/2010/main" val="0"/>
-                  </a:ext>
-                </a:extLst>
-              </a:blip>
-              <a:srcRect/>
-              <a:stretch>
-                <a:fillRect/>
-              </a:stretch>
-            </p:blipFill>
-            <p:spPr bwMode="auto">
-              <a:xfrm>
-                <a:off x="1873948" y="1574796"/>
-                <a:ext cx="3524855" cy="2348092"/>
-              </a:xfrm>
-              <a:prstGeom prst="rect">
-                <a:avLst/>
-              </a:prstGeom>
-              <a:noFill/>
-              <a:extLst>
-                <a:ext uri="{909E8E84-426E-40DD-AFC4-6F175D3DCCD1}">
-                  <a14:hiddenFill xmlns:a14="http://schemas.microsoft.com/office/drawing/2010/main">
-                    <a:solidFill>
-                      <a:srgbClr val="FFFFFF"/>
-                    </a:solidFill>
-                  </a14:hiddenFill>
-                </a:ext>
-              </a:extLst>
-            </p:spPr>
-          </p:pic>
-          <p:sp>
-            <p:nvSpPr>
-              <p:cNvPr id="30" name="Balão de Fala: Oval 29">
-                <a:extLst>
-                  <a:ext uri="{FF2B5EF4-FFF2-40B4-BE49-F238E27FC236}">
-                    <a16:creationId xmlns:a16="http://schemas.microsoft.com/office/drawing/2014/main" xmlns="" id="{5F91F986-57BA-8C61-8C2B-2154AC167988}"/>
-                  </a:ext>
-                </a:extLst>
-              </p:cNvPr>
-              <p:cNvSpPr/>
-              <p:nvPr/>
-            </p:nvSpPr>
-            <p:spPr>
-              <a:xfrm>
-                <a:off x="2867377" y="1597731"/>
-                <a:ext cx="1437147" cy="521895"/>
-              </a:xfrm>
-              <a:prstGeom prst="wedgeEllipseCallout">
-                <a:avLst>
-                  <a:gd name="adj1" fmla="val 35734"/>
-                  <a:gd name="adj2" fmla="val 101376"/>
-                </a:avLst>
-              </a:prstGeom>
-            </p:spPr>
-            <p:style>
-              <a:lnRef idx="2">
-                <a:schemeClr val="accent1">
-                  <a:shade val="15000"/>
-                </a:schemeClr>
-              </a:lnRef>
-              <a:fillRef idx="1">
-                <a:schemeClr val="accent1"/>
-              </a:fillRef>
-              <a:effectRef idx="0">
-                <a:schemeClr val="accent1"/>
-              </a:effectRef>
-              <a:fontRef idx="minor">
-                <a:schemeClr val="lt1"/>
-              </a:fontRef>
-            </p:style>
-            <p:txBody>
-              <a:bodyPr rtlCol="0" anchor="ctr"/>
-              <a:lstStyle/>
-              <a:p>
-                <a:pPr algn="ctr"/>
-                <a:r>
-                  <a:rPr lang="pt-BR" sz="1400" dirty="0"/>
-                  <a:t>Você está grávida.</a:t>
-                </a:r>
-              </a:p>
-            </p:txBody>
-          </p:sp>
-          <p:sp>
-            <p:nvSpPr>
-              <p:cNvPr id="31" name="Balão de Fala: Oval 30">
-                <a:extLst>
-                  <a:ext uri="{FF2B5EF4-FFF2-40B4-BE49-F238E27FC236}">
-                    <a16:creationId xmlns:a16="http://schemas.microsoft.com/office/drawing/2014/main" xmlns="" id="{F02A8CD2-97C4-BED8-C413-1982F9849470}"/>
-                  </a:ext>
-                </a:extLst>
-              </p:cNvPr>
-              <p:cNvSpPr/>
-              <p:nvPr/>
-            </p:nvSpPr>
-            <p:spPr>
-              <a:xfrm>
-                <a:off x="2625936" y="3945823"/>
-                <a:ext cx="1648179" cy="521895"/>
-              </a:xfrm>
-              <a:prstGeom prst="wedgeEllipseCallout">
-                <a:avLst>
-                  <a:gd name="adj1" fmla="val 35734"/>
-                  <a:gd name="adj2" fmla="val 101376"/>
-                </a:avLst>
-              </a:prstGeom>
-            </p:spPr>
-            <p:style>
-              <a:lnRef idx="2">
-                <a:schemeClr val="accent1">
-                  <a:shade val="15000"/>
-                </a:schemeClr>
-              </a:lnRef>
-              <a:fillRef idx="1">
-                <a:schemeClr val="accent1"/>
-              </a:fillRef>
-              <a:effectRef idx="0">
-                <a:schemeClr val="accent1"/>
-              </a:effectRef>
-              <a:fontRef idx="minor">
-                <a:schemeClr val="lt1"/>
-              </a:fontRef>
-            </p:style>
-            <p:txBody>
-              <a:bodyPr rtlCol="0" anchor="ctr"/>
-              <a:lstStyle/>
-              <a:p>
-                <a:pPr algn="ctr"/>
-                <a:r>
-                  <a:rPr lang="pt-BR" sz="1400" dirty="0"/>
-                  <a:t>Você não está grávida.</a:t>
-                </a:r>
-              </a:p>
-            </p:txBody>
-          </p:sp>
-          <p:pic>
-            <p:nvPicPr>
-              <p:cNvPr id="32" name="Picture 2" descr="The Doctor-Patient Relationship | Patient Satisfacton | National">
-                <a:extLst>
-                  <a:ext uri="{FF2B5EF4-FFF2-40B4-BE49-F238E27FC236}">
-                    <a16:creationId xmlns:a16="http://schemas.microsoft.com/office/drawing/2014/main" xmlns="" id="{203F09A1-E119-3D1C-2D7F-BACF67955EA5}"/>
-                  </a:ext>
-                </a:extLst>
-              </p:cNvPr>
-              <p:cNvPicPr>
-                <a:picLocks noChangeAspect="1" noChangeArrowheads="1"/>
-              </p:cNvPicPr>
-              <p:nvPr/>
-            </p:nvPicPr>
-            <p:blipFill>
-              <a:blip r:embed="rId2" cstate="print">
-                <a:extLst>
-                  <a:ext uri="{28A0092B-C50C-407E-A947-70E740481C1C}">
-                    <a14:useLocalDpi xmlns:a14="http://schemas.microsoft.com/office/drawing/2010/main" val="0"/>
-                  </a:ext>
-                </a:extLst>
-              </a:blip>
-              <a:srcRect/>
-              <a:stretch>
-                <a:fillRect/>
-              </a:stretch>
-            </p:blipFill>
-            <p:spPr bwMode="auto">
-              <a:xfrm>
-                <a:off x="5402261" y="3923245"/>
-                <a:ext cx="3522138" cy="2348092"/>
-              </a:xfrm>
-              <a:prstGeom prst="rect">
-                <a:avLst/>
-              </a:prstGeom>
-              <a:noFill/>
-              <a:extLst>
-                <a:ext uri="{909E8E84-426E-40DD-AFC4-6F175D3DCCD1}">
-                  <a14:hiddenFill xmlns:a14="http://schemas.microsoft.com/office/drawing/2010/main">
-                    <a:solidFill>
-                      <a:srgbClr val="FFFFFF"/>
-                    </a:solidFill>
-                  </a14:hiddenFill>
-                </a:ext>
-              </a:extLst>
-            </p:spPr>
-          </p:pic>
-          <p:sp>
-            <p:nvSpPr>
-              <p:cNvPr id="33" name="Balão de Fala: Oval 32">
-                <a:extLst>
-                  <a:ext uri="{FF2B5EF4-FFF2-40B4-BE49-F238E27FC236}">
-                    <a16:creationId xmlns:a16="http://schemas.microsoft.com/office/drawing/2014/main" xmlns="" id="{C9652DE1-ACA6-AA41-F682-B35A3D43F562}"/>
-                  </a:ext>
-                </a:extLst>
-              </p:cNvPr>
-              <p:cNvSpPr/>
-              <p:nvPr/>
-            </p:nvSpPr>
-            <p:spPr>
-              <a:xfrm>
-                <a:off x="6016978" y="3923245"/>
-                <a:ext cx="1576712" cy="619864"/>
-              </a:xfrm>
-              <a:prstGeom prst="wedgeEllipseCallout">
-                <a:avLst>
-                  <a:gd name="adj1" fmla="val 42881"/>
-                  <a:gd name="adj2" fmla="val 64404"/>
-                </a:avLst>
-              </a:prstGeom>
-            </p:spPr>
-            <p:style>
-              <a:lnRef idx="2">
-                <a:schemeClr val="accent1">
-                  <a:shade val="15000"/>
-                </a:schemeClr>
-              </a:lnRef>
-              <a:fillRef idx="1">
-                <a:schemeClr val="accent1"/>
-              </a:fillRef>
-              <a:effectRef idx="0">
-                <a:schemeClr val="accent1"/>
-              </a:effectRef>
-              <a:fontRef idx="minor">
-                <a:schemeClr val="lt1"/>
-              </a:fontRef>
-            </p:style>
-            <p:txBody>
-              <a:bodyPr rtlCol="0" anchor="ctr"/>
-              <a:lstStyle/>
-              <a:p>
-                <a:pPr algn="ctr"/>
-                <a:r>
-                  <a:rPr lang="pt-BR" sz="1400" dirty="0"/>
-                  <a:t>Você não está grávido.</a:t>
-                </a:r>
-              </a:p>
-            </p:txBody>
-          </p:sp>
-        </p:grpSp>
-        <p:sp>
-          <p:nvSpPr>
-            <p:cNvPr id="22" name="CaixaDeTexto 21">
-              <a:extLst>
-                <a:ext uri="{FF2B5EF4-FFF2-40B4-BE49-F238E27FC236}">
-                  <a16:creationId xmlns:a16="http://schemas.microsoft.com/office/drawing/2014/main" xmlns="" id="{E85EF53B-3B15-FDB2-78B8-64C1B8DC095C}"/>
-                </a:ext>
-              </a:extLst>
-            </p:cNvPr>
-            <p:cNvSpPr txBox="1"/>
-            <p:nvPr/>
-          </p:nvSpPr>
-          <p:spPr>
-            <a:xfrm>
-              <a:off x="6099087" y="1207797"/>
-              <a:ext cx="3518680" cy="461665"/>
-            </a:xfrm>
-            <a:prstGeom prst="rect">
-              <a:avLst/>
-            </a:prstGeom>
-            <a:noFill/>
-          </p:spPr>
-          <p:txBody>
-            <a:bodyPr wrap="square" rtlCol="0">
-              <a:spAutoFit/>
-            </a:bodyPr>
-            <a:lstStyle/>
-            <a:p>
-              <a:pPr algn="ctr"/>
-              <a:r>
-                <a:rPr lang="pt-BR" sz="2400" b="1" dirty="0"/>
-                <a:t>falso positivo</a:t>
-              </a:r>
-            </a:p>
-          </p:txBody>
-        </p:sp>
-        <p:sp>
-          <p:nvSpPr>
-            <p:cNvPr id="23" name="CaixaDeTexto 22">
-              <a:extLst>
-                <a:ext uri="{FF2B5EF4-FFF2-40B4-BE49-F238E27FC236}">
-                  <a16:creationId xmlns:a16="http://schemas.microsoft.com/office/drawing/2014/main" xmlns="" id="{17D1F8F0-2001-487C-0328-B9CC461C5C22}"/>
-                </a:ext>
-              </a:extLst>
-            </p:cNvPr>
-            <p:cNvSpPr txBox="1"/>
-            <p:nvPr/>
-          </p:nvSpPr>
-          <p:spPr>
-            <a:xfrm>
-              <a:off x="2574233" y="1214909"/>
-              <a:ext cx="3517938" cy="461665"/>
-            </a:xfrm>
-            <a:prstGeom prst="rect">
-              <a:avLst/>
-            </a:prstGeom>
-            <a:noFill/>
-          </p:spPr>
-          <p:txBody>
-            <a:bodyPr wrap="square" rtlCol="0">
-              <a:spAutoFit/>
-            </a:bodyPr>
-            <a:lstStyle/>
-            <a:p>
-              <a:pPr algn="ctr"/>
-              <a:r>
-                <a:rPr lang="pt-BR" sz="2400" b="1" dirty="0"/>
-                <a:t>verdadeiro positivo</a:t>
-              </a:r>
-            </a:p>
-          </p:txBody>
-        </p:sp>
-        <p:sp>
-          <p:nvSpPr>
-            <p:cNvPr id="24" name="CaixaDeTexto 23">
-              <a:extLst>
-                <a:ext uri="{FF2B5EF4-FFF2-40B4-BE49-F238E27FC236}">
-                  <a16:creationId xmlns:a16="http://schemas.microsoft.com/office/drawing/2014/main" xmlns="" id="{65FBFC13-3E5C-416E-8BD6-77F707090DB2}"/>
-                </a:ext>
-              </a:extLst>
-            </p:cNvPr>
-            <p:cNvSpPr txBox="1"/>
-            <p:nvPr/>
-          </p:nvSpPr>
-          <p:spPr>
-            <a:xfrm>
-              <a:off x="2523807" y="6349824"/>
-              <a:ext cx="3517938" cy="461665"/>
-            </a:xfrm>
-            <a:prstGeom prst="rect">
-              <a:avLst/>
-            </a:prstGeom>
-            <a:noFill/>
-          </p:spPr>
-          <p:txBody>
-            <a:bodyPr wrap="square" rtlCol="0">
-              <a:spAutoFit/>
-            </a:bodyPr>
-            <a:lstStyle/>
-            <a:p>
-              <a:pPr algn="ctr"/>
-              <a:r>
-                <a:rPr lang="pt-BR" sz="2400" b="1" dirty="0"/>
-                <a:t>falso negativo</a:t>
-              </a:r>
-            </a:p>
-          </p:txBody>
-        </p:sp>
-        <p:sp>
-          <p:nvSpPr>
-            <p:cNvPr id="25" name="CaixaDeTexto 24">
-              <a:extLst>
-                <a:ext uri="{FF2B5EF4-FFF2-40B4-BE49-F238E27FC236}">
-                  <a16:creationId xmlns:a16="http://schemas.microsoft.com/office/drawing/2014/main" xmlns="" id="{89239370-6C0B-DE30-3A02-F18C4C405579}"/>
-                </a:ext>
-              </a:extLst>
-            </p:cNvPr>
-            <p:cNvSpPr txBox="1"/>
-            <p:nvPr/>
-          </p:nvSpPr>
-          <p:spPr>
-            <a:xfrm>
-              <a:off x="6041745" y="6342712"/>
-              <a:ext cx="3517938" cy="461665"/>
-            </a:xfrm>
-            <a:prstGeom prst="rect">
-              <a:avLst/>
-            </a:prstGeom>
-            <a:noFill/>
-          </p:spPr>
-          <p:txBody>
-            <a:bodyPr wrap="square" rtlCol="0">
-              <a:spAutoFit/>
-            </a:bodyPr>
-            <a:lstStyle/>
-            <a:p>
-              <a:pPr algn="ctr"/>
-              <a:r>
-                <a:rPr lang="pt-BR" sz="2400" b="1" dirty="0"/>
-                <a:t>verdadeiro negativo</a:t>
-              </a:r>
-            </a:p>
-          </p:txBody>
-        </p:sp>
-      </p:grpSp>
-    </p:spTree>
-    <p:extLst>
-      <p:ext uri="{BB962C8B-B14F-4D97-AF65-F5344CB8AC3E}">
-        <p14:creationId xmlns:p14="http://schemas.microsoft.com/office/powerpoint/2010/main" val="1475236011"/>
-      </p:ext>
-    </p:extLst>
-  </p:cSld>
-  <p:clrMapOvr>
-    <a:masterClrMapping/>
-  </p:clrMapOvr>
-</p:sld>
-</file>
-
 <file path=ppt/slides/slide3.xml><?xml version="1.0" encoding="utf-8"?>
 <p:sld xmlns:a="http://schemas.openxmlformats.org/drawingml/2006/main" xmlns:r="http://schemas.openxmlformats.org/officeDocument/2006/relationships" xmlns:p="http://schemas.openxmlformats.org/presentationml/2006/main">
   <p:cSld>
@@ -27354,7 +20804,7 @@
           <p:cNvPr id="2" name="Title 1">
             <a:extLst>
               <a:ext uri="{FF2B5EF4-FFF2-40B4-BE49-F238E27FC236}">
-                <a16:creationId xmlns="" xmlns:a16="http://schemas.microsoft.com/office/drawing/2014/main" id="{F1CB30D0-D052-EC03-3C25-35C106AA1077}"/>
+                <a16:creationId xmlns:a16="http://schemas.microsoft.com/office/drawing/2014/main" id="{F1CB30D0-D052-EC03-3C25-35C106AA1077}"/>
               </a:ext>
             </a:extLst>
           </p:cNvPr>
@@ -27383,7 +20833,7 @@
           <p:cNvPr id="2050" name="Picture 2" descr="Validate me Constructive criticism permitted – @gallusrostromegalus on  Tumblr">
             <a:extLst>
               <a:ext uri="{FF2B5EF4-FFF2-40B4-BE49-F238E27FC236}">
-                <a16:creationId xmlns="" xmlns:a16="http://schemas.microsoft.com/office/drawing/2014/main" id="{A9C68C0F-3A42-8D60-0B8A-979695E4072E}"/>
+                <a16:creationId xmlns:a16="http://schemas.microsoft.com/office/drawing/2014/main" id="{A9C68C0F-3A42-8D60-0B8A-979695E4072E}"/>
               </a:ext>
             </a:extLst>
           </p:cNvPr>
@@ -27500,7 +20950,6 @@
               <a:rPr lang="pt-BR" sz="2800" dirty="0"/>
               <a:t>.</a:t>
             </a:r>
-            <a:endParaRPr lang="pt-BR" sz="2800" dirty="0"/>
           </a:p>
         </p:txBody>
       </p:sp>
@@ -27539,7 +20988,7 @@
           <p:cNvPr id="2" name="Título 1">
             <a:extLst>
               <a:ext uri="{FF2B5EF4-FFF2-40B4-BE49-F238E27FC236}">
-                <a16:creationId xmlns:a16="http://schemas.microsoft.com/office/drawing/2014/main" xmlns="" id="{C738E7C4-65BB-5A05-5DF4-FF60F520CB58}"/>
+                <a16:creationId xmlns:a16="http://schemas.microsoft.com/office/drawing/2014/main" id="{C738E7C4-65BB-5A05-5DF4-FF60F520CB58}"/>
               </a:ext>
             </a:extLst>
           </p:cNvPr>
@@ -27569,7 +21018,7 @@
               <p:cNvPr id="3" name="Espaço Reservado para Conteúdo 2">
                 <a:extLst>
                   <a:ext uri="{FF2B5EF4-FFF2-40B4-BE49-F238E27FC236}">
-                    <a16:creationId xmlns:a16="http://schemas.microsoft.com/office/drawing/2014/main" xmlns="" id="{40ABD154-3AFD-0036-3D3B-BDE0F6C2A332}"/>
+                    <a16:creationId xmlns:a16="http://schemas.microsoft.com/office/drawing/2014/main" id="{40ABD154-3AFD-0036-3D3B-BDE0F6C2A332}"/>
                   </a:ext>
                 </a:extLst>
               </p:cNvPr>
@@ -27593,11 +21042,11 @@
               <a:lstStyle/>
               <a:p>
                 <a:r>
-                  <a:rPr lang="pt-BR" sz="2800" dirty="0" smtClean="0"/>
+                  <a:rPr lang="pt-BR" sz="2800" dirty="0"/>
                   <a:t>A </a:t>
                 </a:r>
                 <a:r>
-                  <a:rPr lang="pt-BR" sz="2800" b="1" i="1" dirty="0"/>
+                  <a:rPr lang="pt-BR" sz="2800" b="1" dirty="0"/>
                   <a:t>matriz de confusão</a:t>
                 </a:r>
                 <a:r>
@@ -27605,7 +21054,7 @@
                   <a:t> </a:t>
                 </a:r>
                 <a:r>
-                  <a:rPr lang="pt-BR" sz="2800" b="1" i="1" dirty="0">
+                  <a:rPr lang="pt-BR" sz="2800" b="1" dirty="0">
                     <a:solidFill>
                       <a:srgbClr val="00B050"/>
                     </a:solidFill>
@@ -27645,7 +21094,7 @@
                   <a:t>É uma </a:t>
                 </a:r>
                 <a:r>
-                  <a:rPr lang="pt-BR" b="1" i="1" dirty="0">
+                  <a:rPr lang="pt-BR" b="1" dirty="0">
                     <a:solidFill>
                       <a:srgbClr val="00B050"/>
                     </a:solidFill>
@@ -27720,7 +21169,7 @@
               <p:cNvPr id="3" name="Espaço Reservado para Conteúdo 2">
                 <a:extLst>
                   <a:ext uri="{FF2B5EF4-FFF2-40B4-BE49-F238E27FC236}">
-                    <a16:creationId xmlns:a16="http://schemas.microsoft.com/office/drawing/2014/main" xmlns:a14="http://schemas.microsoft.com/office/drawing/2010/main" xmlns="" id="{40ABD154-3AFD-0036-3D3B-BDE0F6C2A332}"/>
+                    <a16:creationId xmlns:a16="http://schemas.microsoft.com/office/drawing/2014/main" id="{40ABD154-3AFD-0036-3D3B-BDE0F6C2A332}"/>
                   </a:ext>
                 </a:extLst>
               </p:cNvPr>
@@ -27736,7 +21185,7 @@
                 <a:off x="5633156" y="1825624"/>
                 <a:ext cx="6423377" cy="5032375"/>
               </a:xfrm>
-              <a:blipFill rotWithShape="0">
+              <a:blipFill>
                 <a:blip r:embed="rId3"/>
                 <a:stretch>
                   <a:fillRect l="-1708" t="-1937"/>
@@ -27748,7 +21197,7 @@
               <a:lstStyle/>
               <a:p>
                 <a:r>
-                  <a:rPr lang="pt-BR">
+                  <a:rPr lang="en-US">
                     <a:noFill/>
                   </a:rPr>
                   <a:t> </a:t>
@@ -27765,7 +21214,7 @@
               <p:cNvPr id="5" name="CaixaDeTexto 4">
                 <a:extLst>
                   <a:ext uri="{FF2B5EF4-FFF2-40B4-BE49-F238E27FC236}">
-                    <a16:creationId xmlns:a16="http://schemas.microsoft.com/office/drawing/2014/main" xmlns="" id="{9FE2C07F-02D2-0345-E394-150F01C017C4}"/>
+                    <a16:creationId xmlns:a16="http://schemas.microsoft.com/office/drawing/2014/main" id="{9FE2C07F-02D2-0345-E394-150F01C017C4}"/>
                   </a:ext>
                 </a:extLst>
               </p:cNvPr>
@@ -28365,7 +21814,7 @@
           <p:cNvPr id="2" name="Título 1">
             <a:extLst>
               <a:ext uri="{FF2B5EF4-FFF2-40B4-BE49-F238E27FC236}">
-                <a16:creationId xmlns:a16="http://schemas.microsoft.com/office/drawing/2014/main" xmlns="" id="{C738E7C4-65BB-5A05-5DF4-FF60F520CB58}"/>
+                <a16:creationId xmlns:a16="http://schemas.microsoft.com/office/drawing/2014/main" id="{C738E7C4-65BB-5A05-5DF4-FF60F520CB58}"/>
               </a:ext>
             </a:extLst>
           </p:cNvPr>
@@ -28395,7 +21844,7 @@
               <p:cNvPr id="5" name="CaixaDeTexto 4">
                 <a:extLst>
                   <a:ext uri="{FF2B5EF4-FFF2-40B4-BE49-F238E27FC236}">
-                    <a16:creationId xmlns:a16="http://schemas.microsoft.com/office/drawing/2014/main" xmlns="" id="{9FE2C07F-02D2-0345-E394-150F01C017C4}"/>
+                    <a16:creationId xmlns:a16="http://schemas.microsoft.com/office/drawing/2014/main" id="{9FE2C07F-02D2-0345-E394-150F01C017C4}"/>
                   </a:ext>
                 </a:extLst>
               </p:cNvPr>
@@ -28953,7 +22402,7 @@
           <p:cNvPr id="4" name="Chave Direita 3">
             <a:extLst>
               <a:ext uri="{FF2B5EF4-FFF2-40B4-BE49-F238E27FC236}">
-                <a16:creationId xmlns:a16="http://schemas.microsoft.com/office/drawing/2014/main" xmlns="" id="{314F6830-34E9-8654-9AF0-D69DE9FAE980}"/>
+                <a16:creationId xmlns:a16="http://schemas.microsoft.com/office/drawing/2014/main" id="{314F6830-34E9-8654-9AF0-D69DE9FAE980}"/>
               </a:ext>
             </a:extLst>
           </p:cNvPr>
@@ -28997,7 +22446,7 @@
           <p:cNvPr id="6" name="CaixaDeTexto 5">
             <a:extLst>
               <a:ext uri="{FF2B5EF4-FFF2-40B4-BE49-F238E27FC236}">
-                <a16:creationId xmlns:a16="http://schemas.microsoft.com/office/drawing/2014/main" xmlns="" id="{AA46DBC8-FBDE-250B-240D-193F0A609C0C}"/>
+                <a16:creationId xmlns:a16="http://schemas.microsoft.com/office/drawing/2014/main" id="{AA46DBC8-FBDE-250B-240D-193F0A609C0C}"/>
               </a:ext>
             </a:extLst>
           </p:cNvPr>
@@ -29041,7 +22490,7 @@
           <p:cNvPr id="7" name="Chave Direita 6">
             <a:extLst>
               <a:ext uri="{FF2B5EF4-FFF2-40B4-BE49-F238E27FC236}">
-                <a16:creationId xmlns:a16="http://schemas.microsoft.com/office/drawing/2014/main" xmlns="" id="{E94D5995-3604-C1B4-B485-9B393568D39B}"/>
+                <a16:creationId xmlns:a16="http://schemas.microsoft.com/office/drawing/2014/main" id="{E94D5995-3604-C1B4-B485-9B393568D39B}"/>
               </a:ext>
             </a:extLst>
           </p:cNvPr>
@@ -29085,7 +22534,7 @@
           <p:cNvPr id="8" name="CaixaDeTexto 7">
             <a:extLst>
               <a:ext uri="{FF2B5EF4-FFF2-40B4-BE49-F238E27FC236}">
-                <a16:creationId xmlns:a16="http://schemas.microsoft.com/office/drawing/2014/main" xmlns="" id="{AF3B44CB-FB5A-9774-1C6B-808D8FC9AA1C}"/>
+                <a16:creationId xmlns:a16="http://schemas.microsoft.com/office/drawing/2014/main" id="{AF3B44CB-FB5A-9774-1C6B-808D8FC9AA1C}"/>
               </a:ext>
             </a:extLst>
           </p:cNvPr>
@@ -29129,7 +22578,7 @@
           <p:cNvPr id="3" name="TextBox 2">
             <a:extLst>
               <a:ext uri="{FF2B5EF4-FFF2-40B4-BE49-F238E27FC236}">
-                <a16:creationId xmlns:a16="http://schemas.microsoft.com/office/drawing/2014/main" xmlns="" id="{B69DC4B7-28AE-3B52-6F26-3A317D0DAC53}"/>
+                <a16:creationId xmlns:a16="http://schemas.microsoft.com/office/drawing/2014/main" id="{B69DC4B7-28AE-3B52-6F26-3A317D0DAC53}"/>
               </a:ext>
             </a:extLst>
           </p:cNvPr>
@@ -29195,7 +22644,7 @@
           <p:cNvPr id="2" name="Título 1">
             <a:extLst>
               <a:ext uri="{FF2B5EF4-FFF2-40B4-BE49-F238E27FC236}">
-                <a16:creationId xmlns:a16="http://schemas.microsoft.com/office/drawing/2014/main" xmlns="" id="{C738E7C4-65BB-5A05-5DF4-FF60F520CB58}"/>
+                <a16:creationId xmlns:a16="http://schemas.microsoft.com/office/drawing/2014/main" id="{C738E7C4-65BB-5A05-5DF4-FF60F520CB58}"/>
               </a:ext>
             </a:extLst>
           </p:cNvPr>
@@ -29225,7 +22674,7 @@
               <p:cNvPr id="3" name="Espaço Reservado para Conteúdo 2">
                 <a:extLst>
                   <a:ext uri="{FF2B5EF4-FFF2-40B4-BE49-F238E27FC236}">
-                    <a16:creationId xmlns:a16="http://schemas.microsoft.com/office/drawing/2014/main" xmlns="" id="{40ABD154-3AFD-0036-3D3B-BDE0F6C2A332}"/>
+                    <a16:creationId xmlns:a16="http://schemas.microsoft.com/office/drawing/2014/main" id="{40ABD154-3AFD-0036-3D3B-BDE0F6C2A332}"/>
                   </a:ext>
                 </a:extLst>
               </p:cNvPr>
@@ -29523,7 +22972,7 @@
               <p:cNvPr id="5" name="CaixaDeTexto 4">
                 <a:extLst>
                   <a:ext uri="{FF2B5EF4-FFF2-40B4-BE49-F238E27FC236}">
-                    <a16:creationId xmlns:a16="http://schemas.microsoft.com/office/drawing/2014/main" xmlns="" id="{9FE2C07F-02D2-0345-E394-150F01C017C4}"/>
+                    <a16:creationId xmlns:a16="http://schemas.microsoft.com/office/drawing/2014/main" id="{9FE2C07F-02D2-0345-E394-150F01C017C4}"/>
                   </a:ext>
                 </a:extLst>
               </p:cNvPr>
@@ -30093,7 +23542,7 @@
           <p:cNvPr id="4" name="Oval 3">
             <a:extLst>
               <a:ext uri="{FF2B5EF4-FFF2-40B4-BE49-F238E27FC236}">
-                <a16:creationId xmlns:a16="http://schemas.microsoft.com/office/drawing/2014/main" xmlns="" id="{E3C2398C-FA6E-B604-0A4E-B8DC5CF24EF7}"/>
+                <a16:creationId xmlns:a16="http://schemas.microsoft.com/office/drawing/2014/main" id="{E3C2398C-FA6E-B604-0A4E-B8DC5CF24EF7}"/>
               </a:ext>
             </a:extLst>
           </p:cNvPr>
@@ -30145,7 +23594,7 @@
           <p:cNvPr id="6" name="Oval 5">
             <a:extLst>
               <a:ext uri="{FF2B5EF4-FFF2-40B4-BE49-F238E27FC236}">
-                <a16:creationId xmlns:a16="http://schemas.microsoft.com/office/drawing/2014/main" xmlns="" id="{4BBF1D53-FE8C-A737-118B-224A249F0F55}"/>
+                <a16:creationId xmlns:a16="http://schemas.microsoft.com/office/drawing/2014/main" id="{4BBF1D53-FE8C-A737-118B-224A249F0F55}"/>
               </a:ext>
             </a:extLst>
           </p:cNvPr>
@@ -30227,7 +23676,7 @@
           <p:cNvPr id="2" name="Título 1">
             <a:extLst>
               <a:ext uri="{FF2B5EF4-FFF2-40B4-BE49-F238E27FC236}">
-                <a16:creationId xmlns:a16="http://schemas.microsoft.com/office/drawing/2014/main" xmlns="" id="{C738E7C4-65BB-5A05-5DF4-FF60F520CB58}"/>
+                <a16:creationId xmlns:a16="http://schemas.microsoft.com/office/drawing/2014/main" id="{C738E7C4-65BB-5A05-5DF4-FF60F520CB58}"/>
               </a:ext>
             </a:extLst>
           </p:cNvPr>
@@ -30257,7 +23706,7 @@
               <p:cNvPr id="5" name="CaixaDeTexto 4">
                 <a:extLst>
                   <a:ext uri="{FF2B5EF4-FFF2-40B4-BE49-F238E27FC236}">
-                    <a16:creationId xmlns:a16="http://schemas.microsoft.com/office/drawing/2014/main" xmlns="" id="{9FE2C07F-02D2-0345-E394-150F01C017C4}"/>
+                    <a16:creationId xmlns:a16="http://schemas.microsoft.com/office/drawing/2014/main" id="{9FE2C07F-02D2-0345-E394-150F01C017C4}"/>
                   </a:ext>
                 </a:extLst>
               </p:cNvPr>
@@ -30827,7 +24276,7 @@
           <p:cNvPr id="6" name="Oval 3">
             <a:extLst>
               <a:ext uri="{FF2B5EF4-FFF2-40B4-BE49-F238E27FC236}">
-                <a16:creationId xmlns:a16="http://schemas.microsoft.com/office/drawing/2014/main" xmlns="" id="{E9839706-E14C-629A-7F56-18012BB99C3A}"/>
+                <a16:creationId xmlns:a16="http://schemas.microsoft.com/office/drawing/2014/main" id="{E9839706-E14C-629A-7F56-18012BB99C3A}"/>
               </a:ext>
             </a:extLst>
           </p:cNvPr>
@@ -30879,7 +24328,7 @@
           <p:cNvPr id="7" name="TextBox 4">
             <a:extLst>
               <a:ext uri="{FF2B5EF4-FFF2-40B4-BE49-F238E27FC236}">
-                <a16:creationId xmlns:a16="http://schemas.microsoft.com/office/drawing/2014/main" xmlns="" id="{6279C33D-9270-DC3C-212E-0FD57AC45F7D}"/>
+                <a16:creationId xmlns:a16="http://schemas.microsoft.com/office/drawing/2014/main" id="{6279C33D-9270-DC3C-212E-0FD57AC45F7D}"/>
               </a:ext>
             </a:extLst>
           </p:cNvPr>
@@ -30915,7 +24364,7 @@
           <p:cNvPr id="8" name="Oval 5">
             <a:extLst>
               <a:ext uri="{FF2B5EF4-FFF2-40B4-BE49-F238E27FC236}">
-                <a16:creationId xmlns:a16="http://schemas.microsoft.com/office/drawing/2014/main" xmlns="" id="{1BD26B11-37BD-057A-7642-8513680C0B09}"/>
+                <a16:creationId xmlns:a16="http://schemas.microsoft.com/office/drawing/2014/main" id="{1BD26B11-37BD-057A-7642-8513680C0B09}"/>
               </a:ext>
             </a:extLst>
           </p:cNvPr>
@@ -30967,7 +24416,7 @@
           <p:cNvPr id="9" name="Freeform 6">
             <a:extLst>
               <a:ext uri="{FF2B5EF4-FFF2-40B4-BE49-F238E27FC236}">
-                <a16:creationId xmlns:a16="http://schemas.microsoft.com/office/drawing/2014/main" xmlns="" id="{0F0FD986-F79E-DA0A-829E-1F5A7437324A}"/>
+                <a16:creationId xmlns:a16="http://schemas.microsoft.com/office/drawing/2014/main" id="{0F0FD986-F79E-DA0A-829E-1F5A7437324A}"/>
               </a:ext>
             </a:extLst>
           </p:cNvPr>
@@ -31059,7 +24508,7 @@
           <p:cNvPr id="10" name="TextBox 7">
             <a:extLst>
               <a:ext uri="{FF2B5EF4-FFF2-40B4-BE49-F238E27FC236}">
-                <a16:creationId xmlns:a16="http://schemas.microsoft.com/office/drawing/2014/main" xmlns="" id="{30228E55-A04A-15F3-F542-24A94935CB8F}"/>
+                <a16:creationId xmlns:a16="http://schemas.microsoft.com/office/drawing/2014/main" id="{30228E55-A04A-15F3-F542-24A94935CB8F}"/>
               </a:ext>
             </a:extLst>
           </p:cNvPr>
@@ -31095,7 +24544,7 @@
           <p:cNvPr id="11" name="Freeform 8">
             <a:extLst>
               <a:ext uri="{FF2B5EF4-FFF2-40B4-BE49-F238E27FC236}">
-                <a16:creationId xmlns:a16="http://schemas.microsoft.com/office/drawing/2014/main" xmlns="" id="{DE8EF324-A6C8-6014-6A79-6F6CD536E661}"/>
+                <a16:creationId xmlns:a16="http://schemas.microsoft.com/office/drawing/2014/main" id="{DE8EF324-A6C8-6014-6A79-6F6CD536E661}"/>
               </a:ext>
             </a:extLst>
           </p:cNvPr>
@@ -31179,7 +24628,7 @@
               <p:cNvPr id="12" name="Rectangle 9">
                 <a:extLst>
                   <a:ext uri="{FF2B5EF4-FFF2-40B4-BE49-F238E27FC236}">
-                    <a16:creationId xmlns:a16="http://schemas.microsoft.com/office/drawing/2014/main" xmlns="" id="{B0A8A935-42A2-46DB-34B6-70E5007CD2FA}"/>
+                    <a16:creationId xmlns:a16="http://schemas.microsoft.com/office/drawing/2014/main" id="{B0A8A935-42A2-46DB-34B6-70E5007CD2FA}"/>
                   </a:ext>
                 </a:extLst>
               </p:cNvPr>
@@ -31369,7 +24818,7 @@
               <p:cNvPr id="2" name="Título 1">
                 <a:extLst>
                   <a:ext uri="{FF2B5EF4-FFF2-40B4-BE49-F238E27FC236}">
-                    <a16:creationId xmlns:a16="http://schemas.microsoft.com/office/drawing/2014/main" xmlns="" id="{4EAC8C3E-AFB0-15A1-EDEF-475FA3643375}"/>
+                    <a16:creationId xmlns:a16="http://schemas.microsoft.com/office/drawing/2014/main" id="{4EAC8C3E-AFB0-15A1-EDEF-475FA3643375}"/>
                   </a:ext>
                 </a:extLst>
               </p:cNvPr>
@@ -31401,7 +24850,13 @@
                       <a:rPr lang="pt-BR" b="0" i="1" smtClean="0">
                         <a:latin typeface="Cambria Math" panose="02040503050406030204" pitchFamily="18" charset="0"/>
                       </a:rPr>
-                      <m:t>=2</m:t>
+                      <m:t>=</m:t>
+                    </m:r>
+                    <m:r>
+                      <a:rPr lang="pt-BR" b="0" i="1" smtClean="0">
+                        <a:latin typeface="Cambria Math" panose="02040503050406030204" pitchFamily="18" charset="0"/>
+                      </a:rPr>
+                      <m:t>2</m:t>
                     </m:r>
                   </m:oMath>
                 </a14:m>
@@ -31460,7 +24915,7 @@
               <p:cNvPr id="3" name="Espaço Reservado para Conteúdo 2">
                 <a:extLst>
                   <a:ext uri="{FF2B5EF4-FFF2-40B4-BE49-F238E27FC236}">
-                    <a16:creationId xmlns:a16="http://schemas.microsoft.com/office/drawing/2014/main" xmlns="" id="{6A052458-A5D6-9055-C748-5BFDB00FC77C}"/>
+                    <a16:creationId xmlns:a16="http://schemas.microsoft.com/office/drawing/2014/main" id="{6A052458-A5D6-9055-C748-5BFDB00FC77C}"/>
                   </a:ext>
                 </a:extLst>
               </p:cNvPr>
@@ -31640,7 +25095,7 @@
           <p:cNvPr id="5" name="Tabela 5">
             <a:extLst>
               <a:ext uri="{FF2B5EF4-FFF2-40B4-BE49-F238E27FC236}">
-                <a16:creationId xmlns:a16="http://schemas.microsoft.com/office/drawing/2014/main" xmlns="" id="{744D7738-C774-F8D0-DD85-76976F9C0032}"/>
+                <a16:creationId xmlns:a16="http://schemas.microsoft.com/office/drawing/2014/main" id="{744D7738-C774-F8D0-DD85-76976F9C0032}"/>
               </a:ext>
             </a:extLst>
           </p:cNvPr>
@@ -31663,14 +25118,14 @@
                 <a:gridCol w="2102895">
                   <a:extLst>
                     <a:ext uri="{9D8B030D-6E8A-4147-A177-3AD203B41FA5}">
-                      <a16:colId xmlns:a16="http://schemas.microsoft.com/office/drawing/2014/main" xmlns="" val="2780398905"/>
+                      <a16:colId xmlns:a16="http://schemas.microsoft.com/office/drawing/2014/main" val="2780398905"/>
                     </a:ext>
                   </a:extLst>
                 </a:gridCol>
                 <a:gridCol w="2102895">
                   <a:extLst>
                     <a:ext uri="{9D8B030D-6E8A-4147-A177-3AD203B41FA5}">
-                      <a16:colId xmlns:a16="http://schemas.microsoft.com/office/drawing/2014/main" xmlns="" val="1752542230"/>
+                      <a16:colId xmlns:a16="http://schemas.microsoft.com/office/drawing/2014/main" val="1752542230"/>
                     </a:ext>
                   </a:extLst>
                 </a:gridCol>
@@ -31867,7 +25322,7 @@
                 </a:tc>
                 <a:extLst>
                   <a:ext uri="{0D108BD9-81ED-4DB2-BD59-A6C34878D82A}">
-                    <a16:rowId xmlns:a16="http://schemas.microsoft.com/office/drawing/2014/main" xmlns="" val="3952155157"/>
+                    <a16:rowId xmlns:a16="http://schemas.microsoft.com/office/drawing/2014/main" val="3952155157"/>
                   </a:ext>
                 </a:extLst>
               </a:tr>
@@ -32069,7 +25524,7 @@
                 </a:tc>
                 <a:extLst>
                   <a:ext uri="{0D108BD9-81ED-4DB2-BD59-A6C34878D82A}">
-                    <a16:rowId xmlns:a16="http://schemas.microsoft.com/office/drawing/2014/main" xmlns="" val="2169341992"/>
+                    <a16:rowId xmlns:a16="http://schemas.microsoft.com/office/drawing/2014/main" val="2169341992"/>
                   </a:ext>
                 </a:extLst>
               </a:tr>
@@ -32082,7 +25537,7 @@
           <p:cNvPr id="7" name="CaixaDeTexto 6">
             <a:extLst>
               <a:ext uri="{FF2B5EF4-FFF2-40B4-BE49-F238E27FC236}">
-                <a16:creationId xmlns:a16="http://schemas.microsoft.com/office/drawing/2014/main" xmlns="" id="{44F3702B-0FE3-BDED-62A7-35438A8F3B75}"/>
+                <a16:creationId xmlns:a16="http://schemas.microsoft.com/office/drawing/2014/main" id="{44F3702B-0FE3-BDED-62A7-35438A8F3B75}"/>
               </a:ext>
             </a:extLst>
           </p:cNvPr>
@@ -32120,7 +25575,7 @@
           <p:cNvPr id="9" name="CaixaDeTexto 8">
             <a:extLst>
               <a:ext uri="{FF2B5EF4-FFF2-40B4-BE49-F238E27FC236}">
-                <a16:creationId xmlns:a16="http://schemas.microsoft.com/office/drawing/2014/main" xmlns="" id="{1FC82D3C-E180-54E3-CEFE-B2BD9B8D3E2A}"/>
+                <a16:creationId xmlns:a16="http://schemas.microsoft.com/office/drawing/2014/main" id="{1FC82D3C-E180-54E3-CEFE-B2BD9B8D3E2A}"/>
               </a:ext>
             </a:extLst>
           </p:cNvPr>
@@ -32160,7 +25615,7 @@
               <p:cNvPr id="11" name="CaixaDeTexto 10">
                 <a:extLst>
                   <a:ext uri="{FF2B5EF4-FFF2-40B4-BE49-F238E27FC236}">
-                    <a16:creationId xmlns:a16="http://schemas.microsoft.com/office/drawing/2014/main" xmlns="" id="{D618FE73-F69F-A4D4-3E14-7C80BD56C5C9}"/>
+                    <a16:creationId xmlns:a16="http://schemas.microsoft.com/office/drawing/2014/main" id="{D618FE73-F69F-A4D4-3E14-7C80BD56C5C9}"/>
                   </a:ext>
                 </a:extLst>
               </p:cNvPr>
@@ -32287,7 +25742,7 @@
               <p:cNvPr id="12" name="CaixaDeTexto 11">
                 <a:extLst>
                   <a:ext uri="{FF2B5EF4-FFF2-40B4-BE49-F238E27FC236}">
-                    <a16:creationId xmlns:a16="http://schemas.microsoft.com/office/drawing/2014/main" xmlns="" id="{64841025-C42C-FB64-87B6-62F7C4AD612E}"/>
+                    <a16:creationId xmlns:a16="http://schemas.microsoft.com/office/drawing/2014/main" id="{64841025-C42C-FB64-87B6-62F7C4AD612E}"/>
                   </a:ext>
                 </a:extLst>
               </p:cNvPr>
@@ -32418,7 +25873,7 @@
               <p:cNvPr id="13" name="CaixaDeTexto 12">
                 <a:extLst>
                   <a:ext uri="{FF2B5EF4-FFF2-40B4-BE49-F238E27FC236}">
-                    <a16:creationId xmlns:a16="http://schemas.microsoft.com/office/drawing/2014/main" xmlns="" id="{33FF584A-410C-DBCB-7735-A7CD30A88BC6}"/>
+                    <a16:creationId xmlns:a16="http://schemas.microsoft.com/office/drawing/2014/main" id="{33FF584A-410C-DBCB-7735-A7CD30A88BC6}"/>
                   </a:ext>
                 </a:extLst>
               </p:cNvPr>
@@ -32545,7 +26000,7 @@
               <p:cNvPr id="14" name="CaixaDeTexto 13">
                 <a:extLst>
                   <a:ext uri="{FF2B5EF4-FFF2-40B4-BE49-F238E27FC236}">
-                    <a16:creationId xmlns:a16="http://schemas.microsoft.com/office/drawing/2014/main" xmlns="" id="{01118442-F1CF-69E3-68DB-2A693775C8C5}"/>
+                    <a16:creationId xmlns:a16="http://schemas.microsoft.com/office/drawing/2014/main" id="{01118442-F1CF-69E3-68DB-2A693775C8C5}"/>
                   </a:ext>
                 </a:extLst>
               </p:cNvPr>
@@ -32706,7 +26161,7 @@
               <p:cNvPr id="2" name="Título 1">
                 <a:extLst>
                   <a:ext uri="{FF2B5EF4-FFF2-40B4-BE49-F238E27FC236}">
-                    <a16:creationId xmlns:a16="http://schemas.microsoft.com/office/drawing/2014/main" xmlns="" id="{2EDB17EF-5EC1-A178-3122-9310D2C0D3C6}"/>
+                    <a16:creationId xmlns:a16="http://schemas.microsoft.com/office/drawing/2014/main" id="{2EDB17EF-5EC1-A178-3122-9310D2C0D3C6}"/>
                   </a:ext>
                 </a:extLst>
               </p:cNvPr>
@@ -32795,7 +26250,7 @@
           <p:cNvPr id="22" name="Imagem 21">
             <a:extLst>
               <a:ext uri="{FF2B5EF4-FFF2-40B4-BE49-F238E27FC236}">
-                <a16:creationId xmlns:a16="http://schemas.microsoft.com/office/drawing/2014/main" xmlns="" id="{43854156-1399-9016-BDBA-8C80710C3EC7}"/>
+                <a16:creationId xmlns:a16="http://schemas.microsoft.com/office/drawing/2014/main" id="{43854156-1399-9016-BDBA-8C80710C3EC7}"/>
               </a:ext>
             </a:extLst>
           </p:cNvPr>

--- a/slides/C24_Métricas_de_Classificação.pptx
+++ b/slides/C24_Métricas_de_Classificação.pptx
@@ -1969,13 +1969,8 @@
             </a:pPr>
             <a:r>
               <a:rPr lang="pt-BR" dirty="0"/>
-              <a:t>https://colab.research.google.com/github/zz4fap/c24_inteligencia_artificial/blob/master/</a:t>
+              <a:t>https://colab.research.google.com/github/zz4fap/c24_inteligencia_artificial/blob/master/notebooks/m%C3%A9tricas_de_classifica%C3%A7%C3%A3o.ipynb</a:t>
             </a:r>
-            <a:r>
-              <a:rPr lang="pt-BR"/>
-              <a:t>notebooks/</a:t>
-            </a:r>
-            <a:endParaRPr lang="pt-BR" dirty="0"/>
           </a:p>
         </p:txBody>
       </p:sp>
@@ -12118,13 +12113,7 @@
                       <a:rPr lang="pt-BR" b="0" i="1" smtClean="0">
                         <a:latin typeface="Cambria Math" panose="02040503050406030204" pitchFamily="18" charset="0"/>
                       </a:rPr>
-                      <m:t>&gt;</m:t>
-                    </m:r>
-                    <m:r>
-                      <a:rPr lang="pt-BR" b="0" i="1" smtClean="0">
-                        <a:latin typeface="Cambria Math" panose="02040503050406030204" pitchFamily="18" charset="0"/>
-                      </a:rPr>
-                      <m:t>2</m:t>
+                      <m:t>&gt;2</m:t>
                     </m:r>
                   </m:oMath>
                 </a14:m>
@@ -20255,9 +20244,12 @@
           <a:lstStyle/>
           <a:p>
             <a:r>
-              <a:rPr lang="pt-BR" dirty="0"/>
+              <a:rPr lang="pt-BR" dirty="0">
+                <a:hlinkClick r:id="rId3"/>
+              </a:rPr>
               <a:t>Exemplo: Métricas de classificação</a:t>
             </a:r>
+            <a:endParaRPr lang="pt-BR" dirty="0"/>
           </a:p>
         </p:txBody>
       </p:sp>
@@ -20276,7 +20268,7 @@
           <p:nvPr/>
         </p:nvPicPr>
         <p:blipFill>
-          <a:blip r:embed="rId3" cstate="print">
+          <a:blip r:embed="rId4" cstate="print">
             <a:extLst>
               <a:ext uri="{28A0092B-C50C-407E-A947-70E740481C1C}">
                 <a14:useLocalDpi xmlns:a14="http://schemas.microsoft.com/office/drawing/2010/main" val="0"/>
@@ -20323,7 +20315,7 @@
           <p:nvPr/>
         </p:nvPicPr>
         <p:blipFill rotWithShape="1">
-          <a:blip r:embed="rId4" cstate="print">
+          <a:blip r:embed="rId5" cstate="print">
             <a:extLst>
               <a:ext uri="{28A0092B-C50C-407E-A947-70E740481C1C}">
                 <a14:useLocalDpi xmlns:a14="http://schemas.microsoft.com/office/drawing/2010/main" val="0"/>
@@ -20368,7 +20360,7 @@
           <p:nvPr/>
         </p:nvPicPr>
         <p:blipFill rotWithShape="1">
-          <a:blip r:embed="rId5">
+          <a:blip r:embed="rId6">
             <a:extLst>
               <a:ext uri="{28A0092B-C50C-407E-A947-70E740481C1C}">
                 <a14:useLocalDpi xmlns:a14="http://schemas.microsoft.com/office/drawing/2010/main" val="0"/>
@@ -21011,8 +21003,8 @@
           </a:p>
         </p:txBody>
       </p:sp>
-      <mc:AlternateContent xmlns:mc="http://schemas.openxmlformats.org/markup-compatibility/2006">
-        <mc:Choice xmlns:a14="http://schemas.microsoft.com/office/drawing/2010/main" Requires="a14">
+      <mc:AlternateContent xmlns:mc="http://schemas.openxmlformats.org/markup-compatibility/2006" xmlns:a14="http://schemas.microsoft.com/office/drawing/2010/main">
+        <mc:Choice Requires="a14">
           <p:sp>
             <p:nvSpPr>
               <p:cNvPr id="3" name="Espaço Reservado para Conteúdo 2">
@@ -21163,7 +21155,7 @@
             </p:txBody>
           </p:sp>
         </mc:Choice>
-        <mc:Fallback>
+        <mc:Fallback xmlns="">
           <p:sp>
             <p:nvSpPr>
               <p:cNvPr id="3" name="Espaço Reservado para Conteúdo 2">
@@ -24850,13 +24842,7 @@
                       <a:rPr lang="pt-BR" b="0" i="1" smtClean="0">
                         <a:latin typeface="Cambria Math" panose="02040503050406030204" pitchFamily="18" charset="0"/>
                       </a:rPr>
-                      <m:t>=</m:t>
-                    </m:r>
-                    <m:r>
-                      <a:rPr lang="pt-BR" b="0" i="1" smtClean="0">
-                        <a:latin typeface="Cambria Math" panose="02040503050406030204" pitchFamily="18" charset="0"/>
-                      </a:rPr>
-                      <m:t>2</m:t>
+                      <m:t>=2</m:t>
                     </m:r>
                   </m:oMath>
                 </a14:m>

--- a/slides/C24_Métricas_de_Classificação.pptx
+++ b/slides/C24_Métricas_de_Classificação.pptx
@@ -5,10 +5,10 @@
     <p:sldMasterId id="2147483648" r:id="rId1"/>
   </p:sldMasterIdLst>
   <p:notesMasterIdLst>
-    <p:notesMasterId r:id="rId26"/>
+    <p:notesMasterId r:id="rId30"/>
   </p:notesMasterIdLst>
   <p:handoutMasterIdLst>
-    <p:handoutMasterId r:id="rId27"/>
+    <p:handoutMasterId r:id="rId31"/>
   </p:handoutMasterIdLst>
   <p:sldIdLst>
     <p:sldId id="256" r:id="rId2"/>
@@ -25,16 +25,20 @@
     <p:sldId id="325" r:id="rId13"/>
     <p:sldId id="326" r:id="rId14"/>
     <p:sldId id="327" r:id="rId15"/>
-    <p:sldId id="328" r:id="rId16"/>
-    <p:sldId id="329" r:id="rId17"/>
-    <p:sldId id="330" r:id="rId18"/>
-    <p:sldId id="331" r:id="rId19"/>
-    <p:sldId id="332" r:id="rId20"/>
-    <p:sldId id="333" r:id="rId21"/>
-    <p:sldId id="334" r:id="rId22"/>
-    <p:sldId id="457" r:id="rId23"/>
-    <p:sldId id="336" r:id="rId24"/>
-    <p:sldId id="337" r:id="rId25"/>
+    <p:sldId id="458" r:id="rId16"/>
+    <p:sldId id="328" r:id="rId17"/>
+    <p:sldId id="459" r:id="rId18"/>
+    <p:sldId id="332" r:id="rId19"/>
+    <p:sldId id="333" r:id="rId20"/>
+    <p:sldId id="329" r:id="rId21"/>
+    <p:sldId id="330" r:id="rId22"/>
+    <p:sldId id="460" r:id="rId23"/>
+    <p:sldId id="331" r:id="rId24"/>
+    <p:sldId id="461" r:id="rId25"/>
+    <p:sldId id="334" r:id="rId26"/>
+    <p:sldId id="457" r:id="rId27"/>
+    <p:sldId id="336" r:id="rId28"/>
+    <p:sldId id="337" r:id="rId29"/>
   </p:sldIdLst>
   <p:sldSz cx="12192000" cy="6858000"/>
   <p:notesSz cx="7315200" cy="9601200"/>
@@ -298,7 +302,7 @@
           <a:p>
             <a:fld id="{144F1436-6906-4D93-B7A2-786C327BFA14}" type="datetimeFigureOut">
               <a:rPr lang="nl-BE" smtClean="0"/>
-              <a:t>27/02/2026</a:t>
+              <a:t>6/04/2026</a:t>
             </a:fld>
             <a:endParaRPr lang="nl-BE"/>
           </a:p>
@@ -463,7 +467,7 @@
           <a:p>
             <a:fld id="{AA8CD09E-2914-4F47-B6C1-51B2C31814C9}" type="datetimeFigureOut">
               <a:rPr lang="pt-BR" smtClean="0"/>
-              <a:t>27/02/2026</a:t>
+              <a:t>06/04/2026</a:t>
             </a:fld>
             <a:endParaRPr lang="pt-BR"/>
           </a:p>
@@ -1991,7 +1995,7 @@
           <a:p>
             <a:fld id="{6FC8D850-966F-45A6-8DE7-15B891E7D40D}" type="slidenum">
               <a:rPr lang="pt-BR" smtClean="0"/>
-              <a:t>21</a:t>
+              <a:t>25</a:t>
             </a:fld>
             <a:endParaRPr lang="pt-BR"/>
           </a:p>
@@ -2157,7 +2161,7 @@
           <a:p>
             <a:fld id="{63289F7E-B80B-496E-81B4-D396C37C9454}" type="datetimeFigureOut">
               <a:rPr lang="pt-BR" smtClean="0"/>
-              <a:t>27/02/2026</a:t>
+              <a:t>06/04/2026</a:t>
             </a:fld>
             <a:endParaRPr lang="pt-BR"/>
           </a:p>
@@ -2355,7 +2359,7 @@
           <a:p>
             <a:fld id="{63289F7E-B80B-496E-81B4-D396C37C9454}" type="datetimeFigureOut">
               <a:rPr lang="pt-BR" smtClean="0"/>
-              <a:t>27/02/2026</a:t>
+              <a:t>06/04/2026</a:t>
             </a:fld>
             <a:endParaRPr lang="pt-BR"/>
           </a:p>
@@ -2563,7 +2567,7 @@
           <a:p>
             <a:fld id="{63289F7E-B80B-496E-81B4-D396C37C9454}" type="datetimeFigureOut">
               <a:rPr lang="pt-BR" smtClean="0"/>
-              <a:t>27/02/2026</a:t>
+              <a:t>06/04/2026</a:t>
             </a:fld>
             <a:endParaRPr lang="pt-BR"/>
           </a:p>
@@ -2761,7 +2765,7 @@
           <a:p>
             <a:fld id="{63289F7E-B80B-496E-81B4-D396C37C9454}" type="datetimeFigureOut">
               <a:rPr lang="pt-BR" smtClean="0"/>
-              <a:t>27/02/2026</a:t>
+              <a:t>06/04/2026</a:t>
             </a:fld>
             <a:endParaRPr lang="pt-BR"/>
           </a:p>
@@ -3036,7 +3040,7 @@
           <a:p>
             <a:fld id="{63289F7E-B80B-496E-81B4-D396C37C9454}" type="datetimeFigureOut">
               <a:rPr lang="pt-BR" smtClean="0"/>
-              <a:t>27/02/2026</a:t>
+              <a:t>06/04/2026</a:t>
             </a:fld>
             <a:endParaRPr lang="pt-BR"/>
           </a:p>
@@ -3301,7 +3305,7 @@
           <a:p>
             <a:fld id="{63289F7E-B80B-496E-81B4-D396C37C9454}" type="datetimeFigureOut">
               <a:rPr lang="pt-BR" smtClean="0"/>
-              <a:t>27/02/2026</a:t>
+              <a:t>06/04/2026</a:t>
             </a:fld>
             <a:endParaRPr lang="pt-BR"/>
           </a:p>
@@ -3713,7 +3717,7 @@
           <a:p>
             <a:fld id="{63289F7E-B80B-496E-81B4-D396C37C9454}" type="datetimeFigureOut">
               <a:rPr lang="pt-BR" smtClean="0"/>
-              <a:t>27/02/2026</a:t>
+              <a:t>06/04/2026</a:t>
             </a:fld>
             <a:endParaRPr lang="pt-BR"/>
           </a:p>
@@ -3854,7 +3858,7 @@
           <a:p>
             <a:fld id="{63289F7E-B80B-496E-81B4-D396C37C9454}" type="datetimeFigureOut">
               <a:rPr lang="pt-BR" smtClean="0"/>
-              <a:t>27/02/2026</a:t>
+              <a:t>06/04/2026</a:t>
             </a:fld>
             <a:endParaRPr lang="pt-BR"/>
           </a:p>
@@ -3967,7 +3971,7 @@
           <a:p>
             <a:fld id="{63289F7E-B80B-496E-81B4-D396C37C9454}" type="datetimeFigureOut">
               <a:rPr lang="pt-BR" smtClean="0"/>
-              <a:t>27/02/2026</a:t>
+              <a:t>06/04/2026</a:t>
             </a:fld>
             <a:endParaRPr lang="pt-BR"/>
           </a:p>
@@ -4278,7 +4282,7 @@
           <a:p>
             <a:fld id="{63289F7E-B80B-496E-81B4-D396C37C9454}" type="datetimeFigureOut">
               <a:rPr lang="pt-BR" smtClean="0"/>
-              <a:t>27/02/2026</a:t>
+              <a:t>06/04/2026</a:t>
             </a:fld>
             <a:endParaRPr lang="pt-BR"/>
           </a:p>
@@ -4566,7 +4570,7 @@
           <a:p>
             <a:fld id="{63289F7E-B80B-496E-81B4-D396C37C9454}" type="datetimeFigureOut">
               <a:rPr lang="pt-BR" smtClean="0"/>
-              <a:t>27/02/2026</a:t>
+              <a:t>06/04/2026</a:t>
             </a:fld>
             <a:endParaRPr lang="pt-BR"/>
           </a:p>
@@ -4807,7 +4811,7 @@
           <a:p>
             <a:fld id="{63289F7E-B80B-496E-81B4-D396C37C9454}" type="datetimeFigureOut">
               <a:rPr lang="pt-BR" smtClean="0"/>
-              <a:t>27/02/2026</a:t>
+              <a:t>06/04/2026</a:t>
             </a:fld>
             <a:endParaRPr lang="pt-BR"/>
           </a:p>
@@ -5462,7 +5466,7 @@
               <a:buNone/>
             </a:pPr>
             <a:r>
-              <a:rPr lang="pt-BR" sz="4800" b="1" i="1" dirty="0"/>
+              <a:rPr lang="pt-BR" sz="4800" dirty="0"/>
               <a:t>Nós podemos calcular algumas métricas de desempenho importantes a partir das informações contidas na matriz de confusão.</a:t>
             </a:r>
           </a:p>
@@ -5544,8 +5548,8 @@
         </p:nvSpPr>
         <p:spPr>
           <a:xfrm>
-            <a:off x="6296379" y="1825624"/>
-            <a:ext cx="5760154" cy="5032375"/>
+            <a:off x="5791200" y="1825624"/>
+            <a:ext cx="6265333" cy="5032375"/>
           </a:xfrm>
         </p:spPr>
         <p:txBody>
@@ -5557,13 +5561,13 @@
               <a:t>Acurácia med</a:t>
             </a:r>
             <a:r>
-              <a:rPr lang="pt-BR" b="0" i="0" dirty="0">
+              <a:rPr lang="pt-BR" b="0" dirty="0">
                 <a:effectLst/>
               </a:rPr>
               <a:t>e a </a:t>
             </a:r>
             <a:r>
-              <a:rPr lang="pt-BR" b="1" i="1" dirty="0">
+              <a:rPr lang="pt-BR" b="1" dirty="0">
                 <a:solidFill>
                   <a:srgbClr val="00B050"/>
                 </a:solidFill>
@@ -5572,10 +5576,16 @@
               <a:t>proporção de exemplos classificados corretamente em relação ao total de exemplos </a:t>
             </a:r>
             <a:r>
+              <a:rPr lang="pt-BR" b="0" dirty="0">
+                <a:effectLst/>
+              </a:rPr>
+              <a:t>avaliados</a:t>
+            </a:r>
+            <a:r>
               <a:rPr lang="pt-BR" b="0" i="0" dirty="0">
                 <a:effectLst/>
               </a:rPr>
-              <a:t>avaliados. </a:t>
+              <a:t>. </a:t>
             </a:r>
           </a:p>
           <a:p>
@@ -5583,10 +5593,16 @@
               <a:rPr lang="pt-BR" b="0" i="0" dirty="0">
                 <a:effectLst/>
               </a:rPr>
-              <a:t>Em outras palavras, a acurácia fornece uma indicação de quão bem o modelo está fazendo suas </a:t>
+              <a:t>Em outras palavras, a acurácia fornece uma indicação de quão bem o </a:t>
             </a:r>
             <a:r>
-              <a:rPr lang="pt-BR" b="1" i="1" dirty="0">
+              <a:rPr lang="pt-BR" b="0" dirty="0">
+                <a:effectLst/>
+              </a:rPr>
+              <a:t>modelo está fazendo suas </a:t>
+            </a:r>
+            <a:r>
+              <a:rPr lang="pt-BR" b="1" dirty="0">
                 <a:solidFill>
                   <a:srgbClr val="00B050"/>
                 </a:solidFill>
@@ -5595,7 +5611,7 @@
               <a:t>predições corretas em comparação com todas as previsões feitas</a:t>
             </a:r>
             <a:r>
-              <a:rPr lang="pt-BR" b="0" i="0" dirty="0">
+              <a:rPr lang="pt-BR" b="0" dirty="0">
                 <a:effectLst/>
               </a:rPr>
               <a:t>.</a:t>
@@ -5603,13 +5619,13 @@
           </a:p>
           <a:p>
             <a:r>
-              <a:rPr lang="pt-BR" b="0" i="0" dirty="0">
+              <a:rPr lang="pt-BR" b="0" dirty="0">
                 <a:effectLst/>
               </a:rPr>
               <a:t>É uma métrica útil para avaliar a </a:t>
             </a:r>
             <a:r>
-              <a:rPr lang="pt-BR" b="1" i="1" dirty="0">
+              <a:rPr lang="pt-BR" b="1" dirty="0">
                 <a:solidFill>
                   <a:srgbClr val="FF0000"/>
                 </a:solidFill>
@@ -5618,7 +5634,7 @@
               <a:t>performance geral</a:t>
             </a:r>
             <a:r>
-              <a:rPr lang="pt-BR" b="1" i="1" dirty="0">
+              <a:rPr lang="pt-BR" b="1" dirty="0">
                 <a:solidFill>
                   <a:srgbClr val="00B050"/>
                 </a:solidFill>
@@ -5627,7 +5643,7 @@
               <a:t> do modelo</a:t>
             </a:r>
             <a:r>
-              <a:rPr lang="pt-BR" b="0" i="0" dirty="0">
+              <a:rPr lang="pt-BR" b="0" dirty="0">
                 <a:effectLst/>
               </a:rPr>
               <a:t>.</a:t>
@@ -5636,8 +5652,8 @@
           </a:p>
         </p:txBody>
       </p:sp>
-      <mc:AlternateContent xmlns:mc="http://schemas.openxmlformats.org/markup-compatibility/2006" xmlns:a14="http://schemas.microsoft.com/office/drawing/2010/main">
-        <mc:Choice Requires="a14">
+      <mc:AlternateContent xmlns:mc="http://schemas.openxmlformats.org/markup-compatibility/2006">
+        <mc:Choice xmlns:a14="http://schemas.microsoft.com/office/drawing/2010/main" Requires="a14">
           <p:sp>
             <p:nvSpPr>
               <p:cNvPr id="5" name="CaixaDeTexto 4">
@@ -5652,7 +5668,7 @@
             </p:nvSpPr>
             <p:spPr>
               <a:xfrm>
-                <a:off x="838200" y="2922836"/>
+                <a:off x="413657" y="3329483"/>
                 <a:ext cx="5057423" cy="1012328"/>
               </a:xfrm>
               <a:prstGeom prst="rect">
@@ -5806,7 +5822,7 @@
             </p:txBody>
           </p:sp>
         </mc:Choice>
-        <mc:Fallback xmlns="">
+        <mc:Fallback>
           <p:sp>
             <p:nvSpPr>
               <p:cNvPr id="5" name="CaixaDeTexto 4">
@@ -5823,7 +5839,7 @@
             </p:nvSpPr>
             <p:spPr>
               <a:xfrm>
-                <a:off x="838200" y="2922836"/>
+                <a:off x="413657" y="3329483"/>
                 <a:ext cx="5057423" cy="1012328"/>
               </a:xfrm>
               <a:prstGeom prst="rect">
@@ -5841,7 +5857,7 @@
               <a:lstStyle/>
               <a:p>
                 <a:r>
-                  <a:rPr lang="pt-BR">
+                  <a:rPr lang="en-US">
                     <a:noFill/>
                   </a:rPr>
                   <a:t> </a:t>
@@ -5927,8 +5943,8 @@
         </p:nvSpPr>
         <p:spPr>
           <a:xfrm>
-            <a:off x="6585626" y="1690688"/>
-            <a:ext cx="5442250" cy="5167312"/>
+            <a:off x="5791201" y="1690688"/>
+            <a:ext cx="6324600" cy="5167312"/>
           </a:xfrm>
         </p:spPr>
         <p:txBody>
@@ -5946,7 +5962,7 @@
               <a:t>A </a:t>
             </a:r>
             <a:r>
-              <a:rPr lang="pt-BR" b="1" i="1" dirty="0">
+              <a:rPr lang="pt-BR" b="1" dirty="0">
                 <a:solidFill>
                   <a:srgbClr val="00B050"/>
                 </a:solidFill>
@@ -5962,7 +5978,7 @@
               <a:t> é, geralmente, a </a:t>
             </a:r>
             <a:r>
-              <a:rPr lang="pt-BR" b="1" i="1" dirty="0">
+              <a:rPr lang="pt-BR" b="1" dirty="0">
                 <a:solidFill>
                   <a:srgbClr val="00B050"/>
                 </a:solidFill>
@@ -5988,7 +6004,7 @@
               <a:t>Entretanto, ela pode ser </a:t>
             </a:r>
             <a:r>
-              <a:rPr lang="pt-BR" b="1" i="1" dirty="0">
+              <a:rPr lang="pt-BR" b="1" dirty="0">
                 <a:solidFill>
                   <a:srgbClr val="00B050"/>
                 </a:solidFill>
@@ -5996,7 +6012,7 @@
               <a:t>enganosa com problemas </a:t>
             </a:r>
             <a:r>
-              <a:rPr lang="pt-BR" b="1" i="1" dirty="0">
+              <a:rPr lang="pt-BR" b="1" dirty="0">
                 <a:solidFill>
                   <a:srgbClr val="FF0000"/>
                 </a:solidFill>
@@ -6030,12 +6046,24 @@
           <a:p>
             <a:r>
               <a:rPr lang="pt-BR" dirty="0"/>
-              <a:t>Nesses casos, ela pode nos levar a concluir que um </a:t>
+              <a:t>Nesses casos, ela pode nos levar a </a:t>
             </a:r>
             <a:r>
-              <a:rPr lang="pt-BR" b="1" i="1" dirty="0">
+              <a:rPr lang="pt-BR" b="1" dirty="0">
                 <a:solidFill>
-                  <a:srgbClr val="00B050"/>
+                  <a:schemeClr val="accent2"/>
+                </a:solidFill>
+              </a:rPr>
+              <a:t>concluir</a:t>
+            </a:r>
+            <a:r>
+              <a:rPr lang="pt-BR" dirty="0"/>
+              <a:t> que um </a:t>
+            </a:r>
+            <a:r>
+              <a:rPr lang="pt-BR" b="1" dirty="0">
+                <a:solidFill>
+                  <a:srgbClr val="7030A0"/>
                 </a:solidFill>
               </a:rPr>
               <a:t>classificador ruim é muito bom</a:t>
@@ -6052,8 +6080,8 @@
           </a:p>
         </p:txBody>
       </p:sp>
-      <mc:AlternateContent xmlns:mc="http://schemas.openxmlformats.org/markup-compatibility/2006" xmlns:a14="http://schemas.microsoft.com/office/drawing/2010/main">
-        <mc:Choice Requires="a14">
+      <mc:AlternateContent xmlns:mc="http://schemas.openxmlformats.org/markup-compatibility/2006">
+        <mc:Choice xmlns:a14="http://schemas.microsoft.com/office/drawing/2010/main" Requires="a14">
           <p:sp>
             <p:nvSpPr>
               <p:cNvPr id="4" name="CaixaDeTexto 3">
@@ -6068,7 +6096,7 @@
             </p:nvSpPr>
             <p:spPr>
               <a:xfrm>
-                <a:off x="838200" y="2922836"/>
+                <a:off x="315685" y="3184093"/>
                 <a:ext cx="5057423" cy="1012328"/>
               </a:xfrm>
               <a:prstGeom prst="rect">
@@ -6222,7 +6250,7 @@
             </p:txBody>
           </p:sp>
         </mc:Choice>
-        <mc:Fallback xmlns="">
+        <mc:Fallback>
           <p:sp>
             <p:nvSpPr>
               <p:cNvPr id="4" name="CaixaDeTexto 3">
@@ -6239,7 +6267,7 @@
             </p:nvSpPr>
             <p:spPr>
               <a:xfrm>
-                <a:off x="838200" y="2922836"/>
+                <a:off x="315685" y="3184093"/>
                 <a:ext cx="5057423" cy="1012328"/>
               </a:xfrm>
               <a:prstGeom prst="rect">
@@ -6257,7 +6285,7 @@
               <a:lstStyle/>
               <a:p>
                 <a:r>
-                  <a:rPr lang="pt-BR">
+                  <a:rPr lang="en-US">
                     <a:noFill/>
                   </a:rPr>
                   <a:t> </a:t>
@@ -6325,8 +6353,8 @@
           </a:p>
         </p:txBody>
       </p:sp>
-      <mc:AlternateContent xmlns:mc="http://schemas.openxmlformats.org/markup-compatibility/2006" xmlns:a14="http://schemas.microsoft.com/office/drawing/2010/main">
-        <mc:Choice Requires="a14">
+      <mc:AlternateContent xmlns:mc="http://schemas.openxmlformats.org/markup-compatibility/2006">
+        <mc:Choice xmlns:a14="http://schemas.microsoft.com/office/drawing/2010/main" Requires="a14">
           <p:sp>
             <p:nvSpPr>
               <p:cNvPr id="3" name="Espaço Reservado para Conteúdo 2">
@@ -6791,7 +6819,7 @@
                   <a:t>Portanto, quando temos </a:t>
                 </a:r>
                 <a:r>
-                  <a:rPr lang="pt-BR" b="1" i="1" dirty="0">
+                  <a:rPr lang="pt-BR" b="1" dirty="0">
                     <a:solidFill>
                       <a:srgbClr val="00B050"/>
                     </a:solidFill>
@@ -6799,7 +6827,7 @@
                   <a:t>classes desbalanceadas, precisamos </a:t>
                 </a:r>
                 <a:r>
-                  <a:rPr lang="pt-BR" b="1" i="1" dirty="0">
+                  <a:rPr lang="pt-BR" b="1" dirty="0">
                     <a:solidFill>
                       <a:srgbClr val="7030A0"/>
                     </a:solidFill>
@@ -6817,7 +6845,7 @@
               </a:p>
               <a:p>
                 <a:r>
-                  <a:rPr lang="pt-BR" b="0" i="0" dirty="0">
+                  <a:rPr lang="pt-BR" b="0" dirty="0">
                     <a:solidFill>
                       <a:schemeClr val="tx1"/>
                     </a:solidFill>
@@ -6830,7 +6858,7 @@
             </p:txBody>
           </p:sp>
         </mc:Choice>
-        <mc:Fallback xmlns="">
+        <mc:Fallback>
           <p:sp>
             <p:nvSpPr>
               <p:cNvPr id="3" name="Espaço Reservado para Conteúdo 2">
@@ -6864,7 +6892,7 @@
               <a:lstStyle/>
               <a:p>
                 <a:r>
-                  <a:rPr lang="pt-BR">
+                  <a:rPr lang="en-US">
                     <a:noFill/>
                   </a:rPr>
                   <a:t> </a:t>
@@ -6950,8 +6978,8 @@
         </p:nvSpPr>
         <p:spPr>
           <a:xfrm>
-            <a:off x="4989690" y="1870780"/>
-            <a:ext cx="7066844" cy="4987219"/>
+            <a:off x="5388428" y="1870780"/>
+            <a:ext cx="6668105" cy="4987219"/>
           </a:xfrm>
         </p:spPr>
         <p:txBody>
@@ -6975,7 +7003,7 @@
               <a:t>É uma </a:t>
             </a:r>
             <a:r>
-              <a:rPr lang="pt-BR" b="1" i="1" dirty="0">
+              <a:rPr lang="pt-BR" b="1" dirty="0">
                 <a:solidFill>
                   <a:srgbClr val="00B050"/>
                 </a:solidFill>
@@ -6987,7 +7015,7 @@
               <a:t>para determinar a qualidade do classificador </a:t>
             </a:r>
             <a:r>
-              <a:rPr lang="pt-BR" b="1" i="1" dirty="0">
+              <a:rPr lang="pt-BR" b="1" dirty="0">
                 <a:solidFill>
                   <a:srgbClr val="00B050"/>
                 </a:solidFill>
@@ -6995,7 +7023,7 @@
               <a:t>quando os custos de </a:t>
             </a:r>
             <a:r>
-              <a:rPr lang="pt-BR" b="1" i="1" dirty="0">
+              <a:rPr lang="pt-BR" b="1" dirty="0">
                 <a:solidFill>
                   <a:srgbClr val="FF0000"/>
                 </a:solidFill>
@@ -7003,7 +7031,7 @@
               <a:t>falsos positivos</a:t>
             </a:r>
             <a:r>
-              <a:rPr lang="pt-BR" b="1" i="1" dirty="0">
+              <a:rPr lang="pt-BR" b="1" dirty="0">
                 <a:solidFill>
                   <a:srgbClr val="00B050"/>
                 </a:solidFill>
@@ -7012,95 +7040,13 @@
             </a:r>
             <a:r>
               <a:rPr lang="pt-BR" dirty="0"/>
-              <a:t>. </a:t>
-            </a:r>
-          </a:p>
-          <a:p>
-            <a:pPr lvl="1">
-              <a:buFont typeface="Wingdings" panose="05000000000000000000" pitchFamily="2" charset="2"/>
-              <a:buChar char="§"/>
-            </a:pPr>
-            <a:r>
-              <a:rPr lang="pt-BR" dirty="0"/>
-              <a:t>Por exemplo, na classificação de </a:t>
-            </a:r>
-            <a:r>
-              <a:rPr lang="pt-BR" b="1" i="1" dirty="0"/>
-              <a:t>spams</a:t>
-            </a:r>
-            <a:r>
-              <a:rPr lang="pt-BR" dirty="0"/>
-              <a:t> (</a:t>
-            </a:r>
-            <a:r>
-              <a:rPr lang="pt-BR" b="1" i="1" dirty="0"/>
-              <a:t>verdadeiro positivo</a:t>
-            </a:r>
-            <a:r>
-              <a:rPr lang="pt-BR" dirty="0"/>
-              <a:t>), um </a:t>
-            </a:r>
-            <a:r>
-              <a:rPr lang="pt-BR" b="1" i="1" dirty="0"/>
-              <a:t>falso positivo </a:t>
-            </a:r>
-            <a:r>
-              <a:rPr lang="pt-BR" dirty="0"/>
-              <a:t>significa que um </a:t>
-            </a:r>
-            <a:r>
-              <a:rPr lang="pt-BR" b="1" i="1" dirty="0" err="1"/>
-              <a:t>ham</a:t>
-            </a:r>
-            <a:r>
-              <a:rPr lang="pt-BR" dirty="0"/>
-              <a:t> (</a:t>
-            </a:r>
-            <a:r>
-              <a:rPr lang="pt-BR" b="1" i="1" dirty="0"/>
-              <a:t>verdadeiro negativo</a:t>
-            </a:r>
-            <a:r>
-              <a:rPr lang="pt-BR" dirty="0"/>
-              <a:t>) foi classificado como </a:t>
-            </a:r>
-            <a:r>
-              <a:rPr lang="pt-BR" b="1" i="1" dirty="0"/>
-              <a:t>spam</a:t>
-            </a:r>
-            <a:r>
-              <a:rPr lang="pt-BR" dirty="0"/>
-              <a:t>. O usuário de </a:t>
-            </a:r>
-            <a:r>
-              <a:rPr lang="pt-BR" i="1" dirty="0" err="1"/>
-              <a:t>email</a:t>
-            </a:r>
-            <a:r>
-              <a:rPr lang="pt-BR" dirty="0"/>
-              <a:t> pode perder </a:t>
-            </a:r>
-            <a:r>
-              <a:rPr lang="pt-BR" i="1" dirty="0" err="1"/>
-              <a:t>emails</a:t>
-            </a:r>
-            <a:r>
-              <a:rPr lang="pt-BR" dirty="0"/>
-              <a:t> importantes se a </a:t>
-            </a:r>
-            <a:r>
-              <a:rPr lang="pt-BR" b="1" i="1" dirty="0"/>
-              <a:t>precisão</a:t>
-            </a:r>
-            <a:r>
-              <a:rPr lang="pt-BR" dirty="0"/>
-              <a:t> for baixa.</a:t>
+              <a:t>.</a:t>
             </a:r>
           </a:p>
         </p:txBody>
       </p:sp>
-      <mc:AlternateContent xmlns:mc="http://schemas.openxmlformats.org/markup-compatibility/2006" xmlns:a14="http://schemas.microsoft.com/office/drawing/2010/main">
-        <mc:Choice Requires="a14">
+      <mc:AlternateContent xmlns:mc="http://schemas.openxmlformats.org/markup-compatibility/2006">
+        <mc:Choice xmlns:a14="http://schemas.microsoft.com/office/drawing/2010/main" Requires="a14">
           <p:sp>
             <p:nvSpPr>
               <p:cNvPr id="5" name="CaixaDeTexto 4">
@@ -7115,7 +7061,7 @@
             </p:nvSpPr>
             <p:spPr>
               <a:xfrm>
-                <a:off x="654753" y="3341865"/>
+                <a:off x="571901" y="3254780"/>
                 <a:ext cx="3939823" cy="1022524"/>
               </a:xfrm>
               <a:prstGeom prst="rect">
@@ -7220,7 +7166,7 @@
             </p:txBody>
           </p:sp>
         </mc:Choice>
-        <mc:Fallback xmlns="">
+        <mc:Fallback>
           <p:sp>
             <p:nvSpPr>
               <p:cNvPr id="5" name="CaixaDeTexto 4">
@@ -7237,7 +7183,7 @@
             </p:nvSpPr>
             <p:spPr>
               <a:xfrm>
-                <a:off x="654753" y="3341865"/>
+                <a:off x="571901" y="3254780"/>
                 <a:ext cx="3939823" cy="1022524"/>
               </a:xfrm>
               <a:prstGeom prst="rect">
@@ -7255,7 +7201,7 @@
               <a:lstStyle/>
               <a:p>
                 <a:r>
-                  <a:rPr lang="pt-BR">
+                  <a:rPr lang="en-US">
                     <a:noFill/>
                   </a:rPr>
                   <a:t> </a:t>
@@ -7703,6 +7649,791 @@
   <p:cSld>
     <p:spTree>
       <p:nvGrpSpPr>
+        <p:cNvPr id="1" name="">
+          <a:extLst>
+            <a:ext uri="{FF2B5EF4-FFF2-40B4-BE49-F238E27FC236}">
+              <a16:creationId xmlns:a16="http://schemas.microsoft.com/office/drawing/2014/main" id="{D6F94076-840C-F8A0-1EBA-0559789D9928}"/>
+            </a:ext>
+          </a:extLst>
+        </p:cNvPr>
+        <p:cNvGrpSpPr/>
+        <p:nvPr/>
+      </p:nvGrpSpPr>
+      <p:grpSpPr>
+        <a:xfrm>
+          <a:off x="0" y="0"/>
+          <a:ext cx="0" cy="0"/>
+          <a:chOff x="0" y="0"/>
+          <a:chExt cx="0" cy="0"/>
+        </a:xfrm>
+      </p:grpSpPr>
+      <p:sp>
+        <p:nvSpPr>
+          <p:cNvPr id="2" name="Título 1">
+            <a:extLst>
+              <a:ext uri="{FF2B5EF4-FFF2-40B4-BE49-F238E27FC236}">
+                <a16:creationId xmlns:a16="http://schemas.microsoft.com/office/drawing/2014/main" id="{5BE837E6-3644-108F-C376-E31809129570}"/>
+              </a:ext>
+            </a:extLst>
+          </p:cNvPr>
+          <p:cNvSpPr>
+            <a:spLocks noGrp="1"/>
+          </p:cNvSpPr>
+          <p:nvPr>
+            <p:ph type="title"/>
+          </p:nvPr>
+        </p:nvSpPr>
+        <p:spPr/>
+        <p:txBody>
+          <a:bodyPr/>
+          <a:lstStyle/>
+          <a:p>
+            <a:r>
+              <a:rPr lang="pt-BR" dirty="0"/>
+              <a:t>Precisão</a:t>
+            </a:r>
+          </a:p>
+        </p:txBody>
+      </p:sp>
+      <p:sp>
+        <p:nvSpPr>
+          <p:cNvPr id="3" name="Espaço Reservado para Conteúdo 2">
+            <a:extLst>
+              <a:ext uri="{FF2B5EF4-FFF2-40B4-BE49-F238E27FC236}">
+                <a16:creationId xmlns:a16="http://schemas.microsoft.com/office/drawing/2014/main" id="{1ED50CCD-BAF9-D705-F6DD-4E87FC3E6A8D}"/>
+              </a:ext>
+            </a:extLst>
+          </p:cNvPr>
+          <p:cNvSpPr>
+            <a:spLocks noGrp="1"/>
+          </p:cNvSpPr>
+          <p:nvPr>
+            <p:ph idx="1"/>
+          </p:nvPr>
+        </p:nvSpPr>
+        <p:spPr>
+          <a:xfrm>
+            <a:off x="4989690" y="1870780"/>
+            <a:ext cx="7115224" cy="4987219"/>
+          </a:xfrm>
+        </p:spPr>
+        <p:txBody>
+          <a:bodyPr>
+            <a:normAutofit/>
+          </a:bodyPr>
+          <a:lstStyle/>
+          <a:p>
+            <a:r>
+              <a:rPr lang="pt-BR" dirty="0"/>
+              <a:t>Por exemplo, na classificação de </a:t>
+            </a:r>
+            <a:r>
+              <a:rPr lang="pt-BR" b="1" i="1" dirty="0"/>
+              <a:t>spams</a:t>
+            </a:r>
+            <a:r>
+              <a:rPr lang="pt-BR" dirty="0"/>
+              <a:t> onde o </a:t>
+            </a:r>
+            <a:r>
+              <a:rPr lang="pt-BR" b="1" dirty="0"/>
+              <a:t>verdadeiro positivo</a:t>
+            </a:r>
+            <a:r>
+              <a:rPr lang="pt-BR" dirty="0"/>
+              <a:t> é um </a:t>
+            </a:r>
+            <a:r>
+              <a:rPr lang="pt-BR" dirty="0" err="1"/>
+              <a:t>email</a:t>
+            </a:r>
+            <a:r>
+              <a:rPr lang="pt-BR" dirty="0"/>
+              <a:t> de </a:t>
+            </a:r>
+            <a:r>
+              <a:rPr lang="pt-BR" b="1" i="1" dirty="0"/>
+              <a:t>spam</a:t>
+            </a:r>
+            <a:r>
+              <a:rPr lang="pt-BR" dirty="0"/>
+              <a:t>: </a:t>
+            </a:r>
+          </a:p>
+          <a:p>
+            <a:pPr lvl="1">
+              <a:buFont typeface="Wingdings" panose="05000000000000000000" pitchFamily="2" charset="2"/>
+              <a:buChar char="§"/>
+            </a:pPr>
+            <a:r>
+              <a:rPr lang="pt-BR" dirty="0"/>
+              <a:t>Um </a:t>
+            </a:r>
+            <a:r>
+              <a:rPr lang="pt-BR" b="1" dirty="0"/>
+              <a:t>falso positivo </a:t>
+            </a:r>
+            <a:r>
+              <a:rPr lang="pt-BR" dirty="0"/>
+              <a:t>significa que um </a:t>
+            </a:r>
+            <a:r>
+              <a:rPr lang="pt-BR" b="1" i="1" dirty="0" err="1"/>
+              <a:t>ham</a:t>
+            </a:r>
+            <a:r>
+              <a:rPr lang="pt-BR" dirty="0"/>
+              <a:t> (</a:t>
+            </a:r>
+            <a:r>
+              <a:rPr lang="pt-BR" b="1" dirty="0"/>
+              <a:t>verdadeiro negativo</a:t>
+            </a:r>
+            <a:r>
+              <a:rPr lang="pt-BR" dirty="0"/>
+              <a:t>) foi classificado como </a:t>
+            </a:r>
+            <a:r>
+              <a:rPr lang="pt-BR" b="1" i="1" dirty="0"/>
+              <a:t>spam</a:t>
+            </a:r>
+            <a:r>
+              <a:rPr lang="pt-BR" dirty="0"/>
+              <a:t>. </a:t>
+            </a:r>
+          </a:p>
+          <a:p>
+            <a:pPr lvl="1">
+              <a:buFont typeface="Wingdings" panose="05000000000000000000" pitchFamily="2" charset="2"/>
+              <a:buChar char="§"/>
+            </a:pPr>
+            <a:r>
+              <a:rPr lang="pt-BR" dirty="0"/>
+              <a:t>Nesse caso, o cliente do serviço de </a:t>
+            </a:r>
+            <a:r>
+              <a:rPr lang="pt-BR" dirty="0" err="1"/>
+              <a:t>email</a:t>
+            </a:r>
+            <a:r>
+              <a:rPr lang="pt-BR" dirty="0"/>
+              <a:t> pode perder correspondências importantes se a </a:t>
+            </a:r>
+            <a:r>
+              <a:rPr lang="pt-BR" b="1" dirty="0"/>
+              <a:t>precisão</a:t>
+            </a:r>
+            <a:r>
+              <a:rPr lang="pt-BR" dirty="0"/>
+              <a:t> for baixa.</a:t>
+            </a:r>
+          </a:p>
+        </p:txBody>
+      </p:sp>
+      <mc:AlternateContent xmlns:mc="http://schemas.openxmlformats.org/markup-compatibility/2006" xmlns:a14="http://schemas.microsoft.com/office/drawing/2010/main">
+        <mc:Choice Requires="a14">
+          <p:sp>
+            <p:nvSpPr>
+              <p:cNvPr id="5" name="CaixaDeTexto 4">
+                <a:extLst>
+                  <a:ext uri="{FF2B5EF4-FFF2-40B4-BE49-F238E27FC236}">
+                    <a16:creationId xmlns:a16="http://schemas.microsoft.com/office/drawing/2014/main" id="{704D3BDA-16E0-C30B-2504-2D58C9069DF7}"/>
+                  </a:ext>
+                </a:extLst>
+              </p:cNvPr>
+              <p:cNvSpPr txBox="1"/>
+              <p:nvPr/>
+            </p:nvSpPr>
+            <p:spPr>
+              <a:xfrm>
+                <a:off x="654753" y="3341865"/>
+                <a:ext cx="3939823" cy="1022524"/>
+              </a:xfrm>
+              <a:prstGeom prst="rect">
+                <a:avLst/>
+              </a:prstGeom>
+              <a:noFill/>
+            </p:spPr>
+            <p:txBody>
+              <a:bodyPr wrap="square">
+                <a:spAutoFit/>
+              </a:bodyPr>
+              <a:lstStyle/>
+              <a:p>
+                <a:pPr/>
+                <a14:m>
+                  <m:oMathPara xmlns:m="http://schemas.openxmlformats.org/officeDocument/2006/math">
+                    <m:oMathParaPr>
+                      <m:jc m:val="centerGroup"/>
+                    </m:oMathParaPr>
+                    <m:oMath xmlns:m="http://schemas.openxmlformats.org/officeDocument/2006/math">
+                      <m:r>
+                        <m:rPr>
+                          <m:sty m:val="p"/>
+                        </m:rPr>
+                        <a:rPr lang="pt-BR" sz="3200" b="0" i="0" smtClean="0">
+                          <a:latin typeface="Cambria Math" panose="02040503050406030204" pitchFamily="18" charset="0"/>
+                        </a:rPr>
+                        <m:t>precis</m:t>
+                      </m:r>
+                      <m:r>
+                        <a:rPr lang="pt-BR" sz="3200" b="0" i="0" smtClean="0">
+                          <a:latin typeface="Cambria Math" panose="02040503050406030204" pitchFamily="18" charset="0"/>
+                        </a:rPr>
+                        <m:t>ã</m:t>
+                      </m:r>
+                      <m:r>
+                        <m:rPr>
+                          <m:sty m:val="p"/>
+                        </m:rPr>
+                        <a:rPr lang="pt-BR" sz="3200" b="0" i="0" smtClean="0">
+                          <a:latin typeface="Cambria Math" panose="02040503050406030204" pitchFamily="18" charset="0"/>
+                        </a:rPr>
+                        <m:t>o</m:t>
+                      </m:r>
+                      <m:r>
+                        <a:rPr lang="pt-BR" sz="3200" i="1">
+                          <a:latin typeface="Cambria Math" panose="02040503050406030204" pitchFamily="18" charset="0"/>
+                        </a:rPr>
+                        <m:t>=</m:t>
+                      </m:r>
+                      <m:f>
+                        <m:fPr>
+                          <m:ctrlPr>
+                            <a:rPr lang="pt-BR" sz="3200" i="1">
+                              <a:latin typeface="Cambria Math" panose="02040503050406030204" pitchFamily="18" charset="0"/>
+                            </a:rPr>
+                          </m:ctrlPr>
+                        </m:fPr>
+                        <m:num>
+                          <m:r>
+                            <m:rPr>
+                              <m:sty m:val="p"/>
+                            </m:rPr>
+                            <a:rPr lang="pt-BR" sz="3200" b="0" i="0" smtClean="0">
+                              <a:latin typeface="Cambria Math" panose="02040503050406030204" pitchFamily="18" charset="0"/>
+                            </a:rPr>
+                            <m:t>TP</m:t>
+                          </m:r>
+                        </m:num>
+                        <m:den>
+                          <m:r>
+                            <m:rPr>
+                              <m:sty m:val="p"/>
+                            </m:rPr>
+                            <a:rPr lang="pt-BR" sz="3200" b="0" i="0" smtClean="0">
+                              <a:latin typeface="Cambria Math" panose="02040503050406030204" pitchFamily="18" charset="0"/>
+                            </a:rPr>
+                            <m:t>FP</m:t>
+                          </m:r>
+                          <m:r>
+                            <a:rPr lang="pt-BR" sz="3200" b="0" i="0" smtClean="0">
+                              <a:latin typeface="Cambria Math" panose="02040503050406030204" pitchFamily="18" charset="0"/>
+                            </a:rPr>
+                            <m:t>+</m:t>
+                          </m:r>
+                          <m:r>
+                            <m:rPr>
+                              <m:sty m:val="p"/>
+                            </m:rPr>
+                            <a:rPr lang="pt-BR" sz="3200">
+                              <a:latin typeface="Cambria Math" panose="02040503050406030204" pitchFamily="18" charset="0"/>
+                            </a:rPr>
+                            <m:t>TP</m:t>
+                          </m:r>
+                        </m:den>
+                      </m:f>
+                    </m:oMath>
+                  </m:oMathPara>
+                </a14:m>
+                <a:endParaRPr lang="pt-BR" sz="3200" dirty="0"/>
+              </a:p>
+            </p:txBody>
+          </p:sp>
+        </mc:Choice>
+        <mc:Fallback xmlns="">
+          <p:sp>
+            <p:nvSpPr>
+              <p:cNvPr id="5" name="CaixaDeTexto 4">
+                <a:extLst>
+                  <a:ext uri="{FF2B5EF4-FFF2-40B4-BE49-F238E27FC236}">
+                    <a16:creationId xmlns:a16="http://schemas.microsoft.com/office/drawing/2014/main" id="{A3376B35-7B47-DF75-A545-B75926FB5BB2}"/>
+                  </a:ext>
+                </a:extLst>
+              </p:cNvPr>
+              <p:cNvSpPr txBox="1">
+                <a:spLocks noRot="1" noChangeAspect="1" noMove="1" noResize="1" noEditPoints="1" noAdjustHandles="1" noChangeArrowheads="1" noChangeShapeType="1" noTextEdit="1"/>
+              </p:cNvSpPr>
+              <p:nvPr/>
+            </p:nvSpPr>
+            <p:spPr>
+              <a:xfrm>
+                <a:off x="654753" y="3341865"/>
+                <a:ext cx="3939823" cy="1022524"/>
+              </a:xfrm>
+              <a:prstGeom prst="rect">
+                <a:avLst/>
+              </a:prstGeom>
+              <a:blipFill>
+                <a:blip r:embed="rId2"/>
+                <a:stretch>
+                  <a:fillRect/>
+                </a:stretch>
+              </a:blipFill>
+            </p:spPr>
+            <p:txBody>
+              <a:bodyPr/>
+              <a:lstStyle/>
+              <a:p>
+                <a:r>
+                  <a:rPr lang="pt-BR">
+                    <a:noFill/>
+                  </a:rPr>
+                  <a:t> </a:t>
+                </a:r>
+              </a:p>
+            </p:txBody>
+          </p:sp>
+        </mc:Fallback>
+      </mc:AlternateContent>
+      <p:graphicFrame>
+        <p:nvGraphicFramePr>
+          <p:cNvPr id="4" name="Tabela 5">
+            <a:extLst>
+              <a:ext uri="{FF2B5EF4-FFF2-40B4-BE49-F238E27FC236}">
+                <a16:creationId xmlns:a16="http://schemas.microsoft.com/office/drawing/2014/main" id="{72E4F38E-A7EF-429F-6B31-B7E993C4BB48}"/>
+              </a:ext>
+            </a:extLst>
+          </p:cNvPr>
+          <p:cNvGraphicFramePr>
+            <a:graphicFrameLocks noGrp="1"/>
+          </p:cNvGraphicFramePr>
+          <p:nvPr/>
+        </p:nvGraphicFramePr>
+        <p:xfrm>
+          <a:off x="1840088" y="5230813"/>
+          <a:ext cx="1794932" cy="914400"/>
+        </p:xfrm>
+        <a:graphic>
+          <a:graphicData uri="http://schemas.openxmlformats.org/drawingml/2006/table">
+            <a:tbl>
+              <a:tblPr firstRow="1" bandRow="1">
+                <a:tableStyleId>{5C22544A-7EE6-4342-B048-85BDC9FD1C3A}</a:tableStyleId>
+              </a:tblPr>
+              <a:tblGrid>
+                <a:gridCol w="897466">
+                  <a:extLst>
+                    <a:ext uri="{9D8B030D-6E8A-4147-A177-3AD203B41FA5}">
+                      <a16:colId xmlns:a16="http://schemas.microsoft.com/office/drawing/2014/main" val="2780398905"/>
+                    </a:ext>
+                  </a:extLst>
+                </a:gridCol>
+                <a:gridCol w="897466">
+                  <a:extLst>
+                    <a:ext uri="{9D8B030D-6E8A-4147-A177-3AD203B41FA5}">
+                      <a16:colId xmlns:a16="http://schemas.microsoft.com/office/drawing/2014/main" val="1752542230"/>
+                    </a:ext>
+                  </a:extLst>
+                </a:gridCol>
+              </a:tblGrid>
+              <a:tr h="431007">
+                <a:tc>
+                  <a:txBody>
+                    <a:bodyPr/>
+                    <a:lstStyle/>
+                    <a:p>
+                      <a:pPr marL="0" marR="0" lvl="0" indent="0" algn="ctr" defTabSz="914400" rtl="0" eaLnBrk="1" fontAlgn="auto" latinLnBrk="0" hangingPunct="1">
+                        <a:lnSpc>
+                          <a:spcPct val="100000"/>
+                        </a:lnSpc>
+                        <a:spcBef>
+                          <a:spcPts val="0"/>
+                        </a:spcBef>
+                        <a:spcAft>
+                          <a:spcPts val="0"/>
+                        </a:spcAft>
+                        <a:buClrTx/>
+                        <a:buSzTx/>
+                        <a:buFontTx/>
+                        <a:buNone/>
+                        <a:tabLst/>
+                        <a:defRPr/>
+                      </a:pPr>
+                      <a:r>
+                        <a:rPr lang="pt-BR" sz="2400" b="1" dirty="0">
+                          <a:solidFill>
+                            <a:srgbClr val="FF0000"/>
+                          </a:solidFill>
+                          <a:effectLst/>
+                        </a:rPr>
+                        <a:t>TN</a:t>
+                      </a:r>
+                    </a:p>
+                  </a:txBody>
+                  <a:tcPr>
+                    <a:lnL w="12700" cap="flat" cmpd="sng" algn="ctr">
+                      <a:solidFill>
+                        <a:schemeClr val="tx1"/>
+                      </a:solidFill>
+                      <a:prstDash val="solid"/>
+                      <a:round/>
+                      <a:headEnd type="none" w="med" len="med"/>
+                      <a:tailEnd type="none" w="med" len="med"/>
+                    </a:lnL>
+                    <a:lnR w="12700" cap="flat" cmpd="sng" algn="ctr">
+                      <a:solidFill>
+                        <a:schemeClr val="tx1"/>
+                      </a:solidFill>
+                      <a:prstDash val="solid"/>
+                      <a:round/>
+                      <a:headEnd type="none" w="med" len="med"/>
+                      <a:tailEnd type="none" w="med" len="med"/>
+                    </a:lnR>
+                    <a:lnT w="12700" cap="flat" cmpd="sng" algn="ctr">
+                      <a:solidFill>
+                        <a:schemeClr val="tx1"/>
+                      </a:solidFill>
+                      <a:prstDash val="solid"/>
+                      <a:round/>
+                      <a:headEnd type="none" w="med" len="med"/>
+                      <a:tailEnd type="none" w="med" len="med"/>
+                    </a:lnT>
+                    <a:lnB w="12700" cap="flat" cmpd="sng" algn="ctr">
+                      <a:solidFill>
+                        <a:schemeClr val="tx1"/>
+                      </a:solidFill>
+                      <a:prstDash val="solid"/>
+                      <a:round/>
+                      <a:headEnd type="none" w="med" len="med"/>
+                      <a:tailEnd type="none" w="med" len="med"/>
+                    </a:lnB>
+                    <a:noFill/>
+                  </a:tcPr>
+                </a:tc>
+                <a:tc>
+                  <a:txBody>
+                    <a:bodyPr/>
+                    <a:lstStyle/>
+                    <a:p>
+                      <a:pPr marL="0" marR="0" lvl="0" indent="0" algn="ctr" defTabSz="914400" rtl="0" eaLnBrk="1" fontAlgn="auto" latinLnBrk="0" hangingPunct="1">
+                        <a:lnSpc>
+                          <a:spcPct val="100000"/>
+                        </a:lnSpc>
+                        <a:spcBef>
+                          <a:spcPts val="0"/>
+                        </a:spcBef>
+                        <a:spcAft>
+                          <a:spcPts val="0"/>
+                        </a:spcAft>
+                        <a:buClrTx/>
+                        <a:buSzTx/>
+                        <a:buFontTx/>
+                        <a:buNone/>
+                        <a:tabLst/>
+                        <a:defRPr/>
+                      </a:pPr>
+                      <a:r>
+                        <a:rPr lang="pt-BR" sz="2400" b="1" kern="1200" dirty="0">
+                          <a:solidFill>
+                            <a:srgbClr val="0000FF"/>
+                          </a:solidFill>
+                          <a:effectLst/>
+                          <a:latin typeface="+mn-lt"/>
+                          <a:ea typeface="+mn-ea"/>
+                          <a:cs typeface="+mn-cs"/>
+                        </a:rPr>
+                        <a:t>FN</a:t>
+                      </a:r>
+                    </a:p>
+                  </a:txBody>
+                  <a:tcPr>
+                    <a:lnL w="12700" cap="flat" cmpd="sng" algn="ctr">
+                      <a:solidFill>
+                        <a:schemeClr val="tx1"/>
+                      </a:solidFill>
+                      <a:prstDash val="solid"/>
+                      <a:round/>
+                      <a:headEnd type="none" w="med" len="med"/>
+                      <a:tailEnd type="none" w="med" len="med"/>
+                    </a:lnL>
+                    <a:lnR w="12700" cap="flat" cmpd="sng" algn="ctr">
+                      <a:solidFill>
+                        <a:schemeClr val="tx1"/>
+                      </a:solidFill>
+                      <a:prstDash val="solid"/>
+                      <a:round/>
+                      <a:headEnd type="none" w="med" len="med"/>
+                      <a:tailEnd type="none" w="med" len="med"/>
+                    </a:lnR>
+                    <a:lnT w="12700" cap="flat" cmpd="sng" algn="ctr">
+                      <a:solidFill>
+                        <a:schemeClr val="tx1"/>
+                      </a:solidFill>
+                      <a:prstDash val="solid"/>
+                      <a:round/>
+                      <a:headEnd type="none" w="med" len="med"/>
+                      <a:tailEnd type="none" w="med" len="med"/>
+                    </a:lnT>
+                    <a:lnB w="12700" cap="flat" cmpd="sng" algn="ctr">
+                      <a:solidFill>
+                        <a:schemeClr val="tx1"/>
+                      </a:solidFill>
+                      <a:prstDash val="solid"/>
+                      <a:round/>
+                      <a:headEnd type="none" w="med" len="med"/>
+                      <a:tailEnd type="none" w="med" len="med"/>
+                    </a:lnB>
+                    <a:noFill/>
+                  </a:tcPr>
+                </a:tc>
+                <a:extLst>
+                  <a:ext uri="{0D108BD9-81ED-4DB2-BD59-A6C34878D82A}">
+                    <a16:rowId xmlns:a16="http://schemas.microsoft.com/office/drawing/2014/main" val="3952155157"/>
+                  </a:ext>
+                </a:extLst>
+              </a:tr>
+              <a:tr h="431007">
+                <a:tc>
+                  <a:txBody>
+                    <a:bodyPr/>
+                    <a:lstStyle/>
+                    <a:p>
+                      <a:pPr marL="0" marR="0" lvl="0" indent="0" algn="ctr" defTabSz="914400" rtl="0" eaLnBrk="1" fontAlgn="auto" latinLnBrk="0" hangingPunct="1">
+                        <a:lnSpc>
+                          <a:spcPct val="100000"/>
+                        </a:lnSpc>
+                        <a:spcBef>
+                          <a:spcPts val="0"/>
+                        </a:spcBef>
+                        <a:spcAft>
+                          <a:spcPts val="0"/>
+                        </a:spcAft>
+                        <a:buClrTx/>
+                        <a:buSzTx/>
+                        <a:buFontTx/>
+                        <a:buNone/>
+                        <a:tabLst/>
+                        <a:defRPr/>
+                      </a:pPr>
+                      <a:r>
+                        <a:rPr lang="pt-BR" sz="2400" b="1" dirty="0">
+                          <a:solidFill>
+                            <a:srgbClr val="0000FF"/>
+                          </a:solidFill>
+                          <a:effectLst/>
+                        </a:rPr>
+                        <a:t>FP</a:t>
+                      </a:r>
+                      <a:endParaRPr lang="pt-BR" sz="2400" b="1" kern="1200" dirty="0">
+                        <a:solidFill>
+                          <a:srgbClr val="0000FF"/>
+                        </a:solidFill>
+                        <a:effectLst/>
+                        <a:latin typeface="+mn-lt"/>
+                        <a:ea typeface="+mn-ea"/>
+                        <a:cs typeface="+mn-cs"/>
+                      </a:endParaRPr>
+                    </a:p>
+                  </a:txBody>
+                  <a:tcPr>
+                    <a:lnL w="12700" cap="flat" cmpd="sng" algn="ctr">
+                      <a:solidFill>
+                        <a:schemeClr val="tx1"/>
+                      </a:solidFill>
+                      <a:prstDash val="solid"/>
+                      <a:round/>
+                      <a:headEnd type="none" w="med" len="med"/>
+                      <a:tailEnd type="none" w="med" len="med"/>
+                    </a:lnL>
+                    <a:lnR w="12700" cap="flat" cmpd="sng" algn="ctr">
+                      <a:solidFill>
+                        <a:schemeClr val="tx1"/>
+                      </a:solidFill>
+                      <a:prstDash val="solid"/>
+                      <a:round/>
+                      <a:headEnd type="none" w="med" len="med"/>
+                      <a:tailEnd type="none" w="med" len="med"/>
+                    </a:lnR>
+                    <a:lnT w="12700" cap="flat" cmpd="sng" algn="ctr">
+                      <a:solidFill>
+                        <a:schemeClr val="tx1"/>
+                      </a:solidFill>
+                      <a:prstDash val="solid"/>
+                      <a:round/>
+                      <a:headEnd type="none" w="med" len="med"/>
+                      <a:tailEnd type="none" w="med" len="med"/>
+                    </a:lnT>
+                    <a:lnB w="12700" cap="flat" cmpd="sng" algn="ctr">
+                      <a:solidFill>
+                        <a:schemeClr val="tx1"/>
+                      </a:solidFill>
+                      <a:prstDash val="solid"/>
+                      <a:round/>
+                      <a:headEnd type="none" w="med" len="med"/>
+                      <a:tailEnd type="none" w="med" len="med"/>
+                    </a:lnB>
+                    <a:noFill/>
+                  </a:tcPr>
+                </a:tc>
+                <a:tc>
+                  <a:txBody>
+                    <a:bodyPr/>
+                    <a:lstStyle/>
+                    <a:p>
+                      <a:pPr marL="0" marR="0" lvl="0" indent="0" algn="ctr" defTabSz="914400" rtl="0" eaLnBrk="1" fontAlgn="auto" latinLnBrk="0" hangingPunct="1">
+                        <a:lnSpc>
+                          <a:spcPct val="100000"/>
+                        </a:lnSpc>
+                        <a:spcBef>
+                          <a:spcPts val="0"/>
+                        </a:spcBef>
+                        <a:spcAft>
+                          <a:spcPts val="0"/>
+                        </a:spcAft>
+                        <a:buClrTx/>
+                        <a:buSzTx/>
+                        <a:buFontTx/>
+                        <a:buNone/>
+                        <a:tabLst/>
+                        <a:defRPr/>
+                      </a:pPr>
+                      <a:r>
+                        <a:rPr lang="pt-BR" sz="2400" b="1" dirty="0">
+                          <a:solidFill>
+                            <a:srgbClr val="00B050"/>
+                          </a:solidFill>
+                          <a:effectLst/>
+                        </a:rPr>
+                        <a:t>TP</a:t>
+                      </a:r>
+                      <a:endParaRPr lang="pt-BR" sz="2400" b="1" dirty="0">
+                        <a:solidFill>
+                          <a:srgbClr val="FF0000"/>
+                        </a:solidFill>
+                        <a:effectLst/>
+                      </a:endParaRPr>
+                    </a:p>
+                  </a:txBody>
+                  <a:tcPr>
+                    <a:lnL w="12700" cap="flat" cmpd="sng" algn="ctr">
+                      <a:solidFill>
+                        <a:schemeClr val="tx1"/>
+                      </a:solidFill>
+                      <a:prstDash val="solid"/>
+                      <a:round/>
+                      <a:headEnd type="none" w="med" len="med"/>
+                      <a:tailEnd type="none" w="med" len="med"/>
+                    </a:lnL>
+                    <a:lnR w="12700" cap="flat" cmpd="sng" algn="ctr">
+                      <a:solidFill>
+                        <a:schemeClr val="tx1"/>
+                      </a:solidFill>
+                      <a:prstDash val="solid"/>
+                      <a:round/>
+                      <a:headEnd type="none" w="med" len="med"/>
+                      <a:tailEnd type="none" w="med" len="med"/>
+                    </a:lnR>
+                    <a:lnT w="12700" cap="flat" cmpd="sng" algn="ctr">
+                      <a:solidFill>
+                        <a:schemeClr val="tx1"/>
+                      </a:solidFill>
+                      <a:prstDash val="solid"/>
+                      <a:round/>
+                      <a:headEnd type="none" w="med" len="med"/>
+                      <a:tailEnd type="none" w="med" len="med"/>
+                    </a:lnT>
+                    <a:lnB w="12700" cap="flat" cmpd="sng" algn="ctr">
+                      <a:solidFill>
+                        <a:schemeClr val="tx1"/>
+                      </a:solidFill>
+                      <a:prstDash val="solid"/>
+                      <a:round/>
+                      <a:headEnd type="none" w="med" len="med"/>
+                      <a:tailEnd type="none" w="med" len="med"/>
+                    </a:lnB>
+                    <a:noFill/>
+                  </a:tcPr>
+                </a:tc>
+                <a:extLst>
+                  <a:ext uri="{0D108BD9-81ED-4DB2-BD59-A6C34878D82A}">
+                    <a16:rowId xmlns:a16="http://schemas.microsoft.com/office/drawing/2014/main" val="2169341992"/>
+                  </a:ext>
+                </a:extLst>
+              </a:tr>
+            </a:tbl>
+          </a:graphicData>
+        </a:graphic>
+      </p:graphicFrame>
+      <p:sp>
+        <p:nvSpPr>
+          <p:cNvPr id="6" name="Retângulo 5">
+            <a:extLst>
+              <a:ext uri="{FF2B5EF4-FFF2-40B4-BE49-F238E27FC236}">
+                <a16:creationId xmlns:a16="http://schemas.microsoft.com/office/drawing/2014/main" id="{7DBCA45D-01DE-F21C-9CC9-EBEE7C31C895}"/>
+              </a:ext>
+            </a:extLst>
+          </p:cNvPr>
+          <p:cNvSpPr/>
+          <p:nvPr/>
+        </p:nvSpPr>
+        <p:spPr>
+          <a:xfrm rot="16200000">
+            <a:off x="2438401" y="4876801"/>
+            <a:ext cx="609602" cy="2081050"/>
+          </a:xfrm>
+          <a:prstGeom prst="rect">
+            <a:avLst/>
+          </a:prstGeom>
+          <a:noFill/>
+          <a:ln w="28575">
+            <a:solidFill>
+              <a:srgbClr val="7030A0"/>
+            </a:solidFill>
+          </a:ln>
+        </p:spPr>
+        <p:style>
+          <a:lnRef idx="2">
+            <a:schemeClr val="accent1">
+              <a:shade val="15000"/>
+            </a:schemeClr>
+          </a:lnRef>
+          <a:fillRef idx="1">
+            <a:schemeClr val="accent1"/>
+          </a:fillRef>
+          <a:effectRef idx="0">
+            <a:schemeClr val="accent1"/>
+          </a:effectRef>
+          <a:fontRef idx="minor">
+            <a:schemeClr val="lt1"/>
+          </a:fontRef>
+        </p:style>
+        <p:txBody>
+          <a:bodyPr rtlCol="0" anchor="ctr"/>
+          <a:lstStyle/>
+          <a:p>
+            <a:pPr algn="ctr"/>
+            <a:endParaRPr lang="pt-BR"/>
+          </a:p>
+        </p:txBody>
+      </p:sp>
+    </p:spTree>
+    <p:extLst>
+      <p:ext uri="{BB962C8B-B14F-4D97-AF65-F5344CB8AC3E}">
+        <p14:creationId xmlns:p14="http://schemas.microsoft.com/office/powerpoint/2010/main" val="912256420"/>
+      </p:ext>
+    </p:extLst>
+  </p:cSld>
+  <p:clrMapOvr>
+    <a:masterClrMapping/>
+  </p:clrMapOvr>
+</p:sld>
+</file>
+
+<file path=ppt/slides/slide16.xml><?xml version="1.0" encoding="utf-8"?>
+<p:sld xmlns:a="http://schemas.openxmlformats.org/drawingml/2006/main" xmlns:r="http://schemas.openxmlformats.org/officeDocument/2006/relationships" xmlns:p="http://schemas.openxmlformats.org/presentationml/2006/main">
+  <p:cSld>
+    <p:spTree>
+      <p:nvGrpSpPr>
         <p:cNvPr id="1" name=""/>
         <p:cNvGrpSpPr/>
         <p:nvPr/>
@@ -7761,13 +8492,13 @@
         </p:nvSpPr>
         <p:spPr>
           <a:xfrm>
-            <a:off x="4730045" y="1825624"/>
-            <a:ext cx="7326490" cy="5032375"/>
+            <a:off x="4730044" y="1825624"/>
+            <a:ext cx="7374869" cy="5032375"/>
           </a:xfrm>
         </p:spPr>
         <p:txBody>
           <a:bodyPr>
-            <a:normAutofit lnSpcReduction="10000"/>
+            <a:normAutofit/>
           </a:bodyPr>
           <a:lstStyle/>
           <a:p>
@@ -7777,9 +8508,17 @@
             </a:r>
             <a:r>
               <a:rPr lang="pt-BR" dirty="0"/>
-              <a:t> ou sensibilidade é a proporção de exemplos da classe positiva corretamente classificados.</a:t>
+              <a:t> ou </a:t>
             </a:r>
-            <a:endParaRPr lang="pt-BR" b="1" i="1" dirty="0"/>
+            <a:r>
+              <a:rPr lang="pt-BR" b="1" i="1" dirty="0"/>
+              <a:t>sensibilidade</a:t>
+            </a:r>
+            <a:r>
+              <a:rPr lang="pt-BR" dirty="0"/>
+              <a:t> é a proporção de exemplos da classe positiva corretamente classificados.</a:t>
+            </a:r>
+            <a:endParaRPr lang="pt-BR" b="1" dirty="0"/>
           </a:p>
           <a:p>
             <a:r>
@@ -7802,7 +8541,7 @@
               <a:t>É uma </a:t>
             </a:r>
             <a:r>
-              <a:rPr lang="pt-BR" b="1" i="1" dirty="0">
+              <a:rPr lang="pt-BR" b="1" dirty="0">
                 <a:solidFill>
                   <a:srgbClr val="00B050"/>
                 </a:solidFill>
@@ -7814,7 +8553,7 @@
               <a:t>para determinar a qualidade de um classificador </a:t>
             </a:r>
             <a:r>
-              <a:rPr lang="pt-BR" b="1" i="1" dirty="0">
+              <a:rPr lang="pt-BR" b="1" dirty="0">
                 <a:solidFill>
                   <a:srgbClr val="00B050"/>
                 </a:solidFill>
@@ -7822,7 +8561,7 @@
               <a:t>quando os custos de </a:t>
             </a:r>
             <a:r>
-              <a:rPr lang="pt-BR" b="1" i="1" dirty="0">
+              <a:rPr lang="pt-BR" b="1" dirty="0">
                 <a:solidFill>
                   <a:srgbClr val="FF0000"/>
                 </a:solidFill>
@@ -7830,7 +8569,7 @@
               <a:t>falsos negativos</a:t>
             </a:r>
             <a:r>
-              <a:rPr lang="pt-BR" b="1" i="1" dirty="0">
+              <a:rPr lang="pt-BR" b="1" dirty="0">
                 <a:solidFill>
                   <a:srgbClr val="00B050"/>
                 </a:solidFill>
@@ -7840,40 +8579,6 @@
             <a:r>
               <a:rPr lang="pt-BR" dirty="0"/>
               <a:t>.</a:t>
-            </a:r>
-          </a:p>
-          <a:p>
-            <a:pPr lvl="1">
-              <a:buFont typeface="Wingdings" panose="05000000000000000000" pitchFamily="2" charset="2"/>
-              <a:buChar char="§"/>
-            </a:pPr>
-            <a:r>
-              <a:rPr lang="pt-BR" dirty="0"/>
-              <a:t>Por exemplo, na classificação de doenças, se um paciente doente (</a:t>
-            </a:r>
-            <a:r>
-              <a:rPr lang="pt-BR" b="1" i="1" dirty="0"/>
-              <a:t>verdadeiro positivo</a:t>
-            </a:r>
-            <a:r>
-              <a:rPr lang="pt-BR" dirty="0"/>
-              <a:t>) for classificado como não doente (</a:t>
-            </a:r>
-            <a:r>
-              <a:rPr lang="pt-BR" b="1" i="1" dirty="0"/>
-              <a:t>falso negativo</a:t>
-            </a:r>
-            <a:r>
-              <a:rPr lang="pt-BR" dirty="0"/>
-              <a:t>). O custo associado ao </a:t>
-            </a:r>
-            <a:r>
-              <a:rPr lang="pt-BR" b="1" i="1" dirty="0"/>
-              <a:t>falso negativo </a:t>
-            </a:r>
-            <a:r>
-              <a:rPr lang="pt-BR" dirty="0"/>
-              <a:t>será extremamente alto se a doença for contagiosa.</a:t>
             </a:r>
           </a:p>
         </p:txBody>
@@ -8459,7 +9164,726 @@
 </p:sld>
 </file>
 
-<file path=ppt/slides/slide16.xml><?xml version="1.0" encoding="utf-8"?>
+<file path=ppt/slides/slide17.xml><?xml version="1.0" encoding="utf-8"?>
+<p:sld xmlns:a="http://schemas.openxmlformats.org/drawingml/2006/main" xmlns:r="http://schemas.openxmlformats.org/officeDocument/2006/relationships" xmlns:p="http://schemas.openxmlformats.org/presentationml/2006/main">
+  <p:cSld>
+    <p:spTree>
+      <p:nvGrpSpPr>
+        <p:cNvPr id="1" name="">
+          <a:extLst>
+            <a:ext uri="{FF2B5EF4-FFF2-40B4-BE49-F238E27FC236}">
+              <a16:creationId xmlns:a16="http://schemas.microsoft.com/office/drawing/2014/main" id="{E1608E56-1063-9535-583F-68F98BEED64E}"/>
+            </a:ext>
+          </a:extLst>
+        </p:cNvPr>
+        <p:cNvGrpSpPr/>
+        <p:nvPr/>
+      </p:nvGrpSpPr>
+      <p:grpSpPr>
+        <a:xfrm>
+          <a:off x="0" y="0"/>
+          <a:ext cx="0" cy="0"/>
+          <a:chOff x="0" y="0"/>
+          <a:chExt cx="0" cy="0"/>
+        </a:xfrm>
+      </p:grpSpPr>
+      <p:sp>
+        <p:nvSpPr>
+          <p:cNvPr id="2" name="Título 1">
+            <a:extLst>
+              <a:ext uri="{FF2B5EF4-FFF2-40B4-BE49-F238E27FC236}">
+                <a16:creationId xmlns:a16="http://schemas.microsoft.com/office/drawing/2014/main" id="{7B281AC0-3FAB-E1EC-DE8A-76F8FBB33FFF}"/>
+              </a:ext>
+            </a:extLst>
+          </p:cNvPr>
+          <p:cNvSpPr>
+            <a:spLocks noGrp="1"/>
+          </p:cNvSpPr>
+          <p:nvPr>
+            <p:ph type="title"/>
+          </p:nvPr>
+        </p:nvSpPr>
+        <p:spPr/>
+        <p:txBody>
+          <a:bodyPr/>
+          <a:lstStyle/>
+          <a:p>
+            <a:r>
+              <a:rPr lang="pt-BR" i="1" dirty="0"/>
+              <a:t>Recall</a:t>
+            </a:r>
+          </a:p>
+        </p:txBody>
+      </p:sp>
+      <p:sp>
+        <p:nvSpPr>
+          <p:cNvPr id="3" name="Espaço Reservado para Conteúdo 2">
+            <a:extLst>
+              <a:ext uri="{FF2B5EF4-FFF2-40B4-BE49-F238E27FC236}">
+                <a16:creationId xmlns:a16="http://schemas.microsoft.com/office/drawing/2014/main" id="{4AA4931E-FED8-1E19-BC1E-B1813EAF8984}"/>
+              </a:ext>
+            </a:extLst>
+          </p:cNvPr>
+          <p:cNvSpPr>
+            <a:spLocks noGrp="1"/>
+          </p:cNvSpPr>
+          <p:nvPr>
+            <p:ph idx="1"/>
+          </p:nvPr>
+        </p:nvSpPr>
+        <p:spPr>
+          <a:xfrm>
+            <a:off x="4730044" y="1825624"/>
+            <a:ext cx="7461955" cy="5032375"/>
+          </a:xfrm>
+        </p:spPr>
+        <p:txBody>
+          <a:bodyPr>
+            <a:normAutofit/>
+          </a:bodyPr>
+          <a:lstStyle/>
+          <a:p>
+            <a:r>
+              <a:rPr lang="pt-BR" dirty="0"/>
+              <a:t>Por exemplo, na classificação de </a:t>
+            </a:r>
+            <a:r>
+              <a:rPr lang="pt-BR" b="1" dirty="0"/>
+              <a:t>doenças</a:t>
+            </a:r>
+            <a:r>
+              <a:rPr lang="pt-BR" dirty="0"/>
+              <a:t>:</a:t>
+            </a:r>
+          </a:p>
+          <a:p>
+            <a:pPr lvl="1">
+              <a:buFont typeface="Wingdings" panose="05000000000000000000" pitchFamily="2" charset="2"/>
+              <a:buChar char="§"/>
+            </a:pPr>
+            <a:r>
+              <a:rPr lang="pt-BR" dirty="0"/>
+              <a:t>Se um paciente doente (</a:t>
+            </a:r>
+            <a:r>
+              <a:rPr lang="pt-BR" b="1" dirty="0"/>
+              <a:t>verdadeiro positivo</a:t>
+            </a:r>
+            <a:r>
+              <a:rPr lang="pt-BR" dirty="0"/>
+              <a:t>) for classificado como não doente (</a:t>
+            </a:r>
+            <a:r>
+              <a:rPr lang="pt-BR" b="1" dirty="0"/>
+              <a:t>falso negativo</a:t>
+            </a:r>
+            <a:r>
+              <a:rPr lang="pt-BR" dirty="0"/>
+              <a:t>). </a:t>
+            </a:r>
+          </a:p>
+          <a:p>
+            <a:pPr lvl="1">
+              <a:buFont typeface="Wingdings" panose="05000000000000000000" pitchFamily="2" charset="2"/>
+              <a:buChar char="§"/>
+            </a:pPr>
+            <a:r>
+              <a:rPr lang="pt-BR" dirty="0"/>
+              <a:t>O custo associado ao </a:t>
+            </a:r>
+            <a:r>
+              <a:rPr lang="pt-BR" b="1" dirty="0"/>
+              <a:t>falso negativo </a:t>
+            </a:r>
+            <a:r>
+              <a:rPr lang="pt-BR" dirty="0"/>
+              <a:t>será extremamente alto se a doença for contagiosa.</a:t>
+            </a:r>
+          </a:p>
+        </p:txBody>
+      </p:sp>
+      <mc:AlternateContent xmlns:mc="http://schemas.openxmlformats.org/markup-compatibility/2006" xmlns:a14="http://schemas.microsoft.com/office/drawing/2010/main">
+        <mc:Choice Requires="a14">
+          <p:sp>
+            <p:nvSpPr>
+              <p:cNvPr id="5" name="CaixaDeTexto 4">
+                <a:extLst>
+                  <a:ext uri="{FF2B5EF4-FFF2-40B4-BE49-F238E27FC236}">
+                    <a16:creationId xmlns:a16="http://schemas.microsoft.com/office/drawing/2014/main" id="{838A3350-B424-FFC8-887E-A4F979401EC1}"/>
+                  </a:ext>
+                </a:extLst>
+              </p:cNvPr>
+              <p:cNvSpPr txBox="1"/>
+              <p:nvPr/>
+            </p:nvSpPr>
+            <p:spPr>
+              <a:xfrm>
+                <a:off x="838200" y="3319287"/>
+                <a:ext cx="3417711" cy="1022524"/>
+              </a:xfrm>
+              <a:prstGeom prst="rect">
+                <a:avLst/>
+              </a:prstGeom>
+              <a:noFill/>
+            </p:spPr>
+            <p:txBody>
+              <a:bodyPr wrap="square">
+                <a:spAutoFit/>
+              </a:bodyPr>
+              <a:lstStyle/>
+              <a:p>
+                <a:pPr/>
+                <a14:m>
+                  <m:oMathPara xmlns:m="http://schemas.openxmlformats.org/officeDocument/2006/math">
+                    <m:oMathParaPr>
+                      <m:jc m:val="centerGroup"/>
+                    </m:oMathParaPr>
+                    <m:oMath xmlns:m="http://schemas.openxmlformats.org/officeDocument/2006/math">
+                      <m:r>
+                        <a:rPr lang="pt-BR" sz="3200" b="0" i="1" smtClean="0">
+                          <a:latin typeface="Cambria Math" panose="02040503050406030204" pitchFamily="18" charset="0"/>
+                        </a:rPr>
+                        <m:t>𝑟𝑒𝑐𝑎𝑙𝑙</m:t>
+                      </m:r>
+                      <m:r>
+                        <a:rPr lang="pt-BR" sz="3200" i="1">
+                          <a:latin typeface="Cambria Math" panose="02040503050406030204" pitchFamily="18" charset="0"/>
+                        </a:rPr>
+                        <m:t>=</m:t>
+                      </m:r>
+                      <m:f>
+                        <m:fPr>
+                          <m:ctrlPr>
+                            <a:rPr lang="pt-BR" sz="3200" i="1">
+                              <a:latin typeface="Cambria Math" panose="02040503050406030204" pitchFamily="18" charset="0"/>
+                            </a:rPr>
+                          </m:ctrlPr>
+                        </m:fPr>
+                        <m:num>
+                          <m:r>
+                            <m:rPr>
+                              <m:sty m:val="p"/>
+                            </m:rPr>
+                            <a:rPr lang="pt-BR" sz="3200" i="0">
+                              <a:latin typeface="Cambria Math" panose="02040503050406030204" pitchFamily="18" charset="0"/>
+                            </a:rPr>
+                            <m:t>TP</m:t>
+                          </m:r>
+                        </m:num>
+                        <m:den>
+                          <m:r>
+                            <m:rPr>
+                              <m:sty m:val="p"/>
+                            </m:rPr>
+                            <a:rPr lang="pt-BR" sz="3200" i="0">
+                              <a:latin typeface="Cambria Math" panose="02040503050406030204" pitchFamily="18" charset="0"/>
+                            </a:rPr>
+                            <m:t>FN</m:t>
+                          </m:r>
+                          <m:r>
+                            <a:rPr lang="pt-BR" sz="3200" b="0" i="0" smtClean="0">
+                              <a:latin typeface="Cambria Math" panose="02040503050406030204" pitchFamily="18" charset="0"/>
+                            </a:rPr>
+                            <m:t>+</m:t>
+                          </m:r>
+                          <m:r>
+                            <m:rPr>
+                              <m:sty m:val="p"/>
+                            </m:rPr>
+                            <a:rPr lang="pt-BR" sz="3200">
+                              <a:latin typeface="Cambria Math" panose="02040503050406030204" pitchFamily="18" charset="0"/>
+                            </a:rPr>
+                            <m:t>TP</m:t>
+                          </m:r>
+                        </m:den>
+                      </m:f>
+                    </m:oMath>
+                  </m:oMathPara>
+                </a14:m>
+                <a:endParaRPr lang="pt-BR" sz="3200" dirty="0"/>
+              </a:p>
+            </p:txBody>
+          </p:sp>
+        </mc:Choice>
+        <mc:Fallback xmlns="">
+          <p:sp>
+            <p:nvSpPr>
+              <p:cNvPr id="5" name="CaixaDeTexto 4">
+                <a:extLst>
+                  <a:ext uri="{FF2B5EF4-FFF2-40B4-BE49-F238E27FC236}">
+                    <a16:creationId xmlns:a16="http://schemas.microsoft.com/office/drawing/2014/main" id="{E92F9593-43C2-2FC6-D7DF-B4A04BE65B06}"/>
+                  </a:ext>
+                </a:extLst>
+              </p:cNvPr>
+              <p:cNvSpPr txBox="1">
+                <a:spLocks noRot="1" noChangeAspect="1" noMove="1" noResize="1" noEditPoints="1" noAdjustHandles="1" noChangeArrowheads="1" noChangeShapeType="1" noTextEdit="1"/>
+              </p:cNvSpPr>
+              <p:nvPr/>
+            </p:nvSpPr>
+            <p:spPr>
+              <a:xfrm>
+                <a:off x="838200" y="3319287"/>
+                <a:ext cx="3417711" cy="1022524"/>
+              </a:xfrm>
+              <a:prstGeom prst="rect">
+                <a:avLst/>
+              </a:prstGeom>
+              <a:blipFill>
+                <a:blip r:embed="rId2"/>
+                <a:stretch>
+                  <a:fillRect/>
+                </a:stretch>
+              </a:blipFill>
+            </p:spPr>
+            <p:txBody>
+              <a:bodyPr/>
+              <a:lstStyle/>
+              <a:p>
+                <a:r>
+                  <a:rPr lang="pt-BR">
+                    <a:noFill/>
+                  </a:rPr>
+                  <a:t> </a:t>
+                </a:r>
+              </a:p>
+            </p:txBody>
+          </p:sp>
+        </mc:Fallback>
+      </mc:AlternateContent>
+      <p:graphicFrame>
+        <p:nvGraphicFramePr>
+          <p:cNvPr id="4" name="Tabela 5">
+            <a:extLst>
+              <a:ext uri="{FF2B5EF4-FFF2-40B4-BE49-F238E27FC236}">
+                <a16:creationId xmlns:a16="http://schemas.microsoft.com/office/drawing/2014/main" id="{6F8B50E5-59B3-7D20-E676-F37DDCFCA230}"/>
+              </a:ext>
+            </a:extLst>
+          </p:cNvPr>
+          <p:cNvGraphicFramePr>
+            <a:graphicFrameLocks noGrp="1"/>
+          </p:cNvGraphicFramePr>
+          <p:nvPr/>
+        </p:nvGraphicFramePr>
+        <p:xfrm>
+          <a:off x="1840088" y="5230813"/>
+          <a:ext cx="1794932" cy="914400"/>
+        </p:xfrm>
+        <a:graphic>
+          <a:graphicData uri="http://schemas.openxmlformats.org/drawingml/2006/table">
+            <a:tbl>
+              <a:tblPr firstRow="1" bandRow="1">
+                <a:tableStyleId>{5C22544A-7EE6-4342-B048-85BDC9FD1C3A}</a:tableStyleId>
+              </a:tblPr>
+              <a:tblGrid>
+                <a:gridCol w="897466">
+                  <a:extLst>
+                    <a:ext uri="{9D8B030D-6E8A-4147-A177-3AD203B41FA5}">
+                      <a16:colId xmlns:a16="http://schemas.microsoft.com/office/drawing/2014/main" val="2780398905"/>
+                    </a:ext>
+                  </a:extLst>
+                </a:gridCol>
+                <a:gridCol w="897466">
+                  <a:extLst>
+                    <a:ext uri="{9D8B030D-6E8A-4147-A177-3AD203B41FA5}">
+                      <a16:colId xmlns:a16="http://schemas.microsoft.com/office/drawing/2014/main" val="1752542230"/>
+                    </a:ext>
+                  </a:extLst>
+                </a:gridCol>
+              </a:tblGrid>
+              <a:tr h="431007">
+                <a:tc>
+                  <a:txBody>
+                    <a:bodyPr/>
+                    <a:lstStyle/>
+                    <a:p>
+                      <a:pPr marL="0" marR="0" lvl="0" indent="0" algn="ctr" defTabSz="914400" rtl="0" eaLnBrk="1" fontAlgn="auto" latinLnBrk="0" hangingPunct="1">
+                        <a:lnSpc>
+                          <a:spcPct val="100000"/>
+                        </a:lnSpc>
+                        <a:spcBef>
+                          <a:spcPts val="0"/>
+                        </a:spcBef>
+                        <a:spcAft>
+                          <a:spcPts val="0"/>
+                        </a:spcAft>
+                        <a:buClrTx/>
+                        <a:buSzTx/>
+                        <a:buFontTx/>
+                        <a:buNone/>
+                        <a:tabLst/>
+                        <a:defRPr/>
+                      </a:pPr>
+                      <a:r>
+                        <a:rPr lang="pt-BR" sz="2400" b="1" dirty="0">
+                          <a:solidFill>
+                            <a:srgbClr val="FF0000"/>
+                          </a:solidFill>
+                          <a:effectLst/>
+                        </a:rPr>
+                        <a:t>TN</a:t>
+                      </a:r>
+                    </a:p>
+                  </a:txBody>
+                  <a:tcPr>
+                    <a:lnL w="12700" cap="flat" cmpd="sng" algn="ctr">
+                      <a:solidFill>
+                        <a:schemeClr val="tx1"/>
+                      </a:solidFill>
+                      <a:prstDash val="solid"/>
+                      <a:round/>
+                      <a:headEnd type="none" w="med" len="med"/>
+                      <a:tailEnd type="none" w="med" len="med"/>
+                    </a:lnL>
+                    <a:lnR w="12700" cap="flat" cmpd="sng" algn="ctr">
+                      <a:solidFill>
+                        <a:schemeClr val="tx1"/>
+                      </a:solidFill>
+                      <a:prstDash val="solid"/>
+                      <a:round/>
+                      <a:headEnd type="none" w="med" len="med"/>
+                      <a:tailEnd type="none" w="med" len="med"/>
+                    </a:lnR>
+                    <a:lnT w="12700" cap="flat" cmpd="sng" algn="ctr">
+                      <a:solidFill>
+                        <a:schemeClr val="tx1"/>
+                      </a:solidFill>
+                      <a:prstDash val="solid"/>
+                      <a:round/>
+                      <a:headEnd type="none" w="med" len="med"/>
+                      <a:tailEnd type="none" w="med" len="med"/>
+                    </a:lnT>
+                    <a:lnB w="12700" cap="flat" cmpd="sng" algn="ctr">
+                      <a:solidFill>
+                        <a:schemeClr val="tx1"/>
+                      </a:solidFill>
+                      <a:prstDash val="solid"/>
+                      <a:round/>
+                      <a:headEnd type="none" w="med" len="med"/>
+                      <a:tailEnd type="none" w="med" len="med"/>
+                    </a:lnB>
+                    <a:noFill/>
+                  </a:tcPr>
+                </a:tc>
+                <a:tc>
+                  <a:txBody>
+                    <a:bodyPr/>
+                    <a:lstStyle/>
+                    <a:p>
+                      <a:pPr marL="0" marR="0" lvl="0" indent="0" algn="ctr" defTabSz="914400" rtl="0" eaLnBrk="1" fontAlgn="auto" latinLnBrk="0" hangingPunct="1">
+                        <a:lnSpc>
+                          <a:spcPct val="100000"/>
+                        </a:lnSpc>
+                        <a:spcBef>
+                          <a:spcPts val="0"/>
+                        </a:spcBef>
+                        <a:spcAft>
+                          <a:spcPts val="0"/>
+                        </a:spcAft>
+                        <a:buClrTx/>
+                        <a:buSzTx/>
+                        <a:buFontTx/>
+                        <a:buNone/>
+                        <a:tabLst/>
+                        <a:defRPr/>
+                      </a:pPr>
+                      <a:r>
+                        <a:rPr lang="pt-BR" sz="2400" b="1" kern="1200" dirty="0">
+                          <a:solidFill>
+                            <a:srgbClr val="0000FF"/>
+                          </a:solidFill>
+                          <a:effectLst/>
+                          <a:latin typeface="+mn-lt"/>
+                          <a:ea typeface="+mn-ea"/>
+                          <a:cs typeface="+mn-cs"/>
+                        </a:rPr>
+                        <a:t>FN</a:t>
+                      </a:r>
+                    </a:p>
+                  </a:txBody>
+                  <a:tcPr>
+                    <a:lnL w="12700" cap="flat" cmpd="sng" algn="ctr">
+                      <a:solidFill>
+                        <a:schemeClr val="tx1"/>
+                      </a:solidFill>
+                      <a:prstDash val="solid"/>
+                      <a:round/>
+                      <a:headEnd type="none" w="med" len="med"/>
+                      <a:tailEnd type="none" w="med" len="med"/>
+                    </a:lnL>
+                    <a:lnR w="12700" cap="flat" cmpd="sng" algn="ctr">
+                      <a:solidFill>
+                        <a:schemeClr val="tx1"/>
+                      </a:solidFill>
+                      <a:prstDash val="solid"/>
+                      <a:round/>
+                      <a:headEnd type="none" w="med" len="med"/>
+                      <a:tailEnd type="none" w="med" len="med"/>
+                    </a:lnR>
+                    <a:lnT w="12700" cap="flat" cmpd="sng" algn="ctr">
+                      <a:solidFill>
+                        <a:schemeClr val="tx1"/>
+                      </a:solidFill>
+                      <a:prstDash val="solid"/>
+                      <a:round/>
+                      <a:headEnd type="none" w="med" len="med"/>
+                      <a:tailEnd type="none" w="med" len="med"/>
+                    </a:lnT>
+                    <a:lnB w="12700" cap="flat" cmpd="sng" algn="ctr">
+                      <a:solidFill>
+                        <a:schemeClr val="tx1"/>
+                      </a:solidFill>
+                      <a:prstDash val="solid"/>
+                      <a:round/>
+                      <a:headEnd type="none" w="med" len="med"/>
+                      <a:tailEnd type="none" w="med" len="med"/>
+                    </a:lnB>
+                    <a:noFill/>
+                  </a:tcPr>
+                </a:tc>
+                <a:extLst>
+                  <a:ext uri="{0D108BD9-81ED-4DB2-BD59-A6C34878D82A}">
+                    <a16:rowId xmlns:a16="http://schemas.microsoft.com/office/drawing/2014/main" val="3952155157"/>
+                  </a:ext>
+                </a:extLst>
+              </a:tr>
+              <a:tr h="431007">
+                <a:tc>
+                  <a:txBody>
+                    <a:bodyPr/>
+                    <a:lstStyle/>
+                    <a:p>
+                      <a:pPr marL="0" marR="0" lvl="0" indent="0" algn="ctr" defTabSz="914400" rtl="0" eaLnBrk="1" fontAlgn="auto" latinLnBrk="0" hangingPunct="1">
+                        <a:lnSpc>
+                          <a:spcPct val="100000"/>
+                        </a:lnSpc>
+                        <a:spcBef>
+                          <a:spcPts val="0"/>
+                        </a:spcBef>
+                        <a:spcAft>
+                          <a:spcPts val="0"/>
+                        </a:spcAft>
+                        <a:buClrTx/>
+                        <a:buSzTx/>
+                        <a:buFontTx/>
+                        <a:buNone/>
+                        <a:tabLst/>
+                        <a:defRPr/>
+                      </a:pPr>
+                      <a:r>
+                        <a:rPr lang="pt-BR" sz="2400" b="1" dirty="0">
+                          <a:solidFill>
+                            <a:srgbClr val="0000FF"/>
+                          </a:solidFill>
+                          <a:effectLst/>
+                        </a:rPr>
+                        <a:t>FP</a:t>
+                      </a:r>
+                      <a:endParaRPr lang="pt-BR" sz="2400" b="1" kern="1200" dirty="0">
+                        <a:solidFill>
+                          <a:srgbClr val="0000FF"/>
+                        </a:solidFill>
+                        <a:effectLst/>
+                        <a:latin typeface="+mn-lt"/>
+                        <a:ea typeface="+mn-ea"/>
+                        <a:cs typeface="+mn-cs"/>
+                      </a:endParaRPr>
+                    </a:p>
+                  </a:txBody>
+                  <a:tcPr>
+                    <a:lnL w="12700" cap="flat" cmpd="sng" algn="ctr">
+                      <a:solidFill>
+                        <a:schemeClr val="tx1"/>
+                      </a:solidFill>
+                      <a:prstDash val="solid"/>
+                      <a:round/>
+                      <a:headEnd type="none" w="med" len="med"/>
+                      <a:tailEnd type="none" w="med" len="med"/>
+                    </a:lnL>
+                    <a:lnR w="12700" cap="flat" cmpd="sng" algn="ctr">
+                      <a:solidFill>
+                        <a:schemeClr val="tx1"/>
+                      </a:solidFill>
+                      <a:prstDash val="solid"/>
+                      <a:round/>
+                      <a:headEnd type="none" w="med" len="med"/>
+                      <a:tailEnd type="none" w="med" len="med"/>
+                    </a:lnR>
+                    <a:lnT w="12700" cap="flat" cmpd="sng" algn="ctr">
+                      <a:solidFill>
+                        <a:schemeClr val="tx1"/>
+                      </a:solidFill>
+                      <a:prstDash val="solid"/>
+                      <a:round/>
+                      <a:headEnd type="none" w="med" len="med"/>
+                      <a:tailEnd type="none" w="med" len="med"/>
+                    </a:lnT>
+                    <a:lnB w="12700" cap="flat" cmpd="sng" algn="ctr">
+                      <a:solidFill>
+                        <a:schemeClr val="tx1"/>
+                      </a:solidFill>
+                      <a:prstDash val="solid"/>
+                      <a:round/>
+                      <a:headEnd type="none" w="med" len="med"/>
+                      <a:tailEnd type="none" w="med" len="med"/>
+                    </a:lnB>
+                    <a:noFill/>
+                  </a:tcPr>
+                </a:tc>
+                <a:tc>
+                  <a:txBody>
+                    <a:bodyPr/>
+                    <a:lstStyle/>
+                    <a:p>
+                      <a:pPr marL="0" marR="0" lvl="0" indent="0" algn="ctr" defTabSz="914400" rtl="0" eaLnBrk="1" fontAlgn="auto" latinLnBrk="0" hangingPunct="1">
+                        <a:lnSpc>
+                          <a:spcPct val="100000"/>
+                        </a:lnSpc>
+                        <a:spcBef>
+                          <a:spcPts val="0"/>
+                        </a:spcBef>
+                        <a:spcAft>
+                          <a:spcPts val="0"/>
+                        </a:spcAft>
+                        <a:buClrTx/>
+                        <a:buSzTx/>
+                        <a:buFontTx/>
+                        <a:buNone/>
+                        <a:tabLst/>
+                        <a:defRPr/>
+                      </a:pPr>
+                      <a:r>
+                        <a:rPr lang="pt-BR" sz="2400" b="1" dirty="0">
+                          <a:solidFill>
+                            <a:srgbClr val="00B050"/>
+                          </a:solidFill>
+                          <a:effectLst/>
+                        </a:rPr>
+                        <a:t>TP</a:t>
+                      </a:r>
+                      <a:endParaRPr lang="pt-BR" sz="2400" b="1" dirty="0">
+                        <a:solidFill>
+                          <a:srgbClr val="FF0000"/>
+                        </a:solidFill>
+                        <a:effectLst/>
+                      </a:endParaRPr>
+                    </a:p>
+                  </a:txBody>
+                  <a:tcPr>
+                    <a:lnL w="12700" cap="flat" cmpd="sng" algn="ctr">
+                      <a:solidFill>
+                        <a:schemeClr val="tx1"/>
+                      </a:solidFill>
+                      <a:prstDash val="solid"/>
+                      <a:round/>
+                      <a:headEnd type="none" w="med" len="med"/>
+                      <a:tailEnd type="none" w="med" len="med"/>
+                    </a:lnL>
+                    <a:lnR w="12700" cap="flat" cmpd="sng" algn="ctr">
+                      <a:solidFill>
+                        <a:schemeClr val="tx1"/>
+                      </a:solidFill>
+                      <a:prstDash val="solid"/>
+                      <a:round/>
+                      <a:headEnd type="none" w="med" len="med"/>
+                      <a:tailEnd type="none" w="med" len="med"/>
+                    </a:lnR>
+                    <a:lnT w="12700" cap="flat" cmpd="sng" algn="ctr">
+                      <a:solidFill>
+                        <a:schemeClr val="tx1"/>
+                      </a:solidFill>
+                      <a:prstDash val="solid"/>
+                      <a:round/>
+                      <a:headEnd type="none" w="med" len="med"/>
+                      <a:tailEnd type="none" w="med" len="med"/>
+                    </a:lnT>
+                    <a:lnB w="12700" cap="flat" cmpd="sng" algn="ctr">
+                      <a:solidFill>
+                        <a:schemeClr val="tx1"/>
+                      </a:solidFill>
+                      <a:prstDash val="solid"/>
+                      <a:round/>
+                      <a:headEnd type="none" w="med" len="med"/>
+                      <a:tailEnd type="none" w="med" len="med"/>
+                    </a:lnB>
+                    <a:noFill/>
+                  </a:tcPr>
+                </a:tc>
+                <a:extLst>
+                  <a:ext uri="{0D108BD9-81ED-4DB2-BD59-A6C34878D82A}">
+                    <a16:rowId xmlns:a16="http://schemas.microsoft.com/office/drawing/2014/main" val="2169341992"/>
+                  </a:ext>
+                </a:extLst>
+              </a:tr>
+            </a:tbl>
+          </a:graphicData>
+        </a:graphic>
+      </p:graphicFrame>
+      <p:sp>
+        <p:nvSpPr>
+          <p:cNvPr id="6" name="Retângulo 5">
+            <a:extLst>
+              <a:ext uri="{FF2B5EF4-FFF2-40B4-BE49-F238E27FC236}">
+                <a16:creationId xmlns:a16="http://schemas.microsoft.com/office/drawing/2014/main" id="{26508683-E050-40A0-9B76-B0CF504C46C8}"/>
+              </a:ext>
+            </a:extLst>
+          </p:cNvPr>
+          <p:cNvSpPr/>
+          <p:nvPr/>
+        </p:nvSpPr>
+        <p:spPr>
+          <a:xfrm>
+            <a:off x="2848303" y="5129049"/>
+            <a:ext cx="641131" cy="1135118"/>
+          </a:xfrm>
+          <a:prstGeom prst="rect">
+            <a:avLst/>
+          </a:prstGeom>
+          <a:noFill/>
+          <a:ln w="28575">
+            <a:solidFill>
+              <a:srgbClr val="7030A0"/>
+            </a:solidFill>
+          </a:ln>
+        </p:spPr>
+        <p:style>
+          <a:lnRef idx="2">
+            <a:schemeClr val="accent1">
+              <a:shade val="15000"/>
+            </a:schemeClr>
+          </a:lnRef>
+          <a:fillRef idx="1">
+            <a:schemeClr val="accent1"/>
+          </a:fillRef>
+          <a:effectRef idx="0">
+            <a:schemeClr val="accent1"/>
+          </a:effectRef>
+          <a:fontRef idx="minor">
+            <a:schemeClr val="lt1"/>
+          </a:fontRef>
+        </p:style>
+        <p:txBody>
+          <a:bodyPr rtlCol="0" anchor="ctr"/>
+          <a:lstStyle/>
+          <a:p>
+            <a:pPr algn="ctr"/>
+            <a:endParaRPr lang="pt-BR"/>
+          </a:p>
+        </p:txBody>
+      </p:sp>
+    </p:spTree>
+    <p:extLst>
+      <p:ext uri="{BB962C8B-B14F-4D97-AF65-F5344CB8AC3E}">
+        <p14:creationId xmlns:p14="http://schemas.microsoft.com/office/powerpoint/2010/main" val="3921252876"/>
+      </p:ext>
+    </p:extLst>
+  </p:cSld>
+  <p:clrMapOvr>
+    <a:masterClrMapping/>
+  </p:clrMapOvr>
+</p:sld>
+</file>
+
+<file path=ppt/slides/slide18.xml><?xml version="1.0" encoding="utf-8"?>
 <p:sld xmlns:a="http://schemas.openxmlformats.org/drawingml/2006/main" xmlns:r="http://schemas.openxmlformats.org/officeDocument/2006/relationships" xmlns:p="http://schemas.openxmlformats.org/presentationml/2006/main">
   <p:cSld>
     <p:spTree>
@@ -8476,8 +9900,1282 @@
           <a:chExt cx="0" cy="0"/>
         </a:xfrm>
       </p:grpSpPr>
+      <p:sp>
+        <p:nvSpPr>
+          <p:cNvPr id="2" name="Título 1">
+            <a:extLst>
+              <a:ext uri="{FF2B5EF4-FFF2-40B4-BE49-F238E27FC236}">
+                <a16:creationId xmlns:a16="http://schemas.microsoft.com/office/drawing/2014/main" id="{0BF87474-9D5C-0B3D-63E8-AD1CF986CDF4}"/>
+              </a:ext>
+            </a:extLst>
+          </p:cNvPr>
+          <p:cNvSpPr>
+            <a:spLocks noGrp="1"/>
+          </p:cNvSpPr>
+          <p:nvPr>
+            <p:ph type="title"/>
+          </p:nvPr>
+        </p:nvSpPr>
+        <p:spPr/>
+        <p:txBody>
+          <a:bodyPr/>
+          <a:lstStyle/>
+          <a:p>
+            <a:r>
+              <a:rPr lang="pt-BR" dirty="0"/>
+              <a:t>Precisão versus </a:t>
+            </a:r>
+            <a:r>
+              <a:rPr lang="pt-BR" i="1" dirty="0"/>
+              <a:t>recall</a:t>
+            </a:r>
+          </a:p>
+        </p:txBody>
+      </p:sp>
+      <p:sp>
+        <p:nvSpPr>
+          <p:cNvPr id="3" name="Espaço Reservado para Conteúdo 2">
+            <a:extLst>
+              <a:ext uri="{FF2B5EF4-FFF2-40B4-BE49-F238E27FC236}">
+                <a16:creationId xmlns:a16="http://schemas.microsoft.com/office/drawing/2014/main" id="{82DAA94B-AA8F-AF15-EE11-8B107DF8C311}"/>
+              </a:ext>
+            </a:extLst>
+          </p:cNvPr>
+          <p:cNvSpPr>
+            <a:spLocks noGrp="1"/>
+          </p:cNvSpPr>
+          <p:nvPr>
+            <p:ph idx="1"/>
+          </p:nvPr>
+        </p:nvSpPr>
+        <p:spPr>
+          <a:xfrm>
+            <a:off x="5431971" y="1825624"/>
+            <a:ext cx="6683829" cy="5032375"/>
+          </a:xfrm>
+        </p:spPr>
+        <p:txBody>
+          <a:bodyPr>
+            <a:normAutofit lnSpcReduction="10000"/>
+          </a:bodyPr>
+          <a:lstStyle/>
+          <a:p>
+            <a:r>
+              <a:rPr lang="pt-BR" dirty="0"/>
+              <a:t>A </a:t>
+            </a:r>
+            <a:r>
+              <a:rPr lang="pt-BR" b="1" dirty="0">
+                <a:solidFill>
+                  <a:srgbClr val="00B050"/>
+                </a:solidFill>
+              </a:rPr>
+              <a:t>precisão</a:t>
+            </a:r>
+            <a:r>
+              <a:rPr lang="pt-BR" dirty="0"/>
+              <a:t> não fornece informações a respeito da quantidade de </a:t>
+            </a:r>
+            <a:r>
+              <a:rPr lang="pt-BR" b="1" dirty="0">
+                <a:solidFill>
+                  <a:srgbClr val="00B050"/>
+                </a:solidFill>
+              </a:rPr>
+              <a:t>falsos negativos</a:t>
+            </a:r>
+            <a:r>
+              <a:rPr lang="pt-BR" dirty="0"/>
+              <a:t>. </a:t>
+            </a:r>
+          </a:p>
+          <a:p>
+            <a:r>
+              <a:rPr lang="pt-BR" dirty="0"/>
+              <a:t>Por outro lado, o </a:t>
+            </a:r>
+            <a:r>
+              <a:rPr lang="pt-BR" b="1" i="1" dirty="0">
+                <a:solidFill>
+                  <a:srgbClr val="00B050"/>
+                </a:solidFill>
+              </a:rPr>
+              <a:t>recall</a:t>
+            </a:r>
+            <a:r>
+              <a:rPr lang="pt-BR" dirty="0"/>
+              <a:t> não fornece informações a respeito da quantidade de </a:t>
+            </a:r>
+            <a:r>
+              <a:rPr lang="pt-BR" b="1" dirty="0">
+                <a:solidFill>
+                  <a:srgbClr val="00B050"/>
+                </a:solidFill>
+              </a:rPr>
+              <a:t>falsos positivos</a:t>
+            </a:r>
+            <a:r>
+              <a:rPr lang="pt-BR" dirty="0"/>
+              <a:t>.</a:t>
+            </a:r>
+          </a:p>
+          <a:p>
+            <a:r>
+              <a:rPr lang="pt-BR" dirty="0"/>
+              <a:t>Mas e se os </a:t>
+            </a:r>
+            <a:r>
+              <a:rPr lang="pt-BR" b="1" dirty="0">
+                <a:solidFill>
+                  <a:srgbClr val="00B050"/>
+                </a:solidFill>
+              </a:rPr>
+              <a:t>custos associados a falsos positivos e negativos </a:t>
+            </a:r>
+            <a:r>
+              <a:rPr lang="pt-BR" b="1" dirty="0">
+                <a:solidFill>
+                  <a:schemeClr val="accent2"/>
+                </a:solidFill>
+              </a:rPr>
+              <a:t>são iguais</a:t>
+            </a:r>
+            <a:r>
+              <a:rPr lang="pt-BR" dirty="0"/>
+              <a:t>?</a:t>
+            </a:r>
+          </a:p>
+          <a:p>
+            <a:r>
+              <a:rPr lang="pt-BR" dirty="0"/>
+              <a:t>Nesse caso, para analisarmos o desempenho de um classificador, precisamos de </a:t>
+            </a:r>
+            <a:r>
+              <a:rPr lang="pt-BR" b="1" dirty="0">
+                <a:solidFill>
+                  <a:schemeClr val="accent2"/>
+                </a:solidFill>
+              </a:rPr>
+              <a:t>uma métrica que combine as duas</a:t>
+            </a:r>
+            <a:r>
+              <a:rPr lang="pt-BR" dirty="0"/>
+              <a:t>.</a:t>
+            </a:r>
+          </a:p>
+          <a:p>
+            <a:endParaRPr lang="pt-BR" dirty="0"/>
+          </a:p>
+        </p:txBody>
+      </p:sp>
       <mc:AlternateContent xmlns:mc="http://schemas.openxmlformats.org/markup-compatibility/2006" xmlns:a14="http://schemas.microsoft.com/office/drawing/2010/main">
         <mc:Choice Requires="a14">
+          <p:sp>
+            <p:nvSpPr>
+              <p:cNvPr id="4" name="CaixaDeTexto 3">
+                <a:extLst>
+                  <a:ext uri="{FF2B5EF4-FFF2-40B4-BE49-F238E27FC236}">
+                    <a16:creationId xmlns:a16="http://schemas.microsoft.com/office/drawing/2014/main" id="{B66DD82C-2C7C-932B-0676-6777E743E2CA}"/>
+                  </a:ext>
+                </a:extLst>
+              </p:cNvPr>
+              <p:cNvSpPr txBox="1"/>
+              <p:nvPr/>
+            </p:nvSpPr>
+            <p:spPr>
+              <a:xfrm>
+                <a:off x="838200" y="4204505"/>
+                <a:ext cx="3417711" cy="1022524"/>
+              </a:xfrm>
+              <a:prstGeom prst="rect">
+                <a:avLst/>
+              </a:prstGeom>
+              <a:noFill/>
+            </p:spPr>
+            <p:txBody>
+              <a:bodyPr wrap="square">
+                <a:spAutoFit/>
+              </a:bodyPr>
+              <a:lstStyle/>
+              <a:p>
+                <a:pPr/>
+                <a14:m>
+                  <m:oMathPara xmlns:m="http://schemas.openxmlformats.org/officeDocument/2006/math">
+                    <m:oMathParaPr>
+                      <m:jc m:val="centerGroup"/>
+                    </m:oMathParaPr>
+                    <m:oMath xmlns:m="http://schemas.openxmlformats.org/officeDocument/2006/math">
+                      <m:r>
+                        <a:rPr lang="pt-BR" sz="3200" b="0" i="1" smtClean="0">
+                          <a:latin typeface="Cambria Math" panose="02040503050406030204" pitchFamily="18" charset="0"/>
+                        </a:rPr>
+                        <m:t>𝑟𝑒𝑐𝑎𝑙𝑙</m:t>
+                      </m:r>
+                      <m:r>
+                        <a:rPr lang="pt-BR" sz="3200" i="1">
+                          <a:latin typeface="Cambria Math" panose="02040503050406030204" pitchFamily="18" charset="0"/>
+                        </a:rPr>
+                        <m:t>=</m:t>
+                      </m:r>
+                      <m:f>
+                        <m:fPr>
+                          <m:ctrlPr>
+                            <a:rPr lang="pt-BR" sz="3200" i="1">
+                              <a:latin typeface="Cambria Math" panose="02040503050406030204" pitchFamily="18" charset="0"/>
+                            </a:rPr>
+                          </m:ctrlPr>
+                        </m:fPr>
+                        <m:num>
+                          <m:r>
+                            <m:rPr>
+                              <m:sty m:val="p"/>
+                            </m:rPr>
+                            <a:rPr lang="pt-BR" sz="3200" i="0">
+                              <a:latin typeface="Cambria Math" panose="02040503050406030204" pitchFamily="18" charset="0"/>
+                            </a:rPr>
+                            <m:t>TP</m:t>
+                          </m:r>
+                        </m:num>
+                        <m:den>
+                          <m:r>
+                            <m:rPr>
+                              <m:sty m:val="p"/>
+                            </m:rPr>
+                            <a:rPr lang="pt-BR" sz="3200" i="0">
+                              <a:latin typeface="Cambria Math" panose="02040503050406030204" pitchFamily="18" charset="0"/>
+                            </a:rPr>
+                            <m:t>FN</m:t>
+                          </m:r>
+                          <m:r>
+                            <a:rPr lang="pt-BR" sz="3200" b="0" i="0" smtClean="0">
+                              <a:latin typeface="Cambria Math" panose="02040503050406030204" pitchFamily="18" charset="0"/>
+                            </a:rPr>
+                            <m:t>+</m:t>
+                          </m:r>
+                          <m:r>
+                            <m:rPr>
+                              <m:sty m:val="p"/>
+                            </m:rPr>
+                            <a:rPr lang="pt-BR" sz="3200">
+                              <a:latin typeface="Cambria Math" panose="02040503050406030204" pitchFamily="18" charset="0"/>
+                            </a:rPr>
+                            <m:t>TP</m:t>
+                          </m:r>
+                        </m:den>
+                      </m:f>
+                    </m:oMath>
+                  </m:oMathPara>
+                </a14:m>
+                <a:endParaRPr lang="pt-BR" sz="3200" dirty="0"/>
+              </a:p>
+            </p:txBody>
+          </p:sp>
+        </mc:Choice>
+        <mc:Fallback xmlns="">
+          <p:sp>
+            <p:nvSpPr>
+              <p:cNvPr id="4" name="CaixaDeTexto 3">
+                <a:extLst>
+                  <a:ext uri="{FF2B5EF4-FFF2-40B4-BE49-F238E27FC236}">
+                    <a16:creationId xmlns:a16="http://schemas.microsoft.com/office/drawing/2014/main" id="{B66DD82C-2C7C-932B-0676-6777E743E2CA}"/>
+                  </a:ext>
+                </a:extLst>
+              </p:cNvPr>
+              <p:cNvSpPr txBox="1">
+                <a:spLocks noRot="1" noChangeAspect="1" noMove="1" noResize="1" noEditPoints="1" noAdjustHandles="1" noChangeArrowheads="1" noChangeShapeType="1" noTextEdit="1"/>
+              </p:cNvSpPr>
+              <p:nvPr/>
+            </p:nvSpPr>
+            <p:spPr>
+              <a:xfrm>
+                <a:off x="838200" y="4204505"/>
+                <a:ext cx="3417711" cy="1022524"/>
+              </a:xfrm>
+              <a:prstGeom prst="rect">
+                <a:avLst/>
+              </a:prstGeom>
+              <a:blipFill>
+                <a:blip r:embed="rId2"/>
+                <a:stretch>
+                  <a:fillRect/>
+                </a:stretch>
+              </a:blipFill>
+            </p:spPr>
+            <p:txBody>
+              <a:bodyPr/>
+              <a:lstStyle/>
+              <a:p>
+                <a:r>
+                  <a:rPr lang="pt-BR">
+                    <a:noFill/>
+                  </a:rPr>
+                  <a:t> </a:t>
+                </a:r>
+              </a:p>
+            </p:txBody>
+          </p:sp>
+        </mc:Fallback>
+      </mc:AlternateContent>
+      <mc:AlternateContent xmlns:mc="http://schemas.openxmlformats.org/markup-compatibility/2006" xmlns:a14="http://schemas.microsoft.com/office/drawing/2010/main">
+        <mc:Choice Requires="a14">
+          <p:sp>
+            <p:nvSpPr>
+              <p:cNvPr id="5" name="CaixaDeTexto 4">
+                <a:extLst>
+                  <a:ext uri="{FF2B5EF4-FFF2-40B4-BE49-F238E27FC236}">
+                    <a16:creationId xmlns:a16="http://schemas.microsoft.com/office/drawing/2014/main" id="{1C33F56B-917E-EDAE-B038-52C2901A324E}"/>
+                  </a:ext>
+                </a:extLst>
+              </p:cNvPr>
+              <p:cNvSpPr txBox="1"/>
+              <p:nvPr/>
+            </p:nvSpPr>
+            <p:spPr>
+              <a:xfrm>
+                <a:off x="577143" y="2563651"/>
+                <a:ext cx="3939823" cy="1022524"/>
+              </a:xfrm>
+              <a:prstGeom prst="rect">
+                <a:avLst/>
+              </a:prstGeom>
+              <a:noFill/>
+            </p:spPr>
+            <p:txBody>
+              <a:bodyPr wrap="square">
+                <a:spAutoFit/>
+              </a:bodyPr>
+              <a:lstStyle/>
+              <a:p>
+                <a:pPr/>
+                <a14:m>
+                  <m:oMathPara xmlns:m="http://schemas.openxmlformats.org/officeDocument/2006/math">
+                    <m:oMathParaPr>
+                      <m:jc m:val="centerGroup"/>
+                    </m:oMathParaPr>
+                    <m:oMath xmlns:m="http://schemas.openxmlformats.org/officeDocument/2006/math">
+                      <m:r>
+                        <m:rPr>
+                          <m:sty m:val="p"/>
+                        </m:rPr>
+                        <a:rPr lang="pt-BR" sz="3200" b="0" i="0" smtClean="0">
+                          <a:latin typeface="Cambria Math" panose="02040503050406030204" pitchFamily="18" charset="0"/>
+                        </a:rPr>
+                        <m:t>precis</m:t>
+                      </m:r>
+                      <m:r>
+                        <a:rPr lang="pt-BR" sz="3200" b="0" i="0" smtClean="0">
+                          <a:latin typeface="Cambria Math" panose="02040503050406030204" pitchFamily="18" charset="0"/>
+                        </a:rPr>
+                        <m:t>ã</m:t>
+                      </m:r>
+                      <m:r>
+                        <m:rPr>
+                          <m:sty m:val="p"/>
+                        </m:rPr>
+                        <a:rPr lang="pt-BR" sz="3200" b="0" i="0" smtClean="0">
+                          <a:latin typeface="Cambria Math" panose="02040503050406030204" pitchFamily="18" charset="0"/>
+                        </a:rPr>
+                        <m:t>o</m:t>
+                      </m:r>
+                      <m:r>
+                        <a:rPr lang="pt-BR" sz="3200" i="1">
+                          <a:latin typeface="Cambria Math" panose="02040503050406030204" pitchFamily="18" charset="0"/>
+                        </a:rPr>
+                        <m:t>=</m:t>
+                      </m:r>
+                      <m:f>
+                        <m:fPr>
+                          <m:ctrlPr>
+                            <a:rPr lang="pt-BR" sz="3200" i="1">
+                              <a:latin typeface="Cambria Math" panose="02040503050406030204" pitchFamily="18" charset="0"/>
+                            </a:rPr>
+                          </m:ctrlPr>
+                        </m:fPr>
+                        <m:num>
+                          <m:r>
+                            <m:rPr>
+                              <m:sty m:val="p"/>
+                            </m:rPr>
+                            <a:rPr lang="pt-BR" sz="3200" b="0" i="0" smtClean="0">
+                              <a:latin typeface="Cambria Math" panose="02040503050406030204" pitchFamily="18" charset="0"/>
+                            </a:rPr>
+                            <m:t>TP</m:t>
+                          </m:r>
+                        </m:num>
+                        <m:den>
+                          <m:r>
+                            <m:rPr>
+                              <m:sty m:val="p"/>
+                            </m:rPr>
+                            <a:rPr lang="pt-BR" sz="3200" b="0" i="0" smtClean="0">
+                              <a:latin typeface="Cambria Math" panose="02040503050406030204" pitchFamily="18" charset="0"/>
+                            </a:rPr>
+                            <m:t>FP</m:t>
+                          </m:r>
+                          <m:r>
+                            <a:rPr lang="pt-BR" sz="3200" b="0" i="0" smtClean="0">
+                              <a:latin typeface="Cambria Math" panose="02040503050406030204" pitchFamily="18" charset="0"/>
+                            </a:rPr>
+                            <m:t>+</m:t>
+                          </m:r>
+                          <m:r>
+                            <m:rPr>
+                              <m:sty m:val="p"/>
+                            </m:rPr>
+                            <a:rPr lang="pt-BR" sz="3200">
+                              <a:latin typeface="Cambria Math" panose="02040503050406030204" pitchFamily="18" charset="0"/>
+                            </a:rPr>
+                            <m:t>TP</m:t>
+                          </m:r>
+                        </m:den>
+                      </m:f>
+                    </m:oMath>
+                  </m:oMathPara>
+                </a14:m>
+                <a:endParaRPr lang="pt-BR" sz="3200" dirty="0"/>
+              </a:p>
+            </p:txBody>
+          </p:sp>
+        </mc:Choice>
+        <mc:Fallback xmlns="">
+          <p:sp>
+            <p:nvSpPr>
+              <p:cNvPr id="5" name="CaixaDeTexto 4">
+                <a:extLst>
+                  <a:ext uri="{FF2B5EF4-FFF2-40B4-BE49-F238E27FC236}">
+                    <a16:creationId xmlns:a16="http://schemas.microsoft.com/office/drawing/2014/main" id="{1C33F56B-917E-EDAE-B038-52C2901A324E}"/>
+                  </a:ext>
+                </a:extLst>
+              </p:cNvPr>
+              <p:cNvSpPr txBox="1">
+                <a:spLocks noRot="1" noChangeAspect="1" noMove="1" noResize="1" noEditPoints="1" noAdjustHandles="1" noChangeArrowheads="1" noChangeShapeType="1" noTextEdit="1"/>
+              </p:cNvSpPr>
+              <p:nvPr/>
+            </p:nvSpPr>
+            <p:spPr>
+              <a:xfrm>
+                <a:off x="577143" y="2563651"/>
+                <a:ext cx="3939823" cy="1022524"/>
+              </a:xfrm>
+              <a:prstGeom prst="rect">
+                <a:avLst/>
+              </a:prstGeom>
+              <a:blipFill>
+                <a:blip r:embed="rId3"/>
+                <a:stretch>
+                  <a:fillRect/>
+                </a:stretch>
+              </a:blipFill>
+            </p:spPr>
+            <p:txBody>
+              <a:bodyPr/>
+              <a:lstStyle/>
+              <a:p>
+                <a:r>
+                  <a:rPr lang="pt-BR">
+                    <a:noFill/>
+                  </a:rPr>
+                  <a:t> </a:t>
+                </a:r>
+              </a:p>
+            </p:txBody>
+          </p:sp>
+        </mc:Fallback>
+      </mc:AlternateContent>
+    </p:spTree>
+    <p:extLst>
+      <p:ext uri="{BB962C8B-B14F-4D97-AF65-F5344CB8AC3E}">
+        <p14:creationId xmlns:p14="http://schemas.microsoft.com/office/powerpoint/2010/main" val="3582549210"/>
+      </p:ext>
+    </p:extLst>
+  </p:cSld>
+  <p:clrMapOvr>
+    <a:masterClrMapping/>
+  </p:clrMapOvr>
+</p:sld>
+</file>
+
+<file path=ppt/slides/slide19.xml><?xml version="1.0" encoding="utf-8"?>
+<p:sld xmlns:a="http://schemas.openxmlformats.org/drawingml/2006/main" xmlns:r="http://schemas.openxmlformats.org/officeDocument/2006/relationships" xmlns:p="http://schemas.openxmlformats.org/presentationml/2006/main">
+  <p:cSld>
+    <p:spTree>
+      <p:nvGrpSpPr>
+        <p:cNvPr id="1" name=""/>
+        <p:cNvGrpSpPr/>
+        <p:nvPr/>
+      </p:nvGrpSpPr>
+      <p:grpSpPr>
+        <a:xfrm>
+          <a:off x="0" y="0"/>
+          <a:ext cx="0" cy="0"/>
+          <a:chOff x="0" y="0"/>
+          <a:chExt cx="0" cy="0"/>
+        </a:xfrm>
+      </p:grpSpPr>
+      <p:sp>
+        <p:nvSpPr>
+          <p:cNvPr id="2" name="Título 1">
+            <a:extLst>
+              <a:ext uri="{FF2B5EF4-FFF2-40B4-BE49-F238E27FC236}">
+                <a16:creationId xmlns:a16="http://schemas.microsoft.com/office/drawing/2014/main" id="{B64DCA44-CC6E-8998-A693-998426B94AA3}"/>
+              </a:ext>
+            </a:extLst>
+          </p:cNvPr>
+          <p:cNvSpPr>
+            <a:spLocks noGrp="1"/>
+          </p:cNvSpPr>
+          <p:nvPr>
+            <p:ph type="title"/>
+          </p:nvPr>
+        </p:nvSpPr>
+        <p:spPr/>
+        <p:txBody>
+          <a:bodyPr/>
+          <a:lstStyle/>
+          <a:p>
+            <a:r>
+              <a:rPr lang="pt-BR" dirty="0"/>
+              <a:t>F1-</a:t>
+            </a:r>
+            <a:r>
+              <a:rPr lang="pt-BR" i="1" dirty="0"/>
+              <a:t>score</a:t>
+            </a:r>
+          </a:p>
+        </p:txBody>
+      </p:sp>
+      <mc:AlternateContent xmlns:mc="http://schemas.openxmlformats.org/markup-compatibility/2006">
+        <mc:Choice xmlns:a14="http://schemas.microsoft.com/office/drawing/2010/main" Requires="a14">
+          <p:sp>
+            <p:nvSpPr>
+              <p:cNvPr id="3" name="Espaço Reservado para Conteúdo 2">
+                <a:extLst>
+                  <a:ext uri="{FF2B5EF4-FFF2-40B4-BE49-F238E27FC236}">
+                    <a16:creationId xmlns:a16="http://schemas.microsoft.com/office/drawing/2014/main" id="{C261D671-8D7F-BF6D-3C19-CFC15A190C23}"/>
+                  </a:ext>
+                </a:extLst>
+              </p:cNvPr>
+              <p:cNvSpPr>
+                <a:spLocks noGrp="1"/>
+              </p:cNvSpPr>
+              <p:nvPr>
+                <p:ph idx="1"/>
+              </p:nvPr>
+            </p:nvSpPr>
+            <p:spPr>
+              <a:xfrm>
+                <a:off x="838200" y="1825624"/>
+                <a:ext cx="11185187" cy="5032375"/>
+              </a:xfrm>
+            </p:spPr>
+            <p:txBody>
+              <a:bodyPr>
+                <a:normAutofit/>
+              </a:bodyPr>
+              <a:lstStyle/>
+              <a:p>
+                <a:r>
+                  <a:rPr lang="pt-BR" dirty="0"/>
+                  <a:t>O F1-</a:t>
+                </a:r>
+                <a:r>
+                  <a:rPr lang="pt-BR" i="1" dirty="0"/>
+                  <a:t>score</a:t>
+                </a:r>
+                <a:r>
+                  <a:rPr lang="pt-BR" dirty="0"/>
+                  <a:t> combina as duas métricas em uma única.</a:t>
+                </a:r>
+              </a:p>
+              <a:p>
+                <a:r>
+                  <a:rPr lang="pt-BR" dirty="0"/>
+                  <a:t>A métrica dá a mesma importância à </a:t>
+                </a:r>
+                <a:r>
+                  <a:rPr lang="pt-BR" b="1" dirty="0"/>
+                  <a:t>precisão</a:t>
+                </a:r>
+                <a:r>
+                  <a:rPr lang="pt-BR" dirty="0"/>
+                  <a:t> e ao </a:t>
+                </a:r>
+                <a:r>
+                  <a:rPr lang="pt-BR" b="1" i="1" dirty="0"/>
+                  <a:t>recall</a:t>
+                </a:r>
+                <a:r>
+                  <a:rPr lang="pt-BR" dirty="0"/>
+                  <a:t>.</a:t>
+                </a:r>
+              </a:p>
+              <a:p>
+                <a:r>
+                  <a:rPr lang="pt-BR" dirty="0"/>
+                  <a:t>Valores de </a:t>
+                </a:r>
+                <a14:m>
+                  <m:oMath xmlns:m="http://schemas.openxmlformats.org/officeDocument/2006/math">
+                    <m:sSub>
+                      <m:sSubPr>
+                        <m:ctrlPr>
+                          <a:rPr lang="pt-BR" i="1">
+                            <a:latin typeface="Cambria Math" panose="02040503050406030204" pitchFamily="18" charset="0"/>
+                          </a:rPr>
+                        </m:ctrlPr>
+                      </m:sSubPr>
+                      <m:e>
+                        <m:r>
+                          <a:rPr lang="pt-BR" i="1" smtClean="0">
+                            <a:latin typeface="Cambria Math" panose="02040503050406030204" pitchFamily="18" charset="0"/>
+                          </a:rPr>
+                          <m:t>𝐹</m:t>
+                        </m:r>
+                      </m:e>
+                      <m:sub>
+                        <m:r>
+                          <a:rPr lang="pt-BR" i="1" smtClean="0">
+                            <a:latin typeface="Cambria Math" panose="02040503050406030204" pitchFamily="18" charset="0"/>
+                          </a:rPr>
+                          <m:t>1</m:t>
+                        </m:r>
+                      </m:sub>
+                    </m:sSub>
+                  </m:oMath>
+                </a14:m>
+                <a:r>
+                  <a:rPr lang="pt-BR" i="1" dirty="0"/>
+                  <a:t> </a:t>
+                </a:r>
+                <a:r>
+                  <a:rPr lang="pt-BR" dirty="0"/>
+                  <a:t>próximos de 1 indicam que o </a:t>
+                </a:r>
+                <a:r>
+                  <a:rPr lang="pt-BR" b="1" dirty="0"/>
+                  <a:t>classificador</a:t>
+                </a:r>
+                <a:r>
+                  <a:rPr lang="pt-BR" dirty="0"/>
+                  <a:t> obteve ótimos resultados tanto de </a:t>
+                </a:r>
+                <a:r>
+                  <a:rPr lang="pt-BR" b="1" dirty="0"/>
+                  <a:t>precisão</a:t>
+                </a:r>
+                <a:r>
+                  <a:rPr lang="pt-BR" dirty="0"/>
+                  <a:t> quanto de </a:t>
+                </a:r>
+                <a:r>
+                  <a:rPr lang="pt-BR" b="1" i="1" dirty="0"/>
+                  <a:t>recall</a:t>
+                </a:r>
+                <a:r>
+                  <a:rPr lang="pt-BR" dirty="0"/>
+                  <a:t>.</a:t>
+                </a:r>
+              </a:p>
+              <a:p>
+                <a:r>
+                  <a:rPr lang="pt-BR" dirty="0"/>
+                  <a:t>Em outras palavras, </a:t>
+                </a:r>
+                <a14:m>
+                  <m:oMath xmlns:m="http://schemas.openxmlformats.org/officeDocument/2006/math">
+                    <m:sSub>
+                      <m:sSubPr>
+                        <m:ctrlPr>
+                          <a:rPr lang="pt-BR" i="1" smtClean="0">
+                            <a:latin typeface="Cambria Math" panose="02040503050406030204" pitchFamily="18" charset="0"/>
+                          </a:rPr>
+                        </m:ctrlPr>
+                      </m:sSubPr>
+                      <m:e>
+                        <m:r>
+                          <a:rPr lang="pt-BR" i="1" smtClean="0">
+                            <a:latin typeface="Cambria Math" panose="02040503050406030204" pitchFamily="18" charset="0"/>
+                          </a:rPr>
+                          <m:t>𝐹</m:t>
+                        </m:r>
+                      </m:e>
+                      <m:sub>
+                        <m:r>
+                          <a:rPr lang="pt-BR" i="1" smtClean="0">
+                            <a:latin typeface="Cambria Math" panose="02040503050406030204" pitchFamily="18" charset="0"/>
+                          </a:rPr>
+                          <m:t>1</m:t>
+                        </m:r>
+                      </m:sub>
+                    </m:sSub>
+                    <m:r>
+                      <a:rPr lang="pt-BR" i="0" smtClean="0">
+                        <a:latin typeface="Cambria Math" panose="02040503050406030204" pitchFamily="18" charset="0"/>
+                        <a:ea typeface="Cambria Math" panose="02040503050406030204" pitchFamily="18" charset="0"/>
+                      </a:rPr>
+                      <m:t>≈</m:t>
+                    </m:r>
+                    <m:r>
+                      <a:rPr lang="pt-BR" b="0" i="0" smtClean="0">
+                        <a:latin typeface="Cambria Math" panose="02040503050406030204" pitchFamily="18" charset="0"/>
+                        <a:ea typeface="Cambria Math" panose="02040503050406030204" pitchFamily="18" charset="0"/>
+                      </a:rPr>
+                      <m:t>1</m:t>
+                    </m:r>
+                  </m:oMath>
+                </a14:m>
+                <a:r>
+                  <a:rPr lang="pt-BR" dirty="0"/>
+                  <a:t> significa que </a:t>
+                </a:r>
+                <a14:m>
+                  <m:oMath xmlns:m="http://schemas.openxmlformats.org/officeDocument/2006/math">
+                    <m:r>
+                      <m:rPr>
+                        <m:sty m:val="p"/>
+                      </m:rPr>
+                      <a:rPr lang="pt-BR" i="0" smtClean="0">
+                        <a:latin typeface="Cambria Math" panose="02040503050406030204" pitchFamily="18" charset="0"/>
+                      </a:rPr>
+                      <m:t>FN</m:t>
+                    </m:r>
+                  </m:oMath>
+                </a14:m>
+                <a:r>
+                  <a:rPr lang="pt-BR" dirty="0">
+                    <a:ea typeface="Cambria Math" panose="02040503050406030204" pitchFamily="18" charset="0"/>
+                  </a:rPr>
+                  <a:t> e </a:t>
+                </a:r>
+                <a14:m>
+                  <m:oMath xmlns:m="http://schemas.openxmlformats.org/officeDocument/2006/math">
+                    <m:r>
+                      <m:rPr>
+                        <m:sty m:val="p"/>
+                      </m:rPr>
+                      <a:rPr lang="pt-BR" i="0" smtClean="0">
+                        <a:latin typeface="Cambria Math" panose="02040503050406030204" pitchFamily="18" charset="0"/>
+                      </a:rPr>
+                      <m:t>FP</m:t>
+                    </m:r>
+                  </m:oMath>
+                </a14:m>
+                <a:r>
+                  <a:rPr lang="pt-BR" dirty="0">
+                    <a:ea typeface="Cambria Math" panose="02040503050406030204" pitchFamily="18" charset="0"/>
+                  </a:rPr>
+                  <a:t> </a:t>
+                </a:r>
+                <a14:m>
+                  <m:oMath xmlns:m="http://schemas.openxmlformats.org/officeDocument/2006/math">
+                    <m:r>
+                      <a:rPr lang="pt-BR" i="0" smtClean="0">
+                        <a:latin typeface="Cambria Math" panose="02040503050406030204" pitchFamily="18" charset="0"/>
+                        <a:ea typeface="Cambria Math" panose="02040503050406030204" pitchFamily="18" charset="0"/>
+                      </a:rPr>
+                      <m:t>≈</m:t>
+                    </m:r>
+                    <m:r>
+                      <a:rPr lang="pt-BR" b="0" i="0" smtClean="0">
+                        <a:latin typeface="Cambria Math" panose="02040503050406030204" pitchFamily="18" charset="0"/>
+                        <a:ea typeface="Cambria Math" panose="02040503050406030204" pitchFamily="18" charset="0"/>
+                      </a:rPr>
+                      <m:t>0</m:t>
+                    </m:r>
+                  </m:oMath>
+                </a14:m>
+                <a:r>
+                  <a:rPr lang="pt-BR" dirty="0"/>
+                  <a:t>.</a:t>
+                </a:r>
+              </a:p>
+            </p:txBody>
+          </p:sp>
+        </mc:Choice>
+        <mc:Fallback>
+          <p:sp>
+            <p:nvSpPr>
+              <p:cNvPr id="3" name="Espaço Reservado para Conteúdo 2">
+                <a:extLst>
+                  <a:ext uri="{FF2B5EF4-FFF2-40B4-BE49-F238E27FC236}">
+                    <a16:creationId xmlns:a16="http://schemas.microsoft.com/office/drawing/2014/main" id="{C261D671-8D7F-BF6D-3C19-CFC15A190C23}"/>
+                  </a:ext>
+                </a:extLst>
+              </p:cNvPr>
+              <p:cNvSpPr>
+                <a:spLocks noGrp="1" noRot="1" noChangeAspect="1" noMove="1" noResize="1" noEditPoints="1" noAdjustHandles="1" noChangeArrowheads="1" noChangeShapeType="1" noTextEdit="1"/>
+              </p:cNvSpPr>
+              <p:nvPr>
+                <p:ph idx="1"/>
+              </p:nvPr>
+            </p:nvSpPr>
+            <p:spPr>
+              <a:xfrm>
+                <a:off x="838200" y="1825624"/>
+                <a:ext cx="11185187" cy="5032375"/>
+              </a:xfrm>
+              <a:blipFill>
+                <a:blip r:embed="rId2"/>
+                <a:stretch>
+                  <a:fillRect l="-981" t="-1937"/>
+                </a:stretch>
+              </a:blipFill>
+            </p:spPr>
+            <p:txBody>
+              <a:bodyPr/>
+              <a:lstStyle/>
+              <a:p>
+                <a:r>
+                  <a:rPr lang="en-US">
+                    <a:noFill/>
+                  </a:rPr>
+                  <a:t> </a:t>
+                </a:r>
+              </a:p>
+            </p:txBody>
+          </p:sp>
+        </mc:Fallback>
+      </mc:AlternateContent>
+      <mc:AlternateContent xmlns:mc="http://schemas.openxmlformats.org/markup-compatibility/2006" xmlns:a14="http://schemas.microsoft.com/office/drawing/2010/main">
+        <mc:Choice Requires="a14">
+          <p:sp>
+            <p:nvSpPr>
+              <p:cNvPr id="5" name="CaixaDeTexto 4">
+                <a:extLst>
+                  <a:ext uri="{FF2B5EF4-FFF2-40B4-BE49-F238E27FC236}">
+                    <a16:creationId xmlns:a16="http://schemas.microsoft.com/office/drawing/2014/main" id="{C0A929A7-E33F-6D02-D301-38706DE0743C}"/>
+                  </a:ext>
+                </a:extLst>
+              </p:cNvPr>
+              <p:cNvSpPr txBox="1"/>
+              <p:nvPr/>
+            </p:nvSpPr>
+            <p:spPr>
+              <a:xfrm>
+                <a:off x="1589091" y="4664413"/>
+                <a:ext cx="9013818" cy="1418273"/>
+              </a:xfrm>
+              <a:prstGeom prst="rect">
+                <a:avLst/>
+              </a:prstGeom>
+              <a:noFill/>
+            </p:spPr>
+            <p:txBody>
+              <a:bodyPr wrap="square">
+                <a:spAutoFit/>
+              </a:bodyPr>
+              <a:lstStyle/>
+              <a:p>
+                <a:pPr marL="0" indent="0" algn="ctr">
+                  <a:buNone/>
+                </a:pPr>
+                <a14:m>
+                  <m:oMathPara xmlns:m="http://schemas.openxmlformats.org/officeDocument/2006/math">
+                    <m:oMathParaPr>
+                      <m:jc m:val="centerGroup"/>
+                    </m:oMathParaPr>
+                    <m:oMath xmlns:m="http://schemas.openxmlformats.org/officeDocument/2006/math">
+                      <m:sSub>
+                        <m:sSubPr>
+                          <m:ctrlPr>
+                            <a:rPr lang="pt-BR" sz="3200" i="1" smtClean="0">
+                              <a:latin typeface="Cambria Math" panose="02040503050406030204" pitchFamily="18" charset="0"/>
+                            </a:rPr>
+                          </m:ctrlPr>
+                        </m:sSubPr>
+                        <m:e>
+                          <m:r>
+                            <a:rPr lang="pt-BR" sz="3200" i="1">
+                              <a:latin typeface="Cambria Math" panose="02040503050406030204" pitchFamily="18" charset="0"/>
+                            </a:rPr>
+                            <m:t>𝐹</m:t>
+                          </m:r>
+                        </m:e>
+                        <m:sub>
+                          <m:r>
+                            <a:rPr lang="pt-BR" sz="3200" b="0" i="1" smtClean="0">
+                              <a:latin typeface="Cambria Math" panose="02040503050406030204" pitchFamily="18" charset="0"/>
+                            </a:rPr>
+                            <m:t>1</m:t>
+                          </m:r>
+                        </m:sub>
+                      </m:sSub>
+                      <m:r>
+                        <a:rPr lang="pt-BR" sz="3200" i="1">
+                          <a:latin typeface="Cambria Math" panose="02040503050406030204" pitchFamily="18" charset="0"/>
+                        </a:rPr>
+                        <m:t>=</m:t>
+                      </m:r>
+                      <m:f>
+                        <m:fPr>
+                          <m:ctrlPr>
+                            <a:rPr lang="pt-BR" sz="3200" b="0" i="1" smtClean="0">
+                              <a:latin typeface="Cambria Math" panose="02040503050406030204" pitchFamily="18" charset="0"/>
+                            </a:rPr>
+                          </m:ctrlPr>
+                        </m:fPr>
+                        <m:num>
+                          <m:r>
+                            <m:rPr>
+                              <m:sty m:val="p"/>
+                            </m:rPr>
+                            <a:rPr lang="pt-BR" sz="3200" b="0" i="0" smtClean="0">
+                              <a:latin typeface="Cambria Math" panose="02040503050406030204" pitchFamily="18" charset="0"/>
+                            </a:rPr>
+                            <m:t>TP</m:t>
+                          </m:r>
+                        </m:num>
+                        <m:den>
+                          <m:r>
+                            <m:rPr>
+                              <m:sty m:val="p"/>
+                            </m:rPr>
+                            <a:rPr lang="pt-BR" sz="3200" b="0" i="0" smtClean="0">
+                              <a:latin typeface="Cambria Math" panose="02040503050406030204" pitchFamily="18" charset="0"/>
+                            </a:rPr>
+                            <m:t>TP</m:t>
+                          </m:r>
+                          <m:r>
+                            <a:rPr lang="pt-BR" sz="3200" b="0" i="0" smtClean="0">
+                              <a:latin typeface="Cambria Math" panose="02040503050406030204" pitchFamily="18" charset="0"/>
+                            </a:rPr>
+                            <m:t>+</m:t>
+                          </m:r>
+                          <m:f>
+                            <m:fPr>
+                              <m:ctrlPr>
+                                <a:rPr lang="pt-BR" sz="3200" b="0" i="1" smtClean="0">
+                                  <a:latin typeface="Cambria Math" panose="02040503050406030204" pitchFamily="18" charset="0"/>
+                                </a:rPr>
+                              </m:ctrlPr>
+                            </m:fPr>
+                            <m:num>
+                              <m:r>
+                                <m:rPr>
+                                  <m:sty m:val="p"/>
+                                </m:rPr>
+                                <a:rPr lang="pt-BR" sz="3200" b="0" i="0" smtClean="0">
+                                  <a:latin typeface="Cambria Math" panose="02040503050406030204" pitchFamily="18" charset="0"/>
+                                </a:rPr>
+                                <m:t>FN</m:t>
+                              </m:r>
+                              <m:r>
+                                <a:rPr lang="pt-BR" sz="3200" b="0" i="0" smtClean="0">
+                                  <a:latin typeface="Cambria Math" panose="02040503050406030204" pitchFamily="18" charset="0"/>
+                                </a:rPr>
+                                <m:t>+</m:t>
+                              </m:r>
+                              <m:r>
+                                <m:rPr>
+                                  <m:sty m:val="p"/>
+                                </m:rPr>
+                                <a:rPr lang="pt-BR" sz="3200" b="0" i="0" smtClean="0">
+                                  <a:latin typeface="Cambria Math" panose="02040503050406030204" pitchFamily="18" charset="0"/>
+                                </a:rPr>
+                                <m:t>FP</m:t>
+                              </m:r>
+                            </m:num>
+                            <m:den>
+                              <m:r>
+                                <a:rPr lang="pt-BR" sz="3200" b="0" i="0" smtClean="0">
+                                  <a:latin typeface="Cambria Math" panose="02040503050406030204" pitchFamily="18" charset="0"/>
+                                </a:rPr>
+                                <m:t>2</m:t>
+                              </m:r>
+                            </m:den>
+                          </m:f>
+                        </m:den>
+                      </m:f>
+                      <m:r>
+                        <a:rPr lang="pt-BR" sz="3200" b="0" i="0" smtClean="0">
+                          <a:latin typeface="Cambria Math" panose="02040503050406030204" pitchFamily="18" charset="0"/>
+                        </a:rPr>
+                        <m:t>=2</m:t>
+                      </m:r>
+                      <m:f>
+                        <m:fPr>
+                          <m:ctrlPr>
+                            <a:rPr lang="pt-BR" sz="3200" b="0" i="1" smtClean="0">
+                              <a:latin typeface="Cambria Math" panose="02040503050406030204" pitchFamily="18" charset="0"/>
+                            </a:rPr>
+                          </m:ctrlPr>
+                        </m:fPr>
+                        <m:num>
+                          <m:r>
+                            <m:rPr>
+                              <m:sty m:val="p"/>
+                            </m:rPr>
+                            <a:rPr lang="pt-BR" sz="3200" b="0" i="0" smtClean="0">
+                              <a:latin typeface="Cambria Math" panose="02040503050406030204" pitchFamily="18" charset="0"/>
+                            </a:rPr>
+                            <m:t>precis</m:t>
+                          </m:r>
+                          <m:r>
+                            <a:rPr lang="pt-BR" sz="3200" b="0" i="0" smtClean="0">
+                              <a:latin typeface="Cambria Math" panose="02040503050406030204" pitchFamily="18" charset="0"/>
+                            </a:rPr>
+                            <m:t>ã</m:t>
+                          </m:r>
+                          <m:r>
+                            <m:rPr>
+                              <m:sty m:val="p"/>
+                            </m:rPr>
+                            <a:rPr lang="pt-BR" sz="3200" b="0" i="0" smtClean="0">
+                              <a:latin typeface="Cambria Math" panose="02040503050406030204" pitchFamily="18" charset="0"/>
+                            </a:rPr>
+                            <m:t>o</m:t>
+                          </m:r>
+                          <m:r>
+                            <a:rPr lang="pt-BR" sz="3200" b="0" i="0" smtClean="0">
+                              <a:latin typeface="Cambria Math" panose="02040503050406030204" pitchFamily="18" charset="0"/>
+                              <a:ea typeface="Cambria Math" panose="02040503050406030204" pitchFamily="18" charset="0"/>
+                            </a:rPr>
+                            <m:t>×</m:t>
+                          </m:r>
+                          <m:r>
+                            <a:rPr lang="pt-BR" sz="3200" b="0" i="1" smtClean="0">
+                              <a:latin typeface="Cambria Math" panose="02040503050406030204" pitchFamily="18" charset="0"/>
+                              <a:ea typeface="Cambria Math" panose="02040503050406030204" pitchFamily="18" charset="0"/>
+                            </a:rPr>
+                            <m:t>𝑟𝑒𝑐𝑎𝑙𝑙</m:t>
+                          </m:r>
+                        </m:num>
+                        <m:den>
+                          <m:r>
+                            <m:rPr>
+                              <m:sty m:val="p"/>
+                            </m:rPr>
+                            <a:rPr lang="pt-BR" sz="3200" i="0">
+                              <a:latin typeface="Cambria Math" panose="02040503050406030204" pitchFamily="18" charset="0"/>
+                            </a:rPr>
+                            <m:t>precis</m:t>
+                          </m:r>
+                          <m:r>
+                            <a:rPr lang="pt-BR" sz="3200" i="0">
+                              <a:latin typeface="Cambria Math" panose="02040503050406030204" pitchFamily="18" charset="0"/>
+                            </a:rPr>
+                            <m:t>ã</m:t>
+                          </m:r>
+                          <m:r>
+                            <m:rPr>
+                              <m:sty m:val="p"/>
+                            </m:rPr>
+                            <a:rPr lang="pt-BR" sz="3200" i="0">
+                              <a:latin typeface="Cambria Math" panose="02040503050406030204" pitchFamily="18" charset="0"/>
+                            </a:rPr>
+                            <m:t>o</m:t>
+                          </m:r>
+                          <m:r>
+                            <a:rPr lang="pt-BR" sz="3200" b="0" i="0" smtClean="0">
+                              <a:latin typeface="Cambria Math" panose="02040503050406030204" pitchFamily="18" charset="0"/>
+                            </a:rPr>
+                            <m:t>+</m:t>
+                          </m:r>
+                          <m:r>
+                            <a:rPr lang="pt-BR" sz="3200" i="1">
+                              <a:latin typeface="Cambria Math" panose="02040503050406030204" pitchFamily="18" charset="0"/>
+                              <a:ea typeface="Cambria Math" panose="02040503050406030204" pitchFamily="18" charset="0"/>
+                            </a:rPr>
+                            <m:t>𝑟𝑒𝑐𝑎𝑙𝑙</m:t>
+                          </m:r>
+                        </m:den>
+                      </m:f>
+                      <m:r>
+                        <a:rPr lang="pt-BR" sz="3200" b="0" i="0" smtClean="0">
+                          <a:latin typeface="Cambria Math" panose="02040503050406030204" pitchFamily="18" charset="0"/>
+                        </a:rPr>
+                        <m:t>.</m:t>
+                      </m:r>
+                    </m:oMath>
+                  </m:oMathPara>
+                </a14:m>
+                <a:endParaRPr lang="pt-BR" sz="3200" dirty="0"/>
+              </a:p>
+            </p:txBody>
+          </p:sp>
+        </mc:Choice>
+        <mc:Fallback xmlns="">
+          <p:sp>
+            <p:nvSpPr>
+              <p:cNvPr id="5" name="CaixaDeTexto 4">
+                <a:extLst>
+                  <a:ext uri="{FF2B5EF4-FFF2-40B4-BE49-F238E27FC236}">
+                    <a16:creationId xmlns:a16="http://schemas.microsoft.com/office/drawing/2014/main" id="{C0A929A7-E33F-6D02-D301-38706DE0743C}"/>
+                  </a:ext>
+                </a:extLst>
+              </p:cNvPr>
+              <p:cNvSpPr txBox="1">
+                <a:spLocks noRot="1" noChangeAspect="1" noMove="1" noResize="1" noEditPoints="1" noAdjustHandles="1" noChangeArrowheads="1" noChangeShapeType="1" noTextEdit="1"/>
+              </p:cNvSpPr>
+              <p:nvPr/>
+            </p:nvSpPr>
+            <p:spPr>
+              <a:xfrm>
+                <a:off x="1589091" y="4664413"/>
+                <a:ext cx="9013818" cy="1418273"/>
+              </a:xfrm>
+              <a:prstGeom prst="rect">
+                <a:avLst/>
+              </a:prstGeom>
+              <a:blipFill>
+                <a:blip r:embed="rId3"/>
+                <a:stretch>
+                  <a:fillRect/>
+                </a:stretch>
+              </a:blipFill>
+            </p:spPr>
+            <p:txBody>
+              <a:bodyPr/>
+              <a:lstStyle/>
+              <a:p>
+                <a:r>
+                  <a:rPr lang="pt-BR">
+                    <a:noFill/>
+                  </a:rPr>
+                  <a:t> </a:t>
+                </a:r>
+              </a:p>
+            </p:txBody>
+          </p:sp>
+        </mc:Fallback>
+      </mc:AlternateContent>
+    </p:spTree>
+    <p:extLst>
+      <p:ext uri="{BB962C8B-B14F-4D97-AF65-F5344CB8AC3E}">
+        <p14:creationId xmlns:p14="http://schemas.microsoft.com/office/powerpoint/2010/main" val="59840663"/>
+      </p:ext>
+    </p:extLst>
+  </p:cSld>
+  <p:clrMapOvr>
+    <a:masterClrMapping/>
+  </p:clrMapOvr>
+</p:sld>
+</file>
+
+<file path=ppt/slides/slide2.xml><?xml version="1.0" encoding="utf-8"?>
+<p:sld xmlns:a="http://schemas.openxmlformats.org/drawingml/2006/main" xmlns:r="http://schemas.openxmlformats.org/officeDocument/2006/relationships" xmlns:p="http://schemas.openxmlformats.org/presentationml/2006/main">
+  <p:cSld>
+    <p:spTree>
+      <p:nvGrpSpPr>
+        <p:cNvPr id="1" name=""/>
+        <p:cNvGrpSpPr/>
+        <p:nvPr/>
+      </p:nvGrpSpPr>
+      <p:grpSpPr>
+        <a:xfrm>
+          <a:off x="0" y="0"/>
+          <a:ext cx="0" cy="0"/>
+          <a:chOff x="0" y="0"/>
+          <a:chExt cx="0" cy="0"/>
+        </a:xfrm>
+      </p:grpSpPr>
+      <p:sp>
+        <p:nvSpPr>
+          <p:cNvPr id="2" name="Título 1">
+            <a:extLst>
+              <a:ext uri="{FF2B5EF4-FFF2-40B4-BE49-F238E27FC236}">
+                <a16:creationId xmlns:a16="http://schemas.microsoft.com/office/drawing/2014/main" id="{EECB3FED-5D1A-7084-5333-A3B2FA75F608}"/>
+              </a:ext>
+            </a:extLst>
+          </p:cNvPr>
+          <p:cNvSpPr>
+            <a:spLocks noGrp="1"/>
+          </p:cNvSpPr>
+          <p:nvPr>
+            <p:ph type="title"/>
+          </p:nvPr>
+        </p:nvSpPr>
+        <p:spPr/>
+        <p:txBody>
+          <a:bodyPr/>
+          <a:lstStyle/>
+          <a:p>
+            <a:r>
+              <a:rPr lang="pt-BR" dirty="0"/>
+              <a:t>O que vamos ver?</a:t>
+            </a:r>
+          </a:p>
+        </p:txBody>
+      </p:sp>
+      <p:sp>
+        <p:nvSpPr>
+          <p:cNvPr id="3" name="Espaço Reservado para Conteúdo 2">
+            <a:extLst>
+              <a:ext uri="{FF2B5EF4-FFF2-40B4-BE49-F238E27FC236}">
+                <a16:creationId xmlns:a16="http://schemas.microsoft.com/office/drawing/2014/main" id="{25FE7774-7186-A846-D8DE-518B2CBF4EBD}"/>
+              </a:ext>
+            </a:extLst>
+          </p:cNvPr>
+          <p:cNvSpPr>
+            <a:spLocks noGrp="1"/>
+          </p:cNvSpPr>
+          <p:nvPr>
+            <p:ph idx="1"/>
+          </p:nvPr>
+        </p:nvSpPr>
+        <p:spPr>
+          <a:xfrm>
+            <a:off x="838200" y="1825624"/>
+            <a:ext cx="11105444" cy="5032376"/>
+          </a:xfrm>
+        </p:spPr>
+        <p:txBody>
+          <a:bodyPr>
+            <a:normAutofit/>
+          </a:bodyPr>
+          <a:lstStyle/>
+          <a:p>
+            <a:r>
+              <a:rPr lang="pt-BR" dirty="0"/>
+              <a:t>Anteriormente, para realizar a análise do desempenho de um classificador, usamos apenas a acurácia. </a:t>
+            </a:r>
+          </a:p>
+          <a:p>
+            <a:r>
+              <a:rPr lang="pt-BR" dirty="0"/>
+              <a:t>Porém, existem outras métricas que podem ser usadas para se medir a qualidade de um classificador.</a:t>
+            </a:r>
+          </a:p>
+          <a:p>
+            <a:r>
+              <a:rPr lang="pt-BR" dirty="0"/>
+              <a:t>Portanto, neste tópico, veremos algumas outras métricas.</a:t>
+            </a:r>
+          </a:p>
+        </p:txBody>
+      </p:sp>
+    </p:spTree>
+    <p:extLst>
+      <p:ext uri="{BB962C8B-B14F-4D97-AF65-F5344CB8AC3E}">
+        <p14:creationId xmlns:p14="http://schemas.microsoft.com/office/powerpoint/2010/main" val="2177516599"/>
+      </p:ext>
+    </p:extLst>
+  </p:cSld>
+  <p:clrMapOvr>
+    <a:masterClrMapping/>
+  </p:clrMapOvr>
+</p:sld>
+</file>
+
+<file path=ppt/slides/slide20.xml><?xml version="1.0" encoding="utf-8"?>
+<p:sld xmlns:a="http://schemas.openxmlformats.org/drawingml/2006/main" xmlns:r="http://schemas.openxmlformats.org/officeDocument/2006/relationships" xmlns:p="http://schemas.openxmlformats.org/presentationml/2006/main">
+  <p:cSld>
+    <p:spTree>
+      <p:nvGrpSpPr>
+        <p:cNvPr id="1" name=""/>
+        <p:cNvGrpSpPr/>
+        <p:nvPr/>
+      </p:nvGrpSpPr>
+      <p:grpSpPr>
+        <a:xfrm>
+          <a:off x="0" y="0"/>
+          <a:ext cx="0" cy="0"/>
+          <a:chOff x="0" y="0"/>
+          <a:chExt cx="0" cy="0"/>
+        </a:xfrm>
+      </p:grpSpPr>
+      <mc:AlternateContent xmlns:mc="http://schemas.openxmlformats.org/markup-compatibility/2006">
+        <mc:Choice xmlns:a14="http://schemas.microsoft.com/office/drawing/2010/main" Requires="a14">
           <p:sp>
             <p:nvSpPr>
               <p:cNvPr id="3" name="Espaço Reservado para Conteúdo 2">
@@ -8497,7 +11195,7 @@
             <p:spPr>
               <a:xfrm>
                 <a:off x="728254" y="2533701"/>
-                <a:ext cx="10735491" cy="1790597"/>
+                <a:ext cx="10735491" cy="1755270"/>
               </a:xfrm>
             </p:spPr>
             <p:txBody>
@@ -8510,28 +11208,28 @@
                   <a:buNone/>
                 </a:pPr>
                 <a:r>
-                  <a:rPr lang="pt-BR" sz="4800" b="1" i="1" dirty="0"/>
+                  <a:rPr lang="pt-BR" sz="4800" dirty="0"/>
                   <a:t>OK, consigo calcular as métricas para problemas binários, mas e quando </a:t>
                 </a:r>
                 <a14:m>
                   <m:oMath xmlns:m="http://schemas.openxmlformats.org/officeDocument/2006/math">
                     <m:r>
-                      <a:rPr lang="pt-BR" sz="4800" b="1" i="1" smtClean="0">
+                      <a:rPr lang="pt-BR" sz="4800" b="0" i="1" smtClean="0">
                         <a:latin typeface="Cambria Math" panose="02040503050406030204" pitchFamily="18" charset="0"/>
                       </a:rPr>
-                      <m:t>𝑸</m:t>
+                      <m:t>𝑄</m:t>
                     </m:r>
                   </m:oMath>
                 </a14:m>
                 <a:r>
-                  <a:rPr lang="pt-BR" sz="4800" b="1" i="1" dirty="0"/>
+                  <a:rPr lang="pt-BR" sz="4800" dirty="0"/>
                   <a:t> &gt; 2?</a:t>
                 </a:r>
               </a:p>
             </p:txBody>
           </p:sp>
         </mc:Choice>
-        <mc:Fallback xmlns="">
+        <mc:Fallback>
           <p:sp>
             <p:nvSpPr>
               <p:cNvPr id="3" name="Espaço Reservado para Conteúdo 2">
@@ -8551,12 +11249,12 @@
             <p:spPr>
               <a:xfrm>
                 <a:off x="728254" y="2533701"/>
-                <a:ext cx="10735491" cy="1790597"/>
+                <a:ext cx="10735491" cy="1755270"/>
               </a:xfrm>
               <a:blipFill>
                 <a:blip r:embed="rId2"/>
                 <a:stretch>
-                  <a:fillRect l="-2213" t="-11604" r="-2157"/>
+                  <a:fillRect l="-1305" t="-11806" r="-1249"/>
                 </a:stretch>
               </a:blipFill>
             </p:spPr>
@@ -8565,7 +11263,7 @@
               <a:lstStyle/>
               <a:p>
                 <a:r>
-                  <a:rPr lang="pt-BR">
+                  <a:rPr lang="en-US">
                     <a:noFill/>
                   </a:rPr>
                   <a:t> </a:t>
@@ -8588,7 +11286,7 @@
 </p:sld>
 </file>
 
-<file path=ppt/slides/slide17.xml><?xml version="1.0" encoding="utf-8"?>
+<file path=ppt/slides/slide21.xml><?xml version="1.0" encoding="utf-8"?>
 <p:sld xmlns:a="http://schemas.openxmlformats.org/drawingml/2006/main" xmlns:r="http://schemas.openxmlformats.org/officeDocument/2006/relationships" xmlns:p="http://schemas.openxmlformats.org/presentationml/2006/main">
   <p:cSld>
     <p:spTree>
@@ -8605,8 +11303,8 @@
           <a:chExt cx="0" cy="0"/>
         </a:xfrm>
       </p:grpSpPr>
-      <mc:AlternateContent xmlns:mc="http://schemas.openxmlformats.org/markup-compatibility/2006" xmlns:a14="http://schemas.microsoft.com/office/drawing/2010/main">
-        <mc:Choice Requires="a14">
+      <mc:AlternateContent xmlns:mc="http://schemas.openxmlformats.org/markup-compatibility/2006">
+        <mc:Choice xmlns:a14="http://schemas.microsoft.com/office/drawing/2010/main" Requires="a14">
           <p:sp>
             <p:nvSpPr>
               <p:cNvPr id="2" name="Título 1">
@@ -8661,7 +11359,7 @@
             </p:txBody>
           </p:sp>
         </mc:Choice>
-        <mc:Fallback xmlns="">
+        <mc:Fallback>
           <p:sp>
             <p:nvSpPr>
               <p:cNvPr id="2" name="Título 1">
@@ -8695,7 +11393,7 @@
               <a:lstStyle/>
               <a:p>
                 <a:r>
-                  <a:rPr lang="pt-BR">
+                  <a:rPr lang="en-US">
                     <a:noFill/>
                   </a:rPr>
                   <a:t> </a:t>
@@ -8705,8 +11403,8 @@
           </p:sp>
         </mc:Fallback>
       </mc:AlternateContent>
-      <mc:AlternateContent xmlns:mc="http://schemas.openxmlformats.org/markup-compatibility/2006" xmlns:a14="http://schemas.microsoft.com/office/drawing/2010/main">
-        <mc:Choice Requires="a14">
+      <mc:AlternateContent xmlns:mc="http://schemas.openxmlformats.org/markup-compatibility/2006">
+        <mc:Choice xmlns:a14="http://schemas.microsoft.com/office/drawing/2010/main" Requires="a14">
           <p:sp>
             <p:nvSpPr>
               <p:cNvPr id="3" name="Espaço Reservado para Conteúdo 2">
@@ -8725,19 +11423,19 @@
             </p:nvSpPr>
             <p:spPr>
               <a:xfrm>
-                <a:off x="6462349" y="1859491"/>
-                <a:ext cx="5709300" cy="4998509"/>
+                <a:off x="838200" y="1859491"/>
+                <a:ext cx="11333449" cy="4998509"/>
               </a:xfrm>
             </p:spPr>
             <p:txBody>
               <a:bodyPr>
-                <a:normAutofit lnSpcReduction="10000"/>
+                <a:normAutofit/>
               </a:bodyPr>
               <a:lstStyle/>
               <a:p>
                 <a:r>
                   <a:rPr lang="pt-BR" dirty="0"/>
-                  <a:t>É possível calcular as métricas anteriores para o cenário multiclasses (i.e., </a:t>
+                  <a:t>É possível calcular todas as métricas anteriores para o cenário multiclasses (i.e., </a:t>
                 </a:r>
                 <a14:m>
                   <m:oMath xmlns:m="http://schemas.openxmlformats.org/officeDocument/2006/math">
@@ -8763,7 +11461,103 @@
               <a:p>
                 <a:r>
                   <a:rPr lang="pt-BR" dirty="0"/>
-                  <a:t>Para isso, basta selecionar, uma vez, cada classe como sendo a classe positiva, enquanto todas as demais classes formam a classe negativa.</a:t>
+                  <a:t>Para isso, basta selecionar </a:t>
+                </a:r>
+                <a:r>
+                  <a:rPr lang="pt-BR" b="1" dirty="0">
+                    <a:solidFill>
+                      <a:srgbClr val="7030A0"/>
+                    </a:solidFill>
+                  </a:rPr>
+                  <a:t>uma classe por vez</a:t>
+                </a:r>
+                <a:r>
+                  <a:rPr lang="pt-BR" dirty="0"/>
+                  <a:t> como sendo a </a:t>
+                </a:r>
+                <a:r>
+                  <a:rPr lang="pt-BR" b="1" dirty="0">
+                    <a:solidFill>
+                      <a:srgbClr val="7030A0"/>
+                    </a:solidFill>
+                  </a:rPr>
+                  <a:t>classe positiva</a:t>
+                </a:r>
+                <a:r>
+                  <a:rPr lang="pt-BR" dirty="0"/>
+                  <a:t>, enquanto todas </a:t>
+                </a:r>
+                <a:r>
+                  <a:rPr lang="pt-BR" b="1" dirty="0">
+                    <a:solidFill>
+                      <a:schemeClr val="accent2"/>
+                    </a:solidFill>
+                  </a:rPr>
+                  <a:t>as demais classes</a:t>
+                </a:r>
+                <a:r>
+                  <a:rPr lang="pt-BR" dirty="0"/>
+                  <a:t> </a:t>
+                </a:r>
+                <a:r>
+                  <a:rPr lang="pt-BR" b="1" dirty="0">
+                    <a:solidFill>
+                      <a:schemeClr val="accent2"/>
+                    </a:solidFill>
+                  </a:rPr>
+                  <a:t>formam a classe negativa</a:t>
+                </a:r>
+                <a:r>
+                  <a:rPr lang="pt-BR" dirty="0"/>
+                  <a:t>.</a:t>
+                </a:r>
+              </a:p>
+              <a:p>
+                <a:pPr lvl="1">
+                  <a:buFont typeface="Wingdings" panose="05000000000000000000" pitchFamily="2" charset="2"/>
+                  <a:buChar char="§"/>
+                </a:pPr>
+                <a:r>
+                  <a:rPr lang="pt-BR" dirty="0"/>
+                  <a:t>Essa abordagem se chama um-contra-o-resto.</a:t>
+                </a:r>
+              </a:p>
+              <a:p>
+                <a:pPr lvl="1">
+                  <a:buFont typeface="Wingdings" panose="05000000000000000000" pitchFamily="2" charset="2"/>
+                  <a:buChar char="§"/>
+                </a:pPr>
+                <a:r>
+                  <a:rPr lang="pt-BR" dirty="0"/>
+                  <a:t>É uma maneira de transformar um problema de </a:t>
+                </a:r>
+                <a14:m>
+                  <m:oMath xmlns:m="http://schemas.openxmlformats.org/officeDocument/2006/math">
+                    <m:r>
+                      <a:rPr lang="pt-BR" i="1">
+                        <a:latin typeface="Cambria Math" panose="02040503050406030204" pitchFamily="18" charset="0"/>
+                      </a:rPr>
+                      <m:t>𝑄</m:t>
+                    </m:r>
+                  </m:oMath>
+                </a14:m>
+                <a:r>
+                  <a:rPr lang="pt-BR" dirty="0"/>
+                  <a:t> classes em </a:t>
+                </a:r>
+                <a14:m>
+                  <m:oMath xmlns:m="http://schemas.openxmlformats.org/officeDocument/2006/math">
+                    <m:r>
+                      <a:rPr lang="pt-BR" i="1">
+                        <a:latin typeface="Cambria Math" panose="02040503050406030204" pitchFamily="18" charset="0"/>
+                      </a:rPr>
+                      <m:t>𝑄</m:t>
+                    </m:r>
+                  </m:oMath>
+                </a14:m>
+                <a:r>
+                  <a:rPr lang="pt-BR" dirty="0"/>
+                  <a:t> problemas binários.</a:t>
                 </a:r>
               </a:p>
               <a:p>
@@ -8772,7 +11566,7 @@
                   <a:t>Assim, obtém-se os valores das </a:t>
                 </a:r>
                 <a:r>
-                  <a:rPr lang="pt-BR" b="1" i="1" dirty="0">
+                  <a:rPr lang="pt-BR" b="1" dirty="0">
                     <a:solidFill>
                       <a:srgbClr val="00B050"/>
                     </a:solidFill>
@@ -8793,7 +11587,7 @@
                   </m:oMath>
                 </a14:m>
                 <a:r>
-                  <a:rPr lang="pt-BR" b="1" i="1" dirty="0">
+                  <a:rPr lang="pt-BR" b="1" dirty="0">
                     <a:solidFill>
                       <a:srgbClr val="00B050"/>
                     </a:solidFill>
@@ -8936,7 +11730,7 @@
             </p:txBody>
           </p:sp>
         </mc:Choice>
-        <mc:Fallback xmlns="">
+        <mc:Fallback>
           <p:sp>
             <p:nvSpPr>
               <p:cNvPr id="3" name="Espaço Reservado para Conteúdo 2">
@@ -8955,13 +11749,13 @@
             </p:nvSpPr>
             <p:spPr>
               <a:xfrm>
-                <a:off x="6462349" y="1859491"/>
-                <a:ext cx="5709300" cy="4998509"/>
+                <a:off x="838200" y="1859491"/>
+                <a:ext cx="11333449" cy="4998509"/>
               </a:xfrm>
               <a:blipFill>
                 <a:blip r:embed="rId3"/>
                 <a:stretch>
-                  <a:fillRect l="-1921" t="-2683" r="-1494"/>
+                  <a:fillRect l="-968" t="-1951" r="-54"/>
                 </a:stretch>
               </a:blipFill>
             </p:spPr>
@@ -8970,7 +11764,7 @@
               <a:lstStyle/>
               <a:p>
                 <a:r>
-                  <a:rPr lang="pt-BR">
+                  <a:rPr lang="en-US">
                     <a:noFill/>
                   </a:rPr>
                   <a:t> </a:t>
@@ -8980,24 +11774,344 @@
           </p:sp>
         </mc:Fallback>
       </mc:AlternateContent>
-      <mc:AlternateContent xmlns:mc="http://schemas.openxmlformats.org/markup-compatibility/2006" xmlns:a14="http://schemas.microsoft.com/office/drawing/2010/main">
-        <mc:Choice Requires="a14">
+    </p:spTree>
+    <p:extLst>
+      <p:ext uri="{BB962C8B-B14F-4D97-AF65-F5344CB8AC3E}">
+        <p14:creationId xmlns:p14="http://schemas.microsoft.com/office/powerpoint/2010/main" val="3065138383"/>
+      </p:ext>
+    </p:extLst>
+  </p:cSld>
+  <p:clrMapOvr>
+    <a:masterClrMapping/>
+  </p:clrMapOvr>
+</p:sld>
+</file>
+
+<file path=ppt/slides/slide22.xml><?xml version="1.0" encoding="utf-8"?>
+<p:sld xmlns:a="http://schemas.openxmlformats.org/drawingml/2006/main" xmlns:r="http://schemas.openxmlformats.org/officeDocument/2006/relationships" xmlns:p="http://schemas.openxmlformats.org/presentationml/2006/main">
+  <p:cSld>
+    <p:spTree>
+      <p:nvGrpSpPr>
+        <p:cNvPr id="1" name="">
+          <a:extLst>
+            <a:ext uri="{FF2B5EF4-FFF2-40B4-BE49-F238E27FC236}">
+              <a16:creationId xmlns:a16="http://schemas.microsoft.com/office/drawing/2014/main" id="{2130EF1D-BFF8-2F82-4975-9C47E037612C}"/>
+            </a:ext>
+          </a:extLst>
+        </p:cNvPr>
+        <p:cNvGrpSpPr/>
+        <p:nvPr/>
+      </p:nvGrpSpPr>
+      <p:grpSpPr>
+        <a:xfrm>
+          <a:off x="0" y="0"/>
+          <a:ext cx="0" cy="0"/>
+          <a:chOff x="0" y="0"/>
+          <a:chExt cx="0" cy="0"/>
+        </a:xfrm>
+      </p:grpSpPr>
+      <mc:AlternateContent xmlns:mc="http://schemas.openxmlformats.org/markup-compatibility/2006">
+        <mc:Choice xmlns:a14="http://schemas.microsoft.com/office/drawing/2010/main" Requires="a14">
+          <p:sp>
+            <p:nvSpPr>
+              <p:cNvPr id="2" name="Título 1">
+                <a:extLst>
+                  <a:ext uri="{FF2B5EF4-FFF2-40B4-BE49-F238E27FC236}">
+                    <a16:creationId xmlns:a16="http://schemas.microsoft.com/office/drawing/2014/main" id="{9E8992A0-634A-97EF-203B-8346A5DC6DBB}"/>
+                  </a:ext>
+                </a:extLst>
+              </p:cNvPr>
+              <p:cNvSpPr>
+                <a:spLocks noGrp="1"/>
+              </p:cNvSpPr>
+              <p:nvPr>
+                <p:ph type="title"/>
+              </p:nvPr>
+            </p:nvSpPr>
+            <p:spPr>
+              <a:xfrm>
+                <a:off x="838200" y="365125"/>
+                <a:ext cx="10789356" cy="1325563"/>
+              </a:xfrm>
+            </p:spPr>
+            <p:txBody>
+              <a:bodyPr/>
+              <a:lstStyle/>
+              <a:p>
+                <a:r>
+                  <a:rPr lang="pt-BR" dirty="0"/>
+                  <a:t>Matriz de confusão para </a:t>
+                </a:r>
+                <a14:m>
+                  <m:oMath xmlns:m="http://schemas.openxmlformats.org/officeDocument/2006/math">
+                    <m:r>
+                      <a:rPr lang="pt-BR" b="0" i="1" smtClean="0">
+                        <a:latin typeface="Cambria Math" panose="02040503050406030204" pitchFamily="18" charset="0"/>
+                      </a:rPr>
+                      <m:t>𝑄</m:t>
+                    </m:r>
+                    <m:r>
+                      <a:rPr lang="pt-BR" b="0" i="1" smtClean="0">
+                        <a:latin typeface="Cambria Math" panose="02040503050406030204" pitchFamily="18" charset="0"/>
+                      </a:rPr>
+                      <m:t>=3</m:t>
+                    </m:r>
+                  </m:oMath>
+                </a14:m>
+                <a:endParaRPr lang="pt-BR" dirty="0"/>
+              </a:p>
+            </p:txBody>
+          </p:sp>
+        </mc:Choice>
+        <mc:Fallback>
+          <p:sp>
+            <p:nvSpPr>
+              <p:cNvPr id="2" name="Título 1">
+                <a:extLst>
+                  <a:ext uri="{FF2B5EF4-FFF2-40B4-BE49-F238E27FC236}">
+                    <a16:creationId xmlns:a16="http://schemas.microsoft.com/office/drawing/2014/main" id="{9E8992A0-634A-97EF-203B-8346A5DC6DBB}"/>
+                  </a:ext>
+                </a:extLst>
+              </p:cNvPr>
+              <p:cNvSpPr>
+                <a:spLocks noGrp="1" noRot="1" noChangeAspect="1" noMove="1" noResize="1" noEditPoints="1" noAdjustHandles="1" noChangeArrowheads="1" noChangeShapeType="1" noTextEdit="1"/>
+              </p:cNvSpPr>
+              <p:nvPr>
+                <p:ph type="title"/>
+              </p:nvPr>
+            </p:nvSpPr>
+            <p:spPr>
+              <a:xfrm>
+                <a:off x="838200" y="365125"/>
+                <a:ext cx="10789356" cy="1325563"/>
+              </a:xfrm>
+              <a:blipFill>
+                <a:blip r:embed="rId2"/>
+                <a:stretch>
+                  <a:fillRect l="-2318"/>
+                </a:stretch>
+              </a:blipFill>
+            </p:spPr>
+            <p:txBody>
+              <a:bodyPr/>
+              <a:lstStyle/>
+              <a:p>
+                <a:r>
+                  <a:rPr lang="en-US">
+                    <a:noFill/>
+                  </a:rPr>
+                  <a:t> </a:t>
+                </a:r>
+              </a:p>
+            </p:txBody>
+          </p:sp>
+        </mc:Fallback>
+      </mc:AlternateContent>
+      <mc:AlternateContent xmlns:mc="http://schemas.openxmlformats.org/markup-compatibility/2006">
+        <mc:Choice xmlns:a14="http://schemas.microsoft.com/office/drawing/2010/main" Requires="a14">
+          <p:sp>
+            <p:nvSpPr>
+              <p:cNvPr id="3" name="Espaço Reservado para Conteúdo 2">
+                <a:extLst>
+                  <a:ext uri="{FF2B5EF4-FFF2-40B4-BE49-F238E27FC236}">
+                    <a16:creationId xmlns:a16="http://schemas.microsoft.com/office/drawing/2014/main" id="{0DC01E49-26FA-3E21-CFB3-E9EF7AE69543}"/>
+                  </a:ext>
+                </a:extLst>
+              </p:cNvPr>
+              <p:cNvSpPr>
+                <a:spLocks noGrp="1"/>
+              </p:cNvSpPr>
+              <p:nvPr>
+                <p:ph idx="1"/>
+              </p:nvPr>
+            </p:nvSpPr>
+            <p:spPr>
+              <a:xfrm>
+                <a:off x="7064830" y="1859491"/>
+                <a:ext cx="5106820" cy="4998509"/>
+              </a:xfrm>
+            </p:spPr>
+            <p:txBody>
+              <a:bodyPr>
+                <a:normAutofit/>
+              </a:bodyPr>
+              <a:lstStyle/>
+              <a:p>
+                <a:r>
+                  <a:rPr lang="pt-BR" dirty="0"/>
+                  <a:t>Em um primeiro momento, consideramos a classe </a:t>
+                </a:r>
+                <a14:m>
+                  <m:oMath xmlns:m="http://schemas.openxmlformats.org/officeDocument/2006/math">
+                    <m:sSub>
+                      <m:sSubPr>
+                        <m:ctrlPr>
+                          <a:rPr lang="pt-BR" i="1">
+                            <a:latin typeface="Cambria Math" panose="02040503050406030204" pitchFamily="18" charset="0"/>
+                          </a:rPr>
+                        </m:ctrlPr>
+                      </m:sSubPr>
+                      <m:e>
+                        <m:r>
+                          <a:rPr lang="pt-BR" i="1">
+                            <a:latin typeface="Cambria Math" panose="02040503050406030204" pitchFamily="18" charset="0"/>
+                          </a:rPr>
+                          <m:t>𝐶</m:t>
+                        </m:r>
+                      </m:e>
+                      <m:sub>
+                        <m:r>
+                          <a:rPr lang="pt-BR" i="1">
+                            <a:latin typeface="Cambria Math" panose="02040503050406030204" pitchFamily="18" charset="0"/>
+                          </a:rPr>
+                          <m:t>1</m:t>
+                        </m:r>
+                      </m:sub>
+                    </m:sSub>
+                  </m:oMath>
+                </a14:m>
+                <a:r>
+                  <a:rPr lang="pt-BR" dirty="0"/>
+                  <a:t> como a classe positiva e união das classes </a:t>
+                </a:r>
+                <a14:m>
+                  <m:oMath xmlns:m="http://schemas.openxmlformats.org/officeDocument/2006/math">
+                    <m:sSub>
+                      <m:sSubPr>
+                        <m:ctrlPr>
+                          <a:rPr lang="pt-BR" i="1">
+                            <a:latin typeface="Cambria Math" panose="02040503050406030204" pitchFamily="18" charset="0"/>
+                          </a:rPr>
+                        </m:ctrlPr>
+                      </m:sSubPr>
+                      <m:e>
+                        <m:r>
+                          <a:rPr lang="pt-BR" i="1">
+                            <a:latin typeface="Cambria Math" panose="02040503050406030204" pitchFamily="18" charset="0"/>
+                          </a:rPr>
+                          <m:t>𝐶</m:t>
+                        </m:r>
+                      </m:e>
+                      <m:sub>
+                        <m:r>
+                          <a:rPr lang="pt-BR" b="0" i="1" smtClean="0">
+                            <a:latin typeface="Cambria Math" panose="02040503050406030204" pitchFamily="18" charset="0"/>
+                          </a:rPr>
+                          <m:t>2</m:t>
+                        </m:r>
+                      </m:sub>
+                    </m:sSub>
+                  </m:oMath>
+                </a14:m>
+                <a:r>
+                  <a:rPr lang="pt-BR" dirty="0"/>
+                  <a:t> e </a:t>
+                </a:r>
+                <a14:m>
+                  <m:oMath xmlns:m="http://schemas.openxmlformats.org/officeDocument/2006/math">
+                    <m:sSub>
+                      <m:sSubPr>
+                        <m:ctrlPr>
+                          <a:rPr lang="pt-BR" i="1">
+                            <a:latin typeface="Cambria Math" panose="02040503050406030204" pitchFamily="18" charset="0"/>
+                          </a:rPr>
+                        </m:ctrlPr>
+                      </m:sSubPr>
+                      <m:e>
+                        <m:r>
+                          <a:rPr lang="pt-BR" i="1">
+                            <a:latin typeface="Cambria Math" panose="02040503050406030204" pitchFamily="18" charset="0"/>
+                          </a:rPr>
+                          <m:t>𝐶</m:t>
+                        </m:r>
+                      </m:e>
+                      <m:sub>
+                        <m:r>
+                          <a:rPr lang="pt-BR" b="0" i="1" smtClean="0">
+                            <a:latin typeface="Cambria Math" panose="02040503050406030204" pitchFamily="18" charset="0"/>
+                          </a:rPr>
+                          <m:t>3</m:t>
+                        </m:r>
+                      </m:sub>
+                    </m:sSub>
+                  </m:oMath>
+                </a14:m>
+                <a:r>
+                  <a:rPr lang="pt-BR" dirty="0"/>
+                  <a:t> como a classe negativa.</a:t>
+                </a:r>
+              </a:p>
+            </p:txBody>
+          </p:sp>
+        </mc:Choice>
+        <mc:Fallback>
+          <p:sp>
+            <p:nvSpPr>
+              <p:cNvPr id="3" name="Espaço Reservado para Conteúdo 2">
+                <a:extLst>
+                  <a:ext uri="{FF2B5EF4-FFF2-40B4-BE49-F238E27FC236}">
+                    <a16:creationId xmlns:a16="http://schemas.microsoft.com/office/drawing/2014/main" id="{0DC01E49-26FA-3E21-CFB3-E9EF7AE69543}"/>
+                  </a:ext>
+                </a:extLst>
+              </p:cNvPr>
+              <p:cNvSpPr>
+                <a:spLocks noGrp="1" noRot="1" noChangeAspect="1" noMove="1" noResize="1" noEditPoints="1" noAdjustHandles="1" noChangeArrowheads="1" noChangeShapeType="1" noTextEdit="1"/>
+              </p:cNvSpPr>
+              <p:nvPr>
+                <p:ph idx="1"/>
+              </p:nvPr>
+            </p:nvSpPr>
+            <p:spPr>
+              <a:xfrm>
+                <a:off x="7064830" y="1859491"/>
+                <a:ext cx="5106820" cy="4998509"/>
+              </a:xfrm>
+              <a:blipFill>
+                <a:blip r:embed="rId3"/>
+                <a:stretch>
+                  <a:fillRect l="-2148" t="-1951" r="-358"/>
+                </a:stretch>
+              </a:blipFill>
+            </p:spPr>
+            <p:txBody>
+              <a:bodyPr/>
+              <a:lstStyle/>
+              <a:p>
+                <a:r>
+                  <a:rPr lang="en-US">
+                    <a:noFill/>
+                  </a:rPr>
+                  <a:t> </a:t>
+                </a:r>
+              </a:p>
+            </p:txBody>
+          </p:sp>
+        </mc:Fallback>
+      </mc:AlternateContent>
+      <mc:AlternateContent xmlns:mc="http://schemas.openxmlformats.org/markup-compatibility/2006">
+        <mc:Choice xmlns:a14="http://schemas.microsoft.com/office/drawing/2010/main" Requires="a14">
           <p:graphicFrame>
             <p:nvGraphicFramePr>
               <p:cNvPr id="4" name="Table 3">
                 <a:extLst>
                   <a:ext uri="{FF2B5EF4-FFF2-40B4-BE49-F238E27FC236}">
-                    <a16:creationId xmlns:a16="http://schemas.microsoft.com/office/drawing/2014/main" id="{08325068-7110-8CDE-99D3-4E05F625B769}"/>
+                    <a16:creationId xmlns:a16="http://schemas.microsoft.com/office/drawing/2014/main" id="{EB28D29F-1291-5914-B146-FE53202329C4}"/>
                   </a:ext>
                 </a:extLst>
               </p:cNvPr>
               <p:cNvGraphicFramePr>
                 <a:graphicFrameLocks noGrp="1"/>
               </p:cNvGraphicFramePr>
-              <p:nvPr/>
+              <p:nvPr>
+                <p:extLst>
+                  <p:ext uri="{D42A27DB-BD31-4B8C-83A1-F6EECF244321}">
+                    <p14:modId xmlns:p14="http://schemas.microsoft.com/office/powerpoint/2010/main" val="682742466"/>
+                  </p:ext>
+                </p:extLst>
+              </p:nvPr>
             </p:nvGraphicFramePr>
             <p:xfrm>
-              <a:off x="20351" y="2766990"/>
+              <a:off x="455779" y="2669019"/>
               <a:ext cx="6276622" cy="2933897"/>
             </p:xfrm>
             <a:graphic>
@@ -10581,13 +13695,13 @@
             </a:graphic>
           </p:graphicFrame>
         </mc:Choice>
-        <mc:Fallback xmlns="">
+        <mc:Fallback>
           <p:graphicFrame>
             <p:nvGraphicFramePr>
               <p:cNvPr id="4" name="Table 3">
                 <a:extLst>
                   <a:ext uri="{FF2B5EF4-FFF2-40B4-BE49-F238E27FC236}">
-                    <a16:creationId xmlns:a16="http://schemas.microsoft.com/office/drawing/2014/main" id="{08325068-7110-8CDE-99D3-4E05F625B769}"/>
+                    <a16:creationId xmlns:a16="http://schemas.microsoft.com/office/drawing/2014/main" id="{EB28D29F-1291-5914-B146-FE53202329C4}"/>
                   </a:ext>
                 </a:extLst>
               </p:cNvPr>
@@ -10597,13 +13711,13 @@
               <p:nvPr>
                 <p:extLst>
                   <p:ext uri="{D42A27DB-BD31-4B8C-83A1-F6EECF244321}">
-                    <p14:modId xmlns:p14="http://schemas.microsoft.com/office/powerpoint/2010/main" val="1166512468"/>
+                    <p14:modId xmlns:p14="http://schemas.microsoft.com/office/powerpoint/2010/main" val="682742466"/>
                   </p:ext>
                 </p:extLst>
               </p:nvPr>
             </p:nvGraphicFramePr>
             <p:xfrm>
-              <a:off x="20351" y="2766990"/>
+              <a:off x="455779" y="2669019"/>
               <a:ext cx="6276622" cy="2933897"/>
             </p:xfrm>
             <a:graphic>
@@ -10717,7 +13831,7 @@
                         <a:bodyPr/>
                         <a:lstStyle/>
                         <a:p>
-                          <a:endParaRPr lang="pt-BR"/>
+                          <a:endParaRPr lang="en-US"/>
                         </a:p>
                       </a:txBody>
                       <a:tcPr marL="28575" marR="28575" marT="19050" marB="19050" anchor="ctr">
@@ -10760,7 +13874,7 @@
                         <a:blipFill>
                           <a:blip r:embed="rId4"/>
                           <a:stretch>
-                            <a:fillRect l="-111321" t="-870" r="-438994" b="-337391"/>
+                            <a:fillRect l="-111321" t="-870" r="-438994" b="-336522"/>
                           </a:stretch>
                         </a:blipFill>
                       </a:tcPr>
@@ -11015,7 +14129,7 @@
                         <a:bodyPr/>
                         <a:lstStyle/>
                         <a:p>
-                          <a:endParaRPr lang="pt-BR"/>
+                          <a:endParaRPr lang="en-US"/>
                         </a:p>
                       </a:txBody>
                       <a:tcPr marL="28575" marR="28575" marT="19050" marB="19050" anchor="ctr">
@@ -11058,7 +14172,7 @@
                         <a:blipFill>
                           <a:blip r:embed="rId4"/>
                           <a:stretch>
-                            <a:fillRect l="-111321" t="-100870" r="-438994" b="-237391"/>
+                            <a:fillRect l="-111321" t="-100870" r="-438994" b="-236522"/>
                           </a:stretch>
                         </a:blipFill>
                       </a:tcPr>
@@ -11313,7 +14427,7 @@
                         <a:bodyPr/>
                         <a:lstStyle/>
                         <a:p>
-                          <a:endParaRPr lang="pt-BR"/>
+                          <a:endParaRPr lang="en-US"/>
                         </a:p>
                       </a:txBody>
                       <a:tcPr marL="28575" marR="28575" marT="19050" marB="19050" anchor="ctr">
@@ -11356,7 +14470,7 @@
                         <a:blipFill>
                           <a:blip r:embed="rId4"/>
                           <a:stretch>
-                            <a:fillRect l="-111321" t="-200870" r="-438994" b="-137391"/>
+                            <a:fillRect l="-111321" t="-200870" r="-438994" b="-136522"/>
                           </a:stretch>
                         </a:blipFill>
                       </a:tcPr>
@@ -11661,7 +14775,7 @@
                         <a:bodyPr/>
                         <a:lstStyle/>
                         <a:p>
-                          <a:endParaRPr lang="pt-BR"/>
+                          <a:endParaRPr lang="en-US"/>
                         </a:p>
                       </a:txBody>
                       <a:tcPr marL="28575" marR="28575" marT="19050" marB="19050" anchor="b">
@@ -11704,7 +14818,7 @@
                         <a:blipFill>
                           <a:blip r:embed="rId4"/>
                           <a:stretch>
-                            <a:fillRect l="-144828" t="-501449" r="-200862" b="-128986"/>
+                            <a:fillRect l="-144828" t="-501449" r="-200862" b="-127536"/>
                           </a:stretch>
                         </a:blipFill>
                       </a:tcPr>
@@ -11714,7 +14828,7 @@
                         <a:bodyPr/>
                         <a:lstStyle/>
                         <a:p>
-                          <a:endParaRPr lang="pt-BR"/>
+                          <a:endParaRPr lang="en-US"/>
                         </a:p>
                       </a:txBody>
                       <a:tcPr marL="28575" marR="28575" marT="19050" marB="19050" anchor="b">
@@ -11757,7 +14871,7 @@
                         <a:blipFill>
                           <a:blip r:embed="rId4"/>
                           <a:stretch>
-                            <a:fillRect l="-245887" t="-501449" r="-101732" b="-128986"/>
+                            <a:fillRect l="-244828" t="-501449" r="-100862" b="-127536"/>
                           </a:stretch>
                         </a:blipFill>
                       </a:tcPr>
@@ -11767,7 +14881,7 @@
                         <a:bodyPr/>
                         <a:lstStyle/>
                         <a:p>
-                          <a:endParaRPr lang="pt-BR"/>
+                          <a:endParaRPr lang="en-US"/>
                         </a:p>
                       </a:txBody>
                       <a:tcPr marL="28575" marR="28575" marT="19050" marB="19050" anchor="b">
@@ -11810,7 +14924,7 @@
                         <a:blipFill>
                           <a:blip r:embed="rId4"/>
                           <a:stretch>
-                            <a:fillRect l="-344397" t="-501449" r="-1293" b="-128986"/>
+                            <a:fillRect l="-344828" t="-501449" r="-862" b="-127536"/>
                           </a:stretch>
                         </a:blipFill>
                       </a:tcPr>
@@ -11927,14 +15041,14 @@
           </p:graphicFrame>
         </mc:Fallback>
       </mc:AlternateContent>
-      <mc:AlternateContent xmlns:mc="http://schemas.openxmlformats.org/markup-compatibility/2006" xmlns:a14="http://schemas.microsoft.com/office/drawing/2010/main">
-        <mc:Choice Requires="a14">
+      <mc:AlternateContent xmlns:mc="http://schemas.openxmlformats.org/markup-compatibility/2006">
+        <mc:Choice xmlns:a14="http://schemas.microsoft.com/office/drawing/2010/main" Requires="a14">
           <p:sp>
             <p:nvSpPr>
               <p:cNvPr id="5" name="CaixaDeTexto 4">
                 <a:extLst>
                   <a:ext uri="{FF2B5EF4-FFF2-40B4-BE49-F238E27FC236}">
-                    <a16:creationId xmlns:a16="http://schemas.microsoft.com/office/drawing/2014/main" id="{C5882695-5DE1-C1D3-36F2-0FBA637ABB6A}"/>
+                    <a16:creationId xmlns:a16="http://schemas.microsoft.com/office/drawing/2014/main" id="{23FA4BC7-C097-6186-8E44-F91117C6BABA}"/>
                   </a:ext>
                 </a:extLst>
               </p:cNvPr>
@@ -11943,7 +15057,7 @@
             </p:nvSpPr>
             <p:spPr>
               <a:xfrm>
-                <a:off x="2063640" y="2305325"/>
+                <a:off x="2499068" y="2207354"/>
                 <a:ext cx="4233333" cy="461665"/>
               </a:xfrm>
               <a:prstGeom prst="rect">
@@ -11999,13 +15113,13 @@
             </p:txBody>
           </p:sp>
         </mc:Choice>
-        <mc:Fallback xmlns="">
+        <mc:Fallback>
           <p:sp>
             <p:nvSpPr>
               <p:cNvPr id="5" name="CaixaDeTexto 4">
                 <a:extLst>
                   <a:ext uri="{FF2B5EF4-FFF2-40B4-BE49-F238E27FC236}">
-                    <a16:creationId xmlns:a16="http://schemas.microsoft.com/office/drawing/2014/main" id="{C5882695-5DE1-C1D3-36F2-0FBA637ABB6A}"/>
+                    <a16:creationId xmlns:a16="http://schemas.microsoft.com/office/drawing/2014/main" id="{23FA4BC7-C097-6186-8E44-F91117C6BABA}"/>
                   </a:ext>
                 </a:extLst>
               </p:cNvPr>
@@ -12016,7 +15130,7 @@
             </p:nvSpPr>
             <p:spPr>
               <a:xfrm>
-                <a:off x="2063640" y="2305325"/>
+                <a:off x="2499068" y="2207354"/>
                 <a:ext cx="4233333" cy="461665"/>
               </a:xfrm>
               <a:prstGeom prst="rect">
@@ -12034,7 +15148,7 @@
               <a:lstStyle/>
               <a:p>
                 <a:r>
-                  <a:rPr lang="pt-BR">
+                  <a:rPr lang="en-US">
                     <a:noFill/>
                   </a:rPr>
                   <a:t> </a:t>
@@ -12047,7 +15161,7 @@
     </p:spTree>
     <p:extLst>
       <p:ext uri="{BB962C8B-B14F-4D97-AF65-F5344CB8AC3E}">
-        <p14:creationId xmlns:p14="http://schemas.microsoft.com/office/powerpoint/2010/main" val="3065138383"/>
+        <p14:creationId xmlns:p14="http://schemas.microsoft.com/office/powerpoint/2010/main" val="177720554"/>
       </p:ext>
     </p:extLst>
   </p:cSld>
@@ -12057,7 +15171,7 @@
 </p:sld>
 </file>
 
-<file path=ppt/slides/slide18.xml><?xml version="1.0" encoding="utf-8"?>
+<file path=ppt/slides/slide23.xml><?xml version="1.0" encoding="utf-8"?>
 <p:sld xmlns:a="http://schemas.openxmlformats.org/drawingml/2006/main" xmlns:r="http://schemas.openxmlformats.org/officeDocument/2006/relationships" xmlns:p="http://schemas.openxmlformats.org/presentationml/2006/main">
   <p:cSld>
     <p:spTree>
@@ -12074,8 +15188,8 @@
           <a:chExt cx="0" cy="0"/>
         </a:xfrm>
       </p:grpSpPr>
-      <mc:AlternateContent xmlns:mc="http://schemas.openxmlformats.org/markup-compatibility/2006" xmlns:a14="http://schemas.microsoft.com/office/drawing/2010/main">
-        <mc:Choice Requires="a14">
+      <mc:AlternateContent xmlns:mc="http://schemas.openxmlformats.org/markup-compatibility/2006">
+        <mc:Choice xmlns:a14="http://schemas.microsoft.com/office/drawing/2010/main" Requires="a14">
           <p:sp>
             <p:nvSpPr>
               <p:cNvPr id="2" name="Título 1">
@@ -12099,33 +15213,30 @@
               <a:p>
                 <a:r>
                   <a:rPr lang="pt-BR" dirty="0"/>
-                  <a:t>Matriz de confusão para caso multiclasses (</a:t>
+                  <a:t>Matriz de confusão para </a:t>
                 </a:r>
                 <a14:m>
                   <m:oMath xmlns:m="http://schemas.openxmlformats.org/officeDocument/2006/math">
                     <m:r>
-                      <a:rPr lang="pt-BR" b="0" i="1" smtClean="0">
+                      <a:rPr lang="pt-BR" i="1">
                         <a:latin typeface="Cambria Math" panose="02040503050406030204" pitchFamily="18" charset="0"/>
                       </a:rPr>
                       <m:t>𝑄</m:t>
                     </m:r>
                     <m:r>
-                      <a:rPr lang="pt-BR" b="0" i="1" smtClean="0">
+                      <a:rPr lang="pt-BR" i="1">
                         <a:latin typeface="Cambria Math" panose="02040503050406030204" pitchFamily="18" charset="0"/>
                       </a:rPr>
-                      <m:t>&gt;2</m:t>
+                      <m:t>=3</m:t>
                     </m:r>
                   </m:oMath>
                 </a14:m>
-                <a:r>
-                  <a:rPr lang="pt-BR" dirty="0"/>
-                  <a:t>)</a:t>
-                </a:r>
+                <a:endParaRPr lang="pt-BR" dirty="0"/>
               </a:p>
             </p:txBody>
           </p:sp>
         </mc:Choice>
-        <mc:Fallback xmlns="">
+        <mc:Fallback>
           <p:sp>
             <p:nvSpPr>
               <p:cNvPr id="2" name="Título 1">
@@ -12146,7 +15257,7 @@
               <a:blipFill>
                 <a:blip r:embed="rId2"/>
                 <a:stretch>
-                  <a:fillRect l="-2377" t="-13364" b="-21198"/>
+                  <a:fillRect l="-2377"/>
                 </a:stretch>
               </a:blipFill>
             </p:spPr>
@@ -12155,7 +15266,7 @@
               <a:lstStyle/>
               <a:p>
                 <a:r>
-                  <a:rPr lang="pt-BR">
+                  <a:rPr lang="en-US">
                     <a:noFill/>
                   </a:rPr>
                   <a:t> </a:t>
@@ -18910,7 +22021,7 @@
 </p:sld>
 </file>
 
-<file path=ppt/slides/slide19.xml><?xml version="1.0" encoding="utf-8"?>
+<file path=ppt/slides/slide24.xml><?xml version="1.0" encoding="utf-8"?>
 <p:sld xmlns:a="http://schemas.openxmlformats.org/drawingml/2006/main" xmlns:r="http://schemas.openxmlformats.org/officeDocument/2006/relationships" xmlns:p="http://schemas.openxmlformats.org/presentationml/2006/main">
   <p:cSld>
     <p:spTree>
@@ -18929,42 +22040,10 @@
       </p:grpSpPr>
       <p:sp>
         <p:nvSpPr>
-          <p:cNvPr id="2" name="Título 1">
+          <p:cNvPr id="3" name="Content Placeholder 2">
             <a:extLst>
               <a:ext uri="{FF2B5EF4-FFF2-40B4-BE49-F238E27FC236}">
-                <a16:creationId xmlns:a16="http://schemas.microsoft.com/office/drawing/2014/main" id="{0BF87474-9D5C-0B3D-63E8-AD1CF986CDF4}"/>
-              </a:ext>
-            </a:extLst>
-          </p:cNvPr>
-          <p:cNvSpPr>
-            <a:spLocks noGrp="1"/>
-          </p:cNvSpPr>
-          <p:nvPr>
-            <p:ph type="title"/>
-          </p:nvPr>
-        </p:nvSpPr>
-        <p:spPr/>
-        <p:txBody>
-          <a:bodyPr/>
-          <a:lstStyle/>
-          <a:p>
-            <a:r>
-              <a:rPr lang="pt-BR" dirty="0"/>
-              <a:t>Precisão versus </a:t>
-            </a:r>
-            <a:r>
-              <a:rPr lang="pt-BR" i="1" dirty="0"/>
-              <a:t>recall</a:t>
-            </a:r>
-          </a:p>
-        </p:txBody>
-      </p:sp>
-      <p:sp>
-        <p:nvSpPr>
-          <p:cNvPr id="3" name="Espaço Reservado para Conteúdo 2">
-            <a:extLst>
-              <a:ext uri="{FF2B5EF4-FFF2-40B4-BE49-F238E27FC236}">
-                <a16:creationId xmlns:a16="http://schemas.microsoft.com/office/drawing/2014/main" id="{82DAA94B-AA8F-AF15-EE11-8B107DF8C311}"/>
+                <a16:creationId xmlns:a16="http://schemas.microsoft.com/office/drawing/2014/main" id="{21699DC6-5E81-1EFB-D850-9CA5951E88B7}"/>
               </a:ext>
             </a:extLst>
           </p:cNvPr>
@@ -18977,508 +22056,8 @@
         </p:nvSpPr>
         <p:spPr>
           <a:xfrm>
-            <a:off x="5710136" y="1825624"/>
-            <a:ext cx="6352162" cy="5032375"/>
-          </a:xfrm>
-        </p:spPr>
-        <p:txBody>
-          <a:bodyPr>
-            <a:normAutofit lnSpcReduction="10000"/>
-          </a:bodyPr>
-          <a:lstStyle/>
-          <a:p>
-            <a:r>
-              <a:rPr lang="pt-BR" dirty="0"/>
-              <a:t>A </a:t>
-            </a:r>
-            <a:r>
-              <a:rPr lang="pt-BR" b="1" i="1" dirty="0">
-                <a:solidFill>
-                  <a:srgbClr val="00B050"/>
-                </a:solidFill>
-              </a:rPr>
-              <a:t>precisão</a:t>
-            </a:r>
-            <a:r>
-              <a:rPr lang="pt-BR" dirty="0"/>
-              <a:t> não fornece informações a respeito da quantidade de </a:t>
-            </a:r>
-            <a:r>
-              <a:rPr lang="pt-BR" b="1" i="1" dirty="0">
-                <a:solidFill>
-                  <a:srgbClr val="00B050"/>
-                </a:solidFill>
-              </a:rPr>
-              <a:t>falsos negativos</a:t>
-            </a:r>
-            <a:r>
-              <a:rPr lang="pt-BR" dirty="0"/>
-              <a:t>. </a:t>
-            </a:r>
-          </a:p>
-          <a:p>
-            <a:r>
-              <a:rPr lang="pt-BR" dirty="0"/>
-              <a:t>Por outro lado, o </a:t>
-            </a:r>
-            <a:r>
-              <a:rPr lang="pt-BR" b="1" i="1" dirty="0">
-                <a:solidFill>
-                  <a:srgbClr val="00B050"/>
-                </a:solidFill>
-              </a:rPr>
-              <a:t>recall</a:t>
-            </a:r>
-            <a:r>
-              <a:rPr lang="pt-BR" dirty="0"/>
-              <a:t> não fornece informações a respeito da quantidade de </a:t>
-            </a:r>
-            <a:r>
-              <a:rPr lang="pt-BR" b="1" i="1" dirty="0">
-                <a:solidFill>
-                  <a:srgbClr val="00B050"/>
-                </a:solidFill>
-              </a:rPr>
-              <a:t>falsos positivos</a:t>
-            </a:r>
-            <a:r>
-              <a:rPr lang="pt-BR" dirty="0"/>
-              <a:t>.</a:t>
-            </a:r>
-          </a:p>
-          <a:p>
-            <a:r>
-              <a:rPr lang="pt-BR" dirty="0"/>
-              <a:t>Mas e se os </a:t>
-            </a:r>
-            <a:r>
-              <a:rPr lang="pt-BR" b="1" i="1" dirty="0">
-                <a:solidFill>
-                  <a:srgbClr val="00B050"/>
-                </a:solidFill>
-              </a:rPr>
-              <a:t>custos associados a falsos positivos e negativos são iguais</a:t>
-            </a:r>
-            <a:r>
-              <a:rPr lang="pt-BR" dirty="0"/>
-              <a:t>?</a:t>
-            </a:r>
-          </a:p>
-          <a:p>
-            <a:r>
-              <a:rPr lang="pt-BR" dirty="0"/>
-              <a:t>Nesse caso, para analisarmos o desempenho de um classificador, precisamos de uma métrica que </a:t>
-            </a:r>
-            <a:r>
-              <a:rPr lang="pt-BR" b="1" i="1" dirty="0">
-                <a:solidFill>
-                  <a:srgbClr val="00B050"/>
-                </a:solidFill>
-              </a:rPr>
-              <a:t>combine as duas</a:t>
-            </a:r>
-            <a:r>
-              <a:rPr lang="pt-BR" dirty="0"/>
-              <a:t>.</a:t>
-            </a:r>
-          </a:p>
-          <a:p>
-            <a:endParaRPr lang="pt-BR" dirty="0"/>
-          </a:p>
-        </p:txBody>
-      </p:sp>
-      <mc:AlternateContent xmlns:mc="http://schemas.openxmlformats.org/markup-compatibility/2006" xmlns:a14="http://schemas.microsoft.com/office/drawing/2010/main">
-        <mc:Choice Requires="a14">
-          <p:sp>
-            <p:nvSpPr>
-              <p:cNvPr id="4" name="CaixaDeTexto 3">
-                <a:extLst>
-                  <a:ext uri="{FF2B5EF4-FFF2-40B4-BE49-F238E27FC236}">
-                    <a16:creationId xmlns:a16="http://schemas.microsoft.com/office/drawing/2014/main" id="{B66DD82C-2C7C-932B-0676-6777E743E2CA}"/>
-                  </a:ext>
-                </a:extLst>
-              </p:cNvPr>
-              <p:cNvSpPr txBox="1"/>
-              <p:nvPr/>
-            </p:nvSpPr>
-            <p:spPr>
-              <a:xfrm>
-                <a:off x="838200" y="4204505"/>
-                <a:ext cx="3417711" cy="1022524"/>
-              </a:xfrm>
-              <a:prstGeom prst="rect">
-                <a:avLst/>
-              </a:prstGeom>
-              <a:noFill/>
-            </p:spPr>
-            <p:txBody>
-              <a:bodyPr wrap="square">
-                <a:spAutoFit/>
-              </a:bodyPr>
-              <a:lstStyle/>
-              <a:p>
-                <a:pPr/>
-                <a14:m>
-                  <m:oMathPara xmlns:m="http://schemas.openxmlformats.org/officeDocument/2006/math">
-                    <m:oMathParaPr>
-                      <m:jc m:val="centerGroup"/>
-                    </m:oMathParaPr>
-                    <m:oMath xmlns:m="http://schemas.openxmlformats.org/officeDocument/2006/math">
-                      <m:r>
-                        <a:rPr lang="pt-BR" sz="3200" b="0" i="1" smtClean="0">
-                          <a:latin typeface="Cambria Math" panose="02040503050406030204" pitchFamily="18" charset="0"/>
-                        </a:rPr>
-                        <m:t>𝑟𝑒𝑐𝑎𝑙𝑙</m:t>
-                      </m:r>
-                      <m:r>
-                        <a:rPr lang="pt-BR" sz="3200" i="1">
-                          <a:latin typeface="Cambria Math" panose="02040503050406030204" pitchFamily="18" charset="0"/>
-                        </a:rPr>
-                        <m:t>=</m:t>
-                      </m:r>
-                      <m:f>
-                        <m:fPr>
-                          <m:ctrlPr>
-                            <a:rPr lang="pt-BR" sz="3200" i="1">
-                              <a:latin typeface="Cambria Math" panose="02040503050406030204" pitchFamily="18" charset="0"/>
-                            </a:rPr>
-                          </m:ctrlPr>
-                        </m:fPr>
-                        <m:num>
-                          <m:r>
-                            <m:rPr>
-                              <m:sty m:val="p"/>
-                            </m:rPr>
-                            <a:rPr lang="pt-BR" sz="3200" i="0">
-                              <a:latin typeface="Cambria Math" panose="02040503050406030204" pitchFamily="18" charset="0"/>
-                            </a:rPr>
-                            <m:t>TP</m:t>
-                          </m:r>
-                        </m:num>
-                        <m:den>
-                          <m:r>
-                            <m:rPr>
-                              <m:sty m:val="p"/>
-                            </m:rPr>
-                            <a:rPr lang="pt-BR" sz="3200" i="0">
-                              <a:latin typeface="Cambria Math" panose="02040503050406030204" pitchFamily="18" charset="0"/>
-                            </a:rPr>
-                            <m:t>FN</m:t>
-                          </m:r>
-                          <m:r>
-                            <a:rPr lang="pt-BR" sz="3200" b="0" i="0" smtClean="0">
-                              <a:latin typeface="Cambria Math" panose="02040503050406030204" pitchFamily="18" charset="0"/>
-                            </a:rPr>
-                            <m:t>+</m:t>
-                          </m:r>
-                          <m:r>
-                            <m:rPr>
-                              <m:sty m:val="p"/>
-                            </m:rPr>
-                            <a:rPr lang="pt-BR" sz="3200">
-                              <a:latin typeface="Cambria Math" panose="02040503050406030204" pitchFamily="18" charset="0"/>
-                            </a:rPr>
-                            <m:t>TP</m:t>
-                          </m:r>
-                        </m:den>
-                      </m:f>
-                    </m:oMath>
-                  </m:oMathPara>
-                </a14:m>
-                <a:endParaRPr lang="pt-BR" sz="3200" dirty="0"/>
-              </a:p>
-            </p:txBody>
-          </p:sp>
-        </mc:Choice>
-        <mc:Fallback xmlns="">
-          <p:sp>
-            <p:nvSpPr>
-              <p:cNvPr id="4" name="CaixaDeTexto 3">
-                <a:extLst>
-                  <a:ext uri="{FF2B5EF4-FFF2-40B4-BE49-F238E27FC236}">
-                    <a16:creationId xmlns:a16="http://schemas.microsoft.com/office/drawing/2014/main" id="{B66DD82C-2C7C-932B-0676-6777E743E2CA}"/>
-                  </a:ext>
-                </a:extLst>
-              </p:cNvPr>
-              <p:cNvSpPr txBox="1">
-                <a:spLocks noRot="1" noChangeAspect="1" noMove="1" noResize="1" noEditPoints="1" noAdjustHandles="1" noChangeArrowheads="1" noChangeShapeType="1" noTextEdit="1"/>
-              </p:cNvSpPr>
-              <p:nvPr/>
-            </p:nvSpPr>
-            <p:spPr>
-              <a:xfrm>
-                <a:off x="838200" y="4204505"/>
-                <a:ext cx="3417711" cy="1022524"/>
-              </a:xfrm>
-              <a:prstGeom prst="rect">
-                <a:avLst/>
-              </a:prstGeom>
-              <a:blipFill>
-                <a:blip r:embed="rId2"/>
-                <a:stretch>
-                  <a:fillRect/>
-                </a:stretch>
-              </a:blipFill>
-            </p:spPr>
-            <p:txBody>
-              <a:bodyPr/>
-              <a:lstStyle/>
-              <a:p>
-                <a:r>
-                  <a:rPr lang="pt-BR">
-                    <a:noFill/>
-                  </a:rPr>
-                  <a:t> </a:t>
-                </a:r>
-              </a:p>
-            </p:txBody>
-          </p:sp>
-        </mc:Fallback>
-      </mc:AlternateContent>
-      <mc:AlternateContent xmlns:mc="http://schemas.openxmlformats.org/markup-compatibility/2006" xmlns:a14="http://schemas.microsoft.com/office/drawing/2010/main">
-        <mc:Choice Requires="a14">
-          <p:sp>
-            <p:nvSpPr>
-              <p:cNvPr id="5" name="CaixaDeTexto 4">
-                <a:extLst>
-                  <a:ext uri="{FF2B5EF4-FFF2-40B4-BE49-F238E27FC236}">
-                    <a16:creationId xmlns:a16="http://schemas.microsoft.com/office/drawing/2014/main" id="{1C33F56B-917E-EDAE-B038-52C2901A324E}"/>
-                  </a:ext>
-                </a:extLst>
-              </p:cNvPr>
-              <p:cNvSpPr txBox="1"/>
-              <p:nvPr/>
-            </p:nvSpPr>
-            <p:spPr>
-              <a:xfrm>
-                <a:off x="577143" y="2563651"/>
-                <a:ext cx="3939823" cy="1022524"/>
-              </a:xfrm>
-              <a:prstGeom prst="rect">
-                <a:avLst/>
-              </a:prstGeom>
-              <a:noFill/>
-            </p:spPr>
-            <p:txBody>
-              <a:bodyPr wrap="square">
-                <a:spAutoFit/>
-              </a:bodyPr>
-              <a:lstStyle/>
-              <a:p>
-                <a:pPr/>
-                <a14:m>
-                  <m:oMathPara xmlns:m="http://schemas.openxmlformats.org/officeDocument/2006/math">
-                    <m:oMathParaPr>
-                      <m:jc m:val="centerGroup"/>
-                    </m:oMathParaPr>
-                    <m:oMath xmlns:m="http://schemas.openxmlformats.org/officeDocument/2006/math">
-                      <m:r>
-                        <m:rPr>
-                          <m:sty m:val="p"/>
-                        </m:rPr>
-                        <a:rPr lang="pt-BR" sz="3200" b="0" i="0" smtClean="0">
-                          <a:latin typeface="Cambria Math" panose="02040503050406030204" pitchFamily="18" charset="0"/>
-                        </a:rPr>
-                        <m:t>precis</m:t>
-                      </m:r>
-                      <m:r>
-                        <a:rPr lang="pt-BR" sz="3200" b="0" i="0" smtClean="0">
-                          <a:latin typeface="Cambria Math" panose="02040503050406030204" pitchFamily="18" charset="0"/>
-                        </a:rPr>
-                        <m:t>ã</m:t>
-                      </m:r>
-                      <m:r>
-                        <m:rPr>
-                          <m:sty m:val="p"/>
-                        </m:rPr>
-                        <a:rPr lang="pt-BR" sz="3200" b="0" i="0" smtClean="0">
-                          <a:latin typeface="Cambria Math" panose="02040503050406030204" pitchFamily="18" charset="0"/>
-                        </a:rPr>
-                        <m:t>o</m:t>
-                      </m:r>
-                      <m:r>
-                        <a:rPr lang="pt-BR" sz="3200" i="1">
-                          <a:latin typeface="Cambria Math" panose="02040503050406030204" pitchFamily="18" charset="0"/>
-                        </a:rPr>
-                        <m:t>=</m:t>
-                      </m:r>
-                      <m:f>
-                        <m:fPr>
-                          <m:ctrlPr>
-                            <a:rPr lang="pt-BR" sz="3200" i="1">
-                              <a:latin typeface="Cambria Math" panose="02040503050406030204" pitchFamily="18" charset="0"/>
-                            </a:rPr>
-                          </m:ctrlPr>
-                        </m:fPr>
-                        <m:num>
-                          <m:r>
-                            <m:rPr>
-                              <m:sty m:val="p"/>
-                            </m:rPr>
-                            <a:rPr lang="pt-BR" sz="3200" b="0" i="0" smtClean="0">
-                              <a:latin typeface="Cambria Math" panose="02040503050406030204" pitchFamily="18" charset="0"/>
-                            </a:rPr>
-                            <m:t>TP</m:t>
-                          </m:r>
-                        </m:num>
-                        <m:den>
-                          <m:r>
-                            <m:rPr>
-                              <m:sty m:val="p"/>
-                            </m:rPr>
-                            <a:rPr lang="pt-BR" sz="3200" b="0" i="0" smtClean="0">
-                              <a:latin typeface="Cambria Math" panose="02040503050406030204" pitchFamily="18" charset="0"/>
-                            </a:rPr>
-                            <m:t>FP</m:t>
-                          </m:r>
-                          <m:r>
-                            <a:rPr lang="pt-BR" sz="3200" b="0" i="0" smtClean="0">
-                              <a:latin typeface="Cambria Math" panose="02040503050406030204" pitchFamily="18" charset="0"/>
-                            </a:rPr>
-                            <m:t>+</m:t>
-                          </m:r>
-                          <m:r>
-                            <m:rPr>
-                              <m:sty m:val="p"/>
-                            </m:rPr>
-                            <a:rPr lang="pt-BR" sz="3200">
-                              <a:latin typeface="Cambria Math" panose="02040503050406030204" pitchFamily="18" charset="0"/>
-                            </a:rPr>
-                            <m:t>TP</m:t>
-                          </m:r>
-                        </m:den>
-                      </m:f>
-                    </m:oMath>
-                  </m:oMathPara>
-                </a14:m>
-                <a:endParaRPr lang="pt-BR" sz="3200" dirty="0"/>
-              </a:p>
-            </p:txBody>
-          </p:sp>
-        </mc:Choice>
-        <mc:Fallback xmlns="">
-          <p:sp>
-            <p:nvSpPr>
-              <p:cNvPr id="5" name="CaixaDeTexto 4">
-                <a:extLst>
-                  <a:ext uri="{FF2B5EF4-FFF2-40B4-BE49-F238E27FC236}">
-                    <a16:creationId xmlns:a16="http://schemas.microsoft.com/office/drawing/2014/main" id="{1C33F56B-917E-EDAE-B038-52C2901A324E}"/>
-                  </a:ext>
-                </a:extLst>
-              </p:cNvPr>
-              <p:cNvSpPr txBox="1">
-                <a:spLocks noRot="1" noChangeAspect="1" noMove="1" noResize="1" noEditPoints="1" noAdjustHandles="1" noChangeArrowheads="1" noChangeShapeType="1" noTextEdit="1"/>
-              </p:cNvSpPr>
-              <p:nvPr/>
-            </p:nvSpPr>
-            <p:spPr>
-              <a:xfrm>
-                <a:off x="577143" y="2563651"/>
-                <a:ext cx="3939823" cy="1022524"/>
-              </a:xfrm>
-              <a:prstGeom prst="rect">
-                <a:avLst/>
-              </a:prstGeom>
-              <a:blipFill>
-                <a:blip r:embed="rId3"/>
-                <a:stretch>
-                  <a:fillRect/>
-                </a:stretch>
-              </a:blipFill>
-            </p:spPr>
-            <p:txBody>
-              <a:bodyPr/>
-              <a:lstStyle/>
-              <a:p>
-                <a:r>
-                  <a:rPr lang="pt-BR">
-                    <a:noFill/>
-                  </a:rPr>
-                  <a:t> </a:t>
-                </a:r>
-              </a:p>
-            </p:txBody>
-          </p:sp>
-        </mc:Fallback>
-      </mc:AlternateContent>
-    </p:spTree>
-    <p:extLst>
-      <p:ext uri="{BB962C8B-B14F-4D97-AF65-F5344CB8AC3E}">
-        <p14:creationId xmlns:p14="http://schemas.microsoft.com/office/powerpoint/2010/main" val="3582549210"/>
-      </p:ext>
-    </p:extLst>
-  </p:cSld>
-  <p:clrMapOvr>
-    <a:masterClrMapping/>
-  </p:clrMapOvr>
-</p:sld>
-</file>
-
-<file path=ppt/slides/slide2.xml><?xml version="1.0" encoding="utf-8"?>
-<p:sld xmlns:a="http://schemas.openxmlformats.org/drawingml/2006/main" xmlns:r="http://schemas.openxmlformats.org/officeDocument/2006/relationships" xmlns:p="http://schemas.openxmlformats.org/presentationml/2006/main">
-  <p:cSld>
-    <p:spTree>
-      <p:nvGrpSpPr>
-        <p:cNvPr id="1" name=""/>
-        <p:cNvGrpSpPr/>
-        <p:nvPr/>
-      </p:nvGrpSpPr>
-      <p:grpSpPr>
-        <a:xfrm>
-          <a:off x="0" y="0"/>
-          <a:ext cx="0" cy="0"/>
-          <a:chOff x="0" y="0"/>
-          <a:chExt cx="0" cy="0"/>
-        </a:xfrm>
-      </p:grpSpPr>
-      <p:sp>
-        <p:nvSpPr>
-          <p:cNvPr id="2" name="Título 1">
-            <a:extLst>
-              <a:ext uri="{FF2B5EF4-FFF2-40B4-BE49-F238E27FC236}">
-                <a16:creationId xmlns:a16="http://schemas.microsoft.com/office/drawing/2014/main" id="{EECB3FED-5D1A-7084-5333-A3B2FA75F608}"/>
-              </a:ext>
-            </a:extLst>
-          </p:cNvPr>
-          <p:cNvSpPr>
-            <a:spLocks noGrp="1"/>
-          </p:cNvSpPr>
-          <p:nvPr>
-            <p:ph type="title"/>
-          </p:nvPr>
-        </p:nvSpPr>
-        <p:spPr/>
-        <p:txBody>
-          <a:bodyPr/>
-          <a:lstStyle/>
-          <a:p>
-            <a:r>
-              <a:rPr lang="pt-BR" dirty="0"/>
-              <a:t>O que vamos ver?</a:t>
-            </a:r>
-          </a:p>
-        </p:txBody>
-      </p:sp>
-      <p:sp>
-        <p:nvSpPr>
-          <p:cNvPr id="3" name="Espaço Reservado para Conteúdo 2">
-            <a:extLst>
-              <a:ext uri="{FF2B5EF4-FFF2-40B4-BE49-F238E27FC236}">
-                <a16:creationId xmlns:a16="http://schemas.microsoft.com/office/drawing/2014/main" id="{25FE7774-7186-A846-D8DE-518B2CBF4EBD}"/>
-              </a:ext>
-            </a:extLst>
-          </p:cNvPr>
-          <p:cNvSpPr>
-            <a:spLocks noGrp="1"/>
-          </p:cNvSpPr>
-          <p:nvPr>
-            <p:ph idx="1"/>
-          </p:nvPr>
-        </p:nvSpPr>
-        <p:spPr>
-          <a:xfrm>
-            <a:off x="838200" y="1825624"/>
-            <a:ext cx="11105444" cy="5032376"/>
+            <a:off x="6749143" y="2622776"/>
+            <a:ext cx="5050971" cy="2163309"/>
           </a:xfrm>
         </p:spPr>
         <p:txBody>
@@ -19489,27 +22068,69 @@
           <a:p>
             <a:r>
               <a:rPr lang="pt-BR" dirty="0"/>
-              <a:t>Anteriormente, para realizar a análise do desempenho de um classificador, usamos apenas a acurácia. </a:t>
+              <a:t>Não precisamos calcular nenhuma dessas métricas de forma manual.</a:t>
             </a:r>
           </a:p>
           <a:p>
             <a:r>
               <a:rPr lang="pt-BR" dirty="0"/>
-              <a:t>Porém, existem outras métricas que podem ser usadas para se medir a qualidade de um classificador.</a:t>
+              <a:t>Existem funções prontas para isso.</a:t>
             </a:r>
-          </a:p>
-          <a:p>
-            <a:r>
-              <a:rPr lang="pt-BR" dirty="0"/>
-              <a:t>Portanto, neste tópico, veremos algumas outras métricas.</a:t>
-            </a:r>
+            <a:endParaRPr lang="en-US" dirty="0"/>
           </a:p>
         </p:txBody>
       </p:sp>
+      <p:pic>
+        <p:nvPicPr>
+          <p:cNvPr id="1026" name="Picture 2" descr="7 razões pelas quais você não deve se desesperar com a vigência imediata da  LGPD">
+            <a:extLst>
+              <a:ext uri="{FF2B5EF4-FFF2-40B4-BE49-F238E27FC236}">
+                <a16:creationId xmlns:a16="http://schemas.microsoft.com/office/drawing/2014/main" id="{3834F76E-882E-CE2E-2975-876D4AFD7AA4}"/>
+              </a:ext>
+            </a:extLst>
+          </p:cNvPr>
+          <p:cNvPicPr>
+            <a:picLocks noChangeAspect="1" noChangeArrowheads="1"/>
+          </p:cNvPicPr>
+          <p:nvPr/>
+        </p:nvPicPr>
+        <p:blipFill>
+          <a:blip r:embed="rId2">
+            <a:extLst>
+              <a:ext uri="{28A0092B-C50C-407E-A947-70E740481C1C}">
+                <a14:useLocalDpi xmlns:a14="http://schemas.microsoft.com/office/drawing/2010/main" val="0"/>
+              </a:ext>
+            </a:extLst>
+          </a:blip>
+          <a:srcRect/>
+          <a:stretch>
+            <a:fillRect/>
+          </a:stretch>
+        </p:blipFill>
+        <p:spPr bwMode="auto">
+          <a:xfrm>
+            <a:off x="391886" y="1483405"/>
+            <a:ext cx="5754885" cy="4442052"/>
+          </a:xfrm>
+          <a:prstGeom prst="rect">
+            <a:avLst/>
+          </a:prstGeom>
+          <a:noFill/>
+          <a:extLst>
+            <a:ext uri="{909E8E84-426E-40DD-AFC4-6F175D3DCCD1}">
+              <a14:hiddenFill xmlns:a14="http://schemas.microsoft.com/office/drawing/2010/main">
+                <a:solidFill>
+                  <a:srgbClr val="FFFFFF"/>
+                </a:solidFill>
+              </a14:hiddenFill>
+            </a:ext>
+          </a:extLst>
+        </p:spPr>
+      </p:pic>
     </p:spTree>
     <p:extLst>
       <p:ext uri="{BB962C8B-B14F-4D97-AF65-F5344CB8AC3E}">
-        <p14:creationId xmlns:p14="http://schemas.microsoft.com/office/powerpoint/2010/main" val="2177516599"/>
+        <p14:creationId xmlns:p14="http://schemas.microsoft.com/office/powerpoint/2010/main" val="1486361050"/>
       </p:ext>
     </p:extLst>
   </p:cSld>
@@ -19519,660 +22140,7 @@
 </p:sld>
 </file>
 
-<file path=ppt/slides/slide20.xml><?xml version="1.0" encoding="utf-8"?>
-<p:sld xmlns:a="http://schemas.openxmlformats.org/drawingml/2006/main" xmlns:r="http://schemas.openxmlformats.org/officeDocument/2006/relationships" xmlns:p="http://schemas.openxmlformats.org/presentationml/2006/main">
-  <p:cSld>
-    <p:spTree>
-      <p:nvGrpSpPr>
-        <p:cNvPr id="1" name=""/>
-        <p:cNvGrpSpPr/>
-        <p:nvPr/>
-      </p:nvGrpSpPr>
-      <p:grpSpPr>
-        <a:xfrm>
-          <a:off x="0" y="0"/>
-          <a:ext cx="0" cy="0"/>
-          <a:chOff x="0" y="0"/>
-          <a:chExt cx="0" cy="0"/>
-        </a:xfrm>
-      </p:grpSpPr>
-      <p:sp>
-        <p:nvSpPr>
-          <p:cNvPr id="2" name="Título 1">
-            <a:extLst>
-              <a:ext uri="{FF2B5EF4-FFF2-40B4-BE49-F238E27FC236}">
-                <a16:creationId xmlns:a16="http://schemas.microsoft.com/office/drawing/2014/main" id="{B64DCA44-CC6E-8998-A693-998426B94AA3}"/>
-              </a:ext>
-            </a:extLst>
-          </p:cNvPr>
-          <p:cNvSpPr>
-            <a:spLocks noGrp="1"/>
-          </p:cNvSpPr>
-          <p:nvPr>
-            <p:ph type="title"/>
-          </p:nvPr>
-        </p:nvSpPr>
-        <p:spPr/>
-        <p:txBody>
-          <a:bodyPr/>
-          <a:lstStyle/>
-          <a:p>
-            <a:r>
-              <a:rPr lang="pt-BR" dirty="0"/>
-              <a:t>F1-</a:t>
-            </a:r>
-            <a:r>
-              <a:rPr lang="pt-BR" i="1" dirty="0"/>
-              <a:t>score</a:t>
-            </a:r>
-          </a:p>
-        </p:txBody>
-      </p:sp>
-      <mc:AlternateContent xmlns:mc="http://schemas.openxmlformats.org/markup-compatibility/2006" xmlns:a14="http://schemas.microsoft.com/office/drawing/2010/main">
-        <mc:Choice Requires="a14">
-          <p:sp>
-            <p:nvSpPr>
-              <p:cNvPr id="3" name="Espaço Reservado para Conteúdo 2">
-                <a:extLst>
-                  <a:ext uri="{FF2B5EF4-FFF2-40B4-BE49-F238E27FC236}">
-                    <a16:creationId xmlns:a16="http://schemas.microsoft.com/office/drawing/2014/main" id="{C261D671-8D7F-BF6D-3C19-CFC15A190C23}"/>
-                  </a:ext>
-                </a:extLst>
-              </p:cNvPr>
-              <p:cNvSpPr>
-                <a:spLocks noGrp="1"/>
-              </p:cNvSpPr>
-              <p:nvPr>
-                <p:ph idx="1"/>
-              </p:nvPr>
-            </p:nvSpPr>
-            <p:spPr>
-              <a:xfrm>
-                <a:off x="838200" y="1825624"/>
-                <a:ext cx="11185187" cy="5032375"/>
-              </a:xfrm>
-            </p:spPr>
-            <p:txBody>
-              <a:bodyPr>
-                <a:normAutofit/>
-              </a:bodyPr>
-              <a:lstStyle/>
-              <a:p>
-                <a:r>
-                  <a:rPr lang="pt-BR" dirty="0"/>
-                  <a:t>O F1-</a:t>
-                </a:r>
-                <a:r>
-                  <a:rPr lang="pt-BR" i="1" dirty="0"/>
-                  <a:t>score</a:t>
-                </a:r>
-                <a:r>
-                  <a:rPr lang="pt-BR" dirty="0"/>
-                  <a:t> combina as duas métricas em uma única.</a:t>
-                </a:r>
-              </a:p>
-              <a:p>
-                <a:r>
-                  <a:rPr lang="pt-BR" dirty="0"/>
-                  <a:t>A métrica dá a mesma importância a </a:t>
-                </a:r>
-                <a:r>
-                  <a:rPr lang="pt-BR" b="1" i="1" dirty="0"/>
-                  <a:t>precisão</a:t>
-                </a:r>
-                <a:r>
-                  <a:rPr lang="pt-BR" dirty="0"/>
-                  <a:t> e para o </a:t>
-                </a:r>
-                <a:r>
-                  <a:rPr lang="pt-BR" b="1" i="1" dirty="0"/>
-                  <a:t>recall</a:t>
-                </a:r>
-                <a:r>
-                  <a:rPr lang="pt-BR" dirty="0"/>
-                  <a:t>.</a:t>
-                </a:r>
-              </a:p>
-              <a:p>
-                <a:r>
-                  <a:rPr lang="pt-BR" dirty="0"/>
-                  <a:t>Valores de </a:t>
-                </a:r>
-                <a14:m>
-                  <m:oMath xmlns:m="http://schemas.openxmlformats.org/officeDocument/2006/math">
-                    <m:sSub>
-                      <m:sSubPr>
-                        <m:ctrlPr>
-                          <a:rPr lang="pt-BR" i="1">
-                            <a:latin typeface="Cambria Math" panose="02040503050406030204" pitchFamily="18" charset="0"/>
-                          </a:rPr>
-                        </m:ctrlPr>
-                      </m:sSubPr>
-                      <m:e>
-                        <m:r>
-                          <a:rPr lang="pt-BR" i="1">
-                            <a:latin typeface="Cambria Math" panose="02040503050406030204" pitchFamily="18" charset="0"/>
-                          </a:rPr>
-                          <m:t>𝐹</m:t>
-                        </m:r>
-                      </m:e>
-                      <m:sub>
-                        <m:r>
-                          <a:rPr lang="pt-BR" i="1">
-                            <a:latin typeface="Cambria Math" panose="02040503050406030204" pitchFamily="18" charset="0"/>
-                          </a:rPr>
-                          <m:t>1</m:t>
-                        </m:r>
-                      </m:sub>
-                    </m:sSub>
-                  </m:oMath>
-                </a14:m>
-                <a:r>
-                  <a:rPr lang="pt-BR" dirty="0"/>
-                  <a:t> próximos de 1 indicam que o </a:t>
-                </a:r>
-                <a:r>
-                  <a:rPr lang="pt-BR" b="1" i="1" dirty="0"/>
-                  <a:t>classificador</a:t>
-                </a:r>
-                <a:r>
-                  <a:rPr lang="pt-BR" dirty="0"/>
-                  <a:t> obteve ótimos resultados tanto de </a:t>
-                </a:r>
-                <a:r>
-                  <a:rPr lang="pt-BR" b="1" i="1" dirty="0"/>
-                  <a:t>precisão</a:t>
-                </a:r>
-                <a:r>
-                  <a:rPr lang="pt-BR" dirty="0"/>
-                  <a:t> quanto de </a:t>
-                </a:r>
-                <a:r>
-                  <a:rPr lang="pt-BR" b="1" i="1" dirty="0"/>
-                  <a:t>recall</a:t>
-                </a:r>
-                <a:r>
-                  <a:rPr lang="pt-BR" dirty="0"/>
-                  <a:t>.</a:t>
-                </a:r>
-              </a:p>
-              <a:p>
-                <a:r>
-                  <a:rPr lang="pt-BR" dirty="0"/>
-                  <a:t>Em outras palavras, </a:t>
-                </a:r>
-                <a14:m>
-                  <m:oMath xmlns:m="http://schemas.openxmlformats.org/officeDocument/2006/math">
-                    <m:sSub>
-                      <m:sSubPr>
-                        <m:ctrlPr>
-                          <a:rPr lang="pt-BR" i="1" smtClean="0">
-                            <a:latin typeface="Cambria Math" panose="02040503050406030204" pitchFamily="18" charset="0"/>
-                          </a:rPr>
-                        </m:ctrlPr>
-                      </m:sSubPr>
-                      <m:e>
-                        <m:r>
-                          <a:rPr lang="pt-BR" i="1">
-                            <a:latin typeface="Cambria Math" panose="02040503050406030204" pitchFamily="18" charset="0"/>
-                          </a:rPr>
-                          <m:t>𝐹</m:t>
-                        </m:r>
-                      </m:e>
-                      <m:sub>
-                        <m:r>
-                          <a:rPr lang="pt-BR" i="1">
-                            <a:latin typeface="Cambria Math" panose="02040503050406030204" pitchFamily="18" charset="0"/>
-                          </a:rPr>
-                          <m:t>1</m:t>
-                        </m:r>
-                      </m:sub>
-                    </m:sSub>
-                    <m:r>
-                      <a:rPr lang="pt-BR" i="1" smtClean="0">
-                        <a:latin typeface="Cambria Math" panose="02040503050406030204" pitchFamily="18" charset="0"/>
-                        <a:ea typeface="Cambria Math" panose="02040503050406030204" pitchFamily="18" charset="0"/>
-                      </a:rPr>
-                      <m:t>≈</m:t>
-                    </m:r>
-                    <m:r>
-                      <a:rPr lang="pt-BR" b="0" i="1" smtClean="0">
-                        <a:latin typeface="Cambria Math" panose="02040503050406030204" pitchFamily="18" charset="0"/>
-                        <a:ea typeface="Cambria Math" panose="02040503050406030204" pitchFamily="18" charset="0"/>
-                      </a:rPr>
-                      <m:t>1</m:t>
-                    </m:r>
-                  </m:oMath>
-                </a14:m>
-                <a:r>
-                  <a:rPr lang="pt-BR" dirty="0"/>
-                  <a:t> significa que </a:t>
-                </a:r>
-                <a14:m>
-                  <m:oMath xmlns:m="http://schemas.openxmlformats.org/officeDocument/2006/math">
-                    <m:r>
-                      <m:rPr>
-                        <m:sty m:val="p"/>
-                      </m:rPr>
-                      <a:rPr lang="pt-BR">
-                        <a:latin typeface="Cambria Math" panose="02040503050406030204" pitchFamily="18" charset="0"/>
-                      </a:rPr>
-                      <m:t>FN</m:t>
-                    </m:r>
-                  </m:oMath>
-                </a14:m>
-                <a:r>
-                  <a:rPr lang="pt-BR" dirty="0">
-                    <a:ea typeface="Cambria Math" panose="02040503050406030204" pitchFamily="18" charset="0"/>
-                  </a:rPr>
-                  <a:t> e </a:t>
-                </a:r>
-                <a14:m>
-                  <m:oMath xmlns:m="http://schemas.openxmlformats.org/officeDocument/2006/math">
-                    <m:r>
-                      <m:rPr>
-                        <m:sty m:val="p"/>
-                      </m:rPr>
-                      <a:rPr lang="pt-BR">
-                        <a:latin typeface="Cambria Math" panose="02040503050406030204" pitchFamily="18" charset="0"/>
-                      </a:rPr>
-                      <m:t>FP</m:t>
-                    </m:r>
-                  </m:oMath>
-                </a14:m>
-                <a:r>
-                  <a:rPr lang="pt-BR" dirty="0">
-                    <a:ea typeface="Cambria Math" panose="02040503050406030204" pitchFamily="18" charset="0"/>
-                  </a:rPr>
-                  <a:t> </a:t>
-                </a:r>
-                <a14:m>
-                  <m:oMath xmlns:m="http://schemas.openxmlformats.org/officeDocument/2006/math">
-                    <m:r>
-                      <a:rPr lang="pt-BR" i="1">
-                        <a:latin typeface="Cambria Math" panose="02040503050406030204" pitchFamily="18" charset="0"/>
-                        <a:ea typeface="Cambria Math" panose="02040503050406030204" pitchFamily="18" charset="0"/>
-                      </a:rPr>
-                      <m:t>≈</m:t>
-                    </m:r>
-                    <m:r>
-                      <a:rPr lang="pt-BR" b="0" i="1" smtClean="0">
-                        <a:latin typeface="Cambria Math" panose="02040503050406030204" pitchFamily="18" charset="0"/>
-                        <a:ea typeface="Cambria Math" panose="02040503050406030204" pitchFamily="18" charset="0"/>
-                      </a:rPr>
-                      <m:t>0</m:t>
-                    </m:r>
-                  </m:oMath>
-                </a14:m>
-                <a:r>
-                  <a:rPr lang="pt-BR" dirty="0"/>
-                  <a:t>.</a:t>
-                </a:r>
-              </a:p>
-            </p:txBody>
-          </p:sp>
-        </mc:Choice>
-        <mc:Fallback xmlns="">
-          <p:sp>
-            <p:nvSpPr>
-              <p:cNvPr id="3" name="Espaço Reservado para Conteúdo 2">
-                <a:extLst>
-                  <a:ext uri="{FF2B5EF4-FFF2-40B4-BE49-F238E27FC236}">
-                    <a16:creationId xmlns:a16="http://schemas.microsoft.com/office/drawing/2014/main" id="{C261D671-8D7F-BF6D-3C19-CFC15A190C23}"/>
-                  </a:ext>
-                </a:extLst>
-              </p:cNvPr>
-              <p:cNvSpPr>
-                <a:spLocks noGrp="1" noRot="1" noChangeAspect="1" noMove="1" noResize="1" noEditPoints="1" noAdjustHandles="1" noChangeArrowheads="1" noChangeShapeType="1" noTextEdit="1"/>
-              </p:cNvSpPr>
-              <p:nvPr>
-                <p:ph idx="1"/>
-              </p:nvPr>
-            </p:nvSpPr>
-            <p:spPr>
-              <a:xfrm>
-                <a:off x="838200" y="1825624"/>
-                <a:ext cx="11185187" cy="5032375"/>
-              </a:xfrm>
-              <a:blipFill>
-                <a:blip r:embed="rId2"/>
-                <a:stretch>
-                  <a:fillRect l="-981" t="-1937"/>
-                </a:stretch>
-              </a:blipFill>
-            </p:spPr>
-            <p:txBody>
-              <a:bodyPr/>
-              <a:lstStyle/>
-              <a:p>
-                <a:r>
-                  <a:rPr lang="pt-BR">
-                    <a:noFill/>
-                  </a:rPr>
-                  <a:t> </a:t>
-                </a:r>
-              </a:p>
-            </p:txBody>
-          </p:sp>
-        </mc:Fallback>
-      </mc:AlternateContent>
-      <mc:AlternateContent xmlns:mc="http://schemas.openxmlformats.org/markup-compatibility/2006" xmlns:a14="http://schemas.microsoft.com/office/drawing/2010/main">
-        <mc:Choice Requires="a14">
-          <p:sp>
-            <p:nvSpPr>
-              <p:cNvPr id="5" name="CaixaDeTexto 4">
-                <a:extLst>
-                  <a:ext uri="{FF2B5EF4-FFF2-40B4-BE49-F238E27FC236}">
-                    <a16:creationId xmlns:a16="http://schemas.microsoft.com/office/drawing/2014/main" id="{C0A929A7-E33F-6D02-D301-38706DE0743C}"/>
-                  </a:ext>
-                </a:extLst>
-              </p:cNvPr>
-              <p:cNvSpPr txBox="1"/>
-              <p:nvPr/>
-            </p:nvSpPr>
-            <p:spPr>
-              <a:xfrm>
-                <a:off x="1589091" y="4664413"/>
-                <a:ext cx="9013818" cy="1418273"/>
-              </a:xfrm>
-              <a:prstGeom prst="rect">
-                <a:avLst/>
-              </a:prstGeom>
-              <a:noFill/>
-            </p:spPr>
-            <p:txBody>
-              <a:bodyPr wrap="square">
-                <a:spAutoFit/>
-              </a:bodyPr>
-              <a:lstStyle/>
-              <a:p>
-                <a:pPr marL="0" indent="0" algn="ctr">
-                  <a:buNone/>
-                </a:pPr>
-                <a14:m>
-                  <m:oMathPara xmlns:m="http://schemas.openxmlformats.org/officeDocument/2006/math">
-                    <m:oMathParaPr>
-                      <m:jc m:val="centerGroup"/>
-                    </m:oMathParaPr>
-                    <m:oMath xmlns:m="http://schemas.openxmlformats.org/officeDocument/2006/math">
-                      <m:sSub>
-                        <m:sSubPr>
-                          <m:ctrlPr>
-                            <a:rPr lang="pt-BR" sz="3200" i="1" smtClean="0">
-                              <a:latin typeface="Cambria Math" panose="02040503050406030204" pitchFamily="18" charset="0"/>
-                            </a:rPr>
-                          </m:ctrlPr>
-                        </m:sSubPr>
-                        <m:e>
-                          <m:r>
-                            <a:rPr lang="pt-BR" sz="3200" i="1">
-                              <a:latin typeface="Cambria Math" panose="02040503050406030204" pitchFamily="18" charset="0"/>
-                            </a:rPr>
-                            <m:t>𝐹</m:t>
-                          </m:r>
-                        </m:e>
-                        <m:sub>
-                          <m:r>
-                            <a:rPr lang="pt-BR" sz="3200" b="0" i="1" smtClean="0">
-                              <a:latin typeface="Cambria Math" panose="02040503050406030204" pitchFamily="18" charset="0"/>
-                            </a:rPr>
-                            <m:t>1</m:t>
-                          </m:r>
-                        </m:sub>
-                      </m:sSub>
-                      <m:r>
-                        <a:rPr lang="pt-BR" sz="3200" i="1">
-                          <a:latin typeface="Cambria Math" panose="02040503050406030204" pitchFamily="18" charset="0"/>
-                        </a:rPr>
-                        <m:t>=</m:t>
-                      </m:r>
-                      <m:f>
-                        <m:fPr>
-                          <m:ctrlPr>
-                            <a:rPr lang="pt-BR" sz="3200" b="0" i="1" smtClean="0">
-                              <a:latin typeface="Cambria Math" panose="02040503050406030204" pitchFamily="18" charset="0"/>
-                            </a:rPr>
-                          </m:ctrlPr>
-                        </m:fPr>
-                        <m:num>
-                          <m:r>
-                            <m:rPr>
-                              <m:sty m:val="p"/>
-                            </m:rPr>
-                            <a:rPr lang="pt-BR" sz="3200" b="0" i="0" smtClean="0">
-                              <a:latin typeface="Cambria Math" panose="02040503050406030204" pitchFamily="18" charset="0"/>
-                            </a:rPr>
-                            <m:t>TP</m:t>
-                          </m:r>
-                        </m:num>
-                        <m:den>
-                          <m:r>
-                            <m:rPr>
-                              <m:sty m:val="p"/>
-                            </m:rPr>
-                            <a:rPr lang="pt-BR" sz="3200" b="0" i="0" smtClean="0">
-                              <a:latin typeface="Cambria Math" panose="02040503050406030204" pitchFamily="18" charset="0"/>
-                            </a:rPr>
-                            <m:t>TP</m:t>
-                          </m:r>
-                          <m:r>
-                            <a:rPr lang="pt-BR" sz="3200" b="0" i="0" smtClean="0">
-                              <a:latin typeface="Cambria Math" panose="02040503050406030204" pitchFamily="18" charset="0"/>
-                            </a:rPr>
-                            <m:t>+</m:t>
-                          </m:r>
-                          <m:f>
-                            <m:fPr>
-                              <m:ctrlPr>
-                                <a:rPr lang="pt-BR" sz="3200" b="0" i="1" smtClean="0">
-                                  <a:latin typeface="Cambria Math" panose="02040503050406030204" pitchFamily="18" charset="0"/>
-                                </a:rPr>
-                              </m:ctrlPr>
-                            </m:fPr>
-                            <m:num>
-                              <m:r>
-                                <m:rPr>
-                                  <m:sty m:val="p"/>
-                                </m:rPr>
-                                <a:rPr lang="pt-BR" sz="3200" b="0" i="0" smtClean="0">
-                                  <a:latin typeface="Cambria Math" panose="02040503050406030204" pitchFamily="18" charset="0"/>
-                                </a:rPr>
-                                <m:t>FN</m:t>
-                              </m:r>
-                              <m:r>
-                                <a:rPr lang="pt-BR" sz="3200" b="0" i="0" smtClean="0">
-                                  <a:latin typeface="Cambria Math" panose="02040503050406030204" pitchFamily="18" charset="0"/>
-                                </a:rPr>
-                                <m:t>+</m:t>
-                              </m:r>
-                              <m:r>
-                                <m:rPr>
-                                  <m:sty m:val="p"/>
-                                </m:rPr>
-                                <a:rPr lang="pt-BR" sz="3200" b="0" i="0" smtClean="0">
-                                  <a:latin typeface="Cambria Math" panose="02040503050406030204" pitchFamily="18" charset="0"/>
-                                </a:rPr>
-                                <m:t>FP</m:t>
-                              </m:r>
-                            </m:num>
-                            <m:den>
-                              <m:r>
-                                <a:rPr lang="pt-BR" sz="3200" b="0" i="0" smtClean="0">
-                                  <a:latin typeface="Cambria Math" panose="02040503050406030204" pitchFamily="18" charset="0"/>
-                                </a:rPr>
-                                <m:t>2</m:t>
-                              </m:r>
-                            </m:den>
-                          </m:f>
-                        </m:den>
-                      </m:f>
-                      <m:r>
-                        <a:rPr lang="pt-BR" sz="3200" b="0" i="0" smtClean="0">
-                          <a:latin typeface="Cambria Math" panose="02040503050406030204" pitchFamily="18" charset="0"/>
-                        </a:rPr>
-                        <m:t>=2</m:t>
-                      </m:r>
-                      <m:f>
-                        <m:fPr>
-                          <m:ctrlPr>
-                            <a:rPr lang="pt-BR" sz="3200" b="0" i="1" smtClean="0">
-                              <a:latin typeface="Cambria Math" panose="02040503050406030204" pitchFamily="18" charset="0"/>
-                            </a:rPr>
-                          </m:ctrlPr>
-                        </m:fPr>
-                        <m:num>
-                          <m:r>
-                            <m:rPr>
-                              <m:sty m:val="p"/>
-                            </m:rPr>
-                            <a:rPr lang="pt-BR" sz="3200" b="0" i="0" smtClean="0">
-                              <a:latin typeface="Cambria Math" panose="02040503050406030204" pitchFamily="18" charset="0"/>
-                            </a:rPr>
-                            <m:t>precis</m:t>
-                          </m:r>
-                          <m:r>
-                            <a:rPr lang="pt-BR" sz="3200" b="0" i="0" smtClean="0">
-                              <a:latin typeface="Cambria Math" panose="02040503050406030204" pitchFamily="18" charset="0"/>
-                            </a:rPr>
-                            <m:t>ã</m:t>
-                          </m:r>
-                          <m:r>
-                            <m:rPr>
-                              <m:sty m:val="p"/>
-                            </m:rPr>
-                            <a:rPr lang="pt-BR" sz="3200" b="0" i="0" smtClean="0">
-                              <a:latin typeface="Cambria Math" panose="02040503050406030204" pitchFamily="18" charset="0"/>
-                            </a:rPr>
-                            <m:t>o</m:t>
-                          </m:r>
-                          <m:r>
-                            <a:rPr lang="pt-BR" sz="3200" b="0" i="0" smtClean="0">
-                              <a:latin typeface="Cambria Math" panose="02040503050406030204" pitchFamily="18" charset="0"/>
-                              <a:ea typeface="Cambria Math" panose="02040503050406030204" pitchFamily="18" charset="0"/>
-                            </a:rPr>
-                            <m:t>×</m:t>
-                          </m:r>
-                          <m:r>
-                            <a:rPr lang="pt-BR" sz="3200" b="0" i="1" smtClean="0">
-                              <a:latin typeface="Cambria Math" panose="02040503050406030204" pitchFamily="18" charset="0"/>
-                              <a:ea typeface="Cambria Math" panose="02040503050406030204" pitchFamily="18" charset="0"/>
-                            </a:rPr>
-                            <m:t>𝑟𝑒𝑐𝑎𝑙𝑙</m:t>
-                          </m:r>
-                        </m:num>
-                        <m:den>
-                          <m:r>
-                            <m:rPr>
-                              <m:sty m:val="p"/>
-                            </m:rPr>
-                            <a:rPr lang="pt-BR" sz="3200" i="0">
-                              <a:latin typeface="Cambria Math" panose="02040503050406030204" pitchFamily="18" charset="0"/>
-                            </a:rPr>
-                            <m:t>precis</m:t>
-                          </m:r>
-                          <m:r>
-                            <a:rPr lang="pt-BR" sz="3200" i="0">
-                              <a:latin typeface="Cambria Math" panose="02040503050406030204" pitchFamily="18" charset="0"/>
-                            </a:rPr>
-                            <m:t>ã</m:t>
-                          </m:r>
-                          <m:r>
-                            <m:rPr>
-                              <m:sty m:val="p"/>
-                            </m:rPr>
-                            <a:rPr lang="pt-BR" sz="3200" i="0">
-                              <a:latin typeface="Cambria Math" panose="02040503050406030204" pitchFamily="18" charset="0"/>
-                            </a:rPr>
-                            <m:t>o</m:t>
-                          </m:r>
-                          <m:r>
-                            <a:rPr lang="pt-BR" sz="3200" b="0" i="0" smtClean="0">
-                              <a:latin typeface="Cambria Math" panose="02040503050406030204" pitchFamily="18" charset="0"/>
-                            </a:rPr>
-                            <m:t>+</m:t>
-                          </m:r>
-                          <m:r>
-                            <a:rPr lang="pt-BR" sz="3200" i="1">
-                              <a:latin typeface="Cambria Math" panose="02040503050406030204" pitchFamily="18" charset="0"/>
-                              <a:ea typeface="Cambria Math" panose="02040503050406030204" pitchFamily="18" charset="0"/>
-                            </a:rPr>
-                            <m:t>𝑟𝑒𝑐𝑎𝑙𝑙</m:t>
-                          </m:r>
-                        </m:den>
-                      </m:f>
-                      <m:r>
-                        <a:rPr lang="pt-BR" sz="3200" b="0" i="0" smtClean="0">
-                          <a:latin typeface="Cambria Math" panose="02040503050406030204" pitchFamily="18" charset="0"/>
-                        </a:rPr>
-                        <m:t>.</m:t>
-                      </m:r>
-                    </m:oMath>
-                  </m:oMathPara>
-                </a14:m>
-                <a:endParaRPr lang="pt-BR" sz="3200" dirty="0"/>
-              </a:p>
-            </p:txBody>
-          </p:sp>
-        </mc:Choice>
-        <mc:Fallback xmlns="">
-          <p:sp>
-            <p:nvSpPr>
-              <p:cNvPr id="5" name="CaixaDeTexto 4">
-                <a:extLst>
-                  <a:ext uri="{FF2B5EF4-FFF2-40B4-BE49-F238E27FC236}">
-                    <a16:creationId xmlns:a16="http://schemas.microsoft.com/office/drawing/2014/main" id="{C0A929A7-E33F-6D02-D301-38706DE0743C}"/>
-                  </a:ext>
-                </a:extLst>
-              </p:cNvPr>
-              <p:cNvSpPr txBox="1">
-                <a:spLocks noRot="1" noChangeAspect="1" noMove="1" noResize="1" noEditPoints="1" noAdjustHandles="1" noChangeArrowheads="1" noChangeShapeType="1" noTextEdit="1"/>
-              </p:cNvSpPr>
-              <p:nvPr/>
-            </p:nvSpPr>
-            <p:spPr>
-              <a:xfrm>
-                <a:off x="1589091" y="4664413"/>
-                <a:ext cx="9013818" cy="1418273"/>
-              </a:xfrm>
-              <a:prstGeom prst="rect">
-                <a:avLst/>
-              </a:prstGeom>
-              <a:blipFill>
-                <a:blip r:embed="rId3"/>
-                <a:stretch>
-                  <a:fillRect/>
-                </a:stretch>
-              </a:blipFill>
-            </p:spPr>
-            <p:txBody>
-              <a:bodyPr/>
-              <a:lstStyle/>
-              <a:p>
-                <a:r>
-                  <a:rPr lang="pt-BR">
-                    <a:noFill/>
-                  </a:rPr>
-                  <a:t> </a:t>
-                </a:r>
-              </a:p>
-            </p:txBody>
-          </p:sp>
-        </mc:Fallback>
-      </mc:AlternateContent>
-    </p:spTree>
-    <p:extLst>
-      <p:ext uri="{BB962C8B-B14F-4D97-AF65-F5344CB8AC3E}">
-        <p14:creationId xmlns:p14="http://schemas.microsoft.com/office/powerpoint/2010/main" val="59840663"/>
-      </p:ext>
-    </p:extLst>
-  </p:cSld>
-  <p:clrMapOvr>
-    <a:masterClrMapping/>
-  </p:clrMapOvr>
-</p:sld>
-</file>
-
-<file path=ppt/slides/slide21.xml><?xml version="1.0" encoding="utf-8"?>
+<file path=ppt/slides/slide25.xml><?xml version="1.0" encoding="utf-8"?>
 <p:sld xmlns:a="http://schemas.openxmlformats.org/drawingml/2006/main" xmlns:r="http://schemas.openxmlformats.org/officeDocument/2006/relationships" xmlns:p="http://schemas.openxmlformats.org/presentationml/2006/main">
   <p:cSld>
     <p:spTree>
@@ -20499,7 +22467,7 @@
 </p:sld>
 </file>
 
-<file path=ppt/slides/slide22.xml><?xml version="1.0" encoding="utf-8"?>
+<file path=ppt/slides/slide26.xml><?xml version="1.0" encoding="utf-8"?>
 <p:sld xmlns:a="http://schemas.openxmlformats.org/drawingml/2006/main" xmlns:r="http://schemas.openxmlformats.org/officeDocument/2006/relationships" xmlns:p="http://schemas.openxmlformats.org/presentationml/2006/main">
   <p:cSld>
     <p:spTree>
@@ -20570,19 +22538,27 @@
               <a:buNone/>
             </a:pPr>
             <a:r>
-              <a:rPr lang="en-US" dirty="0"/>
+              <a:rPr lang="en-US" dirty="0">
+                <a:hlinkClick r:id="rId2"/>
+              </a:rPr>
               <a:t>Lista #8 – </a:t>
             </a:r>
             <a:r>
-              <a:rPr lang="en-US" dirty="0" err="1"/>
+              <a:rPr lang="en-US" dirty="0" err="1">
+                <a:hlinkClick r:id="rId2"/>
+              </a:rPr>
               <a:t>Métricas</a:t>
             </a:r>
             <a:r>
-              <a:rPr lang="en-US" dirty="0"/>
+              <a:rPr lang="en-US" dirty="0">
+                <a:hlinkClick r:id="rId2"/>
+              </a:rPr>
               <a:t> de </a:t>
             </a:r>
             <a:r>
-              <a:rPr lang="en-US" dirty="0" err="1"/>
+              <a:rPr lang="en-US" dirty="0" err="1">
+                <a:hlinkClick r:id="rId2"/>
+              </a:rPr>
               <a:t>classificação</a:t>
             </a:r>
             <a:endParaRPr lang="en-US" dirty="0"/>
@@ -20602,7 +22578,7 @@
 </p:sld>
 </file>
 
-<file path=ppt/slides/slide23.xml><?xml version="1.0" encoding="utf-8"?>
+<file path=ppt/slides/slide27.xml><?xml version="1.0" encoding="utf-8"?>
 <p:sld xmlns:a="http://schemas.openxmlformats.org/drawingml/2006/main" xmlns:r="http://schemas.openxmlformats.org/officeDocument/2006/relationships" xmlns:p="http://schemas.openxmlformats.org/presentationml/2006/main">
   <p:cSld>
     <p:spTree>
@@ -20688,7 +22664,7 @@
 </p:sld>
 </file>
 
-<file path=ppt/slides/slide24.xml><?xml version="1.0" encoding="utf-8"?>
+<file path=ppt/slides/slide28.xml><?xml version="1.0" encoding="utf-8"?>
 <p:sld xmlns:a="http://schemas.openxmlformats.org/drawingml/2006/main" xmlns:r="http://schemas.openxmlformats.org/officeDocument/2006/relationships" xmlns:p="http://schemas.openxmlformats.org/presentationml/2006/main">
   <p:cSld>
     <p:spTree>
@@ -20875,8 +22851,8 @@
         </p:nvSpPr>
         <p:spPr>
           <a:xfrm>
-            <a:off x="6096000" y="2479702"/>
-            <a:ext cx="5885410" cy="2677656"/>
+            <a:off x="6095999" y="2479702"/>
+            <a:ext cx="5965371" cy="2677656"/>
           </a:xfrm>
           <a:prstGeom prst="rect">
             <a:avLst/>
@@ -20898,11 +22874,31 @@
             </a:r>
             <a:r>
               <a:rPr lang="pt-BR" sz="2800" b="1" dirty="0"/>
-              <a:t>matriz de confusão </a:t>
+              <a:t>matriz de confusão</a:t>
             </a:r>
             <a:r>
               <a:rPr lang="pt-BR" sz="2800" dirty="0"/>
-              <a:t>mostra o quanto um classificador está se </a:t>
+              <a:t>,</a:t>
+            </a:r>
+            <a:r>
+              <a:rPr lang="pt-BR" sz="2800" b="1" dirty="0"/>
+              <a:t> </a:t>
+            </a:r>
+            <a:r>
+              <a:rPr lang="pt-BR" sz="2800" dirty="0"/>
+              <a:t>mostra o </a:t>
+            </a:r>
+            <a:r>
+              <a:rPr lang="pt-BR" sz="2800" b="1" dirty="0">
+                <a:solidFill>
+                  <a:schemeClr val="accent2"/>
+                </a:solidFill>
+              </a:rPr>
+              <a:t>quanto</a:t>
+            </a:r>
+            <a:r>
+              <a:rPr lang="pt-BR" sz="2800" dirty="0"/>
+              <a:t> um classificador está se </a:t>
             </a:r>
             <a:r>
               <a:rPr lang="pt-BR" sz="2800" b="1" dirty="0"/>
@@ -22463,7 +24459,7 @@
           <a:p>
             <a:pPr algn="ctr"/>
             <a:r>
-              <a:rPr lang="pt-BR" b="1" i="1" dirty="0">
+              <a:rPr lang="pt-BR" b="1" dirty="0">
                 <a:solidFill>
                   <a:srgbClr val="00B050"/>
                 </a:solidFill>
@@ -22551,7 +24547,7 @@
           <a:p>
             <a:pPr algn="ctr"/>
             <a:r>
-              <a:rPr lang="pt-BR" b="1" i="1" dirty="0">
+              <a:rPr lang="pt-BR" b="1" dirty="0">
                 <a:solidFill>
                   <a:srgbClr val="00B050"/>
                 </a:solidFill>
@@ -22659,8 +24655,8 @@
           </a:p>
         </p:txBody>
       </p:sp>
-      <mc:AlternateContent xmlns:mc="http://schemas.openxmlformats.org/markup-compatibility/2006" xmlns:a14="http://schemas.microsoft.com/office/drawing/2010/main">
-        <mc:Choice Requires="a14">
+      <mc:AlternateContent xmlns:mc="http://schemas.openxmlformats.org/markup-compatibility/2006">
+        <mc:Choice xmlns:a14="http://schemas.microsoft.com/office/drawing/2010/main" Requires="a14">
           <p:sp>
             <p:nvSpPr>
               <p:cNvPr id="3" name="Espaço Reservado para Conteúdo 2">
@@ -22680,7 +24676,7 @@
             <p:spPr>
               <a:xfrm>
                 <a:off x="5633156" y="1825624"/>
-                <a:ext cx="6423377" cy="5032375"/>
+                <a:ext cx="6428215" cy="5032375"/>
               </a:xfrm>
             </p:spPr>
             <p:txBody>
@@ -22694,7 +24690,7 @@
                   <a:t>A </a:t>
                 </a:r>
                 <a:r>
-                  <a:rPr lang="pt-BR" sz="2800" b="1" i="1" dirty="0">
+                  <a:rPr lang="pt-BR" sz="2800" b="1" dirty="0">
                     <a:solidFill>
                       <a:srgbClr val="00B050"/>
                     </a:solidFill>
@@ -22703,24 +24699,10 @@
                 </a:r>
                 <a:r>
                   <a:rPr lang="pt-BR" sz="2800" dirty="0"/>
-                  <a:t>de </a:t>
-                </a:r>
-                <a14:m>
-                  <m:oMath xmlns:m="http://schemas.openxmlformats.org/officeDocument/2006/math">
-                    <m:r>
-                      <a:rPr lang="pt-BR" sz="2800" b="1" i="1">
-                        <a:latin typeface="Cambria Math" panose="02040503050406030204" pitchFamily="18" charset="0"/>
-                      </a:rPr>
-                      <m:t>𝑪</m:t>
-                    </m:r>
-                  </m:oMath>
-                </a14:m>
-                <a:r>
-                  <a:rPr lang="pt-BR" sz="2800" dirty="0"/>
-                  <a:t> fornece o número de </a:t>
+                  <a:t>fornece o número de </a:t>
                 </a:r>
                 <a:r>
-                  <a:rPr lang="pt-BR" sz="2800" b="1" i="1" dirty="0">
+                  <a:rPr lang="pt-BR" sz="2800" b="1" dirty="0">
                     <a:solidFill>
                       <a:srgbClr val="00B050"/>
                     </a:solidFill>
@@ -22760,7 +24742,7 @@
                   <a:t> </a:t>
                 </a:r>
                 <a:r>
-                  <a:rPr lang="pt-BR" sz="2800" b="1" i="1" dirty="0">
+                  <a:rPr lang="pt-BR" sz="2800" b="1" dirty="0">
                     <a:solidFill>
                       <a:srgbClr val="7030A0"/>
                     </a:solidFill>
@@ -22772,7 +24754,7 @@
                   <a:t> indica o </a:t>
                 </a:r>
                 <a:r>
-                  <a:rPr lang="pt-BR" sz="2800" b="1" i="1" dirty="0">
+                  <a:rPr lang="pt-BR" sz="2800" b="1" dirty="0">
                     <a:solidFill>
                       <a:srgbClr val="00B050"/>
                     </a:solidFill>
@@ -22793,7 +24775,7 @@
                   </m:oMath>
                 </a14:m>
                 <a:r>
-                  <a:rPr lang="pt-BR" sz="2800" b="1" i="1" dirty="0">
+                  <a:rPr lang="pt-BR" sz="2800" b="1" dirty="0">
                     <a:solidFill>
                       <a:srgbClr val="00B050"/>
                     </a:solidFill>
@@ -22801,7 +24783,7 @@
                   <a:t>-</a:t>
                 </a:r>
                 <a:r>
-                  <a:rPr lang="pt-BR" sz="2800" b="1" i="1" dirty="0" err="1">
+                  <a:rPr lang="pt-BR" sz="2800" b="1" dirty="0" err="1">
                     <a:solidFill>
                       <a:srgbClr val="00B050"/>
                     </a:solidFill>
@@ -22809,7 +24791,7 @@
                   <a:t>ésima</a:t>
                 </a:r>
                 <a:r>
-                  <a:rPr lang="pt-BR" sz="2800" b="1" i="1" dirty="0">
+                  <a:rPr lang="pt-BR" sz="2800" b="1" dirty="0">
                     <a:solidFill>
                       <a:srgbClr val="00B050"/>
                     </a:solidFill>
@@ -22849,7 +24831,7 @@
                   <a:t> </a:t>
                 </a:r>
                 <a:r>
-                  <a:rPr lang="pt-BR" sz="2800" b="1" i="1" dirty="0">
+                  <a:rPr lang="pt-BR" sz="2800" b="1" dirty="0">
                     <a:solidFill>
                       <a:srgbClr val="7030A0"/>
                     </a:solidFill>
@@ -22861,7 +24843,7 @@
                   <a:t> indica o </a:t>
                 </a:r>
                 <a:r>
-                  <a:rPr lang="pt-BR" sz="2800" b="1" i="1" dirty="0">
+                  <a:rPr lang="pt-BR" sz="2800" b="1" dirty="0">
                     <a:solidFill>
                       <a:srgbClr val="00B050"/>
                     </a:solidFill>
@@ -22882,7 +24864,7 @@
                   </m:oMath>
                 </a14:m>
                 <a:r>
-                  <a:rPr lang="pt-BR" sz="2800" b="1" i="1" dirty="0">
+                  <a:rPr lang="pt-BR" sz="2800" b="1" dirty="0">
                     <a:solidFill>
                       <a:srgbClr val="00B050"/>
                     </a:solidFill>
@@ -22890,7 +24872,7 @@
                   <a:t>-</a:t>
                 </a:r>
                 <a:r>
-                  <a:rPr lang="pt-BR" sz="2800" b="1" i="1" dirty="0" err="1">
+                  <a:rPr lang="pt-BR" sz="2800" b="1" dirty="0" err="1">
                     <a:solidFill>
                       <a:srgbClr val="00B050"/>
                     </a:solidFill>
@@ -22898,7 +24880,7 @@
                   <a:t>ésima</a:t>
                 </a:r>
                 <a:r>
-                  <a:rPr lang="pt-BR" sz="2800" b="1" i="1" dirty="0">
+                  <a:rPr lang="pt-BR" sz="2800" b="1" dirty="0">
                     <a:solidFill>
                       <a:srgbClr val="00B050"/>
                     </a:solidFill>
@@ -22913,7 +24895,7 @@
             </p:txBody>
           </p:sp>
         </mc:Choice>
-        <mc:Fallback xmlns="">
+        <mc:Fallback>
           <p:sp>
             <p:nvSpPr>
               <p:cNvPr id="3" name="Espaço Reservado para Conteúdo 2">
@@ -22933,12 +24915,12 @@
             <p:spPr>
               <a:xfrm>
                 <a:off x="5633156" y="1825624"/>
-                <a:ext cx="6423377" cy="5032375"/>
+                <a:ext cx="6428215" cy="5032375"/>
               </a:xfrm>
               <a:blipFill>
                 <a:blip r:embed="rId3"/>
                 <a:stretch>
-                  <a:fillRect l="-1708" t="-1937" r="-1708"/>
+                  <a:fillRect l="-1706" t="-1937" r="-1896"/>
                 </a:stretch>
               </a:blipFill>
             </p:spPr>
@@ -22947,7 +24929,7 @@
               <a:lstStyle/>
               <a:p>
                 <a:r>
-                  <a:rPr lang="pt-BR">
+                  <a:rPr lang="en-US">
                     <a:noFill/>
                   </a:rPr>
                   <a:t> </a:t>
@@ -24526,7 +26508,7 @@
             <a:pPr algn="ctr"/>
             <a:r>
               <a:rPr lang="pt-BR" sz="2000" dirty="0"/>
-              <a:t>Quantidade de exemplos realmente pertencentes à classe 1.</a:t>
+              <a:t>Quantidade de exemplos que realmente pertencentes à classe 1.</a:t>
             </a:r>
           </a:p>
         </p:txBody>
@@ -24894,8 +26876,8 @@
           </p:sp>
         </mc:Fallback>
       </mc:AlternateContent>
-      <mc:AlternateContent xmlns:mc="http://schemas.openxmlformats.org/markup-compatibility/2006" xmlns:a14="http://schemas.microsoft.com/office/drawing/2010/main">
-        <mc:Choice Requires="a14">
+      <mc:AlternateContent xmlns:mc="http://schemas.openxmlformats.org/markup-compatibility/2006">
+        <mc:Choice xmlns:a14="http://schemas.microsoft.com/office/drawing/2010/main" Requires="a14">
           <p:sp>
             <p:nvSpPr>
               <p:cNvPr id="3" name="Espaço Reservado para Conteúdo 2">
@@ -24915,7 +26897,7 @@
             <p:spPr>
               <a:xfrm>
                 <a:off x="5956663" y="1825624"/>
-                <a:ext cx="6088581" cy="5032375"/>
+                <a:ext cx="6159137" cy="5032375"/>
               </a:xfrm>
             </p:spPr>
             <p:txBody>
@@ -24925,7 +26907,7 @@
               <a:lstStyle/>
               <a:p>
                 <a:r>
-                  <a:rPr lang="pt-BR" b="1" i="1" dirty="0"/>
+                  <a:rPr lang="pt-BR" b="1" dirty="0"/>
                   <a:t>Verdadeiros Positivos </a:t>
                 </a:r>
                 <a:r>
@@ -24968,7 +26950,7 @@
               </a:p>
               <a:p>
                 <a:r>
-                  <a:rPr lang="pt-BR" b="1" i="1" dirty="0"/>
+                  <a:rPr lang="pt-BR" b="1" dirty="0"/>
                   <a:t>Verdadeiros Negativos</a:t>
                 </a:r>
                 <a:r>
@@ -25011,7 +26993,7 @@
               </a:p>
               <a:p>
                 <a:r>
-                  <a:rPr lang="pt-BR" b="1" i="1" dirty="0"/>
+                  <a:rPr lang="pt-BR" b="1" dirty="0"/>
                   <a:t>Falsos Positivos </a:t>
                 </a:r>
                 <a:r>
@@ -25021,7 +27003,7 @@
               </a:p>
               <a:p>
                 <a:r>
-                  <a:rPr lang="pt-BR" b="1" i="1" dirty="0"/>
+                  <a:rPr lang="pt-BR" b="1" dirty="0"/>
                   <a:t>Falsos Negativos</a:t>
                 </a:r>
                 <a:r>
@@ -25032,7 +27014,7 @@
             </p:txBody>
           </p:sp>
         </mc:Choice>
-        <mc:Fallback xmlns="">
+        <mc:Fallback>
           <p:sp>
             <p:nvSpPr>
               <p:cNvPr id="3" name="Espaço Reservado para Conteúdo 2">
@@ -25052,12 +27034,12 @@
             <p:spPr>
               <a:xfrm>
                 <a:off x="5956663" y="1825624"/>
-                <a:ext cx="6088581" cy="5032375"/>
+                <a:ext cx="6159137" cy="5032375"/>
               </a:xfrm>
               <a:blipFill>
                 <a:blip r:embed="rId3"/>
                 <a:stretch>
-                  <a:fillRect l="-1802" t="-2663" r="-1602"/>
+                  <a:fillRect l="-1780" t="-2663" r="-593"/>
                 </a:stretch>
               </a:blipFill>
             </p:spPr>
@@ -25066,7 +27048,7 @@
               <a:lstStyle/>
               <a:p>
                 <a:r>
-                  <a:rPr lang="pt-BR">
+                  <a:rPr lang="en-US">
                     <a:noFill/>
                   </a:rPr>
                   <a:t> </a:t>

--- a/slides/C24_Métricas_de_Classificação.pptx
+++ b/slides/C24_Métricas_de_Classificação.pptx
@@ -5,10 +5,10 @@
     <p:sldMasterId id="2147483648" r:id="rId1"/>
   </p:sldMasterIdLst>
   <p:notesMasterIdLst>
-    <p:notesMasterId r:id="rId30"/>
+    <p:notesMasterId r:id="rId31"/>
   </p:notesMasterIdLst>
   <p:handoutMasterIdLst>
-    <p:handoutMasterId r:id="rId31"/>
+    <p:handoutMasterId r:id="rId32"/>
   </p:handoutMasterIdLst>
   <p:sldIdLst>
     <p:sldId id="256" r:id="rId2"/>
@@ -34,11 +34,12 @@
     <p:sldId id="330" r:id="rId22"/>
     <p:sldId id="460" r:id="rId23"/>
     <p:sldId id="331" r:id="rId24"/>
-    <p:sldId id="461" r:id="rId25"/>
-    <p:sldId id="334" r:id="rId26"/>
-    <p:sldId id="457" r:id="rId27"/>
-    <p:sldId id="336" r:id="rId28"/>
-    <p:sldId id="337" r:id="rId29"/>
+    <p:sldId id="462" r:id="rId25"/>
+    <p:sldId id="461" r:id="rId26"/>
+    <p:sldId id="334" r:id="rId27"/>
+    <p:sldId id="457" r:id="rId28"/>
+    <p:sldId id="336" r:id="rId29"/>
+    <p:sldId id="337" r:id="rId30"/>
   </p:sldIdLst>
   <p:sldSz cx="12192000" cy="6858000"/>
   <p:notesSz cx="7315200" cy="9601200"/>
@@ -1995,7 +1996,7 @@
           <a:p>
             <a:fld id="{6FC8D850-966F-45A6-8DE7-15B891E7D40D}" type="slidenum">
               <a:rPr lang="pt-BR" smtClean="0"/>
-              <a:t>25</a:t>
+              <a:t>26</a:t>
             </a:fld>
             <a:endParaRPr lang="pt-BR"/>
           </a:p>
@@ -5652,8 +5653,8 @@
           </a:p>
         </p:txBody>
       </p:sp>
-      <mc:AlternateContent xmlns:mc="http://schemas.openxmlformats.org/markup-compatibility/2006">
-        <mc:Choice xmlns:a14="http://schemas.microsoft.com/office/drawing/2010/main" Requires="a14">
+      <mc:AlternateContent xmlns:mc="http://schemas.openxmlformats.org/markup-compatibility/2006" xmlns:a14="http://schemas.microsoft.com/office/drawing/2010/main">
+        <mc:Choice Requires="a14">
           <p:sp>
             <p:nvSpPr>
               <p:cNvPr id="5" name="CaixaDeTexto 4">
@@ -5822,7 +5823,7 @@
             </p:txBody>
           </p:sp>
         </mc:Choice>
-        <mc:Fallback>
+        <mc:Fallback xmlns="">
           <p:sp>
             <p:nvSpPr>
               <p:cNvPr id="5" name="CaixaDeTexto 4">
@@ -6080,8 +6081,8 @@
           </a:p>
         </p:txBody>
       </p:sp>
-      <mc:AlternateContent xmlns:mc="http://schemas.openxmlformats.org/markup-compatibility/2006">
-        <mc:Choice xmlns:a14="http://schemas.microsoft.com/office/drawing/2010/main" Requires="a14">
+      <mc:AlternateContent xmlns:mc="http://schemas.openxmlformats.org/markup-compatibility/2006" xmlns:a14="http://schemas.microsoft.com/office/drawing/2010/main">
+        <mc:Choice Requires="a14">
           <p:sp>
             <p:nvSpPr>
               <p:cNvPr id="4" name="CaixaDeTexto 3">
@@ -6250,7 +6251,7 @@
             </p:txBody>
           </p:sp>
         </mc:Choice>
-        <mc:Fallback>
+        <mc:Fallback xmlns="">
           <p:sp>
             <p:nvSpPr>
               <p:cNvPr id="4" name="CaixaDeTexto 3">
@@ -6353,8 +6354,8 @@
           </a:p>
         </p:txBody>
       </p:sp>
-      <mc:AlternateContent xmlns:mc="http://schemas.openxmlformats.org/markup-compatibility/2006">
-        <mc:Choice xmlns:a14="http://schemas.microsoft.com/office/drawing/2010/main" Requires="a14">
+      <mc:AlternateContent xmlns:mc="http://schemas.openxmlformats.org/markup-compatibility/2006" xmlns:a14="http://schemas.microsoft.com/office/drawing/2010/main">
+        <mc:Choice Requires="a14">
           <p:sp>
             <p:nvSpPr>
               <p:cNvPr id="3" name="Espaço Reservado para Conteúdo 2">
@@ -6858,7 +6859,7 @@
             </p:txBody>
           </p:sp>
         </mc:Choice>
-        <mc:Fallback>
+        <mc:Fallback xmlns="">
           <p:sp>
             <p:nvSpPr>
               <p:cNvPr id="3" name="Espaço Reservado para Conteúdo 2">
@@ -7045,8 +7046,8 @@
           </a:p>
         </p:txBody>
       </p:sp>
-      <mc:AlternateContent xmlns:mc="http://schemas.openxmlformats.org/markup-compatibility/2006">
-        <mc:Choice xmlns:a14="http://schemas.microsoft.com/office/drawing/2010/main" Requires="a14">
+      <mc:AlternateContent xmlns:mc="http://schemas.openxmlformats.org/markup-compatibility/2006" xmlns:a14="http://schemas.microsoft.com/office/drawing/2010/main">
+        <mc:Choice Requires="a14">
           <p:sp>
             <p:nvSpPr>
               <p:cNvPr id="5" name="CaixaDeTexto 4">
@@ -7166,7 +7167,7 @@
             </p:txBody>
           </p:sp>
         </mc:Choice>
-        <mc:Fallback>
+        <mc:Fallback xmlns="">
           <p:sp>
             <p:nvSpPr>
               <p:cNvPr id="5" name="CaixaDeTexto 4">
@@ -10444,8 +10445,8 @@
           </a:p>
         </p:txBody>
       </p:sp>
-      <mc:AlternateContent xmlns:mc="http://schemas.openxmlformats.org/markup-compatibility/2006">
-        <mc:Choice xmlns:a14="http://schemas.microsoft.com/office/drawing/2010/main" Requires="a14">
+      <mc:AlternateContent xmlns:mc="http://schemas.openxmlformats.org/markup-compatibility/2006" xmlns:a14="http://schemas.microsoft.com/office/drawing/2010/main">
+        <mc:Choice Requires="a14">
           <p:sp>
             <p:nvSpPr>
               <p:cNvPr id="3" name="Espaço Reservado para Conteúdo 2">
@@ -10692,7 +10693,7 @@
             </p:txBody>
           </p:sp>
         </mc:Choice>
-        <mc:Fallback>
+        <mc:Fallback xmlns="">
           <p:sp>
             <p:nvSpPr>
               <p:cNvPr id="3" name="Espaço Reservado para Conteúdo 2">
@@ -11174,8 +11175,8 @@
           <a:chExt cx="0" cy="0"/>
         </a:xfrm>
       </p:grpSpPr>
-      <mc:AlternateContent xmlns:mc="http://schemas.openxmlformats.org/markup-compatibility/2006">
-        <mc:Choice xmlns:a14="http://schemas.microsoft.com/office/drawing/2010/main" Requires="a14">
+      <mc:AlternateContent xmlns:mc="http://schemas.openxmlformats.org/markup-compatibility/2006" xmlns:a14="http://schemas.microsoft.com/office/drawing/2010/main">
+        <mc:Choice Requires="a14">
           <p:sp>
             <p:nvSpPr>
               <p:cNvPr id="3" name="Espaço Reservado para Conteúdo 2">
@@ -11229,7 +11230,7 @@
             </p:txBody>
           </p:sp>
         </mc:Choice>
-        <mc:Fallback>
+        <mc:Fallback xmlns="">
           <p:sp>
             <p:nvSpPr>
               <p:cNvPr id="3" name="Espaço Reservado para Conteúdo 2">
@@ -11303,8 +11304,8 @@
           <a:chExt cx="0" cy="0"/>
         </a:xfrm>
       </p:grpSpPr>
-      <mc:AlternateContent xmlns:mc="http://schemas.openxmlformats.org/markup-compatibility/2006">
-        <mc:Choice xmlns:a14="http://schemas.microsoft.com/office/drawing/2010/main" Requires="a14">
+      <mc:AlternateContent xmlns:mc="http://schemas.openxmlformats.org/markup-compatibility/2006" xmlns:a14="http://schemas.microsoft.com/office/drawing/2010/main">
+        <mc:Choice Requires="a14">
           <p:sp>
             <p:nvSpPr>
               <p:cNvPr id="2" name="Título 1">
@@ -11359,7 +11360,7 @@
             </p:txBody>
           </p:sp>
         </mc:Choice>
-        <mc:Fallback>
+        <mc:Fallback xmlns="">
           <p:sp>
             <p:nvSpPr>
               <p:cNvPr id="2" name="Título 1">
@@ -11403,8 +11404,8 @@
           </p:sp>
         </mc:Fallback>
       </mc:AlternateContent>
-      <mc:AlternateContent xmlns:mc="http://schemas.openxmlformats.org/markup-compatibility/2006">
-        <mc:Choice xmlns:a14="http://schemas.microsoft.com/office/drawing/2010/main" Requires="a14">
+      <mc:AlternateContent xmlns:mc="http://schemas.openxmlformats.org/markup-compatibility/2006" xmlns:a14="http://schemas.microsoft.com/office/drawing/2010/main">
+        <mc:Choice Requires="a14">
           <p:sp>
             <p:nvSpPr>
               <p:cNvPr id="3" name="Espaço Reservado para Conteúdo 2">
@@ -11730,7 +11731,7 @@
             </p:txBody>
           </p:sp>
         </mc:Choice>
-        <mc:Fallback>
+        <mc:Fallback xmlns="">
           <p:sp>
             <p:nvSpPr>
               <p:cNvPr id="3" name="Espaço Reservado para Conteúdo 2">
@@ -11810,8 +11811,8 @@
           <a:chExt cx="0" cy="0"/>
         </a:xfrm>
       </p:grpSpPr>
-      <mc:AlternateContent xmlns:mc="http://schemas.openxmlformats.org/markup-compatibility/2006">
-        <mc:Choice xmlns:a14="http://schemas.microsoft.com/office/drawing/2010/main" Requires="a14">
+      <mc:AlternateContent xmlns:mc="http://schemas.openxmlformats.org/markup-compatibility/2006" xmlns:a14="http://schemas.microsoft.com/office/drawing/2010/main">
+        <mc:Choice Requires="a14">
           <p:sp>
             <p:nvSpPr>
               <p:cNvPr id="2" name="Título 1">
@@ -11863,7 +11864,7 @@
             </p:txBody>
           </p:sp>
         </mc:Choice>
-        <mc:Fallback>
+        <mc:Fallback xmlns="">
           <p:sp>
             <p:nvSpPr>
               <p:cNvPr id="2" name="Título 1">
@@ -11907,8 +11908,8 @@
           </p:sp>
         </mc:Fallback>
       </mc:AlternateContent>
-      <mc:AlternateContent xmlns:mc="http://schemas.openxmlformats.org/markup-compatibility/2006">
-        <mc:Choice xmlns:a14="http://schemas.microsoft.com/office/drawing/2010/main" Requires="a14">
+      <mc:AlternateContent xmlns:mc="http://schemas.openxmlformats.org/markup-compatibility/2006" xmlns:a14="http://schemas.microsoft.com/office/drawing/2010/main">
+        <mc:Choice Requires="a14">
           <p:sp>
             <p:nvSpPr>
               <p:cNvPr id="3" name="Espaço Reservado para Conteúdo 2">
@@ -12044,7 +12045,7 @@
             </p:txBody>
           </p:sp>
         </mc:Choice>
-        <mc:Fallback>
+        <mc:Fallback xmlns="">
           <p:sp>
             <p:nvSpPr>
               <p:cNvPr id="3" name="Espaço Reservado para Conteúdo 2">
@@ -12088,8 +12089,8 @@
           </p:sp>
         </mc:Fallback>
       </mc:AlternateContent>
-      <mc:AlternateContent xmlns:mc="http://schemas.openxmlformats.org/markup-compatibility/2006">
-        <mc:Choice xmlns:a14="http://schemas.microsoft.com/office/drawing/2010/main" Requires="a14">
+      <mc:AlternateContent xmlns:mc="http://schemas.openxmlformats.org/markup-compatibility/2006" xmlns:a14="http://schemas.microsoft.com/office/drawing/2010/main">
+        <mc:Choice Requires="a14">
           <p:graphicFrame>
             <p:nvGraphicFramePr>
               <p:cNvPr id="4" name="Table 3">
@@ -13695,7 +13696,7 @@
             </a:graphic>
           </p:graphicFrame>
         </mc:Choice>
-        <mc:Fallback>
+        <mc:Fallback xmlns="">
           <p:graphicFrame>
             <p:nvGraphicFramePr>
               <p:cNvPr id="4" name="Table 3">
@@ -15041,8 +15042,8 @@
           </p:graphicFrame>
         </mc:Fallback>
       </mc:AlternateContent>
-      <mc:AlternateContent xmlns:mc="http://schemas.openxmlformats.org/markup-compatibility/2006">
-        <mc:Choice xmlns:a14="http://schemas.microsoft.com/office/drawing/2010/main" Requires="a14">
+      <mc:AlternateContent xmlns:mc="http://schemas.openxmlformats.org/markup-compatibility/2006" xmlns:a14="http://schemas.microsoft.com/office/drawing/2010/main">
+        <mc:Choice Requires="a14">
           <p:sp>
             <p:nvSpPr>
               <p:cNvPr id="5" name="CaixaDeTexto 4">
@@ -15113,7 +15114,7 @@
             </p:txBody>
           </p:sp>
         </mc:Choice>
-        <mc:Fallback>
+        <mc:Fallback xmlns="">
           <p:sp>
             <p:nvSpPr>
               <p:cNvPr id="5" name="CaixaDeTexto 4">
@@ -15188,8 +15189,8 @@
           <a:chExt cx="0" cy="0"/>
         </a:xfrm>
       </p:grpSpPr>
-      <mc:AlternateContent xmlns:mc="http://schemas.openxmlformats.org/markup-compatibility/2006">
-        <mc:Choice xmlns:a14="http://schemas.microsoft.com/office/drawing/2010/main" Requires="a14">
+      <mc:AlternateContent xmlns:mc="http://schemas.openxmlformats.org/markup-compatibility/2006" xmlns:a14="http://schemas.microsoft.com/office/drawing/2010/main">
+        <mc:Choice Requires="a14">
           <p:sp>
             <p:nvSpPr>
               <p:cNvPr id="2" name="Título 1">
@@ -15236,7 +15237,7 @@
             </p:txBody>
           </p:sp>
         </mc:Choice>
-        <mc:Fallback>
+        <mc:Fallback xmlns="">
           <p:sp>
             <p:nvSpPr>
               <p:cNvPr id="2" name="Título 1">
@@ -22040,6 +22041,1167 @@
       </p:grpSpPr>
       <p:sp>
         <p:nvSpPr>
+          <p:cNvPr id="2" name="Title 1">
+            <a:extLst>
+              <a:ext uri="{FF2B5EF4-FFF2-40B4-BE49-F238E27FC236}">
+                <a16:creationId xmlns:a16="http://schemas.microsoft.com/office/drawing/2014/main" id="{9EA478C6-7197-E66C-805B-12C1C5C166DC}"/>
+              </a:ext>
+            </a:extLst>
+          </p:cNvPr>
+          <p:cNvSpPr>
+            <a:spLocks noGrp="1"/>
+          </p:cNvSpPr>
+          <p:nvPr>
+            <p:ph type="title"/>
+          </p:nvPr>
+        </p:nvSpPr>
+        <p:spPr/>
+        <p:txBody>
+          <a:bodyPr/>
+          <a:lstStyle/>
+          <a:p>
+            <a:r>
+              <a:rPr lang="pt-BR" dirty="0"/>
+              <a:t>Acurácia para o caso multiclasses</a:t>
+            </a:r>
+            <a:endParaRPr lang="en-US" dirty="0"/>
+          </a:p>
+        </p:txBody>
+      </p:sp>
+      <p:sp>
+        <p:nvSpPr>
+          <p:cNvPr id="3" name="Content Placeholder 2">
+            <a:extLst>
+              <a:ext uri="{FF2B5EF4-FFF2-40B4-BE49-F238E27FC236}">
+                <a16:creationId xmlns:a16="http://schemas.microsoft.com/office/drawing/2014/main" id="{2B0A3077-842E-10B4-83E8-F6B58E0934BA}"/>
+              </a:ext>
+            </a:extLst>
+          </p:cNvPr>
+          <p:cNvSpPr>
+            <a:spLocks noGrp="1"/>
+          </p:cNvSpPr>
+          <p:nvPr>
+            <p:ph idx="1"/>
+          </p:nvPr>
+        </p:nvSpPr>
+        <p:spPr>
+          <a:xfrm>
+            <a:off x="6466113" y="1825625"/>
+            <a:ext cx="5617029" cy="4351338"/>
+          </a:xfrm>
+        </p:spPr>
+        <p:txBody>
+          <a:bodyPr/>
+          <a:lstStyle/>
+          <a:p>
+            <a:r>
+              <a:rPr lang="pt-BR" dirty="0"/>
+              <a:t>Para o caso multiclasses, a acurácia é calculada como razão entre a soma de todos os acertos e a soma erros e acertos.</a:t>
+            </a:r>
+            <a:endParaRPr lang="en-US" dirty="0"/>
+          </a:p>
+        </p:txBody>
+      </p:sp>
+      <mc:AlternateContent xmlns:mc="http://schemas.openxmlformats.org/markup-compatibility/2006">
+        <mc:Choice xmlns:a14="http://schemas.microsoft.com/office/drawing/2010/main" Requires="a14">
+          <p:sp>
+            <p:nvSpPr>
+              <p:cNvPr id="4" name="CaixaDeTexto 3">
+                <a:extLst>
+                  <a:ext uri="{FF2B5EF4-FFF2-40B4-BE49-F238E27FC236}">
+                    <a16:creationId xmlns:a16="http://schemas.microsoft.com/office/drawing/2014/main" id="{BCF716F4-6740-06F0-4F7F-43E81B6588C9}"/>
+                  </a:ext>
+                </a:extLst>
+              </p:cNvPr>
+              <p:cNvSpPr txBox="1"/>
+              <p:nvPr/>
+            </p:nvSpPr>
+            <p:spPr>
+              <a:xfrm>
+                <a:off x="2416628" y="5149438"/>
+                <a:ext cx="7358743" cy="1027525"/>
+              </a:xfrm>
+              <a:prstGeom prst="rect">
+                <a:avLst/>
+              </a:prstGeom>
+              <a:noFill/>
+            </p:spPr>
+            <p:txBody>
+              <a:bodyPr wrap="square">
+                <a:spAutoFit/>
+              </a:bodyPr>
+              <a:lstStyle/>
+              <a:p>
+                <a:pPr/>
+                <a14:m>
+                  <m:oMathPara xmlns:m="http://schemas.openxmlformats.org/officeDocument/2006/math">
+                    <m:oMathParaPr>
+                      <m:jc m:val="centerGroup"/>
+                    </m:oMathParaPr>
+                    <m:oMath xmlns:m="http://schemas.openxmlformats.org/officeDocument/2006/math">
+                      <m:r>
+                        <m:rPr>
+                          <m:sty m:val="p"/>
+                        </m:rPr>
+                        <a:rPr lang="pt-BR" sz="3200" i="0" smtClean="0">
+                          <a:latin typeface="Cambria Math" panose="02040503050406030204" pitchFamily="18" charset="0"/>
+                        </a:rPr>
+                        <m:t>a</m:t>
+                      </m:r>
+                      <m:r>
+                        <m:rPr>
+                          <m:sty m:val="p"/>
+                        </m:rPr>
+                        <a:rPr lang="pt-BR" sz="3200" b="0" i="0" smtClean="0">
+                          <a:latin typeface="Cambria Math" panose="02040503050406030204" pitchFamily="18" charset="0"/>
+                        </a:rPr>
+                        <m:t>cur</m:t>
+                      </m:r>
+                      <m:r>
+                        <a:rPr lang="pt-BR" sz="3200" b="0" i="0" smtClean="0">
+                          <a:latin typeface="Cambria Math" panose="02040503050406030204" pitchFamily="18" charset="0"/>
+                        </a:rPr>
+                        <m:t>á</m:t>
+                      </m:r>
+                      <m:r>
+                        <m:rPr>
+                          <m:sty m:val="p"/>
+                        </m:rPr>
+                        <a:rPr lang="pt-BR" sz="3200" b="0" i="0" smtClean="0">
+                          <a:latin typeface="Cambria Math" panose="02040503050406030204" pitchFamily="18" charset="0"/>
+                        </a:rPr>
+                        <m:t>cia</m:t>
+                      </m:r>
+                      <m:r>
+                        <a:rPr lang="pt-BR" sz="3200" i="0">
+                          <a:latin typeface="Cambria Math" panose="02040503050406030204" pitchFamily="18" charset="0"/>
+                        </a:rPr>
+                        <m:t>=</m:t>
+                      </m:r>
+                      <m:f>
+                        <m:fPr>
+                          <m:ctrlPr>
+                            <a:rPr lang="pt-BR" sz="3200">
+                              <a:latin typeface="Cambria Math" panose="02040503050406030204" pitchFamily="18" charset="0"/>
+                            </a:rPr>
+                          </m:ctrlPr>
+                        </m:fPr>
+                        <m:num>
+                          <m:r>
+                            <m:rPr>
+                              <m:sty m:val="p"/>
+                            </m:rPr>
+                            <a:rPr lang="pt-BR" sz="3200" b="0" i="0" smtClean="0">
+                              <a:latin typeface="Cambria Math" panose="02040503050406030204" pitchFamily="18" charset="0"/>
+                            </a:rPr>
+                            <m:t>Soma</m:t>
+                          </m:r>
+                          <m:r>
+                            <a:rPr lang="pt-BR" sz="3200" b="0" i="0" smtClean="0">
+                              <a:latin typeface="Cambria Math" panose="02040503050406030204" pitchFamily="18" charset="0"/>
+                            </a:rPr>
+                            <m:t> </m:t>
+                          </m:r>
+                          <m:r>
+                            <m:rPr>
+                              <m:sty m:val="p"/>
+                            </m:rPr>
+                            <a:rPr lang="pt-BR" sz="3200" b="0" i="0" smtClean="0">
+                              <a:latin typeface="Cambria Math" panose="02040503050406030204" pitchFamily="18" charset="0"/>
+                            </a:rPr>
+                            <m:t>da</m:t>
+                          </m:r>
+                          <m:r>
+                            <a:rPr lang="pt-BR" sz="3200" b="0" i="0" smtClean="0">
+                              <a:latin typeface="Cambria Math" panose="02040503050406030204" pitchFamily="18" charset="0"/>
+                            </a:rPr>
+                            <m:t> </m:t>
+                          </m:r>
+                          <m:r>
+                            <m:rPr>
+                              <m:sty m:val="p"/>
+                            </m:rPr>
+                            <a:rPr lang="pt-BR" sz="3200" b="0" i="0" smtClean="0">
+                              <a:latin typeface="Cambria Math" panose="02040503050406030204" pitchFamily="18" charset="0"/>
+                            </a:rPr>
+                            <m:t>diagonal</m:t>
+                          </m:r>
+                          <m:r>
+                            <a:rPr lang="pt-BR" sz="3200" b="0" i="0" smtClean="0">
+                              <a:latin typeface="Cambria Math" panose="02040503050406030204" pitchFamily="18" charset="0"/>
+                            </a:rPr>
+                            <m:t> </m:t>
+                          </m:r>
+                          <m:r>
+                            <m:rPr>
+                              <m:sty m:val="p"/>
+                            </m:rPr>
+                            <a:rPr lang="pt-BR" sz="3200" b="0" i="0" smtClean="0">
+                              <a:latin typeface="Cambria Math" panose="02040503050406030204" pitchFamily="18" charset="0"/>
+                            </a:rPr>
+                            <m:t>princial</m:t>
+                          </m:r>
+                        </m:num>
+                        <m:den>
+                          <m:r>
+                            <m:rPr>
+                              <m:sty m:val="p"/>
+                            </m:rPr>
+                            <a:rPr lang="pt-BR" sz="3200" b="0" i="0" smtClean="0">
+                              <a:latin typeface="Cambria Math" panose="02040503050406030204" pitchFamily="18" charset="0"/>
+                            </a:rPr>
+                            <m:t>Soma</m:t>
+                          </m:r>
+                          <m:r>
+                            <a:rPr lang="pt-BR" sz="3200" b="0" i="0" smtClean="0">
+                              <a:latin typeface="Cambria Math" panose="02040503050406030204" pitchFamily="18" charset="0"/>
+                            </a:rPr>
+                            <m:t> </m:t>
+                          </m:r>
+                          <m:r>
+                            <m:rPr>
+                              <m:sty m:val="p"/>
+                            </m:rPr>
+                            <a:rPr lang="pt-BR" sz="3200" b="0" i="0" smtClean="0">
+                              <a:latin typeface="Cambria Math" panose="02040503050406030204" pitchFamily="18" charset="0"/>
+                            </a:rPr>
+                            <m:t>de</m:t>
+                          </m:r>
+                          <m:r>
+                            <a:rPr lang="pt-BR" sz="3200" b="0" i="0" smtClean="0">
+                              <a:latin typeface="Cambria Math" panose="02040503050406030204" pitchFamily="18" charset="0"/>
+                            </a:rPr>
+                            <m:t> </m:t>
+                          </m:r>
+                          <m:r>
+                            <m:rPr>
+                              <m:sty m:val="p"/>
+                            </m:rPr>
+                            <a:rPr lang="pt-BR" sz="3200" b="0" i="0" smtClean="0">
+                              <a:latin typeface="Cambria Math" panose="02040503050406030204" pitchFamily="18" charset="0"/>
+                            </a:rPr>
+                            <m:t>todos</m:t>
+                          </m:r>
+                          <m:r>
+                            <a:rPr lang="pt-BR" sz="3200" b="0" i="0" smtClean="0">
+                              <a:latin typeface="Cambria Math" panose="02040503050406030204" pitchFamily="18" charset="0"/>
+                            </a:rPr>
+                            <m:t> </m:t>
+                          </m:r>
+                          <m:r>
+                            <m:rPr>
+                              <m:sty m:val="p"/>
+                            </m:rPr>
+                            <a:rPr lang="pt-BR" sz="3200" b="0" i="0" smtClean="0">
+                              <a:latin typeface="Cambria Math" panose="02040503050406030204" pitchFamily="18" charset="0"/>
+                            </a:rPr>
+                            <m:t>os</m:t>
+                          </m:r>
+                          <m:r>
+                            <a:rPr lang="pt-BR" sz="3200" b="0" i="0" smtClean="0">
+                              <a:latin typeface="Cambria Math" panose="02040503050406030204" pitchFamily="18" charset="0"/>
+                            </a:rPr>
+                            <m:t> </m:t>
+                          </m:r>
+                          <m:r>
+                            <m:rPr>
+                              <m:sty m:val="p"/>
+                            </m:rPr>
+                            <a:rPr lang="pt-BR" sz="3200" b="0" i="0" smtClean="0">
+                              <a:latin typeface="Cambria Math" panose="02040503050406030204" pitchFamily="18" charset="0"/>
+                            </a:rPr>
+                            <m:t>elementos</m:t>
+                          </m:r>
+                        </m:den>
+                      </m:f>
+                    </m:oMath>
+                  </m:oMathPara>
+                </a14:m>
+                <a:endParaRPr lang="pt-BR" sz="3200" dirty="0"/>
+              </a:p>
+            </p:txBody>
+          </p:sp>
+        </mc:Choice>
+        <mc:Fallback>
+          <p:sp>
+            <p:nvSpPr>
+              <p:cNvPr id="4" name="CaixaDeTexto 3">
+                <a:extLst>
+                  <a:ext uri="{FF2B5EF4-FFF2-40B4-BE49-F238E27FC236}">
+                    <a16:creationId xmlns:a16="http://schemas.microsoft.com/office/drawing/2014/main" id="{BCF716F4-6740-06F0-4F7F-43E81B6588C9}"/>
+                  </a:ext>
+                </a:extLst>
+              </p:cNvPr>
+              <p:cNvSpPr txBox="1">
+                <a:spLocks noRot="1" noChangeAspect="1" noMove="1" noResize="1" noEditPoints="1" noAdjustHandles="1" noChangeArrowheads="1" noChangeShapeType="1" noTextEdit="1"/>
+              </p:cNvSpPr>
+              <p:nvPr/>
+            </p:nvSpPr>
+            <p:spPr>
+              <a:xfrm>
+                <a:off x="2416628" y="5149438"/>
+                <a:ext cx="7358743" cy="1027525"/>
+              </a:xfrm>
+              <a:prstGeom prst="rect">
+                <a:avLst/>
+              </a:prstGeom>
+              <a:blipFill>
+                <a:blip r:embed="rId2"/>
+                <a:stretch>
+                  <a:fillRect/>
+                </a:stretch>
+              </a:blipFill>
+            </p:spPr>
+            <p:txBody>
+              <a:bodyPr/>
+              <a:lstStyle/>
+              <a:p>
+                <a:r>
+                  <a:rPr lang="en-US">
+                    <a:noFill/>
+                  </a:rPr>
+                  <a:t> </a:t>
+                </a:r>
+              </a:p>
+            </p:txBody>
+          </p:sp>
+        </mc:Fallback>
+      </mc:AlternateContent>
+      <p:graphicFrame>
+        <p:nvGraphicFramePr>
+          <p:cNvPr id="5" name="Table 4">
+            <a:extLst>
+              <a:ext uri="{FF2B5EF4-FFF2-40B4-BE49-F238E27FC236}">
+                <a16:creationId xmlns:a16="http://schemas.microsoft.com/office/drawing/2014/main" id="{91DB5CB5-58D6-D6F0-CAE4-AE7FAAC84F35}"/>
+              </a:ext>
+            </a:extLst>
+          </p:cNvPr>
+          <p:cNvGraphicFramePr>
+            <a:graphicFrameLocks noGrp="1"/>
+          </p:cNvGraphicFramePr>
+          <p:nvPr>
+            <p:extLst>
+              <p:ext uri="{D42A27DB-BD31-4B8C-83A1-F6EECF244321}">
+                <p14:modId xmlns:p14="http://schemas.microsoft.com/office/powerpoint/2010/main" val="3555364785"/>
+              </p:ext>
+            </p:extLst>
+          </p:nvPr>
+        </p:nvGraphicFramePr>
+        <p:xfrm>
+          <a:off x="2139041" y="2511547"/>
+          <a:ext cx="2590803" cy="1817031"/>
+        </p:xfrm>
+        <a:graphic>
+          <a:graphicData uri="http://schemas.openxmlformats.org/drawingml/2006/table">
+            <a:tbl>
+              <a:tblPr firstRow="1" bandRow="1">
+                <a:tableStyleId>{2D5ABB26-0587-4C30-8999-92F81FD0307C}</a:tableStyleId>
+              </a:tblPr>
+              <a:tblGrid>
+                <a:gridCol w="863601">
+                  <a:extLst>
+                    <a:ext uri="{9D8B030D-6E8A-4147-A177-3AD203B41FA5}">
+                      <a16:colId xmlns:a16="http://schemas.microsoft.com/office/drawing/2014/main" val="3867026763"/>
+                    </a:ext>
+                  </a:extLst>
+                </a:gridCol>
+                <a:gridCol w="863601">
+                  <a:extLst>
+                    <a:ext uri="{9D8B030D-6E8A-4147-A177-3AD203B41FA5}">
+                      <a16:colId xmlns:a16="http://schemas.microsoft.com/office/drawing/2014/main" val="2035180929"/>
+                    </a:ext>
+                  </a:extLst>
+                </a:gridCol>
+                <a:gridCol w="863601">
+                  <a:extLst>
+                    <a:ext uri="{9D8B030D-6E8A-4147-A177-3AD203B41FA5}">
+                      <a16:colId xmlns:a16="http://schemas.microsoft.com/office/drawing/2014/main" val="1096411002"/>
+                    </a:ext>
+                  </a:extLst>
+                </a:gridCol>
+              </a:tblGrid>
+              <a:tr h="605677">
+                <a:tc>
+                  <a:txBody>
+                    <a:bodyPr/>
+                    <a:lstStyle/>
+                    <a:p>
+                      <a:pPr algn="ctr"/>
+                      <a:r>
+                        <a:rPr lang="pt-BR" dirty="0"/>
+                        <a:t>Acerto</a:t>
+                      </a:r>
+                      <a:endParaRPr lang="en-US" dirty="0"/>
+                    </a:p>
+                  </a:txBody>
+                  <a:tcPr anchor="ctr">
+                    <a:lnL w="12700" cap="flat" cmpd="sng" algn="ctr">
+                      <a:solidFill>
+                        <a:schemeClr val="tx1"/>
+                      </a:solidFill>
+                      <a:prstDash val="solid"/>
+                      <a:round/>
+                      <a:headEnd type="none" w="med" len="med"/>
+                      <a:tailEnd type="none" w="med" len="med"/>
+                    </a:lnL>
+                    <a:lnR w="12700" cap="flat" cmpd="sng" algn="ctr">
+                      <a:solidFill>
+                        <a:schemeClr val="tx1"/>
+                      </a:solidFill>
+                      <a:prstDash val="solid"/>
+                      <a:round/>
+                      <a:headEnd type="none" w="med" len="med"/>
+                      <a:tailEnd type="none" w="med" len="med"/>
+                    </a:lnR>
+                    <a:lnT w="12700" cap="flat" cmpd="sng" algn="ctr">
+                      <a:solidFill>
+                        <a:schemeClr val="tx1"/>
+                      </a:solidFill>
+                      <a:prstDash val="solid"/>
+                      <a:round/>
+                      <a:headEnd type="none" w="med" len="med"/>
+                      <a:tailEnd type="none" w="med" len="med"/>
+                    </a:lnT>
+                    <a:lnB w="12700" cap="flat" cmpd="sng" algn="ctr">
+                      <a:solidFill>
+                        <a:schemeClr val="tx1"/>
+                      </a:solidFill>
+                      <a:prstDash val="solid"/>
+                      <a:round/>
+                      <a:headEnd type="none" w="med" len="med"/>
+                      <a:tailEnd type="none" w="med" len="med"/>
+                    </a:lnB>
+                    <a:solidFill>
+                      <a:srgbClr val="00B0F0"/>
+                    </a:solidFill>
+                  </a:tcPr>
+                </a:tc>
+                <a:tc>
+                  <a:txBody>
+                    <a:bodyPr/>
+                    <a:lstStyle/>
+                    <a:p>
+                      <a:pPr algn="ctr"/>
+                      <a:r>
+                        <a:rPr lang="pt-BR" dirty="0"/>
+                        <a:t>Erro</a:t>
+                      </a:r>
+                      <a:endParaRPr lang="en-US" dirty="0"/>
+                    </a:p>
+                  </a:txBody>
+                  <a:tcPr anchor="ctr">
+                    <a:lnL w="12700" cap="flat" cmpd="sng" algn="ctr">
+                      <a:solidFill>
+                        <a:schemeClr val="tx1"/>
+                      </a:solidFill>
+                      <a:prstDash val="solid"/>
+                      <a:round/>
+                      <a:headEnd type="none" w="med" len="med"/>
+                      <a:tailEnd type="none" w="med" len="med"/>
+                    </a:lnL>
+                    <a:lnR w="12700" cap="flat" cmpd="sng" algn="ctr">
+                      <a:solidFill>
+                        <a:schemeClr val="tx1"/>
+                      </a:solidFill>
+                      <a:prstDash val="solid"/>
+                      <a:round/>
+                      <a:headEnd type="none" w="med" len="med"/>
+                      <a:tailEnd type="none" w="med" len="med"/>
+                    </a:lnR>
+                    <a:lnT w="12700" cap="flat" cmpd="sng" algn="ctr">
+                      <a:solidFill>
+                        <a:schemeClr val="tx1"/>
+                      </a:solidFill>
+                      <a:prstDash val="solid"/>
+                      <a:round/>
+                      <a:headEnd type="none" w="med" len="med"/>
+                      <a:tailEnd type="none" w="med" len="med"/>
+                    </a:lnT>
+                    <a:lnB w="12700" cap="flat" cmpd="sng" algn="ctr">
+                      <a:solidFill>
+                        <a:schemeClr val="tx1"/>
+                      </a:solidFill>
+                      <a:prstDash val="solid"/>
+                      <a:round/>
+                      <a:headEnd type="none" w="med" len="med"/>
+                      <a:tailEnd type="none" w="med" len="med"/>
+                    </a:lnB>
+                    <a:solidFill>
+                      <a:srgbClr val="FF6600"/>
+                    </a:solidFill>
+                  </a:tcPr>
+                </a:tc>
+                <a:tc>
+                  <a:txBody>
+                    <a:bodyPr/>
+                    <a:lstStyle/>
+                    <a:p>
+                      <a:pPr algn="ctr"/>
+                      <a:r>
+                        <a:rPr lang="pt-BR" dirty="0"/>
+                        <a:t>Erro</a:t>
+                      </a:r>
+                      <a:endParaRPr lang="en-US" dirty="0"/>
+                    </a:p>
+                  </a:txBody>
+                  <a:tcPr anchor="ctr">
+                    <a:lnL w="12700" cap="flat" cmpd="sng" algn="ctr">
+                      <a:solidFill>
+                        <a:schemeClr val="tx1"/>
+                      </a:solidFill>
+                      <a:prstDash val="solid"/>
+                      <a:round/>
+                      <a:headEnd type="none" w="med" len="med"/>
+                      <a:tailEnd type="none" w="med" len="med"/>
+                    </a:lnL>
+                    <a:lnR w="12700" cap="flat" cmpd="sng" algn="ctr">
+                      <a:solidFill>
+                        <a:schemeClr val="tx1"/>
+                      </a:solidFill>
+                      <a:prstDash val="solid"/>
+                      <a:round/>
+                      <a:headEnd type="none" w="med" len="med"/>
+                      <a:tailEnd type="none" w="med" len="med"/>
+                    </a:lnR>
+                    <a:lnT w="12700" cap="flat" cmpd="sng" algn="ctr">
+                      <a:solidFill>
+                        <a:schemeClr val="tx1"/>
+                      </a:solidFill>
+                      <a:prstDash val="solid"/>
+                      <a:round/>
+                      <a:headEnd type="none" w="med" len="med"/>
+                      <a:tailEnd type="none" w="med" len="med"/>
+                    </a:lnT>
+                    <a:lnB w="12700" cap="flat" cmpd="sng" algn="ctr">
+                      <a:solidFill>
+                        <a:schemeClr val="tx1"/>
+                      </a:solidFill>
+                      <a:prstDash val="solid"/>
+                      <a:round/>
+                      <a:headEnd type="none" w="med" len="med"/>
+                      <a:tailEnd type="none" w="med" len="med"/>
+                    </a:lnB>
+                    <a:solidFill>
+                      <a:srgbClr val="FF6600"/>
+                    </a:solidFill>
+                  </a:tcPr>
+                </a:tc>
+                <a:extLst>
+                  <a:ext uri="{0D108BD9-81ED-4DB2-BD59-A6C34878D82A}">
+                    <a16:rowId xmlns:a16="http://schemas.microsoft.com/office/drawing/2014/main" val="3112607757"/>
+                  </a:ext>
+                </a:extLst>
+              </a:tr>
+              <a:tr h="605677">
+                <a:tc>
+                  <a:txBody>
+                    <a:bodyPr/>
+                    <a:lstStyle/>
+                    <a:p>
+                      <a:pPr algn="ctr"/>
+                      <a:r>
+                        <a:rPr lang="pt-BR" dirty="0"/>
+                        <a:t>Erro</a:t>
+                      </a:r>
+                      <a:endParaRPr lang="en-US" dirty="0"/>
+                    </a:p>
+                  </a:txBody>
+                  <a:tcPr anchor="ctr">
+                    <a:lnL w="12700" cap="flat" cmpd="sng" algn="ctr">
+                      <a:solidFill>
+                        <a:schemeClr val="tx1"/>
+                      </a:solidFill>
+                      <a:prstDash val="solid"/>
+                      <a:round/>
+                      <a:headEnd type="none" w="med" len="med"/>
+                      <a:tailEnd type="none" w="med" len="med"/>
+                    </a:lnL>
+                    <a:lnR w="12700" cap="flat" cmpd="sng" algn="ctr">
+                      <a:solidFill>
+                        <a:schemeClr val="tx1"/>
+                      </a:solidFill>
+                      <a:prstDash val="solid"/>
+                      <a:round/>
+                      <a:headEnd type="none" w="med" len="med"/>
+                      <a:tailEnd type="none" w="med" len="med"/>
+                    </a:lnR>
+                    <a:lnT w="12700" cap="flat" cmpd="sng" algn="ctr">
+                      <a:solidFill>
+                        <a:schemeClr val="tx1"/>
+                      </a:solidFill>
+                      <a:prstDash val="solid"/>
+                      <a:round/>
+                      <a:headEnd type="none" w="med" len="med"/>
+                      <a:tailEnd type="none" w="med" len="med"/>
+                    </a:lnT>
+                    <a:lnB w="12700" cap="flat" cmpd="sng" algn="ctr">
+                      <a:solidFill>
+                        <a:schemeClr val="tx1"/>
+                      </a:solidFill>
+                      <a:prstDash val="solid"/>
+                      <a:round/>
+                      <a:headEnd type="none" w="med" len="med"/>
+                      <a:tailEnd type="none" w="med" len="med"/>
+                    </a:lnB>
+                    <a:solidFill>
+                      <a:srgbClr val="FF6600"/>
+                    </a:solidFill>
+                  </a:tcPr>
+                </a:tc>
+                <a:tc>
+                  <a:txBody>
+                    <a:bodyPr/>
+                    <a:lstStyle/>
+                    <a:p>
+                      <a:pPr algn="ctr"/>
+                      <a:r>
+                        <a:rPr lang="pt-BR" sz="1800" kern="1200" dirty="0">
+                          <a:solidFill>
+                            <a:schemeClr val="tx1"/>
+                          </a:solidFill>
+                          <a:latin typeface="+mn-lt"/>
+                          <a:ea typeface="+mn-ea"/>
+                          <a:cs typeface="+mn-cs"/>
+                        </a:rPr>
+                        <a:t>Acerto</a:t>
+                      </a:r>
+                      <a:endParaRPr lang="en-US" sz="1800" kern="1200" dirty="0">
+                        <a:solidFill>
+                          <a:schemeClr val="tx1"/>
+                        </a:solidFill>
+                        <a:latin typeface="+mn-lt"/>
+                        <a:ea typeface="+mn-ea"/>
+                        <a:cs typeface="+mn-cs"/>
+                      </a:endParaRPr>
+                    </a:p>
+                  </a:txBody>
+                  <a:tcPr anchor="ctr">
+                    <a:lnL w="12700" cap="flat" cmpd="sng" algn="ctr">
+                      <a:solidFill>
+                        <a:schemeClr val="tx1"/>
+                      </a:solidFill>
+                      <a:prstDash val="solid"/>
+                      <a:round/>
+                      <a:headEnd type="none" w="med" len="med"/>
+                      <a:tailEnd type="none" w="med" len="med"/>
+                    </a:lnL>
+                    <a:lnR w="12700" cap="flat" cmpd="sng" algn="ctr">
+                      <a:solidFill>
+                        <a:schemeClr val="tx1"/>
+                      </a:solidFill>
+                      <a:prstDash val="solid"/>
+                      <a:round/>
+                      <a:headEnd type="none" w="med" len="med"/>
+                      <a:tailEnd type="none" w="med" len="med"/>
+                    </a:lnR>
+                    <a:lnT w="12700" cap="flat" cmpd="sng" algn="ctr">
+                      <a:solidFill>
+                        <a:schemeClr val="tx1"/>
+                      </a:solidFill>
+                      <a:prstDash val="solid"/>
+                      <a:round/>
+                      <a:headEnd type="none" w="med" len="med"/>
+                      <a:tailEnd type="none" w="med" len="med"/>
+                    </a:lnT>
+                    <a:lnB w="12700" cap="flat" cmpd="sng" algn="ctr">
+                      <a:solidFill>
+                        <a:schemeClr val="tx1"/>
+                      </a:solidFill>
+                      <a:prstDash val="solid"/>
+                      <a:round/>
+                      <a:headEnd type="none" w="med" len="med"/>
+                      <a:tailEnd type="none" w="med" len="med"/>
+                    </a:lnB>
+                    <a:solidFill>
+                      <a:srgbClr val="00B0F0"/>
+                    </a:solidFill>
+                  </a:tcPr>
+                </a:tc>
+                <a:tc>
+                  <a:txBody>
+                    <a:bodyPr/>
+                    <a:lstStyle/>
+                    <a:p>
+                      <a:pPr algn="ctr"/>
+                      <a:r>
+                        <a:rPr lang="pt-BR" dirty="0"/>
+                        <a:t>Erro</a:t>
+                      </a:r>
+                      <a:endParaRPr lang="en-US" dirty="0"/>
+                    </a:p>
+                  </a:txBody>
+                  <a:tcPr anchor="ctr">
+                    <a:lnL w="12700" cap="flat" cmpd="sng" algn="ctr">
+                      <a:solidFill>
+                        <a:schemeClr val="tx1"/>
+                      </a:solidFill>
+                      <a:prstDash val="solid"/>
+                      <a:round/>
+                      <a:headEnd type="none" w="med" len="med"/>
+                      <a:tailEnd type="none" w="med" len="med"/>
+                    </a:lnL>
+                    <a:lnR w="12700" cap="flat" cmpd="sng" algn="ctr">
+                      <a:solidFill>
+                        <a:schemeClr val="tx1"/>
+                      </a:solidFill>
+                      <a:prstDash val="solid"/>
+                      <a:round/>
+                      <a:headEnd type="none" w="med" len="med"/>
+                      <a:tailEnd type="none" w="med" len="med"/>
+                    </a:lnR>
+                    <a:lnT w="12700" cap="flat" cmpd="sng" algn="ctr">
+                      <a:solidFill>
+                        <a:schemeClr val="tx1"/>
+                      </a:solidFill>
+                      <a:prstDash val="solid"/>
+                      <a:round/>
+                      <a:headEnd type="none" w="med" len="med"/>
+                      <a:tailEnd type="none" w="med" len="med"/>
+                    </a:lnT>
+                    <a:lnB w="12700" cap="flat" cmpd="sng" algn="ctr">
+                      <a:solidFill>
+                        <a:schemeClr val="tx1"/>
+                      </a:solidFill>
+                      <a:prstDash val="solid"/>
+                      <a:round/>
+                      <a:headEnd type="none" w="med" len="med"/>
+                      <a:tailEnd type="none" w="med" len="med"/>
+                    </a:lnB>
+                    <a:solidFill>
+                      <a:srgbClr val="FF6600"/>
+                    </a:solidFill>
+                  </a:tcPr>
+                </a:tc>
+                <a:extLst>
+                  <a:ext uri="{0D108BD9-81ED-4DB2-BD59-A6C34878D82A}">
+                    <a16:rowId xmlns:a16="http://schemas.microsoft.com/office/drawing/2014/main" val="324473955"/>
+                  </a:ext>
+                </a:extLst>
+              </a:tr>
+              <a:tr h="605677">
+                <a:tc>
+                  <a:txBody>
+                    <a:bodyPr/>
+                    <a:lstStyle/>
+                    <a:p>
+                      <a:pPr algn="ctr"/>
+                      <a:r>
+                        <a:rPr lang="pt-BR" dirty="0"/>
+                        <a:t>Erro</a:t>
+                      </a:r>
+                      <a:endParaRPr lang="en-US" dirty="0"/>
+                    </a:p>
+                  </a:txBody>
+                  <a:tcPr anchor="ctr">
+                    <a:lnL w="12700" cap="flat" cmpd="sng" algn="ctr">
+                      <a:solidFill>
+                        <a:schemeClr val="tx1"/>
+                      </a:solidFill>
+                      <a:prstDash val="solid"/>
+                      <a:round/>
+                      <a:headEnd type="none" w="med" len="med"/>
+                      <a:tailEnd type="none" w="med" len="med"/>
+                    </a:lnL>
+                    <a:lnR w="12700" cap="flat" cmpd="sng" algn="ctr">
+                      <a:solidFill>
+                        <a:schemeClr val="tx1"/>
+                      </a:solidFill>
+                      <a:prstDash val="solid"/>
+                      <a:round/>
+                      <a:headEnd type="none" w="med" len="med"/>
+                      <a:tailEnd type="none" w="med" len="med"/>
+                    </a:lnR>
+                    <a:lnT w="12700" cap="flat" cmpd="sng" algn="ctr">
+                      <a:solidFill>
+                        <a:schemeClr val="tx1"/>
+                      </a:solidFill>
+                      <a:prstDash val="solid"/>
+                      <a:round/>
+                      <a:headEnd type="none" w="med" len="med"/>
+                      <a:tailEnd type="none" w="med" len="med"/>
+                    </a:lnT>
+                    <a:lnB w="12700" cap="flat" cmpd="sng" algn="ctr">
+                      <a:solidFill>
+                        <a:schemeClr val="tx1"/>
+                      </a:solidFill>
+                      <a:prstDash val="solid"/>
+                      <a:round/>
+                      <a:headEnd type="none" w="med" len="med"/>
+                      <a:tailEnd type="none" w="med" len="med"/>
+                    </a:lnB>
+                    <a:solidFill>
+                      <a:srgbClr val="FF6600"/>
+                    </a:solidFill>
+                  </a:tcPr>
+                </a:tc>
+                <a:tc>
+                  <a:txBody>
+                    <a:bodyPr/>
+                    <a:lstStyle/>
+                    <a:p>
+                      <a:pPr algn="ctr"/>
+                      <a:r>
+                        <a:rPr lang="pt-BR" dirty="0"/>
+                        <a:t>Erro</a:t>
+                      </a:r>
+                      <a:endParaRPr lang="en-US" dirty="0"/>
+                    </a:p>
+                  </a:txBody>
+                  <a:tcPr anchor="ctr">
+                    <a:lnL w="12700" cap="flat" cmpd="sng" algn="ctr">
+                      <a:solidFill>
+                        <a:schemeClr val="tx1"/>
+                      </a:solidFill>
+                      <a:prstDash val="solid"/>
+                      <a:round/>
+                      <a:headEnd type="none" w="med" len="med"/>
+                      <a:tailEnd type="none" w="med" len="med"/>
+                    </a:lnL>
+                    <a:lnR w="12700" cap="flat" cmpd="sng" algn="ctr">
+                      <a:solidFill>
+                        <a:schemeClr val="tx1"/>
+                      </a:solidFill>
+                      <a:prstDash val="solid"/>
+                      <a:round/>
+                      <a:headEnd type="none" w="med" len="med"/>
+                      <a:tailEnd type="none" w="med" len="med"/>
+                    </a:lnR>
+                    <a:lnT w="12700" cap="flat" cmpd="sng" algn="ctr">
+                      <a:solidFill>
+                        <a:schemeClr val="tx1"/>
+                      </a:solidFill>
+                      <a:prstDash val="solid"/>
+                      <a:round/>
+                      <a:headEnd type="none" w="med" len="med"/>
+                      <a:tailEnd type="none" w="med" len="med"/>
+                    </a:lnT>
+                    <a:lnB w="12700" cap="flat" cmpd="sng" algn="ctr">
+                      <a:solidFill>
+                        <a:schemeClr val="tx1"/>
+                      </a:solidFill>
+                      <a:prstDash val="solid"/>
+                      <a:round/>
+                      <a:headEnd type="none" w="med" len="med"/>
+                      <a:tailEnd type="none" w="med" len="med"/>
+                    </a:lnB>
+                    <a:solidFill>
+                      <a:srgbClr val="FF6600"/>
+                    </a:solidFill>
+                  </a:tcPr>
+                </a:tc>
+                <a:tc>
+                  <a:txBody>
+                    <a:bodyPr/>
+                    <a:lstStyle/>
+                    <a:p>
+                      <a:pPr algn="ctr"/>
+                      <a:r>
+                        <a:rPr lang="pt-BR" dirty="0"/>
+                        <a:t>Acerto</a:t>
+                      </a:r>
+                      <a:endParaRPr lang="en-US" dirty="0"/>
+                    </a:p>
+                  </a:txBody>
+                  <a:tcPr anchor="ctr">
+                    <a:lnL w="12700" cap="flat" cmpd="sng" algn="ctr">
+                      <a:solidFill>
+                        <a:schemeClr val="tx1"/>
+                      </a:solidFill>
+                      <a:prstDash val="solid"/>
+                      <a:round/>
+                      <a:headEnd type="none" w="med" len="med"/>
+                      <a:tailEnd type="none" w="med" len="med"/>
+                    </a:lnL>
+                    <a:lnR w="12700" cap="flat" cmpd="sng" algn="ctr">
+                      <a:solidFill>
+                        <a:schemeClr val="tx1"/>
+                      </a:solidFill>
+                      <a:prstDash val="solid"/>
+                      <a:round/>
+                      <a:headEnd type="none" w="med" len="med"/>
+                      <a:tailEnd type="none" w="med" len="med"/>
+                    </a:lnR>
+                    <a:lnT w="12700" cap="flat" cmpd="sng" algn="ctr">
+                      <a:solidFill>
+                        <a:schemeClr val="tx1"/>
+                      </a:solidFill>
+                      <a:prstDash val="solid"/>
+                      <a:round/>
+                      <a:headEnd type="none" w="med" len="med"/>
+                      <a:tailEnd type="none" w="med" len="med"/>
+                    </a:lnT>
+                    <a:lnB w="12700" cap="flat" cmpd="sng" algn="ctr">
+                      <a:solidFill>
+                        <a:schemeClr val="tx1"/>
+                      </a:solidFill>
+                      <a:prstDash val="solid"/>
+                      <a:round/>
+                      <a:headEnd type="none" w="med" len="med"/>
+                      <a:tailEnd type="none" w="med" len="med"/>
+                    </a:lnB>
+                    <a:solidFill>
+                      <a:srgbClr val="00B0F0"/>
+                    </a:solidFill>
+                  </a:tcPr>
+                </a:tc>
+                <a:extLst>
+                  <a:ext uri="{0D108BD9-81ED-4DB2-BD59-A6C34878D82A}">
+                    <a16:rowId xmlns:a16="http://schemas.microsoft.com/office/drawing/2014/main" val="493002121"/>
+                  </a:ext>
+                </a:extLst>
+              </a:tr>
+            </a:tbl>
+          </a:graphicData>
+        </a:graphic>
+      </p:graphicFrame>
+      <p:sp>
+        <p:nvSpPr>
+          <p:cNvPr id="6" name="TextBox 5">
+            <a:extLst>
+              <a:ext uri="{FF2B5EF4-FFF2-40B4-BE49-F238E27FC236}">
+                <a16:creationId xmlns:a16="http://schemas.microsoft.com/office/drawing/2014/main" id="{4FB9EF39-B90C-8E8A-FAA1-894F1357DF08}"/>
+              </a:ext>
+            </a:extLst>
+          </p:cNvPr>
+          <p:cNvSpPr txBox="1"/>
+          <p:nvPr/>
+        </p:nvSpPr>
+        <p:spPr>
+          <a:xfrm>
+            <a:off x="2416628" y="4328578"/>
+            <a:ext cx="301686" cy="369332"/>
+          </a:xfrm>
+          <a:prstGeom prst="rect">
+            <a:avLst/>
+          </a:prstGeom>
+          <a:noFill/>
+        </p:spPr>
+        <p:txBody>
+          <a:bodyPr wrap="none" rtlCol="0">
+            <a:spAutoFit/>
+          </a:bodyPr>
+          <a:lstStyle/>
+          <a:p>
+            <a:r>
+              <a:rPr lang="pt-BR" dirty="0"/>
+              <a:t>0</a:t>
+            </a:r>
+            <a:endParaRPr lang="en-US" dirty="0"/>
+          </a:p>
+        </p:txBody>
+      </p:sp>
+      <p:sp>
+        <p:nvSpPr>
+          <p:cNvPr id="7" name="TextBox 6">
+            <a:extLst>
+              <a:ext uri="{FF2B5EF4-FFF2-40B4-BE49-F238E27FC236}">
+                <a16:creationId xmlns:a16="http://schemas.microsoft.com/office/drawing/2014/main" id="{EE98951F-EC06-3600-8596-2C37C9D3F470}"/>
+              </a:ext>
+            </a:extLst>
+          </p:cNvPr>
+          <p:cNvSpPr txBox="1"/>
+          <p:nvPr/>
+        </p:nvSpPr>
+        <p:spPr>
+          <a:xfrm>
+            <a:off x="3271550" y="4328578"/>
+            <a:ext cx="301686" cy="369332"/>
+          </a:xfrm>
+          <a:prstGeom prst="rect">
+            <a:avLst/>
+          </a:prstGeom>
+          <a:noFill/>
+        </p:spPr>
+        <p:txBody>
+          <a:bodyPr wrap="square" rtlCol="0">
+            <a:spAutoFit/>
+          </a:bodyPr>
+          <a:lstStyle/>
+          <a:p>
+            <a:r>
+              <a:rPr lang="pt-BR" dirty="0"/>
+              <a:t>1</a:t>
+            </a:r>
+            <a:endParaRPr lang="en-US" dirty="0"/>
+          </a:p>
+        </p:txBody>
+      </p:sp>
+      <p:sp>
+        <p:nvSpPr>
+          <p:cNvPr id="8" name="TextBox 7">
+            <a:extLst>
+              <a:ext uri="{FF2B5EF4-FFF2-40B4-BE49-F238E27FC236}">
+                <a16:creationId xmlns:a16="http://schemas.microsoft.com/office/drawing/2014/main" id="{04A648ED-ACCF-A0E8-A7FF-A93266861237}"/>
+              </a:ext>
+            </a:extLst>
+          </p:cNvPr>
+          <p:cNvSpPr txBox="1"/>
+          <p:nvPr/>
+        </p:nvSpPr>
+        <p:spPr>
+          <a:xfrm>
+            <a:off x="4152897" y="4328578"/>
+            <a:ext cx="301686" cy="369332"/>
+          </a:xfrm>
+          <a:prstGeom prst="rect">
+            <a:avLst/>
+          </a:prstGeom>
+          <a:noFill/>
+        </p:spPr>
+        <p:txBody>
+          <a:bodyPr wrap="none" rtlCol="0">
+            <a:spAutoFit/>
+          </a:bodyPr>
+          <a:lstStyle/>
+          <a:p>
+            <a:r>
+              <a:rPr lang="pt-BR" dirty="0"/>
+              <a:t>2</a:t>
+            </a:r>
+            <a:endParaRPr lang="en-US" dirty="0"/>
+          </a:p>
+        </p:txBody>
+      </p:sp>
+      <p:sp>
+        <p:nvSpPr>
+          <p:cNvPr id="9" name="TextBox 8">
+            <a:extLst>
+              <a:ext uri="{FF2B5EF4-FFF2-40B4-BE49-F238E27FC236}">
+                <a16:creationId xmlns:a16="http://schemas.microsoft.com/office/drawing/2014/main" id="{0F24060A-F1D6-9DB5-76BA-3A64C1CCFBA2}"/>
+              </a:ext>
+            </a:extLst>
+          </p:cNvPr>
+          <p:cNvSpPr txBox="1"/>
+          <p:nvPr/>
+        </p:nvSpPr>
+        <p:spPr>
+          <a:xfrm>
+            <a:off x="1837355" y="2569628"/>
+            <a:ext cx="301686" cy="369332"/>
+          </a:xfrm>
+          <a:prstGeom prst="rect">
+            <a:avLst/>
+          </a:prstGeom>
+          <a:noFill/>
+        </p:spPr>
+        <p:txBody>
+          <a:bodyPr wrap="none" rtlCol="0">
+            <a:spAutoFit/>
+          </a:bodyPr>
+          <a:lstStyle/>
+          <a:p>
+            <a:r>
+              <a:rPr lang="pt-BR" dirty="0"/>
+              <a:t>0</a:t>
+            </a:r>
+            <a:endParaRPr lang="en-US" dirty="0"/>
+          </a:p>
+        </p:txBody>
+      </p:sp>
+      <p:sp>
+        <p:nvSpPr>
+          <p:cNvPr id="10" name="TextBox 9">
+            <a:extLst>
+              <a:ext uri="{FF2B5EF4-FFF2-40B4-BE49-F238E27FC236}">
+                <a16:creationId xmlns:a16="http://schemas.microsoft.com/office/drawing/2014/main" id="{504D6480-6017-F7EF-CBF8-45BE5E5980C6}"/>
+              </a:ext>
+            </a:extLst>
+          </p:cNvPr>
+          <p:cNvSpPr txBox="1"/>
+          <p:nvPr/>
+        </p:nvSpPr>
+        <p:spPr>
+          <a:xfrm>
+            <a:off x="1837355" y="3235396"/>
+            <a:ext cx="301686" cy="369332"/>
+          </a:xfrm>
+          <a:prstGeom prst="rect">
+            <a:avLst/>
+          </a:prstGeom>
+          <a:noFill/>
+        </p:spPr>
+        <p:txBody>
+          <a:bodyPr wrap="none" rtlCol="0">
+            <a:spAutoFit/>
+          </a:bodyPr>
+          <a:lstStyle/>
+          <a:p>
+            <a:r>
+              <a:rPr lang="pt-BR" dirty="0"/>
+              <a:t>1</a:t>
+            </a:r>
+            <a:endParaRPr lang="en-US" dirty="0"/>
+          </a:p>
+        </p:txBody>
+      </p:sp>
+      <p:sp>
+        <p:nvSpPr>
+          <p:cNvPr id="11" name="TextBox 10">
+            <a:extLst>
+              <a:ext uri="{FF2B5EF4-FFF2-40B4-BE49-F238E27FC236}">
+                <a16:creationId xmlns:a16="http://schemas.microsoft.com/office/drawing/2014/main" id="{40EA34B0-3C80-7E6E-DB17-529180947558}"/>
+              </a:ext>
+            </a:extLst>
+          </p:cNvPr>
+          <p:cNvSpPr txBox="1"/>
+          <p:nvPr/>
+        </p:nvSpPr>
+        <p:spPr>
+          <a:xfrm>
+            <a:off x="1837355" y="3799431"/>
+            <a:ext cx="301686" cy="369332"/>
+          </a:xfrm>
+          <a:prstGeom prst="rect">
+            <a:avLst/>
+          </a:prstGeom>
+          <a:noFill/>
+        </p:spPr>
+        <p:txBody>
+          <a:bodyPr wrap="none" rtlCol="0">
+            <a:spAutoFit/>
+          </a:bodyPr>
+          <a:lstStyle/>
+          <a:p>
+            <a:r>
+              <a:rPr lang="pt-BR" dirty="0"/>
+              <a:t>2</a:t>
+            </a:r>
+            <a:endParaRPr lang="en-US" dirty="0"/>
+          </a:p>
+        </p:txBody>
+      </p:sp>
+    </p:spTree>
+    <p:extLst>
+      <p:ext uri="{BB962C8B-B14F-4D97-AF65-F5344CB8AC3E}">
+        <p14:creationId xmlns:p14="http://schemas.microsoft.com/office/powerpoint/2010/main" val="1863936557"/>
+      </p:ext>
+    </p:extLst>
+  </p:cSld>
+  <p:clrMapOvr>
+    <a:masterClrMapping/>
+  </p:clrMapOvr>
+</p:sld>
+</file>
+
+<file path=ppt/slides/slide25.xml><?xml version="1.0" encoding="utf-8"?>
+<p:sld xmlns:a="http://schemas.openxmlformats.org/drawingml/2006/main" xmlns:r="http://schemas.openxmlformats.org/officeDocument/2006/relationships" xmlns:p="http://schemas.openxmlformats.org/presentationml/2006/main">
+  <p:cSld>
+    <p:spTree>
+      <p:nvGrpSpPr>
+        <p:cNvPr id="1" name=""/>
+        <p:cNvGrpSpPr/>
+        <p:nvPr/>
+      </p:nvGrpSpPr>
+      <p:grpSpPr>
+        <a:xfrm>
+          <a:off x="0" y="0"/>
+          <a:ext cx="0" cy="0"/>
+          <a:chOff x="0" y="0"/>
+          <a:chExt cx="0" cy="0"/>
+        </a:xfrm>
+      </p:grpSpPr>
+      <p:sp>
+        <p:nvSpPr>
           <p:cNvPr id="3" name="Content Placeholder 2">
             <a:extLst>
               <a:ext uri="{FF2B5EF4-FFF2-40B4-BE49-F238E27FC236}">
@@ -22140,7 +23302,7 @@
 </p:sld>
 </file>
 
-<file path=ppt/slides/slide25.xml><?xml version="1.0" encoding="utf-8"?>
+<file path=ppt/slides/slide26.xml><?xml version="1.0" encoding="utf-8"?>
 <p:sld xmlns:a="http://schemas.openxmlformats.org/drawingml/2006/main" xmlns:r="http://schemas.openxmlformats.org/officeDocument/2006/relationships" xmlns:p="http://schemas.openxmlformats.org/presentationml/2006/main">
   <p:cSld>
     <p:spTree>
@@ -22467,7 +23629,7 @@
 </p:sld>
 </file>
 
-<file path=ppt/slides/slide26.xml><?xml version="1.0" encoding="utf-8"?>
+<file path=ppt/slides/slide27.xml><?xml version="1.0" encoding="utf-8"?>
 <p:sld xmlns:a="http://schemas.openxmlformats.org/drawingml/2006/main" xmlns:r="http://schemas.openxmlformats.org/officeDocument/2006/relationships" xmlns:p="http://schemas.openxmlformats.org/presentationml/2006/main">
   <p:cSld>
     <p:spTree>
@@ -22578,7 +23740,7 @@
 </p:sld>
 </file>
 
-<file path=ppt/slides/slide27.xml><?xml version="1.0" encoding="utf-8"?>
+<file path=ppt/slides/slide28.xml><?xml version="1.0" encoding="utf-8"?>
 <p:sld xmlns:a="http://schemas.openxmlformats.org/drawingml/2006/main" xmlns:r="http://schemas.openxmlformats.org/officeDocument/2006/relationships" xmlns:p="http://schemas.openxmlformats.org/presentationml/2006/main">
   <p:cSld>
     <p:spTree>
@@ -22664,7 +23826,7 @@
 </p:sld>
 </file>
 
-<file path=ppt/slides/slide28.xml><?xml version="1.0" encoding="utf-8"?>
+<file path=ppt/slides/slide29.xml><?xml version="1.0" encoding="utf-8"?>
 <p:sld xmlns:a="http://schemas.openxmlformats.org/drawingml/2006/main" xmlns:r="http://schemas.openxmlformats.org/officeDocument/2006/relationships" xmlns:p="http://schemas.openxmlformats.org/presentationml/2006/main">
   <p:cSld>
     <p:spTree>
@@ -24655,8 +25817,8 @@
           </a:p>
         </p:txBody>
       </p:sp>
-      <mc:AlternateContent xmlns:mc="http://schemas.openxmlformats.org/markup-compatibility/2006">
-        <mc:Choice xmlns:a14="http://schemas.microsoft.com/office/drawing/2010/main" Requires="a14">
+      <mc:AlternateContent xmlns:mc="http://schemas.openxmlformats.org/markup-compatibility/2006" xmlns:a14="http://schemas.microsoft.com/office/drawing/2010/main">
+        <mc:Choice Requires="a14">
           <p:sp>
             <p:nvSpPr>
               <p:cNvPr id="3" name="Espaço Reservado para Conteúdo 2">
@@ -24895,7 +26057,7 @@
             </p:txBody>
           </p:sp>
         </mc:Choice>
-        <mc:Fallback>
+        <mc:Fallback xmlns="">
           <p:sp>
             <p:nvSpPr>
               <p:cNvPr id="3" name="Espaço Reservado para Conteúdo 2">
@@ -26876,8 +28038,8 @@
           </p:sp>
         </mc:Fallback>
       </mc:AlternateContent>
-      <mc:AlternateContent xmlns:mc="http://schemas.openxmlformats.org/markup-compatibility/2006">
-        <mc:Choice xmlns:a14="http://schemas.microsoft.com/office/drawing/2010/main" Requires="a14">
+      <mc:AlternateContent xmlns:mc="http://schemas.openxmlformats.org/markup-compatibility/2006" xmlns:a14="http://schemas.microsoft.com/office/drawing/2010/main">
+        <mc:Choice Requires="a14">
           <p:sp>
             <p:nvSpPr>
               <p:cNvPr id="3" name="Espaço Reservado para Conteúdo 2">
@@ -27014,7 +28176,7 @@
             </p:txBody>
           </p:sp>
         </mc:Choice>
-        <mc:Fallback>
+        <mc:Fallback xmlns="">
           <p:sp>
             <p:nvSpPr>
               <p:cNvPr id="3" name="Espaço Reservado para Conteúdo 2">

--- a/slides/C24_Métricas_de_Classificação.pptx
+++ b/slides/C24_Métricas_de_Classificação.pptx
@@ -369,7 +369,7 @@
           <a:p>
             <a:fld id="{F7E56D9B-79AD-444A-AFED-DEC23408F8B4}" type="slidenum">
               <a:rPr lang="nl-BE" smtClean="0"/>
-              <a:t>‹#›</a:t>
+              <a:t>‹nº›</a:t>
             </a:fld>
             <a:endParaRPr lang="nl-BE"/>
           </a:p>
@@ -626,7 +626,7 @@
           <a:p>
             <a:fld id="{6FC8D850-966F-45A6-8DE7-15B891E7D40D}" type="slidenum">
               <a:rPr lang="pt-BR" smtClean="0"/>
-              <a:t>‹#›</a:t>
+              <a:t>‹nº›</a:t>
             </a:fld>
             <a:endParaRPr lang="pt-BR"/>
           </a:p>
@@ -2037,7 +2037,7 @@
           <p:cNvPr id="2" name="Título 1">
             <a:extLst>
               <a:ext uri="{FF2B5EF4-FFF2-40B4-BE49-F238E27FC236}">
-                <a16:creationId xmlns:a16="http://schemas.microsoft.com/office/drawing/2014/main" id="{1DB9B4FF-B06E-403C-A326-BDC64D8FF94E}"/>
+                <a16:creationId xmlns:a16="http://schemas.microsoft.com/office/drawing/2014/main" xmlns="" id="{1DB9B4FF-B06E-403C-A326-BDC64D8FF94E}"/>
               </a:ext>
             </a:extLst>
           </p:cNvPr>
@@ -2074,7 +2074,7 @@
           <p:cNvPr id="3" name="Subtítulo 2">
             <a:extLst>
               <a:ext uri="{FF2B5EF4-FFF2-40B4-BE49-F238E27FC236}">
-                <a16:creationId xmlns:a16="http://schemas.microsoft.com/office/drawing/2014/main" id="{247BDFCE-746E-45BF-A319-4733D58D1632}"/>
+                <a16:creationId xmlns:a16="http://schemas.microsoft.com/office/drawing/2014/main" xmlns="" id="{247BDFCE-746E-45BF-A319-4733D58D1632}"/>
               </a:ext>
             </a:extLst>
           </p:cNvPr>
@@ -2144,7 +2144,7 @@
           <p:cNvPr id="4" name="Espaço Reservado para Data 3">
             <a:extLst>
               <a:ext uri="{FF2B5EF4-FFF2-40B4-BE49-F238E27FC236}">
-                <a16:creationId xmlns:a16="http://schemas.microsoft.com/office/drawing/2014/main" id="{9EDE2778-5372-4104-B96D-968184DA8288}"/>
+                <a16:creationId xmlns:a16="http://schemas.microsoft.com/office/drawing/2014/main" xmlns="" id="{9EDE2778-5372-4104-B96D-968184DA8288}"/>
               </a:ext>
             </a:extLst>
           </p:cNvPr>
@@ -2173,7 +2173,7 @@
           <p:cNvPr id="5" name="Espaço Reservado para Rodapé 4">
             <a:extLst>
               <a:ext uri="{FF2B5EF4-FFF2-40B4-BE49-F238E27FC236}">
-                <a16:creationId xmlns:a16="http://schemas.microsoft.com/office/drawing/2014/main" id="{C1DD0F41-C861-4051-988D-3024A37A4B93}"/>
+                <a16:creationId xmlns:a16="http://schemas.microsoft.com/office/drawing/2014/main" xmlns="" id="{C1DD0F41-C861-4051-988D-3024A37A4B93}"/>
               </a:ext>
             </a:extLst>
           </p:cNvPr>
@@ -2198,7 +2198,7 @@
           <p:cNvPr id="6" name="Espaço Reservado para Número de Slide 5">
             <a:extLst>
               <a:ext uri="{FF2B5EF4-FFF2-40B4-BE49-F238E27FC236}">
-                <a16:creationId xmlns:a16="http://schemas.microsoft.com/office/drawing/2014/main" id="{07E5967E-D980-431A-A5DB-3F0C5030A81E}"/>
+                <a16:creationId xmlns:a16="http://schemas.microsoft.com/office/drawing/2014/main" xmlns="" id="{07E5967E-D980-431A-A5DB-3F0C5030A81E}"/>
               </a:ext>
             </a:extLst>
           </p:cNvPr>
@@ -2216,7 +2216,7 @@
           <a:p>
             <a:fld id="{1A7E88B7-70CE-4035-AE73-13FA6FB985D4}" type="slidenum">
               <a:rPr lang="pt-BR" smtClean="0"/>
-              <a:t>‹#›</a:t>
+              <a:t>‹nº›</a:t>
             </a:fld>
             <a:endParaRPr lang="pt-BR"/>
           </a:p>
@@ -2257,7 +2257,7 @@
           <p:cNvPr id="2" name="Título 1">
             <a:extLst>
               <a:ext uri="{FF2B5EF4-FFF2-40B4-BE49-F238E27FC236}">
-                <a16:creationId xmlns:a16="http://schemas.microsoft.com/office/drawing/2014/main" id="{9036C49F-3E68-4175-81BA-3C3FEE44308A}"/>
+                <a16:creationId xmlns:a16="http://schemas.microsoft.com/office/drawing/2014/main" xmlns="" id="{9036C49F-3E68-4175-81BA-3C3FEE44308A}"/>
               </a:ext>
             </a:extLst>
           </p:cNvPr>
@@ -2285,7 +2285,7 @@
           <p:cNvPr id="3" name="Espaço Reservado para Texto Vertical 2">
             <a:extLst>
               <a:ext uri="{FF2B5EF4-FFF2-40B4-BE49-F238E27FC236}">
-                <a16:creationId xmlns:a16="http://schemas.microsoft.com/office/drawing/2014/main" id="{426FA736-3DD3-4D4E-B57B-BBE1D8F7D424}"/>
+                <a16:creationId xmlns:a16="http://schemas.microsoft.com/office/drawing/2014/main" xmlns="" id="{426FA736-3DD3-4D4E-B57B-BBE1D8F7D424}"/>
               </a:ext>
             </a:extLst>
           </p:cNvPr>
@@ -2342,7 +2342,7 @@
           <p:cNvPr id="4" name="Espaço Reservado para Data 3">
             <a:extLst>
               <a:ext uri="{FF2B5EF4-FFF2-40B4-BE49-F238E27FC236}">
-                <a16:creationId xmlns:a16="http://schemas.microsoft.com/office/drawing/2014/main" id="{99E8855C-D8FD-48F6-B14E-861E0DE4D915}"/>
+                <a16:creationId xmlns:a16="http://schemas.microsoft.com/office/drawing/2014/main" xmlns="" id="{99E8855C-D8FD-48F6-B14E-861E0DE4D915}"/>
               </a:ext>
             </a:extLst>
           </p:cNvPr>
@@ -2371,7 +2371,7 @@
           <p:cNvPr id="5" name="Espaço Reservado para Rodapé 4">
             <a:extLst>
               <a:ext uri="{FF2B5EF4-FFF2-40B4-BE49-F238E27FC236}">
-                <a16:creationId xmlns:a16="http://schemas.microsoft.com/office/drawing/2014/main" id="{97C0BB88-2F21-42A5-ACFF-83DA47F2D340}"/>
+                <a16:creationId xmlns:a16="http://schemas.microsoft.com/office/drawing/2014/main" xmlns="" id="{97C0BB88-2F21-42A5-ACFF-83DA47F2D340}"/>
               </a:ext>
             </a:extLst>
           </p:cNvPr>
@@ -2396,7 +2396,7 @@
           <p:cNvPr id="6" name="Espaço Reservado para Número de Slide 5">
             <a:extLst>
               <a:ext uri="{FF2B5EF4-FFF2-40B4-BE49-F238E27FC236}">
-                <a16:creationId xmlns:a16="http://schemas.microsoft.com/office/drawing/2014/main" id="{6CB462B3-1F22-4C05-B4B8-7A279FB7D5E9}"/>
+                <a16:creationId xmlns:a16="http://schemas.microsoft.com/office/drawing/2014/main" xmlns="" id="{6CB462B3-1F22-4C05-B4B8-7A279FB7D5E9}"/>
               </a:ext>
             </a:extLst>
           </p:cNvPr>
@@ -2414,7 +2414,7 @@
           <a:p>
             <a:fld id="{1A7E88B7-70CE-4035-AE73-13FA6FB985D4}" type="slidenum">
               <a:rPr lang="pt-BR" smtClean="0"/>
-              <a:t>‹#›</a:t>
+              <a:t>‹nº›</a:t>
             </a:fld>
             <a:endParaRPr lang="pt-BR"/>
           </a:p>
@@ -2455,7 +2455,7 @@
           <p:cNvPr id="2" name="Título Vertical 1">
             <a:extLst>
               <a:ext uri="{FF2B5EF4-FFF2-40B4-BE49-F238E27FC236}">
-                <a16:creationId xmlns:a16="http://schemas.microsoft.com/office/drawing/2014/main" id="{EAEAB728-701C-4207-A9D5-23FF45C60502}"/>
+                <a16:creationId xmlns:a16="http://schemas.microsoft.com/office/drawing/2014/main" xmlns="" id="{EAEAB728-701C-4207-A9D5-23FF45C60502}"/>
               </a:ext>
             </a:extLst>
           </p:cNvPr>
@@ -2488,7 +2488,7 @@
           <p:cNvPr id="3" name="Espaço Reservado para Texto Vertical 2">
             <a:extLst>
               <a:ext uri="{FF2B5EF4-FFF2-40B4-BE49-F238E27FC236}">
-                <a16:creationId xmlns:a16="http://schemas.microsoft.com/office/drawing/2014/main" id="{BA8C8CCF-7823-480A-9A19-0F664DD17E3B}"/>
+                <a16:creationId xmlns:a16="http://schemas.microsoft.com/office/drawing/2014/main" xmlns="" id="{BA8C8CCF-7823-480A-9A19-0F664DD17E3B}"/>
               </a:ext>
             </a:extLst>
           </p:cNvPr>
@@ -2550,7 +2550,7 @@
           <p:cNvPr id="4" name="Espaço Reservado para Data 3">
             <a:extLst>
               <a:ext uri="{FF2B5EF4-FFF2-40B4-BE49-F238E27FC236}">
-                <a16:creationId xmlns:a16="http://schemas.microsoft.com/office/drawing/2014/main" id="{721D5734-7B1F-425D-942F-6EB73344027C}"/>
+                <a16:creationId xmlns:a16="http://schemas.microsoft.com/office/drawing/2014/main" xmlns="" id="{721D5734-7B1F-425D-942F-6EB73344027C}"/>
               </a:ext>
             </a:extLst>
           </p:cNvPr>
@@ -2579,7 +2579,7 @@
           <p:cNvPr id="5" name="Espaço Reservado para Rodapé 4">
             <a:extLst>
               <a:ext uri="{FF2B5EF4-FFF2-40B4-BE49-F238E27FC236}">
-                <a16:creationId xmlns:a16="http://schemas.microsoft.com/office/drawing/2014/main" id="{1E1AAEAC-F08D-45FE-89EC-B1B349A868C9}"/>
+                <a16:creationId xmlns:a16="http://schemas.microsoft.com/office/drawing/2014/main" xmlns="" id="{1E1AAEAC-F08D-45FE-89EC-B1B349A868C9}"/>
               </a:ext>
             </a:extLst>
           </p:cNvPr>
@@ -2604,7 +2604,7 @@
           <p:cNvPr id="6" name="Espaço Reservado para Número de Slide 5">
             <a:extLst>
               <a:ext uri="{FF2B5EF4-FFF2-40B4-BE49-F238E27FC236}">
-                <a16:creationId xmlns:a16="http://schemas.microsoft.com/office/drawing/2014/main" id="{BAA44493-9911-47B2-87A6-C2141A972BC8}"/>
+                <a16:creationId xmlns:a16="http://schemas.microsoft.com/office/drawing/2014/main" xmlns="" id="{BAA44493-9911-47B2-87A6-C2141A972BC8}"/>
               </a:ext>
             </a:extLst>
           </p:cNvPr>
@@ -2622,7 +2622,7 @@
           <a:p>
             <a:fld id="{1A7E88B7-70CE-4035-AE73-13FA6FB985D4}" type="slidenum">
               <a:rPr lang="pt-BR" smtClean="0"/>
-              <a:t>‹#›</a:t>
+              <a:t>‹nº›</a:t>
             </a:fld>
             <a:endParaRPr lang="pt-BR"/>
           </a:p>
@@ -2663,7 +2663,7 @@
           <p:cNvPr id="2" name="Título 1">
             <a:extLst>
               <a:ext uri="{FF2B5EF4-FFF2-40B4-BE49-F238E27FC236}">
-                <a16:creationId xmlns:a16="http://schemas.microsoft.com/office/drawing/2014/main" id="{71BD44A5-8F21-4626-A01D-48A1C874B1D5}"/>
+                <a16:creationId xmlns:a16="http://schemas.microsoft.com/office/drawing/2014/main" xmlns="" id="{71BD44A5-8F21-4626-A01D-48A1C874B1D5}"/>
               </a:ext>
             </a:extLst>
           </p:cNvPr>
@@ -2691,7 +2691,7 @@
           <p:cNvPr id="3" name="Espaço Reservado para Conteúdo 2">
             <a:extLst>
               <a:ext uri="{FF2B5EF4-FFF2-40B4-BE49-F238E27FC236}">
-                <a16:creationId xmlns:a16="http://schemas.microsoft.com/office/drawing/2014/main" id="{B79E8085-65A9-48AA-951D-71D978BFF4ED}"/>
+                <a16:creationId xmlns:a16="http://schemas.microsoft.com/office/drawing/2014/main" xmlns="" id="{B79E8085-65A9-48AA-951D-71D978BFF4ED}"/>
               </a:ext>
             </a:extLst>
           </p:cNvPr>
@@ -2748,7 +2748,7 @@
           <p:cNvPr id="4" name="Espaço Reservado para Data 3">
             <a:extLst>
               <a:ext uri="{FF2B5EF4-FFF2-40B4-BE49-F238E27FC236}">
-                <a16:creationId xmlns:a16="http://schemas.microsoft.com/office/drawing/2014/main" id="{F05BE1AF-51EA-425D-B188-DE7BD675009F}"/>
+                <a16:creationId xmlns:a16="http://schemas.microsoft.com/office/drawing/2014/main" xmlns="" id="{F05BE1AF-51EA-425D-B188-DE7BD675009F}"/>
               </a:ext>
             </a:extLst>
           </p:cNvPr>
@@ -2777,7 +2777,7 @@
           <p:cNvPr id="5" name="Espaço Reservado para Rodapé 4">
             <a:extLst>
               <a:ext uri="{FF2B5EF4-FFF2-40B4-BE49-F238E27FC236}">
-                <a16:creationId xmlns:a16="http://schemas.microsoft.com/office/drawing/2014/main" id="{121BE632-29CF-4CB9-B365-C9EF38F89BE6}"/>
+                <a16:creationId xmlns:a16="http://schemas.microsoft.com/office/drawing/2014/main" xmlns="" id="{121BE632-29CF-4CB9-B365-C9EF38F89BE6}"/>
               </a:ext>
             </a:extLst>
           </p:cNvPr>
@@ -2802,7 +2802,7 @@
           <p:cNvPr id="6" name="Espaço Reservado para Número de Slide 5">
             <a:extLst>
               <a:ext uri="{FF2B5EF4-FFF2-40B4-BE49-F238E27FC236}">
-                <a16:creationId xmlns:a16="http://schemas.microsoft.com/office/drawing/2014/main" id="{60CF3DD1-9AEC-4A57-B461-4E4DD86FAC18}"/>
+                <a16:creationId xmlns:a16="http://schemas.microsoft.com/office/drawing/2014/main" xmlns="" id="{60CF3DD1-9AEC-4A57-B461-4E4DD86FAC18}"/>
               </a:ext>
             </a:extLst>
           </p:cNvPr>
@@ -2820,7 +2820,7 @@
           <a:p>
             <a:fld id="{1A7E88B7-70CE-4035-AE73-13FA6FB985D4}" type="slidenum">
               <a:rPr lang="pt-BR" smtClean="0"/>
-              <a:t>‹#›</a:t>
+              <a:t>‹nº›</a:t>
             </a:fld>
             <a:endParaRPr lang="pt-BR"/>
           </a:p>
@@ -2861,7 +2861,7 @@
           <p:cNvPr id="2" name="Título 1">
             <a:extLst>
               <a:ext uri="{FF2B5EF4-FFF2-40B4-BE49-F238E27FC236}">
-                <a16:creationId xmlns:a16="http://schemas.microsoft.com/office/drawing/2014/main" id="{34AB2FF0-A4D7-4E28-991D-FF26140D5988}"/>
+                <a16:creationId xmlns:a16="http://schemas.microsoft.com/office/drawing/2014/main" xmlns="" id="{34AB2FF0-A4D7-4E28-991D-FF26140D5988}"/>
               </a:ext>
             </a:extLst>
           </p:cNvPr>
@@ -2898,7 +2898,7 @@
           <p:cNvPr id="3" name="Espaço Reservado para Texto 2">
             <a:extLst>
               <a:ext uri="{FF2B5EF4-FFF2-40B4-BE49-F238E27FC236}">
-                <a16:creationId xmlns:a16="http://schemas.microsoft.com/office/drawing/2014/main" id="{E2AC45B0-4145-40DB-8E61-105461170604}"/>
+                <a16:creationId xmlns:a16="http://schemas.microsoft.com/office/drawing/2014/main" xmlns="" id="{E2AC45B0-4145-40DB-8E61-105461170604}"/>
               </a:ext>
             </a:extLst>
           </p:cNvPr>
@@ -3023,7 +3023,7 @@
           <p:cNvPr id="4" name="Espaço Reservado para Data 3">
             <a:extLst>
               <a:ext uri="{FF2B5EF4-FFF2-40B4-BE49-F238E27FC236}">
-                <a16:creationId xmlns:a16="http://schemas.microsoft.com/office/drawing/2014/main" id="{50F1D3FB-740A-4EBA-A309-2CE71D12ECFB}"/>
+                <a16:creationId xmlns:a16="http://schemas.microsoft.com/office/drawing/2014/main" xmlns="" id="{50F1D3FB-740A-4EBA-A309-2CE71D12ECFB}"/>
               </a:ext>
             </a:extLst>
           </p:cNvPr>
@@ -3052,7 +3052,7 @@
           <p:cNvPr id="5" name="Espaço Reservado para Rodapé 4">
             <a:extLst>
               <a:ext uri="{FF2B5EF4-FFF2-40B4-BE49-F238E27FC236}">
-                <a16:creationId xmlns:a16="http://schemas.microsoft.com/office/drawing/2014/main" id="{BDCAB18F-8715-4465-A940-F9C193A2ACE9}"/>
+                <a16:creationId xmlns:a16="http://schemas.microsoft.com/office/drawing/2014/main" xmlns="" id="{BDCAB18F-8715-4465-A940-F9C193A2ACE9}"/>
               </a:ext>
             </a:extLst>
           </p:cNvPr>
@@ -3077,7 +3077,7 @@
           <p:cNvPr id="6" name="Espaço Reservado para Número de Slide 5">
             <a:extLst>
               <a:ext uri="{FF2B5EF4-FFF2-40B4-BE49-F238E27FC236}">
-                <a16:creationId xmlns:a16="http://schemas.microsoft.com/office/drawing/2014/main" id="{353466C6-8248-429F-8056-FF040BF509EB}"/>
+                <a16:creationId xmlns:a16="http://schemas.microsoft.com/office/drawing/2014/main" xmlns="" id="{353466C6-8248-429F-8056-FF040BF509EB}"/>
               </a:ext>
             </a:extLst>
           </p:cNvPr>
@@ -3095,7 +3095,7 @@
           <a:p>
             <a:fld id="{1A7E88B7-70CE-4035-AE73-13FA6FB985D4}" type="slidenum">
               <a:rPr lang="pt-BR" smtClean="0"/>
-              <a:t>‹#›</a:t>
+              <a:t>‹nº›</a:t>
             </a:fld>
             <a:endParaRPr lang="pt-BR"/>
           </a:p>
@@ -3136,7 +3136,7 @@
           <p:cNvPr id="2" name="Título 1">
             <a:extLst>
               <a:ext uri="{FF2B5EF4-FFF2-40B4-BE49-F238E27FC236}">
-                <a16:creationId xmlns:a16="http://schemas.microsoft.com/office/drawing/2014/main" id="{BC7BB9F0-F14B-4A91-B2B7-35BC47FE4DE7}"/>
+                <a16:creationId xmlns:a16="http://schemas.microsoft.com/office/drawing/2014/main" xmlns="" id="{BC7BB9F0-F14B-4A91-B2B7-35BC47FE4DE7}"/>
               </a:ext>
             </a:extLst>
           </p:cNvPr>
@@ -3164,7 +3164,7 @@
           <p:cNvPr id="3" name="Espaço Reservado para Conteúdo 2">
             <a:extLst>
               <a:ext uri="{FF2B5EF4-FFF2-40B4-BE49-F238E27FC236}">
-                <a16:creationId xmlns:a16="http://schemas.microsoft.com/office/drawing/2014/main" id="{EC1FC1C4-73DA-47A6-8496-B0B457F7D39A}"/>
+                <a16:creationId xmlns:a16="http://schemas.microsoft.com/office/drawing/2014/main" xmlns="" id="{EC1FC1C4-73DA-47A6-8496-B0B457F7D39A}"/>
               </a:ext>
             </a:extLst>
           </p:cNvPr>
@@ -3226,7 +3226,7 @@
           <p:cNvPr id="4" name="Espaço Reservado para Conteúdo 3">
             <a:extLst>
               <a:ext uri="{FF2B5EF4-FFF2-40B4-BE49-F238E27FC236}">
-                <a16:creationId xmlns:a16="http://schemas.microsoft.com/office/drawing/2014/main" id="{E92F06A8-A449-4D92-9912-76873E529B38}"/>
+                <a16:creationId xmlns:a16="http://schemas.microsoft.com/office/drawing/2014/main" xmlns="" id="{E92F06A8-A449-4D92-9912-76873E529B38}"/>
               </a:ext>
             </a:extLst>
           </p:cNvPr>
@@ -3288,7 +3288,7 @@
           <p:cNvPr id="5" name="Espaço Reservado para Data 4">
             <a:extLst>
               <a:ext uri="{FF2B5EF4-FFF2-40B4-BE49-F238E27FC236}">
-                <a16:creationId xmlns:a16="http://schemas.microsoft.com/office/drawing/2014/main" id="{938070A4-BC2F-4D55-BD8D-DEAF11BB9EE9}"/>
+                <a16:creationId xmlns:a16="http://schemas.microsoft.com/office/drawing/2014/main" xmlns="" id="{938070A4-BC2F-4D55-BD8D-DEAF11BB9EE9}"/>
               </a:ext>
             </a:extLst>
           </p:cNvPr>
@@ -3317,7 +3317,7 @@
           <p:cNvPr id="6" name="Espaço Reservado para Rodapé 5">
             <a:extLst>
               <a:ext uri="{FF2B5EF4-FFF2-40B4-BE49-F238E27FC236}">
-                <a16:creationId xmlns:a16="http://schemas.microsoft.com/office/drawing/2014/main" id="{45CC2DB8-844A-465F-BA9A-7734C80C7F43}"/>
+                <a16:creationId xmlns:a16="http://schemas.microsoft.com/office/drawing/2014/main" xmlns="" id="{45CC2DB8-844A-465F-BA9A-7734C80C7F43}"/>
               </a:ext>
             </a:extLst>
           </p:cNvPr>
@@ -3342,7 +3342,7 @@
           <p:cNvPr id="7" name="Espaço Reservado para Número de Slide 6">
             <a:extLst>
               <a:ext uri="{FF2B5EF4-FFF2-40B4-BE49-F238E27FC236}">
-                <a16:creationId xmlns:a16="http://schemas.microsoft.com/office/drawing/2014/main" id="{4CC606A8-097B-4040-94E0-CD8C88280D8F}"/>
+                <a16:creationId xmlns:a16="http://schemas.microsoft.com/office/drawing/2014/main" xmlns="" id="{4CC606A8-097B-4040-94E0-CD8C88280D8F}"/>
               </a:ext>
             </a:extLst>
           </p:cNvPr>
@@ -3360,7 +3360,7 @@
           <a:p>
             <a:fld id="{1A7E88B7-70CE-4035-AE73-13FA6FB985D4}" type="slidenum">
               <a:rPr lang="pt-BR" smtClean="0"/>
-              <a:t>‹#›</a:t>
+              <a:t>‹nº›</a:t>
             </a:fld>
             <a:endParaRPr lang="pt-BR"/>
           </a:p>
@@ -3401,7 +3401,7 @@
           <p:cNvPr id="2" name="Título 1">
             <a:extLst>
               <a:ext uri="{FF2B5EF4-FFF2-40B4-BE49-F238E27FC236}">
-                <a16:creationId xmlns:a16="http://schemas.microsoft.com/office/drawing/2014/main" id="{76D66686-0143-4CB6-8C09-BA326F1E7ACA}"/>
+                <a16:creationId xmlns:a16="http://schemas.microsoft.com/office/drawing/2014/main" xmlns="" id="{76D66686-0143-4CB6-8C09-BA326F1E7ACA}"/>
               </a:ext>
             </a:extLst>
           </p:cNvPr>
@@ -3434,7 +3434,7 @@
           <p:cNvPr id="3" name="Espaço Reservado para Texto 2">
             <a:extLst>
               <a:ext uri="{FF2B5EF4-FFF2-40B4-BE49-F238E27FC236}">
-                <a16:creationId xmlns:a16="http://schemas.microsoft.com/office/drawing/2014/main" id="{0227AB85-F59E-4BCE-B846-4FA0992C2F23}"/>
+                <a16:creationId xmlns:a16="http://schemas.microsoft.com/office/drawing/2014/main" xmlns="" id="{0227AB85-F59E-4BCE-B846-4FA0992C2F23}"/>
               </a:ext>
             </a:extLst>
           </p:cNvPr>
@@ -3505,7 +3505,7 @@
           <p:cNvPr id="4" name="Espaço Reservado para Conteúdo 3">
             <a:extLst>
               <a:ext uri="{FF2B5EF4-FFF2-40B4-BE49-F238E27FC236}">
-                <a16:creationId xmlns:a16="http://schemas.microsoft.com/office/drawing/2014/main" id="{3373456C-7319-4D0A-827D-D29F6B083F5D}"/>
+                <a16:creationId xmlns:a16="http://schemas.microsoft.com/office/drawing/2014/main" xmlns="" id="{3373456C-7319-4D0A-827D-D29F6B083F5D}"/>
               </a:ext>
             </a:extLst>
           </p:cNvPr>
@@ -3567,7 +3567,7 @@
           <p:cNvPr id="5" name="Espaço Reservado para Texto 4">
             <a:extLst>
               <a:ext uri="{FF2B5EF4-FFF2-40B4-BE49-F238E27FC236}">
-                <a16:creationId xmlns:a16="http://schemas.microsoft.com/office/drawing/2014/main" id="{4CD109D0-2E83-4262-8029-A871CEC47406}"/>
+                <a16:creationId xmlns:a16="http://schemas.microsoft.com/office/drawing/2014/main" xmlns="" id="{4CD109D0-2E83-4262-8029-A871CEC47406}"/>
               </a:ext>
             </a:extLst>
           </p:cNvPr>
@@ -3638,7 +3638,7 @@
           <p:cNvPr id="6" name="Espaço Reservado para Conteúdo 5">
             <a:extLst>
               <a:ext uri="{FF2B5EF4-FFF2-40B4-BE49-F238E27FC236}">
-                <a16:creationId xmlns:a16="http://schemas.microsoft.com/office/drawing/2014/main" id="{AD706E3A-CFBB-4A6C-A65F-D0360A9E74FE}"/>
+                <a16:creationId xmlns:a16="http://schemas.microsoft.com/office/drawing/2014/main" xmlns="" id="{AD706E3A-CFBB-4A6C-A65F-D0360A9E74FE}"/>
               </a:ext>
             </a:extLst>
           </p:cNvPr>
@@ -3700,7 +3700,7 @@
           <p:cNvPr id="7" name="Espaço Reservado para Data 6">
             <a:extLst>
               <a:ext uri="{FF2B5EF4-FFF2-40B4-BE49-F238E27FC236}">
-                <a16:creationId xmlns:a16="http://schemas.microsoft.com/office/drawing/2014/main" id="{4172C0E5-5AF0-4805-BB51-443733CD2BD5}"/>
+                <a16:creationId xmlns:a16="http://schemas.microsoft.com/office/drawing/2014/main" xmlns="" id="{4172C0E5-5AF0-4805-BB51-443733CD2BD5}"/>
               </a:ext>
             </a:extLst>
           </p:cNvPr>
@@ -3729,7 +3729,7 @@
           <p:cNvPr id="8" name="Espaço Reservado para Rodapé 7">
             <a:extLst>
               <a:ext uri="{FF2B5EF4-FFF2-40B4-BE49-F238E27FC236}">
-                <a16:creationId xmlns:a16="http://schemas.microsoft.com/office/drawing/2014/main" id="{0E801648-156F-497E-99CF-797DF48051E1}"/>
+                <a16:creationId xmlns:a16="http://schemas.microsoft.com/office/drawing/2014/main" xmlns="" id="{0E801648-156F-497E-99CF-797DF48051E1}"/>
               </a:ext>
             </a:extLst>
           </p:cNvPr>
@@ -3754,7 +3754,7 @@
           <p:cNvPr id="9" name="Espaço Reservado para Número de Slide 8">
             <a:extLst>
               <a:ext uri="{FF2B5EF4-FFF2-40B4-BE49-F238E27FC236}">
-                <a16:creationId xmlns:a16="http://schemas.microsoft.com/office/drawing/2014/main" id="{EEE23D32-80E7-4796-A137-66BF842E4B53}"/>
+                <a16:creationId xmlns:a16="http://schemas.microsoft.com/office/drawing/2014/main" xmlns="" id="{EEE23D32-80E7-4796-A137-66BF842E4B53}"/>
               </a:ext>
             </a:extLst>
           </p:cNvPr>
@@ -3772,7 +3772,7 @@
           <a:p>
             <a:fld id="{1A7E88B7-70CE-4035-AE73-13FA6FB985D4}" type="slidenum">
               <a:rPr lang="pt-BR" smtClean="0"/>
-              <a:t>‹#›</a:t>
+              <a:t>‹nº›</a:t>
             </a:fld>
             <a:endParaRPr lang="pt-BR"/>
           </a:p>
@@ -3813,7 +3813,7 @@
           <p:cNvPr id="2" name="Título 1">
             <a:extLst>
               <a:ext uri="{FF2B5EF4-FFF2-40B4-BE49-F238E27FC236}">
-                <a16:creationId xmlns:a16="http://schemas.microsoft.com/office/drawing/2014/main" id="{2BCE2379-C78F-47E1-8CFC-B846E7AF148D}"/>
+                <a16:creationId xmlns:a16="http://schemas.microsoft.com/office/drawing/2014/main" xmlns="" id="{2BCE2379-C78F-47E1-8CFC-B846E7AF148D}"/>
               </a:ext>
             </a:extLst>
           </p:cNvPr>
@@ -3841,7 +3841,7 @@
           <p:cNvPr id="3" name="Espaço Reservado para Data 2">
             <a:extLst>
               <a:ext uri="{FF2B5EF4-FFF2-40B4-BE49-F238E27FC236}">
-                <a16:creationId xmlns:a16="http://schemas.microsoft.com/office/drawing/2014/main" id="{342600A9-7F92-4E22-9D94-E4717252A817}"/>
+                <a16:creationId xmlns:a16="http://schemas.microsoft.com/office/drawing/2014/main" xmlns="" id="{342600A9-7F92-4E22-9D94-E4717252A817}"/>
               </a:ext>
             </a:extLst>
           </p:cNvPr>
@@ -3870,7 +3870,7 @@
           <p:cNvPr id="4" name="Espaço Reservado para Rodapé 3">
             <a:extLst>
               <a:ext uri="{FF2B5EF4-FFF2-40B4-BE49-F238E27FC236}">
-                <a16:creationId xmlns:a16="http://schemas.microsoft.com/office/drawing/2014/main" id="{192E6BED-F546-40CC-A2DF-99CBA853654E}"/>
+                <a16:creationId xmlns:a16="http://schemas.microsoft.com/office/drawing/2014/main" xmlns="" id="{192E6BED-F546-40CC-A2DF-99CBA853654E}"/>
               </a:ext>
             </a:extLst>
           </p:cNvPr>
@@ -3895,7 +3895,7 @@
           <p:cNvPr id="5" name="Espaço Reservado para Número de Slide 4">
             <a:extLst>
               <a:ext uri="{FF2B5EF4-FFF2-40B4-BE49-F238E27FC236}">
-                <a16:creationId xmlns:a16="http://schemas.microsoft.com/office/drawing/2014/main" id="{6091CC40-A8C4-4063-80EB-CC5099621678}"/>
+                <a16:creationId xmlns:a16="http://schemas.microsoft.com/office/drawing/2014/main" xmlns="" id="{6091CC40-A8C4-4063-80EB-CC5099621678}"/>
               </a:ext>
             </a:extLst>
           </p:cNvPr>
@@ -3913,7 +3913,7 @@
           <a:p>
             <a:fld id="{1A7E88B7-70CE-4035-AE73-13FA6FB985D4}" type="slidenum">
               <a:rPr lang="pt-BR" smtClean="0"/>
-              <a:t>‹#›</a:t>
+              <a:t>‹nº›</a:t>
             </a:fld>
             <a:endParaRPr lang="pt-BR"/>
           </a:p>
@@ -3954,7 +3954,7 @@
           <p:cNvPr id="2" name="Espaço Reservado para Data 1">
             <a:extLst>
               <a:ext uri="{FF2B5EF4-FFF2-40B4-BE49-F238E27FC236}">
-                <a16:creationId xmlns:a16="http://schemas.microsoft.com/office/drawing/2014/main" id="{DD19515C-212C-4EAE-84A3-8FF4BC844F1B}"/>
+                <a16:creationId xmlns:a16="http://schemas.microsoft.com/office/drawing/2014/main" xmlns="" id="{DD19515C-212C-4EAE-84A3-8FF4BC844F1B}"/>
               </a:ext>
             </a:extLst>
           </p:cNvPr>
@@ -3983,7 +3983,7 @@
           <p:cNvPr id="3" name="Espaço Reservado para Rodapé 2">
             <a:extLst>
               <a:ext uri="{FF2B5EF4-FFF2-40B4-BE49-F238E27FC236}">
-                <a16:creationId xmlns:a16="http://schemas.microsoft.com/office/drawing/2014/main" id="{94D3D120-B3E8-4C96-861D-7A4F12F49B3A}"/>
+                <a16:creationId xmlns:a16="http://schemas.microsoft.com/office/drawing/2014/main" xmlns="" id="{94D3D120-B3E8-4C96-861D-7A4F12F49B3A}"/>
               </a:ext>
             </a:extLst>
           </p:cNvPr>
@@ -4008,7 +4008,7 @@
           <p:cNvPr id="4" name="Espaço Reservado para Número de Slide 3">
             <a:extLst>
               <a:ext uri="{FF2B5EF4-FFF2-40B4-BE49-F238E27FC236}">
-                <a16:creationId xmlns:a16="http://schemas.microsoft.com/office/drawing/2014/main" id="{42E49B68-FA1B-468B-9F17-D5C09243D454}"/>
+                <a16:creationId xmlns:a16="http://schemas.microsoft.com/office/drawing/2014/main" xmlns="" id="{42E49B68-FA1B-468B-9F17-D5C09243D454}"/>
               </a:ext>
             </a:extLst>
           </p:cNvPr>
@@ -4026,7 +4026,7 @@
           <a:p>
             <a:fld id="{1A7E88B7-70CE-4035-AE73-13FA6FB985D4}" type="slidenum">
               <a:rPr lang="pt-BR" smtClean="0"/>
-              <a:t>‹#›</a:t>
+              <a:t>‹nº›</a:t>
             </a:fld>
             <a:endParaRPr lang="pt-BR"/>
           </a:p>
@@ -4067,7 +4067,7 @@
           <p:cNvPr id="2" name="Título 1">
             <a:extLst>
               <a:ext uri="{FF2B5EF4-FFF2-40B4-BE49-F238E27FC236}">
-                <a16:creationId xmlns:a16="http://schemas.microsoft.com/office/drawing/2014/main" id="{1C17BCBE-A897-4319-85EC-D87909C24980}"/>
+                <a16:creationId xmlns:a16="http://schemas.microsoft.com/office/drawing/2014/main" xmlns="" id="{1C17BCBE-A897-4319-85EC-D87909C24980}"/>
               </a:ext>
             </a:extLst>
           </p:cNvPr>
@@ -4104,7 +4104,7 @@
           <p:cNvPr id="3" name="Espaço Reservado para Conteúdo 2">
             <a:extLst>
               <a:ext uri="{FF2B5EF4-FFF2-40B4-BE49-F238E27FC236}">
-                <a16:creationId xmlns:a16="http://schemas.microsoft.com/office/drawing/2014/main" id="{4226F885-0204-4913-868B-4B8B82576F17}"/>
+                <a16:creationId xmlns:a16="http://schemas.microsoft.com/office/drawing/2014/main" xmlns="" id="{4226F885-0204-4913-868B-4B8B82576F17}"/>
               </a:ext>
             </a:extLst>
           </p:cNvPr>
@@ -4194,7 +4194,7 @@
           <p:cNvPr id="4" name="Espaço Reservado para Texto 3">
             <a:extLst>
               <a:ext uri="{FF2B5EF4-FFF2-40B4-BE49-F238E27FC236}">
-                <a16:creationId xmlns:a16="http://schemas.microsoft.com/office/drawing/2014/main" id="{00F9F784-A858-441B-8AB5-697098141751}"/>
+                <a16:creationId xmlns:a16="http://schemas.microsoft.com/office/drawing/2014/main" xmlns="" id="{00F9F784-A858-441B-8AB5-697098141751}"/>
               </a:ext>
             </a:extLst>
           </p:cNvPr>
@@ -4265,7 +4265,7 @@
           <p:cNvPr id="5" name="Espaço Reservado para Data 4">
             <a:extLst>
               <a:ext uri="{FF2B5EF4-FFF2-40B4-BE49-F238E27FC236}">
-                <a16:creationId xmlns:a16="http://schemas.microsoft.com/office/drawing/2014/main" id="{A4DC363A-5000-472E-8B17-02E7DCB8840A}"/>
+                <a16:creationId xmlns:a16="http://schemas.microsoft.com/office/drawing/2014/main" xmlns="" id="{A4DC363A-5000-472E-8B17-02E7DCB8840A}"/>
               </a:ext>
             </a:extLst>
           </p:cNvPr>
@@ -4294,7 +4294,7 @@
           <p:cNvPr id="6" name="Espaço Reservado para Rodapé 5">
             <a:extLst>
               <a:ext uri="{FF2B5EF4-FFF2-40B4-BE49-F238E27FC236}">
-                <a16:creationId xmlns:a16="http://schemas.microsoft.com/office/drawing/2014/main" id="{5548425D-2C21-4C56-BAD4-662978775C28}"/>
+                <a16:creationId xmlns:a16="http://schemas.microsoft.com/office/drawing/2014/main" xmlns="" id="{5548425D-2C21-4C56-BAD4-662978775C28}"/>
               </a:ext>
             </a:extLst>
           </p:cNvPr>
@@ -4319,7 +4319,7 @@
           <p:cNvPr id="7" name="Espaço Reservado para Número de Slide 6">
             <a:extLst>
               <a:ext uri="{FF2B5EF4-FFF2-40B4-BE49-F238E27FC236}">
-                <a16:creationId xmlns:a16="http://schemas.microsoft.com/office/drawing/2014/main" id="{C63E9726-E64C-42B2-AE8A-8C235A956B48}"/>
+                <a16:creationId xmlns:a16="http://schemas.microsoft.com/office/drawing/2014/main" xmlns="" id="{C63E9726-E64C-42B2-AE8A-8C235A956B48}"/>
               </a:ext>
             </a:extLst>
           </p:cNvPr>
@@ -4337,7 +4337,7 @@
           <a:p>
             <a:fld id="{1A7E88B7-70CE-4035-AE73-13FA6FB985D4}" type="slidenum">
               <a:rPr lang="pt-BR" smtClean="0"/>
-              <a:t>‹#›</a:t>
+              <a:t>‹nº›</a:t>
             </a:fld>
             <a:endParaRPr lang="pt-BR"/>
           </a:p>
@@ -4378,7 +4378,7 @@
           <p:cNvPr id="2" name="Título 1">
             <a:extLst>
               <a:ext uri="{FF2B5EF4-FFF2-40B4-BE49-F238E27FC236}">
-                <a16:creationId xmlns:a16="http://schemas.microsoft.com/office/drawing/2014/main" id="{11086A78-3E74-450C-96A6-CA8AC37AF772}"/>
+                <a16:creationId xmlns:a16="http://schemas.microsoft.com/office/drawing/2014/main" xmlns="" id="{11086A78-3E74-450C-96A6-CA8AC37AF772}"/>
               </a:ext>
             </a:extLst>
           </p:cNvPr>
@@ -4415,7 +4415,7 @@
           <p:cNvPr id="3" name="Espaço Reservado para Imagem 2">
             <a:extLst>
               <a:ext uri="{FF2B5EF4-FFF2-40B4-BE49-F238E27FC236}">
-                <a16:creationId xmlns:a16="http://schemas.microsoft.com/office/drawing/2014/main" id="{5F5B7312-975A-4DBC-9B2F-3652ADA006FD}"/>
+                <a16:creationId xmlns:a16="http://schemas.microsoft.com/office/drawing/2014/main" xmlns="" id="{5F5B7312-975A-4DBC-9B2F-3652ADA006FD}"/>
               </a:ext>
             </a:extLst>
           </p:cNvPr>
@@ -4482,7 +4482,7 @@
           <p:cNvPr id="4" name="Espaço Reservado para Texto 3">
             <a:extLst>
               <a:ext uri="{FF2B5EF4-FFF2-40B4-BE49-F238E27FC236}">
-                <a16:creationId xmlns:a16="http://schemas.microsoft.com/office/drawing/2014/main" id="{AAF805F5-1DFF-41C6-944C-7D79FE0D0963}"/>
+                <a16:creationId xmlns:a16="http://schemas.microsoft.com/office/drawing/2014/main" xmlns="" id="{AAF805F5-1DFF-41C6-944C-7D79FE0D0963}"/>
               </a:ext>
             </a:extLst>
           </p:cNvPr>
@@ -4553,7 +4553,7 @@
           <p:cNvPr id="5" name="Espaço Reservado para Data 4">
             <a:extLst>
               <a:ext uri="{FF2B5EF4-FFF2-40B4-BE49-F238E27FC236}">
-                <a16:creationId xmlns:a16="http://schemas.microsoft.com/office/drawing/2014/main" id="{02113D81-8665-4516-BD81-C6A1F254EECD}"/>
+                <a16:creationId xmlns:a16="http://schemas.microsoft.com/office/drawing/2014/main" xmlns="" id="{02113D81-8665-4516-BD81-C6A1F254EECD}"/>
               </a:ext>
             </a:extLst>
           </p:cNvPr>
@@ -4582,7 +4582,7 @@
           <p:cNvPr id="6" name="Espaço Reservado para Rodapé 5">
             <a:extLst>
               <a:ext uri="{FF2B5EF4-FFF2-40B4-BE49-F238E27FC236}">
-                <a16:creationId xmlns:a16="http://schemas.microsoft.com/office/drawing/2014/main" id="{2B00C88B-FF32-40AA-A187-727D96FD7862}"/>
+                <a16:creationId xmlns:a16="http://schemas.microsoft.com/office/drawing/2014/main" xmlns="" id="{2B00C88B-FF32-40AA-A187-727D96FD7862}"/>
               </a:ext>
             </a:extLst>
           </p:cNvPr>
@@ -4607,7 +4607,7 @@
           <p:cNvPr id="7" name="Espaço Reservado para Número de Slide 6">
             <a:extLst>
               <a:ext uri="{FF2B5EF4-FFF2-40B4-BE49-F238E27FC236}">
-                <a16:creationId xmlns:a16="http://schemas.microsoft.com/office/drawing/2014/main" id="{A04D1A2D-69F7-4B8F-A730-BC26DC340BA6}"/>
+                <a16:creationId xmlns:a16="http://schemas.microsoft.com/office/drawing/2014/main" xmlns="" id="{A04D1A2D-69F7-4B8F-A730-BC26DC340BA6}"/>
               </a:ext>
             </a:extLst>
           </p:cNvPr>
@@ -4625,7 +4625,7 @@
           <a:p>
             <a:fld id="{1A7E88B7-70CE-4035-AE73-13FA6FB985D4}" type="slidenum">
               <a:rPr lang="pt-BR" smtClean="0"/>
-              <a:t>‹#›</a:t>
+              <a:t>‹nº›</a:t>
             </a:fld>
             <a:endParaRPr lang="pt-BR"/>
           </a:p>
@@ -4671,7 +4671,7 @@
           <p:cNvPr id="2" name="Espaço Reservado para Título 1">
             <a:extLst>
               <a:ext uri="{FF2B5EF4-FFF2-40B4-BE49-F238E27FC236}">
-                <a16:creationId xmlns:a16="http://schemas.microsoft.com/office/drawing/2014/main" id="{E69A0273-1966-4A1B-9370-4C1CE5036371}"/>
+                <a16:creationId xmlns:a16="http://schemas.microsoft.com/office/drawing/2014/main" xmlns="" id="{E69A0273-1966-4A1B-9370-4C1CE5036371}"/>
               </a:ext>
             </a:extLst>
           </p:cNvPr>
@@ -4709,7 +4709,7 @@
           <p:cNvPr id="3" name="Espaço Reservado para Texto 2">
             <a:extLst>
               <a:ext uri="{FF2B5EF4-FFF2-40B4-BE49-F238E27FC236}">
-                <a16:creationId xmlns:a16="http://schemas.microsoft.com/office/drawing/2014/main" id="{3B9CF87A-0448-49A7-AB25-EBC1D56A40EF}"/>
+                <a16:creationId xmlns:a16="http://schemas.microsoft.com/office/drawing/2014/main" xmlns="" id="{3B9CF87A-0448-49A7-AB25-EBC1D56A40EF}"/>
               </a:ext>
             </a:extLst>
           </p:cNvPr>
@@ -4776,7 +4776,7 @@
           <p:cNvPr id="4" name="Espaço Reservado para Data 3">
             <a:extLst>
               <a:ext uri="{FF2B5EF4-FFF2-40B4-BE49-F238E27FC236}">
-                <a16:creationId xmlns:a16="http://schemas.microsoft.com/office/drawing/2014/main" id="{2EF7B1F2-BB5A-44D0-816D-16AD2C71430E}"/>
+                <a16:creationId xmlns:a16="http://schemas.microsoft.com/office/drawing/2014/main" xmlns="" id="{2EF7B1F2-BB5A-44D0-816D-16AD2C71430E}"/>
               </a:ext>
             </a:extLst>
           </p:cNvPr>
@@ -4823,7 +4823,7 @@
           <p:cNvPr id="5" name="Espaço Reservado para Rodapé 4">
             <a:extLst>
               <a:ext uri="{FF2B5EF4-FFF2-40B4-BE49-F238E27FC236}">
-                <a16:creationId xmlns:a16="http://schemas.microsoft.com/office/drawing/2014/main" id="{C703F94C-2CC8-4DAA-BC35-14FC3E841DCD}"/>
+                <a16:creationId xmlns:a16="http://schemas.microsoft.com/office/drawing/2014/main" xmlns="" id="{C703F94C-2CC8-4DAA-BC35-14FC3E841DCD}"/>
               </a:ext>
             </a:extLst>
           </p:cNvPr>
@@ -4866,7 +4866,7 @@
           <p:cNvPr id="6" name="Espaço Reservado para Número de Slide 5">
             <a:extLst>
               <a:ext uri="{FF2B5EF4-FFF2-40B4-BE49-F238E27FC236}">
-                <a16:creationId xmlns:a16="http://schemas.microsoft.com/office/drawing/2014/main" id="{64051336-7048-457A-8B61-D94291D71648}"/>
+                <a16:creationId xmlns:a16="http://schemas.microsoft.com/office/drawing/2014/main" xmlns="" id="{64051336-7048-457A-8B61-D94291D71648}"/>
               </a:ext>
             </a:extLst>
           </p:cNvPr>
@@ -4902,7 +4902,7 @@
           <a:p>
             <a:fld id="{1A7E88B7-70CE-4035-AE73-13FA6FB985D4}" type="slidenum">
               <a:rPr lang="pt-BR" smtClean="0"/>
-              <a:t>‹#›</a:t>
+              <a:t>‹nº›</a:t>
             </a:fld>
             <a:endParaRPr lang="pt-BR"/>
           </a:p>
@@ -5234,7 +5234,7 @@
           <p:cNvPr id="4" name="CaixaDeTexto 3">
             <a:extLst>
               <a:ext uri="{FF2B5EF4-FFF2-40B4-BE49-F238E27FC236}">
-                <a16:creationId xmlns:a16="http://schemas.microsoft.com/office/drawing/2014/main" id="{430EB894-B7D4-434C-9D1A-A14094D9BEEC}"/>
+                <a16:creationId xmlns:a16="http://schemas.microsoft.com/office/drawing/2014/main" xmlns="" id="{430EB894-B7D4-434C-9D1A-A14094D9BEEC}"/>
               </a:ext>
             </a:extLst>
           </p:cNvPr>
@@ -5278,7 +5278,7 @@
           <p:cNvPr id="1026" name="Picture 2" descr="Logo">
             <a:extLst>
               <a:ext uri="{FF2B5EF4-FFF2-40B4-BE49-F238E27FC236}">
-                <a16:creationId xmlns:a16="http://schemas.microsoft.com/office/drawing/2014/main" id="{3F2642E0-4F6A-4196-8F58-E77D36E9A33F}"/>
+                <a16:creationId xmlns:a16="http://schemas.microsoft.com/office/drawing/2014/main" xmlns="" id="{3F2642E0-4F6A-4196-8F58-E77D36E9A33F}"/>
               </a:ext>
             </a:extLst>
           </p:cNvPr>
@@ -5323,7 +5323,7 @@
           <p:cNvPr id="5122" name="Picture 2" descr="Image result for machine learning">
             <a:extLst>
               <a:ext uri="{FF2B5EF4-FFF2-40B4-BE49-F238E27FC236}">
-                <a16:creationId xmlns:a16="http://schemas.microsoft.com/office/drawing/2014/main" id="{810CE0A2-4102-44A6-A370-175E7896CDCB}"/>
+                <a16:creationId xmlns:a16="http://schemas.microsoft.com/office/drawing/2014/main" xmlns="" id="{810CE0A2-4102-44A6-A370-175E7896CDCB}"/>
               </a:ext>
             </a:extLst>
           </p:cNvPr>
@@ -5368,7 +5368,7 @@
           <p:cNvPr id="7" name="Título 1">
             <a:extLst>
               <a:ext uri="{FF2B5EF4-FFF2-40B4-BE49-F238E27FC236}">
-                <a16:creationId xmlns:a16="http://schemas.microsoft.com/office/drawing/2014/main" id="{32666AC8-2E17-4DB4-B0F5-60C640CCFD2E}"/>
+                <a16:creationId xmlns:a16="http://schemas.microsoft.com/office/drawing/2014/main" xmlns="" id="{32666AC8-2E17-4DB4-B0F5-60C640CCFD2E}"/>
               </a:ext>
             </a:extLst>
           </p:cNvPr>
@@ -5394,6 +5394,10 @@
             <a:r>
               <a:rPr lang="pt-BR" sz="6600" dirty="0"/>
               <a:t>C24 – Inteligência Artificial:</a:t>
+            </a:r>
+            <a:r>
+              <a:rPr lang="pt-BR" sz="7200" dirty="0"/>
+              <a:t/>
             </a:r>
             <a:br>
               <a:rPr lang="pt-BR" sz="7200" dirty="0"/>
@@ -5440,7 +5444,7 @@
           <p:cNvPr id="3" name="Espaço Reservado para Conteúdo 2">
             <a:extLst>
               <a:ext uri="{FF2B5EF4-FFF2-40B4-BE49-F238E27FC236}">
-                <a16:creationId xmlns:a16="http://schemas.microsoft.com/office/drawing/2014/main" id="{0F418656-538C-BBD9-47FA-40A924A669E5}"/>
+                <a16:creationId xmlns:a16="http://schemas.microsoft.com/office/drawing/2014/main" xmlns="" id="{0F418656-538C-BBD9-47FA-40A924A669E5}"/>
               </a:ext>
             </a:extLst>
           </p:cNvPr>
@@ -5508,7 +5512,7 @@
           <p:cNvPr id="2" name="Título 1">
             <a:extLst>
               <a:ext uri="{FF2B5EF4-FFF2-40B4-BE49-F238E27FC236}">
-                <a16:creationId xmlns:a16="http://schemas.microsoft.com/office/drawing/2014/main" id="{88C76DB9-C5DB-DAD2-5D1D-F064916FE36F}"/>
+                <a16:creationId xmlns:a16="http://schemas.microsoft.com/office/drawing/2014/main" xmlns="" id="{88C76DB9-C5DB-DAD2-5D1D-F064916FE36F}"/>
               </a:ext>
             </a:extLst>
           </p:cNvPr>
@@ -5536,7 +5540,7 @@
           <p:cNvPr id="3" name="Espaço Reservado para Conteúdo 2">
             <a:extLst>
               <a:ext uri="{FF2B5EF4-FFF2-40B4-BE49-F238E27FC236}">
-                <a16:creationId xmlns:a16="http://schemas.microsoft.com/office/drawing/2014/main" id="{0243F063-09F2-F192-E084-325BC503299F}"/>
+                <a16:creationId xmlns:a16="http://schemas.microsoft.com/office/drawing/2014/main" xmlns="" id="{0243F063-09F2-F192-E084-325BC503299F}"/>
               </a:ext>
             </a:extLst>
           </p:cNvPr>
@@ -5660,7 +5664,7 @@
               <p:cNvPr id="5" name="CaixaDeTexto 4">
                 <a:extLst>
                   <a:ext uri="{FF2B5EF4-FFF2-40B4-BE49-F238E27FC236}">
-                    <a16:creationId xmlns:a16="http://schemas.microsoft.com/office/drawing/2014/main" id="{A1A8E5FE-3F01-AAA0-2326-F47AA1AC18B9}"/>
+                    <a16:creationId xmlns:a16="http://schemas.microsoft.com/office/drawing/2014/main" xmlns="" id="{A1A8E5FE-3F01-AAA0-2326-F47AA1AC18B9}"/>
                   </a:ext>
                 </a:extLst>
               </p:cNvPr>
@@ -5903,7 +5907,7 @@
           <p:cNvPr id="2" name="Título 1">
             <a:extLst>
               <a:ext uri="{FF2B5EF4-FFF2-40B4-BE49-F238E27FC236}">
-                <a16:creationId xmlns:a16="http://schemas.microsoft.com/office/drawing/2014/main" id="{C364D5D3-A9ED-9B8B-0474-AF3EF62241C0}"/>
+                <a16:creationId xmlns:a16="http://schemas.microsoft.com/office/drawing/2014/main" xmlns="" id="{C364D5D3-A9ED-9B8B-0474-AF3EF62241C0}"/>
               </a:ext>
             </a:extLst>
           </p:cNvPr>
@@ -5931,7 +5935,7 @@
           <p:cNvPr id="3" name="Espaço Reservado para Conteúdo 2">
             <a:extLst>
               <a:ext uri="{FF2B5EF4-FFF2-40B4-BE49-F238E27FC236}">
-                <a16:creationId xmlns:a16="http://schemas.microsoft.com/office/drawing/2014/main" id="{729D007B-9E18-00C3-2CF2-47D7955EBACC}"/>
+                <a16:creationId xmlns:a16="http://schemas.microsoft.com/office/drawing/2014/main" xmlns="" id="{729D007B-9E18-00C3-2CF2-47D7955EBACC}"/>
               </a:ext>
             </a:extLst>
           </p:cNvPr>
@@ -6088,7 +6092,7 @@
               <p:cNvPr id="4" name="CaixaDeTexto 3">
                 <a:extLst>
                   <a:ext uri="{FF2B5EF4-FFF2-40B4-BE49-F238E27FC236}">
-                    <a16:creationId xmlns:a16="http://schemas.microsoft.com/office/drawing/2014/main" id="{3B70A8A1-B016-521E-B475-1827A59F773A}"/>
+                    <a16:creationId xmlns:a16="http://schemas.microsoft.com/office/drawing/2014/main" xmlns="" id="{3B70A8A1-B016-521E-B475-1827A59F773A}"/>
                   </a:ext>
                 </a:extLst>
               </p:cNvPr>
@@ -6331,7 +6335,7 @@
           <p:cNvPr id="2" name="Título 1">
             <a:extLst>
               <a:ext uri="{FF2B5EF4-FFF2-40B4-BE49-F238E27FC236}">
-                <a16:creationId xmlns:a16="http://schemas.microsoft.com/office/drawing/2014/main" id="{C364D5D3-A9ED-9B8B-0474-AF3EF62241C0}"/>
+                <a16:creationId xmlns:a16="http://schemas.microsoft.com/office/drawing/2014/main" xmlns="" id="{C364D5D3-A9ED-9B8B-0474-AF3EF62241C0}"/>
               </a:ext>
             </a:extLst>
           </p:cNvPr>
@@ -6361,7 +6365,7 @@
               <p:cNvPr id="3" name="Espaço Reservado para Conteúdo 2">
                 <a:extLst>
                   <a:ext uri="{FF2B5EF4-FFF2-40B4-BE49-F238E27FC236}">
-                    <a16:creationId xmlns:a16="http://schemas.microsoft.com/office/drawing/2014/main" id="{729D007B-9E18-00C3-2CF2-47D7955EBACC}"/>
+                    <a16:creationId xmlns:a16="http://schemas.microsoft.com/office/drawing/2014/main" xmlns="" id="{729D007B-9E18-00C3-2CF2-47D7955EBACC}"/>
                   </a:ext>
                 </a:extLst>
               </p:cNvPr>
@@ -6938,7 +6942,7 @@
           <p:cNvPr id="2" name="Título 1">
             <a:extLst>
               <a:ext uri="{FF2B5EF4-FFF2-40B4-BE49-F238E27FC236}">
-                <a16:creationId xmlns:a16="http://schemas.microsoft.com/office/drawing/2014/main" id="{6759409E-2F7C-F9FB-1D90-828F558DAD79}"/>
+                <a16:creationId xmlns:a16="http://schemas.microsoft.com/office/drawing/2014/main" xmlns="" id="{6759409E-2F7C-F9FB-1D90-828F558DAD79}"/>
               </a:ext>
             </a:extLst>
           </p:cNvPr>
@@ -6966,7 +6970,7 @@
           <p:cNvPr id="3" name="Espaço Reservado para Conteúdo 2">
             <a:extLst>
               <a:ext uri="{FF2B5EF4-FFF2-40B4-BE49-F238E27FC236}">
-                <a16:creationId xmlns:a16="http://schemas.microsoft.com/office/drawing/2014/main" id="{047B3338-3C79-280E-33CD-E184CC752916}"/>
+                <a16:creationId xmlns:a16="http://schemas.microsoft.com/office/drawing/2014/main" xmlns="" id="{047B3338-3C79-280E-33CD-E184CC752916}"/>
               </a:ext>
             </a:extLst>
           </p:cNvPr>
@@ -7053,7 +7057,7 @@
               <p:cNvPr id="5" name="CaixaDeTexto 4">
                 <a:extLst>
                   <a:ext uri="{FF2B5EF4-FFF2-40B4-BE49-F238E27FC236}">
-                    <a16:creationId xmlns:a16="http://schemas.microsoft.com/office/drawing/2014/main" id="{A3376B35-7B47-DF75-A545-B75926FB5BB2}"/>
+                    <a16:creationId xmlns:a16="http://schemas.microsoft.com/office/drawing/2014/main" xmlns="" id="{A3376B35-7B47-DF75-A545-B75926FB5BB2}"/>
                   </a:ext>
                 </a:extLst>
               </p:cNvPr>
@@ -7217,7 +7221,7 @@
           <p:cNvPr id="4" name="Tabela 5">
             <a:extLst>
               <a:ext uri="{FF2B5EF4-FFF2-40B4-BE49-F238E27FC236}">
-                <a16:creationId xmlns:a16="http://schemas.microsoft.com/office/drawing/2014/main" id="{0D5ABCB4-5EB5-F832-F110-AD1F2FD3532A}"/>
+                <a16:creationId xmlns:a16="http://schemas.microsoft.com/office/drawing/2014/main" xmlns="" id="{0D5ABCB4-5EB5-F832-F110-AD1F2FD3532A}"/>
               </a:ext>
             </a:extLst>
           </p:cNvPr>
@@ -7240,14 +7244,14 @@
                 <a:gridCol w="897466">
                   <a:extLst>
                     <a:ext uri="{9D8B030D-6E8A-4147-A177-3AD203B41FA5}">
-                      <a16:colId xmlns:a16="http://schemas.microsoft.com/office/drawing/2014/main" val="2780398905"/>
+                      <a16:colId xmlns:a16="http://schemas.microsoft.com/office/drawing/2014/main" xmlns="" val="2780398905"/>
                     </a:ext>
                   </a:extLst>
                 </a:gridCol>
                 <a:gridCol w="897466">
                   <a:extLst>
                     <a:ext uri="{9D8B030D-6E8A-4147-A177-3AD203B41FA5}">
-                      <a16:colId xmlns:a16="http://schemas.microsoft.com/office/drawing/2014/main" val="1752542230"/>
+                      <a16:colId xmlns:a16="http://schemas.microsoft.com/office/drawing/2014/main" xmlns="" val="1752542230"/>
                     </a:ext>
                   </a:extLst>
                 </a:gridCol>
@@ -7404,7 +7408,7 @@
                 </a:tc>
                 <a:extLst>
                   <a:ext uri="{0D108BD9-81ED-4DB2-BD59-A6C34878D82A}">
-                    <a16:rowId xmlns:a16="http://schemas.microsoft.com/office/drawing/2014/main" val="3952155157"/>
+                    <a16:rowId xmlns:a16="http://schemas.microsoft.com/office/drawing/2014/main" xmlns="" val="3952155157"/>
                   </a:ext>
                 </a:extLst>
               </a:tr>
@@ -7572,7 +7576,7 @@
                 </a:tc>
                 <a:extLst>
                   <a:ext uri="{0D108BD9-81ED-4DB2-BD59-A6C34878D82A}">
-                    <a16:rowId xmlns:a16="http://schemas.microsoft.com/office/drawing/2014/main" val="2169341992"/>
+                    <a16:rowId xmlns:a16="http://schemas.microsoft.com/office/drawing/2014/main" xmlns="" val="2169341992"/>
                   </a:ext>
                 </a:extLst>
               </a:tr>
@@ -7585,7 +7589,7 @@
           <p:cNvPr id="6" name="Retângulo 5">
             <a:extLst>
               <a:ext uri="{FF2B5EF4-FFF2-40B4-BE49-F238E27FC236}">
-                <a16:creationId xmlns:a16="http://schemas.microsoft.com/office/drawing/2014/main" id="{685BDF4E-E4CF-5896-0326-96A536D9643C}"/>
+                <a16:creationId xmlns:a16="http://schemas.microsoft.com/office/drawing/2014/main" xmlns="" id="{685BDF4E-E4CF-5896-0326-96A536D9643C}"/>
               </a:ext>
             </a:extLst>
           </p:cNvPr>
@@ -7653,7 +7657,7 @@
         <p:cNvPr id="1" name="">
           <a:extLst>
             <a:ext uri="{FF2B5EF4-FFF2-40B4-BE49-F238E27FC236}">
-              <a16:creationId xmlns:a16="http://schemas.microsoft.com/office/drawing/2014/main" id="{D6F94076-840C-F8A0-1EBA-0559789D9928}"/>
+              <a16:creationId xmlns:a16="http://schemas.microsoft.com/office/drawing/2014/main" xmlns="" id="{D6F94076-840C-F8A0-1EBA-0559789D9928}"/>
             </a:ext>
           </a:extLst>
         </p:cNvPr>
@@ -7673,7 +7677,7 @@
           <p:cNvPr id="2" name="Título 1">
             <a:extLst>
               <a:ext uri="{FF2B5EF4-FFF2-40B4-BE49-F238E27FC236}">
-                <a16:creationId xmlns:a16="http://schemas.microsoft.com/office/drawing/2014/main" id="{5BE837E6-3644-108F-C376-E31809129570}"/>
+                <a16:creationId xmlns:a16="http://schemas.microsoft.com/office/drawing/2014/main" xmlns="" id="{5BE837E6-3644-108F-C376-E31809129570}"/>
               </a:ext>
             </a:extLst>
           </p:cNvPr>
@@ -7701,7 +7705,7 @@
           <p:cNvPr id="3" name="Espaço Reservado para Conteúdo 2">
             <a:extLst>
               <a:ext uri="{FF2B5EF4-FFF2-40B4-BE49-F238E27FC236}">
-                <a16:creationId xmlns:a16="http://schemas.microsoft.com/office/drawing/2014/main" id="{1ED50CCD-BAF9-D705-F6DD-4E87FC3E6A8D}"/>
+                <a16:creationId xmlns:a16="http://schemas.microsoft.com/office/drawing/2014/main" xmlns="" id="{1ED50CCD-BAF9-D705-F6DD-4E87FC3E6A8D}"/>
               </a:ext>
             </a:extLst>
           </p:cNvPr>
@@ -7838,7 +7842,7 @@
               <p:cNvPr id="5" name="CaixaDeTexto 4">
                 <a:extLst>
                   <a:ext uri="{FF2B5EF4-FFF2-40B4-BE49-F238E27FC236}">
-                    <a16:creationId xmlns:a16="http://schemas.microsoft.com/office/drawing/2014/main" id="{704D3BDA-16E0-C30B-2504-2D58C9069DF7}"/>
+                    <a16:creationId xmlns:a16="http://schemas.microsoft.com/office/drawing/2014/main" xmlns="" id="{704D3BDA-16E0-C30B-2504-2D58C9069DF7}"/>
                   </a:ext>
                 </a:extLst>
               </p:cNvPr>
@@ -8002,7 +8006,7 @@
           <p:cNvPr id="4" name="Tabela 5">
             <a:extLst>
               <a:ext uri="{FF2B5EF4-FFF2-40B4-BE49-F238E27FC236}">
-                <a16:creationId xmlns:a16="http://schemas.microsoft.com/office/drawing/2014/main" id="{72E4F38E-A7EF-429F-6B31-B7E993C4BB48}"/>
+                <a16:creationId xmlns:a16="http://schemas.microsoft.com/office/drawing/2014/main" xmlns="" id="{72E4F38E-A7EF-429F-6B31-B7E993C4BB48}"/>
               </a:ext>
             </a:extLst>
           </p:cNvPr>
@@ -8025,14 +8029,14 @@
                 <a:gridCol w="897466">
                   <a:extLst>
                     <a:ext uri="{9D8B030D-6E8A-4147-A177-3AD203B41FA5}">
-                      <a16:colId xmlns:a16="http://schemas.microsoft.com/office/drawing/2014/main" val="2780398905"/>
+                      <a16:colId xmlns:a16="http://schemas.microsoft.com/office/drawing/2014/main" xmlns="" val="2780398905"/>
                     </a:ext>
                   </a:extLst>
                 </a:gridCol>
                 <a:gridCol w="897466">
                   <a:extLst>
                     <a:ext uri="{9D8B030D-6E8A-4147-A177-3AD203B41FA5}">
-                      <a16:colId xmlns:a16="http://schemas.microsoft.com/office/drawing/2014/main" val="1752542230"/>
+                      <a16:colId xmlns:a16="http://schemas.microsoft.com/office/drawing/2014/main" xmlns="" val="1752542230"/>
                     </a:ext>
                   </a:extLst>
                 </a:gridCol>
@@ -8189,7 +8193,7 @@
                 </a:tc>
                 <a:extLst>
                   <a:ext uri="{0D108BD9-81ED-4DB2-BD59-A6C34878D82A}">
-                    <a16:rowId xmlns:a16="http://schemas.microsoft.com/office/drawing/2014/main" val="3952155157"/>
+                    <a16:rowId xmlns:a16="http://schemas.microsoft.com/office/drawing/2014/main" xmlns="" val="3952155157"/>
                   </a:ext>
                 </a:extLst>
               </a:tr>
@@ -8357,7 +8361,7 @@
                 </a:tc>
                 <a:extLst>
                   <a:ext uri="{0D108BD9-81ED-4DB2-BD59-A6C34878D82A}">
-                    <a16:rowId xmlns:a16="http://schemas.microsoft.com/office/drawing/2014/main" val="2169341992"/>
+                    <a16:rowId xmlns:a16="http://schemas.microsoft.com/office/drawing/2014/main" xmlns="" val="2169341992"/>
                   </a:ext>
                 </a:extLst>
               </a:tr>
@@ -8370,7 +8374,7 @@
           <p:cNvPr id="6" name="Retângulo 5">
             <a:extLst>
               <a:ext uri="{FF2B5EF4-FFF2-40B4-BE49-F238E27FC236}">
-                <a16:creationId xmlns:a16="http://schemas.microsoft.com/office/drawing/2014/main" id="{7DBCA45D-01DE-F21C-9CC9-EBEE7C31C895}"/>
+                <a16:creationId xmlns:a16="http://schemas.microsoft.com/office/drawing/2014/main" xmlns="" id="{7DBCA45D-01DE-F21C-9CC9-EBEE7C31C895}"/>
               </a:ext>
             </a:extLst>
           </p:cNvPr>
@@ -8452,7 +8456,7 @@
           <p:cNvPr id="2" name="Título 1">
             <a:extLst>
               <a:ext uri="{FF2B5EF4-FFF2-40B4-BE49-F238E27FC236}">
-                <a16:creationId xmlns:a16="http://schemas.microsoft.com/office/drawing/2014/main" id="{B287A758-CC86-49D1-9698-4D8C118C40E1}"/>
+                <a16:creationId xmlns:a16="http://schemas.microsoft.com/office/drawing/2014/main" xmlns="" id="{B287A758-CC86-49D1-9698-4D8C118C40E1}"/>
               </a:ext>
             </a:extLst>
           </p:cNvPr>
@@ -8480,7 +8484,7 @@
           <p:cNvPr id="3" name="Espaço Reservado para Conteúdo 2">
             <a:extLst>
               <a:ext uri="{FF2B5EF4-FFF2-40B4-BE49-F238E27FC236}">
-                <a16:creationId xmlns:a16="http://schemas.microsoft.com/office/drawing/2014/main" id="{50E4F4E1-BE8B-2CDE-011D-F70A3522A287}"/>
+                <a16:creationId xmlns:a16="http://schemas.microsoft.com/office/drawing/2014/main" xmlns="" id="{50E4F4E1-BE8B-2CDE-011D-F70A3522A287}"/>
               </a:ext>
             </a:extLst>
           </p:cNvPr>
@@ -8591,7 +8595,7 @@
               <p:cNvPr id="5" name="CaixaDeTexto 4">
                 <a:extLst>
                   <a:ext uri="{FF2B5EF4-FFF2-40B4-BE49-F238E27FC236}">
-                    <a16:creationId xmlns:a16="http://schemas.microsoft.com/office/drawing/2014/main" id="{E92F9593-43C2-2FC6-D7DF-B4A04BE65B06}"/>
+                    <a16:creationId xmlns:a16="http://schemas.microsoft.com/office/drawing/2014/main" xmlns="" id="{E92F9593-43C2-2FC6-D7DF-B4A04BE65B06}"/>
                   </a:ext>
                 </a:extLst>
               </p:cNvPr>
@@ -8737,7 +8741,7 @@
           <p:cNvPr id="4" name="Tabela 5">
             <a:extLst>
               <a:ext uri="{FF2B5EF4-FFF2-40B4-BE49-F238E27FC236}">
-                <a16:creationId xmlns:a16="http://schemas.microsoft.com/office/drawing/2014/main" id="{AB28634A-9E6D-BA06-E08B-AF1826CF6578}"/>
+                <a16:creationId xmlns:a16="http://schemas.microsoft.com/office/drawing/2014/main" xmlns="" id="{AB28634A-9E6D-BA06-E08B-AF1826CF6578}"/>
               </a:ext>
             </a:extLst>
           </p:cNvPr>
@@ -8760,14 +8764,14 @@
                 <a:gridCol w="897466">
                   <a:extLst>
                     <a:ext uri="{9D8B030D-6E8A-4147-A177-3AD203B41FA5}">
-                      <a16:colId xmlns:a16="http://schemas.microsoft.com/office/drawing/2014/main" val="2780398905"/>
+                      <a16:colId xmlns:a16="http://schemas.microsoft.com/office/drawing/2014/main" xmlns="" val="2780398905"/>
                     </a:ext>
                   </a:extLst>
                 </a:gridCol>
                 <a:gridCol w="897466">
                   <a:extLst>
                     <a:ext uri="{9D8B030D-6E8A-4147-A177-3AD203B41FA5}">
-                      <a16:colId xmlns:a16="http://schemas.microsoft.com/office/drawing/2014/main" val="1752542230"/>
+                      <a16:colId xmlns:a16="http://schemas.microsoft.com/office/drawing/2014/main" xmlns="" val="1752542230"/>
                     </a:ext>
                   </a:extLst>
                 </a:gridCol>
@@ -8924,7 +8928,7 @@
                 </a:tc>
                 <a:extLst>
                   <a:ext uri="{0D108BD9-81ED-4DB2-BD59-A6C34878D82A}">
-                    <a16:rowId xmlns:a16="http://schemas.microsoft.com/office/drawing/2014/main" val="3952155157"/>
+                    <a16:rowId xmlns:a16="http://schemas.microsoft.com/office/drawing/2014/main" xmlns="" val="3952155157"/>
                   </a:ext>
                 </a:extLst>
               </a:tr>
@@ -9092,7 +9096,7 @@
                 </a:tc>
                 <a:extLst>
                   <a:ext uri="{0D108BD9-81ED-4DB2-BD59-A6C34878D82A}">
-                    <a16:rowId xmlns:a16="http://schemas.microsoft.com/office/drawing/2014/main" val="2169341992"/>
+                    <a16:rowId xmlns:a16="http://schemas.microsoft.com/office/drawing/2014/main" xmlns="" val="2169341992"/>
                   </a:ext>
                 </a:extLst>
               </a:tr>
@@ -9105,7 +9109,7 @@
           <p:cNvPr id="6" name="Retângulo 5">
             <a:extLst>
               <a:ext uri="{FF2B5EF4-FFF2-40B4-BE49-F238E27FC236}">
-                <a16:creationId xmlns:a16="http://schemas.microsoft.com/office/drawing/2014/main" id="{894B2598-B989-4F1A-AB5A-34B5BD2133A9}"/>
+                <a16:creationId xmlns:a16="http://schemas.microsoft.com/office/drawing/2014/main" xmlns="" id="{894B2598-B989-4F1A-AB5A-34B5BD2133A9}"/>
               </a:ext>
             </a:extLst>
           </p:cNvPr>
@@ -9173,7 +9177,7 @@
         <p:cNvPr id="1" name="">
           <a:extLst>
             <a:ext uri="{FF2B5EF4-FFF2-40B4-BE49-F238E27FC236}">
-              <a16:creationId xmlns:a16="http://schemas.microsoft.com/office/drawing/2014/main" id="{E1608E56-1063-9535-583F-68F98BEED64E}"/>
+              <a16:creationId xmlns:a16="http://schemas.microsoft.com/office/drawing/2014/main" xmlns="" id="{E1608E56-1063-9535-583F-68F98BEED64E}"/>
             </a:ext>
           </a:extLst>
         </p:cNvPr>
@@ -9193,7 +9197,7 @@
           <p:cNvPr id="2" name="Título 1">
             <a:extLst>
               <a:ext uri="{FF2B5EF4-FFF2-40B4-BE49-F238E27FC236}">
-                <a16:creationId xmlns:a16="http://schemas.microsoft.com/office/drawing/2014/main" id="{7B281AC0-3FAB-E1EC-DE8A-76F8FBB33FFF}"/>
+                <a16:creationId xmlns:a16="http://schemas.microsoft.com/office/drawing/2014/main" xmlns="" id="{7B281AC0-3FAB-E1EC-DE8A-76F8FBB33FFF}"/>
               </a:ext>
             </a:extLst>
           </p:cNvPr>
@@ -9221,7 +9225,7 @@
           <p:cNvPr id="3" name="Espaço Reservado para Conteúdo 2">
             <a:extLst>
               <a:ext uri="{FF2B5EF4-FFF2-40B4-BE49-F238E27FC236}">
-                <a16:creationId xmlns:a16="http://schemas.microsoft.com/office/drawing/2014/main" id="{4AA4931E-FED8-1E19-BC1E-B1813EAF8984}"/>
+                <a16:creationId xmlns:a16="http://schemas.microsoft.com/office/drawing/2014/main" xmlns="" id="{4AA4931E-FED8-1E19-BC1E-B1813EAF8984}"/>
               </a:ext>
             </a:extLst>
           </p:cNvPr>
@@ -9310,7 +9314,7 @@
               <p:cNvPr id="5" name="CaixaDeTexto 4">
                 <a:extLst>
                   <a:ext uri="{FF2B5EF4-FFF2-40B4-BE49-F238E27FC236}">
-                    <a16:creationId xmlns:a16="http://schemas.microsoft.com/office/drawing/2014/main" id="{838A3350-B424-FFC8-887E-A4F979401EC1}"/>
+                    <a16:creationId xmlns:a16="http://schemas.microsoft.com/office/drawing/2014/main" xmlns="" id="{838A3350-B424-FFC8-887E-A4F979401EC1}"/>
                   </a:ext>
                 </a:extLst>
               </p:cNvPr>
@@ -9456,7 +9460,7 @@
           <p:cNvPr id="4" name="Tabela 5">
             <a:extLst>
               <a:ext uri="{FF2B5EF4-FFF2-40B4-BE49-F238E27FC236}">
-                <a16:creationId xmlns:a16="http://schemas.microsoft.com/office/drawing/2014/main" id="{6F8B50E5-59B3-7D20-E676-F37DDCFCA230}"/>
+                <a16:creationId xmlns:a16="http://schemas.microsoft.com/office/drawing/2014/main" xmlns="" id="{6F8B50E5-59B3-7D20-E676-F37DDCFCA230}"/>
               </a:ext>
             </a:extLst>
           </p:cNvPr>
@@ -9479,14 +9483,14 @@
                 <a:gridCol w="897466">
                   <a:extLst>
                     <a:ext uri="{9D8B030D-6E8A-4147-A177-3AD203B41FA5}">
-                      <a16:colId xmlns:a16="http://schemas.microsoft.com/office/drawing/2014/main" val="2780398905"/>
+                      <a16:colId xmlns:a16="http://schemas.microsoft.com/office/drawing/2014/main" xmlns="" val="2780398905"/>
                     </a:ext>
                   </a:extLst>
                 </a:gridCol>
                 <a:gridCol w="897466">
                   <a:extLst>
                     <a:ext uri="{9D8B030D-6E8A-4147-A177-3AD203B41FA5}">
-                      <a16:colId xmlns:a16="http://schemas.microsoft.com/office/drawing/2014/main" val="1752542230"/>
+                      <a16:colId xmlns:a16="http://schemas.microsoft.com/office/drawing/2014/main" xmlns="" val="1752542230"/>
                     </a:ext>
                   </a:extLst>
                 </a:gridCol>
@@ -9643,7 +9647,7 @@
                 </a:tc>
                 <a:extLst>
                   <a:ext uri="{0D108BD9-81ED-4DB2-BD59-A6C34878D82A}">
-                    <a16:rowId xmlns:a16="http://schemas.microsoft.com/office/drawing/2014/main" val="3952155157"/>
+                    <a16:rowId xmlns:a16="http://schemas.microsoft.com/office/drawing/2014/main" xmlns="" val="3952155157"/>
                   </a:ext>
                 </a:extLst>
               </a:tr>
@@ -9811,7 +9815,7 @@
                 </a:tc>
                 <a:extLst>
                   <a:ext uri="{0D108BD9-81ED-4DB2-BD59-A6C34878D82A}">
-                    <a16:rowId xmlns:a16="http://schemas.microsoft.com/office/drawing/2014/main" val="2169341992"/>
+                    <a16:rowId xmlns:a16="http://schemas.microsoft.com/office/drawing/2014/main" xmlns="" val="2169341992"/>
                   </a:ext>
                 </a:extLst>
               </a:tr>
@@ -9824,7 +9828,7 @@
           <p:cNvPr id="6" name="Retângulo 5">
             <a:extLst>
               <a:ext uri="{FF2B5EF4-FFF2-40B4-BE49-F238E27FC236}">
-                <a16:creationId xmlns:a16="http://schemas.microsoft.com/office/drawing/2014/main" id="{26508683-E050-40A0-9B76-B0CF504C46C8}"/>
+                <a16:creationId xmlns:a16="http://schemas.microsoft.com/office/drawing/2014/main" xmlns="" id="{26508683-E050-40A0-9B76-B0CF504C46C8}"/>
               </a:ext>
             </a:extLst>
           </p:cNvPr>
@@ -9906,7 +9910,7 @@
           <p:cNvPr id="2" name="Título 1">
             <a:extLst>
               <a:ext uri="{FF2B5EF4-FFF2-40B4-BE49-F238E27FC236}">
-                <a16:creationId xmlns:a16="http://schemas.microsoft.com/office/drawing/2014/main" id="{0BF87474-9D5C-0B3D-63E8-AD1CF986CDF4}"/>
+                <a16:creationId xmlns:a16="http://schemas.microsoft.com/office/drawing/2014/main" xmlns="" id="{0BF87474-9D5C-0B3D-63E8-AD1CF986CDF4}"/>
               </a:ext>
             </a:extLst>
           </p:cNvPr>
@@ -9938,7 +9942,7 @@
           <p:cNvPr id="3" name="Espaço Reservado para Conteúdo 2">
             <a:extLst>
               <a:ext uri="{FF2B5EF4-FFF2-40B4-BE49-F238E27FC236}">
-                <a16:creationId xmlns:a16="http://schemas.microsoft.com/office/drawing/2014/main" id="{82DAA94B-AA8F-AF15-EE11-8B107DF8C311}"/>
+                <a16:creationId xmlns:a16="http://schemas.microsoft.com/office/drawing/2014/main" xmlns="" id="{82DAA94B-AA8F-AF15-EE11-8B107DF8C311}"/>
               </a:ext>
             </a:extLst>
           </p:cNvPr>
@@ -9952,7 +9956,7 @@
         <p:spPr>
           <a:xfrm>
             <a:off x="5431971" y="1825624"/>
-            <a:ext cx="6683829" cy="5032375"/>
+            <a:ext cx="6760029" cy="5032375"/>
           </a:xfrm>
         </p:spPr>
         <p:txBody>
@@ -10042,9 +10046,20 @@
               <a:t>são iguais</a:t>
             </a:r>
             <a:r>
-              <a:rPr lang="pt-BR" dirty="0"/>
+              <a:rPr lang="pt-BR" dirty="0" smtClean="0"/>
               <a:t>?</a:t>
             </a:r>
+          </a:p>
+          <a:p>
+            <a:pPr lvl="1">
+              <a:buFont typeface="Wingdings" panose="05000000000000000000" pitchFamily="2" charset="2"/>
+              <a:buChar char="§"/>
+            </a:pPr>
+            <a:r>
+              <a:rPr lang="pt-BR" dirty="0" smtClean="0"/>
+              <a:t>Identificação de cães e gatos, por exemplo.</a:t>
+            </a:r>
+            <a:endParaRPr lang="pt-BR" dirty="0"/>
           </a:p>
           <a:p>
             <a:r>
@@ -10076,7 +10091,7 @@
               <p:cNvPr id="4" name="CaixaDeTexto 3">
                 <a:extLst>
                   <a:ext uri="{FF2B5EF4-FFF2-40B4-BE49-F238E27FC236}">
-                    <a16:creationId xmlns:a16="http://schemas.microsoft.com/office/drawing/2014/main" id="{B66DD82C-2C7C-932B-0676-6777E743E2CA}"/>
+                    <a16:creationId xmlns:a16="http://schemas.microsoft.com/office/drawing/2014/main" xmlns="" id="{B66DD82C-2C7C-932B-0676-6777E743E2CA}"/>
                   </a:ext>
                 </a:extLst>
               </p:cNvPr>
@@ -10224,7 +10239,7 @@
               <p:cNvPr id="5" name="CaixaDeTexto 4">
                 <a:extLst>
                   <a:ext uri="{FF2B5EF4-FFF2-40B4-BE49-F238E27FC236}">
-                    <a16:creationId xmlns:a16="http://schemas.microsoft.com/office/drawing/2014/main" id="{1C33F56B-917E-EDAE-B038-52C2901A324E}"/>
+                    <a16:creationId xmlns:a16="http://schemas.microsoft.com/office/drawing/2014/main" xmlns="" id="{1C33F56B-917E-EDAE-B038-52C2901A324E}"/>
                   </a:ext>
                 </a:extLst>
               </p:cNvPr>
@@ -10418,7 +10433,7 @@
           <p:cNvPr id="2" name="Título 1">
             <a:extLst>
               <a:ext uri="{FF2B5EF4-FFF2-40B4-BE49-F238E27FC236}">
-                <a16:creationId xmlns:a16="http://schemas.microsoft.com/office/drawing/2014/main" id="{B64DCA44-CC6E-8998-A693-998426B94AA3}"/>
+                <a16:creationId xmlns:a16="http://schemas.microsoft.com/office/drawing/2014/main" xmlns="" id="{B64DCA44-CC6E-8998-A693-998426B94AA3}"/>
               </a:ext>
             </a:extLst>
           </p:cNvPr>
@@ -10452,7 +10467,7 @@
               <p:cNvPr id="3" name="Espaço Reservado para Conteúdo 2">
                 <a:extLst>
                   <a:ext uri="{FF2B5EF4-FFF2-40B4-BE49-F238E27FC236}">
-                    <a16:creationId xmlns:a16="http://schemas.microsoft.com/office/drawing/2014/main" id="{C261D671-8D7F-BF6D-3C19-CFC15A190C23}"/>
+                    <a16:creationId xmlns:a16="http://schemas.microsoft.com/office/drawing/2014/main" xmlns="" id="{C261D671-8D7F-BF6D-3C19-CFC15A190C23}"/>
                   </a:ext>
                 </a:extLst>
               </p:cNvPr>
@@ -10744,7 +10759,7 @@
               <p:cNvPr id="5" name="CaixaDeTexto 4">
                 <a:extLst>
                   <a:ext uri="{FF2B5EF4-FFF2-40B4-BE49-F238E27FC236}">
-                    <a16:creationId xmlns:a16="http://schemas.microsoft.com/office/drawing/2014/main" id="{C0A929A7-E33F-6D02-D301-38706DE0743C}"/>
+                    <a16:creationId xmlns:a16="http://schemas.microsoft.com/office/drawing/2014/main" xmlns="" id="{C0A929A7-E33F-6D02-D301-38706DE0743C}"/>
                   </a:ext>
                 </a:extLst>
               </p:cNvPr>
@@ -11075,7 +11090,7 @@
           <p:cNvPr id="2" name="Título 1">
             <a:extLst>
               <a:ext uri="{FF2B5EF4-FFF2-40B4-BE49-F238E27FC236}">
-                <a16:creationId xmlns:a16="http://schemas.microsoft.com/office/drawing/2014/main" id="{EECB3FED-5D1A-7084-5333-A3B2FA75F608}"/>
+                <a16:creationId xmlns:a16="http://schemas.microsoft.com/office/drawing/2014/main" xmlns="" id="{EECB3FED-5D1A-7084-5333-A3B2FA75F608}"/>
               </a:ext>
             </a:extLst>
           </p:cNvPr>
@@ -11103,7 +11118,7 @@
           <p:cNvPr id="3" name="Espaço Reservado para Conteúdo 2">
             <a:extLst>
               <a:ext uri="{FF2B5EF4-FFF2-40B4-BE49-F238E27FC236}">
-                <a16:creationId xmlns:a16="http://schemas.microsoft.com/office/drawing/2014/main" id="{25FE7774-7186-A846-D8DE-518B2CBF4EBD}"/>
+                <a16:creationId xmlns:a16="http://schemas.microsoft.com/office/drawing/2014/main" xmlns="" id="{25FE7774-7186-A846-D8DE-518B2CBF4EBD}"/>
               </a:ext>
             </a:extLst>
           </p:cNvPr>
@@ -11182,7 +11197,7 @@
               <p:cNvPr id="3" name="Espaço Reservado para Conteúdo 2">
                 <a:extLst>
                   <a:ext uri="{FF2B5EF4-FFF2-40B4-BE49-F238E27FC236}">
-                    <a16:creationId xmlns:a16="http://schemas.microsoft.com/office/drawing/2014/main" id="{0F418656-538C-BBD9-47FA-40A924A669E5}"/>
+                    <a16:creationId xmlns:a16="http://schemas.microsoft.com/office/drawing/2014/main" xmlns="" id="{0F418656-538C-BBD9-47FA-40A924A669E5}"/>
                   </a:ext>
                 </a:extLst>
               </p:cNvPr>
@@ -11311,7 +11326,7 @@
               <p:cNvPr id="2" name="Título 1">
                 <a:extLst>
                   <a:ext uri="{FF2B5EF4-FFF2-40B4-BE49-F238E27FC236}">
-                    <a16:creationId xmlns:a16="http://schemas.microsoft.com/office/drawing/2014/main" id="{44F6D18B-0399-55B9-FD83-C7EDF77FF08A}"/>
+                    <a16:creationId xmlns:a16="http://schemas.microsoft.com/office/drawing/2014/main" xmlns="" id="{44F6D18B-0399-55B9-FD83-C7EDF77FF08A}"/>
                   </a:ext>
                 </a:extLst>
               </p:cNvPr>
@@ -11411,7 +11426,7 @@
               <p:cNvPr id="3" name="Espaço Reservado para Conteúdo 2">
                 <a:extLst>
                   <a:ext uri="{FF2B5EF4-FFF2-40B4-BE49-F238E27FC236}">
-                    <a16:creationId xmlns:a16="http://schemas.microsoft.com/office/drawing/2014/main" id="{06AE9087-3D2E-DF8E-D6D3-12EDE543712C}"/>
+                    <a16:creationId xmlns:a16="http://schemas.microsoft.com/office/drawing/2014/main" xmlns="" id="{06AE9087-3D2E-DF8E-D6D3-12EDE543712C}"/>
                   </a:ext>
                 </a:extLst>
               </p:cNvPr>
@@ -11796,7 +11811,7 @@
         <p:cNvPr id="1" name="">
           <a:extLst>
             <a:ext uri="{FF2B5EF4-FFF2-40B4-BE49-F238E27FC236}">
-              <a16:creationId xmlns:a16="http://schemas.microsoft.com/office/drawing/2014/main" id="{2130EF1D-BFF8-2F82-4975-9C47E037612C}"/>
+              <a16:creationId xmlns:a16="http://schemas.microsoft.com/office/drawing/2014/main" xmlns="" id="{2130EF1D-BFF8-2F82-4975-9C47E037612C}"/>
             </a:ext>
           </a:extLst>
         </p:cNvPr>
@@ -11818,7 +11833,7 @@
               <p:cNvPr id="2" name="Título 1">
                 <a:extLst>
                   <a:ext uri="{FF2B5EF4-FFF2-40B4-BE49-F238E27FC236}">
-                    <a16:creationId xmlns:a16="http://schemas.microsoft.com/office/drawing/2014/main" id="{9E8992A0-634A-97EF-203B-8346A5DC6DBB}"/>
+                    <a16:creationId xmlns:a16="http://schemas.microsoft.com/office/drawing/2014/main" xmlns="" id="{9E8992A0-634A-97EF-203B-8346A5DC6DBB}"/>
                   </a:ext>
                 </a:extLst>
               </p:cNvPr>
@@ -11915,7 +11930,7 @@
               <p:cNvPr id="3" name="Espaço Reservado para Conteúdo 2">
                 <a:extLst>
                   <a:ext uri="{FF2B5EF4-FFF2-40B4-BE49-F238E27FC236}">
-                    <a16:creationId xmlns:a16="http://schemas.microsoft.com/office/drawing/2014/main" id="{0DC01E49-26FA-3E21-CFB3-E9EF7AE69543}"/>
+                    <a16:creationId xmlns:a16="http://schemas.microsoft.com/office/drawing/2014/main" xmlns="" id="{0DC01E49-26FA-3E21-CFB3-E9EF7AE69543}"/>
                   </a:ext>
                 </a:extLst>
               </p:cNvPr>
@@ -12096,7 +12111,7 @@
               <p:cNvPr id="4" name="Table 3">
                 <a:extLst>
                   <a:ext uri="{FF2B5EF4-FFF2-40B4-BE49-F238E27FC236}">
-                    <a16:creationId xmlns:a16="http://schemas.microsoft.com/office/drawing/2014/main" id="{EB28D29F-1291-5914-B146-FE53202329C4}"/>
+                    <a16:creationId xmlns:a16="http://schemas.microsoft.com/office/drawing/2014/main" xmlns="" id="{EB28D29F-1291-5914-B146-FE53202329C4}"/>
                   </a:ext>
                 </a:extLst>
               </p:cNvPr>
@@ -12123,35 +12138,35 @@
                     <a:gridCol w="1073505">
                       <a:extLst>
                         <a:ext uri="{9D8B030D-6E8A-4147-A177-3AD203B41FA5}">
-                          <a16:colId xmlns:a16="http://schemas.microsoft.com/office/drawing/2014/main" val="20000"/>
+                          <a16:colId xmlns:a16="http://schemas.microsoft.com/office/drawing/2014/main" xmlns="" val="20000"/>
                         </a:ext>
                       </a:extLst>
                     </a:gridCol>
                     <a:gridCol w="967120">
                       <a:extLst>
                         <a:ext uri="{9D8B030D-6E8A-4147-A177-3AD203B41FA5}">
-                          <a16:colId xmlns:a16="http://schemas.microsoft.com/office/drawing/2014/main" val="20001"/>
+                          <a16:colId xmlns:a16="http://schemas.microsoft.com/office/drawing/2014/main" xmlns="" val="20001"/>
                         </a:ext>
                       </a:extLst>
                     </a:gridCol>
                     <a:gridCol w="1411999">
                       <a:extLst>
                         <a:ext uri="{9D8B030D-6E8A-4147-A177-3AD203B41FA5}">
-                          <a16:colId xmlns:a16="http://schemas.microsoft.com/office/drawing/2014/main" val="20002"/>
+                          <a16:colId xmlns:a16="http://schemas.microsoft.com/office/drawing/2014/main" xmlns="" val="20002"/>
                         </a:ext>
                       </a:extLst>
                     </a:gridCol>
                     <a:gridCol w="1411999">
                       <a:extLst>
                         <a:ext uri="{9D8B030D-6E8A-4147-A177-3AD203B41FA5}">
-                          <a16:colId xmlns:a16="http://schemas.microsoft.com/office/drawing/2014/main" val="20003"/>
+                          <a16:colId xmlns:a16="http://schemas.microsoft.com/office/drawing/2014/main" xmlns="" val="20003"/>
                         </a:ext>
                       </a:extLst>
                     </a:gridCol>
                     <a:gridCol w="1411999">
                       <a:extLst>
                         <a:ext uri="{9D8B030D-6E8A-4147-A177-3AD203B41FA5}">
-                          <a16:colId xmlns:a16="http://schemas.microsoft.com/office/drawing/2014/main" val="20004"/>
+                          <a16:colId xmlns:a16="http://schemas.microsoft.com/office/drawing/2014/main" xmlns="" val="20004"/>
                         </a:ext>
                       </a:extLst>
                     </a:gridCol>
@@ -12548,7 +12563,7 @@
                     </a:tc>
                     <a:extLst>
                       <a:ext uri="{0D108BD9-81ED-4DB2-BD59-A6C34878D82A}">
-                        <a16:rowId xmlns:a16="http://schemas.microsoft.com/office/drawing/2014/main" val="10000"/>
+                        <a16:rowId xmlns:a16="http://schemas.microsoft.com/office/drawing/2014/main" xmlns="" val="10000"/>
                       </a:ext>
                     </a:extLst>
                   </a:tr>
@@ -12890,7 +12905,7 @@
                     </a:tc>
                     <a:extLst>
                       <a:ext uri="{0D108BD9-81ED-4DB2-BD59-A6C34878D82A}">
-                        <a16:rowId xmlns:a16="http://schemas.microsoft.com/office/drawing/2014/main" val="10001"/>
+                        <a16:rowId xmlns:a16="http://schemas.microsoft.com/office/drawing/2014/main" xmlns="" val="10001"/>
                       </a:ext>
                     </a:extLst>
                   </a:tr>
@@ -13232,7 +13247,7 @@
                     </a:tc>
                     <a:extLst>
                       <a:ext uri="{0D108BD9-81ED-4DB2-BD59-A6C34878D82A}">
-                        <a16:rowId xmlns:a16="http://schemas.microsoft.com/office/drawing/2014/main" val="10002"/>
+                        <a16:rowId xmlns:a16="http://schemas.microsoft.com/office/drawing/2014/main" xmlns="" val="10002"/>
                       </a:ext>
                     </a:extLst>
                   </a:tr>
@@ -13587,7 +13602,7 @@
                     </a:tc>
                     <a:extLst>
                       <a:ext uri="{0D108BD9-81ED-4DB2-BD59-A6C34878D82A}">
-                        <a16:rowId xmlns:a16="http://schemas.microsoft.com/office/drawing/2014/main" val="10003"/>
+                        <a16:rowId xmlns:a16="http://schemas.microsoft.com/office/drawing/2014/main" xmlns="" val="10003"/>
                       </a:ext>
                     </a:extLst>
                   </a:tr>
@@ -13687,7 +13702,7 @@
                     </a:tc>
                     <a:extLst>
                       <a:ext uri="{0D108BD9-81ED-4DB2-BD59-A6C34878D82A}">
-                        <a16:rowId xmlns:a16="http://schemas.microsoft.com/office/drawing/2014/main" val="10004"/>
+                        <a16:rowId xmlns:a16="http://schemas.microsoft.com/office/drawing/2014/main" xmlns="" val="10004"/>
                       </a:ext>
                     </a:extLst>
                   </a:tr>
@@ -15049,7 +15064,7 @@
               <p:cNvPr id="5" name="CaixaDeTexto 4">
                 <a:extLst>
                   <a:ext uri="{FF2B5EF4-FFF2-40B4-BE49-F238E27FC236}">
-                    <a16:creationId xmlns:a16="http://schemas.microsoft.com/office/drawing/2014/main" id="{23FA4BC7-C097-6186-8E44-F91117C6BABA}"/>
+                    <a16:creationId xmlns:a16="http://schemas.microsoft.com/office/drawing/2014/main" xmlns="" id="{23FA4BC7-C097-6186-8E44-F91117C6BABA}"/>
                   </a:ext>
                 </a:extLst>
               </p:cNvPr>
@@ -15196,7 +15211,7 @@
               <p:cNvPr id="2" name="Título 1">
                 <a:extLst>
                   <a:ext uri="{FF2B5EF4-FFF2-40B4-BE49-F238E27FC236}">
-                    <a16:creationId xmlns:a16="http://schemas.microsoft.com/office/drawing/2014/main" id="{6F3810FD-8C1E-E235-CDF3-A845D40ED979}"/>
+                    <a16:creationId xmlns:a16="http://schemas.microsoft.com/office/drawing/2014/main" xmlns="" id="{6F3810FD-8C1E-E235-CDF3-A845D40ED979}"/>
                   </a:ext>
                 </a:extLst>
               </p:cNvPr>
@@ -15284,7 +15299,7 @@
               <p:cNvPr id="4" name="Table 4">
                 <a:extLst>
                   <a:ext uri="{FF2B5EF4-FFF2-40B4-BE49-F238E27FC236}">
-                    <a16:creationId xmlns:a16="http://schemas.microsoft.com/office/drawing/2014/main" id="{F549053F-BDE4-C8D3-A996-B46C550898B5}"/>
+                    <a16:creationId xmlns:a16="http://schemas.microsoft.com/office/drawing/2014/main" xmlns="" id="{F549053F-BDE4-C8D3-A996-B46C550898B5}"/>
                   </a:ext>
                 </a:extLst>
               </p:cNvPr>
@@ -15305,35 +15320,35 @@
                     <a:gridCol w="1083731">
                       <a:extLst>
                         <a:ext uri="{9D8B030D-6E8A-4147-A177-3AD203B41FA5}">
-                          <a16:colId xmlns:a16="http://schemas.microsoft.com/office/drawing/2014/main" val="20000"/>
+                          <a16:colId xmlns:a16="http://schemas.microsoft.com/office/drawing/2014/main" xmlns="" val="20000"/>
                         </a:ext>
                       </a:extLst>
                     </a:gridCol>
                     <a:gridCol w="740353">
                       <a:extLst>
                         <a:ext uri="{9D8B030D-6E8A-4147-A177-3AD203B41FA5}">
-                          <a16:colId xmlns:a16="http://schemas.microsoft.com/office/drawing/2014/main" val="20001"/>
+                          <a16:colId xmlns:a16="http://schemas.microsoft.com/office/drawing/2014/main" xmlns="" val="20001"/>
                         </a:ext>
                       </a:extLst>
                     </a:gridCol>
                     <a:gridCol w="1262164">
                       <a:extLst>
                         <a:ext uri="{9D8B030D-6E8A-4147-A177-3AD203B41FA5}">
-                          <a16:colId xmlns:a16="http://schemas.microsoft.com/office/drawing/2014/main" val="20002"/>
+                          <a16:colId xmlns:a16="http://schemas.microsoft.com/office/drawing/2014/main" xmlns="" val="20002"/>
                         </a:ext>
                       </a:extLst>
                     </a:gridCol>
                     <a:gridCol w="1262164">
                       <a:extLst>
                         <a:ext uri="{9D8B030D-6E8A-4147-A177-3AD203B41FA5}">
-                          <a16:colId xmlns:a16="http://schemas.microsoft.com/office/drawing/2014/main" val="20003"/>
+                          <a16:colId xmlns:a16="http://schemas.microsoft.com/office/drawing/2014/main" xmlns="" val="20003"/>
                         </a:ext>
                       </a:extLst>
                     </a:gridCol>
                     <a:gridCol w="1262164">
                       <a:extLst>
                         <a:ext uri="{9D8B030D-6E8A-4147-A177-3AD203B41FA5}">
-                          <a16:colId xmlns:a16="http://schemas.microsoft.com/office/drawing/2014/main" val="20004"/>
+                          <a16:colId xmlns:a16="http://schemas.microsoft.com/office/drawing/2014/main" xmlns="" val="20004"/>
                         </a:ext>
                       </a:extLst>
                     </a:gridCol>
@@ -15778,7 +15793,7 @@
                     </a:tc>
                     <a:extLst>
                       <a:ext uri="{0D108BD9-81ED-4DB2-BD59-A6C34878D82A}">
-                        <a16:rowId xmlns:a16="http://schemas.microsoft.com/office/drawing/2014/main" val="10000"/>
+                        <a16:rowId xmlns:a16="http://schemas.microsoft.com/office/drawing/2014/main" xmlns="" val="10000"/>
                       </a:ext>
                     </a:extLst>
                   </a:tr>
@@ -16168,7 +16183,7 @@
                     </a:tc>
                     <a:extLst>
                       <a:ext uri="{0D108BD9-81ED-4DB2-BD59-A6C34878D82A}">
-                        <a16:rowId xmlns:a16="http://schemas.microsoft.com/office/drawing/2014/main" val="10001"/>
+                        <a16:rowId xmlns:a16="http://schemas.microsoft.com/office/drawing/2014/main" xmlns="" val="10001"/>
                       </a:ext>
                     </a:extLst>
                   </a:tr>
@@ -16558,7 +16573,7 @@
                     </a:tc>
                     <a:extLst>
                       <a:ext uri="{0D108BD9-81ED-4DB2-BD59-A6C34878D82A}">
-                        <a16:rowId xmlns:a16="http://schemas.microsoft.com/office/drawing/2014/main" val="10002"/>
+                        <a16:rowId xmlns:a16="http://schemas.microsoft.com/office/drawing/2014/main" xmlns="" val="10002"/>
                       </a:ext>
                     </a:extLst>
                   </a:tr>
@@ -16916,7 +16931,7 @@
                     </a:tc>
                     <a:extLst>
                       <a:ext uri="{0D108BD9-81ED-4DB2-BD59-A6C34878D82A}">
-                        <a16:rowId xmlns:a16="http://schemas.microsoft.com/office/drawing/2014/main" val="10003"/>
+                        <a16:rowId xmlns:a16="http://schemas.microsoft.com/office/drawing/2014/main" xmlns="" val="10003"/>
                       </a:ext>
                     </a:extLst>
                   </a:tr>
@@ -17016,7 +17031,7 @@
                     </a:tc>
                     <a:extLst>
                       <a:ext uri="{0D108BD9-81ED-4DB2-BD59-A6C34878D82A}">
-                        <a16:rowId xmlns:a16="http://schemas.microsoft.com/office/drawing/2014/main" val="10004"/>
+                        <a16:rowId xmlns:a16="http://schemas.microsoft.com/office/drawing/2014/main" xmlns="" val="10004"/>
                       </a:ext>
                     </a:extLst>
                   </a:tr>
@@ -18474,7 +18489,7 @@
               <p:cNvPr id="5" name="Table 5">
                 <a:extLst>
                   <a:ext uri="{FF2B5EF4-FFF2-40B4-BE49-F238E27FC236}">
-                    <a16:creationId xmlns:a16="http://schemas.microsoft.com/office/drawing/2014/main" id="{A4FF6500-B127-E5EB-2288-D345D9AB581B}"/>
+                    <a16:creationId xmlns:a16="http://schemas.microsoft.com/office/drawing/2014/main" xmlns="" id="{A4FF6500-B127-E5EB-2288-D345D9AB581B}"/>
                   </a:ext>
                 </a:extLst>
               </p:cNvPr>
@@ -18495,35 +18510,35 @@
                     <a:gridCol w="1128888">
                       <a:extLst>
                         <a:ext uri="{9D8B030D-6E8A-4147-A177-3AD203B41FA5}">
-                          <a16:colId xmlns:a16="http://schemas.microsoft.com/office/drawing/2014/main" val="20000"/>
+                          <a16:colId xmlns:a16="http://schemas.microsoft.com/office/drawing/2014/main" xmlns="" val="20000"/>
                         </a:ext>
                       </a:extLst>
                     </a:gridCol>
                     <a:gridCol w="695197">
                       <a:extLst>
                         <a:ext uri="{9D8B030D-6E8A-4147-A177-3AD203B41FA5}">
-                          <a16:colId xmlns:a16="http://schemas.microsoft.com/office/drawing/2014/main" val="20001"/>
+                          <a16:colId xmlns:a16="http://schemas.microsoft.com/office/drawing/2014/main" xmlns="" val="20001"/>
                         </a:ext>
                       </a:extLst>
                     </a:gridCol>
                     <a:gridCol w="1262164">
                       <a:extLst>
                         <a:ext uri="{9D8B030D-6E8A-4147-A177-3AD203B41FA5}">
-                          <a16:colId xmlns:a16="http://schemas.microsoft.com/office/drawing/2014/main" val="20002"/>
+                          <a16:colId xmlns:a16="http://schemas.microsoft.com/office/drawing/2014/main" xmlns="" val="20002"/>
                         </a:ext>
                       </a:extLst>
                     </a:gridCol>
                     <a:gridCol w="1262164">
                       <a:extLst>
                         <a:ext uri="{9D8B030D-6E8A-4147-A177-3AD203B41FA5}">
-                          <a16:colId xmlns:a16="http://schemas.microsoft.com/office/drawing/2014/main" val="20003"/>
+                          <a16:colId xmlns:a16="http://schemas.microsoft.com/office/drawing/2014/main" xmlns="" val="20003"/>
                         </a:ext>
                       </a:extLst>
                     </a:gridCol>
                     <a:gridCol w="1262164">
                       <a:extLst>
                         <a:ext uri="{9D8B030D-6E8A-4147-A177-3AD203B41FA5}">
-                          <a16:colId xmlns:a16="http://schemas.microsoft.com/office/drawing/2014/main" val="20004"/>
+                          <a16:colId xmlns:a16="http://schemas.microsoft.com/office/drawing/2014/main" xmlns="" val="20004"/>
                         </a:ext>
                       </a:extLst>
                     </a:gridCol>
@@ -18984,7 +18999,7 @@
                     </a:tc>
                     <a:extLst>
                       <a:ext uri="{0D108BD9-81ED-4DB2-BD59-A6C34878D82A}">
-                        <a16:rowId xmlns:a16="http://schemas.microsoft.com/office/drawing/2014/main" val="10000"/>
+                        <a16:rowId xmlns:a16="http://schemas.microsoft.com/office/drawing/2014/main" xmlns="" val="10000"/>
                       </a:ext>
                     </a:extLst>
                   </a:tr>
@@ -19390,7 +19405,7 @@
                     </a:tc>
                     <a:extLst>
                       <a:ext uri="{0D108BD9-81ED-4DB2-BD59-A6C34878D82A}">
-                        <a16:rowId xmlns:a16="http://schemas.microsoft.com/office/drawing/2014/main" val="10001"/>
+                        <a16:rowId xmlns:a16="http://schemas.microsoft.com/office/drawing/2014/main" xmlns="" val="10001"/>
                       </a:ext>
                     </a:extLst>
                   </a:tr>
@@ -19796,7 +19811,7 @@
                     </a:tc>
                     <a:extLst>
                       <a:ext uri="{0D108BD9-81ED-4DB2-BD59-A6C34878D82A}">
-                        <a16:rowId xmlns:a16="http://schemas.microsoft.com/office/drawing/2014/main" val="10002"/>
+                        <a16:rowId xmlns:a16="http://schemas.microsoft.com/office/drawing/2014/main" xmlns="" val="10002"/>
                       </a:ext>
                     </a:extLst>
                   </a:tr>
@@ -20170,7 +20185,7 @@
                     </a:tc>
                     <a:extLst>
                       <a:ext uri="{0D108BD9-81ED-4DB2-BD59-A6C34878D82A}">
-                        <a16:rowId xmlns:a16="http://schemas.microsoft.com/office/drawing/2014/main" val="10003"/>
+                        <a16:rowId xmlns:a16="http://schemas.microsoft.com/office/drawing/2014/main" xmlns="" val="10003"/>
                       </a:ext>
                     </a:extLst>
                   </a:tr>
@@ -20270,7 +20285,7 @@
                     </a:tc>
                     <a:extLst>
                       <a:ext uri="{0D108BD9-81ED-4DB2-BD59-A6C34878D82A}">
-                        <a16:rowId xmlns:a16="http://schemas.microsoft.com/office/drawing/2014/main" val="10004"/>
+                        <a16:rowId xmlns:a16="http://schemas.microsoft.com/office/drawing/2014/main" xmlns="" val="10004"/>
                       </a:ext>
                     </a:extLst>
                   </a:tr>
@@ -21776,7 +21791,7 @@
               <p:cNvPr id="6" name="CaixaDeTexto 5">
                 <a:extLst>
                   <a:ext uri="{FF2B5EF4-FFF2-40B4-BE49-F238E27FC236}">
-                    <a16:creationId xmlns:a16="http://schemas.microsoft.com/office/drawing/2014/main" id="{B7DCAE37-0B68-31FE-C4B4-15B3A38CF8F2}"/>
+                    <a16:creationId xmlns:a16="http://schemas.microsoft.com/office/drawing/2014/main" xmlns="" id="{B7DCAE37-0B68-31FE-C4B4-15B3A38CF8F2}"/>
                   </a:ext>
                 </a:extLst>
               </p:cNvPr>
@@ -21893,7 +21908,7 @@
               <p:cNvPr id="7" name="CaixaDeTexto 6">
                 <a:extLst>
                   <a:ext uri="{FF2B5EF4-FFF2-40B4-BE49-F238E27FC236}">
-                    <a16:creationId xmlns:a16="http://schemas.microsoft.com/office/drawing/2014/main" id="{FA95A716-2329-11F1-7CC2-2B3C42F20DCF}"/>
+                    <a16:creationId xmlns:a16="http://schemas.microsoft.com/office/drawing/2014/main" xmlns="" id="{FA95A716-2329-11F1-7CC2-2B3C42F20DCF}"/>
                   </a:ext>
                 </a:extLst>
               </p:cNvPr>
@@ -22044,7 +22059,7 @@
           <p:cNvPr id="2" name="Title 1">
             <a:extLst>
               <a:ext uri="{FF2B5EF4-FFF2-40B4-BE49-F238E27FC236}">
-                <a16:creationId xmlns:a16="http://schemas.microsoft.com/office/drawing/2014/main" id="{9EA478C6-7197-E66C-805B-12C1C5C166DC}"/>
+                <a16:creationId xmlns:a16="http://schemas.microsoft.com/office/drawing/2014/main" xmlns="" id="{9EA478C6-7197-E66C-805B-12C1C5C166DC}"/>
               </a:ext>
             </a:extLst>
           </p:cNvPr>
@@ -22073,7 +22088,7 @@
           <p:cNvPr id="3" name="Content Placeholder 2">
             <a:extLst>
               <a:ext uri="{FF2B5EF4-FFF2-40B4-BE49-F238E27FC236}">
-                <a16:creationId xmlns:a16="http://schemas.microsoft.com/office/drawing/2014/main" id="{2B0A3077-842E-10B4-83E8-F6B58E0934BA}"/>
+                <a16:creationId xmlns:a16="http://schemas.microsoft.com/office/drawing/2014/main" xmlns="" id="{2B0A3077-842E-10B4-83E8-F6B58E0934BA}"/>
               </a:ext>
             </a:extLst>
           </p:cNvPr>
@@ -22102,14 +22117,14 @@
           </a:p>
         </p:txBody>
       </p:sp>
-      <mc:AlternateContent xmlns:mc="http://schemas.openxmlformats.org/markup-compatibility/2006">
-        <mc:Choice xmlns:a14="http://schemas.microsoft.com/office/drawing/2010/main" Requires="a14">
+      <mc:AlternateContent xmlns:mc="http://schemas.openxmlformats.org/markup-compatibility/2006" xmlns:a14="http://schemas.microsoft.com/office/drawing/2010/main">
+        <mc:Choice Requires="a14">
           <p:sp>
             <p:nvSpPr>
               <p:cNvPr id="4" name="CaixaDeTexto 3">
                 <a:extLst>
                   <a:ext uri="{FF2B5EF4-FFF2-40B4-BE49-F238E27FC236}">
-                    <a16:creationId xmlns:a16="http://schemas.microsoft.com/office/drawing/2014/main" id="{BCF716F4-6740-06F0-4F7F-43E81B6588C9}"/>
+                    <a16:creationId xmlns:a16="http://schemas.microsoft.com/office/drawing/2014/main" xmlns="" id="{BCF716F4-6740-06F0-4F7F-43E81B6588C9}"/>
                   </a:ext>
                 </a:extLst>
               </p:cNvPr>
@@ -22181,7 +22196,7 @@
                       <m:f>
                         <m:fPr>
                           <m:ctrlPr>
-                            <a:rPr lang="pt-BR" sz="3200">
+                            <a:rPr lang="pt-BR" sz="3200" i="1">
                               <a:latin typeface="Cambria Math" panose="02040503050406030204" pitchFamily="18" charset="0"/>
                             </a:rPr>
                           </m:ctrlPr>
@@ -22322,7 +22337,7 @@
             </p:txBody>
           </p:sp>
         </mc:Choice>
-        <mc:Fallback>
+        <mc:Fallback xmlns="">
           <p:sp>
             <p:nvSpPr>
               <p:cNvPr id="4" name="CaixaDeTexto 3">
@@ -22372,7 +22387,7 @@
           <p:cNvPr id="5" name="Table 4">
             <a:extLst>
               <a:ext uri="{FF2B5EF4-FFF2-40B4-BE49-F238E27FC236}">
-                <a16:creationId xmlns:a16="http://schemas.microsoft.com/office/drawing/2014/main" id="{91DB5CB5-58D6-D6F0-CAE4-AE7FAAC84F35}"/>
+                <a16:creationId xmlns:a16="http://schemas.microsoft.com/office/drawing/2014/main" xmlns="" id="{91DB5CB5-58D6-D6F0-CAE4-AE7FAAC84F35}"/>
               </a:ext>
             </a:extLst>
           </p:cNvPr>
@@ -22401,21 +22416,21 @@
                 <a:gridCol w="863601">
                   <a:extLst>
                     <a:ext uri="{9D8B030D-6E8A-4147-A177-3AD203B41FA5}">
-                      <a16:colId xmlns:a16="http://schemas.microsoft.com/office/drawing/2014/main" val="3867026763"/>
+                      <a16:colId xmlns:a16="http://schemas.microsoft.com/office/drawing/2014/main" xmlns="" val="3867026763"/>
                     </a:ext>
                   </a:extLst>
                 </a:gridCol>
                 <a:gridCol w="863601">
                   <a:extLst>
                     <a:ext uri="{9D8B030D-6E8A-4147-A177-3AD203B41FA5}">
-                      <a16:colId xmlns:a16="http://schemas.microsoft.com/office/drawing/2014/main" val="2035180929"/>
+                      <a16:colId xmlns:a16="http://schemas.microsoft.com/office/drawing/2014/main" xmlns="" val="2035180929"/>
                     </a:ext>
                   </a:extLst>
                 </a:gridCol>
                 <a:gridCol w="863601">
                   <a:extLst>
                     <a:ext uri="{9D8B030D-6E8A-4147-A177-3AD203B41FA5}">
-                      <a16:colId xmlns:a16="http://schemas.microsoft.com/office/drawing/2014/main" val="1096411002"/>
+                      <a16:colId xmlns:a16="http://schemas.microsoft.com/office/drawing/2014/main" xmlns="" val="1096411002"/>
                     </a:ext>
                   </a:extLst>
                 </a:gridCol>
@@ -22588,7 +22603,7 @@
                 </a:tc>
                 <a:extLst>
                   <a:ext uri="{0D108BD9-81ED-4DB2-BD59-A6C34878D82A}">
-                    <a16:rowId xmlns:a16="http://schemas.microsoft.com/office/drawing/2014/main" val="3112607757"/>
+                    <a16:rowId xmlns:a16="http://schemas.microsoft.com/office/drawing/2014/main" xmlns="" val="3112607757"/>
                   </a:ext>
                 </a:extLst>
               </a:tr>
@@ -22774,7 +22789,7 @@
                 </a:tc>
                 <a:extLst>
                   <a:ext uri="{0D108BD9-81ED-4DB2-BD59-A6C34878D82A}">
-                    <a16:rowId xmlns:a16="http://schemas.microsoft.com/office/drawing/2014/main" val="324473955"/>
+                    <a16:rowId xmlns:a16="http://schemas.microsoft.com/office/drawing/2014/main" xmlns="" val="324473955"/>
                   </a:ext>
                 </a:extLst>
               </a:tr>
@@ -22946,7 +22961,7 @@
                 </a:tc>
                 <a:extLst>
                   <a:ext uri="{0D108BD9-81ED-4DB2-BD59-A6C34878D82A}">
-                    <a16:rowId xmlns:a16="http://schemas.microsoft.com/office/drawing/2014/main" val="493002121"/>
+                    <a16:rowId xmlns:a16="http://schemas.microsoft.com/office/drawing/2014/main" xmlns="" val="493002121"/>
                   </a:ext>
                 </a:extLst>
               </a:tr>
@@ -22959,7 +22974,7 @@
           <p:cNvPr id="6" name="TextBox 5">
             <a:extLst>
               <a:ext uri="{FF2B5EF4-FFF2-40B4-BE49-F238E27FC236}">
-                <a16:creationId xmlns:a16="http://schemas.microsoft.com/office/drawing/2014/main" id="{4FB9EF39-B90C-8E8A-FAA1-894F1357DF08}"/>
+                <a16:creationId xmlns:a16="http://schemas.microsoft.com/office/drawing/2014/main" xmlns="" id="{4FB9EF39-B90C-8E8A-FAA1-894F1357DF08}"/>
               </a:ext>
             </a:extLst>
           </p:cNvPr>
@@ -22995,7 +23010,7 @@
           <p:cNvPr id="7" name="TextBox 6">
             <a:extLst>
               <a:ext uri="{FF2B5EF4-FFF2-40B4-BE49-F238E27FC236}">
-                <a16:creationId xmlns:a16="http://schemas.microsoft.com/office/drawing/2014/main" id="{EE98951F-EC06-3600-8596-2C37C9D3F470}"/>
+                <a16:creationId xmlns:a16="http://schemas.microsoft.com/office/drawing/2014/main" xmlns="" id="{EE98951F-EC06-3600-8596-2C37C9D3F470}"/>
               </a:ext>
             </a:extLst>
           </p:cNvPr>
@@ -23031,7 +23046,7 @@
           <p:cNvPr id="8" name="TextBox 7">
             <a:extLst>
               <a:ext uri="{FF2B5EF4-FFF2-40B4-BE49-F238E27FC236}">
-                <a16:creationId xmlns:a16="http://schemas.microsoft.com/office/drawing/2014/main" id="{04A648ED-ACCF-A0E8-A7FF-A93266861237}"/>
+                <a16:creationId xmlns:a16="http://schemas.microsoft.com/office/drawing/2014/main" xmlns="" id="{04A648ED-ACCF-A0E8-A7FF-A93266861237}"/>
               </a:ext>
             </a:extLst>
           </p:cNvPr>
@@ -23067,7 +23082,7 @@
           <p:cNvPr id="9" name="TextBox 8">
             <a:extLst>
               <a:ext uri="{FF2B5EF4-FFF2-40B4-BE49-F238E27FC236}">
-                <a16:creationId xmlns:a16="http://schemas.microsoft.com/office/drawing/2014/main" id="{0F24060A-F1D6-9DB5-76BA-3A64C1CCFBA2}"/>
+                <a16:creationId xmlns:a16="http://schemas.microsoft.com/office/drawing/2014/main" xmlns="" id="{0F24060A-F1D6-9DB5-76BA-3A64C1CCFBA2}"/>
               </a:ext>
             </a:extLst>
           </p:cNvPr>
@@ -23103,7 +23118,7 @@
           <p:cNvPr id="10" name="TextBox 9">
             <a:extLst>
               <a:ext uri="{FF2B5EF4-FFF2-40B4-BE49-F238E27FC236}">
-                <a16:creationId xmlns:a16="http://schemas.microsoft.com/office/drawing/2014/main" id="{504D6480-6017-F7EF-CBF8-45BE5E5980C6}"/>
+                <a16:creationId xmlns:a16="http://schemas.microsoft.com/office/drawing/2014/main" xmlns="" id="{504D6480-6017-F7EF-CBF8-45BE5E5980C6}"/>
               </a:ext>
             </a:extLst>
           </p:cNvPr>
@@ -23139,7 +23154,7 @@
           <p:cNvPr id="11" name="TextBox 10">
             <a:extLst>
               <a:ext uri="{FF2B5EF4-FFF2-40B4-BE49-F238E27FC236}">
-                <a16:creationId xmlns:a16="http://schemas.microsoft.com/office/drawing/2014/main" id="{40EA34B0-3C80-7E6E-DB17-529180947558}"/>
+                <a16:creationId xmlns:a16="http://schemas.microsoft.com/office/drawing/2014/main" xmlns="" id="{40EA34B0-3C80-7E6E-DB17-529180947558}"/>
               </a:ext>
             </a:extLst>
           </p:cNvPr>
@@ -23170,6 +23185,95 @@
           </a:p>
         </p:txBody>
       </p:sp>
+      <mc:AlternateContent xmlns:mc="http://schemas.openxmlformats.org/markup-compatibility/2006">
+        <mc:Choice xmlns:a14="http://schemas.microsoft.com/office/drawing/2010/main" Requires="a14">
+          <p:sp>
+            <p:nvSpPr>
+              <p:cNvPr id="12" name="CaixaDeTexto 11"/>
+              <p:cNvSpPr txBox="1"/>
+              <p:nvPr/>
+            </p:nvSpPr>
+            <p:spPr>
+              <a:xfrm>
+                <a:off x="2841940" y="1960229"/>
+                <a:ext cx="1185004" cy="523220"/>
+              </a:xfrm>
+              <a:prstGeom prst="rect">
+                <a:avLst/>
+              </a:prstGeom>
+              <a:noFill/>
+            </p:spPr>
+            <p:txBody>
+              <a:bodyPr wrap="none" rtlCol="0">
+                <a:spAutoFit/>
+              </a:bodyPr>
+              <a:lstStyle/>
+              <a:p>
+                <a14:m>
+                  <m:oMathPara xmlns:m="http://schemas.openxmlformats.org/officeDocument/2006/math">
+                    <m:oMathParaPr>
+                      <m:jc m:val="centerGroup"/>
+                    </m:oMathParaPr>
+                    <m:oMath xmlns:m="http://schemas.openxmlformats.org/officeDocument/2006/math">
+                      <m:r>
+                        <a:rPr lang="pt-BR" sz="2800" b="0" i="1" smtClean="0">
+                          <a:latin typeface="Cambria Math" panose="02040503050406030204" pitchFamily="18" charset="0"/>
+                        </a:rPr>
+                        <m:t>𝑄</m:t>
+                      </m:r>
+                      <m:r>
+                        <a:rPr lang="pt-BR" sz="2800" b="0" i="1" smtClean="0">
+                          <a:latin typeface="Cambria Math" panose="02040503050406030204" pitchFamily="18" charset="0"/>
+                        </a:rPr>
+                        <m:t>=3</m:t>
+                      </m:r>
+                    </m:oMath>
+                  </m:oMathPara>
+                </a14:m>
+                <a:endParaRPr lang="pt-BR" sz="2800" dirty="0"/>
+              </a:p>
+            </p:txBody>
+          </p:sp>
+        </mc:Choice>
+        <mc:Fallback>
+          <p:sp>
+            <p:nvSpPr>
+              <p:cNvPr id="12" name="CaixaDeTexto 11"/>
+              <p:cNvSpPr txBox="1">
+                <a:spLocks noRot="1" noChangeAspect="1" noMove="1" noResize="1" noEditPoints="1" noAdjustHandles="1" noChangeArrowheads="1" noChangeShapeType="1" noTextEdit="1"/>
+              </p:cNvSpPr>
+              <p:nvPr/>
+            </p:nvSpPr>
+            <p:spPr>
+              <a:xfrm>
+                <a:off x="2841940" y="1960229"/>
+                <a:ext cx="1185004" cy="523220"/>
+              </a:xfrm>
+              <a:prstGeom prst="rect">
+                <a:avLst/>
+              </a:prstGeom>
+              <a:blipFill rotWithShape="0">
+                <a:blip r:embed="rId3"/>
+                <a:stretch>
+                  <a:fillRect/>
+                </a:stretch>
+              </a:blipFill>
+            </p:spPr>
+            <p:txBody>
+              <a:bodyPr/>
+              <a:lstStyle/>
+              <a:p>
+                <a:r>
+                  <a:rPr lang="pt-BR">
+                    <a:noFill/>
+                  </a:rPr>
+                  <a:t> </a:t>
+                </a:r>
+              </a:p>
+            </p:txBody>
+          </p:sp>
+        </mc:Fallback>
+      </mc:AlternateContent>
     </p:spTree>
     <p:extLst>
       <p:ext uri="{BB962C8B-B14F-4D97-AF65-F5344CB8AC3E}">
@@ -23205,7 +23309,7 @@
           <p:cNvPr id="3" name="Content Placeholder 2">
             <a:extLst>
               <a:ext uri="{FF2B5EF4-FFF2-40B4-BE49-F238E27FC236}">
-                <a16:creationId xmlns:a16="http://schemas.microsoft.com/office/drawing/2014/main" id="{21699DC6-5E81-1EFB-D850-9CA5951E88B7}"/>
+                <a16:creationId xmlns:a16="http://schemas.microsoft.com/office/drawing/2014/main" xmlns="" id="{21699DC6-5E81-1EFB-D850-9CA5951E88B7}"/>
               </a:ext>
             </a:extLst>
           </p:cNvPr>
@@ -23247,7 +23351,7 @@
           <p:cNvPr id="1026" name="Picture 2" descr="7 razões pelas quais você não deve se desesperar com a vigência imediata da  LGPD">
             <a:extLst>
               <a:ext uri="{FF2B5EF4-FFF2-40B4-BE49-F238E27FC236}">
-                <a16:creationId xmlns:a16="http://schemas.microsoft.com/office/drawing/2014/main" id="{3834F76E-882E-CE2E-2975-876D4AFD7AA4}"/>
+                <a16:creationId xmlns:a16="http://schemas.microsoft.com/office/drawing/2014/main" xmlns="" id="{3834F76E-882E-CE2E-2975-876D4AFD7AA4}"/>
               </a:ext>
             </a:extLst>
           </p:cNvPr>
@@ -23324,7 +23428,7 @@
           <p:cNvPr id="2" name="Título 1">
             <a:extLst>
               <a:ext uri="{FF2B5EF4-FFF2-40B4-BE49-F238E27FC236}">
-                <a16:creationId xmlns:a16="http://schemas.microsoft.com/office/drawing/2014/main" id="{9CD00B3E-85D7-8B25-6629-4A85FF36133A}"/>
+                <a16:creationId xmlns:a16="http://schemas.microsoft.com/office/drawing/2014/main" xmlns="" id="{9CD00B3E-85D7-8B25-6629-4A85FF36133A}"/>
               </a:ext>
             </a:extLst>
           </p:cNvPr>
@@ -23352,7 +23456,7 @@
           <p:cNvPr id="3" name="Espaço Reservado para Conteúdo 2">
             <a:extLst>
               <a:ext uri="{FF2B5EF4-FFF2-40B4-BE49-F238E27FC236}">
-                <a16:creationId xmlns:a16="http://schemas.microsoft.com/office/drawing/2014/main" id="{9730104F-E6BA-B308-644A-11A7E4939EBD}"/>
+                <a16:creationId xmlns:a16="http://schemas.microsoft.com/office/drawing/2014/main" xmlns="" id="{9730104F-E6BA-B308-644A-11A7E4939EBD}"/>
               </a:ext>
             </a:extLst>
           </p:cNvPr>
@@ -23388,7 +23492,7 @@
           <p:cNvPr id="2052" name="Picture 4" descr="Project Jupyter | Try Jupyter">
             <a:extLst>
               <a:ext uri="{FF2B5EF4-FFF2-40B4-BE49-F238E27FC236}">
-                <a16:creationId xmlns:a16="http://schemas.microsoft.com/office/drawing/2014/main" id="{FC70A9A5-A2C7-C005-C6C5-A9FF775654D9}"/>
+                <a16:creationId xmlns:a16="http://schemas.microsoft.com/office/drawing/2014/main" xmlns="" id="{FC70A9A5-A2C7-C005-C6C5-A9FF775654D9}"/>
               </a:ext>
             </a:extLst>
           </p:cNvPr>
@@ -23435,7 +23539,7 @@
           <p:cNvPr id="2056" name="Picture 8" descr="Google Colaboratory Colab - Guía Completa Español - Marketing Branding">
             <a:extLst>
               <a:ext uri="{FF2B5EF4-FFF2-40B4-BE49-F238E27FC236}">
-                <a16:creationId xmlns:a16="http://schemas.microsoft.com/office/drawing/2014/main" id="{8A007768-2032-FE11-22C9-9394A0EF02EF}"/>
+                <a16:creationId xmlns:a16="http://schemas.microsoft.com/office/drawing/2014/main" xmlns="" id="{8A007768-2032-FE11-22C9-9394A0EF02EF}"/>
               </a:ext>
             </a:extLst>
           </p:cNvPr>
@@ -23480,7 +23584,7 @@
           <p:cNvPr id="2058" name="Picture 10" descr="IT12A01: FUNDAMENTALS OF PYTHON PROGRAMMING (SF) (SYNCHRONOUS E-LEARNING) -  NTUC LearningHub">
             <a:extLst>
               <a:ext uri="{FF2B5EF4-FFF2-40B4-BE49-F238E27FC236}">
-                <a16:creationId xmlns:a16="http://schemas.microsoft.com/office/drawing/2014/main" id="{80EDF8DB-E749-8471-3ACA-2FFE3006FC46}"/>
+                <a16:creationId xmlns:a16="http://schemas.microsoft.com/office/drawing/2014/main" xmlns="" id="{80EDF8DB-E749-8471-3ACA-2FFE3006FC46}"/>
               </a:ext>
             </a:extLst>
           </p:cNvPr>
@@ -23525,7 +23629,7 @@
           <p:cNvPr id="10" name="Sinal de Adição 9">
             <a:extLst>
               <a:ext uri="{FF2B5EF4-FFF2-40B4-BE49-F238E27FC236}">
-                <a16:creationId xmlns:a16="http://schemas.microsoft.com/office/drawing/2014/main" id="{C6DC4B29-EABA-20F7-BB46-C33BEC93E2DD}"/>
+                <a16:creationId xmlns:a16="http://schemas.microsoft.com/office/drawing/2014/main" xmlns="" id="{C6DC4B29-EABA-20F7-BB46-C33BEC93E2DD}"/>
               </a:ext>
             </a:extLst>
           </p:cNvPr>
@@ -23573,7 +23677,7 @@
           <p:cNvPr id="11" name="Sinal de Adição 10">
             <a:extLst>
               <a:ext uri="{FF2B5EF4-FFF2-40B4-BE49-F238E27FC236}">
-                <a16:creationId xmlns:a16="http://schemas.microsoft.com/office/drawing/2014/main" id="{FF65B64B-136B-DCC4-8A01-509D3D5CD19F}"/>
+                <a16:creationId xmlns:a16="http://schemas.microsoft.com/office/drawing/2014/main" xmlns="" id="{FF65B64B-136B-DCC4-8A01-509D3D5CD19F}"/>
               </a:ext>
             </a:extLst>
           </p:cNvPr>
@@ -23651,7 +23755,7 @@
           <p:cNvPr id="2" name="Title 1">
             <a:extLst>
               <a:ext uri="{FF2B5EF4-FFF2-40B4-BE49-F238E27FC236}">
-                <a16:creationId xmlns:a16="http://schemas.microsoft.com/office/drawing/2014/main" id="{CF49AE95-3E0A-F9BB-A3FD-4C328EF25334}"/>
+                <a16:creationId xmlns:a16="http://schemas.microsoft.com/office/drawing/2014/main" xmlns="" id="{CF49AE95-3E0A-F9BB-A3FD-4C328EF25334}"/>
               </a:ext>
             </a:extLst>
           </p:cNvPr>
@@ -23680,7 +23784,7 @@
           <p:cNvPr id="3" name="Content Placeholder 2">
             <a:extLst>
               <a:ext uri="{FF2B5EF4-FFF2-40B4-BE49-F238E27FC236}">
-                <a16:creationId xmlns:a16="http://schemas.microsoft.com/office/drawing/2014/main" id="{A431927B-FE56-CB25-3ECF-AB5E92A7DC71}"/>
+                <a16:creationId xmlns:a16="http://schemas.microsoft.com/office/drawing/2014/main" xmlns="" id="{A431927B-FE56-CB25-3ECF-AB5E92A7DC71}"/>
               </a:ext>
             </a:extLst>
           </p:cNvPr>
@@ -23762,7 +23866,7 @@
           <p:cNvPr id="4" name="Título 1">
             <a:extLst>
               <a:ext uri="{FF2B5EF4-FFF2-40B4-BE49-F238E27FC236}">
-                <a16:creationId xmlns:a16="http://schemas.microsoft.com/office/drawing/2014/main" id="{32666AC8-2E17-4DB4-B0F5-60C640CCFD2E}"/>
+                <a16:creationId xmlns:a16="http://schemas.microsoft.com/office/drawing/2014/main" xmlns="" id="{32666AC8-2E17-4DB4-B0F5-60C640CCFD2E}"/>
               </a:ext>
             </a:extLst>
           </p:cNvPr>
@@ -23848,7 +23952,7 @@
           <p:cNvPr id="4" name="Título 1">
             <a:extLst>
               <a:ext uri="{FF2B5EF4-FFF2-40B4-BE49-F238E27FC236}">
-                <a16:creationId xmlns:a16="http://schemas.microsoft.com/office/drawing/2014/main" id="{32666AC8-2E17-4DB4-B0F5-60C640CCFD2E}"/>
+                <a16:creationId xmlns:a16="http://schemas.microsoft.com/office/drawing/2014/main" xmlns="" id="{32666AC8-2E17-4DB4-B0F5-60C640CCFD2E}"/>
               </a:ext>
             </a:extLst>
           </p:cNvPr>
@@ -23934,7 +24038,7 @@
           <p:cNvPr id="2" name="Title 1">
             <a:extLst>
               <a:ext uri="{FF2B5EF4-FFF2-40B4-BE49-F238E27FC236}">
-                <a16:creationId xmlns:a16="http://schemas.microsoft.com/office/drawing/2014/main" id="{F1CB30D0-D052-EC03-3C25-35C106AA1077}"/>
+                <a16:creationId xmlns:a16="http://schemas.microsoft.com/office/drawing/2014/main" xmlns="" id="{F1CB30D0-D052-EC03-3C25-35C106AA1077}"/>
               </a:ext>
             </a:extLst>
           </p:cNvPr>
@@ -23963,7 +24067,7 @@
           <p:cNvPr id="2050" name="Picture 2" descr="Validate me Constructive criticism permitted – @gallusrostromegalus on  Tumblr">
             <a:extLst>
               <a:ext uri="{FF2B5EF4-FFF2-40B4-BE49-F238E27FC236}">
-                <a16:creationId xmlns:a16="http://schemas.microsoft.com/office/drawing/2014/main" id="{A9C68C0F-3A42-8D60-0B8A-979695E4072E}"/>
+                <a16:creationId xmlns:a16="http://schemas.microsoft.com/office/drawing/2014/main" xmlns="" id="{A9C68C0F-3A42-8D60-0B8A-979695E4072E}"/>
               </a:ext>
             </a:extLst>
           </p:cNvPr>
@@ -24138,7 +24242,7 @@
           <p:cNvPr id="2" name="Título 1">
             <a:extLst>
               <a:ext uri="{FF2B5EF4-FFF2-40B4-BE49-F238E27FC236}">
-                <a16:creationId xmlns:a16="http://schemas.microsoft.com/office/drawing/2014/main" id="{C738E7C4-65BB-5A05-5DF4-FF60F520CB58}"/>
+                <a16:creationId xmlns:a16="http://schemas.microsoft.com/office/drawing/2014/main" xmlns="" id="{C738E7C4-65BB-5A05-5DF4-FF60F520CB58}"/>
               </a:ext>
             </a:extLst>
           </p:cNvPr>
@@ -24168,7 +24272,7 @@
               <p:cNvPr id="3" name="Espaço Reservado para Conteúdo 2">
                 <a:extLst>
                   <a:ext uri="{FF2B5EF4-FFF2-40B4-BE49-F238E27FC236}">
-                    <a16:creationId xmlns:a16="http://schemas.microsoft.com/office/drawing/2014/main" id="{40ABD154-3AFD-0036-3D3B-BDE0F6C2A332}"/>
+                    <a16:creationId xmlns:a16="http://schemas.microsoft.com/office/drawing/2014/main" xmlns="" id="{40ABD154-3AFD-0036-3D3B-BDE0F6C2A332}"/>
                   </a:ext>
                 </a:extLst>
               </p:cNvPr>
@@ -24364,7 +24468,7 @@
               <p:cNvPr id="5" name="CaixaDeTexto 4">
                 <a:extLst>
                   <a:ext uri="{FF2B5EF4-FFF2-40B4-BE49-F238E27FC236}">
-                    <a16:creationId xmlns:a16="http://schemas.microsoft.com/office/drawing/2014/main" id="{9FE2C07F-02D2-0345-E394-150F01C017C4}"/>
+                    <a16:creationId xmlns:a16="http://schemas.microsoft.com/office/drawing/2014/main" xmlns="" id="{9FE2C07F-02D2-0345-E394-150F01C017C4}"/>
                   </a:ext>
                 </a:extLst>
               </p:cNvPr>
@@ -24964,7 +25068,7 @@
           <p:cNvPr id="2" name="Título 1">
             <a:extLst>
               <a:ext uri="{FF2B5EF4-FFF2-40B4-BE49-F238E27FC236}">
-                <a16:creationId xmlns:a16="http://schemas.microsoft.com/office/drawing/2014/main" id="{C738E7C4-65BB-5A05-5DF4-FF60F520CB58}"/>
+                <a16:creationId xmlns:a16="http://schemas.microsoft.com/office/drawing/2014/main" xmlns="" id="{C738E7C4-65BB-5A05-5DF4-FF60F520CB58}"/>
               </a:ext>
             </a:extLst>
           </p:cNvPr>
@@ -24994,7 +25098,7 @@
               <p:cNvPr id="5" name="CaixaDeTexto 4">
                 <a:extLst>
                   <a:ext uri="{FF2B5EF4-FFF2-40B4-BE49-F238E27FC236}">
-                    <a16:creationId xmlns:a16="http://schemas.microsoft.com/office/drawing/2014/main" id="{9FE2C07F-02D2-0345-E394-150F01C017C4}"/>
+                    <a16:creationId xmlns:a16="http://schemas.microsoft.com/office/drawing/2014/main" xmlns="" id="{9FE2C07F-02D2-0345-E394-150F01C017C4}"/>
                   </a:ext>
                 </a:extLst>
               </p:cNvPr>
@@ -25552,7 +25656,7 @@
           <p:cNvPr id="4" name="Chave Direita 3">
             <a:extLst>
               <a:ext uri="{FF2B5EF4-FFF2-40B4-BE49-F238E27FC236}">
-                <a16:creationId xmlns:a16="http://schemas.microsoft.com/office/drawing/2014/main" id="{314F6830-34E9-8654-9AF0-D69DE9FAE980}"/>
+                <a16:creationId xmlns:a16="http://schemas.microsoft.com/office/drawing/2014/main" xmlns="" id="{314F6830-34E9-8654-9AF0-D69DE9FAE980}"/>
               </a:ext>
             </a:extLst>
           </p:cNvPr>
@@ -25596,7 +25700,7 @@
           <p:cNvPr id="6" name="CaixaDeTexto 5">
             <a:extLst>
               <a:ext uri="{FF2B5EF4-FFF2-40B4-BE49-F238E27FC236}">
-                <a16:creationId xmlns:a16="http://schemas.microsoft.com/office/drawing/2014/main" id="{AA46DBC8-FBDE-250B-240D-193F0A609C0C}"/>
+                <a16:creationId xmlns:a16="http://schemas.microsoft.com/office/drawing/2014/main" xmlns="" id="{AA46DBC8-FBDE-250B-240D-193F0A609C0C}"/>
               </a:ext>
             </a:extLst>
           </p:cNvPr>
@@ -25640,7 +25744,7 @@
           <p:cNvPr id="7" name="Chave Direita 6">
             <a:extLst>
               <a:ext uri="{FF2B5EF4-FFF2-40B4-BE49-F238E27FC236}">
-                <a16:creationId xmlns:a16="http://schemas.microsoft.com/office/drawing/2014/main" id="{E94D5995-3604-C1B4-B485-9B393568D39B}"/>
+                <a16:creationId xmlns:a16="http://schemas.microsoft.com/office/drawing/2014/main" xmlns="" id="{E94D5995-3604-C1B4-B485-9B393568D39B}"/>
               </a:ext>
             </a:extLst>
           </p:cNvPr>
@@ -25684,7 +25788,7 @@
           <p:cNvPr id="8" name="CaixaDeTexto 7">
             <a:extLst>
               <a:ext uri="{FF2B5EF4-FFF2-40B4-BE49-F238E27FC236}">
-                <a16:creationId xmlns:a16="http://schemas.microsoft.com/office/drawing/2014/main" id="{AF3B44CB-FB5A-9774-1C6B-808D8FC9AA1C}"/>
+                <a16:creationId xmlns:a16="http://schemas.microsoft.com/office/drawing/2014/main" xmlns="" id="{AF3B44CB-FB5A-9774-1C6B-808D8FC9AA1C}"/>
               </a:ext>
             </a:extLst>
           </p:cNvPr>
@@ -25728,7 +25832,7 @@
           <p:cNvPr id="3" name="TextBox 2">
             <a:extLst>
               <a:ext uri="{FF2B5EF4-FFF2-40B4-BE49-F238E27FC236}">
-                <a16:creationId xmlns:a16="http://schemas.microsoft.com/office/drawing/2014/main" id="{B69DC4B7-28AE-3B52-6F26-3A317D0DAC53}"/>
+                <a16:creationId xmlns:a16="http://schemas.microsoft.com/office/drawing/2014/main" xmlns="" id="{B69DC4B7-28AE-3B52-6F26-3A317D0DAC53}"/>
               </a:ext>
             </a:extLst>
           </p:cNvPr>
@@ -25794,7 +25898,7 @@
           <p:cNvPr id="2" name="Título 1">
             <a:extLst>
               <a:ext uri="{FF2B5EF4-FFF2-40B4-BE49-F238E27FC236}">
-                <a16:creationId xmlns:a16="http://schemas.microsoft.com/office/drawing/2014/main" id="{C738E7C4-65BB-5A05-5DF4-FF60F520CB58}"/>
+                <a16:creationId xmlns:a16="http://schemas.microsoft.com/office/drawing/2014/main" xmlns="" id="{C738E7C4-65BB-5A05-5DF4-FF60F520CB58}"/>
               </a:ext>
             </a:extLst>
           </p:cNvPr>
@@ -25824,7 +25928,7 @@
               <p:cNvPr id="3" name="Espaço Reservado para Conteúdo 2">
                 <a:extLst>
                   <a:ext uri="{FF2B5EF4-FFF2-40B4-BE49-F238E27FC236}">
-                    <a16:creationId xmlns:a16="http://schemas.microsoft.com/office/drawing/2014/main" id="{40ABD154-3AFD-0036-3D3B-BDE0F6C2A332}"/>
+                    <a16:creationId xmlns:a16="http://schemas.microsoft.com/office/drawing/2014/main" xmlns="" id="{40ABD154-3AFD-0036-3D3B-BDE0F6C2A332}"/>
                   </a:ext>
                 </a:extLst>
               </p:cNvPr>
@@ -26108,7 +26212,7 @@
               <p:cNvPr id="5" name="CaixaDeTexto 4">
                 <a:extLst>
                   <a:ext uri="{FF2B5EF4-FFF2-40B4-BE49-F238E27FC236}">
-                    <a16:creationId xmlns:a16="http://schemas.microsoft.com/office/drawing/2014/main" id="{9FE2C07F-02D2-0345-E394-150F01C017C4}"/>
+                    <a16:creationId xmlns:a16="http://schemas.microsoft.com/office/drawing/2014/main" xmlns="" id="{9FE2C07F-02D2-0345-E394-150F01C017C4}"/>
                   </a:ext>
                 </a:extLst>
               </p:cNvPr>
@@ -26678,7 +26782,7 @@
           <p:cNvPr id="4" name="Oval 3">
             <a:extLst>
               <a:ext uri="{FF2B5EF4-FFF2-40B4-BE49-F238E27FC236}">
-                <a16:creationId xmlns:a16="http://schemas.microsoft.com/office/drawing/2014/main" id="{E3C2398C-FA6E-B604-0A4E-B8DC5CF24EF7}"/>
+                <a16:creationId xmlns:a16="http://schemas.microsoft.com/office/drawing/2014/main" xmlns="" id="{E3C2398C-FA6E-B604-0A4E-B8DC5CF24EF7}"/>
               </a:ext>
             </a:extLst>
           </p:cNvPr>
@@ -26730,7 +26834,7 @@
           <p:cNvPr id="6" name="Oval 5">
             <a:extLst>
               <a:ext uri="{FF2B5EF4-FFF2-40B4-BE49-F238E27FC236}">
-                <a16:creationId xmlns:a16="http://schemas.microsoft.com/office/drawing/2014/main" id="{4BBF1D53-FE8C-A737-118B-224A249F0F55}"/>
+                <a16:creationId xmlns:a16="http://schemas.microsoft.com/office/drawing/2014/main" xmlns="" id="{4BBF1D53-FE8C-A737-118B-224A249F0F55}"/>
               </a:ext>
             </a:extLst>
           </p:cNvPr>
@@ -26812,7 +26916,7 @@
           <p:cNvPr id="2" name="Título 1">
             <a:extLst>
               <a:ext uri="{FF2B5EF4-FFF2-40B4-BE49-F238E27FC236}">
-                <a16:creationId xmlns:a16="http://schemas.microsoft.com/office/drawing/2014/main" id="{C738E7C4-65BB-5A05-5DF4-FF60F520CB58}"/>
+                <a16:creationId xmlns:a16="http://schemas.microsoft.com/office/drawing/2014/main" xmlns="" id="{C738E7C4-65BB-5A05-5DF4-FF60F520CB58}"/>
               </a:ext>
             </a:extLst>
           </p:cNvPr>
@@ -26842,7 +26946,7 @@
               <p:cNvPr id="5" name="CaixaDeTexto 4">
                 <a:extLst>
                   <a:ext uri="{FF2B5EF4-FFF2-40B4-BE49-F238E27FC236}">
-                    <a16:creationId xmlns:a16="http://schemas.microsoft.com/office/drawing/2014/main" id="{9FE2C07F-02D2-0345-E394-150F01C017C4}"/>
+                    <a16:creationId xmlns:a16="http://schemas.microsoft.com/office/drawing/2014/main" xmlns="" id="{9FE2C07F-02D2-0345-E394-150F01C017C4}"/>
                   </a:ext>
                 </a:extLst>
               </p:cNvPr>
@@ -27412,7 +27516,7 @@
           <p:cNvPr id="6" name="Oval 3">
             <a:extLst>
               <a:ext uri="{FF2B5EF4-FFF2-40B4-BE49-F238E27FC236}">
-                <a16:creationId xmlns:a16="http://schemas.microsoft.com/office/drawing/2014/main" id="{E9839706-E14C-629A-7F56-18012BB99C3A}"/>
+                <a16:creationId xmlns:a16="http://schemas.microsoft.com/office/drawing/2014/main" xmlns="" id="{E9839706-E14C-629A-7F56-18012BB99C3A}"/>
               </a:ext>
             </a:extLst>
           </p:cNvPr>
@@ -27464,7 +27568,7 @@
           <p:cNvPr id="7" name="TextBox 4">
             <a:extLst>
               <a:ext uri="{FF2B5EF4-FFF2-40B4-BE49-F238E27FC236}">
-                <a16:creationId xmlns:a16="http://schemas.microsoft.com/office/drawing/2014/main" id="{6279C33D-9270-DC3C-212E-0FD57AC45F7D}"/>
+                <a16:creationId xmlns:a16="http://schemas.microsoft.com/office/drawing/2014/main" xmlns="" id="{6279C33D-9270-DC3C-212E-0FD57AC45F7D}"/>
               </a:ext>
             </a:extLst>
           </p:cNvPr>
@@ -27500,7 +27604,7 @@
           <p:cNvPr id="8" name="Oval 5">
             <a:extLst>
               <a:ext uri="{FF2B5EF4-FFF2-40B4-BE49-F238E27FC236}">
-                <a16:creationId xmlns:a16="http://schemas.microsoft.com/office/drawing/2014/main" id="{1BD26B11-37BD-057A-7642-8513680C0B09}"/>
+                <a16:creationId xmlns:a16="http://schemas.microsoft.com/office/drawing/2014/main" xmlns="" id="{1BD26B11-37BD-057A-7642-8513680C0B09}"/>
               </a:ext>
             </a:extLst>
           </p:cNvPr>
@@ -27552,7 +27656,7 @@
           <p:cNvPr id="9" name="Freeform 6">
             <a:extLst>
               <a:ext uri="{FF2B5EF4-FFF2-40B4-BE49-F238E27FC236}">
-                <a16:creationId xmlns:a16="http://schemas.microsoft.com/office/drawing/2014/main" id="{0F0FD986-F79E-DA0A-829E-1F5A7437324A}"/>
+                <a16:creationId xmlns:a16="http://schemas.microsoft.com/office/drawing/2014/main" xmlns="" id="{0F0FD986-F79E-DA0A-829E-1F5A7437324A}"/>
               </a:ext>
             </a:extLst>
           </p:cNvPr>
@@ -27644,7 +27748,7 @@
           <p:cNvPr id="10" name="TextBox 7">
             <a:extLst>
               <a:ext uri="{FF2B5EF4-FFF2-40B4-BE49-F238E27FC236}">
-                <a16:creationId xmlns:a16="http://schemas.microsoft.com/office/drawing/2014/main" id="{30228E55-A04A-15F3-F542-24A94935CB8F}"/>
+                <a16:creationId xmlns:a16="http://schemas.microsoft.com/office/drawing/2014/main" xmlns="" id="{30228E55-A04A-15F3-F542-24A94935CB8F}"/>
               </a:ext>
             </a:extLst>
           </p:cNvPr>
@@ -27680,7 +27784,7 @@
           <p:cNvPr id="11" name="Freeform 8">
             <a:extLst>
               <a:ext uri="{FF2B5EF4-FFF2-40B4-BE49-F238E27FC236}">
-                <a16:creationId xmlns:a16="http://schemas.microsoft.com/office/drawing/2014/main" id="{DE8EF324-A6C8-6014-6A79-6F6CD536E661}"/>
+                <a16:creationId xmlns:a16="http://schemas.microsoft.com/office/drawing/2014/main" xmlns="" id="{DE8EF324-A6C8-6014-6A79-6F6CD536E661}"/>
               </a:ext>
             </a:extLst>
           </p:cNvPr>
@@ -27764,7 +27868,7 @@
               <p:cNvPr id="12" name="Rectangle 9">
                 <a:extLst>
                   <a:ext uri="{FF2B5EF4-FFF2-40B4-BE49-F238E27FC236}">
-                    <a16:creationId xmlns:a16="http://schemas.microsoft.com/office/drawing/2014/main" id="{B0A8A935-42A2-46DB-34B6-70E5007CD2FA}"/>
+                    <a16:creationId xmlns:a16="http://schemas.microsoft.com/office/drawing/2014/main" xmlns="" id="{B0A8A935-42A2-46DB-34B6-70E5007CD2FA}"/>
                   </a:ext>
                 </a:extLst>
               </p:cNvPr>
@@ -27954,7 +28058,7 @@
               <p:cNvPr id="2" name="Título 1">
                 <a:extLst>
                   <a:ext uri="{FF2B5EF4-FFF2-40B4-BE49-F238E27FC236}">
-                    <a16:creationId xmlns:a16="http://schemas.microsoft.com/office/drawing/2014/main" id="{4EAC8C3E-AFB0-15A1-EDEF-475FA3643375}"/>
+                    <a16:creationId xmlns:a16="http://schemas.microsoft.com/office/drawing/2014/main" xmlns="" id="{4EAC8C3E-AFB0-15A1-EDEF-475FA3643375}"/>
                   </a:ext>
                 </a:extLst>
               </p:cNvPr>
@@ -28045,7 +28149,7 @@
               <p:cNvPr id="3" name="Espaço Reservado para Conteúdo 2">
                 <a:extLst>
                   <a:ext uri="{FF2B5EF4-FFF2-40B4-BE49-F238E27FC236}">
-                    <a16:creationId xmlns:a16="http://schemas.microsoft.com/office/drawing/2014/main" id="{6A052458-A5D6-9055-C748-5BFDB00FC77C}"/>
+                    <a16:creationId xmlns:a16="http://schemas.microsoft.com/office/drawing/2014/main" xmlns="" id="{6A052458-A5D6-9055-C748-5BFDB00FC77C}"/>
                   </a:ext>
                 </a:extLst>
               </p:cNvPr>
@@ -28225,7 +28329,7 @@
           <p:cNvPr id="5" name="Tabela 5">
             <a:extLst>
               <a:ext uri="{FF2B5EF4-FFF2-40B4-BE49-F238E27FC236}">
-                <a16:creationId xmlns:a16="http://schemas.microsoft.com/office/drawing/2014/main" id="{744D7738-C774-F8D0-DD85-76976F9C0032}"/>
+                <a16:creationId xmlns:a16="http://schemas.microsoft.com/office/drawing/2014/main" xmlns="" id="{744D7738-C774-F8D0-DD85-76976F9C0032}"/>
               </a:ext>
             </a:extLst>
           </p:cNvPr>
@@ -28248,14 +28352,14 @@
                 <a:gridCol w="2102895">
                   <a:extLst>
                     <a:ext uri="{9D8B030D-6E8A-4147-A177-3AD203B41FA5}">
-                      <a16:colId xmlns:a16="http://schemas.microsoft.com/office/drawing/2014/main" val="2780398905"/>
+                      <a16:colId xmlns:a16="http://schemas.microsoft.com/office/drawing/2014/main" xmlns="" val="2780398905"/>
                     </a:ext>
                   </a:extLst>
                 </a:gridCol>
                 <a:gridCol w="2102895">
                   <a:extLst>
                     <a:ext uri="{9D8B030D-6E8A-4147-A177-3AD203B41FA5}">
-                      <a16:colId xmlns:a16="http://schemas.microsoft.com/office/drawing/2014/main" val="1752542230"/>
+                      <a16:colId xmlns:a16="http://schemas.microsoft.com/office/drawing/2014/main" xmlns="" val="1752542230"/>
                     </a:ext>
                   </a:extLst>
                 </a:gridCol>
@@ -28452,7 +28556,7 @@
                 </a:tc>
                 <a:extLst>
                   <a:ext uri="{0D108BD9-81ED-4DB2-BD59-A6C34878D82A}">
-                    <a16:rowId xmlns:a16="http://schemas.microsoft.com/office/drawing/2014/main" val="3952155157"/>
+                    <a16:rowId xmlns:a16="http://schemas.microsoft.com/office/drawing/2014/main" xmlns="" val="3952155157"/>
                   </a:ext>
                 </a:extLst>
               </a:tr>
@@ -28654,7 +28758,7 @@
                 </a:tc>
                 <a:extLst>
                   <a:ext uri="{0D108BD9-81ED-4DB2-BD59-A6C34878D82A}">
-                    <a16:rowId xmlns:a16="http://schemas.microsoft.com/office/drawing/2014/main" val="2169341992"/>
+                    <a16:rowId xmlns:a16="http://schemas.microsoft.com/office/drawing/2014/main" xmlns="" val="2169341992"/>
                   </a:ext>
                 </a:extLst>
               </a:tr>
@@ -28667,7 +28771,7 @@
           <p:cNvPr id="7" name="CaixaDeTexto 6">
             <a:extLst>
               <a:ext uri="{FF2B5EF4-FFF2-40B4-BE49-F238E27FC236}">
-                <a16:creationId xmlns:a16="http://schemas.microsoft.com/office/drawing/2014/main" id="{44F3702B-0FE3-BDED-62A7-35438A8F3B75}"/>
+                <a16:creationId xmlns:a16="http://schemas.microsoft.com/office/drawing/2014/main" xmlns="" id="{44F3702B-0FE3-BDED-62A7-35438A8F3B75}"/>
               </a:ext>
             </a:extLst>
           </p:cNvPr>
@@ -28705,7 +28809,7 @@
           <p:cNvPr id="9" name="CaixaDeTexto 8">
             <a:extLst>
               <a:ext uri="{FF2B5EF4-FFF2-40B4-BE49-F238E27FC236}">
-                <a16:creationId xmlns:a16="http://schemas.microsoft.com/office/drawing/2014/main" id="{1FC82D3C-E180-54E3-CEFE-B2BD9B8D3E2A}"/>
+                <a16:creationId xmlns:a16="http://schemas.microsoft.com/office/drawing/2014/main" xmlns="" id="{1FC82D3C-E180-54E3-CEFE-B2BD9B8D3E2A}"/>
               </a:ext>
             </a:extLst>
           </p:cNvPr>
@@ -28745,7 +28849,7 @@
               <p:cNvPr id="11" name="CaixaDeTexto 10">
                 <a:extLst>
                   <a:ext uri="{FF2B5EF4-FFF2-40B4-BE49-F238E27FC236}">
-                    <a16:creationId xmlns:a16="http://schemas.microsoft.com/office/drawing/2014/main" id="{D618FE73-F69F-A4D4-3E14-7C80BD56C5C9}"/>
+                    <a16:creationId xmlns:a16="http://schemas.microsoft.com/office/drawing/2014/main" xmlns="" id="{D618FE73-F69F-A4D4-3E14-7C80BD56C5C9}"/>
                   </a:ext>
                 </a:extLst>
               </p:cNvPr>
@@ -28872,7 +28976,7 @@
               <p:cNvPr id="12" name="CaixaDeTexto 11">
                 <a:extLst>
                   <a:ext uri="{FF2B5EF4-FFF2-40B4-BE49-F238E27FC236}">
-                    <a16:creationId xmlns:a16="http://schemas.microsoft.com/office/drawing/2014/main" id="{64841025-C42C-FB64-87B6-62F7C4AD612E}"/>
+                    <a16:creationId xmlns:a16="http://schemas.microsoft.com/office/drawing/2014/main" xmlns="" id="{64841025-C42C-FB64-87B6-62F7C4AD612E}"/>
                   </a:ext>
                 </a:extLst>
               </p:cNvPr>
@@ -29003,7 +29107,7 @@
               <p:cNvPr id="13" name="CaixaDeTexto 12">
                 <a:extLst>
                   <a:ext uri="{FF2B5EF4-FFF2-40B4-BE49-F238E27FC236}">
-                    <a16:creationId xmlns:a16="http://schemas.microsoft.com/office/drawing/2014/main" id="{33FF584A-410C-DBCB-7735-A7CD30A88BC6}"/>
+                    <a16:creationId xmlns:a16="http://schemas.microsoft.com/office/drawing/2014/main" xmlns="" id="{33FF584A-410C-DBCB-7735-A7CD30A88BC6}"/>
                   </a:ext>
                 </a:extLst>
               </p:cNvPr>
@@ -29130,7 +29234,7 @@
               <p:cNvPr id="14" name="CaixaDeTexto 13">
                 <a:extLst>
                   <a:ext uri="{FF2B5EF4-FFF2-40B4-BE49-F238E27FC236}">
-                    <a16:creationId xmlns:a16="http://schemas.microsoft.com/office/drawing/2014/main" id="{01118442-F1CF-69E3-68DB-2A693775C8C5}"/>
+                    <a16:creationId xmlns:a16="http://schemas.microsoft.com/office/drawing/2014/main" xmlns="" id="{01118442-F1CF-69E3-68DB-2A693775C8C5}"/>
                   </a:ext>
                 </a:extLst>
               </p:cNvPr>
@@ -29291,7 +29395,7 @@
               <p:cNvPr id="2" name="Título 1">
                 <a:extLst>
                   <a:ext uri="{FF2B5EF4-FFF2-40B4-BE49-F238E27FC236}">
-                    <a16:creationId xmlns:a16="http://schemas.microsoft.com/office/drawing/2014/main" id="{2EDB17EF-5EC1-A178-3122-9310D2C0D3C6}"/>
+                    <a16:creationId xmlns:a16="http://schemas.microsoft.com/office/drawing/2014/main" xmlns="" id="{2EDB17EF-5EC1-A178-3122-9310D2C0D3C6}"/>
                   </a:ext>
                 </a:extLst>
               </p:cNvPr>
@@ -29380,7 +29484,7 @@
           <p:cNvPr id="22" name="Imagem 21">
             <a:extLst>
               <a:ext uri="{FF2B5EF4-FFF2-40B4-BE49-F238E27FC236}">
-                <a16:creationId xmlns:a16="http://schemas.microsoft.com/office/drawing/2014/main" id="{43854156-1399-9016-BDBA-8C80710C3EC7}"/>
+                <a16:creationId xmlns:a16="http://schemas.microsoft.com/office/drawing/2014/main" xmlns="" id="{43854156-1399-9016-BDBA-8C80710C3EC7}"/>
               </a:ext>
             </a:extLst>
           </p:cNvPr>
